--- a/reports/cleanTMLE_presentation.pptx
+++ b/reports/cleanTMLE_presentation.pptx
@@ -7858,116 +7858,56 @@
 </file>
 
 <file path=ppt/theme/theme1.xml><?xml version="1.0" encoding="utf-8"?>
-<a:theme xmlns:a="http://schemas.openxmlformats.org/drawingml/2006/main" name="Office Theme">
+<a:theme xmlns:a="http://schemas.openxmlformats.org/drawingml/2006/main" name="BMGF_ki_Theme_v002">
   <a:themeElements>
-    <a:clrScheme name="Office">
+    <a:clrScheme name="HBGDki_color_v1">
       <a:dk1>
-        <a:sysClr val="windowText" lastClr="000000"/>
+        <a:srgbClr val="343131"/>
       </a:dk1>
       <a:lt1>
-        <a:sysClr val="window" lastClr="FFFFFF"/>
+        <a:srgbClr val="FFFFFF"/>
       </a:lt1>
       <a:dk2>
-        <a:srgbClr val="1F497D"/>
+        <a:srgbClr val="9B242D"/>
       </a:dk2>
       <a:lt2>
-        <a:srgbClr val="EEECE1"/>
+        <a:srgbClr val="FFFFFF"/>
       </a:lt2>
       <a:accent1>
-        <a:srgbClr val="4F81BD"/>
+        <a:srgbClr val="3086AB"/>
       </a:accent1>
       <a:accent2>
-        <a:srgbClr val="C0504D"/>
+        <a:srgbClr val="E67021"/>
       </a:accent2>
       <a:accent3>
-        <a:srgbClr val="9BBB59"/>
+        <a:srgbClr val="F29B0E"/>
       </a:accent3>
       <a:accent4>
-        <a:srgbClr val="8064A2"/>
+        <a:srgbClr val="B51F29"/>
       </a:accent4>
       <a:accent5>
-        <a:srgbClr val="4BACC6"/>
+        <a:srgbClr val="823B69"/>
       </a:accent5>
       <a:accent6>
-        <a:srgbClr val="F79646"/>
+        <a:srgbClr val="AAA092"/>
       </a:accent6>
       <a:hlink>
-        <a:srgbClr val="0000FF"/>
+        <a:srgbClr val="3086AB"/>
       </a:hlink>
       <a:folHlink>
-        <a:srgbClr val="800080"/>
+        <a:srgbClr val="823B69"/>
       </a:folHlink>
     </a:clrScheme>
-    <a:fontScheme name="Office">
+    <a:fontScheme name="Foundation PPT Fonts - Jan 2014">
       <a:majorFont>
-        <a:latin typeface="Calibri"/>
+        <a:latin typeface="Arial"/>
         <a:ea typeface=""/>
         <a:cs typeface=""/>
-        <a:font script="Jpan" typeface="ＭＳ Ｐゴシック"/>
-        <a:font script="Hang" typeface="맑은 고딕"/>
-        <a:font script="Hans" typeface="宋体"/>
-        <a:font script="Hant" typeface="新細明體"/>
-        <a:font script="Arab" typeface="Times New Roman"/>
-        <a:font script="Hebr" typeface="Times New Roman"/>
-        <a:font script="Thai" typeface="Angsana New"/>
-        <a:font script="Ethi" typeface="Nyala"/>
-        <a:font script="Beng" typeface="Vrinda"/>
-        <a:font script="Gujr" typeface="Shruti"/>
-        <a:font script="Khmr" typeface="MoolBoran"/>
-        <a:font script="Knda" typeface="Tunga"/>
-        <a:font script="Guru" typeface="Raavi"/>
-        <a:font script="Cans" typeface="Euphemia"/>
-        <a:font script="Cher" typeface="Plantagenet Cherokee"/>
-        <a:font script="Yiii" typeface="Microsoft Yi Baiti"/>
-        <a:font script="Tibt" typeface="Microsoft Himalaya"/>
-        <a:font script="Thaa" typeface="MV Boli"/>
-        <a:font script="Deva" typeface="Mangal"/>
-        <a:font script="Telu" typeface="Gautami"/>
-        <a:font script="Taml" typeface="Latha"/>
-        <a:font script="Syrc" typeface="Estrangelo Edessa"/>
-        <a:font script="Orya" typeface="Kalinga"/>
-        <a:font script="Mlym" typeface="Kartika"/>
-        <a:font script="Laoo" typeface="DokChampa"/>
-        <a:font script="Sinh" typeface="Iskoola Pota"/>
-        <a:font script="Mong" typeface="Mongolian Baiti"/>
-        <a:font script="Viet" typeface="Times New Roman"/>
-        <a:font script="Uigh" typeface="Microsoft Uighur"/>
-        <a:font script="Geor" typeface="Sylfaen"/>
       </a:majorFont>
       <a:minorFont>
-        <a:latin typeface="Calibri"/>
+        <a:latin typeface="Arial"/>
         <a:ea typeface=""/>
         <a:cs typeface=""/>
-        <a:font script="Jpan" typeface="ＭＳ Ｐゴシック"/>
-        <a:font script="Hang" typeface="맑은 고딕"/>
-        <a:font script="Hans" typeface="宋体"/>
-        <a:font script="Hant" typeface="新細明體"/>
-        <a:font script="Arab" typeface="Arial"/>
-        <a:font script="Hebr" typeface="Arial"/>
-        <a:font script="Thai" typeface="Cordia New"/>
-        <a:font script="Ethi" typeface="Nyala"/>
-        <a:font script="Beng" typeface="Vrinda"/>
-        <a:font script="Gujr" typeface="Shruti"/>
-        <a:font script="Khmr" typeface="DaunPenh"/>
-        <a:font script="Knda" typeface="Tunga"/>
-        <a:font script="Guru" typeface="Raavi"/>
-        <a:font script="Cans" typeface="Euphemia"/>
-        <a:font script="Cher" typeface="Plantagenet Cherokee"/>
-        <a:font script="Yiii" typeface="Microsoft Yi Baiti"/>
-        <a:font script="Tibt" typeface="Microsoft Himalaya"/>
-        <a:font script="Thaa" typeface="MV Boli"/>
-        <a:font script="Deva" typeface="Mangal"/>
-        <a:font script="Telu" typeface="Gautami"/>
-        <a:font script="Taml" typeface="Latha"/>
-        <a:font script="Syrc" typeface="Estrangelo Edessa"/>
-        <a:font script="Orya" typeface="Kalinga"/>
-        <a:font script="Mlym" typeface="Kartika"/>
-        <a:font script="Laoo" typeface="DokChampa"/>
-        <a:font script="Sinh" typeface="Iskoola Pota"/>
-        <a:font script="Mong" typeface="Mongolian Baiti"/>
-        <a:font script="Viet" typeface="Arial"/>
-        <a:font script="Uigh" typeface="Microsoft Uighur"/>
-        <a:font script="Geor" typeface="Sylfaen"/>
       </a:minorFont>
     </a:fontScheme>
     <a:fmtScheme name="Office">
@@ -8002,16 +7942,20 @@
           <a:gsLst>
             <a:gs pos="0">
               <a:schemeClr val="phClr">
-                <a:tint val="100000"/>
-                <a:shade val="100000"/>
+                <a:shade val="51000"/>
+                <a:satMod val="130000"/>
+              </a:schemeClr>
+            </a:gs>
+            <a:gs pos="80000">
+              <a:schemeClr val="phClr">
+                <a:shade val="93000"/>
                 <a:satMod val="130000"/>
               </a:schemeClr>
             </a:gs>
             <a:gs pos="100000">
               <a:schemeClr val="phClr">
-                <a:tint val="50000"/>
-                <a:shade val="100000"/>
-                <a:satMod val="350000"/>
+                <a:shade val="94000"/>
+                <a:satMod val="135000"/>
               </a:schemeClr>
             </a:gs>
           </a:gsLst>
@@ -8135,17 +8079,27 @@
   </a:themeElements>
   <a:objectDefaults>
     <a:spDef>
-      <a:spPr/>
-      <a:bodyPr/>
-      <a:lstStyle/>
+      <a:spPr>
+        <a:ln>
+          <a:noFill/>
+        </a:ln>
+      </a:spPr>
+      <a:bodyPr rtlCol="0" anchor="ctr"/>
+      <a:lstStyle>
+        <a:defPPr algn="ctr">
+          <a:defRPr/>
+        </a:defPPr>
+      </a:lstStyle>
       <a:style>
-        <a:lnRef idx="1">
-          <a:schemeClr val="accent1"/>
+        <a:lnRef idx="2">
+          <a:schemeClr val="accent1">
+            <a:shade val="50000"/>
+          </a:schemeClr>
         </a:lnRef>
-        <a:fillRef idx="3">
+        <a:fillRef idx="1">
           <a:schemeClr val="accent1"/>
         </a:fillRef>
-        <a:effectRef idx="2">
+        <a:effectRef idx="0">
           <a:schemeClr val="accent1"/>
         </a:effectRef>
         <a:fontRef idx="minor">
@@ -8153,27 +8107,29 @@
         </a:fontRef>
       </a:style>
     </a:spDef>
-    <a:lnDef>
-      <a:spPr/>
-      <a:bodyPr/>
-      <a:lstStyle/>
-      <a:style>
-        <a:lnRef idx="2">
-          <a:schemeClr val="accent1"/>
-        </a:lnRef>
-        <a:fillRef idx="0">
-          <a:schemeClr val="accent1"/>
-        </a:fillRef>
-        <a:effectRef idx="1">
-          <a:schemeClr val="accent1"/>
-        </a:effectRef>
-        <a:fontRef idx="minor">
-          <a:schemeClr val="tx1"/>
-        </a:fontRef>
-      </a:style>
-    </a:lnDef>
+    <a:txDef>
+      <a:spPr>
+        <a:noFill/>
+      </a:spPr>
+      <a:bodyPr wrap="none" lIns="0" tIns="0" rIns="0" bIns="0" rtlCol="0">
+        <a:spAutoFit/>
+      </a:bodyPr>
+      <a:lstStyle>
+        <a:defPPr algn="ctr">
+          <a:defRPr sz="1000" dirty="0" smtClean="0">
+            <a:latin typeface="Arial" pitchFamily="34" charset="0"/>
+            <a:cs typeface="Arial" pitchFamily="34" charset="0"/>
+          </a:defRPr>
+        </a:defPPr>
+      </a:lstStyle>
+    </a:txDef>
   </a:objectDefaults>
   <a:extraClrSchemeLst/>
+  <a:extLst>
+    <a:ext uri="{05A4C25C-085E-4340-85A3-A5531E510DB2}">
+      <thm15:themeFamily xmlns:thm15="http://schemas.microsoft.com/office/thememl/2012/main" name="BMGF_ki_Theme_v002" id="{246C18AA-3F48-4B76-BAE8-BB32034B1366}" vid="{791D82C9-73BB-4286-B133-6928F9479036}"/>
+    </a:ext>
+  </a:extLst>
 </a:theme>
 </file>
 

--- a/reports/cleanTMLE_presentation.pptx
+++ b/reports/cleanTMLE_presentation.pptx
@@ -3183,7 +3183,7 @@
             </a:pPr>
             <a:r>
               <a:rPr/>
-              <a:t>Staged, outcome-blind targeted learning with plasmode data-quality stress testing</a:t>
+              <a:t>Software layer for an outcome-blind staged workflow with plasmode DQ stress testing</a:t>
             </a:r>
             <a:br/>
             <a:br/>
@@ -3261,265 +3261,81 @@
             </a:pPr>
             <a:r>
               <a:rPr/>
-              <a:t>Governance is a stack, not a single layer</a:t>
-            </a:r>
-          </a:p>
-        </p:txBody>
-      </p:sp>
-      <p:graphicFrame>
-        <p:nvGraphicFramePr>
-          <p:cNvPr id="6" name="Content Placeholder 5"/>
-          <p:cNvGraphicFramePr>
-            <a:graphicFrameLocks noGrp="1"/>
-          </p:cNvGraphicFramePr>
+              <a:t>Where the package sits</a:t>
+            </a:r>
+          </a:p>
+        </p:txBody>
+      </p:sp>
+      <p:sp>
+        <p:nvSpPr>
+          <p:cNvPr id="3" name="Content Placeholder 2"/>
+          <p:cNvSpPr>
+            <a:spLocks noGrp="1"/>
+          </p:cNvSpPr>
           <p:nvPr>
             <p:ph idx="1"/>
           </p:nvPr>
-        </p:nvGraphicFramePr>
-        <p:xfrm>
-          <a:off x="457200" y="1193800"/>
-          <a:ext cx="8229600" cy="3390900"/>
-        </p:xfrm>
-        <a:graphic>
-          <a:graphicData uri="http://schemas.openxmlformats.org/drawingml/2006/table">
-            <a:tbl>
-              <a:tblPr firstRow="1" bandRow="1">
-                <a:tableStyleId>{5C22544A-7EE6-4342-B048-85BDC9FD1C3A}</a:tableStyleId>
-              </a:tblPr>
-              <a:tblGrid>
-                <a:gridCol w="4813300"/>
-                <a:gridCol w="3416300"/>
-              </a:tblGrid>
-              <a:tr h="0">
-                <a:tc>
-                  <a:txBody>
-                    <a:bodyPr/>
-                    <a:lstStyle/>
-                    <a:p>
-                      <a:pPr lvl="0" indent="0" marL="0">
-                        <a:buNone/>
-                      </a:pPr>
-                      <a:r>
-                        <a:rPr/>
-                        <a:t>Layer</a:t>
-                      </a:r>
-                    </a:p>
-                  </a:txBody>
-                  <a:tcPr/>
-                </a:tc>
-                <a:tc>
-                  <a:txBody>
-                    <a:bodyPr/>
-                    <a:lstStyle/>
-                    <a:p>
-                      <a:pPr lvl="0" indent="0" marL="0">
-                        <a:buNone/>
-                      </a:pPr>
-                      <a:r>
-                        <a:rPr/>
-                        <a:t>Provided by</a:t>
-                      </a:r>
-                    </a:p>
-                  </a:txBody>
-                  <a:tcPr/>
-                </a:tc>
-              </a:tr>
-              <a:tr h="0">
-                <a:tc>
-                  <a:txBody>
-                    <a:bodyPr/>
-                    <a:lstStyle/>
-                    <a:p>
-                      <a:pPr lvl="0" indent="0" marL="0">
-                        <a:buNone/>
-                      </a:pPr>
-                      <a:r>
-                        <a:rPr/>
-                        <a:t>Protocol, estimand, target trial</a:t>
-                      </a:r>
-                    </a:p>
-                  </a:txBody>
-                </a:tc>
-                <a:tc>
-                  <a:txBody>
-                    <a:bodyPr/>
-                    <a:lstStyle/>
-                    <a:p>
-                      <a:pPr lvl="0" indent="0" marL="0">
-                        <a:buNone/>
-                      </a:pPr>
-                      <a:r>
-                        <a:rPr/>
-                        <a:t>Investigator + sponsor</a:t>
-                      </a:r>
-                    </a:p>
-                  </a:txBody>
-                </a:tc>
-              </a:tr>
-              <a:tr h="0">
-                <a:tc>
-                  <a:txBody>
-                    <a:bodyPr/>
-                    <a:lstStyle/>
-                    <a:p>
-                      <a:pPr lvl="0" indent="0" marL="0">
-                        <a:buNone/>
-                      </a:pPr>
-                      <a:r>
-                        <a:rPr/>
-                        <a:t>Source-data audit, phenotype validation</a:t>
-                      </a:r>
-                    </a:p>
-                  </a:txBody>
-                </a:tc>
-                <a:tc>
-                  <a:txBody>
-                    <a:bodyPr/>
-                    <a:lstStyle/>
-                    <a:p>
-                      <a:pPr lvl="0" indent="0" marL="0">
-                        <a:buNone/>
-                      </a:pPr>
-                      <a:r>
-                        <a:rPr/>
-                        <a:t>Data custodian + external studies</a:t>
-                      </a:r>
-                    </a:p>
-                  </a:txBody>
-                </a:tc>
-              </a:tr>
-              <a:tr h="0">
-                <a:tc>
-                  <a:txBody>
-                    <a:bodyPr/>
-                    <a:lstStyle/>
-                    <a:p>
-                      <a:pPr lvl="0" indent="0" marL="0">
-                        <a:buNone/>
-                      </a:pPr>
-                      <a:r>
-                        <a:rPr/>
-                        <a:t>Role separation, access controls</a:t>
-                      </a:r>
-                    </a:p>
-                  </a:txBody>
-                </a:tc>
-                <a:tc>
-                  <a:txBody>
-                    <a:bodyPr/>
-                    <a:lstStyle/>
-                    <a:p>
-                      <a:pPr lvl="0" indent="0" marL="0">
-                        <a:buNone/>
-                      </a:pPr>
-                      <a:r>
-                        <a:rPr/>
-                        <a:t>Institution</a:t>
-                      </a:r>
-                    </a:p>
-                  </a:txBody>
-                </a:tc>
-              </a:tr>
-              <a:tr h="0">
-                <a:tc>
-                  <a:txBody>
-                    <a:bodyPr/>
-                    <a:lstStyle/>
-                    <a:p>
-                      <a:pPr lvl="0" indent="0" marL="0">
-                        <a:buNone/>
-                      </a:pPr>
-                      <a:r>
-                        <a:rPr b="1"/>
-                        <a:t>Analysis lock, audit and decision logs, pre-outcome decision</a:t>
-                      </a:r>
-                    </a:p>
-                  </a:txBody>
-                </a:tc>
-                <a:tc>
-                  <a:txBody>
-                    <a:bodyPr/>
-                    <a:lstStyle/>
-                    <a:p>
-                      <a:pPr lvl="0" indent="0" marL="0">
-                        <a:buNone/>
-                      </a:pPr>
-                      <a:r>
-                        <a:rPr b="1"/>
-                        <a:t>cleanTMLE</a:t>
-                      </a:r>
-                    </a:p>
-                  </a:txBody>
-                </a:tc>
-              </a:tr>
-              <a:tr h="0">
-                <a:tc>
-                  <a:txBody>
-                    <a:bodyPr/>
-                    <a:lstStyle/>
-                    <a:p>
-                      <a:pPr lvl="0" indent="0" marL="0">
-                        <a:buNone/>
-                      </a:pPr>
-                      <a:r>
-                        <a:rPr/>
-                        <a:t>Locked primary analysis</a:t>
-                      </a:r>
-                    </a:p>
-                  </a:txBody>
-                </a:tc>
-                <a:tc>
-                  <a:txBody>
-                    <a:bodyPr/>
-                    <a:lstStyle/>
-                    <a:p>
-                      <a:pPr lvl="0" indent="0" marL="0">
-                        <a:buNone/>
-                      </a:pPr>
-                      <a:r>
-                        <a:rPr/>
-                        <a:t>Analyst (under lock)</a:t>
-                      </a:r>
-                    </a:p>
-                  </a:txBody>
-                </a:tc>
-              </a:tr>
-              <a:tr h="0">
-                <a:tc>
-                  <a:txBody>
-                    <a:bodyPr/>
-                    <a:lstStyle/>
-                    <a:p>
-                      <a:pPr lvl="0" indent="0" marL="0">
-                        <a:buNone/>
-                      </a:pPr>
-                      <a:r>
-                        <a:rPr/>
-                        <a:t>Post-outcome sensitivity analyses</a:t>
-                      </a:r>
-                    </a:p>
-                  </a:txBody>
-                </a:tc>
-                <a:tc>
-                  <a:txBody>
-                    <a:bodyPr/>
-                    <a:lstStyle/>
-                    <a:p>
-                      <a:pPr lvl="0" indent="0" marL="0">
-                        <a:buNone/>
-                      </a:pPr>
-                      <a:r>
-                        <a:rPr/>
-                        <a:t>Analyst + reviewer</a:t>
-                      </a:r>
-                    </a:p>
-                  </a:txBody>
-                </a:tc>
-              </a:tr>
-            </a:tbl>
-          </a:graphicData>
-        </a:graphic>
-      </p:graphicFrame>
+        </p:nvSpPr>
+        <p:spPr/>
+        <p:txBody>
+          <a:bodyPr/>
+          <a:lstStyle/>
+          <a:p>
+            <a:pPr lvl="0"/>
+            <a:r>
+              <a:rPr/>
+              <a:t>The </a:t>
+            </a:r>
+            <a:r>
+              <a:rPr b="1"/>
+              <a:t>causal roadmap</a:t>
+            </a:r>
+            <a:r>
+              <a:rPr/>
+              <a:t> (Petersen 2014; Dang 2023) has six logically ordered activities: question, observed data, identification, estimand, estimator selection, pre-outcome diagnostics + decision.</a:t>
+            </a:r>
+          </a:p>
+          <a:p>
+            <a:pPr lvl="0"/>
+            <a:r>
+              <a:rPr/>
+              <a:t>cleanTMLE operates in </a:t>
+            </a:r>
+            <a:r>
+              <a:rPr b="1"/>
+              <a:t>estimator selection</a:t>
+            </a:r>
+            <a:r>
+              <a:rPr/>
+              <a:t> and </a:t>
+            </a:r>
+            <a:r>
+              <a:rPr b="1"/>
+              <a:t>pre-outcome diagnostics + decision</a:t>
+            </a:r>
+            <a:r>
+              <a:rPr/>
+              <a:t>.</a:t>
+            </a:r>
+          </a:p>
+          <a:p>
+            <a:pPr lvl="0"/>
+            <a:r>
+              <a:rPr/>
+              <a:t>Steps 1 to 4 remain external study-level work.</a:t>
+            </a:r>
+          </a:p>
+          <a:p>
+            <a:pPr lvl="0" indent="0" marL="0">
+              <a:buNone/>
+            </a:pPr>
+            <a:r>
+              <a:rPr/>
+              <a:t>cleanTMLE is the software layer of the broader Muntner-style clean-room governance, not the full governance system.</a:t>
+            </a:r>
+          </a:p>
+        </p:txBody>
+      </p:sp>
     </p:spTree>
   </p:cSld>
 </p:sld>
@@ -3552,12 +3368,7 @@
             <p:ph type="title"/>
           </p:nvPr>
         </p:nvSpPr>
-        <p:spPr>
-          <a:xfrm>
-            <a:off x="722313" y="3305176"/>
-            <a:ext cx="7772400" cy="1021556"/>
-          </a:xfrm>
-        </p:spPr>
+        <p:spPr/>
         <p:txBody>
           <a:bodyPr/>
           <a:lstStyle/>
@@ -3567,7 +3378,100 @@
             </a:pPr>
             <a:r>
               <a:rPr/>
-              <a:t>Outcome-blind staged workflow</a:t>
+              <a:t>Stages</a:t>
+            </a:r>
+          </a:p>
+        </p:txBody>
+      </p:sp>
+      <p:sp>
+        <p:nvSpPr>
+          <p:cNvPr id="3" name="Content Placeholder 2"/>
+          <p:cNvSpPr>
+            <a:spLocks noGrp="1"/>
+          </p:cNvSpPr>
+          <p:nvPr>
+            <p:ph idx="1"/>
+          </p:nvPr>
+        </p:nvSpPr>
+        <p:spPr/>
+        <p:txBody>
+          <a:bodyPr/>
+          <a:lstStyle/>
+          <a:p>
+            <a:pPr lvl="0"/>
+            <a:r>
+              <a:rPr b="1"/>
+              <a:t>Stage 1</a:t>
+            </a:r>
+            <a:r>
+              <a:rPr/>
+              <a:t> — estimand metadata and analysis lock</a:t>
+            </a:r>
+          </a:p>
+          <a:p>
+            <a:pPr lvl="0"/>
+            <a:r>
+              <a:rPr b="1"/>
+              <a:t>Stage 2a</a:t>
+            </a:r>
+            <a:r>
+              <a:rPr/>
+              <a:t> — PS / design diagnostics: overlap, balance, ESS, SMDs</a:t>
+            </a:r>
+          </a:p>
+          <a:p>
+            <a:pPr lvl="0"/>
+            <a:r>
+              <a:rPr b="1"/>
+              <a:t>Stage 2b</a:t>
+            </a:r>
+            <a:r>
+              <a:rPr/>
+              <a:t> — baseline plasmode candidate selection</a:t>
+            </a:r>
+          </a:p>
+          <a:p>
+            <a:pPr lvl="0"/>
+            <a:r>
+              <a:rPr b="1"/>
+              <a:t>Stage 2c</a:t>
+            </a:r>
+            <a:r>
+              <a:rPr/>
+              <a:t> — plasmode DQ stress test</a:t>
+            </a:r>
+          </a:p>
+          <a:p>
+            <a:pPr lvl="0"/>
+            <a:r>
+              <a:rPr b="1"/>
+              <a:t>Pre-outcome decision</a:t>
+            </a:r>
+            <a:r>
+              <a:rPr/>
+              <a:t> — GO / FLAG / STOP from the prespecified rule</a:t>
+            </a:r>
+          </a:p>
+          <a:p>
+            <a:pPr lvl="0"/>
+            <a:r>
+              <a:rPr b="1"/>
+              <a:t>Stage 4</a:t>
+            </a:r>
+            <a:r>
+              <a:rPr/>
+              <a:t> — locked primary analysis</a:t>
+            </a:r>
+          </a:p>
+          <a:p>
+            <a:pPr lvl="0"/>
+            <a:r>
+              <a:rPr b="1"/>
+              <a:t>Post-outcome</a:t>
+            </a:r>
+            <a:r>
+              <a:rPr/>
+              <a:t> — sensitivity (E-value, QBA, causal-gap), interpretation</a:t>
             </a:r>
           </a:p>
         </p:txBody>
@@ -3614,7 +3518,7 @@
             </a:pPr>
             <a:r>
               <a:rPr/>
-              <a:t>Stages</a:t>
+              <a:t>What cleanTMLE records as code artefacts</a:t>
             </a:r>
           </a:p>
         </p:txBody>
@@ -3636,67 +3540,100 @@
           <a:p>
             <a:pPr lvl="0"/>
             <a:r>
+              <a:rPr/>
+              <a:t>Fingerprinted </a:t>
+            </a:r>
+            <a:r>
               <a:rPr b="1"/>
-              <a:t>Stage 1</a:t>
-            </a:r>
-            <a:r>
-              <a:rPr/>
-              <a:t> — cohort and covariates locked; outcome not loaded</a:t>
-            </a:r>
-          </a:p>
-          <a:p>
-            <a:pPr lvl="0"/>
+              <a:t>analysis-lock object</a:t>
+            </a:r>
+            <a:r>
+              <a:rPr/>
+              <a:t> (sha256 over the lock specification)</a:t>
+            </a:r>
+          </a:p>
+          <a:p>
+            <a:pPr lvl="0"/>
+            <a:r>
+              <a:rPr/>
+              <a:t>Serialisable </a:t>
+            </a:r>
             <a:r>
               <a:rPr b="1"/>
-              <a:t>Stage 2a</a:t>
-            </a:r>
-            <a:r>
-              <a:rPr/>
-              <a:t> — propensity-score and design diagnostics; weights, overlap, SMDs</a:t>
-            </a:r>
-          </a:p>
-          <a:p>
-            <a:pPr lvl="0"/>
+              <a:t>audit trail</a:t>
+            </a:r>
+            <a:r>
+              <a:rPr/>
+              <a:t> and </a:t>
+            </a:r>
             <a:r>
               <a:rPr b="1"/>
-              <a:t>Stage 2b</a:t>
-            </a:r>
-            <a:r>
-              <a:rPr/>
-              <a:t> — plasmode candidate selection: synthetic outcomes, bias / RMSE / coverage across candidates</a:t>
-            </a:r>
-          </a:p>
-          <a:p>
-            <a:pPr lvl="0"/>
+              <a:t>decision log</a:t>
+            </a:r>
+          </a:p>
+          <a:p>
+            <a:pPr lvl="0"/>
+            <a:r>
+              <a:rPr/>
+              <a:t>Modular </a:t>
+            </a:r>
             <a:r>
               <a:rPr b="1"/>
-              <a:t>Stage 3</a:t>
-            </a:r>
-            <a:r>
-              <a:rPr/>
-              <a:t> — DQ stress test: each candidate evaluated under prespecified data-quality threats</a:t>
-            </a:r>
-          </a:p>
-          <a:p>
-            <a:pPr lvl="0"/>
+              <a:t>TMLE API</a:t>
+            </a:r>
+            <a:r>
+              <a:rPr/>
+              <a:t>: treatment fit, outcome fit, targeting, extract</a:t>
+            </a:r>
+          </a:p>
+          <a:p>
+            <a:pPr lvl="0"/>
+            <a:r>
+              <a:rPr/>
+              <a:t>Outcome-blind </a:t>
+            </a:r>
             <a:r>
               <a:rPr b="1"/>
-              <a:t>Pre-outcome decision</a:t>
-            </a:r>
-            <a:r>
-              <a:rPr/>
-              <a:t> — GO / FLAG / STOP from the prespecified rule</a:t>
+              <a:t>plasmode candidate selector</a:t>
             </a:r>
           </a:p>
           <a:p>
             <a:pPr lvl="0"/>
             <a:r>
               <a:rPr b="1"/>
-              <a:t>Stage 4</a:t>
-            </a:r>
-            <a:r>
-              <a:rPr/>
-              <a:t> — locked primary analysis; at-outcome diagnostics; post-outcome sensitivity</a:t>
+              <a:t>DQ stress test</a:t>
+            </a:r>
+            <a:r>
+              <a:rPr/>
+              <a:t> (</a:t>
+            </a:r>
+            <a:r>
+              <a:rPr>
+                <a:latin typeface="Courier"/>
+              </a:rPr>
+              <a:t>run_plasmode_dq_stress()</a:t>
+            </a:r>
+            <a:r>
+              <a:rPr/>
+              <a:t>)</a:t>
+            </a:r>
+          </a:p>
+          <a:p>
+            <a:pPr lvl="0"/>
+            <a:r>
+              <a:rPr b="1"/>
+              <a:t>Pre-outcome decision rule</a:t>
+            </a:r>
+            <a:r>
+              <a:rPr/>
+              <a:t> producing GO / FLAG / STOP</a:t>
+            </a:r>
+          </a:p>
+          <a:p>
+            <a:pPr lvl="0"/>
+            <a:r>
+              <a:rPr/>
+              <a:t>Internal outcome-access checks on Stage 4 estimators until authorised</a:t>
             </a:r>
           </a:p>
         </p:txBody>
@@ -3743,7 +3680,15 @@
             </a:pPr>
             <a:r>
               <a:rPr/>
-              <a:t>What cleanTMLE adds</a:t>
+              <a:t>What cleanTMLE does </a:t>
+            </a:r>
+            <a:r>
+              <a:rPr i="1"/>
+              <a:t>not</a:t>
+            </a:r>
+            <a:r>
+              <a:rPr/>
+              <a:t> do</a:t>
             </a:r>
           </a:p>
         </p:txBody>
@@ -3766,107 +3711,35 @@
             <a:pPr lvl="0"/>
             <a:r>
               <a:rPr/>
-              <a:t>A fingerprinted </a:t>
-            </a:r>
-            <a:r>
-              <a:rPr b="1"/>
-              <a:t>analysis-lock object</a:t>
-            </a:r>
-            <a:r>
-              <a:rPr/>
-              <a:t> (sha256 over the lock specification)</a:t>
-            </a:r>
-          </a:p>
-          <a:p>
-            <a:pPr lvl="0"/>
-            <a:r>
-              <a:rPr/>
-              <a:t>Serialisable </a:t>
-            </a:r>
-            <a:r>
-              <a:rPr b="1"/>
-              <a:t>audit trail</a:t>
-            </a:r>
-            <a:r>
-              <a:rPr/>
-              <a:t> and </a:t>
-            </a:r>
-            <a:r>
-              <a:rPr b="1"/>
-              <a:t>decision log</a:t>
-            </a:r>
-          </a:p>
-          <a:p>
-            <a:pPr lvl="0"/>
-            <a:r>
-              <a:rPr/>
-              <a:t>A </a:t>
-            </a:r>
-            <a:r>
-              <a:rPr b="1"/>
-              <a:t>modular TMLE API</a:t>
-            </a:r>
-            <a:r>
-              <a:rPr/>
-              <a:t>: fit treatment mechanism, fit outcome mechanism, target, extract</a:t>
-            </a:r>
-          </a:p>
-          <a:p>
-            <a:pPr lvl="0"/>
-            <a:r>
-              <a:rPr/>
-              <a:t>An outcome-blind </a:t>
-            </a:r>
-            <a:r>
-              <a:rPr b="1"/>
-              <a:t>plasmode candidate selector</a:t>
-            </a:r>
-          </a:p>
-          <a:p>
-            <a:pPr lvl="0"/>
-            <a:r>
-              <a:rPr/>
-              <a:t>A </a:t>
-            </a:r>
-            <a:r>
-              <a:rPr b="1"/>
-              <a:t>DQ stress test</a:t>
-            </a:r>
-            <a:r>
-              <a:rPr/>
-              <a:t> (</a:t>
-            </a:r>
-            <a:r>
-              <a:rPr>
-                <a:latin typeface="Courier"/>
-              </a:rPr>
-              <a:t>run_plasmode_dq_stress()</a:t>
-            </a:r>
-            <a:r>
-              <a:rPr/>
-              <a:t>) with four threat scenarios</a:t>
-            </a:r>
-          </a:p>
-          <a:p>
-            <a:pPr lvl="0"/>
-            <a:r>
-              <a:rPr/>
-              <a:t>A </a:t>
-            </a:r>
-            <a:r>
-              <a:rPr b="1"/>
-              <a:t>pre-outcome decision rule</a:t>
-            </a:r>
-            <a:r>
-              <a:rPr/>
-              <a:t> classifying GO / FLAG / STOP</a:t>
-            </a:r>
-          </a:p>
-          <a:p>
-            <a:pPr lvl="0"/>
-            <a:r>
-              <a:rPr/>
-              <a:t>IPW, G-computation, AIPW, IPCW-TMLE, matched TMLE — all calling an internal outcome-access check until the decision authorises Stage 4</a:t>
+              <a:t>Automate target-trial design or phenotype validation</a:t>
+            </a:r>
+          </a:p>
+          <a:p>
+            <a:pPr lvl="0"/>
+            <a:r>
+              <a:rPr/>
+              <a:t>Validate source data, linkage, or representativeness</a:t>
+            </a:r>
+          </a:p>
+          <a:p>
+            <a:pPr lvl="0"/>
+            <a:r>
+              <a:rPr/>
+              <a:t>Replace clean-room personnel governance, role separation, or access controls</a:t>
+            </a:r>
+          </a:p>
+          <a:p>
+            <a:pPr lvl="0"/>
+            <a:r>
+              <a:rPr/>
+              <a:t>Guarantee causal identification — a GO only says the prespecified diagnostics did not trigger STOP under the locked assumptions and stress scenarios</a:t>
+            </a:r>
+          </a:p>
+          <a:p>
+            <a:pPr lvl="0"/>
+            <a:r>
+              <a:rPr/>
+              <a:t>Remove the need for post-outcome sensitivity analyses (E-value, QBA, causal-gap)</a:t>
             </a:r>
           </a:p>
         </p:txBody>
@@ -3903,7 +3776,12 @@
             <p:ph type="title"/>
           </p:nvPr>
         </p:nvSpPr>
-        <p:spPr/>
+        <p:spPr>
+          <a:xfrm>
+            <a:off x="722313" y="3305176"/>
+            <a:ext cx="7772400" cy="1021556"/>
+          </a:xfrm>
+        </p:spPr>
         <p:txBody>
           <a:bodyPr/>
           <a:lstStyle/>
@@ -3913,72 +3791,7 @@
             </a:pPr>
             <a:r>
               <a:rPr/>
-              <a:t>What it does not replace</a:t>
-            </a:r>
-          </a:p>
-        </p:txBody>
-      </p:sp>
-      <p:sp>
-        <p:nvSpPr>
-          <p:cNvPr id="3" name="Content Placeholder 2"/>
-          <p:cNvSpPr>
-            <a:spLocks noGrp="1"/>
-          </p:cNvSpPr>
-          <p:nvPr>
-            <p:ph idx="1"/>
-          </p:nvPr>
-        </p:nvSpPr>
-        <p:spPr/>
-        <p:txBody>
-          <a:bodyPr/>
-          <a:lstStyle/>
-          <a:p>
-            <a:pPr lvl="0"/>
-            <a:r>
-              <a:rPr/>
-              <a:t>Target-trial design</a:t>
-            </a:r>
-          </a:p>
-          <a:p>
-            <a:pPr lvl="0"/>
-            <a:r>
-              <a:rPr/>
-              <a:t>Source-data audit, phenotype validation, linkage assessment</a:t>
-            </a:r>
-          </a:p>
-          <a:p>
-            <a:pPr lvl="0"/>
-            <a:r>
-              <a:rPr/>
-              <a:t>Independent personnel governance and role separation</a:t>
-            </a:r>
-          </a:p>
-          <a:p>
-            <a:pPr lvl="0"/>
-            <a:r>
-              <a:rPr/>
-              <a:t>Post-outcome quantitative bias analysis (E-value, QBA, causal-gap)</a:t>
-            </a:r>
-          </a:p>
-          <a:p>
-            <a:pPr lvl="0"/>
-            <a:r>
-              <a:rPr/>
-              <a:t>The proprietary </a:t>
-            </a:r>
-            <a:r>
-              <a:rPr>
-                <a:latin typeface="Courier"/>
-              </a:rPr>
-              <a:t>causalRisk</a:t>
-            </a:r>
-            <a:r>
-              <a:rPr/>
-              <a:t> package — alternative implementation of related cumulative-risk estimators; </a:t>
-            </a:r>
-            <a:r>
-              <a:rPr b="1"/>
-              <a:t>no shared code</a:t>
+              <a:t>The DQ stress test</a:t>
             </a:r>
           </a:p>
         </p:txBody>
@@ -3988,7 +3801,10 @@
 </p:sld>
 </file>
 
-<file path=ppt/slides/slide15.xml><?xml version="1.0" encoding="utf-8"?>
+<file path=ppt/slides/slide15.xml><?xml version="1.0" encoding="UTF-8"?><p:sld xmlns:a="http://schemas.openxmlformats.org/drawingml/2006/main" xmlns:r="http://schemas.openxmlformats.org/officeDocument/2006/relationships" xmlns:p="http://schemas.openxmlformats.org/presentationml/2006/main"><p:cSld><p:spTree><p:nvGrpSpPr><p:cNvPr id="1" name="" /><p:cNvGrpSpPr /><p:nvPr /></p:nvGrpSpPr><p:grpSpPr><a:xfrm><a:off x="0" y="0" /><a:ext cx="0" cy="0" /><a:chOff x="0" y="0" /><a:chExt cx="0" cy="0" /></a:xfrm></p:grpSpPr><p:sp><p:nvSpPr><p:cNvPr id="2" name="Title 1" /><p:cNvSpPr><a:spLocks noGrp="1" /></p:cNvSpPr><p:nvPr><p:ph type="title" /></p:nvPr></p:nvSpPr><p:spPr /><p:txBody><a:bodyPr /><a:lstStyle /><a:p><a:pPr lvl="0" indent="0" marL="0"><a:buNone /></a:pPr><a:r><a:rPr /><a:t>Four prespecified threats</a:t></a:r></a:p></p:txBody></p:sp><p:graphicFrame><p:nvGraphicFramePr><p:cNvPr id="6" name="Content Placeholder 5" /><p:cNvGraphicFramePr><a:graphicFrameLocks noGrp="1" /></p:cNvGraphicFramePr><p:nvPr><p:ph idx="1" /></p:nvPr></p:nvGraphicFramePr><p:xfrm><a:off x="457200" y="1193800" /><a:ext cx="8229600" cy="3390900" /></p:xfrm><a:graphic><a:graphicData uri="http://schemas.openxmlformats.org/drawingml/2006/table"><a:tbl><a:tblPr firstRow="1" bandRow="1"><a:tableStyleId>{5C22544A-7EE6-4342-B048-85BDC9FD1C3A}</a:tableStyleId></a:tblPr><a:tblGrid><a:gridCol w="2438400" /><a:gridCol w="3581400" /><a:gridCol w="2197100" /></a:tblGrid><a:tr h="0"><a:tc><a:txBody><a:bodyPr /><a:lstStyle /><a:p><a:pPr lvl="0" indent="0" marL="0"><a:buNone /></a:pPr><a:r><a:rPr /><a:t>Threat</a:t></a:r></a:p></a:txBody><a:tcPr /></a:tc><a:tc><a:txBody><a:bodyPr /><a:lstStyle /><a:p><a:pPr lvl="0" indent="0" marL="0"><a:buNone /></a:pPr><a:r><a:rPr /><a:t>Mechanism</a:t></a:r></a:p></a:txBody><a:tcPr /></a:tc><a:tc><a:txBody><a:bodyPr /><a:lstStyle /><a:p><a:pPr lvl="0" indent="0" marL="0"><a:buNone /></a:pPr><a:r><a:rPr /><a:t>Severity parameters</a:t></a:r></a:p></a:txBody><a:tcPr /></a:tc></a:tr><a:tr h="0"><a:tc><a:txBody><a:bodyPr /><a:lstStyle /><a:p><a:pPr lvl="0" indent="0" marL="0"><a:buNone /></a:pPr><a:r><a:rPr /><a:t>Covariate missingness</a:t></a:r></a:p></a:txBody></a:tc><a:tc><a:txBody><a:bodyPr /><a:lstStyle /><a:p><a:pPr lvl="0" indent="0" marL="0"><a:buNone /></a:pPr><a:r><a:rPr /><a:t>MCAR on a covariate subset, median impute</a:t></a:r></a:p></a:txBody></a:tc><a:tc><a:txBody><a:bodyPr /><a:lstStyle /><a:p><a:pPr lvl="0" indent="0" marL="0"><a:buNone /></a:pPr><a:r><a:rPr /><a:t>proportion missing</a:t></a:r></a:p></a:txBody></a:tc></a:tr><a:tr h="0"><a:tc><a:txBody><a:bodyPr /><a:lstStyle /><a:p><a:pPr lvl="0" indent="0" marL="0"><a:buNone /></a:pPr><a:r><a:rPr /><a:t>Exposure misclassification</a:t></a:r></a:p></a:txBody></a:tc><a:tc><a:txBody><a:bodyPr /><a:lstStyle /><a:p><a:pPr lvl="0" indent="0" marL="0"><a:buNone /></a:pPr><a:r><a:rPr /><a:t>Flip A with given (sens, spec)</a:t></a:r></a:p></a:txBody></a:tc><a:tc><a:txBody><a:bodyPr /><a:lstStyle /><a:p><a:pPr lvl="0" indent="0" marL="0"><a:buNone /></a:pPr><a:r><a:rPr /><a:t>(sens, spec) pairs</a:t></a:r></a:p></a:txBody></a:tc></a:tr><a:tr h="0"><a:tc><a:txBody><a:bodyPr /><a:lstStyle /><a:p><a:pPr lvl="0" indent="0" marL="0"><a:buNone /></a:pPr><a:r><a:rPr /><a:t>Outcome misclassification</a:t></a:r></a:p></a:txBody></a:tc><a:tc><a:txBody><a:bodyPr /><a:lstStyle /><a:p><a:pPr lvl="0" indent="0" marL="0"><a:buNone /></a:pPr><a:r><a:rPr /><a:t>Flip Y with given (sens, spec), optional differential</a:t></a:r></a:p></a:txBody></a:tc><a:tc><a:txBody><a:bodyPr /><a:lstStyle /><a:p><a:pPr lvl="0" indent="0" marL="0"><a:buNone /></a:pPr><a:r><a:rPr /><a:t>(sens, spec) pairs</a:t></a:r></a:p></a:txBody></a:tc></a:tr><a:tr h="0"><a:tc><a:txBody><a:bodyPr /><a:lstStyle /><a:p><a:pPr lvl="0" indent="0" marL="0"><a:buNone /></a:pPr><a:r><a:rPr /><a:t>Unmeasured confounding</a:t></a:r></a:p></a:txBody></a:tc><a:tc><a:txBody><a:bodyPr /><a:lstStyle /><a:p><a:pPr lvl="0" indent="0" marL="0"><a:buNone /></a:pPr><a:r><a:rPr /><a:t>Latent U shifts both A and Y</a:t></a:r></a:p></a:txBody></a:tc><a:tc><a:txBody><a:bodyPr /><a:lstStyle /><a:p><a:pPr lvl="0" indent="0" marL="0"><a:buNone /></a:pPr><a14:m><m:oMath xmlns:m="http://schemas.openxmlformats.org/officeDocument/2006/math"><m:sSub><m:e><m:r><m:t>β</m:t></m:r></m:e><m:sub><m:r><m:t>U</m:t></m:r><m:r><m:t>A</m:t></m:r></m:sub></m:sSub></m:oMath></a14:m><a:r><a:rPr /><a:t>, </a:t></a:r><a14:m><m:oMath xmlns:m="http://schemas.openxmlformats.org/officeDocument/2006/math"><m:sSub><m:e><m:r><m:t>β</m:t></m:r></m:e><m:sub><m:r><m:t>U</m:t></m:r><m:r><m:t>Y</m:t></m:r></m:sub></m:sSub></m:oMath></a14:m></a:p></a:txBody></a:tc></a:tr></a:tbl></a:graphicData></a:graphic></p:graphicFrame></p:spTree></p:cSld></p:sld>
+</file>
+
+<file path=ppt/slides/slide16.xml><?xml version="1.0" encoding="utf-8"?>
 <p:sld xmlns:a="http://schemas.openxmlformats.org/drawingml/2006/main" xmlns:r="http://schemas.openxmlformats.org/officeDocument/2006/relationships" xmlns:p="http://schemas.openxmlformats.org/presentationml/2006/main">
   <p:cSld>
     <p:spTree>
@@ -4007,20 +3823,15 @@
       </p:grpSpPr>
       <p:sp>
         <p:nvSpPr>
-          <p:cNvPr id="2" name="Title 1"/>
-          <p:cNvSpPr>
-            <a:spLocks noGrp="1"/>
-          </p:cNvSpPr>
-          <p:nvPr>
-            <p:ph type="title"/>
-          </p:nvPr>
-        </p:nvSpPr>
-        <p:spPr>
-          <a:xfrm>
-            <a:off x="722313" y="3305176"/>
-            <a:ext cx="7772400" cy="1021556"/>
-          </a:xfrm>
-        </p:spPr>
+          <p:cNvPr id="3" name="Content Placeholder 2"/>
+          <p:cNvSpPr>
+            <a:spLocks noGrp="1"/>
+          </p:cNvSpPr>
+          <p:nvPr>
+            <p:ph idx="1"/>
+          </p:nvPr>
+        </p:nvSpPr>
+        <p:spPr/>
         <p:txBody>
           <a:bodyPr/>
           <a:lstStyle/>
@@ -4030,7 +3841,7 @@
             </a:pPr>
             <a:r>
               <a:rPr/>
-              <a:t>The DQ stress test</a:t>
+              <a:t>Each cell reports the same triple as the baseline plasmode: bias, RMSE, coverage.</a:t>
             </a:r>
           </a:p>
         </p:txBody>
@@ -4038,9 +3849,6 @@
     </p:spTree>
   </p:cSld>
 </p:sld>
-</file>
-
-<file path=ppt/slides/slide16.xml><?xml version="1.0" encoding="UTF-8"?><p:sld xmlns:a="http://schemas.openxmlformats.org/drawingml/2006/main" xmlns:r="http://schemas.openxmlformats.org/officeDocument/2006/relationships" xmlns:p="http://schemas.openxmlformats.org/presentationml/2006/main"><p:cSld><p:spTree><p:nvGrpSpPr><p:cNvPr id="1" name="" /><p:cNvGrpSpPr /><p:nvPr /></p:nvGrpSpPr><p:grpSpPr><a:xfrm><a:off x="0" y="0" /><a:ext cx="0" cy="0" /><a:chOff x="0" y="0" /><a:chExt cx="0" cy="0" /></a:xfrm></p:grpSpPr><p:sp><p:nvSpPr><p:cNvPr id="2" name="Title 1" /><p:cNvSpPr><a:spLocks noGrp="1" /></p:cNvSpPr><p:nvPr><p:ph type="title" /></p:nvPr></p:nvSpPr><p:spPr /><p:txBody><a:bodyPr /><a:lstStyle /><a:p><a:pPr lvl="0" indent="0" marL="0"><a:buNone /></a:pPr><a:r><a:rPr /><a:t>Four prespecified threats</a:t></a:r></a:p></p:txBody></p:sp><p:graphicFrame><p:nvGraphicFramePr><p:cNvPr id="6" name="Content Placeholder 5" /><p:cNvGraphicFramePr><a:graphicFrameLocks noGrp="1" /></p:cNvGraphicFramePr><p:nvPr><p:ph idx="1" /></p:nvPr></p:nvGraphicFramePr><p:xfrm><a:off x="457200" y="1193800" /><a:ext cx="8229600" cy="3390900" /></p:xfrm><a:graphic><a:graphicData uri="http://schemas.openxmlformats.org/drawingml/2006/table"><a:tbl><a:tblPr firstRow="1" bandRow="1"><a:tableStyleId>{5C22544A-7EE6-4342-B048-85BDC9FD1C3A}</a:tableStyleId></a:tblPr><a:tblGrid><a:gridCol w="2438400" /><a:gridCol w="3581400" /><a:gridCol w="2197100" /></a:tblGrid><a:tr h="0"><a:tc><a:txBody><a:bodyPr /><a:lstStyle /><a:p><a:pPr lvl="0" indent="0" marL="0"><a:buNone /></a:pPr><a:r><a:rPr /><a:t>Threat</a:t></a:r></a:p></a:txBody><a:tcPr /></a:tc><a:tc><a:txBody><a:bodyPr /><a:lstStyle /><a:p><a:pPr lvl="0" indent="0" marL="0"><a:buNone /></a:pPr><a:r><a:rPr /><a:t>Mechanism</a:t></a:r></a:p></a:txBody><a:tcPr /></a:tc><a:tc><a:txBody><a:bodyPr /><a:lstStyle /><a:p><a:pPr lvl="0" indent="0" marL="0"><a:buNone /></a:pPr><a:r><a:rPr /><a:t>Severity parameters</a:t></a:r></a:p></a:txBody><a:tcPr /></a:tc></a:tr><a:tr h="0"><a:tc><a:txBody><a:bodyPr /><a:lstStyle /><a:p><a:pPr lvl="0" indent="0" marL="0"><a:buNone /></a:pPr><a:r><a:rPr /><a:t>Covariate missingness</a:t></a:r></a:p></a:txBody></a:tc><a:tc><a:txBody><a:bodyPr /><a:lstStyle /><a:p><a:pPr lvl="0" indent="0" marL="0"><a:buNone /></a:pPr><a:r><a:rPr /><a:t>MCAR on a covariate subset, median impute</a:t></a:r></a:p></a:txBody></a:tc><a:tc><a:txBody><a:bodyPr /><a:lstStyle /><a:p><a:pPr lvl="0" indent="0" marL="0"><a:buNone /></a:pPr><a:r><a:rPr /><a:t>proportion missing</a:t></a:r></a:p></a:txBody></a:tc></a:tr><a:tr h="0"><a:tc><a:txBody><a:bodyPr /><a:lstStyle /><a:p><a:pPr lvl="0" indent="0" marL="0"><a:buNone /></a:pPr><a:r><a:rPr /><a:t>Exposure misclassification</a:t></a:r></a:p></a:txBody></a:tc><a:tc><a:txBody><a:bodyPr /><a:lstStyle /><a:p><a:pPr lvl="0" indent="0" marL="0"><a:buNone /></a:pPr><a:r><a:rPr /><a:t>Flip A with given (sens, spec)</a:t></a:r></a:p></a:txBody></a:tc><a:tc><a:txBody><a:bodyPr /><a:lstStyle /><a:p><a:pPr lvl="0" indent="0" marL="0"><a:buNone /></a:pPr><a:r><a:rPr /><a:t>(sens, spec) pairs</a:t></a:r></a:p></a:txBody></a:tc></a:tr><a:tr h="0"><a:tc><a:txBody><a:bodyPr /><a:lstStyle /><a:p><a:pPr lvl="0" indent="0" marL="0"><a:buNone /></a:pPr><a:r><a:rPr /><a:t>Outcome misclassification</a:t></a:r></a:p></a:txBody></a:tc><a:tc><a:txBody><a:bodyPr /><a:lstStyle /><a:p><a:pPr lvl="0" indent="0" marL="0"><a:buNone /></a:pPr><a:r><a:rPr /><a:t>Flip Y with given (sens, spec), optional differential</a:t></a:r></a:p></a:txBody></a:tc><a:tc><a:txBody><a:bodyPr /><a:lstStyle /><a:p><a:pPr lvl="0" indent="0" marL="0"><a:buNone /></a:pPr><a:r><a:rPr /><a:t>(sens, spec) pairs</a:t></a:r></a:p></a:txBody></a:tc></a:tr><a:tr h="0"><a:tc><a:txBody><a:bodyPr /><a:lstStyle /><a:p><a:pPr lvl="0" indent="0" marL="0"><a:buNone /></a:pPr><a:r><a:rPr /><a:t>Unmeasured confounding</a:t></a:r></a:p></a:txBody></a:tc><a:tc><a:txBody><a:bodyPr /><a:lstStyle /><a:p><a:pPr lvl="0" indent="0" marL="0"><a:buNone /></a:pPr><a:r><a:rPr /><a:t>Latent U shifts both A and Y</a:t></a:r></a:p></a:txBody></a:tc><a:tc><a:txBody><a:bodyPr /><a:lstStyle /><a:p><a:pPr lvl="0" indent="0" marL="0"><a:buNone /></a:pPr><a14:m><m:oMath xmlns:m="http://schemas.openxmlformats.org/officeDocument/2006/math"><m:sSub><m:e><m:r><m:t>β</m:t></m:r></m:e><m:sub><m:r><m:t>U</m:t></m:r><m:r><m:t>A</m:t></m:r></m:sub></m:sSub></m:oMath></a14:m><a:r><a:rPr /><a:t>, </a:t></a:r><a14:m><m:oMath xmlns:m="http://schemas.openxmlformats.org/officeDocument/2006/math"><m:sSub><m:e><m:r><m:t>β</m:t></m:r></m:e><m:sub><m:r><m:t>U</m:t></m:r><m:r><m:t>Y</m:t></m:r></m:sub></m:sSub></m:oMath></a14:m></a:p></a:txBody></a:tc></a:tr></a:tbl></a:graphicData></a:graphic></p:graphicFrame></p:spTree></p:cSld></p:sld>
 </file>
 
 <file path=ppt/slides/slide17.xml><?xml version="1.0" encoding="utf-8"?>
@@ -4062,6 +3870,31 @@
       </p:grpSpPr>
       <p:sp>
         <p:nvSpPr>
+          <p:cNvPr id="2" name="Title 1"/>
+          <p:cNvSpPr>
+            <a:spLocks noGrp="1"/>
+          </p:cNvSpPr>
+          <p:nvPr>
+            <p:ph type="title"/>
+          </p:nvPr>
+        </p:nvSpPr>
+        <p:spPr/>
+        <p:txBody>
+          <a:bodyPr/>
+          <a:lstStyle/>
+          <a:p>
+            <a:pPr lvl="0" indent="0" marL="0">
+              <a:buNone/>
+            </a:pPr>
+            <a:r>
+              <a:rPr/>
+              <a:t>The information loop</a:t>
+            </a:r>
+          </a:p>
+        </p:txBody>
+      </p:sp>
+      <p:sp>
+        <p:nvSpPr>
           <p:cNvPr id="3" name="Content Placeholder 2"/>
           <p:cNvSpPr>
             <a:spLocks noGrp="1"/>
@@ -4075,12 +3908,57 @@
           <a:bodyPr/>
           <a:lstStyle/>
           <a:p>
-            <a:pPr lvl="0" indent="0" marL="0">
-              <a:buNone/>
+            <a:pPr lvl="0" indent="-342900" marL="342900">
+              <a:buAutoNum type="arabicPeriod"/>
             </a:pPr>
             <a:r>
               <a:rPr/>
-              <a:t>Each cell produces the same triple — bias, RMSE, coverage — as the baseline plasmode, on the same scale.</a:t>
+              <a:t>Fit-for-purpose review identifies plausible threats.</a:t>
+            </a:r>
+          </a:p>
+          <a:p>
+            <a:pPr lvl="0" indent="-342900" marL="342900">
+              <a:buAutoNum type="arabicPeriod"/>
+            </a:pPr>
+            <a:r>
+              <a:rPr/>
+              <a:t>Threats are translated into numerical severity ranges.</a:t>
+            </a:r>
+          </a:p>
+          <a:p>
+            <a:pPr lvl="0" indent="-342900" marL="342900">
+              <a:buAutoNum type="arabicPeriod"/>
+            </a:pPr>
+            <a:r>
+              <a:rPr/>
+              <a:t>The severity ranges are locked.</a:t>
+            </a:r>
+          </a:p>
+          <a:p>
+            <a:pPr lvl="0" indent="-342900" marL="342900">
+              <a:buAutoNum type="arabicPeriod"/>
+            </a:pPr>
+            <a:r>
+              <a:rPr/>
+              <a:t>Synthetic outcomes are generated and perturbed under each scenario.</a:t>
+            </a:r>
+          </a:p>
+          <a:p>
+            <a:pPr lvl="0" indent="-342900" marL="342900">
+              <a:buAutoNum type="arabicPeriod"/>
+            </a:pPr>
+            <a:r>
+              <a:rPr/>
+              <a:t>Candidate estimators are evaluated using the same metrics as the baseline plasmode.</a:t>
+            </a:r>
+          </a:p>
+          <a:p>
+            <a:pPr lvl="0" indent="-342900" marL="342900">
+              <a:buAutoNum type="arabicPeriod"/>
+            </a:pPr>
+            <a:r>
+              <a:rPr/>
+              <a:t>The pre-outcome decision rule applies the prespecified thresholds.</a:t>
             </a:r>
           </a:p>
         </p:txBody>
@@ -4127,7 +4005,7 @@
             </a:pPr>
             <a:r>
               <a:rPr/>
-              <a:t>How severity ranges are chosen</a:t>
+              <a:t>Where severity ranges come from</a:t>
             </a:r>
           </a:p>
         </p:txBody>
@@ -4173,7 +4051,7 @@
             </a:pPr>
             <a:r>
               <a:rPr/>
-              <a:t>The package records the values in use as part of the lock fingerprint, so a reviewer can see what numerical assumptions drove the decision.</a:t>
+              <a:t>The package records the values in use as part of the lock fingerprint.</a:t>
             </a:r>
           </a:p>
         </p:txBody>
@@ -4281,7 +4159,7 @@
             </a:pPr>
             <a:r>
               <a:rPr/>
-              <a:t>Those remain study-level evaluations. The DQ stress test is a quantitative supplement, not a substitute.</a:t>
+              <a:t>The DQ stress test is a quantitative supplement to fit-for-purpose review, not a substitute.</a:t>
             </a:r>
           </a:p>
         </p:txBody>
@@ -4328,7 +4206,7 @@
             </a:pPr>
             <a:r>
               <a:rPr/>
-              <a:t>Why this talk</a:t>
+              <a:t>The problem</a:t>
             </a:r>
           </a:p>
         </p:txBody>
@@ -4348,43 +4226,50 @@
           <a:bodyPr/>
           <a:lstStyle/>
           <a:p>
-            <a:pPr lvl="0"/>
-            <a:r>
-              <a:rPr/>
-              <a:t>Real-world evidence (RWE) studies require many analytic decisions before any estimate is produced</a:t>
-            </a:r>
-          </a:p>
-          <a:p>
-            <a:pPr lvl="0"/>
-            <a:r>
-              <a:rPr/>
-              <a:t>Target-trial design, identification, estimator choice, and data-fitness review are usually documented in </a:t>
-            </a:r>
+            <a:pPr lvl="0" indent="0" marL="0">
+              <a:buNone/>
+            </a:pPr>
+            <a:r>
+              <a:rPr/>
+              <a:t>RWE studies typically separate three activities:</a:t>
+            </a:r>
+          </a:p>
+          <a:p>
+            <a:pPr lvl="0"/>
             <a:r>
               <a:rPr b="1"/>
-              <a:t>separate</a:t>
-            </a:r>
-            <a:r>
-              <a:rPr/>
-              <a:t> artefacts</a:t>
-            </a:r>
-          </a:p>
-          <a:p>
-            <a:pPr lvl="0"/>
-            <a:r>
-              <a:rPr/>
-              <a:t>Reviewers cannot see how the pieces connect</a:t>
+              <a:t>Protocol / target-trial design</a:t>
             </a:r>
           </a:p>
           <a:p>
             <a:pPr lvl="0"/>
             <a:r>
               <a:rPr b="1"/>
-              <a:t>cleanTMLE</a:t>
-            </a:r>
-            <a:r>
-              <a:rPr/>
-              <a:t> is a small R package that turns the prespecified decisions into a single reproducible record, and adds a quantitative stress test for data-quality threats before outcome access</a:t>
+              <a:t>Qualitative fit-for-purpose data review</a:t>
+            </a:r>
+            <a:r>
+              <a:rPr/>
+              <a:t> (SPIFD2, HARPER, START-RWE)</a:t>
+            </a:r>
+          </a:p>
+          <a:p>
+            <a:pPr lvl="0"/>
+            <a:r>
+              <a:rPr b="1"/>
+              <a:t>Estimator selection</a:t>
+            </a:r>
+            <a:r>
+              <a:rPr/>
+              <a:t> (PS diagnostics; increasingly, plasmode simulation)</a:t>
+            </a:r>
+          </a:p>
+          <a:p>
+            <a:pPr lvl="0" indent="0" marL="0">
+              <a:buNone/>
+            </a:pPr>
+            <a:r>
+              <a:rPr/>
+              <a:t>Reviewers then have difficulty seeing whether the chosen estimator remains credible under the same data-quality concerns documented in the protocol.</a:t>
             </a:r>
           </a:p>
         </p:txBody>
@@ -4533,7 +4418,7 @@
                 </a14:m>
                 <a:r>
                   <a:rPr/>
-                  <a:t> observations per replicate, 200 replicates per scenario</a:t>
+                  <a:t> per replicate, 200 replicates per scenario</a:t>
                 </a:r>
               </a:p>
               <a:p>
@@ -4558,7 +4443,7 @@
                 </a:r>
                 <a:r>
                   <a:rPr/>
-                  <a:t>: good overlap (textbook benchmark)</a:t>
+                  <a:t>: good overlap (benchmark)</a:t>
                 </a:r>
               </a:p>
               <a:p>
@@ -4620,7 +4505,7 @@
                 <a:pPr lvl="0"/>
                 <a:r>
                   <a:rPr/>
-                  <a:t>For each scenario, the full DQ stress sweep at </a:t>
+                  <a:t>DQ stress sweep at </a:t>
                 </a:r>
                 <a14:m>
                   <m:oMath xmlns:m="http://schemas.openxmlformats.org/officeDocument/2006/math">
@@ -4651,6 +4536,10 @@
                     </m:r>
                   </m:oMath>
                 </a14:m>
+                <a:r>
+                  <a:rPr/>
+                  <a:t> for each</a:t>
+                </a:r>
               </a:p>
             </p:txBody>
           </p:sp>
@@ -4698,7 +4587,7 @@
             </a:pPr>
             <a:r>
               <a:rPr/>
-              <a:t>Scenario A — good overlap</a:t>
+              <a:t>Scenario A: benchmark</a:t>
             </a:r>
           </a:p>
         </p:txBody>
@@ -4742,7 +4631,7 @@
             <a:pPr lvl="0"/>
             <a:r>
               <a:rPr/>
-              <a:t>Crude estimator has substantial residual confounding; CIs do not cover at 95%</a:t>
+              <a:t>Crude estimator has substantial residual confounding</a:t>
             </a:r>
           </a:p>
           <a:p>
@@ -4750,10 +4639,6 @@
             <a:r>
               <a:rPr b="1"/>
               <a:t>Decision: GO</a:t>
-            </a:r>
-            <a:r>
-              <a:rPr/>
-              <a:t> — textbook benchmark behaviour</a:t>
             </a:r>
           </a:p>
         </p:txBody>
@@ -4800,7 +4685,7 @@
             </a:pPr>
             <a:r>
               <a:rPr/>
-              <a:t>Scenario B — marginal overlap</a:t>
+              <a:t>Scenario B: marginal overlap</a:t>
             </a:r>
           </a:p>
         </p:txBody>
@@ -4823,20 +4708,6 @@
             <a:pPr lvl="0"/>
             <a:r>
               <a:rPr/>
-              <a:t>Crude shifts further from truth</a:t>
-            </a:r>
-          </a:p>
-          <a:p>
-            <a:pPr lvl="0"/>
-            <a:r>
-              <a:rPr/>
-              <a:t>IPTW shows wider CIs reflecting heavier weights; SE-to-SD ratio above one</a:t>
-            </a:r>
-          </a:p>
-          <a:p>
-            <a:pPr lvl="0"/>
-            <a:r>
-              <a:rPr/>
               <a:t>TMLE and CV-TMLE hold bias small relative to empirical SD</a:t>
             </a:r>
           </a:p>
@@ -4844,14 +4715,21 @@
             <a:pPr lvl="0"/>
             <a:r>
               <a:rPr/>
-              <a:t>Matched TMLE shows conservative SE (ratio ≈ 2): the post-match TMLE step ignores the matching draw</a:t>
-            </a:r>
-          </a:p>
-          <a:p>
-            <a:pPr lvl="0"/>
-            <a:r>
-              <a:rPr/>
-              <a:t>Plasmode-selected specification adapts truncation level upward</a:t>
+              <a:t>IPTW: SE-to-SD ratio above one (conservative; IF-variance treats PS as known)</a:t>
+            </a:r>
+          </a:p>
+          <a:p>
+            <a:pPr lvl="0"/>
+            <a:r>
+              <a:rPr/>
+              <a:t>Matched TMLE: SE-to-SD ratio ≈ 2 (post-match TMLE ignores matching draw)</a:t>
+            </a:r>
+          </a:p>
+          <a:p>
+            <a:pPr lvl="0"/>
+            <a:r>
+              <a:rPr/>
+              <a:t>Plasmode-selected specification adapts truncation upward</a:t>
             </a:r>
           </a:p>
           <a:p>
@@ -4909,7 +4787,7 @@
             </a:pPr>
             <a:r>
               <a:rPr/>
-              <a:t>Scenario C — unmeasured confounding</a:t>
+              <a:t>Scenario C: unmeasured confounding</a:t>
             </a:r>
           </a:p>
         </p:txBody>
@@ -4945,7 +4823,7 @@
                 </a14:m>
                 <a:r>
                   <a:rPr/>
-                  <a:t>-only adjustment can remove </a:t>
+                  <a:t>-only adjustment removes </a:t>
                 </a:r>
                 <a14:m>
                   <m:oMath xmlns:m="http://schemas.openxmlformats.org/officeDocument/2006/math">
@@ -4963,21 +4841,7 @@
                 <a:pPr lvl="0"/>
                 <a:r>
                   <a:rPr/>
-                  <a:t>Bias smallest for TMLE, largest for crude — difference of degree, not of kind</a:t>
-                </a:r>
-              </a:p>
-              <a:p>
-                <a:pPr lvl="0"/>
-                <a:r>
-                  <a:rPr/>
-                  <a:t>Baseline plasmode TMLE coverage at the lower edge of the prespecified range</a:t>
-                </a:r>
-              </a:p>
-              <a:p>
-                <a:pPr lvl="0"/>
-                <a:r>
-                  <a:rPr/>
-                  <a:t>The U-shift DQ row pushes the absolute bias estimate above </a:t>
+                  <a:t>The U-shift DQ row pushes the absolute bias above </a:t>
                 </a:r>
                 <a:r>
                   <a:rPr>
@@ -4994,16 +4858,14 @@
                 </a:r>
                 <a:r>
                   <a:rPr/>
-                  <a:t> — the staged workflow declines to run the primary analysis</a:t>
+                  <a:t> — the prespecified decision rule returns STOP; under the workflow, the primary analysis should not be run or interpreted without redesign or a documented override</a:t>
                 </a:r>
               </a:p>
               <a:p>
-                <a:pPr lvl="0" indent="0" marL="0">
-                  <a:buNone/>
-                </a:pPr>
+                <a:pPr lvl="0"/>
                 <a:r>
                   <a:rPr/>
-                  <a:t>The DQ supplement is what makes the failure unambiguous.</a:t>
+                  <a:t>The DQ supplement is what makes the failure unambiguous</a:t>
                 </a:r>
               </a:p>
             </p:txBody>
@@ -5072,15 +4934,6 @@
           <a:bodyPr/>
           <a:lstStyle/>
           <a:p>
-            <a:pPr lvl="0" indent="0" marL="0">
-              <a:buNone/>
-            </a:pPr>
-            <a:r>
-              <a:rPr/>
-              <a:t>Four qualitatively different profiles:</a:t>
-            </a:r>
-          </a:p>
-          <a:p>
             <a:pPr lvl="0"/>
             <a:r>
               <a:rPr b="1"/>
@@ -5088,7 +4941,7 @@
             </a:r>
             <a:r>
               <a:rPr/>
-              <a:t>: flat gradient (median imputation under MCAR is unbiased by construction — confirms no harm, but a weak test)</a:t>
+              <a:t> — flat (MCAR + median imputation is unbiased by construction; weak test)</a:t>
             </a:r>
           </a:p>
           <a:p>
@@ -5099,7 +4952,7 @@
             </a:r>
             <a:r>
               <a:rPr/>
-              <a:t>: bias rises toward the null as (sens, spec) worsen; coverage of the pre-misclassification estimand drops</a:t>
+              <a:t> — bias rises toward null; coverage of the pre-misclassification estimand drops</a:t>
             </a:r>
           </a:p>
           <a:p>
@@ -5110,7 +4963,7 @@
             </a:r>
             <a:r>
               <a:rPr/>
-              <a:t>: largest bias of the three measurement threats, especially when differential</a:t>
+              <a:t> — largest bias of the three measurement threats, especially when differential</a:t>
             </a:r>
           </a:p>
           <a:p>
@@ -5121,7 +4974,7 @@
             </a:r>
             <a:r>
               <a:rPr/>
-              <a:t>: largest degradation overall; the only threat that pushes RMSE ratio above 1.5</a:t>
+              <a:t> — largest degradation; only threat that pushes RMSE ratio above 1.5</a:t>
             </a:r>
           </a:p>
           <a:p>
@@ -5229,7 +5082,7 @@
             </a:pPr>
             <a:r>
               <a:rPr/>
-              <a:t>Background and question</a:t>
+              <a:t>Background</a:t>
             </a:r>
           </a:p>
         </p:txBody>
@@ -5254,7 +5107,7 @@
                 <a:pPr lvl="0"/>
                 <a:r>
                   <a:rPr/>
-                  <a:t>Rescue.Co operates motorcycle-based trauma transport in Nairobi, Kenya</a:t>
+                  <a:t>Rescue.Co operates motorcycle-based trauma transport in Nairobi</a:t>
                 </a:r>
               </a:p>
               <a:p>
@@ -5268,7 +5121,7 @@
                 <a:pPr lvl="0"/>
                 <a:r>
                   <a:rPr/>
-                  <a:t>Outcome: GOSE &gt; 4 at 6 months (good functional outcome)</a:t>
+                  <a:t>Outcome: GOSE &gt; 4 at 6 months</a:t>
                 </a:r>
               </a:p>
               <a:p>
@@ -5300,18 +5153,16 @@
                 </a14:m>
                 <a:r>
                   <a:rPr/>
-                  <a:t> eligible; </a:t>
-                </a:r>
-                <a:r>
-                  <a:rPr b="1"/>
-                  <a:t>24.6% outcome missingness</a:t>
+                  <a:t> eligible; 24.6 % outcome missingness</a:t>
                 </a:r>
               </a:p>
               <a:p>
-                <a:pPr lvl="0"/>
+                <a:pPr lvl="0" indent="0" marL="0">
+                  <a:buNone/>
+                </a:pPr>
                 <a:r>
-                  <a:rPr/>
-                  <a:t>A workflow demonstration, not a transport-effectiveness claim</a:t>
+                  <a:rPr i="1"/>
+                  <a:t>This case study demonstrates auditability and workflow behaviour; it is not intended as evidence that Rescue.Co transport has a causal effect.</a:t>
                 </a:r>
               </a:p>
             </p:txBody>
@@ -5390,7 +5241,7 @@
             <a:pPr lvl="0"/>
             <a:r>
               <a:rPr/>
-              <a:t>Stage 2a: PS scores in [0.21, 0.81]; SMDs balanced after weighting; ESS retention 78%</a:t>
+              <a:t>Stage 2a: PS in [0.21, 0.81]; balanced SMDs; ESS retention 78 %</a:t>
             </a:r>
           </a:p>
           <a:p>
@@ -5404,7 +5255,7 @@
             <a:pPr lvl="0"/>
             <a:r>
               <a:rPr/>
-              <a:t>Stage 3 DQ stress test: minimax rule selects </a:t>
+              <a:t>Stage 2c DQ stress test: minimax rule selects </a:t>
             </a:r>
             <a:r>
               <a:rPr>
@@ -5417,14 +5268,14 @@
             <a:pPr lvl="0"/>
             <a:r>
               <a:rPr/>
-              <a:t>Negative controls: 2 of 5 prespecified NCs surviving NZV filter (chronic hypertension, household urban) both pass — narrower NC panel than the SAP originally specified</a:t>
+              <a:t>Negative-control diagnostic: 2 of 5 prespecified NCs survive NZV filtering and both pass; narrower panel than the SAP specified, recorded in the audit log</a:t>
             </a:r>
           </a:p>
           <a:p>
             <a:pPr lvl="0"/>
             <a:r>
               <a:rPr b="1"/>
-              <a:t>Decision: PROCEED</a:t>
+              <a:t>Decision: GO</a:t>
             </a:r>
           </a:p>
         </p:txBody>
@@ -5596,7 +5447,7 @@
                       </a:pPr>
                       <a:r>
                         <a:rPr/>
-                        <a:t>Crude (unadjusted)</a:t>
+                        <a:t>Crude</a:t>
                       </a:r>
                     </a:p>
                   </a:txBody>
@@ -5688,7 +5539,7 @@
                       </a:pPr>
                       <a:r>
                         <a:rPr/>
-                        <a:t>Matched subset (overlap)</a:t>
+                        <a:t>Matched subset</a:t>
                       </a:r>
                     </a:p>
                   </a:txBody>
@@ -5733,7 +5584,7 @@
                       </a:pPr>
                       <a:r>
                         <a:rPr/>
-                        <a:t>(−0.020, 0.074)</a:t>
+                        <a:t>(-0.020, 0.074)</a:t>
                       </a:r>
                     </a:p>
                   </a:txBody>
@@ -5887,7 +5738,7 @@
                       </a:pPr>
                       <a:r>
                         <a:rPr/>
-                        <a:t>(−0.001, 0.062)</a:t>
+                        <a:t>(-0.001, 0.062)</a:t>
                       </a:r>
                     </a:p>
                   </a:txBody>
@@ -5919,7 +5770,7 @@
                       </a:pPr>
                       <a:r>
                         <a:rPr/>
-                        <a:t>Matched subset (overlap)</a:t>
+                        <a:t>Matched subset</a:t>
                       </a:r>
                     </a:p>
                   </a:txBody>
@@ -5964,7 +5815,7 @@
                       </a:pPr>
                       <a:r>
                         <a:rPr/>
-                        <a:t>(−0.015, 0.067)</a:t>
+                        <a:t>(-0.015, 0.067)</a:t>
                       </a:r>
                     </a:p>
                   </a:txBody>
@@ -6041,7 +5892,7 @@
                       </a:pPr>
                       <a:r>
                         <a:rPr/>
-                        <a:t>(−0.000, 0.066)</a:t>
+                        <a:t>(-0.000, 0.066)</a:t>
                       </a:r>
                     </a:p>
                   </a:txBody>
@@ -6118,7 +5969,7 @@
             </a:pPr>
             <a:r>
               <a:rPr/>
-              <a:t>Motivation: prespecification + fit-for-purpose data in RWE</a:t>
+              <a:t>The standard pre-outcome review vs. what cleanTMLE adds</a:t>
             </a:r>
           </a:p>
           <a:p>
@@ -6127,7 +5978,7 @@
             </a:pPr>
             <a:r>
               <a:rPr/>
-              <a:t>The causal roadmap, and where the package sits</a:t>
+              <a:t>Outcome-blind staged workflow (and what it does not replace)</a:t>
             </a:r>
           </a:p>
           <a:p>
@@ -6136,7 +5987,7 @@
             </a:pPr>
             <a:r>
               <a:rPr/>
-              <a:t>Outcome-blind staged workflow</a:t>
+              <a:t>The DQ stress test</a:t>
             </a:r>
           </a:p>
           <a:p>
@@ -6145,7 +5996,7 @@
             </a:pPr>
             <a:r>
               <a:rPr/>
-              <a:t>The DQ stress test</a:t>
+              <a:t>Simulation study</a:t>
             </a:r>
           </a:p>
           <a:p>
@@ -6154,7 +6005,7 @@
             </a:pPr>
             <a:r>
               <a:rPr/>
-              <a:t>Simulation study</a:t>
+              <a:t>Rescue.Co case study (Kenya Trauma Registry)</a:t>
             </a:r>
           </a:p>
           <a:p>
@@ -6163,16 +6014,7 @@
             </a:pPr>
             <a:r>
               <a:rPr/>
-              <a:t>Rescue.Co case study (Kenya Trauma Registry)</a:t>
-            </a:r>
-          </a:p>
-          <a:p>
-            <a:pPr lvl="0" indent="-342900" marL="342900">
-              <a:buAutoNum type="arabicPeriod"/>
-            </a:pPr>
-            <a:r>
-              <a:rPr/>
-              <a:t>What is genuinely new, what is not</a:t>
+              <a:t>What cleanTMLE contributes operationally</a:t>
             </a:r>
           </a:p>
           <a:p>
@@ -6284,7 +6126,7 @@
             </a:pPr>
             <a:r>
               <a:rPr/>
-              <a:t>What the case study tells us</a:t>
+              <a:t>Reading the case study</a:t>
             </a:r>
           </a:p>
         </p:txBody>
@@ -6307,7 +6149,7 @@
             <a:pPr lvl="0"/>
             <a:r>
               <a:rPr/>
-              <a:t>Six estimators agree on direction (RD between 0.026 and 0.037 favouring Rescue.Co)</a:t>
+              <a:t>All six estimators agree on direction (RD 0.026 to 0.037 favouring Rescue.Co)</a:t>
             </a:r>
           </a:p>
           <a:p>
@@ -6321,29 +6163,21 @@
             <a:pPr lvl="0"/>
             <a:r>
               <a:rPr/>
-              <a:t>An additive bias of 0.0012 would push the lower CI bound across zero (a weak sensitivity, not a full QBA)</a:t>
-            </a:r>
-          </a:p>
-          <a:p>
-            <a:pPr lvl="0"/>
-            <a:r>
-              <a:rPr/>
-              <a:t>The audit log captures every analytic decision, including the three NC drops at NZV filtering</a:t>
-            </a:r>
-          </a:p>
-          <a:p>
-            <a:pPr lvl="0"/>
-            <a:r>
-              <a:rPr/>
-              <a:t>This is a </a:t>
-            </a:r>
-            <a:r>
-              <a:rPr b="1"/>
-              <a:t>workflow demonstration</a:t>
-            </a:r>
-            <a:r>
-              <a:rPr/>
-              <a:t>; cleanTMLE does not establish causal validity, validate the data source, or prove that Rescue.Co transport is effective</a:t>
+              <a:t>A 0.0012 additive bias would push the lower CI bound across zero (a CI-tipping-point distance, not a full QBA)</a:t>
+            </a:r>
+          </a:p>
+          <a:p>
+            <a:pPr lvl="0"/>
+            <a:r>
+              <a:rPr/>
+              <a:t>The audit log captures every analytic decision, including the three NC drops</a:t>
+            </a:r>
+          </a:p>
+          <a:p>
+            <a:pPr lvl="0"/>
+            <a:r>
+              <a:rPr i="1"/>
+              <a:t>Workflow demonstration; not a causal claim about Rescue.Co.</a:t>
             </a:r>
           </a:p>
         </p:txBody>
@@ -6442,7 +6276,7 @@
             </a:pPr>
             <a:r>
               <a:rPr/>
-              <a:t>What is genuinely new</a:t>
+              <a:t>What cleanTMLE contributes operationally</a:t>
             </a:r>
           </a:p>
         </p:txBody>
@@ -6469,7 +6303,7 @@
             </a:r>
             <a:r>
               <a:rPr/>
-              <a:t>: each candidate produces a degradation gradient on the same bias/RMSE/coverage scale as the baseline, so the same decision rule applies uniformly</a:t>
+              <a:t> — each candidate produces a degradation gradient on the same bias / RMSE / coverage scale as the baseline</a:t>
             </a:r>
           </a:p>
           <a:p>
@@ -6480,18 +6314,27 @@
             </a:r>
             <a:r>
               <a:rPr/>
-              <a:t>: a fingerprinted record an external reviewer can reconstruct</a:t>
+              <a:t> — a fingerprinted record an external reviewer can reconstruct</a:t>
             </a:r>
           </a:p>
           <a:p>
             <a:pPr lvl="0"/>
             <a:r>
               <a:rPr b="1"/>
-              <a:t>A modular TMLE API</a:t>
-            </a:r>
-            <a:r>
-              <a:rPr/>
-              <a:t>: treatment fit, outcome fit, target, extract — each step callable at the right stage of the workflow</a:t>
+              <a:t>Modular TMLE API</a:t>
+            </a:r>
+            <a:r>
+              <a:rPr/>
+              <a:t> — treatment fit, outcome fit, targeting, extract; each step callable at the right stage</a:t>
+            </a:r>
+          </a:p>
+          <a:p>
+            <a:pPr lvl="0" indent="0" marL="0">
+              <a:buNone/>
+            </a:pPr>
+            <a:r>
+              <a:rPr/>
+              <a:t>The claim is integration and auditability, not a new estimator.</a:t>
             </a:r>
           </a:p>
         </p:txBody>
@@ -6568,7 +6411,7 @@
             <a:pPr lvl="0"/>
             <a:r>
               <a:rPr/>
-              <a:t>Plasmode simulation for candidate selection (Franklin 2014; Schuler 2017)</a:t>
+              <a:t>Plasmode simulation for candidate selection (Franklin 2014; Schuler 2017; Dang 2023)</a:t>
             </a:r>
           </a:p>
           <a:p>
@@ -6583,23 +6426,6 @@
             <a:r>
               <a:rPr/>
               <a:t>Quantitative bias analysis (Lash 2014) — distinct from this pre-outcome screen</a:t>
-            </a:r>
-          </a:p>
-          <a:p>
-            <a:pPr lvl="0" indent="0" marL="0">
-              <a:buNone/>
-            </a:pPr>
-            <a:r>
-              <a:rPr/>
-              <a:t>cleanTMLE is mostly </a:t>
-            </a:r>
-            <a:r>
-              <a:rPr b="1"/>
-              <a:t>operational glue</a:t>
-            </a:r>
-            <a:r>
-              <a:rPr/>
-              <a:t> that pulls these together into a reproducible record.</a:t>
             </a:r>
           </a:p>
         </p:txBody>
@@ -6676,21 +6502,21 @@
             <a:pPr lvl="0"/>
             <a:r>
               <a:rPr/>
-              <a:t>Out of scope (yet): hazard ratios, time-varying treatments, competing risks, multinomial exposures, MAR / MNAR missingness, effect modification in the plasmode generator</a:t>
-            </a:r>
-          </a:p>
-          <a:p>
-            <a:pPr lvl="0"/>
-            <a:r>
-              <a:rPr/>
-              <a:t>DQ covariate-missingness mechanism is MCAR-only; MAR / MNAR variants are on the roadmap</a:t>
-            </a:r>
-          </a:p>
-          <a:p>
-            <a:pPr lvl="0"/>
-            <a:r>
-              <a:rPr/>
-              <a:t>Gate-threshold defaults are heuristic, not derived from a regulatory specification — analysts set them from study context</a:t>
+              <a:t>DQ covariate-missingness mechanism is MCAR-only; MAR / MNAR variants are on the 0.2 roadmap</a:t>
+            </a:r>
+          </a:p>
+          <a:p>
+            <a:pPr lvl="0"/>
+            <a:r>
+              <a:rPr/>
+              <a:t>Decision-threshold defaults are heuristic, not derived from a regulatory specification; analysts set them from study context</a:t>
+            </a:r>
+          </a:p>
+          <a:p>
+            <a:pPr lvl="0"/>
+            <a:r>
+              <a:rPr/>
+              <a:t>The package cannot enforce personnel-level blinding or prevent a user with raw data access from inspecting outcomes outside the package</a:t>
             </a:r>
           </a:p>
         </p:txBody>
@@ -6804,7 +6630,7 @@
             <a:pPr lvl="0"/>
             <a:r>
               <a:rPr/>
-              <a:t>A reference-paper-driven </a:t>
+              <a:t>Reference-paper-driven </a:t>
             </a:r>
             <a:r>
               <a:rPr>
@@ -6814,7 +6640,7 @@
             </a:r>
             <a:r>
               <a:rPr/>
-              <a:t> reader that ingests validation-literature parameters (PPV, sens, claims-accuracy ranges) and attaches citations to the audit log</a:t>
+              <a:t> ingesting validation-literature parameters and attaching citations to the audit log</a:t>
             </a:r>
           </a:p>
           <a:p>
@@ -6949,7 +6775,7 @@
             </a:r>
             <a:r>
               <a:rPr/>
-              <a:t>: how should we elicit and document </a:t>
+              <a:t> — how to elicit and document </a:t>
             </a:r>
             <a:r>
               <a:rPr>
@@ -6959,7 +6785,7 @@
             </a:r>
             <a:r>
               <a:rPr/>
-              <a:t>, missingness, and U-shift ranges for a new study? What standard would a reviewer accept?</a:t>
+              <a:t>, missingness, and U-shift ranges in a way a reviewer accepts</a:t>
             </a:r>
           </a:p>
           <a:p>
@@ -6972,37 +6798,7 @@
             </a:r>
             <a:r>
               <a:rPr/>
-              <a:t>: are </a:t>
-            </a:r>
-            <a:r>
-              <a:rPr>
-                <a:latin typeface="Courier"/>
-              </a:rPr>
-              <a:t>max_abs_bias = 0.01</a:t>
-            </a:r>
-            <a:r>
-              <a:rPr/>
-              <a:t>, </a:t>
-            </a:r>
-            <a:r>
-              <a:rPr>
-                <a:latin typeface="Courier"/>
-              </a:rPr>
-              <a:t>min_coverage = 0.90</a:t>
-            </a:r>
-            <a:r>
-              <a:rPr/>
-              <a:t>, </a:t>
-            </a:r>
-            <a:r>
-              <a:rPr>
-                <a:latin typeface="Courier"/>
-              </a:rPr>
-              <a:t>SE-band = (0.8, 1.2)</a:t>
-            </a:r>
-            <a:r>
-              <a:rPr/>
-              <a:t> reasonable, or should they scale with the prespecified estimand magnitude and Type I error budget?</a:t>
+              <a:t> — should they scale with the prespecified estimand magnitude and Type I error budget?</a:t>
             </a:r>
           </a:p>
           <a:p>
@@ -7011,11 +6807,11 @@
             </a:pPr>
             <a:r>
               <a:rPr b="1"/>
-              <a:t>Negative-control panels</a:t>
-            </a:r>
-            <a:r>
-              <a:rPr/>
-              <a:t>: when the NZV filter prunes the prespecified NCs, what is the right policy — re-elicit before unblinding, or accept a narrower panel and document?</a:t>
+              <a:t>Role separation</a:t>
+            </a:r>
+            <a:r>
+              <a:rPr/>
+              <a:t> — minimum personnel governance that should sit on top of the software workflow for submission-grade studies</a:t>
             </a:r>
           </a:p>
           <a:p>
@@ -7024,11 +6820,11 @@
             </a:pPr>
             <a:r>
               <a:rPr b="1"/>
-              <a:t>Personnel governance</a:t>
-            </a:r>
-            <a:r>
-              <a:rPr/>
-              <a:t>: for submission-grade studies, what minimum role separation should sit on top of the software workflow?</a:t>
+              <a:t>Plasmode faithfulness</a:t>
+            </a:r>
+            <a:r>
+              <a:rPr/>
+              <a:t> — is the parametric synthetic-outcome mechanism faithful enough, or do we need richer DGPs (effect modification, time-varying treatment)?</a:t>
             </a:r>
           </a:p>
           <a:p>
@@ -7037,11 +6833,11 @@
             </a:pPr>
             <a:r>
               <a:rPr b="1"/>
-              <a:t>Plasmode faithfulness</a:t>
-            </a:r>
-            <a:r>
-              <a:rPr/>
-              <a:t>: is the parametric synthetic-outcome mechanism faithful enough for decision-making, or do we need richer DGPs (effect modification, time-varying treatment)?</a:t>
+              <a:t>Negative-control policy</a:t>
+            </a:r>
+            <a:r>
+              <a:rPr/>
+              <a:t> — when the NZV filter prunes prespecified NCs, re-elicit before unblinding or accept a narrower panel and document?</a:t>
             </a:r>
           </a:p>
           <a:p>
@@ -7050,11 +6846,11 @@
             </a:pPr>
             <a:r>
               <a:rPr b="1"/>
-              <a:t>Where to publish</a:t>
-            </a:r>
-            <a:r>
-              <a:rPr/>
-              <a:t>: methods/tutorial paper venue — </a:t>
+              <a:t>Publication venue</a:t>
+            </a:r>
+            <a:r>
+              <a:rPr/>
+              <a:t> — </a:t>
             </a:r>
             <a:r>
               <a:rPr>
@@ -7084,27 +6880,7 @@
             </a:r>
             <a:r>
               <a:rPr/>
-              <a:t>, or an RWE-specific venue (</a:t>
-            </a:r>
-            <a:r>
-              <a:rPr>
-                <a:latin typeface="Courier"/>
-              </a:rPr>
-              <a:t>Pharmacoepi DS</a:t>
-            </a:r>
-            <a:r>
-              <a:rPr/>
-              <a:t>, </a:t>
-            </a:r>
-            <a:r>
-              <a:rPr>
-                <a:latin typeface="Courier"/>
-              </a:rPr>
-              <a:t>Drug Safety</a:t>
-            </a:r>
-            <a:r>
-              <a:rPr/>
-              <a:t>)?</a:t>
+              <a:t>, or an RWE-specific venue?</a:t>
             </a:r>
           </a:p>
         </p:txBody>
@@ -7327,82 +7103,372 @@
             </a:pPr>
             <a:r>
               <a:rPr/>
-              <a:t>Two arguments, reported separately</a:t>
-            </a:r>
-          </a:p>
-        </p:txBody>
-      </p:sp>
-      <p:sp>
-        <p:nvSpPr>
-          <p:cNvPr id="3" name="Content Placeholder 2"/>
-          <p:cNvSpPr>
-            <a:spLocks noGrp="1"/>
-          </p:cNvSpPr>
+              <a:t>Standard vs. cleanTMLE approach</a:t>
+            </a:r>
+          </a:p>
+        </p:txBody>
+      </p:sp>
+      <p:graphicFrame>
+        <p:nvGraphicFramePr>
+          <p:cNvPr id="6" name="Content Placeholder 5"/>
+          <p:cNvGraphicFramePr>
+            <a:graphicFrameLocks noGrp="1"/>
+          </p:cNvGraphicFramePr>
           <p:nvPr>
             <p:ph idx="1"/>
           </p:nvPr>
-        </p:nvSpPr>
-        <p:spPr/>
-        <p:txBody>
-          <a:bodyPr/>
-          <a:lstStyle/>
-          <a:p>
-            <a:pPr lvl="0" indent="0" marL="0">
-              <a:buNone/>
-            </a:pPr>
-            <a:r>
-              <a:rPr/>
-              <a:t>In a typical RWE study:</a:t>
-            </a:r>
-          </a:p>
-          <a:p>
-            <a:pPr lvl="0"/>
-            <a:r>
-              <a:rPr/>
-              <a:t>The </a:t>
-            </a:r>
-            <a:r>
-              <a:rPr b="1"/>
-              <a:t>estimator-selection</a:t>
-            </a:r>
-            <a:r>
-              <a:rPr/>
-              <a:t> argument is increasingly developed with outcome-blind plasmode simulation (Franklin 2014; Schuler 2017; Dang 2023; Schreck 2024)</a:t>
-            </a:r>
-          </a:p>
-          <a:p>
-            <a:pPr lvl="0"/>
-            <a:r>
-              <a:rPr/>
-              <a:t>The </a:t>
-            </a:r>
-            <a:r>
-              <a:rPr b="1"/>
-              <a:t>fit-for-purpose</a:t>
-            </a:r>
-            <a:r>
-              <a:rPr/>
-              <a:t> argument is documented qualitatively through SPIFD2, HARPER, TARGET, START-RWE checklists</a:t>
-            </a:r>
-          </a:p>
-          <a:p>
-            <a:pPr lvl="0"/>
-            <a:r>
-              <a:rPr/>
-              <a:t>The simulation is numeric; the fit-for-purpose argument is prose</a:t>
-            </a:r>
-          </a:p>
-          <a:p>
-            <a:pPr lvl="0" indent="0" marL="0">
-              <a:buNone/>
-            </a:pPr>
-            <a:r>
-              <a:rPr/>
-              <a:t>A candidate estimator that wins the simulation can still fail under realistic measurement error, missingness, or unmeasured confounding.</a:t>
-            </a:r>
-          </a:p>
-        </p:txBody>
-      </p:sp>
+        </p:nvGraphicFramePr>
+        <p:xfrm>
+          <a:off x="457200" y="1193800"/>
+          <a:ext cx="8229600" cy="3390900"/>
+        </p:xfrm>
+        <a:graphic>
+          <a:graphicData uri="http://schemas.openxmlformats.org/drawingml/2006/table">
+            <a:tbl>
+              <a:tblPr firstRow="1" bandRow="1">
+                <a:tableStyleId>{5C22544A-7EE6-4342-B048-85BDC9FD1C3A}</a:tableStyleId>
+              </a:tblPr>
+              <a:tblGrid>
+                <a:gridCol w="2006600"/>
+                <a:gridCol w="2489200"/>
+                <a:gridCol w="3733800"/>
+              </a:tblGrid>
+              <a:tr h="0">
+                <a:tc>
+                  <a:txBody>
+                    <a:bodyPr/>
+                    <a:lstStyle/>
+                    <a:p>
+                      <a:pPr lvl="0" indent="0" marL="0">
+                        <a:buNone/>
+                      </a:pPr>
+                      <a:r>
+                        <a:rPr/>
+                        <a:t>Activity</a:t>
+                      </a:r>
+                    </a:p>
+                  </a:txBody>
+                  <a:tcPr/>
+                </a:tc>
+                <a:tc>
+                  <a:txBody>
+                    <a:bodyPr/>
+                    <a:lstStyle/>
+                    <a:p>
+                      <a:pPr lvl="0" indent="0" marL="0">
+                        <a:buNone/>
+                      </a:pPr>
+                      <a:r>
+                        <a:rPr/>
+                        <a:t>Standard approach</a:t>
+                      </a:r>
+                    </a:p>
+                  </a:txBody>
+                  <a:tcPr/>
+                </a:tc>
+                <a:tc>
+                  <a:txBody>
+                    <a:bodyPr/>
+                    <a:lstStyle/>
+                    <a:p>
+                      <a:pPr lvl="0" indent="0" marL="0">
+                        <a:buNone/>
+                      </a:pPr>
+                      <a:r>
+                        <a:rPr/>
+                        <a:t>cleanTMLE approach</a:t>
+                      </a:r>
+                    </a:p>
+                  </a:txBody>
+                  <a:tcPr/>
+                </a:tc>
+              </a:tr>
+              <a:tr h="0">
+                <a:tc>
+                  <a:txBody>
+                    <a:bodyPr/>
+                    <a:lstStyle/>
+                    <a:p>
+                      <a:pPr lvl="0" indent="0" marL="0">
+                        <a:buNone/>
+                      </a:pPr>
+                      <a:r>
+                        <a:rPr/>
+                        <a:t>Protocol / estimand</a:t>
+                      </a:r>
+                    </a:p>
+                  </a:txBody>
+                </a:tc>
+                <a:tc>
+                  <a:txBody>
+                    <a:bodyPr/>
+                    <a:lstStyle/>
+                    <a:p>
+                      <a:pPr lvl="0" indent="0" marL="0">
+                        <a:buNone/>
+                      </a:pPr>
+                      <a:r>
+                        <a:rPr/>
+                        <a:t>Written SAP</a:t>
+                      </a:r>
+                    </a:p>
+                  </a:txBody>
+                </a:tc>
+                <a:tc>
+                  <a:txBody>
+                    <a:bodyPr/>
+                    <a:lstStyle/>
+                    <a:p>
+                      <a:pPr lvl="0" indent="0" marL="0">
+                        <a:buNone/>
+                      </a:pPr>
+                      <a:r>
+                        <a:rPr/>
+                        <a:t>Same, with a fingerprinted analysis lock</a:t>
+                      </a:r>
+                    </a:p>
+                  </a:txBody>
+                </a:tc>
+              </a:tr>
+              <a:tr h="0">
+                <a:tc>
+                  <a:txBody>
+                    <a:bodyPr/>
+                    <a:lstStyle/>
+                    <a:p>
+                      <a:pPr lvl="0" indent="0" marL="0">
+                        <a:buNone/>
+                      </a:pPr>
+                      <a:r>
+                        <a:rPr/>
+                        <a:t>Data fitness</a:t>
+                      </a:r>
+                    </a:p>
+                  </a:txBody>
+                </a:tc>
+                <a:tc>
+                  <a:txBody>
+                    <a:bodyPr/>
+                    <a:lstStyle/>
+                    <a:p>
+                      <a:pPr lvl="0" indent="0" marL="0">
+                        <a:buNone/>
+                      </a:pPr>
+                      <a:r>
+                        <a:rPr/>
+                        <a:t>Qualitative checklist</a:t>
+                      </a:r>
+                    </a:p>
+                  </a:txBody>
+                </a:tc>
+                <a:tc>
+                  <a:txBody>
+                    <a:bodyPr/>
+                    <a:lstStyle/>
+                    <a:p>
+                      <a:pPr lvl="0" indent="0" marL="0">
+                        <a:buNone/>
+                      </a:pPr>
+                      <a:r>
+                        <a:rPr/>
+                        <a:t>Same, plus locked numerical severity ranges</a:t>
+                      </a:r>
+                    </a:p>
+                  </a:txBody>
+                </a:tc>
+              </a:tr>
+              <a:tr h="0">
+                <a:tc>
+                  <a:txBody>
+                    <a:bodyPr/>
+                    <a:lstStyle/>
+                    <a:p>
+                      <a:pPr lvl="0" indent="0" marL="0">
+                        <a:buNone/>
+                      </a:pPr>
+                      <a:r>
+                        <a:rPr/>
+                        <a:t>Design diagnostics</a:t>
+                      </a:r>
+                    </a:p>
+                  </a:txBody>
+                </a:tc>
+                <a:tc>
+                  <a:txBody>
+                    <a:bodyPr/>
+                    <a:lstStyle/>
+                    <a:p>
+                      <a:pPr lvl="0" indent="0" marL="0">
+                        <a:buNone/>
+                      </a:pPr>
+                      <a:r>
+                        <a:rPr/>
+                        <a:t>PS overlap, balance, SMDs</a:t>
+                      </a:r>
+                    </a:p>
+                  </a:txBody>
+                </a:tc>
+                <a:tc>
+                  <a:txBody>
+                    <a:bodyPr/>
+                    <a:lstStyle/>
+                    <a:p>
+                      <a:pPr lvl="0" indent="0" marL="0">
+                        <a:buNone/>
+                      </a:pPr>
+                      <a:r>
+                        <a:rPr/>
+                        <a:t>Same</a:t>
+                      </a:r>
+                    </a:p>
+                  </a:txBody>
+                </a:tc>
+              </a:tr>
+              <a:tr h="0">
+                <a:tc>
+                  <a:txBody>
+                    <a:bodyPr/>
+                    <a:lstStyle/>
+                    <a:p>
+                      <a:pPr lvl="0" indent="0" marL="0">
+                        <a:buNone/>
+                      </a:pPr>
+                      <a:r>
+                        <a:rPr/>
+                        <a:t>Estimator comparison</a:t>
+                      </a:r>
+                    </a:p>
+                  </a:txBody>
+                </a:tc>
+                <a:tc>
+                  <a:txBody>
+                    <a:bodyPr/>
+                    <a:lstStyle/>
+                    <a:p>
+                      <a:pPr lvl="0" indent="0" marL="0">
+                        <a:buNone/>
+                      </a:pPr>
+                      <a:r>
+                        <a:rPr/>
+                        <a:t>Tradition, or ad-hoc simulation</a:t>
+                      </a:r>
+                    </a:p>
+                  </a:txBody>
+                </a:tc>
+                <a:tc>
+                  <a:txBody>
+                    <a:bodyPr/>
+                    <a:lstStyle/>
+                    <a:p>
+                      <a:pPr lvl="0" indent="0" marL="0">
+                        <a:buNone/>
+                      </a:pPr>
+                      <a:r>
+                        <a:rPr/>
+                        <a:t>Outcome-blind plasmode candidate selection</a:t>
+                      </a:r>
+                    </a:p>
+                  </a:txBody>
+                </a:tc>
+              </a:tr>
+              <a:tr h="0">
+                <a:tc>
+                  <a:txBody>
+                    <a:bodyPr/>
+                    <a:lstStyle/>
+                    <a:p>
+                      <a:pPr lvl="0" indent="0" marL="0">
+                        <a:buNone/>
+                      </a:pPr>
+                      <a:r>
+                        <a:rPr b="1"/>
+                        <a:t>Robustness to DQ threats</a:t>
+                      </a:r>
+                    </a:p>
+                  </a:txBody>
+                </a:tc>
+                <a:tc>
+                  <a:txBody>
+                    <a:bodyPr/>
+                    <a:lstStyle/>
+                    <a:p>
+                      <a:pPr lvl="0" indent="0" marL="0">
+                        <a:buNone/>
+                      </a:pPr>
+                      <a:r>
+                        <a:rPr b="1"/>
+                        <a:t>Qualitative argument</a:t>
+                      </a:r>
+                    </a:p>
+                  </a:txBody>
+                </a:tc>
+                <a:tc>
+                  <a:txBody>
+                    <a:bodyPr/>
+                    <a:lstStyle/>
+                    <a:p>
+                      <a:pPr lvl="0" indent="0" marL="0">
+                        <a:buNone/>
+                      </a:pPr>
+                      <a:r>
+                        <a:rPr b="1"/>
+                        <a:t>Plasmode DQ stress test on the same scale</a:t>
+                      </a:r>
+                    </a:p>
+                  </a:txBody>
+                </a:tc>
+              </a:tr>
+              <a:tr h="0">
+                <a:tc>
+                  <a:txBody>
+                    <a:bodyPr/>
+                    <a:lstStyle/>
+                    <a:p>
+                      <a:pPr lvl="0" indent="0" marL="0">
+                        <a:buNone/>
+                      </a:pPr>
+                      <a:r>
+                        <a:rPr/>
+                        <a:t>Pre-outcome decision</a:t>
+                      </a:r>
+                    </a:p>
+                  </a:txBody>
+                </a:tc>
+                <a:tc>
+                  <a:txBody>
+                    <a:bodyPr/>
+                    <a:lstStyle/>
+                    <a:p>
+                      <a:pPr lvl="0" indent="0" marL="0">
+                        <a:buNone/>
+                      </a:pPr>
+                      <a:r>
+                        <a:rPr/>
+                        <a:t>Implicit</a:t>
+                      </a:r>
+                    </a:p>
+                  </a:txBody>
+                </a:tc>
+                <a:tc>
+                  <a:txBody>
+                    <a:bodyPr/>
+                    <a:lstStyle/>
+                    <a:p>
+                      <a:pPr lvl="0" indent="0" marL="0">
+                        <a:buNone/>
+                      </a:pPr>
+                      <a:r>
+                        <a:rPr/>
+                        <a:t>Prespecified GO / FLAG / STOP rule, audit-logged</a:t>
+                      </a:r>
+                    </a:p>
+                  </a:txBody>
+                </a:tc>
+              </a:tr>
+            </a:tbl>
+          </a:graphicData>
+        </a:graphic>
+      </p:graphicFrame>
     </p:spTree>
   </p:cSld>
 </p:sld>
@@ -7427,12 +7493,12 @@
       </p:grpSpPr>
       <p:sp>
         <p:nvSpPr>
-          <p:cNvPr id="2" name="Title 1"/>
-          <p:cNvSpPr>
-            <a:spLocks noGrp="1"/>
-          </p:cNvSpPr>
-          <p:nvPr>
-            <p:ph type="title"/>
+          <p:cNvPr id="3" name="Content Placeholder 2"/>
+          <p:cNvSpPr>
+            <a:spLocks noGrp="1"/>
+          </p:cNvSpPr>
+          <p:nvPr>
+            <p:ph idx="1"/>
           </p:nvPr>
         </p:nvSpPr>
         <p:spPr/>
@@ -7445,58 +7511,7 @@
             </a:pPr>
             <a:r>
               <a:rPr/>
-              <a:t>A quantitative bridge</a:t>
-            </a:r>
-          </a:p>
-        </p:txBody>
-      </p:sp>
-      <p:sp>
-        <p:nvSpPr>
-          <p:cNvPr id="3" name="Content Placeholder 2"/>
-          <p:cNvSpPr>
-            <a:spLocks noGrp="1"/>
-          </p:cNvSpPr>
-          <p:nvPr>
-            <p:ph idx="1"/>
-          </p:nvPr>
-        </p:nvSpPr>
-        <p:spPr/>
-        <p:txBody>
-          <a:bodyPr/>
-          <a:lstStyle/>
-          <a:p>
-            <a:pPr lvl="0" indent="0" marL="0">
-              <a:buNone/>
-            </a:pPr>
-            <a:r>
-              <a:rPr/>
-              <a:t>The plasmode loop is under the analyst’s control. We can extend it to ask:</a:t>
-            </a:r>
-          </a:p>
-          <a:p>
-            <a:pPr lvl="0" indent="0" marL="1270000">
-              <a:buNone/>
-            </a:pPr>
-            <a:r>
-              <a:rPr sz="2000" i="1"/>
-              <a:t>“Which candidate maintains acceptable bias, RMSE, and coverage across the plausible range of each threat documented in the fit-for-purpose review?”</a:t>
-            </a:r>
-          </a:p>
-          <a:p>
-            <a:pPr lvl="0" indent="0" marL="0">
-              <a:buNone/>
-            </a:pPr>
-            <a:r>
-              <a:rPr/>
-              <a:t>This is a </a:t>
-            </a:r>
-            <a:r>
-              <a:rPr b="1"/>
-              <a:t>data-quality (DQ) stress test</a:t>
-            </a:r>
-            <a:r>
-              <a:rPr/>
-              <a:t>: a pre-outcome robustness screen, not a substitute for variable validation or for post-unblinding sensitivity analysis.</a:t>
+              <a:t>The contribution is operational, not a new estimator.</a:t>
             </a:r>
           </a:p>
         </p:txBody>
@@ -7543,6 +7558,113 @@
             </a:pPr>
             <a:r>
               <a:rPr/>
+              <a:t>The quantitative bridge</a:t>
+            </a:r>
+          </a:p>
+        </p:txBody>
+      </p:sp>
+      <p:sp>
+        <p:nvSpPr>
+          <p:cNvPr id="3" name="Content Placeholder 2"/>
+          <p:cNvSpPr>
+            <a:spLocks noGrp="1"/>
+          </p:cNvSpPr>
+          <p:nvPr>
+            <p:ph idx="1"/>
+          </p:nvPr>
+        </p:nvSpPr>
+        <p:spPr/>
+        <p:txBody>
+          <a:bodyPr/>
+          <a:lstStyle/>
+          <a:p>
+            <a:pPr lvl="0" indent="0" marL="0">
+              <a:buNone/>
+            </a:pPr>
+            <a:r>
+              <a:rPr/>
+              <a:t>The plasmode loop is under the analyst’s control:</a:t>
+            </a:r>
+          </a:p>
+          <a:p>
+            <a:pPr lvl="0" indent="0" marL="1270000">
+              <a:buNone/>
+            </a:pPr>
+            <a:r>
+              <a:rPr sz="2000" b="1"/>
+              <a:t>Standard plasmode:</a:t>
+            </a:r>
+            <a:r>
+              <a:rPr sz="2000"/>
+              <a:t> which estimator performs best under the locked synthetic outcome model?</a:t>
+            </a:r>
+          </a:p>
+          <a:p>
+            <a:pPr lvl="0" indent="0" marL="1270000">
+              <a:buNone/>
+            </a:pPr>
+            <a:r>
+              <a:rPr sz="2000" b="1"/>
+              <a:t>DQ stress test:</a:t>
+            </a:r>
+            <a:r>
+              <a:rPr sz="2000"/>
+              <a:t> does that estimator remain acceptable under prespecified threats from the fit-for-purpose review?</a:t>
+            </a:r>
+          </a:p>
+          <a:p>
+            <a:pPr lvl="0" indent="0" marL="0">
+              <a:buNone/>
+            </a:pPr>
+            <a:r>
+              <a:rPr/>
+              <a:t>This turns the qualitative data-fitness argument into a quantitative supplement on the same bias / RMSE / coverage scale as the baseline simulation.</a:t>
+            </a:r>
+          </a:p>
+        </p:txBody>
+      </p:sp>
+    </p:spTree>
+  </p:cSld>
+</p:sld>
+</file>
+
+<file path=ppt/slides/slide8.xml><?xml version="1.0" encoding="utf-8"?>
+<p:sld xmlns:a="http://schemas.openxmlformats.org/drawingml/2006/main" xmlns:r="http://schemas.openxmlformats.org/officeDocument/2006/relationships" xmlns:p="http://schemas.openxmlformats.org/presentationml/2006/main">
+  <p:cSld>
+    <p:spTree>
+      <p:nvGrpSpPr>
+        <p:cNvPr id="1" name=""/>
+        <p:cNvGrpSpPr/>
+        <p:nvPr/>
+      </p:nvGrpSpPr>
+      <p:grpSpPr>
+        <a:xfrm>
+          <a:off x="0" y="0"/>
+          <a:ext cx="0" cy="0"/>
+          <a:chOff x="0" y="0"/>
+          <a:chExt cx="0" cy="0"/>
+        </a:xfrm>
+      </p:grpSpPr>
+      <p:sp>
+        <p:nvSpPr>
+          <p:cNvPr id="2" name="Title 1"/>
+          <p:cNvSpPr>
+            <a:spLocks noGrp="1"/>
+          </p:cNvSpPr>
+          <p:nvPr>
+            <p:ph type="title"/>
+          </p:nvPr>
+        </p:nvSpPr>
+        <p:spPr/>
+        <p:txBody>
+          <a:bodyPr/>
+          <a:lstStyle/>
+          <a:p>
+            <a:pPr lvl="0" indent="0" marL="0">
+              <a:buNone/>
+            </a:pPr>
+            <a:r>
+              <a:rPr/>
               <a:t>What outcome-blind means here</a:t>
             </a:r>
           </a:p>
@@ -7570,11 +7692,11 @@
                 </a:pPr>
                 <a:r>
                   <a:rPr/>
-                  <a:t>Decisions about cohort, candidate estimators, simulation scenarios, decision thresholds, and primary-estimator selection are made </a:t>
+                  <a:t>Decisions about cohort, candidates, simulation scenarios, decision thresholds, and primary-estimator selection are made </a:t>
                 </a:r>
                 <a:r>
                   <a:rPr b="1"/>
-                  <a:t>without inspecting the observed treatment–outcome association</a:t>
+                  <a:t>without inspecting the observed treatment-outcome association</a:t>
                 </a:r>
                 <a:r>
                   <a:rPr/>
@@ -7587,7 +7709,7 @@
                 </a:pPr>
                 <a:r>
                   <a:rPr/>
-                  <a:t>Allowed: baseline covariates, treatment assignment, missingness indicators, synthetic outcomes, and the marginal mean of </a:t>
+                  <a:t>Allowed pre-decision: baseline covariates, treatment assignment, missingness indicators, synthetic outcomes, and the marginal mean of </a:t>
                 </a:r>
                 <a14:m>
                   <m:oMath xmlns:m="http://schemas.openxmlformats.org/officeDocument/2006/math">
@@ -7618,85 +7740,13 @@
                 </a:pPr>
                 <a:r>
                   <a:rPr/>
-                  <a:t>Not allowed before the decision point: the observed </a:t>
-                </a:r>
-                <a14:m>
-                  <m:oMath xmlns:m="http://schemas.openxmlformats.org/officeDocument/2006/math">
-                    <m:r>
-                      <m:t>A</m:t>
-                    </m:r>
-                    <m:r>
-                      <m:rPr>
-                        <m:sty m:val="p"/>
-                      </m:rPr>
-                      <m:t>→</m:t>
-                    </m:r>
-                    <m:r>
-                      <m:t>Y</m:t>
-                    </m:r>
-                  </m:oMath>
-                </a14:m>
-                <a:r>
-                  <a:rPr/>
-                  <a:t> relationship.</a:t>
+                  <a:t>The package can restrict its own exported functions and record an audit trail. It cannot substitute for external access controls or personnel role separation.</a:t>
                 </a:r>
               </a:p>
             </p:txBody>
           </p:sp>
         </mc:Choice>
       </mc:AlternateContent>
-    </p:spTree>
-  </p:cSld>
-</p:sld>
-</file>
-
-<file path=ppt/slides/slide8.xml><?xml version="1.0" encoding="utf-8"?>
-<p:sld xmlns:a="http://schemas.openxmlformats.org/drawingml/2006/main" xmlns:r="http://schemas.openxmlformats.org/officeDocument/2006/relationships" xmlns:p="http://schemas.openxmlformats.org/presentationml/2006/main">
-  <p:cSld>
-    <p:spTree>
-      <p:nvGrpSpPr>
-        <p:cNvPr id="1" name=""/>
-        <p:cNvGrpSpPr/>
-        <p:nvPr/>
-      </p:nvGrpSpPr>
-      <p:grpSpPr>
-        <a:xfrm>
-          <a:off x="0" y="0"/>
-          <a:ext cx="0" cy="0"/>
-          <a:chOff x="0" y="0"/>
-          <a:chExt cx="0" cy="0"/>
-        </a:xfrm>
-      </p:grpSpPr>
-      <p:sp>
-        <p:nvSpPr>
-          <p:cNvPr id="2" name="Title 1"/>
-          <p:cNvSpPr>
-            <a:spLocks noGrp="1"/>
-          </p:cNvSpPr>
-          <p:nvPr>
-            <p:ph type="title"/>
-          </p:nvPr>
-        </p:nvSpPr>
-        <p:spPr>
-          <a:xfrm>
-            <a:off x="722313" y="3305176"/>
-            <a:ext cx="7772400" cy="1021556"/>
-          </a:xfrm>
-        </p:spPr>
-        <p:txBody>
-          <a:bodyPr/>
-          <a:lstStyle/>
-          <a:p>
-            <a:pPr lvl="0" indent="0" marL="0">
-              <a:buNone/>
-            </a:pPr>
-            <a:r>
-              <a:rPr/>
-              <a:t>The causal roadmap and where the package sits</a:t>
-            </a:r>
-          </a:p>
-        </p:txBody>
-      </p:sp>
     </p:spTree>
   </p:cSld>
 </p:sld>
@@ -7729,7 +7779,12 @@
             <p:ph type="title"/>
           </p:nvPr>
         </p:nvSpPr>
-        <p:spPr/>
+        <p:spPr>
+          <a:xfrm>
+            <a:off x="722313" y="3305176"/>
+            <a:ext cx="7772400" cy="1021556"/>
+          </a:xfrm>
+        </p:spPr>
         <p:txBody>
           <a:bodyPr/>
           <a:lstStyle/>
@@ -7739,115 +7794,7 @@
             </a:pPr>
             <a:r>
               <a:rPr/>
-              <a:t>Six logically ordered activities</a:t>
-            </a:r>
-          </a:p>
-        </p:txBody>
-      </p:sp>
-      <p:sp>
-        <p:nvSpPr>
-          <p:cNvPr id="3" name="Content Placeholder 2"/>
-          <p:cNvSpPr>
-            <a:spLocks noGrp="1"/>
-          </p:cNvSpPr>
-          <p:nvPr>
-            <p:ph idx="1"/>
-          </p:nvPr>
-        </p:nvSpPr>
-        <p:spPr/>
-        <p:txBody>
-          <a:bodyPr/>
-          <a:lstStyle/>
-          <a:p>
-            <a:pPr lvl="0" indent="-342900" marL="342900">
-              <a:buAutoNum type="arabicPeriod"/>
-            </a:pPr>
-            <a:r>
-              <a:rPr/>
-              <a:t>Causal question and target trial</a:t>
-            </a:r>
-          </a:p>
-          <a:p>
-            <a:pPr lvl="0" indent="-342900" marL="342900">
-              <a:buAutoNum type="arabicPeriod"/>
-            </a:pPr>
-            <a:r>
-              <a:rPr/>
-              <a:t>Observed data and source characterisation</a:t>
-            </a:r>
-          </a:p>
-          <a:p>
-            <a:pPr lvl="0" indent="-342900" marL="342900">
-              <a:buAutoNum type="arabicPeriod"/>
-            </a:pPr>
-            <a:r>
-              <a:rPr/>
-              <a:t>Identification assumptions</a:t>
-            </a:r>
-          </a:p>
-          <a:p>
-            <a:pPr lvl="0" indent="-342900" marL="342900">
-              <a:buAutoNum type="arabicPeriod"/>
-            </a:pPr>
-            <a:r>
-              <a:rPr/>
-              <a:t>Statistical estimand</a:t>
-            </a:r>
-          </a:p>
-          <a:p>
-            <a:pPr lvl="0" indent="-342900" marL="342900">
-              <a:buAutoNum type="arabicPeriod"/>
-            </a:pPr>
-            <a:r>
-              <a:rPr b="1"/>
-              <a:t>Estimator selection (locked)</a:t>
-            </a:r>
-          </a:p>
-          <a:p>
-            <a:pPr lvl="0" indent="-342900" marL="342900">
-              <a:buAutoNum type="arabicPeriod"/>
-            </a:pPr>
-            <a:r>
-              <a:rPr b="1"/>
-              <a:t>Pre-outcome diagnostics and decision</a:t>
-            </a:r>
-            <a:r>
-              <a:rPr/>
-              <a:t> → interpretation and post-outcome sensitivity</a:t>
-            </a:r>
-          </a:p>
-          <a:p>
-            <a:pPr lvl="0" indent="0" marL="0">
-              <a:buNone/>
-            </a:pPr>
-            <a:r>
-              <a:rPr/>
-              <a:t>cleanTMLE operates in steps </a:t>
-            </a:r>
-            <a:r>
-              <a:rPr b="1"/>
-              <a:t>5</a:t>
-            </a:r>
-            <a:r>
-              <a:rPr/>
-              <a:t> and the pre-outcome portion of </a:t>
-            </a:r>
-            <a:r>
-              <a:rPr b="1"/>
-              <a:t>6</a:t>
-            </a:r>
-            <a:r>
-              <a:rPr/>
-              <a:t>.</a:t>
-            </a:r>
-          </a:p>
-          <a:p>
-            <a:pPr lvl="0" indent="0" marL="0">
-              <a:buNone/>
-            </a:pPr>
-            <a:r>
-              <a:rPr/>
-              <a:t>Steps 1–4 remain external study-level work, supported by target-trial templates and fit-for-purpose checklists.</a:t>
+              <a:t>Outcome-blind staged workflow</a:t>
             </a:r>
           </a:p>
         </p:txBody>

--- a/reports/cleanTMLE_presentation.pptx
+++ b/reports/cleanTMLE_presentation.pptx
@@ -44,6 +44,12 @@
     <p:sldId id="292" r:id="rId38"/>
     <p:sldId id="293" r:id="rId39"/>
     <p:sldId id="294" r:id="rId40"/>
+    <p:sldId id="295" r:id="rId41"/>
+    <p:sldId id="296" r:id="rId42"/>
+    <p:sldId id="297" r:id="rId43"/>
+    <p:sldId id="298" r:id="rId44"/>
+    <p:sldId id="299" r:id="rId45"/>
+    <p:sldId id="300" r:id="rId46"/>
   </p:sldIdLst>
   <p:sldSz cx="9144000" cy="5143500" type="screen16x9"/>
   <p:notesSz cx="6858000" cy="9144000"/>
@@ -3261,7 +3267,7 @@
             </a:pPr>
             <a:r>
               <a:rPr/>
-              <a:t>Where the package sits</a:t>
+              <a:t>Why plasmode simulation?</a:t>
             </a:r>
           </a:p>
         </p:txBody>
@@ -3284,54 +3290,48 @@
             <a:pPr lvl="0"/>
             <a:r>
               <a:rPr/>
-              <a:t>The </a:t>
+              <a:t>PS diagnostics evaluate </a:t>
             </a:r>
             <a:r>
               <a:rPr b="1"/>
-              <a:t>causal roadmap</a:t>
-            </a:r>
-            <a:r>
-              <a:rPr/>
-              <a:t> (Petersen 2014; Dang 2023) has six logically ordered activities: question, observed data, identification, estimand, estimator selection, pre-outcome diagnostics + decision.</a:t>
-            </a:r>
-          </a:p>
-          <a:p>
-            <a:pPr lvl="0"/>
-            <a:r>
-              <a:rPr/>
-              <a:t>cleanTMLE operates in </a:t>
+              <a:t>design feasibility</a:t>
+            </a:r>
+            <a:r>
+              <a:rPr/>
+              <a:t> (overlap, balance, ESS, SMDs), not estimator operating characteristics</a:t>
+            </a:r>
+          </a:p>
+          <a:p>
+            <a:pPr lvl="0"/>
+            <a:r>
+              <a:rPr/>
+              <a:t>Plasmode simulation uses the </a:t>
             </a:r>
             <a:r>
               <a:rPr b="1"/>
-              <a:t>estimator selection</a:t>
-            </a:r>
-            <a:r>
-              <a:rPr/>
-              <a:t> and </a:t>
-            </a:r>
+              <a:t>empirical (W, A) structure</a:t>
+            </a:r>
+            <a:r>
+              <a:rPr/>
+              <a:t> with a synthetic Y to compare candidate estimators on bias, RMSE, and coverage</a:t>
+            </a:r>
+          </a:p>
+          <a:p>
+            <a:pPr lvl="0"/>
+            <a:r>
+              <a:rPr/>
+              <a:t>Done before primary outcome access, it supports candidate selection without inspecting the observed A→Y association</a:t>
+            </a:r>
+          </a:p>
+          <a:p>
+            <a:pPr lvl="0"/>
             <a:r>
               <a:rPr b="1"/>
-              <a:t>pre-outcome diagnostics + decision</a:t>
-            </a:r>
-            <a:r>
-              <a:rPr/>
-              <a:t>.</a:t>
-            </a:r>
-          </a:p>
-          <a:p>
-            <a:pPr lvl="0"/>
-            <a:r>
-              <a:rPr/>
-              <a:t>Steps 1 to 4 remain external study-level work.</a:t>
-            </a:r>
-          </a:p>
-          <a:p>
-            <a:pPr lvl="0" indent="0" marL="0">
-              <a:buNone/>
-            </a:pPr>
-            <a:r>
-              <a:rPr/>
-              <a:t>cleanTMLE is the software layer of the broader Muntner-style clean-room governance, not the full governance system.</a:t>
+              <a:t>Caveat:</a:t>
+            </a:r>
+            <a:r>
+              <a:rPr/>
+              <a:t> rankings under synthetic outcomes are not guaranteed to generalize to the realized outcome process — the synthetic-outcome mechanism is itself an assumption</a:t>
             </a:r>
           </a:p>
         </p:txBody>
@@ -3378,7 +3378,7 @@
             </a:pPr>
             <a:r>
               <a:rPr/>
-              <a:t>Stages</a:t>
+              <a:t>Why DQ stress testing?</a:t>
             </a:r>
           </a:p>
         </p:txBody>
@@ -3400,78 +3400,45 @@
           <a:p>
             <a:pPr lvl="0"/>
             <a:r>
+              <a:rPr/>
+              <a:t>Baseline plasmode answers: </a:t>
+            </a:r>
+            <a:r>
+              <a:rPr i="1"/>
+              <a:t>which candidate is best under the locked synthetic outcome model?</a:t>
+            </a:r>
+          </a:p>
+          <a:p>
+            <a:pPr lvl="0"/>
+            <a:r>
+              <a:rPr/>
+              <a:t>DQ stress testing answers: </a:t>
+            </a:r>
+            <a:r>
+              <a:rPr i="1"/>
+              <a:t>does that candidate remain acceptable under prespecified threats from the fit-for-purpose review?</a:t>
+            </a:r>
+          </a:p>
+          <a:p>
+            <a:pPr lvl="0"/>
+            <a:r>
+              <a:rPr/>
+              <a:t>The same bias / RMSE / coverage scale is used, so the prespecified GO / FLAG / STOP rule applies uniformly</a:t>
+            </a:r>
+          </a:p>
+          <a:p>
+            <a:pPr lvl="0"/>
+            <a:r>
+              <a:rPr/>
+              <a:t>It is a </a:t>
+            </a:r>
+            <a:r>
               <a:rPr b="1"/>
-              <a:t>Stage 1</a:t>
-            </a:r>
-            <a:r>
-              <a:rPr/>
-              <a:t> — estimand metadata and analysis lock</a:t>
-            </a:r>
-          </a:p>
-          <a:p>
-            <a:pPr lvl="0"/>
-            <a:r>
-              <a:rPr b="1"/>
-              <a:t>Stage 2a</a:t>
-            </a:r>
-            <a:r>
-              <a:rPr/>
-              <a:t> — PS / design diagnostics: overlap, balance, ESS, SMDs</a:t>
-            </a:r>
-          </a:p>
-          <a:p>
-            <a:pPr lvl="0"/>
-            <a:r>
-              <a:rPr b="1"/>
-              <a:t>Stage 2b</a:t>
-            </a:r>
-            <a:r>
-              <a:rPr/>
-              <a:t> — baseline plasmode candidate selection</a:t>
-            </a:r>
-          </a:p>
-          <a:p>
-            <a:pPr lvl="0"/>
-            <a:r>
-              <a:rPr b="1"/>
-              <a:t>Stage 2c</a:t>
-            </a:r>
-            <a:r>
-              <a:rPr/>
-              <a:t> — plasmode DQ stress test</a:t>
-            </a:r>
-          </a:p>
-          <a:p>
-            <a:pPr lvl="0"/>
-            <a:r>
-              <a:rPr b="1"/>
-              <a:t>Pre-outcome decision</a:t>
-            </a:r>
-            <a:r>
-              <a:rPr/>
-              <a:t> — GO / FLAG / STOP from the prespecified rule</a:t>
-            </a:r>
-          </a:p>
-          <a:p>
-            <a:pPr lvl="0"/>
-            <a:r>
-              <a:rPr b="1"/>
-              <a:t>Stage 4</a:t>
-            </a:r>
-            <a:r>
-              <a:rPr/>
-              <a:t> — locked primary analysis</a:t>
-            </a:r>
-          </a:p>
-          <a:p>
-            <a:pPr lvl="0"/>
-            <a:r>
-              <a:rPr b="1"/>
-              <a:t>Post-outcome</a:t>
-            </a:r>
-            <a:r>
-              <a:rPr/>
-              <a:t> — sensitivity (E-value, QBA, causal-gap), interpretation</a:t>
+              <a:t>quantitative checkpoint</a:t>
+            </a:r>
+            <a:r>
+              <a:rPr/>
+              <a:t> in a staging-and-clean-room framework, not a substitute for source-data validation, phenotype validation, or post-outcome QBA</a:t>
             </a:r>
           </a:p>
         </p:txBody>
@@ -3518,7 +3485,7 @@
             </a:pPr>
             <a:r>
               <a:rPr/>
-              <a:t>What cleanTMLE records as code artefacts</a:t>
+              <a:t>Why not just PS diagnostics and negative controls?</a:t>
             </a:r>
           </a:p>
         </p:txBody>
@@ -3540,100 +3507,41 @@
           <a:p>
             <a:pPr lvl="0"/>
             <a:r>
-              <a:rPr/>
-              <a:t>Fingerprinted </a:t>
-            </a:r>
-            <a:r>
               <a:rPr b="1"/>
-              <a:t>analysis-lock object</a:t>
-            </a:r>
-            <a:r>
-              <a:rPr/>
-              <a:t> (sha256 over the lock specification)</a:t>
-            </a:r>
-          </a:p>
-          <a:p>
-            <a:pPr lvl="0"/>
-            <a:r>
-              <a:rPr/>
-              <a:t>Serialisable </a:t>
-            </a:r>
+              <a:t>PS diagnostics</a:t>
+            </a:r>
+            <a:r>
+              <a:rPr/>
+              <a:t> assess overlap, balance, and weight stability — design feasibility, not estimator behaviour</a:t>
+            </a:r>
+          </a:p>
+          <a:p>
+            <a:pPr lvl="0"/>
             <a:r>
               <a:rPr b="1"/>
-              <a:t>audit trail</a:t>
-            </a:r>
-            <a:r>
-              <a:rPr/>
-              <a:t> and </a:t>
-            </a:r>
+              <a:t>Negative controls</a:t>
+            </a:r>
+            <a:r>
+              <a:rPr/>
+              <a:t> can flag residual bias for selected control outcomes, but do not stress-test the primary estimator under prespecified threats</a:t>
+            </a:r>
+          </a:p>
+          <a:p>
+            <a:pPr lvl="0"/>
             <a:r>
               <a:rPr b="1"/>
-              <a:t>decision log</a:t>
-            </a:r>
-          </a:p>
-          <a:p>
-            <a:pPr lvl="0"/>
-            <a:r>
-              <a:rPr/>
-              <a:t>Modular </a:t>
-            </a:r>
-            <a:r>
-              <a:rPr b="1"/>
-              <a:t>TMLE API</a:t>
-            </a:r>
-            <a:r>
-              <a:rPr/>
-              <a:t>: treatment fit, outcome fit, targeting, extract</a:t>
-            </a:r>
-          </a:p>
-          <a:p>
-            <a:pPr lvl="0"/>
-            <a:r>
-              <a:rPr/>
-              <a:t>Outcome-blind </a:t>
-            </a:r>
-            <a:r>
-              <a:rPr b="1"/>
-              <a:t>plasmode candidate selector</a:t>
-            </a:r>
-          </a:p>
-          <a:p>
-            <a:pPr lvl="0"/>
-            <a:r>
-              <a:rPr b="1"/>
-              <a:t>DQ stress test</a:t>
-            </a:r>
-            <a:r>
-              <a:rPr/>
-              <a:t> (</a:t>
-            </a:r>
-            <a:r>
-              <a:rPr>
-                <a:latin typeface="Courier"/>
-              </a:rPr>
-              <a:t>run_plasmode_dq_stress()</a:t>
-            </a:r>
-            <a:r>
-              <a:rPr/>
-              <a:t>)</a:t>
-            </a:r>
-          </a:p>
-          <a:p>
-            <a:pPr lvl="0"/>
-            <a:r>
-              <a:rPr b="1"/>
-              <a:t>Pre-outcome decision rule</a:t>
-            </a:r>
-            <a:r>
-              <a:rPr/>
-              <a:t> producing GO / FLAG / STOP</a:t>
-            </a:r>
-          </a:p>
-          <a:p>
-            <a:pPr lvl="0"/>
-            <a:r>
-              <a:rPr/>
-              <a:t>Internal outcome-access checks on Stage 4 estimators until authorised</a:t>
+              <a:t>DQ stress testing</a:t>
+            </a:r>
+            <a:r>
+              <a:rPr/>
+              <a:t> evaluates whether the locked estimator-selection decision is stable under fit-for-purpose threats translated into quantitative perturbations before the primary A→Y association is inspected</a:t>
+            </a:r>
+          </a:p>
+          <a:p>
+            <a:pPr lvl="0"/>
+            <a:r>
+              <a:rPr/>
+              <a:t>The three are complementary; the workflow uses all three</a:t>
             </a:r>
           </a:p>
         </p:txBody>
@@ -3670,7 +3578,12 @@
             <p:ph type="title"/>
           </p:nvPr>
         </p:nvSpPr>
-        <p:spPr/>
+        <p:spPr>
+          <a:xfrm>
+            <a:off x="722313" y="3305176"/>
+            <a:ext cx="7772400" cy="1021556"/>
+          </a:xfrm>
+        </p:spPr>
         <p:txBody>
           <a:bodyPr/>
           <a:lstStyle/>
@@ -3680,66 +3593,7 @@
             </a:pPr>
             <a:r>
               <a:rPr/>
-              <a:t>What cleanTMLE does </a:t>
-            </a:r>
-            <a:r>
-              <a:rPr i="1"/>
-              <a:t>not</a:t>
-            </a:r>
-            <a:r>
-              <a:rPr/>
-              <a:t> do</a:t>
-            </a:r>
-          </a:p>
-        </p:txBody>
-      </p:sp>
-      <p:sp>
-        <p:nvSpPr>
-          <p:cNvPr id="3" name="Content Placeholder 2"/>
-          <p:cNvSpPr>
-            <a:spLocks noGrp="1"/>
-          </p:cNvSpPr>
-          <p:nvPr>
-            <p:ph idx="1"/>
-          </p:nvPr>
-        </p:nvSpPr>
-        <p:spPr/>
-        <p:txBody>
-          <a:bodyPr/>
-          <a:lstStyle/>
-          <a:p>
-            <a:pPr lvl="0"/>
-            <a:r>
-              <a:rPr/>
-              <a:t>Automate target-trial design or phenotype validation</a:t>
-            </a:r>
-          </a:p>
-          <a:p>
-            <a:pPr lvl="0"/>
-            <a:r>
-              <a:rPr/>
-              <a:t>Validate source data, linkage, or representativeness</a:t>
-            </a:r>
-          </a:p>
-          <a:p>
-            <a:pPr lvl="0"/>
-            <a:r>
-              <a:rPr/>
-              <a:t>Replace clean-room personnel governance, role separation, or access controls</a:t>
-            </a:r>
-          </a:p>
-          <a:p>
-            <a:pPr lvl="0"/>
-            <a:r>
-              <a:rPr/>
-              <a:t>Guarantee causal identification — a GO only says the prespecified diagnostics did not trigger STOP under the locked assumptions and stress scenarios</a:t>
-            </a:r>
-          </a:p>
-          <a:p>
-            <a:pPr lvl="0"/>
-            <a:r>
-              <a:rPr/>
-              <a:t>Remove the need for post-outcome sensitivity analyses (E-value, QBA, causal-gap)</a:t>
+              <a:t>Outcome-blind staged workflow</a:t>
             </a:r>
           </a:p>
         </p:txBody>
@@ -3776,12 +3630,7 @@
             <p:ph type="title"/>
           </p:nvPr>
         </p:nvSpPr>
-        <p:spPr>
-          <a:xfrm>
-            <a:off x="722313" y="3305176"/>
-            <a:ext cx="7772400" cy="1021556"/>
-          </a:xfrm>
-        </p:spPr>
+        <p:spPr/>
         <p:txBody>
           <a:bodyPr/>
           <a:lstStyle/>
@@ -3791,7 +3640,71 @@
             </a:pPr>
             <a:r>
               <a:rPr/>
-              <a:t>The DQ stress test</a:t>
+              <a:t>Where the package sits</a:t>
+            </a:r>
+          </a:p>
+        </p:txBody>
+      </p:sp>
+      <p:sp>
+        <p:nvSpPr>
+          <p:cNvPr id="3" name="Content Placeholder 2"/>
+          <p:cNvSpPr>
+            <a:spLocks noGrp="1"/>
+          </p:cNvSpPr>
+          <p:nvPr>
+            <p:ph idx="1"/>
+          </p:nvPr>
+        </p:nvSpPr>
+        <p:spPr/>
+        <p:txBody>
+          <a:bodyPr/>
+          <a:lstStyle/>
+          <a:p>
+            <a:pPr lvl="0"/>
+            <a:r>
+              <a:rPr/>
+              <a:t>The </a:t>
+            </a:r>
+            <a:r>
+              <a:rPr b="1"/>
+              <a:t>causal roadmap</a:t>
+            </a:r>
+            <a:r>
+              <a:rPr/>
+              <a:t> (Petersen 2014; Dang 2023): question → observed data → identification → estimand → estimator selection → pre-outcome decision → primary analysis → sensitivity</a:t>
+            </a:r>
+          </a:p>
+          <a:p>
+            <a:pPr lvl="0"/>
+            <a:r>
+              <a:rPr/>
+              <a:t>cleanTMLE operates in </a:t>
+            </a:r>
+            <a:r>
+              <a:rPr b="1"/>
+              <a:t>estimator selection</a:t>
+            </a:r>
+            <a:r>
+              <a:rPr/>
+              <a:t> and the </a:t>
+            </a:r>
+            <a:r>
+              <a:rPr b="1"/>
+              <a:t>pre-outcome decision</a:t>
+            </a:r>
+          </a:p>
+          <a:p>
+            <a:pPr lvl="0"/>
+            <a:r>
+              <a:rPr/>
+              <a:t>Steps before that remain external study-level work</a:t>
+            </a:r>
+          </a:p>
+          <a:p>
+            <a:pPr lvl="0"/>
+            <a:r>
+              <a:rPr/>
+              <a:t>cleanTMLE records, checks, and audits the software workflow; personnel-based access control is external</a:t>
             </a:r>
           </a:p>
         </p:txBody>
@@ -3801,7 +3714,166 @@
 </p:sld>
 </file>
 
-<file path=ppt/slides/slide15.xml><?xml version="1.0" encoding="UTF-8"?><p:sld xmlns:a="http://schemas.openxmlformats.org/drawingml/2006/main" xmlns:r="http://schemas.openxmlformats.org/officeDocument/2006/relationships" xmlns:p="http://schemas.openxmlformats.org/presentationml/2006/main"><p:cSld><p:spTree><p:nvGrpSpPr><p:cNvPr id="1" name="" /><p:cNvGrpSpPr /><p:nvPr /></p:nvGrpSpPr><p:grpSpPr><a:xfrm><a:off x="0" y="0" /><a:ext cx="0" cy="0" /><a:chOff x="0" y="0" /><a:chExt cx="0" cy="0" /></a:xfrm></p:grpSpPr><p:sp><p:nvSpPr><p:cNvPr id="2" name="Title 1" /><p:cNvSpPr><a:spLocks noGrp="1" /></p:cNvSpPr><p:nvPr><p:ph type="title" /></p:nvPr></p:nvSpPr><p:spPr /><p:txBody><a:bodyPr /><a:lstStyle /><a:p><a:pPr lvl="0" indent="0" marL="0"><a:buNone /></a:pPr><a:r><a:rPr /><a:t>Four prespecified threats</a:t></a:r></a:p></p:txBody></p:sp><p:graphicFrame><p:nvGraphicFramePr><p:cNvPr id="6" name="Content Placeholder 5" /><p:cNvGraphicFramePr><a:graphicFrameLocks noGrp="1" /></p:cNvGraphicFramePr><p:nvPr><p:ph idx="1" /></p:nvPr></p:nvGraphicFramePr><p:xfrm><a:off x="457200" y="1193800" /><a:ext cx="8229600" cy="3390900" /></p:xfrm><a:graphic><a:graphicData uri="http://schemas.openxmlformats.org/drawingml/2006/table"><a:tbl><a:tblPr firstRow="1" bandRow="1"><a:tableStyleId>{5C22544A-7EE6-4342-B048-85BDC9FD1C3A}</a:tableStyleId></a:tblPr><a:tblGrid><a:gridCol w="2438400" /><a:gridCol w="3581400" /><a:gridCol w="2197100" /></a:tblGrid><a:tr h="0"><a:tc><a:txBody><a:bodyPr /><a:lstStyle /><a:p><a:pPr lvl="0" indent="0" marL="0"><a:buNone /></a:pPr><a:r><a:rPr /><a:t>Threat</a:t></a:r></a:p></a:txBody><a:tcPr /></a:tc><a:tc><a:txBody><a:bodyPr /><a:lstStyle /><a:p><a:pPr lvl="0" indent="0" marL="0"><a:buNone /></a:pPr><a:r><a:rPr /><a:t>Mechanism</a:t></a:r></a:p></a:txBody><a:tcPr /></a:tc><a:tc><a:txBody><a:bodyPr /><a:lstStyle /><a:p><a:pPr lvl="0" indent="0" marL="0"><a:buNone /></a:pPr><a:r><a:rPr /><a:t>Severity parameters</a:t></a:r></a:p></a:txBody><a:tcPr /></a:tc></a:tr><a:tr h="0"><a:tc><a:txBody><a:bodyPr /><a:lstStyle /><a:p><a:pPr lvl="0" indent="0" marL="0"><a:buNone /></a:pPr><a:r><a:rPr /><a:t>Covariate missingness</a:t></a:r></a:p></a:txBody></a:tc><a:tc><a:txBody><a:bodyPr /><a:lstStyle /><a:p><a:pPr lvl="0" indent="0" marL="0"><a:buNone /></a:pPr><a:r><a:rPr /><a:t>MCAR on a covariate subset, median impute</a:t></a:r></a:p></a:txBody></a:tc><a:tc><a:txBody><a:bodyPr /><a:lstStyle /><a:p><a:pPr lvl="0" indent="0" marL="0"><a:buNone /></a:pPr><a:r><a:rPr /><a:t>proportion missing</a:t></a:r></a:p></a:txBody></a:tc></a:tr><a:tr h="0"><a:tc><a:txBody><a:bodyPr /><a:lstStyle /><a:p><a:pPr lvl="0" indent="0" marL="0"><a:buNone /></a:pPr><a:r><a:rPr /><a:t>Exposure misclassification</a:t></a:r></a:p></a:txBody></a:tc><a:tc><a:txBody><a:bodyPr /><a:lstStyle /><a:p><a:pPr lvl="0" indent="0" marL="0"><a:buNone /></a:pPr><a:r><a:rPr /><a:t>Flip A with given (sens, spec)</a:t></a:r></a:p></a:txBody></a:tc><a:tc><a:txBody><a:bodyPr /><a:lstStyle /><a:p><a:pPr lvl="0" indent="0" marL="0"><a:buNone /></a:pPr><a:r><a:rPr /><a:t>(sens, spec) pairs</a:t></a:r></a:p></a:txBody></a:tc></a:tr><a:tr h="0"><a:tc><a:txBody><a:bodyPr /><a:lstStyle /><a:p><a:pPr lvl="0" indent="0" marL="0"><a:buNone /></a:pPr><a:r><a:rPr /><a:t>Outcome misclassification</a:t></a:r></a:p></a:txBody></a:tc><a:tc><a:txBody><a:bodyPr /><a:lstStyle /><a:p><a:pPr lvl="0" indent="0" marL="0"><a:buNone /></a:pPr><a:r><a:rPr /><a:t>Flip Y with given (sens, spec), optional differential</a:t></a:r></a:p></a:txBody></a:tc><a:tc><a:txBody><a:bodyPr /><a:lstStyle /><a:p><a:pPr lvl="0" indent="0" marL="0"><a:buNone /></a:pPr><a:r><a:rPr /><a:t>(sens, spec) pairs</a:t></a:r></a:p></a:txBody></a:tc></a:tr><a:tr h="0"><a:tc><a:txBody><a:bodyPr /><a:lstStyle /><a:p><a:pPr lvl="0" indent="0" marL="0"><a:buNone /></a:pPr><a:r><a:rPr /><a:t>Unmeasured confounding</a:t></a:r></a:p></a:txBody></a:tc><a:tc><a:txBody><a:bodyPr /><a:lstStyle /><a:p><a:pPr lvl="0" indent="0" marL="0"><a:buNone /></a:pPr><a:r><a:rPr /><a:t>Latent U shifts both A and Y</a:t></a:r></a:p></a:txBody></a:tc><a:tc><a:txBody><a:bodyPr /><a:lstStyle /><a:p><a:pPr lvl="0" indent="0" marL="0"><a:buNone /></a:pPr><a14:m><m:oMath xmlns:m="http://schemas.openxmlformats.org/officeDocument/2006/math"><m:sSub><m:e><m:r><m:t>β</m:t></m:r></m:e><m:sub><m:r><m:t>U</m:t></m:r><m:r><m:t>A</m:t></m:r></m:sub></m:sSub></m:oMath></a14:m><a:r><a:rPr /><a:t>, </a:t></a:r><a14:m><m:oMath xmlns:m="http://schemas.openxmlformats.org/officeDocument/2006/math"><m:sSub><m:e><m:r><m:t>β</m:t></m:r></m:e><m:sub><m:r><m:t>U</m:t></m:r><m:r><m:t>Y</m:t></m:r></m:sub></m:sSub></m:oMath></a14:m></a:p></a:txBody></a:tc></a:tr></a:tbl></a:graphicData></a:graphic></p:graphicFrame></p:spTree></p:cSld></p:sld>
+<file path=ppt/slides/slide15.xml><?xml version="1.0" encoding="utf-8"?>
+<p:sld xmlns:a="http://schemas.openxmlformats.org/drawingml/2006/main" xmlns:r="http://schemas.openxmlformats.org/officeDocument/2006/relationships" xmlns:p="http://schemas.openxmlformats.org/presentationml/2006/main">
+  <p:cSld>
+    <p:spTree>
+      <p:nvGrpSpPr>
+        <p:cNvPr id="1" name=""/>
+        <p:cNvGrpSpPr/>
+        <p:nvPr/>
+      </p:nvGrpSpPr>
+      <p:grpSpPr>
+        <a:xfrm>
+          <a:off x="0" y="0"/>
+          <a:ext cx="0" cy="0"/>
+          <a:chOff x="0" y="0"/>
+          <a:chExt cx="0" cy="0"/>
+        </a:xfrm>
+      </p:grpSpPr>
+      <p:sp>
+        <p:nvSpPr>
+          <p:cNvPr id="2" name="Title 1"/>
+          <p:cNvSpPr>
+            <a:spLocks noGrp="1"/>
+          </p:cNvSpPr>
+          <p:nvPr>
+            <p:ph type="title"/>
+          </p:nvPr>
+        </p:nvSpPr>
+        <p:spPr/>
+        <p:txBody>
+          <a:bodyPr/>
+          <a:lstStyle/>
+          <a:p>
+            <a:pPr lvl="0" indent="0" marL="0">
+              <a:buNone/>
+            </a:pPr>
+            <a:r>
+              <a:rPr/>
+              <a:t>Stages</a:t>
+            </a:r>
+          </a:p>
+        </p:txBody>
+      </p:sp>
+      <p:sp>
+        <p:nvSpPr>
+          <p:cNvPr id="3" name="Content Placeholder 2"/>
+          <p:cNvSpPr>
+            <a:spLocks noGrp="1"/>
+          </p:cNvSpPr>
+          <p:nvPr>
+            <p:ph idx="1"/>
+          </p:nvPr>
+        </p:nvSpPr>
+        <p:spPr/>
+        <p:txBody>
+          <a:bodyPr/>
+          <a:lstStyle/>
+          <a:p>
+            <a:pPr lvl="0"/>
+            <a:r>
+              <a:rPr b="1"/>
+              <a:t>Stage 0</a:t>
+            </a:r>
+            <a:r>
+              <a:rPr/>
+              <a:t> — feasibility, target-trial specification, protocol / SAP drafting (external)</a:t>
+            </a:r>
+          </a:p>
+          <a:p>
+            <a:pPr lvl="0"/>
+            <a:r>
+              <a:rPr b="1"/>
+              <a:t>Stage 1a</a:t>
+            </a:r>
+            <a:r>
+              <a:rPr/>
+              <a:t> — lock estimand, covariates, learners, candidate grid, thresholds</a:t>
+            </a:r>
+          </a:p>
+          <a:p>
+            <a:pPr lvl="0"/>
+            <a:r>
+              <a:rPr b="1"/>
+              <a:t>Stage 1b</a:t>
+            </a:r>
+            <a:r>
+              <a:rPr/>
+              <a:t> — cohort adequacy and marginal event support</a:t>
+            </a:r>
+          </a:p>
+          <a:p>
+            <a:pPr lvl="0"/>
+            <a:r>
+              <a:rPr b="1"/>
+              <a:t>Stage 2a</a:t>
+            </a:r>
+            <a:r>
+              <a:rPr/>
+              <a:t> — PS, balance, overlap, ESS, design diagnostics</a:t>
+            </a:r>
+          </a:p>
+          <a:p>
+            <a:pPr lvl="0"/>
+            <a:r>
+              <a:rPr b="1"/>
+              <a:t>Stage 2b</a:t>
+            </a:r>
+            <a:r>
+              <a:rPr/>
+              <a:t> — baseline plasmode candidate selection</a:t>
+            </a:r>
+          </a:p>
+          <a:p>
+            <a:pPr lvl="0"/>
+            <a:r>
+              <a:rPr b="1"/>
+              <a:t>Stage 2c</a:t>
+            </a:r>
+            <a:r>
+              <a:rPr/>
+              <a:t> — DQ stress testing</a:t>
+            </a:r>
+          </a:p>
+          <a:p>
+            <a:pPr lvl="0"/>
+            <a:r>
+              <a:rPr b="1"/>
+              <a:t>Stage 3</a:t>
+            </a:r>
+            <a:r>
+              <a:rPr/>
+              <a:t> (optional) — negative-control outcome checks</a:t>
+            </a:r>
+          </a:p>
+          <a:p>
+            <a:pPr lvl="0"/>
+            <a:r>
+              <a:rPr b="1"/>
+              <a:t>Pre-outcome decision</a:t>
+            </a:r>
+            <a:r>
+              <a:rPr/>
+              <a:t> — GO / FLAG / STOP from the prespecified rule</a:t>
+            </a:r>
+          </a:p>
+          <a:p>
+            <a:pPr lvl="0"/>
+            <a:r>
+              <a:rPr b="1"/>
+              <a:t>Stage 4</a:t>
+            </a:r>
+            <a:r>
+              <a:rPr/>
+              <a:t> — authorized primary outcome analysis</a:t>
+            </a:r>
+          </a:p>
+        </p:txBody>
+      </p:sp>
+    </p:spTree>
+  </p:cSld>
+</p:sld>
 </file>
 
 <file path=ppt/slides/slide16.xml><?xml version="1.0" encoding="utf-8"?>
@@ -3823,6 +3895,31 @@
       </p:grpSpPr>
       <p:sp>
         <p:nvSpPr>
+          <p:cNvPr id="2" name="Title 1"/>
+          <p:cNvSpPr>
+            <a:spLocks noGrp="1"/>
+          </p:cNvSpPr>
+          <p:nvPr>
+            <p:ph type="title"/>
+          </p:nvPr>
+        </p:nvSpPr>
+        <p:spPr/>
+        <p:txBody>
+          <a:bodyPr/>
+          <a:lstStyle/>
+          <a:p>
+            <a:pPr lvl="0" indent="0" marL="0">
+              <a:buNone/>
+            </a:pPr>
+            <a:r>
+              <a:rPr/>
+              <a:t>What cleanTMLE records as code artefacts</a:t>
+            </a:r>
+          </a:p>
+        </p:txBody>
+      </p:sp>
+      <p:sp>
+        <p:nvSpPr>
           <p:cNvPr id="3" name="Content Placeholder 2"/>
           <p:cNvSpPr>
             <a:spLocks noGrp="1"/>
@@ -3836,12 +3933,102 @@
           <a:bodyPr/>
           <a:lstStyle/>
           <a:p>
-            <a:pPr lvl="0" indent="0" marL="0">
-              <a:buNone/>
-            </a:pPr>
-            <a:r>
-              <a:rPr/>
-              <a:t>Each cell reports the same triple as the baseline plasmode: bias, RMSE, coverage.</a:t>
+            <a:pPr lvl="0"/>
+            <a:r>
+              <a:rPr/>
+              <a:t>Fingerprinted </a:t>
+            </a:r>
+            <a:r>
+              <a:rPr b="1"/>
+              <a:t>analysis-lock object</a:t>
+            </a:r>
+            <a:r>
+              <a:rPr/>
+              <a:t> (sha256 over the lock specification)</a:t>
+            </a:r>
+          </a:p>
+          <a:p>
+            <a:pPr lvl="0"/>
+            <a:r>
+              <a:rPr/>
+              <a:t>Serialisable </a:t>
+            </a:r>
+            <a:r>
+              <a:rPr b="1"/>
+              <a:t>audit trail</a:t>
+            </a:r>
+            <a:r>
+              <a:rPr/>
+              <a:t> and </a:t>
+            </a:r>
+            <a:r>
+              <a:rPr b="1"/>
+              <a:t>decision log</a:t>
+            </a:r>
+          </a:p>
+          <a:p>
+            <a:pPr lvl="0"/>
+            <a:r>
+              <a:rPr/>
+              <a:t>Modular </a:t>
+            </a:r>
+            <a:r>
+              <a:rPr b="1"/>
+              <a:t>TMLE API</a:t>
+            </a:r>
+            <a:r>
+              <a:rPr/>
+              <a:t>: treatment fit, outcome fit, targeting, extract</a:t>
+            </a:r>
+          </a:p>
+          <a:p>
+            <a:pPr lvl="0"/>
+            <a:r>
+              <a:rPr/>
+              <a:t>Outcome-blind </a:t>
+            </a:r>
+            <a:r>
+              <a:rPr b="1"/>
+              <a:t>plasmode candidate selector</a:t>
+            </a:r>
+          </a:p>
+          <a:p>
+            <a:pPr lvl="0"/>
+            <a:r>
+              <a:rPr b="1"/>
+              <a:t>DQ stress test</a:t>
+            </a:r>
+            <a:r>
+              <a:rPr/>
+              <a:t> (</a:t>
+            </a:r>
+            <a:r>
+              <a:rPr>
+                <a:latin typeface="Courier"/>
+              </a:rPr>
+              <a:t>run_plasmode_dq_stress()</a:t>
+            </a:r>
+            <a:r>
+              <a:rPr/>
+              <a:t>)</a:t>
+            </a:r>
+          </a:p>
+          <a:p>
+            <a:pPr lvl="0"/>
+            <a:r>
+              <a:rPr b="1"/>
+              <a:t>Pre-outcome decision rule</a:t>
+            </a:r>
+            <a:r>
+              <a:rPr/>
+              <a:t> producing GO / FLAG / STOP</a:t>
+            </a:r>
+          </a:p>
+          <a:p>
+            <a:pPr lvl="0"/>
+            <a:r>
+              <a:rPr/>
+              <a:t>Internal outcome-access checks on Stage 4 estimators until authorised</a:t>
             </a:r>
           </a:p>
         </p:txBody>
@@ -3888,7 +4075,15 @@
             </a:pPr>
             <a:r>
               <a:rPr/>
-              <a:t>The information loop</a:t>
+              <a:t>What cleanTMLE does </a:t>
+            </a:r>
+            <a:r>
+              <a:rPr i="1"/>
+              <a:t>not</a:t>
+            </a:r>
+            <a:r>
+              <a:rPr/>
+              <a:t> do</a:t>
             </a:r>
           </a:p>
         </p:txBody>
@@ -3908,57 +4103,45 @@
           <a:bodyPr/>
           <a:lstStyle/>
           <a:p>
-            <a:pPr lvl="0" indent="-342900" marL="342900">
-              <a:buAutoNum type="arabicPeriod"/>
-            </a:pPr>
-            <a:r>
-              <a:rPr/>
-              <a:t>Fit-for-purpose review identifies plausible threats.</a:t>
-            </a:r>
-          </a:p>
-          <a:p>
-            <a:pPr lvl="0" indent="-342900" marL="342900">
-              <a:buAutoNum type="arabicPeriod"/>
-            </a:pPr>
-            <a:r>
-              <a:rPr/>
-              <a:t>Threats are translated into numerical severity ranges.</a:t>
-            </a:r>
-          </a:p>
-          <a:p>
-            <a:pPr lvl="0" indent="-342900" marL="342900">
-              <a:buAutoNum type="arabicPeriod"/>
-            </a:pPr>
-            <a:r>
-              <a:rPr/>
-              <a:t>The severity ranges are locked.</a:t>
-            </a:r>
-          </a:p>
-          <a:p>
-            <a:pPr lvl="0" indent="-342900" marL="342900">
-              <a:buAutoNum type="arabicPeriod"/>
-            </a:pPr>
-            <a:r>
-              <a:rPr/>
-              <a:t>Synthetic outcomes are generated and perturbed under each scenario.</a:t>
-            </a:r>
-          </a:p>
-          <a:p>
-            <a:pPr lvl="0" indent="-342900" marL="342900">
-              <a:buAutoNum type="arabicPeriod"/>
-            </a:pPr>
-            <a:r>
-              <a:rPr/>
-              <a:t>Candidate estimators are evaluated using the same metrics as the baseline plasmode.</a:t>
-            </a:r>
-          </a:p>
-          <a:p>
-            <a:pPr lvl="0" indent="-342900" marL="342900">
-              <a:buAutoNum type="arabicPeriod"/>
-            </a:pPr>
-            <a:r>
-              <a:rPr/>
-              <a:t>The pre-outcome decision rule applies the prespecified thresholds.</a:t>
+            <a:pPr lvl="0"/>
+            <a:r>
+              <a:rPr/>
+              <a:t>Does not automate target-trial design or phenotype validation</a:t>
+            </a:r>
+          </a:p>
+          <a:p>
+            <a:pPr lvl="0"/>
+            <a:r>
+              <a:rPr/>
+              <a:t>Does not validate source data, linkage, or representativeness</a:t>
+            </a:r>
+          </a:p>
+          <a:p>
+            <a:pPr lvl="0"/>
+            <a:r>
+              <a:rPr/>
+              <a:t>Does not guarantee exchangeability or positivity</a:t>
+            </a:r>
+          </a:p>
+          <a:p>
+            <a:pPr lvl="0"/>
+            <a:r>
+              <a:rPr/>
+              <a:t>Does not replace clean-room personnel governance, role separation, or access controls</a:t>
+            </a:r>
+          </a:p>
+          <a:p>
+            <a:pPr lvl="0"/>
+            <a:r>
+              <a:rPr/>
+              <a:t>Does not remove the need for post-outcome sensitivity analyses (E-value, QBA, causal-gap)</a:t>
+            </a:r>
+          </a:p>
+          <a:p>
+            <a:pPr lvl="0"/>
+            <a:r>
+              <a:rPr/>
+              <a:t>Does not guarantee that synthetic-outcome rankings generalize to the realized outcome process</a:t>
             </a:r>
           </a:p>
         </p:txBody>
@@ -4005,57 +4188,580 @@
             </a:pPr>
             <a:r>
               <a:rPr/>
-              <a:t>Where severity ranges come from</a:t>
-            </a:r>
-          </a:p>
-        </p:txBody>
-      </p:sp>
-      <p:sp>
-        <p:nvSpPr>
-          <p:cNvPr id="3" name="Content Placeholder 2"/>
-          <p:cNvSpPr>
-            <a:spLocks noGrp="1"/>
-          </p:cNvSpPr>
+              <a:t>Comparing four workflows</a:t>
+            </a:r>
+          </a:p>
+        </p:txBody>
+      </p:sp>
+      <p:graphicFrame>
+        <p:nvGraphicFramePr>
+          <p:cNvPr id="6" name="Content Placeholder 5"/>
+          <p:cNvGraphicFramePr>
+            <a:graphicFrameLocks noGrp="1"/>
+          </p:cNvGraphicFramePr>
           <p:nvPr>
             <p:ph idx="1"/>
           </p:nvPr>
-        </p:nvSpPr>
-        <p:spPr/>
-        <p:txBody>
-          <a:bodyPr/>
-          <a:lstStyle/>
-          <a:p>
-            <a:pPr lvl="0"/>
-            <a:r>
-              <a:rPr/>
-              <a:t>External validation studies (PPV, sensitivity from chart-review studies)</a:t>
-            </a:r>
-          </a:p>
-          <a:p>
-            <a:pPr lvl="0"/>
-            <a:r>
-              <a:rPr/>
-              <a:t>Source-specific data profiling</a:t>
-            </a:r>
-          </a:p>
-          <a:p>
-            <a:pPr lvl="0"/>
-            <a:r>
-              <a:rPr/>
-              <a:t>Expert elicitation, with the elicitor and rationale logged</a:t>
-            </a:r>
-          </a:p>
-          <a:p>
-            <a:pPr lvl="0" indent="0" marL="0">
-              <a:buNone/>
-            </a:pPr>
-            <a:r>
-              <a:rPr/>
-              <a:t>The package records the values in use as part of the lock fingerprint.</a:t>
-            </a:r>
-          </a:p>
-        </p:txBody>
-      </p:sp>
+        </p:nvGraphicFramePr>
+        <p:xfrm>
+          <a:off x="457200" y="1193800"/>
+          <a:ext cx="8229600" cy="3390900"/>
+        </p:xfrm>
+        <a:graphic>
+          <a:graphicData uri="http://schemas.openxmlformats.org/drawingml/2006/table">
+            <a:tbl>
+              <a:tblPr firstRow="1" bandRow="1">
+                <a:tableStyleId>{5C22544A-7EE6-4342-B048-85BDC9FD1C3A}</a:tableStyleId>
+              </a:tblPr>
+              <a:tblGrid>
+                <a:gridCol w="1968500"/>
+                <a:gridCol w="863600"/>
+                <a:gridCol w="1714500"/>
+                <a:gridCol w="1231900"/>
+                <a:gridCol w="2451100"/>
+              </a:tblGrid>
+              <a:tr h="0">
+                <a:tc>
+                  <a:txBody>
+                    <a:bodyPr/>
+                    <a:lstStyle/>
+                    <a:p>
+                      <a:endParaRPr/>
+                    </a:p>
+                  </a:txBody>
+                  <a:tcPr/>
+                </a:tc>
+                <a:tc>
+                  <a:txBody>
+                    <a:bodyPr/>
+                    <a:lstStyle/>
+                    <a:p>
+                      <a:pPr lvl="0" indent="0" marL="0" algn="ctr">
+                        <a:buNone/>
+                      </a:pPr>
+                      <a:r>
+                        <a:rPr/>
+                        <a:t>Standard RWE</a:t>
+                      </a:r>
+                    </a:p>
+                  </a:txBody>
+                  <a:tcPr/>
+                </a:tc>
+                <a:tc>
+                  <a:txBody>
+                    <a:bodyPr/>
+                    <a:lstStyle/>
+                    <a:p>
+                      <a:pPr lvl="0" indent="0" marL="0" algn="ctr">
+                        <a:buNone/>
+                      </a:pPr>
+                      <a:r>
+                        <a:rPr/>
+                        <a:t>Personnel-based clean room</a:t>
+                      </a:r>
+                    </a:p>
+                  </a:txBody>
+                  <a:tcPr/>
+                </a:tc>
+                <a:tc>
+                  <a:txBody>
+                    <a:bodyPr/>
+                    <a:lstStyle/>
+                    <a:p>
+                      <a:pPr lvl="0" indent="0" marL="0" algn="ctr">
+                        <a:buNone/>
+                      </a:pPr>
+                      <a:r>
+                        <a:rPr/>
+                        <a:t>cleanTMLE software</a:t>
+                      </a:r>
+                    </a:p>
+                  </a:txBody>
+                  <a:tcPr/>
+                </a:tc>
+                <a:tc>
+                  <a:txBody>
+                    <a:bodyPr/>
+                    <a:lstStyle/>
+                    <a:p>
+                      <a:pPr lvl="0" indent="0" marL="0" algn="ctr">
+                        <a:buNone/>
+                      </a:pPr>
+                      <a:r>
+                        <a:rPr/>
+                        <a:t>Hybrid (cleanTMLE inside a clean room)</a:t>
+                      </a:r>
+                    </a:p>
+                  </a:txBody>
+                  <a:tcPr/>
+                </a:tc>
+              </a:tr>
+              <a:tr h="0">
+                <a:tc>
+                  <a:txBody>
+                    <a:bodyPr/>
+                    <a:lstStyle/>
+                    <a:p>
+                      <a:pPr lvl="0" indent="0" marL="0">
+                        <a:buNone/>
+                      </a:pPr>
+                      <a:r>
+                        <a:rPr/>
+                        <a:t>Outcome-access control</a:t>
+                      </a:r>
+                    </a:p>
+                  </a:txBody>
+                </a:tc>
+                <a:tc>
+                  <a:txBody>
+                    <a:bodyPr/>
+                    <a:lstStyle/>
+                    <a:p>
+                      <a:pPr lvl="0" indent="0" marL="0" algn="ctr">
+                        <a:buNone/>
+                      </a:pPr>
+                      <a:r>
+                        <a:rPr/>
+                        <a:t>Weak</a:t>
+                      </a:r>
+                    </a:p>
+                  </a:txBody>
+                </a:tc>
+                <a:tc>
+                  <a:txBody>
+                    <a:bodyPr/>
+                    <a:lstStyle/>
+                    <a:p>
+                      <a:pPr lvl="0" indent="0" marL="0" algn="ctr">
+                        <a:buNone/>
+                      </a:pPr>
+                      <a:r>
+                        <a:rPr/>
+                        <a:t>Strong</a:t>
+                      </a:r>
+                    </a:p>
+                  </a:txBody>
+                </a:tc>
+                <a:tc>
+                  <a:txBody>
+                    <a:bodyPr/>
+                    <a:lstStyle/>
+                    <a:p>
+                      <a:pPr lvl="0" indent="0" marL="0" algn="ctr">
+                        <a:buNone/>
+                      </a:pPr>
+                      <a:r>
+                        <a:rPr/>
+                        <a:t>Internal only</a:t>
+                      </a:r>
+                    </a:p>
+                  </a:txBody>
+                </a:tc>
+                <a:tc>
+                  <a:txBody>
+                    <a:bodyPr/>
+                    <a:lstStyle/>
+                    <a:p>
+                      <a:pPr lvl="0" indent="0" marL="0" algn="ctr">
+                        <a:buNone/>
+                      </a:pPr>
+                      <a:r>
+                        <a:rPr/>
+                        <a:t>Strong</a:t>
+                      </a:r>
+                    </a:p>
+                  </a:txBody>
+                </a:tc>
+              </a:tr>
+              <a:tr h="0">
+                <a:tc>
+                  <a:txBody>
+                    <a:bodyPr/>
+                    <a:lstStyle/>
+                    <a:p>
+                      <a:pPr lvl="0" indent="0" marL="0">
+                        <a:buNone/>
+                      </a:pPr>
+                      <a:r>
+                        <a:rPr/>
+                        <a:t>Estimator-selection flexibility</a:t>
+                      </a:r>
+                    </a:p>
+                  </a:txBody>
+                </a:tc>
+                <a:tc>
+                  <a:txBody>
+                    <a:bodyPr/>
+                    <a:lstStyle/>
+                    <a:p>
+                      <a:pPr lvl="0" indent="0" marL="0" algn="ctr">
+                        <a:buNone/>
+                      </a:pPr>
+                      <a:r>
+                        <a:rPr/>
+                        <a:t>High</a:t>
+                      </a:r>
+                    </a:p>
+                  </a:txBody>
+                </a:tc>
+                <a:tc>
+                  <a:txBody>
+                    <a:bodyPr/>
+                    <a:lstStyle/>
+                    <a:p>
+                      <a:pPr lvl="0" indent="0" marL="0" algn="ctr">
+                        <a:buNone/>
+                      </a:pPr>
+                      <a:r>
+                        <a:rPr/>
+                        <a:t>Moderate</a:t>
+                      </a:r>
+                    </a:p>
+                  </a:txBody>
+                </a:tc>
+                <a:tc>
+                  <a:txBody>
+                    <a:bodyPr/>
+                    <a:lstStyle/>
+                    <a:p>
+                      <a:pPr lvl="0" indent="0" marL="0" algn="ctr">
+                        <a:buNone/>
+                      </a:pPr>
+                      <a:r>
+                        <a:rPr/>
+                        <a:t>High</a:t>
+                      </a:r>
+                    </a:p>
+                  </a:txBody>
+                </a:tc>
+                <a:tc>
+                  <a:txBody>
+                    <a:bodyPr/>
+                    <a:lstStyle/>
+                    <a:p>
+                      <a:pPr lvl="0" indent="0" marL="0" algn="ctr">
+                        <a:buNone/>
+                      </a:pPr>
+                      <a:r>
+                        <a:rPr/>
+                        <a:t>Moderate</a:t>
+                      </a:r>
+                    </a:p>
+                  </a:txBody>
+                </a:tc>
+              </a:tr>
+              <a:tr h="0">
+                <a:tc>
+                  <a:txBody>
+                    <a:bodyPr/>
+                    <a:lstStyle/>
+                    <a:p>
+                      <a:pPr lvl="0" indent="0" marL="0">
+                        <a:buNone/>
+                      </a:pPr>
+                      <a:r>
+                        <a:rPr/>
+                        <a:t>Auditability</a:t>
+                      </a:r>
+                    </a:p>
+                  </a:txBody>
+                </a:tc>
+                <a:tc>
+                  <a:txBody>
+                    <a:bodyPr/>
+                    <a:lstStyle/>
+                    <a:p>
+                      <a:pPr lvl="0" indent="0" marL="0" algn="ctr">
+                        <a:buNone/>
+                      </a:pPr>
+                      <a:r>
+                        <a:rPr/>
+                        <a:t>Low</a:t>
+                      </a:r>
+                    </a:p>
+                  </a:txBody>
+                </a:tc>
+                <a:tc>
+                  <a:txBody>
+                    <a:bodyPr/>
+                    <a:lstStyle/>
+                    <a:p>
+                      <a:pPr lvl="0" indent="0" marL="0" algn="ctr">
+                        <a:buNone/>
+                      </a:pPr>
+                      <a:r>
+                        <a:rPr/>
+                        <a:t>Moderate</a:t>
+                      </a:r>
+                    </a:p>
+                  </a:txBody>
+                </a:tc>
+                <a:tc>
+                  <a:txBody>
+                    <a:bodyPr/>
+                    <a:lstStyle/>
+                    <a:p>
+                      <a:pPr lvl="0" indent="0" marL="0" algn="ctr">
+                        <a:buNone/>
+                      </a:pPr>
+                      <a:r>
+                        <a:rPr/>
+                        <a:t>High</a:t>
+                      </a:r>
+                    </a:p>
+                  </a:txBody>
+                </a:tc>
+                <a:tc>
+                  <a:txBody>
+                    <a:bodyPr/>
+                    <a:lstStyle/>
+                    <a:p>
+                      <a:pPr lvl="0" indent="0" marL="0" algn="ctr">
+                        <a:buNone/>
+                      </a:pPr>
+                      <a:r>
+                        <a:rPr/>
+                        <a:t>High</a:t>
+                      </a:r>
+                    </a:p>
+                  </a:txBody>
+                </a:tc>
+              </a:tr>
+              <a:tr h="0">
+                <a:tc>
+                  <a:txBody>
+                    <a:bodyPr/>
+                    <a:lstStyle/>
+                    <a:p>
+                      <a:pPr lvl="0" indent="0" marL="0">
+                        <a:buNone/>
+                      </a:pPr>
+                      <a:r>
+                        <a:rPr/>
+                        <a:t>DQ robustness quantification</a:t>
+                      </a:r>
+                    </a:p>
+                  </a:txBody>
+                </a:tc>
+                <a:tc>
+                  <a:txBody>
+                    <a:bodyPr/>
+                    <a:lstStyle/>
+                    <a:p>
+                      <a:pPr lvl="0" indent="0" marL="0" algn="ctr">
+                        <a:buNone/>
+                      </a:pPr>
+                      <a:r>
+                        <a:rPr/>
+                        <a:t>No</a:t>
+                      </a:r>
+                    </a:p>
+                  </a:txBody>
+                </a:tc>
+                <a:tc>
+                  <a:txBody>
+                    <a:bodyPr/>
+                    <a:lstStyle/>
+                    <a:p>
+                      <a:pPr lvl="0" indent="0" marL="0" algn="ctr">
+                        <a:buNone/>
+                      </a:pPr>
+                      <a:r>
+                        <a:rPr/>
+                        <a:t>No</a:t>
+                      </a:r>
+                    </a:p>
+                  </a:txBody>
+                </a:tc>
+                <a:tc>
+                  <a:txBody>
+                    <a:bodyPr/>
+                    <a:lstStyle/>
+                    <a:p>
+                      <a:pPr lvl="0" indent="0" marL="0" algn="ctr">
+                        <a:buNone/>
+                      </a:pPr>
+                      <a:r>
+                        <a:rPr/>
+                        <a:t>Yes</a:t>
+                      </a:r>
+                    </a:p>
+                  </a:txBody>
+                </a:tc>
+                <a:tc>
+                  <a:txBody>
+                    <a:bodyPr/>
+                    <a:lstStyle/>
+                    <a:p>
+                      <a:pPr lvl="0" indent="0" marL="0" algn="ctr">
+                        <a:buNone/>
+                      </a:pPr>
+                      <a:r>
+                        <a:rPr/>
+                        <a:t>Yes</a:t>
+                      </a:r>
+                    </a:p>
+                  </a:txBody>
+                </a:tc>
+              </a:tr>
+              <a:tr h="0">
+                <a:tc>
+                  <a:txBody>
+                    <a:bodyPr/>
+                    <a:lstStyle/>
+                    <a:p>
+                      <a:pPr lvl="0" indent="0" marL="0">
+                        <a:buNone/>
+                      </a:pPr>
+                      <a:r>
+                        <a:rPr/>
+                        <a:t>Depends on plasmode faithfulness</a:t>
+                      </a:r>
+                    </a:p>
+                  </a:txBody>
+                </a:tc>
+                <a:tc>
+                  <a:txBody>
+                    <a:bodyPr/>
+                    <a:lstStyle/>
+                    <a:p>
+                      <a:pPr lvl="0" indent="0" marL="0" algn="ctr">
+                        <a:buNone/>
+                      </a:pPr>
+                      <a:r>
+                        <a:rPr/>
+                        <a:t>No</a:t>
+                      </a:r>
+                    </a:p>
+                  </a:txBody>
+                </a:tc>
+                <a:tc>
+                  <a:txBody>
+                    <a:bodyPr/>
+                    <a:lstStyle/>
+                    <a:p>
+                      <a:pPr lvl="0" indent="0" marL="0" algn="ctr">
+                        <a:buNone/>
+                      </a:pPr>
+                      <a:r>
+                        <a:rPr/>
+                        <a:t>No</a:t>
+                      </a:r>
+                    </a:p>
+                  </a:txBody>
+                </a:tc>
+                <a:tc>
+                  <a:txBody>
+                    <a:bodyPr/>
+                    <a:lstStyle/>
+                    <a:p>
+                      <a:pPr lvl="0" indent="0" marL="0" algn="ctr">
+                        <a:buNone/>
+                      </a:pPr>
+                      <a:r>
+                        <a:rPr/>
+                        <a:t>Yes</a:t>
+                      </a:r>
+                    </a:p>
+                  </a:txBody>
+                </a:tc>
+                <a:tc>
+                  <a:txBody>
+                    <a:bodyPr/>
+                    <a:lstStyle/>
+                    <a:p>
+                      <a:pPr lvl="0" indent="0" marL="0" algn="ctr">
+                        <a:buNone/>
+                      </a:pPr>
+                      <a:r>
+                        <a:rPr/>
+                        <a:t>Yes</a:t>
+                      </a:r>
+                    </a:p>
+                  </a:txBody>
+                </a:tc>
+              </a:tr>
+              <a:tr h="0">
+                <a:tc>
+                  <a:txBody>
+                    <a:bodyPr/>
+                    <a:lstStyle/>
+                    <a:p>
+                      <a:pPr lvl="0" indent="0" marL="0">
+                        <a:buNone/>
+                      </a:pPr>
+                      <a:r>
+                        <a:rPr/>
+                        <a:t>Institutional overhead</a:t>
+                      </a:r>
+                    </a:p>
+                  </a:txBody>
+                </a:tc>
+                <a:tc>
+                  <a:txBody>
+                    <a:bodyPr/>
+                    <a:lstStyle/>
+                    <a:p>
+                      <a:pPr lvl="0" indent="0" marL="0" algn="ctr">
+                        <a:buNone/>
+                      </a:pPr>
+                      <a:r>
+                        <a:rPr/>
+                        <a:t>Low</a:t>
+                      </a:r>
+                    </a:p>
+                  </a:txBody>
+                </a:tc>
+                <a:tc>
+                  <a:txBody>
+                    <a:bodyPr/>
+                    <a:lstStyle/>
+                    <a:p>
+                      <a:pPr lvl="0" indent="0" marL="0" algn="ctr">
+                        <a:buNone/>
+                      </a:pPr>
+                      <a:r>
+                        <a:rPr/>
+                        <a:t>High</a:t>
+                      </a:r>
+                    </a:p>
+                  </a:txBody>
+                </a:tc>
+                <a:tc>
+                  <a:txBody>
+                    <a:bodyPr/>
+                    <a:lstStyle/>
+                    <a:p>
+                      <a:pPr lvl="0" indent="0" marL="0" algn="ctr">
+                        <a:buNone/>
+                      </a:pPr>
+                      <a:r>
+                        <a:rPr/>
+                        <a:t>Low</a:t>
+                      </a:r>
+                    </a:p>
+                  </a:txBody>
+                </a:tc>
+                <a:tc>
+                  <a:txBody>
+                    <a:bodyPr/>
+                    <a:lstStyle/>
+                    <a:p>
+                      <a:pPr lvl="0" indent="0" marL="0" algn="ctr">
+                        <a:buNone/>
+                      </a:pPr>
+                      <a:r>
+                        <a:rPr/>
+                        <a:t>High</a:t>
+                      </a:r>
+                    </a:p>
+                  </a:txBody>
+                </a:tc>
+              </a:tr>
+            </a:tbl>
+          </a:graphicData>
+        </a:graphic>
+      </p:graphicFrame>
     </p:spTree>
   </p:cSld>
 </p:sld>
@@ -4088,7 +4794,12 @@
             <p:ph type="title"/>
           </p:nvPr>
         </p:nvSpPr>
-        <p:spPr/>
+        <p:spPr>
+          <a:xfrm>
+            <a:off x="722313" y="3305176"/>
+            <a:ext cx="7772400" cy="1021556"/>
+          </a:xfrm>
+        </p:spPr>
         <p:txBody>
           <a:bodyPr/>
           <a:lstStyle/>
@@ -4098,68 +4809,7 @@
             </a:pPr>
             <a:r>
               <a:rPr/>
-              <a:t>What the test does </a:t>
-            </a:r>
-            <a:r>
-              <a:rPr i="1"/>
-              <a:t>not</a:t>
-            </a:r>
-            <a:r>
-              <a:rPr/>
-              <a:t> assess</a:t>
-            </a:r>
-          </a:p>
-        </p:txBody>
-      </p:sp>
-      <p:sp>
-        <p:nvSpPr>
-          <p:cNvPr id="3" name="Content Placeholder 2"/>
-          <p:cNvSpPr>
-            <a:spLocks noGrp="1"/>
-          </p:cNvSpPr>
-          <p:nvPr>
-            <p:ph idx="1"/>
-          </p:nvPr>
-        </p:nvSpPr>
-        <p:spPr/>
-        <p:txBody>
-          <a:bodyPr/>
-          <a:lstStyle/>
-          <a:p>
-            <a:pPr lvl="0"/>
-            <a:r>
-              <a:rPr/>
-              <a:t>Data provenance or linkage accuracy</a:t>
-            </a:r>
-          </a:p>
-          <a:p>
-            <a:pPr lvl="0"/>
-            <a:r>
-              <a:rPr/>
-              <a:t>Phenotype validity for a specific endpoint</a:t>
-            </a:r>
-          </a:p>
-          <a:p>
-            <a:pPr lvl="0"/>
-            <a:r>
-              <a:rPr/>
-              <a:t>Representativeness of the source</a:t>
-            </a:r>
-          </a:p>
-          <a:p>
-            <a:pPr lvl="0"/>
-            <a:r>
-              <a:rPr/>
-              <a:t>Regulatory acceptability of the data source</a:t>
-            </a:r>
-          </a:p>
-          <a:p>
-            <a:pPr lvl="0" indent="0" marL="0">
-              <a:buNone/>
-            </a:pPr>
-            <a:r>
-              <a:rPr/>
-              <a:t>The DQ stress test is a quantitative supplement to fit-for-purpose review, not a substitute.</a:t>
+              <a:t>From qualitative DQ review to quantitative stress testing</a:t>
             </a:r>
           </a:p>
         </p:txBody>
@@ -4206,7 +4856,7 @@
             </a:pPr>
             <a:r>
               <a:rPr/>
-              <a:t>The problem</a:t>
+              <a:t>Why cleanTMLE?</a:t>
             </a:r>
           </a:p>
         </p:txBody>
@@ -4226,50 +4876,75 @@
           <a:bodyPr/>
           <a:lstStyle/>
           <a:p>
-            <a:pPr lvl="0" indent="0" marL="0">
-              <a:buNone/>
-            </a:pPr>
-            <a:r>
-              <a:rPr/>
-              <a:t>RWE studies typically separate three activities:</a:t>
-            </a:r>
-          </a:p>
-          <a:p>
-            <a:pPr lvl="0"/>
+            <a:pPr lvl="0"/>
+            <a:r>
+              <a:rPr/>
+              <a:t>RWE workflows separate </a:t>
+            </a:r>
             <a:r>
               <a:rPr b="1"/>
-              <a:t>Protocol / target-trial design</a:t>
-            </a:r>
-          </a:p>
-          <a:p>
-            <a:pPr lvl="0"/>
+              <a:t>protocol design</a:t>
+            </a:r>
+            <a:r>
+              <a:rPr/>
+              <a:t>, </a:t>
+            </a:r>
             <a:r>
               <a:rPr b="1"/>
-              <a:t>Qualitative fit-for-purpose data review</a:t>
-            </a:r>
-            <a:r>
-              <a:rPr/>
-              <a:t> (SPIFD2, HARPER, START-RWE)</a:t>
-            </a:r>
-          </a:p>
-          <a:p>
-            <a:pPr lvl="0"/>
+              <a:t>fit-for-purpose data review</a:t>
+            </a:r>
+            <a:r>
+              <a:rPr/>
+              <a:t>, and </a:t>
+            </a:r>
             <a:r>
               <a:rPr b="1"/>
-              <a:t>Estimator selection</a:t>
-            </a:r>
-            <a:r>
-              <a:rPr/>
-              <a:t> (PS diagnostics; increasingly, plasmode simulation)</a:t>
-            </a:r>
-          </a:p>
-          <a:p>
-            <a:pPr lvl="0" indent="0" marL="0">
-              <a:buNone/>
-            </a:pPr>
-            <a:r>
-              <a:rPr/>
-              <a:t>Reviewers then have difficulty seeing whether the chosen estimator remains credible under the same data-quality concerns documented in the protocol.</a:t>
+              <a:t>estimator choice</a:t>
+            </a:r>
+            <a:r>
+              <a:rPr/>
+              <a:t> into different artefacts</a:t>
+            </a:r>
+          </a:p>
+          <a:p>
+            <a:pPr lvl="0"/>
+            <a:r>
+              <a:rPr/>
+              <a:t>Standard diagnostics assess </a:t>
+            </a:r>
+            <a:r>
+              <a:rPr b="1"/>
+              <a:t>overlap and balance</a:t>
+            </a:r>
+            <a:r>
+              <a:rPr/>
+              <a:t>, but not </a:t>
+            </a:r>
+            <a:r>
+              <a:rPr b="1"/>
+              <a:t>estimator operating characteristics</a:t>
+            </a:r>
+          </a:p>
+          <a:p>
+            <a:pPr lvl="0"/>
+            <a:r>
+              <a:rPr/>
+              <a:t>cleanTMLE links estimator selection and data-quality threats in one pre-outcome, auditable workflow</a:t>
+            </a:r>
+          </a:p>
+          <a:p>
+            <a:pPr lvl="0"/>
+            <a:r>
+              <a:rPr/>
+              <a:t>This is the </a:t>
+            </a:r>
+            <a:r>
+              <a:rPr b="1"/>
+              <a:t>software layer</a:t>
+            </a:r>
+            <a:r>
+              <a:rPr/>
+              <a:t> of an outcome-blind staged workflow — not a full clean-room governance system</a:t>
             </a:r>
           </a:p>
         </p:txBody>
@@ -4306,6 +4981,533 @@
             <p:ph type="title"/>
           </p:nvPr>
         </p:nvSpPr>
+        <p:spPr/>
+        <p:txBody>
+          <a:bodyPr/>
+          <a:lstStyle/>
+          <a:p>
+            <a:pPr lvl="0" indent="0" marL="0">
+              <a:buNone/>
+            </a:pPr>
+            <a:r>
+              <a:rPr/>
+              <a:t>The translation</a:t>
+            </a:r>
+          </a:p>
+        </p:txBody>
+      </p:sp>
+      <p:sp>
+        <p:nvSpPr>
+          <p:cNvPr id="3" name="Content Placeholder 2"/>
+          <p:cNvSpPr>
+            <a:spLocks noGrp="1"/>
+          </p:cNvSpPr>
+          <p:nvPr>
+            <p:ph idx="1"/>
+          </p:nvPr>
+        </p:nvSpPr>
+        <p:spPr/>
+        <p:txBody>
+          <a:bodyPr/>
+          <a:lstStyle/>
+          <a:p>
+            <a:pPr lvl="0"/>
+            <a:r>
+              <a:rPr b="1"/>
+              <a:t>Fit-for-purpose concern</a:t>
+            </a:r>
+            <a:r>
+              <a:rPr/>
+              <a:t> → exposure definition, outcome ascertainment, covariate completeness, unmeasured confounding</a:t>
+            </a:r>
+          </a:p>
+          <a:p>
+            <a:pPr lvl="0"/>
+            <a:r>
+              <a:rPr b="1"/>
+              <a:t>Plasmode input</a:t>
+            </a:r>
+            <a:r>
+              <a:rPr/>
+              <a:t> → (sens, spec), missingness fraction, latent U parameters</a:t>
+            </a:r>
+          </a:p>
+          <a:p>
+            <a:pPr lvl="0"/>
+            <a:r>
+              <a:rPr b="1"/>
+              <a:t>Output</a:t>
+            </a:r>
+            <a:r>
+              <a:rPr/>
+              <a:t> → bias, RMSE, coverage, type I error</a:t>
+            </a:r>
+          </a:p>
+          <a:p>
+            <a:pPr lvl="0"/>
+            <a:r>
+              <a:rPr b="1"/>
+              <a:t>Decision</a:t>
+            </a:r>
+            <a:r>
+              <a:rPr/>
+              <a:t> → GO / FLAG / STOP</a:t>
+            </a:r>
+          </a:p>
+          <a:p>
+            <a:pPr lvl="0" indent="0" marL="0">
+              <a:buNone/>
+            </a:pPr>
+            <a:r>
+              <a:rPr/>
+              <a:t>The prespecified severity ranges turn qualitative DQ language into auditable numbers.</a:t>
+            </a:r>
+          </a:p>
+        </p:txBody>
+      </p:sp>
+    </p:spTree>
+  </p:cSld>
+</p:sld>
+</file>
+
+<file path=ppt/slides/slide21.xml><?xml version="1.0" encoding="utf-8"?>
+<p:sld xmlns:a="http://schemas.openxmlformats.org/drawingml/2006/main" xmlns:r="http://schemas.openxmlformats.org/officeDocument/2006/relationships" xmlns:p="http://schemas.openxmlformats.org/presentationml/2006/main">
+  <p:cSld>
+    <p:spTree>
+      <p:nvGrpSpPr>
+        <p:cNvPr id="1" name=""/>
+        <p:cNvGrpSpPr/>
+        <p:nvPr/>
+      </p:nvGrpSpPr>
+      <p:grpSpPr>
+        <a:xfrm>
+          <a:off x="0" y="0"/>
+          <a:ext cx="0" cy="0"/>
+          <a:chOff x="0" y="0"/>
+          <a:chExt cx="0" cy="0"/>
+        </a:xfrm>
+      </p:grpSpPr>
+      <p:sp>
+        <p:nvSpPr>
+          <p:cNvPr id="2" name="Title 1"/>
+          <p:cNvSpPr>
+            <a:spLocks noGrp="1"/>
+          </p:cNvSpPr>
+          <p:nvPr>
+            <p:ph type="title"/>
+          </p:nvPr>
+        </p:nvSpPr>
+        <p:spPr/>
+        <p:txBody>
+          <a:bodyPr/>
+          <a:lstStyle/>
+          <a:p>
+            <a:pPr lvl="0" indent="0" marL="0">
+              <a:buNone/>
+            </a:pPr>
+            <a:r>
+              <a:rPr/>
+              <a:t>The information loop</a:t>
+            </a:r>
+          </a:p>
+        </p:txBody>
+      </p:sp>
+      <p:sp>
+        <p:nvSpPr>
+          <p:cNvPr id="3" name="Content Placeholder 2"/>
+          <p:cNvSpPr>
+            <a:spLocks noGrp="1"/>
+          </p:cNvSpPr>
+          <p:nvPr>
+            <p:ph idx="1"/>
+          </p:nvPr>
+        </p:nvSpPr>
+        <p:spPr/>
+        <p:txBody>
+          <a:bodyPr/>
+          <a:lstStyle/>
+          <a:p>
+            <a:pPr lvl="0" indent="-342900" marL="342900">
+              <a:buAutoNum type="arabicPeriod"/>
+            </a:pPr>
+            <a:r>
+              <a:rPr/>
+              <a:t>Fit-for-purpose review identifies plausible threats.</a:t>
+            </a:r>
+          </a:p>
+          <a:p>
+            <a:pPr lvl="0" indent="-342900" marL="342900">
+              <a:buAutoNum type="arabicPeriod"/>
+            </a:pPr>
+            <a:r>
+              <a:rPr/>
+              <a:t>Threats are translated into quantitative severity ranges.</a:t>
+            </a:r>
+          </a:p>
+          <a:p>
+            <a:pPr lvl="0" indent="-342900" marL="342900">
+              <a:buAutoNum type="arabicPeriod"/>
+            </a:pPr>
+            <a:r>
+              <a:rPr/>
+              <a:t>Severity ranges are locked before primary outcome access.</a:t>
+            </a:r>
+          </a:p>
+          <a:p>
+            <a:pPr lvl="0" indent="-342900" marL="342900">
+              <a:buAutoNum type="arabicPeriod"/>
+            </a:pPr>
+            <a:r>
+              <a:rPr/>
+              <a:t>Synthetic outcomes are generated and perturbed under each scenario.</a:t>
+            </a:r>
+          </a:p>
+          <a:p>
+            <a:pPr lvl="0" indent="-342900" marL="342900">
+              <a:buAutoNum type="arabicPeriod"/>
+            </a:pPr>
+            <a:r>
+              <a:rPr/>
+              <a:t>Candidate estimators are evaluated using the same metrics as the baseline plasmode.</a:t>
+            </a:r>
+          </a:p>
+          <a:p>
+            <a:pPr lvl="0" indent="-342900" marL="342900">
+              <a:buAutoNum type="arabicPeriod"/>
+            </a:pPr>
+            <a:r>
+              <a:rPr/>
+              <a:t>The prespecified GO / FLAG / STOP rule is applied.</a:t>
+            </a:r>
+          </a:p>
+        </p:txBody>
+      </p:sp>
+    </p:spTree>
+  </p:cSld>
+</p:sld>
+</file>
+
+<file path=ppt/slides/slide22.xml><?xml version="1.0" encoding="UTF-8"?><p:sld xmlns:a="http://schemas.openxmlformats.org/drawingml/2006/main" xmlns:r="http://schemas.openxmlformats.org/officeDocument/2006/relationships" xmlns:p="http://schemas.openxmlformats.org/presentationml/2006/main"><p:cSld><p:spTree><p:nvGrpSpPr><p:cNvPr id="1" name="" /><p:cNvGrpSpPr /><p:nvPr /></p:nvGrpSpPr><p:grpSpPr><a:xfrm><a:off x="0" y="0" /><a:ext cx="0" cy="0" /><a:chOff x="0" y="0" /><a:chExt cx="0" cy="0" /></a:xfrm></p:grpSpPr><p:sp><p:nvSpPr><p:cNvPr id="2" name="Title 1" /><p:cNvSpPr><a:spLocks noGrp="1" /></p:cNvSpPr><p:nvPr><p:ph type="title" /></p:nvPr></p:nvSpPr><p:spPr /><p:txBody><a:bodyPr /><a:lstStyle /><a:p><a:pPr lvl="0" indent="0" marL="0"><a:buNone /></a:pPr><a:r><a:rPr /><a:t>Four prespecified threats</a:t></a:r></a:p></p:txBody></p:sp><p:graphicFrame><p:nvGraphicFramePr><p:cNvPr id="6" name="Content Placeholder 5" /><p:cNvGraphicFramePr><a:graphicFrameLocks noGrp="1" /></p:cNvGraphicFramePr><p:nvPr><p:ph idx="1" /></p:nvPr></p:nvGraphicFramePr><p:xfrm><a:off x="457200" y="1193800" /><a:ext cx="8229600" cy="3390900" /></p:xfrm><a:graphic><a:graphicData uri="http://schemas.openxmlformats.org/drawingml/2006/table"><a:tbl><a:tblPr firstRow="1" bandRow="1"><a:tableStyleId>{5C22544A-7EE6-4342-B048-85BDC9FD1C3A}</a:tableStyleId></a:tblPr><a:tblGrid><a:gridCol w="2438400" /><a:gridCol w="3581400" /><a:gridCol w="2197100" /></a:tblGrid><a:tr h="0"><a:tc><a:txBody><a:bodyPr /><a:lstStyle /><a:p><a:pPr lvl="0" indent="0" marL="0"><a:buNone /></a:pPr><a:r><a:rPr /><a:t>Threat</a:t></a:r></a:p></a:txBody><a:tcPr /></a:tc><a:tc><a:txBody><a:bodyPr /><a:lstStyle /><a:p><a:pPr lvl="0" indent="0" marL="0"><a:buNone /></a:pPr><a:r><a:rPr /><a:t>Mechanism</a:t></a:r></a:p></a:txBody><a:tcPr /></a:tc><a:tc><a:txBody><a:bodyPr /><a:lstStyle /><a:p><a:pPr lvl="0" indent="0" marL="0"><a:buNone /></a:pPr><a:r><a:rPr /><a:t>Severity parameters</a:t></a:r></a:p></a:txBody><a:tcPr /></a:tc></a:tr><a:tr h="0"><a:tc><a:txBody><a:bodyPr /><a:lstStyle /><a:p><a:pPr lvl="0" indent="0" marL="0"><a:buNone /></a:pPr><a:r><a:rPr /><a:t>Covariate missingness</a:t></a:r></a:p></a:txBody></a:tc><a:tc><a:txBody><a:bodyPr /><a:lstStyle /><a:p><a:pPr lvl="0" indent="0" marL="0"><a:buNone /></a:pPr><a:r><a:rPr /><a:t>MCAR on a covariate subset, median impute</a:t></a:r></a:p></a:txBody></a:tc><a:tc><a:txBody><a:bodyPr /><a:lstStyle /><a:p><a:pPr lvl="0" indent="0" marL="0"><a:buNone /></a:pPr><a:r><a:rPr /><a:t>proportion missing</a:t></a:r></a:p></a:txBody></a:tc></a:tr><a:tr h="0"><a:tc><a:txBody><a:bodyPr /><a:lstStyle /><a:p><a:pPr lvl="0" indent="0" marL="0"><a:buNone /></a:pPr><a:r><a:rPr /><a:t>Exposure misclassification</a:t></a:r></a:p></a:txBody></a:tc><a:tc><a:txBody><a:bodyPr /><a:lstStyle /><a:p><a:pPr lvl="0" indent="0" marL="0"><a:buNone /></a:pPr><a:r><a:rPr /><a:t>Flip A with given (sens, spec)</a:t></a:r></a:p></a:txBody></a:tc><a:tc><a:txBody><a:bodyPr /><a:lstStyle /><a:p><a:pPr lvl="0" indent="0" marL="0"><a:buNone /></a:pPr><a:r><a:rPr /><a:t>(sens, spec) pairs</a:t></a:r></a:p></a:txBody></a:tc></a:tr><a:tr h="0"><a:tc><a:txBody><a:bodyPr /><a:lstStyle /><a:p><a:pPr lvl="0" indent="0" marL="0"><a:buNone /></a:pPr><a:r><a:rPr /><a:t>Outcome misclassification</a:t></a:r></a:p></a:txBody></a:tc><a:tc><a:txBody><a:bodyPr /><a:lstStyle /><a:p><a:pPr lvl="0" indent="0" marL="0"><a:buNone /></a:pPr><a:r><a:rPr /><a:t>Flip Y with given (sens, spec), optional differential</a:t></a:r></a:p></a:txBody></a:tc><a:tc><a:txBody><a:bodyPr /><a:lstStyle /><a:p><a:pPr lvl="0" indent="0" marL="0"><a:buNone /></a:pPr><a:r><a:rPr /><a:t>(sens, spec) pairs</a:t></a:r></a:p></a:txBody></a:tc></a:tr><a:tr h="0"><a:tc><a:txBody><a:bodyPr /><a:lstStyle /><a:p><a:pPr lvl="0" indent="0" marL="0"><a:buNone /></a:pPr><a:r><a:rPr /><a:t>Unmeasured confounding</a:t></a:r></a:p></a:txBody></a:tc><a:tc><a:txBody><a:bodyPr /><a:lstStyle /><a:p><a:pPr lvl="0" indent="0" marL="0"><a:buNone /></a:pPr><a:r><a:rPr /><a:t>Latent U shifts both A and Y</a:t></a:r></a:p></a:txBody></a:tc><a:tc><a:txBody><a:bodyPr /><a:lstStyle /><a:p><a:pPr lvl="0" indent="0" marL="0"><a:buNone /></a:pPr><a14:m><m:oMath xmlns:m="http://schemas.openxmlformats.org/officeDocument/2006/math"><m:sSub><m:e><m:r><m:t>β</m:t></m:r></m:e><m:sub><m:r><m:t>U</m:t></m:r><m:r><m:t>A</m:t></m:r></m:sub></m:sSub></m:oMath></a14:m><a:r><a:rPr /><a:t>, </a:t></a:r><a14:m><m:oMath xmlns:m="http://schemas.openxmlformats.org/officeDocument/2006/math"><m:sSub><m:e><m:r><m:t>β</m:t></m:r></m:e><m:sub><m:r><m:t>U</m:t></m:r><m:r><m:t>Y</m:t></m:r></m:sub></m:sSub></m:oMath></a14:m></a:p></a:txBody></a:tc></a:tr></a:tbl></a:graphicData></a:graphic></p:graphicFrame></p:spTree></p:cSld></p:sld>
+</file>
+
+<file path=ppt/slides/slide23.xml><?xml version="1.0" encoding="utf-8"?>
+<p:sld xmlns:a="http://schemas.openxmlformats.org/drawingml/2006/main" xmlns:r="http://schemas.openxmlformats.org/officeDocument/2006/relationships" xmlns:p="http://schemas.openxmlformats.org/presentationml/2006/main">
+  <p:cSld>
+    <p:spTree>
+      <p:nvGrpSpPr>
+        <p:cNvPr id="1" name=""/>
+        <p:cNvGrpSpPr/>
+        <p:nvPr/>
+      </p:nvGrpSpPr>
+      <p:grpSpPr>
+        <a:xfrm>
+          <a:off x="0" y="0"/>
+          <a:ext cx="0" cy="0"/>
+          <a:chOff x="0" y="0"/>
+          <a:chExt cx="0" cy="0"/>
+        </a:xfrm>
+      </p:grpSpPr>
+      <p:sp>
+        <p:nvSpPr>
+          <p:cNvPr id="3" name="Content Placeholder 2"/>
+          <p:cNvSpPr>
+            <a:spLocks noGrp="1"/>
+          </p:cNvSpPr>
+          <p:nvPr>
+            <p:ph idx="1"/>
+          </p:nvPr>
+        </p:nvSpPr>
+        <p:spPr/>
+        <p:txBody>
+          <a:bodyPr/>
+          <a:lstStyle/>
+          <a:p>
+            <a:pPr lvl="0" indent="0" marL="0">
+              <a:buNone/>
+            </a:pPr>
+            <a:r>
+              <a:rPr/>
+              <a:t>Each cell reports the same triple as the baseline plasmode: bias, RMSE, coverage.</a:t>
+            </a:r>
+          </a:p>
+        </p:txBody>
+      </p:sp>
+    </p:spTree>
+  </p:cSld>
+</p:sld>
+</file>
+
+<file path=ppt/slides/slide24.xml><?xml version="1.0" encoding="utf-8"?>
+<p:sld xmlns:a="http://schemas.openxmlformats.org/drawingml/2006/main" xmlns:r="http://schemas.openxmlformats.org/officeDocument/2006/relationships" xmlns:p="http://schemas.openxmlformats.org/presentationml/2006/main">
+  <p:cSld>
+    <p:spTree>
+      <p:nvGrpSpPr>
+        <p:cNvPr id="1" name=""/>
+        <p:cNvGrpSpPr/>
+        <p:nvPr/>
+      </p:nvGrpSpPr>
+      <p:grpSpPr>
+        <a:xfrm>
+          <a:off x="0" y="0"/>
+          <a:ext cx="0" cy="0"/>
+          <a:chOff x="0" y="0"/>
+          <a:chExt cx="0" cy="0"/>
+        </a:xfrm>
+      </p:grpSpPr>
+      <p:sp>
+        <p:nvSpPr>
+          <p:cNvPr id="2" name="Title 1"/>
+          <p:cNvSpPr>
+            <a:spLocks noGrp="1"/>
+          </p:cNvSpPr>
+          <p:nvPr>
+            <p:ph type="title"/>
+          </p:nvPr>
+        </p:nvSpPr>
+        <p:spPr/>
+        <p:txBody>
+          <a:bodyPr/>
+          <a:lstStyle/>
+          <a:p>
+            <a:pPr lvl="0" indent="0" marL="0">
+              <a:buNone/>
+            </a:pPr>
+            <a:r>
+              <a:rPr/>
+              <a:t>Degradation gradient</a:t>
+            </a:r>
+          </a:p>
+        </p:txBody>
+      </p:sp>
+      <p:sp>
+        <p:nvSpPr>
+          <p:cNvPr id="3" name="Content Placeholder 2"/>
+          <p:cNvSpPr>
+            <a:spLocks noGrp="1"/>
+          </p:cNvSpPr>
+          <p:nvPr>
+            <p:ph idx="1"/>
+          </p:nvPr>
+        </p:nvSpPr>
+        <p:spPr/>
+        <p:txBody>
+          <a:bodyPr/>
+          <a:lstStyle/>
+          <a:p>
+            <a:pPr lvl="0" indent="0" marL="0">
+              <a:buNone/>
+            </a:pPr>
+            <a:r>
+              <a:rPr b="1"/>
+              <a:t>A dose-response curve for estimator fragility.</a:t>
+            </a:r>
+          </a:p>
+          <a:p>
+            <a:pPr lvl="0"/>
+            <a:r>
+              <a:rPr b="1"/>
+              <a:t>x-axis</a:t>
+            </a:r>
+            <a:r>
+              <a:rPr/>
+              <a:t>: severity of a prespecified DQ threat</a:t>
+            </a:r>
+          </a:p>
+          <a:p>
+            <a:pPr lvl="0"/>
+            <a:r>
+              <a:rPr b="1"/>
+              <a:t>y-axis</a:t>
+            </a:r>
+            <a:r>
+              <a:rPr/>
+              <a:t>: bias, RMSE, coverage, or type I error</a:t>
+            </a:r>
+          </a:p>
+          <a:p>
+            <a:pPr lvl="0"/>
+            <a:r>
+              <a:rPr b="1"/>
+              <a:t>Robust candidate</a:t>
+            </a:r>
+            <a:r>
+              <a:rPr/>
+              <a:t>: shallow gradient, stays inside the locked threshold across plausible severities</a:t>
+            </a:r>
+          </a:p>
+          <a:p>
+            <a:pPr lvl="0"/>
+            <a:r>
+              <a:rPr b="1"/>
+              <a:t>Fragile candidate</a:t>
+            </a:r>
+            <a:r>
+              <a:rPr/>
+              <a:t>: cliff — a small severity increase pushes bias or coverage past the threshold</a:t>
+            </a:r>
+          </a:p>
+          <a:p>
+            <a:pPr lvl="0"/>
+            <a:r>
+              <a:rPr/>
+              <a:t>A horizontal line on the plot marks the prespecified decision threshold</a:t>
+            </a:r>
+          </a:p>
+          <a:p>
+            <a:pPr lvl="0" indent="0" marL="0">
+              <a:buNone/>
+            </a:pPr>
+            <a:r>
+              <a:rPr/>
+              <a:t>The gradient answers: </a:t>
+            </a:r>
+            <a:r>
+              <a:rPr i="1"/>
+              <a:t>how severe must the degradation be before this candidate fails the locked decision criteria?</a:t>
+            </a:r>
+          </a:p>
+        </p:txBody>
+      </p:sp>
+    </p:spTree>
+  </p:cSld>
+</p:sld>
+</file>
+
+<file path=ppt/slides/slide25.xml><?xml version="1.0" encoding="utf-8"?>
+<p:sld xmlns:a="http://schemas.openxmlformats.org/drawingml/2006/main" xmlns:r="http://schemas.openxmlformats.org/officeDocument/2006/relationships" xmlns:p="http://schemas.openxmlformats.org/presentationml/2006/main">
+  <p:cSld>
+    <p:spTree>
+      <p:nvGrpSpPr>
+        <p:cNvPr id="1" name=""/>
+        <p:cNvGrpSpPr/>
+        <p:nvPr/>
+      </p:nvGrpSpPr>
+      <p:grpSpPr>
+        <a:xfrm>
+          <a:off x="0" y="0"/>
+          <a:ext cx="0" cy="0"/>
+          <a:chOff x="0" y="0"/>
+          <a:chExt cx="0" cy="0"/>
+        </a:xfrm>
+      </p:grpSpPr>
+      <p:sp>
+        <p:nvSpPr>
+          <p:cNvPr id="2" name="Title 1"/>
+          <p:cNvSpPr>
+            <a:spLocks noGrp="1"/>
+          </p:cNvSpPr>
+          <p:nvPr>
+            <p:ph type="title"/>
+          </p:nvPr>
+        </p:nvSpPr>
+        <p:spPr/>
+        <p:txBody>
+          <a:bodyPr/>
+          <a:lstStyle/>
+          <a:p>
+            <a:pPr lvl="0" indent="0" marL="0">
+              <a:buNone/>
+            </a:pPr>
+            <a:r>
+              <a:rPr/>
+              <a:t>What the test does </a:t>
+            </a:r>
+            <a:r>
+              <a:rPr i="1"/>
+              <a:t>not</a:t>
+            </a:r>
+            <a:r>
+              <a:rPr/>
+              <a:t> assess</a:t>
+            </a:r>
+          </a:p>
+        </p:txBody>
+      </p:sp>
+      <p:sp>
+        <p:nvSpPr>
+          <p:cNvPr id="3" name="Content Placeholder 2"/>
+          <p:cNvSpPr>
+            <a:spLocks noGrp="1"/>
+          </p:cNvSpPr>
+          <p:nvPr>
+            <p:ph idx="1"/>
+          </p:nvPr>
+        </p:nvSpPr>
+        <p:spPr/>
+        <p:txBody>
+          <a:bodyPr/>
+          <a:lstStyle/>
+          <a:p>
+            <a:pPr lvl="0"/>
+            <a:r>
+              <a:rPr/>
+              <a:t>Data provenance or linkage accuracy</a:t>
+            </a:r>
+          </a:p>
+          <a:p>
+            <a:pPr lvl="0"/>
+            <a:r>
+              <a:rPr/>
+              <a:t>Phenotype validity for a specific endpoint</a:t>
+            </a:r>
+          </a:p>
+          <a:p>
+            <a:pPr lvl="0"/>
+            <a:r>
+              <a:rPr/>
+              <a:t>Representativeness of the source</a:t>
+            </a:r>
+          </a:p>
+          <a:p>
+            <a:pPr lvl="0"/>
+            <a:r>
+              <a:rPr/>
+              <a:t>Regulatory acceptability of the data source</a:t>
+            </a:r>
+          </a:p>
+          <a:p>
+            <a:pPr lvl="0" indent="0" marL="0">
+              <a:buNone/>
+            </a:pPr>
+            <a:r>
+              <a:rPr/>
+              <a:t>The DQ stress test is a quantitative supplement to fit-for-purpose review, not formal causal sensitivity analysis and not a replacement for post-outcome quantitative bias analysis.</a:t>
+            </a:r>
+          </a:p>
+        </p:txBody>
+      </p:sp>
+    </p:spTree>
+  </p:cSld>
+</p:sld>
+</file>
+
+<file path=ppt/slides/slide26.xml><?xml version="1.0" encoding="utf-8"?>
+<p:sld xmlns:a="http://schemas.openxmlformats.org/drawingml/2006/main" xmlns:r="http://schemas.openxmlformats.org/officeDocument/2006/relationships" xmlns:p="http://schemas.openxmlformats.org/presentationml/2006/main">
+  <p:cSld>
+    <p:spTree>
+      <p:nvGrpSpPr>
+        <p:cNvPr id="1" name=""/>
+        <p:cNvGrpSpPr/>
+        <p:nvPr/>
+      </p:nvGrpSpPr>
+      <p:grpSpPr>
+        <a:xfrm>
+          <a:off x="0" y="0"/>
+          <a:ext cx="0" cy="0"/>
+          <a:chOff x="0" y="0"/>
+          <a:chExt cx="0" cy="0"/>
+        </a:xfrm>
+      </p:grpSpPr>
+      <p:sp>
+        <p:nvSpPr>
+          <p:cNvPr id="2" name="Title 1"/>
+          <p:cNvSpPr>
+            <a:spLocks noGrp="1"/>
+          </p:cNvSpPr>
+          <p:nvPr>
+            <p:ph type="title"/>
+          </p:nvPr>
+        </p:nvSpPr>
         <p:spPr>
           <a:xfrm>
             <a:off x="722313" y="3305176"/>
@@ -4331,7 +5533,7 @@
 </p:sld>
 </file>
 
-<file path=ppt/slides/slide21.xml><?xml version="1.0" encoding="utf-8"?>
+<file path=ppt/slides/slide27.xml><?xml version="1.0" encoding="utf-8"?>
 <p:sld xmlns:a="http://schemas.openxmlformats.org/drawingml/2006/main" xmlns:r="http://schemas.openxmlformats.org/officeDocument/2006/relationships" xmlns:p="http://schemas.openxmlformats.org/presentationml/2006/main">
   <p:cSld>
     <p:spTree>
@@ -4550,7 +5752,7 @@
 </p:sld>
 </file>
 
-<file path=ppt/slides/slide22.xml><?xml version="1.0" encoding="utf-8"?>
+<file path=ppt/slides/slide28.xml><?xml version="1.0" encoding="utf-8"?>
 <p:sld xmlns:a="http://schemas.openxmlformats.org/drawingml/2006/main" xmlns:r="http://schemas.openxmlformats.org/officeDocument/2006/relationships" xmlns:p="http://schemas.openxmlformats.org/presentationml/2006/main">
   <p:cSld>
     <p:spTree>
@@ -4648,7 +5850,7 @@
 </p:sld>
 </file>
 
-<file path=ppt/slides/slide23.xml><?xml version="1.0" encoding="utf-8"?>
+<file path=ppt/slides/slide29.xml><?xml version="1.0" encoding="utf-8"?>
 <p:sld xmlns:a="http://schemas.openxmlformats.org/drawingml/2006/main" xmlns:r="http://schemas.openxmlformats.org/officeDocument/2006/relationships" xmlns:p="http://schemas.openxmlformats.org/presentationml/2006/main">
   <p:cSld>
     <p:spTree>
@@ -4715,7 +5917,7 @@
             <a:pPr lvl="0"/>
             <a:r>
               <a:rPr/>
-              <a:t>IPTW: SE-to-SD ratio above one (conservative; IF-variance treats PS as known)</a:t>
+              <a:t>IPTW: SE-to-SD ratio above one (IF-variance treats PS as known)</a:t>
             </a:r>
           </a:p>
           <a:p>
@@ -4750,7 +5952,142 @@
 </p:sld>
 </file>
 
-<file path=ppt/slides/slide24.xml><?xml version="1.0" encoding="utf-8"?>
+<file path=ppt/slides/slide3.xml><?xml version="1.0" encoding="utf-8"?>
+<p:sld xmlns:a="http://schemas.openxmlformats.org/drawingml/2006/main" xmlns:r="http://schemas.openxmlformats.org/officeDocument/2006/relationships" xmlns:p="http://schemas.openxmlformats.org/presentationml/2006/main">
+  <p:cSld>
+    <p:spTree>
+      <p:nvGrpSpPr>
+        <p:cNvPr id="1" name=""/>
+        <p:cNvGrpSpPr/>
+        <p:nvPr/>
+      </p:nvGrpSpPr>
+      <p:grpSpPr>
+        <a:xfrm>
+          <a:off x="0" y="0"/>
+          <a:ext cx="0" cy="0"/>
+          <a:chOff x="0" y="0"/>
+          <a:chExt cx="0" cy="0"/>
+        </a:xfrm>
+      </p:grpSpPr>
+      <p:sp>
+        <p:nvSpPr>
+          <p:cNvPr id="2" name="Title 1"/>
+          <p:cNvSpPr>
+            <a:spLocks noGrp="1"/>
+          </p:cNvSpPr>
+          <p:nvPr>
+            <p:ph type="title"/>
+          </p:nvPr>
+        </p:nvSpPr>
+        <p:spPr/>
+        <p:txBody>
+          <a:bodyPr/>
+          <a:lstStyle/>
+          <a:p>
+            <a:pPr lvl="0" indent="0" marL="0">
+              <a:buNone/>
+            </a:pPr>
+            <a:r>
+              <a:rPr/>
+              <a:t>What I will cover (≈30 min)</a:t>
+            </a:r>
+          </a:p>
+        </p:txBody>
+      </p:sp>
+      <p:sp>
+        <p:nvSpPr>
+          <p:cNvPr id="3" name="Content Placeholder 2"/>
+          <p:cNvSpPr>
+            <a:spLocks noGrp="1"/>
+          </p:cNvSpPr>
+          <p:nvPr>
+            <p:ph idx="1"/>
+          </p:nvPr>
+        </p:nvSpPr>
+        <p:spPr/>
+        <p:txBody>
+          <a:bodyPr/>
+          <a:lstStyle/>
+          <a:p>
+            <a:pPr lvl="0" indent="-342900" marL="342900">
+              <a:buAutoNum type="arabicPeriod"/>
+            </a:pPr>
+            <a:r>
+              <a:rPr/>
+              <a:t>Five questions the workflow answers</a:t>
+            </a:r>
+          </a:p>
+          <a:p>
+            <a:pPr lvl="0" indent="-342900" marL="342900">
+              <a:buAutoNum type="arabicPeriod"/>
+            </a:pPr>
+            <a:r>
+              <a:rPr/>
+              <a:t>Outcome-blind staged workflow (and what it does not replace)</a:t>
+            </a:r>
+          </a:p>
+          <a:p>
+            <a:pPr lvl="0" indent="-342900" marL="342900">
+              <a:buAutoNum type="arabicPeriod"/>
+            </a:pPr>
+            <a:r>
+              <a:rPr/>
+              <a:t>From qualitative DQ review to quantitative stress testing</a:t>
+            </a:r>
+          </a:p>
+          <a:p>
+            <a:pPr lvl="0" indent="-342900" marL="342900">
+              <a:buAutoNum type="arabicPeriod"/>
+            </a:pPr>
+            <a:r>
+              <a:rPr/>
+              <a:t>Simulation study</a:t>
+            </a:r>
+          </a:p>
+          <a:p>
+            <a:pPr lvl="0" indent="-342900" marL="342900">
+              <a:buAutoNum type="arabicPeriod"/>
+            </a:pPr>
+            <a:r>
+              <a:rPr/>
+              <a:t>Rescue.Co case study (Kenya Trauma Registry)</a:t>
+            </a:r>
+          </a:p>
+          <a:p>
+            <a:pPr lvl="0" indent="-342900" marL="342900">
+              <a:buAutoNum type="arabicPeriod"/>
+            </a:pPr>
+            <a:r>
+              <a:rPr/>
+              <a:t>What cleanTMLE contributes operationally</a:t>
+            </a:r>
+          </a:p>
+          <a:p>
+            <a:pPr lvl="0" indent="-342900" marL="342900">
+              <a:buAutoNum type="arabicPeriod"/>
+            </a:pPr>
+            <a:r>
+              <a:rPr/>
+              <a:t>Limitations and the 0.2 roadmap</a:t>
+            </a:r>
+          </a:p>
+          <a:p>
+            <a:pPr lvl="0" indent="-342900" marL="342900">
+              <a:buAutoNum type="arabicPeriod"/>
+            </a:pPr>
+            <a:r>
+              <a:rPr/>
+              <a:t>Open questions for collaborators</a:t>
+            </a:r>
+          </a:p>
+        </p:txBody>
+      </p:sp>
+    </p:spTree>
+  </p:cSld>
+</p:sld>
+</file>
+
+<file path=ppt/slides/slide30.xml><?xml version="1.0" encoding="utf-8"?>
 <p:sld xmlns:a="http://schemas.openxmlformats.org/drawingml/2006/main" xmlns:r="http://schemas.openxmlformats.org/officeDocument/2006/relationships" xmlns:p="http://schemas.openxmlformats.org/presentationml/2006/main">
   <p:cSld>
     <p:spTree>
@@ -4858,7 +6195,7 @@
                 </a:r>
                 <a:r>
                   <a:rPr/>
-                  <a:t> — the prespecified decision rule returns STOP; under the workflow, the primary analysis should not be run or interpreted without redesign or a documented override</a:t>
+                  <a:t> — under the workflow, the primary analysis should not be run or interpreted without redesign, additional validation, narrowing of the claim, or documented override</a:t>
                 </a:r>
               </a:p>
               <a:p>
@@ -4877,7 +6214,7 @@
 </p:sld>
 </file>
 
-<file path=ppt/slides/slide25.xml><?xml version="1.0" encoding="utf-8"?>
+<file path=ppt/slides/slide31.xml><?xml version="1.0" encoding="utf-8"?>
 <p:sld xmlns:a="http://schemas.openxmlformats.org/drawingml/2006/main" xmlns:r="http://schemas.openxmlformats.org/officeDocument/2006/relationships" xmlns:p="http://schemas.openxmlformats.org/presentationml/2006/main">
   <p:cSld>
     <p:spTree>
@@ -4914,7 +6251,7 @@
             </a:pPr>
             <a:r>
               <a:rPr/>
-              <a:t>DQ degradation gradient</a:t>
+              <a:t>DQ degradation gradient — what we observed</a:t>
             </a:r>
           </a:p>
         </p:txBody>
@@ -4993,7 +6330,7 @@
 </p:sld>
 </file>
 
-<file path=ppt/slides/slide26.xml><?xml version="1.0" encoding="utf-8"?>
+<file path=ppt/slides/slide32.xml><?xml version="1.0" encoding="utf-8"?>
 <p:sld xmlns:a="http://schemas.openxmlformats.org/drawingml/2006/main" xmlns:r="http://schemas.openxmlformats.org/officeDocument/2006/relationships" xmlns:p="http://schemas.openxmlformats.org/presentationml/2006/main">
   <p:cSld>
     <p:spTree>
@@ -5045,7 +6382,7 @@
 </p:sld>
 </file>
 
-<file path=ppt/slides/slide27.xml><?xml version="1.0" encoding="utf-8"?>
+<file path=ppt/slides/slide33.xml><?xml version="1.0" encoding="utf-8"?>
 <p:sld xmlns:a="http://schemas.openxmlformats.org/drawingml/2006/main" xmlns:r="http://schemas.openxmlformats.org/officeDocument/2006/relationships" xmlns:p="http://schemas.openxmlformats.org/presentationml/2006/main">
   <p:cSld>
     <p:spTree>
@@ -5174,7 +6511,7 @@
 </p:sld>
 </file>
 
-<file path=ppt/slides/slide28.xml><?xml version="1.0" encoding="utf-8"?>
+<file path=ppt/slides/slide34.xml><?xml version="1.0" encoding="utf-8"?>
 <p:sld xmlns:a="http://schemas.openxmlformats.org/drawingml/2006/main" xmlns:r="http://schemas.openxmlformats.org/officeDocument/2006/relationships" xmlns:p="http://schemas.openxmlformats.org/presentationml/2006/main">
   <p:cSld>
     <p:spTree>
@@ -5234,7 +6571,14 @@
             <a:pPr lvl="0"/>
             <a:r>
               <a:rPr/>
-              <a:t>Lock: 18 baseline covariates, IPCW for missingness, six prespecified estimators</a:t>
+              <a:t>Stage 1a lock: 18 baseline covariates, IPCW for missingness, six prespecified estimators</a:t>
+            </a:r>
+          </a:p>
+          <a:p>
+            <a:pPr lvl="0"/>
+            <a:r>
+              <a:rPr/>
+              <a:t>Stage 1b: cohort adequacy and marginal event support pass</a:t>
             </a:r>
           </a:p>
           <a:p>
@@ -5255,7 +6599,7 @@
             <a:pPr lvl="0"/>
             <a:r>
               <a:rPr/>
-              <a:t>Stage 2c DQ stress test: minimax rule selects </a:t>
+              <a:t>Stage 2c DQ stress: minimax rule selects </a:t>
             </a:r>
             <a:r>
               <a:rPr>
@@ -5268,7 +6612,7 @@
             <a:pPr lvl="0"/>
             <a:r>
               <a:rPr/>
-              <a:t>Negative-control diagnostic: 2 of 5 prespecified NCs survive NZV filtering and both pass; narrower panel than the SAP specified, recorded in the audit log</a:t>
+              <a:t>Stage 3 (optional NC): 2 of 5 prespecified NCs survive NZV filtering and both pass; narrower panel than the SAP specified, recorded in the audit log</a:t>
             </a:r>
           </a:p>
           <a:p>
@@ -5285,7 +6629,7 @@
 </p:sld>
 </file>
 
-<file path=ppt/slides/slide29.xml><?xml version="1.0" encoding="utf-8"?>
+<file path=ppt/slides/slide35.xml><?xml version="1.0" encoding="utf-8"?>
 <p:sld xmlns:a="http://schemas.openxmlformats.org/drawingml/2006/main" xmlns:r="http://schemas.openxmlformats.org/officeDocument/2006/relationships" xmlns:p="http://schemas.openxmlformats.org/presentationml/2006/main">
   <p:cSld>
     <p:spTree>
@@ -5907,625 +7251,6 @@
 </p:sld>
 </file>
 
-<file path=ppt/slides/slide3.xml><?xml version="1.0" encoding="utf-8"?>
-<p:sld xmlns:a="http://schemas.openxmlformats.org/drawingml/2006/main" xmlns:r="http://schemas.openxmlformats.org/officeDocument/2006/relationships" xmlns:p="http://schemas.openxmlformats.org/presentationml/2006/main">
-  <p:cSld>
-    <p:spTree>
-      <p:nvGrpSpPr>
-        <p:cNvPr id="1" name=""/>
-        <p:cNvGrpSpPr/>
-        <p:nvPr/>
-      </p:nvGrpSpPr>
-      <p:grpSpPr>
-        <a:xfrm>
-          <a:off x="0" y="0"/>
-          <a:ext cx="0" cy="0"/>
-          <a:chOff x="0" y="0"/>
-          <a:chExt cx="0" cy="0"/>
-        </a:xfrm>
-      </p:grpSpPr>
-      <p:sp>
-        <p:nvSpPr>
-          <p:cNvPr id="2" name="Title 1"/>
-          <p:cNvSpPr>
-            <a:spLocks noGrp="1"/>
-          </p:cNvSpPr>
-          <p:nvPr>
-            <p:ph type="title"/>
-          </p:nvPr>
-        </p:nvSpPr>
-        <p:spPr/>
-        <p:txBody>
-          <a:bodyPr/>
-          <a:lstStyle/>
-          <a:p>
-            <a:pPr lvl="0" indent="0" marL="0">
-              <a:buNone/>
-            </a:pPr>
-            <a:r>
-              <a:rPr/>
-              <a:t>What I will cover (≈30 min)</a:t>
-            </a:r>
-          </a:p>
-        </p:txBody>
-      </p:sp>
-      <p:sp>
-        <p:nvSpPr>
-          <p:cNvPr id="3" name="Content Placeholder 2"/>
-          <p:cNvSpPr>
-            <a:spLocks noGrp="1"/>
-          </p:cNvSpPr>
-          <p:nvPr>
-            <p:ph idx="1"/>
-          </p:nvPr>
-        </p:nvSpPr>
-        <p:spPr/>
-        <p:txBody>
-          <a:bodyPr/>
-          <a:lstStyle/>
-          <a:p>
-            <a:pPr lvl="0" indent="-342900" marL="342900">
-              <a:buAutoNum type="arabicPeriod"/>
-            </a:pPr>
-            <a:r>
-              <a:rPr/>
-              <a:t>The standard pre-outcome review vs. what cleanTMLE adds</a:t>
-            </a:r>
-          </a:p>
-          <a:p>
-            <a:pPr lvl="0" indent="-342900" marL="342900">
-              <a:buAutoNum type="arabicPeriod"/>
-            </a:pPr>
-            <a:r>
-              <a:rPr/>
-              <a:t>Outcome-blind staged workflow (and what it does not replace)</a:t>
-            </a:r>
-          </a:p>
-          <a:p>
-            <a:pPr lvl="0" indent="-342900" marL="342900">
-              <a:buAutoNum type="arabicPeriod"/>
-            </a:pPr>
-            <a:r>
-              <a:rPr/>
-              <a:t>The DQ stress test</a:t>
-            </a:r>
-          </a:p>
-          <a:p>
-            <a:pPr lvl="0" indent="-342900" marL="342900">
-              <a:buAutoNum type="arabicPeriod"/>
-            </a:pPr>
-            <a:r>
-              <a:rPr/>
-              <a:t>Simulation study</a:t>
-            </a:r>
-          </a:p>
-          <a:p>
-            <a:pPr lvl="0" indent="-342900" marL="342900">
-              <a:buAutoNum type="arabicPeriod"/>
-            </a:pPr>
-            <a:r>
-              <a:rPr/>
-              <a:t>Rescue.Co case study (Kenya Trauma Registry)</a:t>
-            </a:r>
-          </a:p>
-          <a:p>
-            <a:pPr lvl="0" indent="-342900" marL="342900">
-              <a:buAutoNum type="arabicPeriod"/>
-            </a:pPr>
-            <a:r>
-              <a:rPr/>
-              <a:t>What cleanTMLE contributes operationally</a:t>
-            </a:r>
-          </a:p>
-          <a:p>
-            <a:pPr lvl="0" indent="-342900" marL="342900">
-              <a:buAutoNum type="arabicPeriod"/>
-            </a:pPr>
-            <a:r>
-              <a:rPr/>
-              <a:t>Limitations and the 0.2 roadmap</a:t>
-            </a:r>
-          </a:p>
-          <a:p>
-            <a:pPr lvl="0" indent="-342900" marL="342900">
-              <a:buAutoNum type="arabicPeriod"/>
-            </a:pPr>
-            <a:r>
-              <a:rPr/>
-              <a:t>Open questions for collaborators</a:t>
-            </a:r>
-          </a:p>
-        </p:txBody>
-      </p:sp>
-    </p:spTree>
-  </p:cSld>
-</p:sld>
-</file>
-
-<file path=ppt/slides/slide30.xml><?xml version="1.0" encoding="utf-8"?>
-<p:sld xmlns:a="http://schemas.openxmlformats.org/drawingml/2006/main" xmlns:r="http://schemas.openxmlformats.org/officeDocument/2006/relationships" xmlns:p="http://schemas.openxmlformats.org/presentationml/2006/main">
-  <p:cSld>
-    <p:spTree>
-      <p:nvGrpSpPr>
-        <p:cNvPr id="1" name=""/>
-        <p:cNvGrpSpPr/>
-        <p:nvPr/>
-      </p:nvGrpSpPr>
-      <p:grpSpPr>
-        <a:xfrm>
-          <a:off x="0" y="0"/>
-          <a:ext cx="0" cy="0"/>
-          <a:chOff x="0" y="0"/>
-          <a:chExt cx="0" cy="0"/>
-        </a:xfrm>
-      </p:grpSpPr>
-      <p:sp>
-        <p:nvSpPr>
-          <p:cNvPr id="3" name="Content Placeholder 2"/>
-          <p:cNvSpPr>
-            <a:spLocks noGrp="1"/>
-          </p:cNvSpPr>
-          <p:nvPr>
-            <p:ph idx="1"/>
-          </p:nvPr>
-        </p:nvSpPr>
-        <p:spPr/>
-        <p:txBody>
-          <a:bodyPr/>
-          <a:lstStyle/>
-          <a:p>
-            <a:pPr lvl="0" indent="0" marL="0">
-              <a:buNone/>
-            </a:pPr>
-            <a:r>
-              <a:rPr/>
-              <a:t>Six estimators agree on direction; primary TMLE 95% CI crosses zero.</a:t>
-            </a:r>
-          </a:p>
-        </p:txBody>
-      </p:sp>
-    </p:spTree>
-  </p:cSld>
-</p:sld>
-</file>
-
-<file path=ppt/slides/slide31.xml><?xml version="1.0" encoding="utf-8"?>
-<p:sld xmlns:a="http://schemas.openxmlformats.org/drawingml/2006/main" xmlns:r="http://schemas.openxmlformats.org/officeDocument/2006/relationships" xmlns:p="http://schemas.openxmlformats.org/presentationml/2006/main">
-  <p:cSld>
-    <p:spTree>
-      <p:nvGrpSpPr>
-        <p:cNvPr id="1" name=""/>
-        <p:cNvGrpSpPr/>
-        <p:nvPr/>
-      </p:nvGrpSpPr>
-      <p:grpSpPr>
-        <a:xfrm>
-          <a:off x="0" y="0"/>
-          <a:ext cx="0" cy="0"/>
-          <a:chOff x="0" y="0"/>
-          <a:chExt cx="0" cy="0"/>
-        </a:xfrm>
-      </p:grpSpPr>
-      <p:sp>
-        <p:nvSpPr>
-          <p:cNvPr id="2" name="Title 1"/>
-          <p:cNvSpPr>
-            <a:spLocks noGrp="1"/>
-          </p:cNvSpPr>
-          <p:nvPr>
-            <p:ph type="title"/>
-          </p:nvPr>
-        </p:nvSpPr>
-        <p:spPr/>
-        <p:txBody>
-          <a:bodyPr/>
-          <a:lstStyle/>
-          <a:p>
-            <a:pPr lvl="0" indent="0" marL="0">
-              <a:buNone/>
-            </a:pPr>
-            <a:r>
-              <a:rPr/>
-              <a:t>Reading the case study</a:t>
-            </a:r>
-          </a:p>
-        </p:txBody>
-      </p:sp>
-      <p:sp>
-        <p:nvSpPr>
-          <p:cNvPr id="3" name="Content Placeholder 2"/>
-          <p:cNvSpPr>
-            <a:spLocks noGrp="1"/>
-          </p:cNvSpPr>
-          <p:nvPr>
-            <p:ph idx="1"/>
-          </p:nvPr>
-        </p:nvSpPr>
-        <p:spPr/>
-        <p:txBody>
-          <a:bodyPr/>
-          <a:lstStyle/>
-          <a:p>
-            <a:pPr lvl="0"/>
-            <a:r>
-              <a:rPr/>
-              <a:t>All six estimators agree on direction (RD 0.026 to 0.037 favouring Rescue.Co)</a:t>
-            </a:r>
-          </a:p>
-          <a:p>
-            <a:pPr lvl="0"/>
-            <a:r>
-              <a:rPr/>
-              <a:t>The prespecified primary TMLE 95% CI crosses zero</a:t>
-            </a:r>
-          </a:p>
-          <a:p>
-            <a:pPr lvl="0"/>
-            <a:r>
-              <a:rPr/>
-              <a:t>A 0.0012 additive bias would push the lower CI bound across zero (a CI-tipping-point distance, not a full QBA)</a:t>
-            </a:r>
-          </a:p>
-          <a:p>
-            <a:pPr lvl="0"/>
-            <a:r>
-              <a:rPr/>
-              <a:t>The audit log captures every analytic decision, including the three NC drops</a:t>
-            </a:r>
-          </a:p>
-          <a:p>
-            <a:pPr lvl="0"/>
-            <a:r>
-              <a:rPr i="1"/>
-              <a:t>Workflow demonstration; not a causal claim about Rescue.Co.</a:t>
-            </a:r>
-          </a:p>
-        </p:txBody>
-      </p:sp>
-    </p:spTree>
-  </p:cSld>
-</p:sld>
-</file>
-
-<file path=ppt/slides/slide32.xml><?xml version="1.0" encoding="utf-8"?>
-<p:sld xmlns:a="http://schemas.openxmlformats.org/drawingml/2006/main" xmlns:r="http://schemas.openxmlformats.org/officeDocument/2006/relationships" xmlns:p="http://schemas.openxmlformats.org/presentationml/2006/main">
-  <p:cSld>
-    <p:spTree>
-      <p:nvGrpSpPr>
-        <p:cNvPr id="1" name=""/>
-        <p:cNvGrpSpPr/>
-        <p:nvPr/>
-      </p:nvGrpSpPr>
-      <p:grpSpPr>
-        <a:xfrm>
-          <a:off x="0" y="0"/>
-          <a:ext cx="0" cy="0"/>
-          <a:chOff x="0" y="0"/>
-          <a:chExt cx="0" cy="0"/>
-        </a:xfrm>
-      </p:grpSpPr>
-      <p:sp>
-        <p:nvSpPr>
-          <p:cNvPr id="2" name="Title 1"/>
-          <p:cNvSpPr>
-            <a:spLocks noGrp="1"/>
-          </p:cNvSpPr>
-          <p:nvPr>
-            <p:ph type="title"/>
-          </p:nvPr>
-        </p:nvSpPr>
-        <p:spPr>
-          <a:xfrm>
-            <a:off x="722313" y="3305176"/>
-            <a:ext cx="7772400" cy="1021556"/>
-          </a:xfrm>
-        </p:spPr>
-        <p:txBody>
-          <a:bodyPr/>
-          <a:lstStyle/>
-          <a:p>
-            <a:pPr lvl="0" indent="0" marL="0">
-              <a:buNone/>
-            </a:pPr>
-            <a:r>
-              <a:rPr/>
-              <a:t>Discussion</a:t>
-            </a:r>
-          </a:p>
-        </p:txBody>
-      </p:sp>
-    </p:spTree>
-  </p:cSld>
-</p:sld>
-</file>
-
-<file path=ppt/slides/slide33.xml><?xml version="1.0" encoding="utf-8"?>
-<p:sld xmlns:a="http://schemas.openxmlformats.org/drawingml/2006/main" xmlns:r="http://schemas.openxmlformats.org/officeDocument/2006/relationships" xmlns:p="http://schemas.openxmlformats.org/presentationml/2006/main">
-  <p:cSld>
-    <p:spTree>
-      <p:nvGrpSpPr>
-        <p:cNvPr id="1" name=""/>
-        <p:cNvGrpSpPr/>
-        <p:nvPr/>
-      </p:nvGrpSpPr>
-      <p:grpSpPr>
-        <a:xfrm>
-          <a:off x="0" y="0"/>
-          <a:ext cx="0" cy="0"/>
-          <a:chOff x="0" y="0"/>
-          <a:chExt cx="0" cy="0"/>
-        </a:xfrm>
-      </p:grpSpPr>
-      <p:sp>
-        <p:nvSpPr>
-          <p:cNvPr id="2" name="Title 1"/>
-          <p:cNvSpPr>
-            <a:spLocks noGrp="1"/>
-          </p:cNvSpPr>
-          <p:nvPr>
-            <p:ph type="title"/>
-          </p:nvPr>
-        </p:nvSpPr>
-        <p:spPr/>
-        <p:txBody>
-          <a:bodyPr/>
-          <a:lstStyle/>
-          <a:p>
-            <a:pPr lvl="0" indent="0" marL="0">
-              <a:buNone/>
-            </a:pPr>
-            <a:r>
-              <a:rPr/>
-              <a:t>What cleanTMLE contributes operationally</a:t>
-            </a:r>
-          </a:p>
-        </p:txBody>
-      </p:sp>
-      <p:sp>
-        <p:nvSpPr>
-          <p:cNvPr id="3" name="Content Placeholder 2"/>
-          <p:cNvSpPr>
-            <a:spLocks noGrp="1"/>
-          </p:cNvSpPr>
-          <p:nvPr>
-            <p:ph idx="1"/>
-          </p:nvPr>
-        </p:nvSpPr>
-        <p:spPr/>
-        <p:txBody>
-          <a:bodyPr/>
-          <a:lstStyle/>
-          <a:p>
-            <a:pPr lvl="0"/>
-            <a:r>
-              <a:rPr b="1"/>
-              <a:t>Plasmode loop extended to robustness screening</a:t>
-            </a:r>
-            <a:r>
-              <a:rPr/>
-              <a:t> — each candidate produces a degradation gradient on the same bias / RMSE / coverage scale as the baseline</a:t>
-            </a:r>
-          </a:p>
-          <a:p>
-            <a:pPr lvl="0"/>
-            <a:r>
-              <a:rPr b="1"/>
-              <a:t>Lock + audit + decision logs as code artefacts</a:t>
-            </a:r>
-            <a:r>
-              <a:rPr/>
-              <a:t> — a fingerprinted record an external reviewer can reconstruct</a:t>
-            </a:r>
-          </a:p>
-          <a:p>
-            <a:pPr lvl="0"/>
-            <a:r>
-              <a:rPr b="1"/>
-              <a:t>Modular TMLE API</a:t>
-            </a:r>
-            <a:r>
-              <a:rPr/>
-              <a:t> — treatment fit, outcome fit, targeting, extract; each step callable at the right stage</a:t>
-            </a:r>
-          </a:p>
-          <a:p>
-            <a:pPr lvl="0" indent="0" marL="0">
-              <a:buNone/>
-            </a:pPr>
-            <a:r>
-              <a:rPr/>
-              <a:t>The claim is integration and auditability, not a new estimator.</a:t>
-            </a:r>
-          </a:p>
-        </p:txBody>
-      </p:sp>
-    </p:spTree>
-  </p:cSld>
-</p:sld>
-</file>
-
-<file path=ppt/slides/slide34.xml><?xml version="1.0" encoding="utf-8"?>
-<p:sld xmlns:a="http://schemas.openxmlformats.org/drawingml/2006/main" xmlns:r="http://schemas.openxmlformats.org/officeDocument/2006/relationships" xmlns:p="http://schemas.openxmlformats.org/presentationml/2006/main">
-  <p:cSld>
-    <p:spTree>
-      <p:nvGrpSpPr>
-        <p:cNvPr id="1" name=""/>
-        <p:cNvGrpSpPr/>
-        <p:nvPr/>
-      </p:nvGrpSpPr>
-      <p:grpSpPr>
-        <a:xfrm>
-          <a:off x="0" y="0"/>
-          <a:ext cx="0" cy="0"/>
-          <a:chOff x="0" y="0"/>
-          <a:chExt cx="0" cy="0"/>
-        </a:xfrm>
-      </p:grpSpPr>
-      <p:sp>
-        <p:nvSpPr>
-          <p:cNvPr id="2" name="Title 1"/>
-          <p:cNvSpPr>
-            <a:spLocks noGrp="1"/>
-          </p:cNvSpPr>
-          <p:nvPr>
-            <p:ph type="title"/>
-          </p:nvPr>
-        </p:nvSpPr>
-        <p:spPr/>
-        <p:txBody>
-          <a:bodyPr/>
-          <a:lstStyle/>
-          <a:p>
-            <a:pPr lvl="0" indent="0" marL="0">
-              <a:buNone/>
-            </a:pPr>
-            <a:r>
-              <a:rPr/>
-              <a:t>What is not new</a:t>
-            </a:r>
-          </a:p>
-        </p:txBody>
-      </p:sp>
-      <p:sp>
-        <p:nvSpPr>
-          <p:cNvPr id="3" name="Content Placeholder 2"/>
-          <p:cNvSpPr>
-            <a:spLocks noGrp="1"/>
-          </p:cNvSpPr>
-          <p:nvPr>
-            <p:ph idx="1"/>
-          </p:nvPr>
-        </p:nvSpPr>
-        <p:spPr/>
-        <p:txBody>
-          <a:bodyPr/>
-          <a:lstStyle/>
-          <a:p>
-            <a:pPr lvl="0"/>
-            <a:r>
-              <a:rPr/>
-              <a:t>Targeted learning (van der Laan, Petersen, Gruber, Schuler, …)</a:t>
-            </a:r>
-          </a:p>
-          <a:p>
-            <a:pPr lvl="0"/>
-            <a:r>
-              <a:rPr/>
-              <a:t>Plasmode simulation for candidate selection (Franklin 2014; Schuler 2017; Dang 2023)</a:t>
-            </a:r>
-          </a:p>
-          <a:p>
-            <a:pPr lvl="0"/>
-            <a:r>
-              <a:rPr/>
-              <a:t>Outcome blinding as a governance idea (Muntner 2024; Kent 2026)</a:t>
-            </a:r>
-          </a:p>
-          <a:p>
-            <a:pPr lvl="0"/>
-            <a:r>
-              <a:rPr/>
-              <a:t>Quantitative bias analysis (Lash 2014) — distinct from this pre-outcome screen</a:t>
-            </a:r>
-          </a:p>
-        </p:txBody>
-      </p:sp>
-    </p:spTree>
-  </p:cSld>
-</p:sld>
-</file>
-
-<file path=ppt/slides/slide35.xml><?xml version="1.0" encoding="utf-8"?>
-<p:sld xmlns:a="http://schemas.openxmlformats.org/drawingml/2006/main" xmlns:r="http://schemas.openxmlformats.org/officeDocument/2006/relationships" xmlns:p="http://schemas.openxmlformats.org/presentationml/2006/main">
-  <p:cSld>
-    <p:spTree>
-      <p:nvGrpSpPr>
-        <p:cNvPr id="1" name=""/>
-        <p:cNvGrpSpPr/>
-        <p:nvPr/>
-      </p:nvGrpSpPr>
-      <p:grpSpPr>
-        <a:xfrm>
-          <a:off x="0" y="0"/>
-          <a:ext cx="0" cy="0"/>
-          <a:chOff x="0" y="0"/>
-          <a:chExt cx="0" cy="0"/>
-        </a:xfrm>
-      </p:grpSpPr>
-      <p:sp>
-        <p:nvSpPr>
-          <p:cNvPr id="2" name="Title 1"/>
-          <p:cNvSpPr>
-            <a:spLocks noGrp="1"/>
-          </p:cNvSpPr>
-          <p:nvPr>
-            <p:ph type="title"/>
-          </p:nvPr>
-        </p:nvSpPr>
-        <p:spPr/>
-        <p:txBody>
-          <a:bodyPr/>
-          <a:lstStyle/>
-          <a:p>
-            <a:pPr lvl="0" indent="0" marL="0">
-              <a:buNone/>
-            </a:pPr>
-            <a:r>
-              <a:rPr/>
-              <a:t>Limitations</a:t>
-            </a:r>
-          </a:p>
-        </p:txBody>
-      </p:sp>
-      <p:sp>
-        <p:nvSpPr>
-          <p:cNvPr id="3" name="Content Placeholder 2"/>
-          <p:cNvSpPr>
-            <a:spLocks noGrp="1"/>
-          </p:cNvSpPr>
-          <p:nvPr>
-            <p:ph idx="1"/>
-          </p:nvPr>
-        </p:nvSpPr>
-        <p:spPr/>
-        <p:txBody>
-          <a:bodyPr/>
-          <a:lstStyle/>
-          <a:p>
-            <a:pPr lvl="0"/>
-            <a:r>
-              <a:rPr/>
-              <a:t>v0.1 scope: binary point exposure, binary outcome, marginal RD, MCAR outcome missingness handled by IPCW</a:t>
-            </a:r>
-          </a:p>
-          <a:p>
-            <a:pPr lvl="0"/>
-            <a:r>
-              <a:rPr/>
-              <a:t>DQ covariate-missingness mechanism is MCAR-only; MAR / MNAR variants are on the 0.2 roadmap</a:t>
-            </a:r>
-          </a:p>
-          <a:p>
-            <a:pPr lvl="0"/>
-            <a:r>
-              <a:rPr/>
-              <a:t>Decision-threshold defaults are heuristic, not derived from a regulatory specification; analysts set them from study context</a:t>
-            </a:r>
-          </a:p>
-          <a:p>
-            <a:pPr lvl="0"/>
-            <a:r>
-              <a:rPr/>
-              <a:t>The package cannot enforce personnel-level blinding or prevent a user with raw data access from inspecting outcomes outside the package</a:t>
-            </a:r>
-          </a:p>
-        </p:txBody>
-      </p:sp>
-    </p:spTree>
-  </p:cSld>
-</p:sld>
-</file>
-
 <file path=ppt/slides/slide36.xml><?xml version="1.0" encoding="utf-8"?>
 <p:sld xmlns:a="http://schemas.openxmlformats.org/drawingml/2006/main" xmlns:r="http://schemas.openxmlformats.org/officeDocument/2006/relationships" xmlns:p="http://schemas.openxmlformats.org/presentationml/2006/main">
   <p:cSld>
@@ -6545,12 +7270,12 @@
       </p:grpSpPr>
       <p:sp>
         <p:nvSpPr>
-          <p:cNvPr id="2" name="Title 1"/>
-          <p:cNvSpPr>
-            <a:spLocks noGrp="1"/>
-          </p:cNvSpPr>
-          <p:nvPr>
-            <p:ph type="title"/>
+          <p:cNvPr id="3" name="Content Placeholder 2"/>
+          <p:cNvSpPr>
+            <a:spLocks noGrp="1"/>
+          </p:cNvSpPr>
+          <p:nvPr>
+            <p:ph idx="1"/>
           </p:nvPr>
         </p:nvSpPr>
         <p:spPr/>
@@ -6563,91 +7288,7 @@
             </a:pPr>
             <a:r>
               <a:rPr/>
-              <a:t>Next steps (cleanTMLE 0.2)</a:t>
-            </a:r>
-          </a:p>
-        </p:txBody>
-      </p:sp>
-      <p:sp>
-        <p:nvSpPr>
-          <p:cNvPr id="3" name="Content Placeholder 2"/>
-          <p:cNvSpPr>
-            <a:spLocks noGrp="1"/>
-          </p:cNvSpPr>
-          <p:nvPr>
-            <p:ph idx="1"/>
-          </p:nvPr>
-        </p:nvSpPr>
-        <p:spPr/>
-        <p:txBody>
-          <a:bodyPr/>
-          <a:lstStyle/>
-          <a:p>
-            <a:pPr lvl="0"/>
-            <a:r>
-              <a:rPr/>
-              <a:t>MAR and MNAR missingness in the DQ stress test</a:t>
-            </a:r>
-          </a:p>
-          <a:p>
-            <a:pPr lvl="0"/>
-            <a:r>
-              <a:rPr/>
-              <a:t>Time-window confounders (strike windows, calendar-time shocks)</a:t>
-            </a:r>
-          </a:p>
-          <a:p>
-            <a:pPr lvl="0"/>
-            <a:r>
-              <a:rPr/>
-              <a:t>Inter-facility transfer imbalance as a built-in scenario</a:t>
-            </a:r>
-          </a:p>
-          <a:p>
-            <a:pPr lvl="0"/>
-            <a:r>
-              <a:rPr/>
-              <a:t>Time-to-event endpoints via composition with </a:t>
-            </a:r>
-            <a:r>
-              <a:rPr>
-                <a:latin typeface="Courier"/>
-              </a:rPr>
-              <a:t>survtmle</a:t>
-            </a:r>
-            <a:r>
-              <a:rPr/>
-              <a:t> and </a:t>
-            </a:r>
-            <a:r>
-              <a:rPr>
-                <a:latin typeface="Courier"/>
-              </a:rPr>
-              <a:t>lmtp</a:t>
-            </a:r>
-          </a:p>
-          <a:p>
-            <a:pPr lvl="0"/>
-            <a:r>
-              <a:rPr/>
-              <a:t>Reference-paper-driven </a:t>
-            </a:r>
-            <a:r>
-              <a:rPr>
-                <a:latin typeface="Courier"/>
-              </a:rPr>
-              <a:t>data_quality_scenarios.yml</a:t>
-            </a:r>
-            <a:r>
-              <a:rPr/>
-              <a:t> ingesting validation-literature parameters and attaching citations to the audit log</a:t>
-            </a:r>
-          </a:p>
-          <a:p>
-            <a:pPr lvl="0"/>
-            <a:r>
-              <a:rPr/>
-              <a:t>Bootstrap variance for IPTW and matched TMLE</a:t>
+              <a:t>Six estimators agree on direction; primary TMLE 95% CI crosses zero.</a:t>
             </a:r>
           </a:p>
         </p:txBody>
@@ -6684,12 +7325,7 @@
             <p:ph type="title"/>
           </p:nvPr>
         </p:nvSpPr>
-        <p:spPr>
-          <a:xfrm>
-            <a:off x="722313" y="3305176"/>
-            <a:ext cx="7772400" cy="1021556"/>
-          </a:xfrm>
-        </p:spPr>
+        <p:spPr/>
         <p:txBody>
           <a:bodyPr/>
           <a:lstStyle/>
@@ -6699,7 +7335,58 @@
             </a:pPr>
             <a:r>
               <a:rPr/>
-              <a:t>Open questions for collaborators</a:t>
+              <a:t>Reading the case study</a:t>
+            </a:r>
+          </a:p>
+        </p:txBody>
+      </p:sp>
+      <p:sp>
+        <p:nvSpPr>
+          <p:cNvPr id="3" name="Content Placeholder 2"/>
+          <p:cNvSpPr>
+            <a:spLocks noGrp="1"/>
+          </p:cNvSpPr>
+          <p:nvPr>
+            <p:ph idx="1"/>
+          </p:nvPr>
+        </p:nvSpPr>
+        <p:spPr/>
+        <p:txBody>
+          <a:bodyPr/>
+          <a:lstStyle/>
+          <a:p>
+            <a:pPr lvl="0"/>
+            <a:r>
+              <a:rPr/>
+              <a:t>All six estimators agree on direction (RD 0.026 to 0.037 favouring Rescue.Co)</a:t>
+            </a:r>
+          </a:p>
+          <a:p>
+            <a:pPr lvl="0"/>
+            <a:r>
+              <a:rPr/>
+              <a:t>The prespecified primary TMLE 95% CI crosses zero</a:t>
+            </a:r>
+          </a:p>
+          <a:p>
+            <a:pPr lvl="0"/>
+            <a:r>
+              <a:rPr/>
+              <a:t>A 0.0012 additive bias would push the lower CI bound across zero (a CI-tipping-point distance, not a full QBA)</a:t>
+            </a:r>
+          </a:p>
+          <a:p>
+            <a:pPr lvl="0"/>
+            <a:r>
+              <a:rPr/>
+              <a:t>The audit log captures every analytic decision, including the three NC drops</a:t>
+            </a:r>
+          </a:p>
+          <a:p>
+            <a:pPr lvl="0"/>
+            <a:r>
+              <a:rPr i="1"/>
+              <a:t>Workflow demonstration; not a causal claim about Rescue.Co.</a:t>
             </a:r>
           </a:p>
         </p:txBody>
@@ -6736,7 +7423,12 @@
             <p:ph type="title"/>
           </p:nvPr>
         </p:nvSpPr>
-        <p:spPr/>
+        <p:spPr>
+          <a:xfrm>
+            <a:off x="722313" y="3305176"/>
+            <a:ext cx="7772400" cy="1021556"/>
+          </a:xfrm>
+        </p:spPr>
         <p:txBody>
           <a:bodyPr/>
           <a:lstStyle/>
@@ -6746,141 +7438,7 @@
             </a:pPr>
             <a:r>
               <a:rPr/>
-              <a:t>Where I want input</a:t>
-            </a:r>
-          </a:p>
-        </p:txBody>
-      </p:sp>
-      <p:sp>
-        <p:nvSpPr>
-          <p:cNvPr id="3" name="Content Placeholder 2"/>
-          <p:cNvSpPr>
-            <a:spLocks noGrp="1"/>
-          </p:cNvSpPr>
-          <p:nvPr>
-            <p:ph idx="1"/>
-          </p:nvPr>
-        </p:nvSpPr>
-        <p:spPr/>
-        <p:txBody>
-          <a:bodyPr/>
-          <a:lstStyle/>
-          <a:p>
-            <a:pPr lvl="0" indent="-342900" marL="342900">
-              <a:buAutoNum type="arabicPeriod"/>
-            </a:pPr>
-            <a:r>
-              <a:rPr b="1"/>
-              <a:t>Severity-range calibration</a:t>
-            </a:r>
-            <a:r>
-              <a:rPr/>
-              <a:t> — how to elicit and document </a:t>
-            </a:r>
-            <a:r>
-              <a:rPr>
-                <a:latin typeface="Courier"/>
-              </a:rPr>
-              <a:t>(sens, spec)</a:t>
-            </a:r>
-            <a:r>
-              <a:rPr/>
-              <a:t>, missingness, and U-shift ranges in a way a reviewer accepts</a:t>
-            </a:r>
-          </a:p>
-          <a:p>
-            <a:pPr lvl="0" indent="-342900" marL="342900">
-              <a:buAutoNum type="arabicPeriod"/>
-            </a:pPr>
-            <a:r>
-              <a:rPr b="1"/>
-              <a:t>Decision-threshold defaults</a:t>
-            </a:r>
-            <a:r>
-              <a:rPr/>
-              <a:t> — should they scale with the prespecified estimand magnitude and Type I error budget?</a:t>
-            </a:r>
-          </a:p>
-          <a:p>
-            <a:pPr lvl="0" indent="-342900" marL="342900">
-              <a:buAutoNum type="arabicPeriod"/>
-            </a:pPr>
-            <a:r>
-              <a:rPr b="1"/>
-              <a:t>Role separation</a:t>
-            </a:r>
-            <a:r>
-              <a:rPr/>
-              <a:t> — minimum personnel governance that should sit on top of the software workflow for submission-grade studies</a:t>
-            </a:r>
-          </a:p>
-          <a:p>
-            <a:pPr lvl="0" indent="-342900" marL="342900">
-              <a:buAutoNum type="arabicPeriod"/>
-            </a:pPr>
-            <a:r>
-              <a:rPr b="1"/>
-              <a:t>Plasmode faithfulness</a:t>
-            </a:r>
-            <a:r>
-              <a:rPr/>
-              <a:t> — is the parametric synthetic-outcome mechanism faithful enough, or do we need richer DGPs (effect modification, time-varying treatment)?</a:t>
-            </a:r>
-          </a:p>
-          <a:p>
-            <a:pPr lvl="0" indent="-342900" marL="342900">
-              <a:buAutoNum type="arabicPeriod"/>
-            </a:pPr>
-            <a:r>
-              <a:rPr b="1"/>
-              <a:t>Negative-control policy</a:t>
-            </a:r>
-            <a:r>
-              <a:rPr/>
-              <a:t> — when the NZV filter prunes prespecified NCs, re-elicit before unblinding or accept a narrower panel and document?</a:t>
-            </a:r>
-          </a:p>
-          <a:p>
-            <a:pPr lvl="0" indent="-342900" marL="342900">
-              <a:buAutoNum type="arabicPeriod"/>
-            </a:pPr>
-            <a:r>
-              <a:rPr b="1"/>
-              <a:t>Publication venue</a:t>
-            </a:r>
-            <a:r>
-              <a:rPr/>
-              <a:t> — </a:t>
-            </a:r>
-            <a:r>
-              <a:rPr>
-                <a:latin typeface="Courier"/>
-              </a:rPr>
-              <a:t>Epidemiology</a:t>
-            </a:r>
-            <a:r>
-              <a:rPr/>
-              <a:t>, </a:t>
-            </a:r>
-            <a:r>
-              <a:rPr>
-                <a:latin typeface="Courier"/>
-              </a:rPr>
-              <a:t>Stat Med</a:t>
-            </a:r>
-            <a:r>
-              <a:rPr/>
-              <a:t>, </a:t>
-            </a:r>
-            <a:r>
-              <a:rPr>
-                <a:latin typeface="Courier"/>
-              </a:rPr>
-              <a:t>Biometrics</a:t>
-            </a:r>
-            <a:r>
-              <a:rPr/>
-              <a:t>, or an RWE-specific venue?</a:t>
+              <a:t>Discussion</a:t>
             </a:r>
           </a:p>
         </p:txBody>
@@ -6927,7 +7485,7 @@
             </a:pPr>
             <a:r>
               <a:rPr/>
-              <a:t>Resources</a:t>
+              <a:t>What cleanTMLE contributes operationally</a:t>
             </a:r>
           </a:p>
         </p:txBody>
@@ -6949,53 +7507,71 @@
           <a:p>
             <a:pPr lvl="0"/>
             <a:r>
-              <a:rPr/>
-              <a:t>Package: </a:t>
-            </a:r>
-            <a:r>
-              <a:rPr>
-                <a:hlinkClick r:id="rId2"/>
-              </a:rPr>
-              <a:t>https://github.com/amertens/cleanTMLE</a:t>
-            </a:r>
-          </a:p>
-          <a:p>
-            <a:pPr lvl="0"/>
-            <a:r>
-              <a:rPr/>
-              <a:t>Manuscript draft: </a:t>
-            </a:r>
-            <a:r>
-              <a:rPr>
-                <a:latin typeface="Courier"/>
-              </a:rPr>
-              <a:t>reports/manuscript_outcome_blind_dq.qmd</a:t>
-            </a:r>
-          </a:p>
-          <a:p>
-            <a:pPr lvl="0"/>
-            <a:r>
-              <a:rPr/>
-              <a:t>Case study: </a:t>
-            </a:r>
-            <a:r>
-              <a:rPr>
-                <a:latin typeface="Courier"/>
-              </a:rPr>
-              <a:t>rescueCo/reports/rescueco_clean_room_case_study.qmd</a:t>
-            </a:r>
-          </a:p>
-          <a:p>
-            <a:pPr lvl="0"/>
-            <a:r>
-              <a:rPr/>
-              <a:t>Vignette: </a:t>
-            </a:r>
-            <a:r>
-              <a:rPr>
-                <a:latin typeface="Courier"/>
-              </a:rPr>
-              <a:t>cleanTMLE/vignettes/cleanTMLE-staged-analysis.qmd</a:t>
+              <a:rPr b="1"/>
+              <a:t>Auditable analysis lock</a:t>
+            </a:r>
+            <a:r>
+              <a:rPr/>
+              <a:t> with sha256 fingerprint</a:t>
+            </a:r>
+          </a:p>
+          <a:p>
+            <a:pPr lvl="0"/>
+            <a:r>
+              <a:rPr b="1"/>
+              <a:t>Outcome-access checks</a:t>
+            </a:r>
+            <a:r>
+              <a:rPr/>
+              <a:t> inside exported functions</a:t>
+            </a:r>
+          </a:p>
+          <a:p>
+            <a:pPr lvl="0"/>
+            <a:r>
+              <a:rPr b="1"/>
+              <a:t>Baseline plasmode estimator selection</a:t>
+            </a:r>
+            <a:r>
+              <a:rPr/>
+              <a:t> under the locked DGP</a:t>
+            </a:r>
+          </a:p>
+          <a:p>
+            <a:pPr lvl="0"/>
+            <a:r>
+              <a:rPr b="1"/>
+              <a:t>DQ stress testing</a:t>
+            </a:r>
+            <a:r>
+              <a:rPr/>
+              <a:t> using the same performance metrics, on the same scale</a:t>
+            </a:r>
+          </a:p>
+          <a:p>
+            <a:pPr lvl="0"/>
+            <a:r>
+              <a:rPr b="1"/>
+              <a:t>GO / FLAG / STOP</a:t>
+            </a:r>
+            <a:r>
+              <a:rPr/>
+              <a:t> checkpoint record</a:t>
+            </a:r>
+          </a:p>
+          <a:p>
+            <a:pPr lvl="0"/>
+            <a:r>
+              <a:rPr/>
+              <a:t>A </a:t>
+            </a:r>
+            <a:r>
+              <a:rPr b="1"/>
+              <a:t>reproducible bridge</a:t>
+            </a:r>
+            <a:r>
+              <a:rPr/>
+              <a:t> between fit-for-purpose concerns and estimator choice</a:t>
             </a:r>
           </a:p>
           <a:p>
@@ -7004,7 +7580,7 @@
             </a:pPr>
             <a:r>
               <a:rPr/>
-              <a:t>Thank you. Questions and pushback welcome.</a:t>
+              <a:t>The claim is integration and auditability, not a new estimator.</a:t>
             </a:r>
           </a:p>
         </p:txBody>
@@ -7041,6 +7617,459 @@
             <p:ph type="title"/>
           </p:nvPr>
         </p:nvSpPr>
+        <p:spPr/>
+        <p:txBody>
+          <a:bodyPr/>
+          <a:lstStyle/>
+          <a:p>
+            <a:pPr lvl="0" indent="0" marL="0">
+              <a:buNone/>
+            </a:pPr>
+            <a:r>
+              <a:rPr/>
+              <a:t>Five questions, five slides</a:t>
+            </a:r>
+          </a:p>
+        </p:txBody>
+      </p:sp>
+      <p:sp>
+        <p:nvSpPr>
+          <p:cNvPr id="3" name="Content Placeholder 2"/>
+          <p:cNvSpPr>
+            <a:spLocks noGrp="1"/>
+          </p:cNvSpPr>
+          <p:nvPr>
+            <p:ph idx="1"/>
+          </p:nvPr>
+        </p:nvSpPr>
+        <p:spPr/>
+        <p:txBody>
+          <a:bodyPr/>
+          <a:lstStyle/>
+          <a:p>
+            <a:pPr lvl="0" indent="0" marL="0">
+              <a:buNone/>
+            </a:pPr>
+            <a:r>
+              <a:rPr/>
+              <a:t>The rest of the deck is organised around five “why” questions:</a:t>
+            </a:r>
+          </a:p>
+          <a:p>
+            <a:pPr lvl="0" indent="-342900" marL="342900">
+              <a:buAutoNum type="arabicPeriod"/>
+            </a:pPr>
+            <a:r>
+              <a:rPr b="1"/>
+              <a:t>Why clean-room / staged design?</a:t>
+            </a:r>
+          </a:p>
+          <a:p>
+            <a:pPr lvl="0" indent="-342900" marL="342900">
+              <a:buAutoNum type="arabicPeriod"/>
+            </a:pPr>
+            <a:r>
+              <a:rPr b="1"/>
+              <a:t>Why TMLE?</a:t>
+            </a:r>
+          </a:p>
+          <a:p>
+            <a:pPr lvl="0" indent="-342900" marL="342900">
+              <a:buAutoNum type="arabicPeriod"/>
+            </a:pPr>
+            <a:r>
+              <a:rPr b="1"/>
+              <a:t>Why plasmode simulation?</a:t>
+            </a:r>
+          </a:p>
+          <a:p>
+            <a:pPr lvl="0" indent="-342900" marL="342900">
+              <a:buAutoNum type="arabicPeriod"/>
+            </a:pPr>
+            <a:r>
+              <a:rPr b="1"/>
+              <a:t>Why DQ stress testing?</a:t>
+            </a:r>
+          </a:p>
+          <a:p>
+            <a:pPr lvl="0" indent="-342900" marL="342900">
+              <a:buAutoNum type="arabicPeriod"/>
+            </a:pPr>
+            <a:r>
+              <a:rPr b="1"/>
+              <a:t>Why not just PS diagnostics and negative controls?</a:t>
+            </a:r>
+          </a:p>
+          <a:p>
+            <a:pPr lvl="0" indent="0" marL="0">
+              <a:buNone/>
+            </a:pPr>
+            <a:r>
+              <a:rPr/>
+              <a:t>If you only remember one slide, remember the contrast table on the next slide.</a:t>
+            </a:r>
+          </a:p>
+        </p:txBody>
+      </p:sp>
+    </p:spTree>
+  </p:cSld>
+</p:sld>
+</file>
+
+<file path=ppt/slides/slide40.xml><?xml version="1.0" encoding="utf-8"?>
+<p:sld xmlns:a="http://schemas.openxmlformats.org/drawingml/2006/main" xmlns:r="http://schemas.openxmlformats.org/officeDocument/2006/relationships" xmlns:p="http://schemas.openxmlformats.org/presentationml/2006/main">
+  <p:cSld>
+    <p:spTree>
+      <p:nvGrpSpPr>
+        <p:cNvPr id="1" name=""/>
+        <p:cNvGrpSpPr/>
+        <p:nvPr/>
+      </p:nvGrpSpPr>
+      <p:grpSpPr>
+        <a:xfrm>
+          <a:off x="0" y="0"/>
+          <a:ext cx="0" cy="0"/>
+          <a:chOff x="0" y="0"/>
+          <a:chExt cx="0" cy="0"/>
+        </a:xfrm>
+      </p:grpSpPr>
+      <p:sp>
+        <p:nvSpPr>
+          <p:cNvPr id="2" name="Title 1"/>
+          <p:cNvSpPr>
+            <a:spLocks noGrp="1"/>
+          </p:cNvSpPr>
+          <p:nvPr>
+            <p:ph type="title"/>
+          </p:nvPr>
+        </p:nvSpPr>
+        <p:spPr/>
+        <p:txBody>
+          <a:bodyPr/>
+          <a:lstStyle/>
+          <a:p>
+            <a:pPr lvl="0" indent="0" marL="0">
+              <a:buNone/>
+            </a:pPr>
+            <a:r>
+              <a:rPr/>
+              <a:t>What is not new</a:t>
+            </a:r>
+          </a:p>
+        </p:txBody>
+      </p:sp>
+      <p:sp>
+        <p:nvSpPr>
+          <p:cNvPr id="3" name="Content Placeholder 2"/>
+          <p:cNvSpPr>
+            <a:spLocks noGrp="1"/>
+          </p:cNvSpPr>
+          <p:nvPr>
+            <p:ph idx="1"/>
+          </p:nvPr>
+        </p:nvSpPr>
+        <p:spPr/>
+        <p:txBody>
+          <a:bodyPr/>
+          <a:lstStyle/>
+          <a:p>
+            <a:pPr lvl="0"/>
+            <a:r>
+              <a:rPr/>
+              <a:t>Targeted learning (van der Laan, Petersen, Gruber, Schuler, …)</a:t>
+            </a:r>
+          </a:p>
+          <a:p>
+            <a:pPr lvl="0"/>
+            <a:r>
+              <a:rPr/>
+              <a:t>Plasmode simulation for candidate selection (Franklin 2014; Schuler 2017; Dang 2023)</a:t>
+            </a:r>
+          </a:p>
+          <a:p>
+            <a:pPr lvl="0"/>
+            <a:r>
+              <a:rPr/>
+              <a:t>Outcome blinding as a governance idea (Muntner 2024; Kent 2026)</a:t>
+            </a:r>
+          </a:p>
+          <a:p>
+            <a:pPr lvl="0"/>
+            <a:r>
+              <a:rPr/>
+              <a:t>Quantitative bias analysis (Lash 2014), which remains a post-outcome activity distinct from the pre-outcome DQ stress screen</a:t>
+            </a:r>
+          </a:p>
+        </p:txBody>
+      </p:sp>
+    </p:spTree>
+  </p:cSld>
+</p:sld>
+</file>
+
+<file path=ppt/slides/slide41.xml><?xml version="1.0" encoding="utf-8"?>
+<p:sld xmlns:a="http://schemas.openxmlformats.org/drawingml/2006/main" xmlns:r="http://schemas.openxmlformats.org/officeDocument/2006/relationships" xmlns:p="http://schemas.openxmlformats.org/presentationml/2006/main">
+  <p:cSld>
+    <p:spTree>
+      <p:nvGrpSpPr>
+        <p:cNvPr id="1" name=""/>
+        <p:cNvGrpSpPr/>
+        <p:nvPr/>
+      </p:nvGrpSpPr>
+      <p:grpSpPr>
+        <a:xfrm>
+          <a:off x="0" y="0"/>
+          <a:ext cx="0" cy="0"/>
+          <a:chOff x="0" y="0"/>
+          <a:chExt cx="0" cy="0"/>
+        </a:xfrm>
+      </p:grpSpPr>
+      <p:sp>
+        <p:nvSpPr>
+          <p:cNvPr id="2" name="Title 1"/>
+          <p:cNvSpPr>
+            <a:spLocks noGrp="1"/>
+          </p:cNvSpPr>
+          <p:nvPr>
+            <p:ph type="title"/>
+          </p:nvPr>
+        </p:nvSpPr>
+        <p:spPr/>
+        <p:txBody>
+          <a:bodyPr/>
+          <a:lstStyle/>
+          <a:p>
+            <a:pPr lvl="0" indent="0" marL="0">
+              <a:buNone/>
+            </a:pPr>
+            <a:r>
+              <a:rPr/>
+              <a:t>Limitations</a:t>
+            </a:r>
+          </a:p>
+        </p:txBody>
+      </p:sp>
+      <p:sp>
+        <p:nvSpPr>
+          <p:cNvPr id="3" name="Content Placeholder 2"/>
+          <p:cNvSpPr>
+            <a:spLocks noGrp="1"/>
+          </p:cNvSpPr>
+          <p:nvPr>
+            <p:ph idx="1"/>
+          </p:nvPr>
+        </p:nvSpPr>
+        <p:spPr/>
+        <p:txBody>
+          <a:bodyPr/>
+          <a:lstStyle/>
+          <a:p>
+            <a:pPr lvl="0"/>
+            <a:r>
+              <a:rPr/>
+              <a:t>Synthetic-outcome mechanism may not rank estimators the same way as the realized outcome process</a:t>
+            </a:r>
+          </a:p>
+          <a:p>
+            <a:pPr lvl="0"/>
+            <a:r>
+              <a:rPr/>
+              <a:t>v0.1 scope: binary point exposure, binary outcome, marginal RD, MCAR outcome missingness handled by IPCW</a:t>
+            </a:r>
+          </a:p>
+          <a:p>
+            <a:pPr lvl="0"/>
+            <a:r>
+              <a:rPr/>
+              <a:t>DQ stress testing is not formal causal sensitivity analysis</a:t>
+            </a:r>
+          </a:p>
+          <a:p>
+            <a:pPr lvl="0"/>
+            <a:r>
+              <a:rPr/>
+              <a:t>Software cannot replace role separation or source-data validation</a:t>
+            </a:r>
+          </a:p>
+          <a:p>
+            <a:pPr lvl="0"/>
+            <a:r>
+              <a:rPr/>
+              <a:t>Severity ranges require external justification (validation studies, profiling, expert elicitation)</a:t>
+            </a:r>
+          </a:p>
+          <a:p>
+            <a:pPr lvl="0"/>
+            <a:r>
+              <a:rPr/>
+              <a:t>Decision-threshold defaults are heuristic; analysts set them from study context</a:t>
+            </a:r>
+          </a:p>
+        </p:txBody>
+      </p:sp>
+    </p:spTree>
+  </p:cSld>
+</p:sld>
+</file>
+
+<file path=ppt/slides/slide42.xml><?xml version="1.0" encoding="utf-8"?>
+<p:sld xmlns:a="http://schemas.openxmlformats.org/drawingml/2006/main" xmlns:r="http://schemas.openxmlformats.org/officeDocument/2006/relationships" xmlns:p="http://schemas.openxmlformats.org/presentationml/2006/main">
+  <p:cSld>
+    <p:spTree>
+      <p:nvGrpSpPr>
+        <p:cNvPr id="1" name=""/>
+        <p:cNvGrpSpPr/>
+        <p:nvPr/>
+      </p:nvGrpSpPr>
+      <p:grpSpPr>
+        <a:xfrm>
+          <a:off x="0" y="0"/>
+          <a:ext cx="0" cy="0"/>
+          <a:chOff x="0" y="0"/>
+          <a:chExt cx="0" cy="0"/>
+        </a:xfrm>
+      </p:grpSpPr>
+      <p:sp>
+        <p:nvSpPr>
+          <p:cNvPr id="2" name="Title 1"/>
+          <p:cNvSpPr>
+            <a:spLocks noGrp="1"/>
+          </p:cNvSpPr>
+          <p:nvPr>
+            <p:ph type="title"/>
+          </p:nvPr>
+        </p:nvSpPr>
+        <p:spPr/>
+        <p:txBody>
+          <a:bodyPr/>
+          <a:lstStyle/>
+          <a:p>
+            <a:pPr lvl="0" indent="0" marL="0">
+              <a:buNone/>
+            </a:pPr>
+            <a:r>
+              <a:rPr/>
+              <a:t>Next steps (cleanTMLE 0.2)</a:t>
+            </a:r>
+          </a:p>
+        </p:txBody>
+      </p:sp>
+      <p:sp>
+        <p:nvSpPr>
+          <p:cNvPr id="3" name="Content Placeholder 2"/>
+          <p:cNvSpPr>
+            <a:spLocks noGrp="1"/>
+          </p:cNvSpPr>
+          <p:nvPr>
+            <p:ph idx="1"/>
+          </p:nvPr>
+        </p:nvSpPr>
+        <p:spPr/>
+        <p:txBody>
+          <a:bodyPr/>
+          <a:lstStyle/>
+          <a:p>
+            <a:pPr lvl="0"/>
+            <a:r>
+              <a:rPr/>
+              <a:t>MAR and MNAR missingness in the DQ stress test</a:t>
+            </a:r>
+          </a:p>
+          <a:p>
+            <a:pPr lvl="0"/>
+            <a:r>
+              <a:rPr/>
+              <a:t>Time-window confounders (strike windows, calendar-time shocks)</a:t>
+            </a:r>
+          </a:p>
+          <a:p>
+            <a:pPr lvl="0"/>
+            <a:r>
+              <a:rPr/>
+              <a:t>Inter-facility transfer imbalance as a built-in scenario</a:t>
+            </a:r>
+          </a:p>
+          <a:p>
+            <a:pPr lvl="0"/>
+            <a:r>
+              <a:rPr/>
+              <a:t>Time-to-event endpoints via composition with </a:t>
+            </a:r>
+            <a:r>
+              <a:rPr>
+                <a:latin typeface="Courier"/>
+              </a:rPr>
+              <a:t>survtmle</a:t>
+            </a:r>
+            <a:r>
+              <a:rPr/>
+              <a:t> and </a:t>
+            </a:r>
+            <a:r>
+              <a:rPr>
+                <a:latin typeface="Courier"/>
+              </a:rPr>
+              <a:t>lmtp</a:t>
+            </a:r>
+          </a:p>
+          <a:p>
+            <a:pPr lvl="0"/>
+            <a:r>
+              <a:rPr/>
+              <a:t>Reference-paper-driven </a:t>
+            </a:r>
+            <a:r>
+              <a:rPr>
+                <a:latin typeface="Courier"/>
+              </a:rPr>
+              <a:t>data_quality_scenarios.yml</a:t>
+            </a:r>
+            <a:r>
+              <a:rPr/>
+              <a:t> ingesting validation-literature parameters and attaching citations to the audit log</a:t>
+            </a:r>
+          </a:p>
+          <a:p>
+            <a:pPr lvl="0"/>
+            <a:r>
+              <a:rPr/>
+              <a:t>Bootstrap variance for IPTW and matched TMLE</a:t>
+            </a:r>
+          </a:p>
+        </p:txBody>
+      </p:sp>
+    </p:spTree>
+  </p:cSld>
+</p:sld>
+</file>
+
+<file path=ppt/slides/slide43.xml><?xml version="1.0" encoding="utf-8"?>
+<p:sld xmlns:a="http://schemas.openxmlformats.org/drawingml/2006/main" xmlns:r="http://schemas.openxmlformats.org/officeDocument/2006/relationships" xmlns:p="http://schemas.openxmlformats.org/presentationml/2006/main">
+  <p:cSld>
+    <p:spTree>
+      <p:nvGrpSpPr>
+        <p:cNvPr id="1" name=""/>
+        <p:cNvGrpSpPr/>
+        <p:nvPr/>
+      </p:nvGrpSpPr>
+      <p:grpSpPr>
+        <a:xfrm>
+          <a:off x="0" y="0"/>
+          <a:ext cx="0" cy="0"/>
+          <a:chOff x="0" y="0"/>
+          <a:chExt cx="0" cy="0"/>
+        </a:xfrm>
+      </p:grpSpPr>
+      <p:sp>
+        <p:nvSpPr>
+          <p:cNvPr id="2" name="Title 1"/>
+          <p:cNvSpPr>
+            <a:spLocks noGrp="1"/>
+          </p:cNvSpPr>
+          <p:nvPr>
+            <p:ph type="title"/>
+          </p:nvPr>
+        </p:nvSpPr>
         <p:spPr>
           <a:xfrm>
             <a:off x="722313" y="3305176"/>
@@ -7056,7 +8085,312 @@
             </a:pPr>
             <a:r>
               <a:rPr/>
-              <a:t>Motivation</a:t>
+              <a:t>Open questions for collaborators</a:t>
+            </a:r>
+          </a:p>
+        </p:txBody>
+      </p:sp>
+    </p:spTree>
+  </p:cSld>
+</p:sld>
+</file>
+
+<file path=ppt/slides/slide44.xml><?xml version="1.0" encoding="utf-8"?>
+<p:sld xmlns:a="http://schemas.openxmlformats.org/drawingml/2006/main" xmlns:r="http://schemas.openxmlformats.org/officeDocument/2006/relationships" xmlns:p="http://schemas.openxmlformats.org/presentationml/2006/main">
+  <p:cSld>
+    <p:spTree>
+      <p:nvGrpSpPr>
+        <p:cNvPr id="1" name=""/>
+        <p:cNvGrpSpPr/>
+        <p:nvPr/>
+      </p:nvGrpSpPr>
+      <p:grpSpPr>
+        <a:xfrm>
+          <a:off x="0" y="0"/>
+          <a:ext cx="0" cy="0"/>
+          <a:chOff x="0" y="0"/>
+          <a:chExt cx="0" cy="0"/>
+        </a:xfrm>
+      </p:grpSpPr>
+      <p:sp>
+        <p:nvSpPr>
+          <p:cNvPr id="2" name="Title 1"/>
+          <p:cNvSpPr>
+            <a:spLocks noGrp="1"/>
+          </p:cNvSpPr>
+          <p:nvPr>
+            <p:ph type="title"/>
+          </p:nvPr>
+        </p:nvSpPr>
+        <p:spPr/>
+        <p:txBody>
+          <a:bodyPr/>
+          <a:lstStyle/>
+          <a:p>
+            <a:pPr lvl="0" indent="0" marL="0">
+              <a:buNone/>
+            </a:pPr>
+            <a:r>
+              <a:rPr/>
+              <a:t>Where I want input</a:t>
+            </a:r>
+          </a:p>
+        </p:txBody>
+      </p:sp>
+      <p:sp>
+        <p:nvSpPr>
+          <p:cNvPr id="3" name="Content Placeholder 2"/>
+          <p:cNvSpPr>
+            <a:spLocks noGrp="1"/>
+          </p:cNvSpPr>
+          <p:nvPr>
+            <p:ph idx="1"/>
+          </p:nvPr>
+        </p:nvSpPr>
+        <p:spPr/>
+        <p:txBody>
+          <a:bodyPr/>
+          <a:lstStyle/>
+          <a:p>
+            <a:pPr lvl="0" indent="-342900" marL="342900">
+              <a:buAutoNum type="arabicPeriod"/>
+            </a:pPr>
+            <a:r>
+              <a:rPr b="1"/>
+              <a:t>Severity-range calibration</a:t>
+            </a:r>
+            <a:r>
+              <a:rPr/>
+              <a:t> — how to elicit and document </a:t>
+            </a:r>
+            <a:r>
+              <a:rPr>
+                <a:latin typeface="Courier"/>
+              </a:rPr>
+              <a:t>(sens, spec)</a:t>
+            </a:r>
+            <a:r>
+              <a:rPr/>
+              <a:t>, missingness, and U-shift ranges in a way a reviewer accepts</a:t>
+            </a:r>
+          </a:p>
+          <a:p>
+            <a:pPr lvl="0" indent="-342900" marL="342900">
+              <a:buAutoNum type="arabicPeriod"/>
+            </a:pPr>
+            <a:r>
+              <a:rPr b="1"/>
+              <a:t>Decision-threshold defaults</a:t>
+            </a:r>
+            <a:r>
+              <a:rPr/>
+              <a:t> — should they scale with the prespecified estimand magnitude and Type I error budget?</a:t>
+            </a:r>
+          </a:p>
+          <a:p>
+            <a:pPr lvl="0" indent="-342900" marL="342900">
+              <a:buAutoNum type="arabicPeriod"/>
+            </a:pPr>
+            <a:r>
+              <a:rPr b="1"/>
+              <a:t>Role separation</a:t>
+            </a:r>
+            <a:r>
+              <a:rPr/>
+              <a:t> — minimum personnel governance that should sit on top of the software workflow for submission-grade studies</a:t>
+            </a:r>
+          </a:p>
+          <a:p>
+            <a:pPr lvl="0" indent="-342900" marL="342900">
+              <a:buAutoNum type="arabicPeriod"/>
+            </a:pPr>
+            <a:r>
+              <a:rPr b="1"/>
+              <a:t>Plasmode faithfulness</a:t>
+            </a:r>
+            <a:r>
+              <a:rPr/>
+              <a:t> — is the parametric synthetic-outcome mechanism faithful enough, or do we need richer DGPs (effect modification, time-varying treatment)?</a:t>
+            </a:r>
+          </a:p>
+          <a:p>
+            <a:pPr lvl="0" indent="-342900" marL="342900">
+              <a:buAutoNum type="arabicPeriod"/>
+            </a:pPr>
+            <a:r>
+              <a:rPr b="1"/>
+              <a:t>Negative-control policy</a:t>
+            </a:r>
+            <a:r>
+              <a:rPr/>
+              <a:t> — when the NZV filter prunes prespecified NCs, re-elicit before unblinding or accept a narrower panel and document?</a:t>
+            </a:r>
+          </a:p>
+          <a:p>
+            <a:pPr lvl="0" indent="-342900" marL="342900">
+              <a:buAutoNum type="arabicPeriod"/>
+            </a:pPr>
+            <a:r>
+              <a:rPr b="1"/>
+              <a:t>Publication venue</a:t>
+            </a:r>
+            <a:r>
+              <a:rPr/>
+              <a:t> — </a:t>
+            </a:r>
+            <a:r>
+              <a:rPr>
+                <a:latin typeface="Courier"/>
+              </a:rPr>
+              <a:t>Epidemiology</a:t>
+            </a:r>
+            <a:r>
+              <a:rPr/>
+              <a:t>, </a:t>
+            </a:r>
+            <a:r>
+              <a:rPr>
+                <a:latin typeface="Courier"/>
+              </a:rPr>
+              <a:t>Stat Med</a:t>
+            </a:r>
+            <a:r>
+              <a:rPr/>
+              <a:t>, </a:t>
+            </a:r>
+            <a:r>
+              <a:rPr>
+                <a:latin typeface="Courier"/>
+              </a:rPr>
+              <a:t>Biometrics</a:t>
+            </a:r>
+            <a:r>
+              <a:rPr/>
+              <a:t>, or an RWE-specific venue?</a:t>
+            </a:r>
+          </a:p>
+        </p:txBody>
+      </p:sp>
+    </p:spTree>
+  </p:cSld>
+</p:sld>
+</file>
+
+<file path=ppt/slides/slide45.xml><?xml version="1.0" encoding="utf-8"?>
+<p:sld xmlns:a="http://schemas.openxmlformats.org/drawingml/2006/main" xmlns:r="http://schemas.openxmlformats.org/officeDocument/2006/relationships" xmlns:p="http://schemas.openxmlformats.org/presentationml/2006/main">
+  <p:cSld>
+    <p:spTree>
+      <p:nvGrpSpPr>
+        <p:cNvPr id="1" name=""/>
+        <p:cNvGrpSpPr/>
+        <p:nvPr/>
+      </p:nvGrpSpPr>
+      <p:grpSpPr>
+        <a:xfrm>
+          <a:off x="0" y="0"/>
+          <a:ext cx="0" cy="0"/>
+          <a:chOff x="0" y="0"/>
+          <a:chExt cx="0" cy="0"/>
+        </a:xfrm>
+      </p:grpSpPr>
+      <p:sp>
+        <p:nvSpPr>
+          <p:cNvPr id="2" name="Title 1"/>
+          <p:cNvSpPr>
+            <a:spLocks noGrp="1"/>
+          </p:cNvSpPr>
+          <p:nvPr>
+            <p:ph type="title"/>
+          </p:nvPr>
+        </p:nvSpPr>
+        <p:spPr/>
+        <p:txBody>
+          <a:bodyPr/>
+          <a:lstStyle/>
+          <a:p>
+            <a:pPr lvl="0" indent="0" marL="0">
+              <a:buNone/>
+            </a:pPr>
+            <a:r>
+              <a:rPr/>
+              <a:t>Resources</a:t>
+            </a:r>
+          </a:p>
+        </p:txBody>
+      </p:sp>
+      <p:sp>
+        <p:nvSpPr>
+          <p:cNvPr id="3" name="Content Placeholder 2"/>
+          <p:cNvSpPr>
+            <a:spLocks noGrp="1"/>
+          </p:cNvSpPr>
+          <p:nvPr>
+            <p:ph idx="1"/>
+          </p:nvPr>
+        </p:nvSpPr>
+        <p:spPr/>
+        <p:txBody>
+          <a:bodyPr/>
+          <a:lstStyle/>
+          <a:p>
+            <a:pPr lvl="0"/>
+            <a:r>
+              <a:rPr/>
+              <a:t>Package: </a:t>
+            </a:r>
+            <a:r>
+              <a:rPr>
+                <a:hlinkClick r:id="rId2"/>
+              </a:rPr>
+              <a:t>https://github.com/amertens/cleanTMLE</a:t>
+            </a:r>
+          </a:p>
+          <a:p>
+            <a:pPr lvl="0"/>
+            <a:r>
+              <a:rPr/>
+              <a:t>Manuscript draft: </a:t>
+            </a:r>
+            <a:r>
+              <a:rPr>
+                <a:latin typeface="Courier"/>
+              </a:rPr>
+              <a:t>reports/manuscript_outcome_blind_dq.qmd</a:t>
+            </a:r>
+          </a:p>
+          <a:p>
+            <a:pPr lvl="0"/>
+            <a:r>
+              <a:rPr/>
+              <a:t>Case study: </a:t>
+            </a:r>
+            <a:r>
+              <a:rPr>
+                <a:latin typeface="Courier"/>
+              </a:rPr>
+              <a:t>rescueCo/reports/rescueco_clean_room_case_study.qmd</a:t>
+            </a:r>
+          </a:p>
+          <a:p>
+            <a:pPr lvl="0"/>
+            <a:r>
+              <a:rPr/>
+              <a:t>Vignette: </a:t>
+            </a:r>
+            <a:r>
+              <a:rPr>
+                <a:latin typeface="Courier"/>
+              </a:rPr>
+              <a:t>cleanTMLE/vignettes/cleanTMLE-staged-analysis.qmd</a:t>
+            </a:r>
+          </a:p>
+          <a:p>
+            <a:pPr lvl="0" indent="0" marL="0">
+              <a:buNone/>
+            </a:pPr>
+            <a:r>
+              <a:rPr/>
+              <a:t>Thank you. Questions and pushback welcome.</a:t>
             </a:r>
           </a:p>
         </p:txBody>
@@ -7067,6 +8401,58 @@
 </file>
 
 <file path=ppt/slides/slide5.xml><?xml version="1.0" encoding="utf-8"?>
+<p:sld xmlns:a="http://schemas.openxmlformats.org/drawingml/2006/main" xmlns:r="http://schemas.openxmlformats.org/officeDocument/2006/relationships" xmlns:p="http://schemas.openxmlformats.org/presentationml/2006/main">
+  <p:cSld>
+    <p:spTree>
+      <p:nvGrpSpPr>
+        <p:cNvPr id="1" name=""/>
+        <p:cNvGrpSpPr/>
+        <p:nvPr/>
+      </p:nvGrpSpPr>
+      <p:grpSpPr>
+        <a:xfrm>
+          <a:off x="0" y="0"/>
+          <a:ext cx="0" cy="0"/>
+          <a:chOff x="0" y="0"/>
+          <a:chExt cx="0" cy="0"/>
+        </a:xfrm>
+      </p:grpSpPr>
+      <p:sp>
+        <p:nvSpPr>
+          <p:cNvPr id="2" name="Title 1"/>
+          <p:cNvSpPr>
+            <a:spLocks noGrp="1"/>
+          </p:cNvSpPr>
+          <p:nvPr>
+            <p:ph type="title"/>
+          </p:nvPr>
+        </p:nvSpPr>
+        <p:spPr>
+          <a:xfrm>
+            <a:off x="722313" y="3305176"/>
+            <a:ext cx="7772400" cy="1021556"/>
+          </a:xfrm>
+        </p:spPr>
+        <p:txBody>
+          <a:bodyPr/>
+          <a:lstStyle/>
+          <a:p>
+            <a:pPr lvl="0" indent="0" marL="0">
+              <a:buNone/>
+            </a:pPr>
+            <a:r>
+              <a:rPr/>
+              <a:t>Motivation</a:t>
+            </a:r>
+          </a:p>
+        </p:txBody>
+      </p:sp>
+    </p:spTree>
+  </p:cSld>
+</p:sld>
+</file>
+
+<file path=ppt/slides/slide6.xml><?xml version="1.0" encoding="utf-8"?>
 <p:sld xmlns:a="http://schemas.openxmlformats.org/drawingml/2006/main" xmlns:r="http://schemas.openxmlformats.org/officeDocument/2006/relationships" xmlns:p="http://schemas.openxmlformats.org/presentationml/2006/main">
   <p:cSld>
     <p:spTree>
@@ -7474,53 +8860,6 @@
 </p:sld>
 </file>
 
-<file path=ppt/slides/slide6.xml><?xml version="1.0" encoding="utf-8"?>
-<p:sld xmlns:a="http://schemas.openxmlformats.org/drawingml/2006/main" xmlns:r="http://schemas.openxmlformats.org/officeDocument/2006/relationships" xmlns:p="http://schemas.openxmlformats.org/presentationml/2006/main">
-  <p:cSld>
-    <p:spTree>
-      <p:nvGrpSpPr>
-        <p:cNvPr id="1" name=""/>
-        <p:cNvGrpSpPr/>
-        <p:nvPr/>
-      </p:nvGrpSpPr>
-      <p:grpSpPr>
-        <a:xfrm>
-          <a:off x="0" y="0"/>
-          <a:ext cx="0" cy="0"/>
-          <a:chOff x="0" y="0"/>
-          <a:chExt cx="0" cy="0"/>
-        </a:xfrm>
-      </p:grpSpPr>
-      <p:sp>
-        <p:nvSpPr>
-          <p:cNvPr id="3" name="Content Placeholder 2"/>
-          <p:cNvSpPr>
-            <a:spLocks noGrp="1"/>
-          </p:cNvSpPr>
-          <p:nvPr>
-            <p:ph idx="1"/>
-          </p:nvPr>
-        </p:nvSpPr>
-        <p:spPr/>
-        <p:txBody>
-          <a:bodyPr/>
-          <a:lstStyle/>
-          <a:p>
-            <a:pPr lvl="0" indent="0" marL="0">
-              <a:buNone/>
-            </a:pPr>
-            <a:r>
-              <a:rPr/>
-              <a:t>The contribution is operational, not a new estimator.</a:t>
-            </a:r>
-          </a:p>
-        </p:txBody>
-      </p:sp>
-    </p:spTree>
-  </p:cSld>
-</p:sld>
-</file>
-
 <file path=ppt/slides/slide7.xml><?xml version="1.0" encoding="utf-8"?>
 <p:sld xmlns:a="http://schemas.openxmlformats.org/drawingml/2006/main" xmlns:r="http://schemas.openxmlformats.org/officeDocument/2006/relationships" xmlns:p="http://schemas.openxmlformats.org/presentationml/2006/main">
   <p:cSld>
@@ -7540,12 +8879,12 @@
       </p:grpSpPr>
       <p:sp>
         <p:nvSpPr>
-          <p:cNvPr id="2" name="Title 1"/>
-          <p:cNvSpPr>
-            <a:spLocks noGrp="1"/>
-          </p:cNvSpPr>
-          <p:nvPr>
-            <p:ph type="title"/>
+          <p:cNvPr id="3" name="Content Placeholder 2"/>
+          <p:cNvSpPr>
+            <a:spLocks noGrp="1"/>
+          </p:cNvSpPr>
+          <p:nvPr>
+            <p:ph idx="1"/>
           </p:nvPr>
         </p:nvSpPr>
         <p:spPr/>
@@ -7558,67 +8897,7 @@
             </a:pPr>
             <a:r>
               <a:rPr/>
-              <a:t>The quantitative bridge</a:t>
-            </a:r>
-          </a:p>
-        </p:txBody>
-      </p:sp>
-      <p:sp>
-        <p:nvSpPr>
-          <p:cNvPr id="3" name="Content Placeholder 2"/>
-          <p:cNvSpPr>
-            <a:spLocks noGrp="1"/>
-          </p:cNvSpPr>
-          <p:nvPr>
-            <p:ph idx="1"/>
-          </p:nvPr>
-        </p:nvSpPr>
-        <p:spPr/>
-        <p:txBody>
-          <a:bodyPr/>
-          <a:lstStyle/>
-          <a:p>
-            <a:pPr lvl="0" indent="0" marL="0">
-              <a:buNone/>
-            </a:pPr>
-            <a:r>
-              <a:rPr/>
-              <a:t>The plasmode loop is under the analyst’s control:</a:t>
-            </a:r>
-          </a:p>
-          <a:p>
-            <a:pPr lvl="0" indent="0" marL="1270000">
-              <a:buNone/>
-            </a:pPr>
-            <a:r>
-              <a:rPr sz="2000" b="1"/>
-              <a:t>Standard plasmode:</a:t>
-            </a:r>
-            <a:r>
-              <a:rPr sz="2000"/>
-              <a:t> which estimator performs best under the locked synthetic outcome model?</a:t>
-            </a:r>
-          </a:p>
-          <a:p>
-            <a:pPr lvl="0" indent="0" marL="1270000">
-              <a:buNone/>
-            </a:pPr>
-            <a:r>
-              <a:rPr sz="2000" b="1"/>
-              <a:t>DQ stress test:</a:t>
-            </a:r>
-            <a:r>
-              <a:rPr sz="2000"/>
-              <a:t> does that estimator remain acceptable under prespecified threats from the fit-for-purpose review?</a:t>
-            </a:r>
-          </a:p>
-          <a:p>
-            <a:pPr lvl="0" indent="0" marL="0">
-              <a:buNone/>
-            </a:pPr>
-            <a:r>
-              <a:rPr/>
-              <a:t>This turns the qualitative data-fitness argument into a quantitative supplement on the same bias / RMSE / coverage scale as the baseline simulation.</a:t>
+              <a:t>The contribution is operational, not a new estimator.</a:t>
             </a:r>
           </a:p>
         </p:txBody>
@@ -7665,88 +8944,87 @@
             </a:pPr>
             <a:r>
               <a:rPr/>
-              <a:t>What outcome-blind means here</a:t>
-            </a:r>
-          </a:p>
-        </p:txBody>
-      </p:sp>
-      <mc:AlternateContent xmlns:mc="http://schemas.openxmlformats.org/markup-compatibility/2006">
-        <mc:Choice xmlns:a14="http://schemas.microsoft.com/office/drawing/2010/main" Requires="a14">
-          <p:sp>
-            <p:nvSpPr>
-              <p:cNvPr id="3" name="Content Placeholder 2"/>
-              <p:cNvSpPr>
-                <a:spLocks noGrp="1"/>
-              </p:cNvSpPr>
-              <p:nvPr>
-                <p:ph idx="1"/>
-              </p:nvPr>
-            </p:nvSpPr>
-            <p:spPr/>
-            <p:txBody>
-              <a:bodyPr/>
-              <a:lstStyle/>
-              <a:p>
-                <a:pPr lvl="0" indent="0" marL="0">
-                  <a:buNone/>
-                </a:pPr>
-                <a:r>
-                  <a:rPr/>
-                  <a:t>Decisions about cohort, candidates, simulation scenarios, decision thresholds, and primary-estimator selection are made </a:t>
-                </a:r>
-                <a:r>
-                  <a:rPr b="1"/>
-                  <a:t>without inspecting the observed treatment-outcome association</a:t>
-                </a:r>
-                <a:r>
-                  <a:rPr/>
-                  <a:t>.</a:t>
-                </a:r>
-              </a:p>
-              <a:p>
-                <a:pPr lvl="0" indent="0" marL="0">
-                  <a:buNone/>
-                </a:pPr>
-                <a:r>
-                  <a:rPr/>
-                  <a:t>Allowed pre-decision: baseline covariates, treatment assignment, missingness indicators, synthetic outcomes, and the marginal mean of </a:t>
-                </a:r>
-                <a14:m>
-                  <m:oMath xmlns:m="http://schemas.openxmlformats.org/officeDocument/2006/math">
-                    <m:r>
-                      <m:t>Y</m:t>
-                    </m:r>
-                  </m:oMath>
-                </a14:m>
-                <a:r>
-                  <a:rPr/>
-                  <a:t> on </a:t>
-                </a:r>
-                <a14:m>
-                  <m:oMath xmlns:m="http://schemas.openxmlformats.org/officeDocument/2006/math">
-                    <m:r>
-                      <m:t>W</m:t>
-                    </m:r>
-                  </m:oMath>
-                </a14:m>
-                <a:r>
-                  <a:rPr/>
-                  <a:t> (used internally for the plasmode generator).</a:t>
-                </a:r>
-              </a:p>
-              <a:p>
-                <a:pPr lvl="0" indent="0" marL="0">
-                  <a:buNone/>
-                </a:pPr>
-                <a:r>
-                  <a:rPr/>
-                  <a:t>The package can restrict its own exported functions and record an audit trail. It cannot substitute for external access controls or personnel role separation.</a:t>
-                </a:r>
-              </a:p>
-            </p:txBody>
-          </p:sp>
-        </mc:Choice>
-      </mc:AlternateContent>
+              <a:t>Why clean-room / staged design?</a:t>
+            </a:r>
+          </a:p>
+        </p:txBody>
+      </p:sp>
+      <p:sp>
+        <p:nvSpPr>
+          <p:cNvPr id="3" name="Content Placeholder 2"/>
+          <p:cNvSpPr>
+            <a:spLocks noGrp="1"/>
+          </p:cNvSpPr>
+          <p:nvPr>
+            <p:ph idx="1"/>
+          </p:nvPr>
+        </p:nvSpPr>
+        <p:spPr/>
+        <p:txBody>
+          <a:bodyPr/>
+          <a:lstStyle/>
+          <a:p>
+            <a:pPr lvl="0"/>
+            <a:r>
+              <a:rPr/>
+              <a:t>The Muntner-style clean room is </a:t>
+            </a:r>
+            <a:r>
+              <a:rPr b="1"/>
+              <a:t>broader than software</a:t>
+            </a:r>
+            <a:r>
+              <a:rPr/>
+              <a:t>: role separation, staged access, checkpoint review, audit trail, deviation policy</a:t>
+            </a:r>
+          </a:p>
+          <a:p>
+            <a:pPr lvl="0"/>
+            <a:r>
+              <a:rPr/>
+              <a:t>Its purpose is to protect against </a:t>
+            </a:r>
+            <a:r>
+              <a:rPr b="1"/>
+              <a:t>outcome-driven protocol drift</a:t>
+            </a:r>
+            <a:r>
+              <a:rPr/>
+              <a:t> — decisions revised after seeing the observed A→Y relationship</a:t>
+            </a:r>
+          </a:p>
+          <a:p>
+            <a:pPr lvl="0"/>
+            <a:r>
+              <a:rPr/>
+              <a:t>cleanTMLE implements the </a:t>
+            </a:r>
+            <a:r>
+              <a:rPr b="1"/>
+              <a:t>software layer</a:t>
+            </a:r>
+            <a:r>
+              <a:rPr/>
+              <a:t> of that arrangement: lock, audit, decision logs, internal outcome-access checks</a:t>
+            </a:r>
+          </a:p>
+          <a:p>
+            <a:pPr lvl="0"/>
+            <a:r>
+              <a:rPr/>
+              <a:t>Personnel-based clean rooms and simulation-mediated blinding are </a:t>
+            </a:r>
+            <a:r>
+              <a:rPr b="1"/>
+              <a:t>complementary</a:t>
+            </a:r>
+            <a:r>
+              <a:rPr/>
+              <a:t>: high-stakes studies should embed cleanTMLE inside a personnel-based clean-room arrangement</a:t>
+            </a:r>
+          </a:p>
+        </p:txBody>
+      </p:sp>
     </p:spTree>
   </p:cSld>
 </p:sld>
@@ -7779,12 +9057,7 @@
             <p:ph type="title"/>
           </p:nvPr>
         </p:nvSpPr>
-        <p:spPr>
-          <a:xfrm>
-            <a:off x="722313" y="3305176"/>
-            <a:ext cx="7772400" cy="1021556"/>
-          </a:xfrm>
-        </p:spPr>
+        <p:spPr/>
         <p:txBody>
           <a:bodyPr/>
           <a:lstStyle/>
@@ -7794,7 +9067,82 @@
             </a:pPr>
             <a:r>
               <a:rPr/>
-              <a:t>Outcome-blind staged workflow</a:t>
+              <a:t>Why TMLE?</a:t>
+            </a:r>
+          </a:p>
+        </p:txBody>
+      </p:sp>
+      <p:sp>
+        <p:nvSpPr>
+          <p:cNvPr id="3" name="Content Placeholder 2"/>
+          <p:cNvSpPr>
+            <a:spLocks noGrp="1"/>
+          </p:cNvSpPr>
+          <p:nvPr>
+            <p:ph idx="1"/>
+          </p:nvPr>
+        </p:nvSpPr>
+        <p:spPr/>
+        <p:txBody>
+          <a:bodyPr/>
+          <a:lstStyle/>
+          <a:p>
+            <a:pPr lvl="0"/>
+            <a:r>
+              <a:rPr/>
+              <a:t>The analyst can </a:t>
+            </a:r>
+            <a:r>
+              <a:rPr b="1"/>
+              <a:t>prespecify</a:t>
+            </a:r>
+            <a:r>
+              <a:rPr/>
+              <a:t> the estimand, nuisance-learning library, truncation rules, targeting procedure, and candidate estimator grid</a:t>
+            </a:r>
+          </a:p>
+          <a:p>
+            <a:pPr lvl="0"/>
+            <a:r>
+              <a:rPr/>
+              <a:t>Nuisance estimation </a:t>
+            </a:r>
+            <a:r>
+              <a:rPr b="1"/>
+              <a:t>remains adaptive</a:t>
+            </a:r>
+            <a:r>
+              <a:rPr/>
+              <a:t> (SuperLearner) under the prespecified library</a:t>
+            </a:r>
+          </a:p>
+          <a:p>
+            <a:pPr lvl="0"/>
+            <a:r>
+              <a:rPr/>
+              <a:t>Candidates can be compared </a:t>
+            </a:r>
+            <a:r>
+              <a:rPr b="1"/>
+              <a:t>under a common target parameter</a:t>
+            </a:r>
+          </a:p>
+          <a:p>
+            <a:pPr lvl="0"/>
+            <a:r>
+              <a:rPr b="1"/>
+              <a:t>Influence-function-based inference</a:t>
+            </a:r>
+            <a:r>
+              <a:rPr/>
+              <a:t> gives a common bias / RMSE / coverage scale across candidates and across stress scenarios</a:t>
+            </a:r>
+          </a:p>
+          <a:p>
+            <a:pPr lvl="0"/>
+            <a:r>
+              <a:rPr/>
+              <a:t>This modular structure makes outcome-blind plasmode comparison and DQ stress testing natural; the same machinery runs on baseline plasmode and degraded scenarios</a:t>
             </a:r>
           </a:p>
         </p:txBody>

--- a/reports/cleanTMLE_presentation.pptx
+++ b/reports/cleanTMLE_presentation.pptx
@@ -49,7 +49,6 @@
     <p:sldId id="297" r:id="rId43"/>
     <p:sldId id="298" r:id="rId44"/>
     <p:sldId id="299" r:id="rId45"/>
-    <p:sldId id="300" r:id="rId46"/>
   </p:sldIdLst>
   <p:sldSz cx="9144000" cy="5143500" type="screen16x9"/>
   <p:notesSz cx="6858000" cy="9144000"/>
@@ -3267,7 +3266,7 @@
             </a:pPr>
             <a:r>
               <a:rPr/>
-              <a:t>Why plasmode simulation?</a:t>
+              <a:t>Why DQ stress testing?</a:t>
             </a:r>
           </a:p>
         </p:txBody>
@@ -3290,48 +3289,44 @@
             <a:pPr lvl="0"/>
             <a:r>
               <a:rPr/>
-              <a:t>PS diagnostics evaluate </a:t>
+              <a:t>Baseline plasmode answers: </a:t>
+            </a:r>
+            <a:r>
+              <a:rPr i="1"/>
+              <a:t>which candidate is best under the locked synthetic outcome model?</a:t>
+            </a:r>
+          </a:p>
+          <a:p>
+            <a:pPr lvl="0"/>
+            <a:r>
+              <a:rPr/>
+              <a:t>DQ stress testing answers: </a:t>
+            </a:r>
+            <a:r>
+              <a:rPr i="1"/>
+              <a:t>does that candidate remain acceptable under prespecified threats from the fit-for-purpose review?</a:t>
+            </a:r>
+          </a:p>
+          <a:p>
+            <a:pPr lvl="0"/>
+            <a:r>
+              <a:rPr/>
+              <a:t>The same bias / RMSE / coverage scale is used, so the prespecified GO / FLAG / STOP rule applies uniformly</a:t>
+            </a:r>
+          </a:p>
+          <a:p>
+            <a:pPr lvl="0"/>
+            <a:r>
+              <a:rPr/>
+              <a:t>It is a </a:t>
             </a:r>
             <a:r>
               <a:rPr b="1"/>
-              <a:t>design feasibility</a:t>
-            </a:r>
-            <a:r>
-              <a:rPr/>
-              <a:t> (overlap, balance, ESS, SMDs), not estimator operating characteristics</a:t>
-            </a:r>
-          </a:p>
-          <a:p>
-            <a:pPr lvl="0"/>
-            <a:r>
-              <a:rPr/>
-              <a:t>Plasmode simulation uses the </a:t>
-            </a:r>
-            <a:r>
-              <a:rPr b="1"/>
-              <a:t>empirical (W, A) structure</a:t>
-            </a:r>
-            <a:r>
-              <a:rPr/>
-              <a:t> with a synthetic Y to compare candidate estimators on bias, RMSE, and coverage</a:t>
-            </a:r>
-          </a:p>
-          <a:p>
-            <a:pPr lvl="0"/>
-            <a:r>
-              <a:rPr/>
-              <a:t>Done before primary outcome access, it supports candidate selection without inspecting the observed A→Y association</a:t>
-            </a:r>
-          </a:p>
-          <a:p>
-            <a:pPr lvl="0"/>
-            <a:r>
-              <a:rPr b="1"/>
-              <a:t>Caveat:</a:t>
-            </a:r>
-            <a:r>
-              <a:rPr/>
-              <a:t> rankings under synthetic outcomes are not guaranteed to generalize to the realized outcome process — the synthetic-outcome mechanism is itself an assumption</a:t>
+              <a:t>quantitative checkpoint</a:t>
+            </a:r>
+            <a:r>
+              <a:rPr/>
+              <a:t> in a staging-and-clean-room framework, not a substitute for source-data validation, phenotype validation, or post-outcome QBA</a:t>
             </a:r>
           </a:p>
         </p:txBody>
@@ -3378,7 +3373,7 @@
             </a:pPr>
             <a:r>
               <a:rPr/>
-              <a:t>Why DQ stress testing?</a:t>
+              <a:t>Why not just PS diagnostics and negative controls?</a:t>
             </a:r>
           </a:p>
         </p:txBody>
@@ -3400,45 +3395,41 @@
           <a:p>
             <a:pPr lvl="0"/>
             <a:r>
-              <a:rPr/>
-              <a:t>Baseline plasmode answers: </a:t>
-            </a:r>
-            <a:r>
-              <a:rPr i="1"/>
-              <a:t>which candidate is best under the locked synthetic outcome model?</a:t>
-            </a:r>
-          </a:p>
-          <a:p>
-            <a:pPr lvl="0"/>
-            <a:r>
-              <a:rPr/>
-              <a:t>DQ stress testing answers: </a:t>
-            </a:r>
-            <a:r>
-              <a:rPr i="1"/>
-              <a:t>does that candidate remain acceptable under prespecified threats from the fit-for-purpose review?</a:t>
-            </a:r>
-          </a:p>
-          <a:p>
-            <a:pPr lvl="0"/>
-            <a:r>
-              <a:rPr/>
-              <a:t>The same bias / RMSE / coverage scale is used, so the prespecified GO / FLAG / STOP rule applies uniformly</a:t>
-            </a:r>
-          </a:p>
-          <a:p>
-            <a:pPr lvl="0"/>
-            <a:r>
-              <a:rPr/>
-              <a:t>It is a </a:t>
-            </a:r>
-            <a:r>
               <a:rPr b="1"/>
-              <a:t>quantitative checkpoint</a:t>
-            </a:r>
-            <a:r>
-              <a:rPr/>
-              <a:t> in a staging-and-clean-room framework, not a substitute for source-data validation, phenotype validation, or post-outcome QBA</a:t>
+              <a:t>PS diagnostics</a:t>
+            </a:r>
+            <a:r>
+              <a:rPr/>
+              <a:t> assess overlap, balance, and weight stability — design feasibility, not estimator behaviour</a:t>
+            </a:r>
+          </a:p>
+          <a:p>
+            <a:pPr lvl="0"/>
+            <a:r>
+              <a:rPr b="1"/>
+              <a:t>Negative controls</a:t>
+            </a:r>
+            <a:r>
+              <a:rPr/>
+              <a:t> can flag residual bias for selected control outcomes, but do not stress-test the primary estimator under prespecified threats</a:t>
+            </a:r>
+          </a:p>
+          <a:p>
+            <a:pPr lvl="0"/>
+            <a:r>
+              <a:rPr b="1"/>
+              <a:t>DQ stress testing</a:t>
+            </a:r>
+            <a:r>
+              <a:rPr/>
+              <a:t> evaluates whether the locked estimator-selection decision is stable under fit-for-purpose threats translated into quantitative perturbations before the primary A→Y association is inspected</a:t>
+            </a:r>
+          </a:p>
+          <a:p>
+            <a:pPr lvl="0"/>
+            <a:r>
+              <a:rPr/>
+              <a:t>The three are complementary; the workflow uses all three</a:t>
             </a:r>
           </a:p>
         </p:txBody>
@@ -3475,7 +3466,12 @@
             <p:ph type="title"/>
           </p:nvPr>
         </p:nvSpPr>
-        <p:spPr/>
+        <p:spPr>
+          <a:xfrm>
+            <a:off x="722313" y="3305176"/>
+            <a:ext cx="7772400" cy="1021556"/>
+          </a:xfrm>
+        </p:spPr>
         <p:txBody>
           <a:bodyPr/>
           <a:lstStyle/>
@@ -3485,63 +3481,7 @@
             </a:pPr>
             <a:r>
               <a:rPr/>
-              <a:t>Why not just PS diagnostics and negative controls?</a:t>
-            </a:r>
-          </a:p>
-        </p:txBody>
-      </p:sp>
-      <p:sp>
-        <p:nvSpPr>
-          <p:cNvPr id="3" name="Content Placeholder 2"/>
-          <p:cNvSpPr>
-            <a:spLocks noGrp="1"/>
-          </p:cNvSpPr>
-          <p:nvPr>
-            <p:ph idx="1"/>
-          </p:nvPr>
-        </p:nvSpPr>
-        <p:spPr/>
-        <p:txBody>
-          <a:bodyPr/>
-          <a:lstStyle/>
-          <a:p>
-            <a:pPr lvl="0"/>
-            <a:r>
-              <a:rPr b="1"/>
-              <a:t>PS diagnostics</a:t>
-            </a:r>
-            <a:r>
-              <a:rPr/>
-              <a:t> assess overlap, balance, and weight stability — design feasibility, not estimator behaviour</a:t>
-            </a:r>
-          </a:p>
-          <a:p>
-            <a:pPr lvl="0"/>
-            <a:r>
-              <a:rPr b="1"/>
-              <a:t>Negative controls</a:t>
-            </a:r>
-            <a:r>
-              <a:rPr/>
-              <a:t> can flag residual bias for selected control outcomes, but do not stress-test the primary estimator under prespecified threats</a:t>
-            </a:r>
-          </a:p>
-          <a:p>
-            <a:pPr lvl="0"/>
-            <a:r>
-              <a:rPr b="1"/>
-              <a:t>DQ stress testing</a:t>
-            </a:r>
-            <a:r>
-              <a:rPr/>
-              <a:t> evaluates whether the locked estimator-selection decision is stable under fit-for-purpose threats translated into quantitative perturbations before the primary A→Y association is inspected</a:t>
-            </a:r>
-          </a:p>
-          <a:p>
-            <a:pPr lvl="0"/>
-            <a:r>
-              <a:rPr/>
-              <a:t>The three are complementary; the workflow uses all three</a:t>
+              <a:t>Outcome-blind staged workflow</a:t>
             </a:r>
           </a:p>
         </p:txBody>
@@ -3578,12 +3518,7 @@
             <p:ph type="title"/>
           </p:nvPr>
         </p:nvSpPr>
-        <p:spPr>
-          <a:xfrm>
-            <a:off x="722313" y="3305176"/>
-            <a:ext cx="7772400" cy="1021556"/>
-          </a:xfrm>
-        </p:spPr>
+        <p:spPr/>
         <p:txBody>
           <a:bodyPr/>
           <a:lstStyle/>
@@ -3593,7 +3528,71 @@
             </a:pPr>
             <a:r>
               <a:rPr/>
-              <a:t>Outcome-blind staged workflow</a:t>
+              <a:t>Where the package sits</a:t>
+            </a:r>
+          </a:p>
+        </p:txBody>
+      </p:sp>
+      <p:sp>
+        <p:nvSpPr>
+          <p:cNvPr id="3" name="Content Placeholder 2"/>
+          <p:cNvSpPr>
+            <a:spLocks noGrp="1"/>
+          </p:cNvSpPr>
+          <p:nvPr>
+            <p:ph idx="1"/>
+          </p:nvPr>
+        </p:nvSpPr>
+        <p:spPr/>
+        <p:txBody>
+          <a:bodyPr/>
+          <a:lstStyle/>
+          <a:p>
+            <a:pPr lvl="0"/>
+            <a:r>
+              <a:rPr/>
+              <a:t>The </a:t>
+            </a:r>
+            <a:r>
+              <a:rPr b="1"/>
+              <a:t>causal roadmap</a:t>
+            </a:r>
+            <a:r>
+              <a:rPr/>
+              <a:t> (Petersen 2014; Dang 2023): question → observed data → identification → estimand → estimator selection → pre-outcome decision → primary analysis → sensitivity</a:t>
+            </a:r>
+          </a:p>
+          <a:p>
+            <a:pPr lvl="0"/>
+            <a:r>
+              <a:rPr/>
+              <a:t>cleanTMLE operates in </a:t>
+            </a:r>
+            <a:r>
+              <a:rPr b="1"/>
+              <a:t>estimator selection</a:t>
+            </a:r>
+            <a:r>
+              <a:rPr/>
+              <a:t> and the </a:t>
+            </a:r>
+            <a:r>
+              <a:rPr b="1"/>
+              <a:t>pre-outcome decision</a:t>
+            </a:r>
+          </a:p>
+          <a:p>
+            <a:pPr lvl="0"/>
+            <a:r>
+              <a:rPr/>
+              <a:t>Steps before that remain external study-level work</a:t>
+            </a:r>
+          </a:p>
+          <a:p>
+            <a:pPr lvl="0"/>
+            <a:r>
+              <a:rPr/>
+              <a:t>cleanTMLE records, checks, and audits the software workflow; personnel-based access control is external</a:t>
             </a:r>
           </a:p>
         </p:txBody>
@@ -3640,7 +3639,7 @@
             </a:pPr>
             <a:r>
               <a:rPr/>
-              <a:t>Where the package sits</a:t>
+              <a:t>Stages</a:t>
             </a:r>
           </a:p>
         </p:txBody>
@@ -3662,49 +3661,100 @@
           <a:p>
             <a:pPr lvl="0"/>
             <a:r>
-              <a:rPr/>
-              <a:t>The </a:t>
-            </a:r>
-            <a:r>
               <a:rPr b="1"/>
-              <a:t>causal roadmap</a:t>
-            </a:r>
-            <a:r>
-              <a:rPr/>
-              <a:t> (Petersen 2014; Dang 2023): question → observed data → identification → estimand → estimator selection → pre-outcome decision → primary analysis → sensitivity</a:t>
-            </a:r>
-          </a:p>
-          <a:p>
-            <a:pPr lvl="0"/>
-            <a:r>
-              <a:rPr/>
-              <a:t>cleanTMLE operates in </a:t>
-            </a:r>
+              <a:t>Stage 0</a:t>
+            </a:r>
+            <a:r>
+              <a:rPr/>
+              <a:t> — feasibility, target-trial specification, protocol / SAP drafting (external)</a:t>
+            </a:r>
+          </a:p>
+          <a:p>
+            <a:pPr lvl="0"/>
             <a:r>
               <a:rPr b="1"/>
-              <a:t>estimator selection</a:t>
-            </a:r>
-            <a:r>
-              <a:rPr/>
-              <a:t> and the </a:t>
-            </a:r>
+              <a:t>Stage 1a</a:t>
+            </a:r>
+            <a:r>
+              <a:rPr/>
+              <a:t> — lock estimand, covariates, learners, candidate grid, thresholds</a:t>
+            </a:r>
+          </a:p>
+          <a:p>
+            <a:pPr lvl="0"/>
             <a:r>
               <a:rPr b="1"/>
-              <a:t>pre-outcome decision</a:t>
-            </a:r>
-          </a:p>
-          <a:p>
-            <a:pPr lvl="0"/>
-            <a:r>
-              <a:rPr/>
-              <a:t>Steps before that remain external study-level work</a:t>
-            </a:r>
-          </a:p>
-          <a:p>
-            <a:pPr lvl="0"/>
-            <a:r>
-              <a:rPr/>
-              <a:t>cleanTMLE records, checks, and audits the software workflow; personnel-based access control is external</a:t>
+              <a:t>Stage 1b</a:t>
+            </a:r>
+            <a:r>
+              <a:rPr/>
+              <a:t> — cohort adequacy and marginal event support</a:t>
+            </a:r>
+          </a:p>
+          <a:p>
+            <a:pPr lvl="0"/>
+            <a:r>
+              <a:rPr b="1"/>
+              <a:t>Stage 2a</a:t>
+            </a:r>
+            <a:r>
+              <a:rPr/>
+              <a:t> — PS, balance, overlap, ESS, design diagnostics</a:t>
+            </a:r>
+          </a:p>
+          <a:p>
+            <a:pPr lvl="0"/>
+            <a:r>
+              <a:rPr b="1"/>
+              <a:t>Stage 2b</a:t>
+            </a:r>
+            <a:r>
+              <a:rPr/>
+              <a:t> — baseline plasmode candidate selection</a:t>
+            </a:r>
+          </a:p>
+          <a:p>
+            <a:pPr lvl="0"/>
+            <a:r>
+              <a:rPr b="1"/>
+              <a:t>Stage 2c</a:t>
+            </a:r>
+            <a:r>
+              <a:rPr/>
+              <a:t> — DQ stress testing</a:t>
+            </a:r>
+          </a:p>
+          <a:p>
+            <a:pPr lvl="0"/>
+            <a:r>
+              <a:rPr b="1"/>
+              <a:t>Stage 3</a:t>
+            </a:r>
+            <a:r>
+              <a:rPr/>
+              <a:t> (optional) — negative-control outcome checks</a:t>
+            </a:r>
+          </a:p>
+          <a:p>
+            <a:pPr lvl="0"/>
+            <a:r>
+              <a:rPr b="1"/>
+              <a:t>Pre-outcome decision</a:t>
+            </a:r>
+            <a:r>
+              <a:rPr/>
+              <a:t> — GO / FLAG / STOP from the prespecified rule</a:t>
+            </a:r>
+          </a:p>
+          <a:p>
+            <a:pPr lvl="0"/>
+            <a:r>
+              <a:rPr b="1"/>
+              <a:t>Stage 4</a:t>
+            </a:r>
+            <a:r>
+              <a:rPr/>
+              <a:t> — authorized primary outcome analysis</a:t>
             </a:r>
           </a:p>
         </p:txBody>
@@ -3751,7 +3801,7 @@
             </a:pPr>
             <a:r>
               <a:rPr/>
-              <a:t>Stages</a:t>
+              <a:t>What cleanTMLE records as code artefacts</a:t>
             </a:r>
           </a:p>
         </p:txBody>
@@ -3773,100 +3823,100 @@
           <a:p>
             <a:pPr lvl="0"/>
             <a:r>
+              <a:rPr/>
+              <a:t>Fingerprinted </a:t>
+            </a:r>
+            <a:r>
               <a:rPr b="1"/>
-              <a:t>Stage 0</a:t>
-            </a:r>
-            <a:r>
-              <a:rPr/>
-              <a:t> — feasibility, target-trial specification, protocol / SAP drafting (external)</a:t>
-            </a:r>
-          </a:p>
-          <a:p>
-            <a:pPr lvl="0"/>
+              <a:t>analysis-lock object</a:t>
+            </a:r>
+            <a:r>
+              <a:rPr/>
+              <a:t> (sha256 over the lock specification)</a:t>
+            </a:r>
+          </a:p>
+          <a:p>
+            <a:pPr lvl="0"/>
+            <a:r>
+              <a:rPr/>
+              <a:t>Serialisable </a:t>
+            </a:r>
             <a:r>
               <a:rPr b="1"/>
-              <a:t>Stage 1a</a:t>
-            </a:r>
-            <a:r>
-              <a:rPr/>
-              <a:t> — lock estimand, covariates, learners, candidate grid, thresholds</a:t>
-            </a:r>
-          </a:p>
-          <a:p>
-            <a:pPr lvl="0"/>
+              <a:t>audit trail</a:t>
+            </a:r>
+            <a:r>
+              <a:rPr/>
+              <a:t> and </a:t>
+            </a:r>
             <a:r>
               <a:rPr b="1"/>
-              <a:t>Stage 1b</a:t>
-            </a:r>
-            <a:r>
-              <a:rPr/>
-              <a:t> — cohort adequacy and marginal event support</a:t>
-            </a:r>
-          </a:p>
-          <a:p>
-            <a:pPr lvl="0"/>
+              <a:t>decision log</a:t>
+            </a:r>
+          </a:p>
+          <a:p>
+            <a:pPr lvl="0"/>
+            <a:r>
+              <a:rPr/>
+              <a:t>Modular </a:t>
+            </a:r>
             <a:r>
               <a:rPr b="1"/>
-              <a:t>Stage 2a</a:t>
-            </a:r>
-            <a:r>
-              <a:rPr/>
-              <a:t> — PS, balance, overlap, ESS, design diagnostics</a:t>
-            </a:r>
-          </a:p>
-          <a:p>
-            <a:pPr lvl="0"/>
+              <a:t>TMLE API</a:t>
+            </a:r>
+            <a:r>
+              <a:rPr/>
+              <a:t>: treatment fit, outcome fit, targeting, extract</a:t>
+            </a:r>
+          </a:p>
+          <a:p>
+            <a:pPr lvl="0"/>
+            <a:r>
+              <a:rPr/>
+              <a:t>Outcome-blind </a:t>
+            </a:r>
             <a:r>
               <a:rPr b="1"/>
-              <a:t>Stage 2b</a:t>
-            </a:r>
-            <a:r>
-              <a:rPr/>
-              <a:t> — baseline plasmode candidate selection</a:t>
+              <a:t>plasmode candidate selector</a:t>
             </a:r>
           </a:p>
           <a:p>
             <a:pPr lvl="0"/>
             <a:r>
               <a:rPr b="1"/>
-              <a:t>Stage 2c</a:t>
-            </a:r>
-            <a:r>
-              <a:rPr/>
-              <a:t> — DQ stress testing</a:t>
+              <a:t>DQ stress test</a:t>
+            </a:r>
+            <a:r>
+              <a:rPr/>
+              <a:t> (</a:t>
+            </a:r>
+            <a:r>
+              <a:rPr>
+                <a:latin typeface="Courier"/>
+              </a:rPr>
+              <a:t>run_plasmode_dq_stress()</a:t>
+            </a:r>
+            <a:r>
+              <a:rPr/>
+              <a:t>)</a:t>
             </a:r>
           </a:p>
           <a:p>
             <a:pPr lvl="0"/>
             <a:r>
               <a:rPr b="1"/>
-              <a:t>Stage 3</a:t>
-            </a:r>
-            <a:r>
-              <a:rPr/>
-              <a:t> (optional) — negative-control outcome checks</a:t>
-            </a:r>
-          </a:p>
-          <a:p>
-            <a:pPr lvl="0"/>
-            <a:r>
-              <a:rPr b="1"/>
-              <a:t>Pre-outcome decision</a:t>
-            </a:r>
-            <a:r>
-              <a:rPr/>
-              <a:t> — GO / FLAG / STOP from the prespecified rule</a:t>
-            </a:r>
-          </a:p>
-          <a:p>
-            <a:pPr lvl="0"/>
-            <a:r>
-              <a:rPr b="1"/>
-              <a:t>Stage 4</a:t>
-            </a:r>
-            <a:r>
-              <a:rPr/>
-              <a:t> — authorized primary outcome analysis</a:t>
+              <a:t>Pre-outcome decision rule</a:t>
+            </a:r>
+            <a:r>
+              <a:rPr/>
+              <a:t> producing GO / FLAG / STOP</a:t>
+            </a:r>
+          </a:p>
+          <a:p>
+            <a:pPr lvl="0"/>
+            <a:r>
+              <a:rPr/>
+              <a:t>Internal outcome-access checks on Stage 4 estimators until authorised</a:t>
             </a:r>
           </a:p>
         </p:txBody>
@@ -3913,7 +3963,15 @@
             </a:pPr>
             <a:r>
               <a:rPr/>
-              <a:t>What cleanTMLE records as code artefacts</a:t>
+              <a:t>What cleanTMLE does </a:t>
+            </a:r>
+            <a:r>
+              <a:rPr i="1"/>
+              <a:t>not</a:t>
+            </a:r>
+            <a:r>
+              <a:rPr/>
+              <a:t> do</a:t>
             </a:r>
           </a:p>
         </p:txBody>
@@ -3936,99 +3994,42 @@
             <a:pPr lvl="0"/>
             <a:r>
               <a:rPr/>
-              <a:t>Fingerprinted </a:t>
-            </a:r>
-            <a:r>
-              <a:rPr b="1"/>
-              <a:t>analysis-lock object</a:t>
-            </a:r>
-            <a:r>
-              <a:rPr/>
-              <a:t> (sha256 over the lock specification)</a:t>
-            </a:r>
-          </a:p>
-          <a:p>
-            <a:pPr lvl="0"/>
-            <a:r>
-              <a:rPr/>
-              <a:t>Serialisable </a:t>
-            </a:r>
-            <a:r>
-              <a:rPr b="1"/>
-              <a:t>audit trail</a:t>
-            </a:r>
-            <a:r>
-              <a:rPr/>
-              <a:t> and </a:t>
-            </a:r>
-            <a:r>
-              <a:rPr b="1"/>
-              <a:t>decision log</a:t>
-            </a:r>
-          </a:p>
-          <a:p>
-            <a:pPr lvl="0"/>
-            <a:r>
-              <a:rPr/>
-              <a:t>Modular </a:t>
-            </a:r>
-            <a:r>
-              <a:rPr b="1"/>
-              <a:t>TMLE API</a:t>
-            </a:r>
-            <a:r>
-              <a:rPr/>
-              <a:t>: treatment fit, outcome fit, targeting, extract</a:t>
-            </a:r>
-          </a:p>
-          <a:p>
-            <a:pPr lvl="0"/>
-            <a:r>
-              <a:rPr/>
-              <a:t>Outcome-blind </a:t>
-            </a:r>
-            <a:r>
-              <a:rPr b="1"/>
-              <a:t>plasmode candidate selector</a:t>
-            </a:r>
-          </a:p>
-          <a:p>
-            <a:pPr lvl="0"/>
-            <a:r>
-              <a:rPr b="1"/>
-              <a:t>DQ stress test</a:t>
-            </a:r>
-            <a:r>
-              <a:rPr/>
-              <a:t> (</a:t>
-            </a:r>
-            <a:r>
-              <a:rPr>
-                <a:latin typeface="Courier"/>
-              </a:rPr>
-              <a:t>run_plasmode_dq_stress()</a:t>
-            </a:r>
-            <a:r>
-              <a:rPr/>
-              <a:t>)</a:t>
-            </a:r>
-          </a:p>
-          <a:p>
-            <a:pPr lvl="0"/>
-            <a:r>
-              <a:rPr b="1"/>
-              <a:t>Pre-outcome decision rule</a:t>
-            </a:r>
-            <a:r>
-              <a:rPr/>
-              <a:t> producing GO / FLAG / STOP</a:t>
-            </a:r>
-          </a:p>
-          <a:p>
-            <a:pPr lvl="0"/>
-            <a:r>
-              <a:rPr/>
-              <a:t>Internal outcome-access checks on Stage 4 estimators until authorised</a:t>
+              <a:t>Does not automate target-trial design or phenotype validation</a:t>
+            </a:r>
+          </a:p>
+          <a:p>
+            <a:pPr lvl="0"/>
+            <a:r>
+              <a:rPr/>
+              <a:t>Does not validate source data, linkage, or representativeness</a:t>
+            </a:r>
+          </a:p>
+          <a:p>
+            <a:pPr lvl="0"/>
+            <a:r>
+              <a:rPr/>
+              <a:t>Does not guarantee exchangeability or positivity</a:t>
+            </a:r>
+          </a:p>
+          <a:p>
+            <a:pPr lvl="0"/>
+            <a:r>
+              <a:rPr/>
+              <a:t>Does not replace clean-room personnel governance, role separation, or access controls</a:t>
+            </a:r>
+          </a:p>
+          <a:p>
+            <a:pPr lvl="0"/>
+            <a:r>
+              <a:rPr/>
+              <a:t>Does not remove the need for post-outcome sensitivity analyses (E-value, QBA, causal-gap)</a:t>
+            </a:r>
+          </a:p>
+          <a:p>
+            <a:pPr lvl="0"/>
+            <a:r>
+              <a:rPr/>
+              <a:t>Does not guarantee that synthetic-outcome rankings generalize to the realized outcome process</a:t>
             </a:r>
           </a:p>
         </p:txBody>
@@ -4039,119 +4040,6 @@
 </file>
 
 <file path=ppt/slides/slide17.xml><?xml version="1.0" encoding="utf-8"?>
-<p:sld xmlns:a="http://schemas.openxmlformats.org/drawingml/2006/main" xmlns:r="http://schemas.openxmlformats.org/officeDocument/2006/relationships" xmlns:p="http://schemas.openxmlformats.org/presentationml/2006/main">
-  <p:cSld>
-    <p:spTree>
-      <p:nvGrpSpPr>
-        <p:cNvPr id="1" name=""/>
-        <p:cNvGrpSpPr/>
-        <p:nvPr/>
-      </p:nvGrpSpPr>
-      <p:grpSpPr>
-        <a:xfrm>
-          <a:off x="0" y="0"/>
-          <a:ext cx="0" cy="0"/>
-          <a:chOff x="0" y="0"/>
-          <a:chExt cx="0" cy="0"/>
-        </a:xfrm>
-      </p:grpSpPr>
-      <p:sp>
-        <p:nvSpPr>
-          <p:cNvPr id="2" name="Title 1"/>
-          <p:cNvSpPr>
-            <a:spLocks noGrp="1"/>
-          </p:cNvSpPr>
-          <p:nvPr>
-            <p:ph type="title"/>
-          </p:nvPr>
-        </p:nvSpPr>
-        <p:spPr/>
-        <p:txBody>
-          <a:bodyPr/>
-          <a:lstStyle/>
-          <a:p>
-            <a:pPr lvl="0" indent="0" marL="0">
-              <a:buNone/>
-            </a:pPr>
-            <a:r>
-              <a:rPr/>
-              <a:t>What cleanTMLE does </a:t>
-            </a:r>
-            <a:r>
-              <a:rPr i="1"/>
-              <a:t>not</a:t>
-            </a:r>
-            <a:r>
-              <a:rPr/>
-              <a:t> do</a:t>
-            </a:r>
-          </a:p>
-        </p:txBody>
-      </p:sp>
-      <p:sp>
-        <p:nvSpPr>
-          <p:cNvPr id="3" name="Content Placeholder 2"/>
-          <p:cNvSpPr>
-            <a:spLocks noGrp="1"/>
-          </p:cNvSpPr>
-          <p:nvPr>
-            <p:ph idx="1"/>
-          </p:nvPr>
-        </p:nvSpPr>
-        <p:spPr/>
-        <p:txBody>
-          <a:bodyPr/>
-          <a:lstStyle/>
-          <a:p>
-            <a:pPr lvl="0"/>
-            <a:r>
-              <a:rPr/>
-              <a:t>Does not automate target-trial design or phenotype validation</a:t>
-            </a:r>
-          </a:p>
-          <a:p>
-            <a:pPr lvl="0"/>
-            <a:r>
-              <a:rPr/>
-              <a:t>Does not validate source data, linkage, or representativeness</a:t>
-            </a:r>
-          </a:p>
-          <a:p>
-            <a:pPr lvl="0"/>
-            <a:r>
-              <a:rPr/>
-              <a:t>Does not guarantee exchangeability or positivity</a:t>
-            </a:r>
-          </a:p>
-          <a:p>
-            <a:pPr lvl="0"/>
-            <a:r>
-              <a:rPr/>
-              <a:t>Does not replace clean-room personnel governance, role separation, or access controls</a:t>
-            </a:r>
-          </a:p>
-          <a:p>
-            <a:pPr lvl="0"/>
-            <a:r>
-              <a:rPr/>
-              <a:t>Does not remove the need for post-outcome sensitivity analyses (E-value, QBA, causal-gap)</a:t>
-            </a:r>
-          </a:p>
-          <a:p>
-            <a:pPr lvl="0"/>
-            <a:r>
-              <a:rPr/>
-              <a:t>Does not guarantee that synthetic-outcome rankings generalize to the realized outcome process</a:t>
-            </a:r>
-          </a:p>
-        </p:txBody>
-      </p:sp>
-    </p:spTree>
-  </p:cSld>
-</p:sld>
-</file>
-
-<file path=ppt/slides/slide18.xml><?xml version="1.0" encoding="utf-8"?>
 <p:sld xmlns:a="http://schemas.openxmlformats.org/drawingml/2006/main" xmlns:r="http://schemas.openxmlformats.org/officeDocument/2006/relationships" xmlns:p="http://schemas.openxmlformats.org/presentationml/2006/main">
   <p:cSld>
     <p:spTree>
@@ -4767,6 +4655,58 @@
 </p:sld>
 </file>
 
+<file path=ppt/slides/slide18.xml><?xml version="1.0" encoding="utf-8"?>
+<p:sld xmlns:a="http://schemas.openxmlformats.org/drawingml/2006/main" xmlns:r="http://schemas.openxmlformats.org/officeDocument/2006/relationships" xmlns:p="http://schemas.openxmlformats.org/presentationml/2006/main">
+  <p:cSld>
+    <p:spTree>
+      <p:nvGrpSpPr>
+        <p:cNvPr id="1" name=""/>
+        <p:cNvGrpSpPr/>
+        <p:nvPr/>
+      </p:nvGrpSpPr>
+      <p:grpSpPr>
+        <a:xfrm>
+          <a:off x="0" y="0"/>
+          <a:ext cx="0" cy="0"/>
+          <a:chOff x="0" y="0"/>
+          <a:chExt cx="0" cy="0"/>
+        </a:xfrm>
+      </p:grpSpPr>
+      <p:sp>
+        <p:nvSpPr>
+          <p:cNvPr id="2" name="Title 1"/>
+          <p:cNvSpPr>
+            <a:spLocks noGrp="1"/>
+          </p:cNvSpPr>
+          <p:nvPr>
+            <p:ph type="title"/>
+          </p:nvPr>
+        </p:nvSpPr>
+        <p:spPr>
+          <a:xfrm>
+            <a:off x="722313" y="3305176"/>
+            <a:ext cx="7772400" cy="1021556"/>
+          </a:xfrm>
+        </p:spPr>
+        <p:txBody>
+          <a:bodyPr/>
+          <a:lstStyle/>
+          <a:p>
+            <a:pPr lvl="0" indent="0" marL="0">
+              <a:buNone/>
+            </a:pPr>
+            <a:r>
+              <a:rPr/>
+              <a:t>From qualitative DQ review to quantitative stress testing</a:t>
+            </a:r>
+          </a:p>
+        </p:txBody>
+      </p:sp>
+    </p:spTree>
+  </p:cSld>
+</p:sld>
+</file>
+
 <file path=ppt/slides/slide19.xml><?xml version="1.0" encoding="utf-8"?>
 <p:sld xmlns:a="http://schemas.openxmlformats.org/drawingml/2006/main" xmlns:r="http://schemas.openxmlformats.org/officeDocument/2006/relationships" xmlns:p="http://schemas.openxmlformats.org/presentationml/2006/main">
   <p:cSld>
@@ -4794,12 +4734,7 @@
             <p:ph type="title"/>
           </p:nvPr>
         </p:nvSpPr>
-        <p:spPr>
-          <a:xfrm>
-            <a:off x="722313" y="3305176"/>
-            <a:ext cx="7772400" cy="1021556"/>
-          </a:xfrm>
-        </p:spPr>
+        <p:spPr/>
         <p:txBody>
           <a:bodyPr/>
           <a:lstStyle/>
@@ -4809,7 +4744,76 @@
             </a:pPr>
             <a:r>
               <a:rPr/>
-              <a:t>From qualitative DQ review to quantitative stress testing</a:t>
+              <a:t>The translation</a:t>
+            </a:r>
+          </a:p>
+        </p:txBody>
+      </p:sp>
+      <p:sp>
+        <p:nvSpPr>
+          <p:cNvPr id="3" name="Content Placeholder 2"/>
+          <p:cNvSpPr>
+            <a:spLocks noGrp="1"/>
+          </p:cNvSpPr>
+          <p:nvPr>
+            <p:ph idx="1"/>
+          </p:nvPr>
+        </p:nvSpPr>
+        <p:spPr/>
+        <p:txBody>
+          <a:bodyPr/>
+          <a:lstStyle/>
+          <a:p>
+            <a:pPr lvl="0"/>
+            <a:r>
+              <a:rPr b="1"/>
+              <a:t>Fit-for-purpose concern</a:t>
+            </a:r>
+            <a:r>
+              <a:rPr/>
+              <a:t> → exposure definition, outcome ascertainment, covariate completeness, unmeasured confounding</a:t>
+            </a:r>
+          </a:p>
+          <a:p>
+            <a:pPr lvl="0"/>
+            <a:r>
+              <a:rPr b="1"/>
+              <a:t>Plasmode input</a:t>
+            </a:r>
+            <a:r>
+              <a:rPr/>
+              <a:t> → (sens, spec), missingness fraction, latent U parameters</a:t>
+            </a:r>
+          </a:p>
+          <a:p>
+            <a:pPr lvl="0"/>
+            <a:r>
+              <a:rPr b="1"/>
+              <a:t>Output</a:t>
+            </a:r>
+            <a:r>
+              <a:rPr/>
+              <a:t> → bias, RMSE, coverage, type I error</a:t>
+            </a:r>
+          </a:p>
+          <a:p>
+            <a:pPr lvl="0"/>
+            <a:r>
+              <a:rPr b="1"/>
+              <a:t>Decision</a:t>
+            </a:r>
+            <a:r>
+              <a:rPr/>
+              <a:t> → GO / FLAG / STOP</a:t>
+            </a:r>
+          </a:p>
+          <a:p>
+            <a:pPr lvl="0" indent="0" marL="0">
+              <a:buNone/>
+            </a:pPr>
+            <a:r>
+              <a:rPr/>
+              <a:t>The prespecified severity ranges turn qualitative DQ language into auditable numbers.</a:t>
             </a:r>
           </a:p>
         </p:txBody>
@@ -4991,7 +4995,7 @@
             </a:pPr>
             <a:r>
               <a:rPr/>
-              <a:t>The translation</a:t>
+              <a:t>The information loop</a:t>
             </a:r>
           </a:p>
         </p:txBody>
@@ -5011,56 +5015,57 @@
           <a:bodyPr/>
           <a:lstStyle/>
           <a:p>
-            <a:pPr lvl="0"/>
-            <a:r>
-              <a:rPr b="1"/>
-              <a:t>Fit-for-purpose concern</a:t>
-            </a:r>
-            <a:r>
-              <a:rPr/>
-              <a:t> → exposure definition, outcome ascertainment, covariate completeness, unmeasured confounding</a:t>
-            </a:r>
-          </a:p>
-          <a:p>
-            <a:pPr lvl="0"/>
-            <a:r>
-              <a:rPr b="1"/>
-              <a:t>Plasmode input</a:t>
-            </a:r>
-            <a:r>
-              <a:rPr/>
-              <a:t> → (sens, spec), missingness fraction, latent U parameters</a:t>
-            </a:r>
-          </a:p>
-          <a:p>
-            <a:pPr lvl="0"/>
-            <a:r>
-              <a:rPr b="1"/>
-              <a:t>Output</a:t>
-            </a:r>
-            <a:r>
-              <a:rPr/>
-              <a:t> → bias, RMSE, coverage, type I error</a:t>
-            </a:r>
-          </a:p>
-          <a:p>
-            <a:pPr lvl="0"/>
-            <a:r>
-              <a:rPr b="1"/>
-              <a:t>Decision</a:t>
-            </a:r>
-            <a:r>
-              <a:rPr/>
-              <a:t> → GO / FLAG / STOP</a:t>
-            </a:r>
-          </a:p>
-          <a:p>
-            <a:pPr lvl="0" indent="0" marL="0">
-              <a:buNone/>
+            <a:pPr lvl="0" indent="-342900" marL="342900">
+              <a:buAutoNum type="arabicPeriod"/>
             </a:pPr>
             <a:r>
               <a:rPr/>
-              <a:t>The prespecified severity ranges turn qualitative DQ language into auditable numbers.</a:t>
+              <a:t>Fit-for-purpose review identifies plausible threats.</a:t>
+            </a:r>
+          </a:p>
+          <a:p>
+            <a:pPr lvl="0" indent="-342900" marL="342900">
+              <a:buAutoNum type="arabicPeriod"/>
+            </a:pPr>
+            <a:r>
+              <a:rPr/>
+              <a:t>Threats are translated into quantitative severity ranges.</a:t>
+            </a:r>
+          </a:p>
+          <a:p>
+            <a:pPr lvl="0" indent="-342900" marL="342900">
+              <a:buAutoNum type="arabicPeriod"/>
+            </a:pPr>
+            <a:r>
+              <a:rPr/>
+              <a:t>Severity ranges are locked before primary outcome access.</a:t>
+            </a:r>
+          </a:p>
+          <a:p>
+            <a:pPr lvl="0" indent="-342900" marL="342900">
+              <a:buAutoNum type="arabicPeriod"/>
+            </a:pPr>
+            <a:r>
+              <a:rPr/>
+              <a:t>Synthetic outcomes are generated and perturbed under each scenario.</a:t>
+            </a:r>
+          </a:p>
+          <a:p>
+            <a:pPr lvl="0" indent="-342900" marL="342900">
+              <a:buAutoNum type="arabicPeriod"/>
+            </a:pPr>
+            <a:r>
+              <a:rPr/>
+              <a:t>Candidate estimators are evaluated using the same metrics as the baseline plasmode.</a:t>
+            </a:r>
+          </a:p>
+          <a:p>
+            <a:pPr lvl="0" indent="-342900" marL="342900">
+              <a:buAutoNum type="arabicPeriod"/>
+            </a:pPr>
+            <a:r>
+              <a:rPr/>
+              <a:t>The prespecified GO / FLAG / STOP rule is applied.</a:t>
             </a:r>
           </a:p>
         </p:txBody>
@@ -5070,7 +5075,10 @@
 </p:sld>
 </file>
 
-<file path=ppt/slides/slide21.xml><?xml version="1.0" encoding="utf-8"?>
+<file path=ppt/slides/slide21.xml><?xml version="1.0" encoding="UTF-8"?><p:sld xmlns:a="http://schemas.openxmlformats.org/drawingml/2006/main" xmlns:r="http://schemas.openxmlformats.org/officeDocument/2006/relationships" xmlns:p="http://schemas.openxmlformats.org/presentationml/2006/main"><p:cSld><p:spTree><p:nvGrpSpPr><p:cNvPr id="1" name="" /><p:cNvGrpSpPr /><p:nvPr /></p:nvGrpSpPr><p:grpSpPr><a:xfrm><a:off x="0" y="0" /><a:ext cx="0" cy="0" /><a:chOff x="0" y="0" /><a:chExt cx="0" cy="0" /></a:xfrm></p:grpSpPr><p:sp><p:nvSpPr><p:cNvPr id="2" name="Title 1" /><p:cNvSpPr><a:spLocks noGrp="1" /></p:cNvSpPr><p:nvPr><p:ph type="title" /></p:nvPr></p:nvSpPr><p:spPr /><p:txBody><a:bodyPr /><a:lstStyle /><a:p><a:pPr lvl="0" indent="0" marL="0"><a:buNone /></a:pPr><a:r><a:rPr /><a:t>Four prespecified threats</a:t></a:r></a:p></p:txBody></p:sp><p:graphicFrame><p:nvGraphicFramePr><p:cNvPr id="6" name="Content Placeholder 5" /><p:cNvGraphicFramePr><a:graphicFrameLocks noGrp="1" /></p:cNvGraphicFramePr><p:nvPr><p:ph idx="1" /></p:nvPr></p:nvGraphicFramePr><p:xfrm><a:off x="457200" y="1193800" /><a:ext cx="8229600" cy="3390900" /></p:xfrm><a:graphic><a:graphicData uri="http://schemas.openxmlformats.org/drawingml/2006/table"><a:tbl><a:tblPr firstRow="1" bandRow="1"><a:tableStyleId>{5C22544A-7EE6-4342-B048-85BDC9FD1C3A}</a:tableStyleId></a:tblPr><a:tblGrid><a:gridCol w="2438400" /><a:gridCol w="3581400" /><a:gridCol w="2197100" /></a:tblGrid><a:tr h="0"><a:tc><a:txBody><a:bodyPr /><a:lstStyle /><a:p><a:pPr lvl="0" indent="0" marL="0"><a:buNone /></a:pPr><a:r><a:rPr /><a:t>Threat</a:t></a:r></a:p></a:txBody><a:tcPr /></a:tc><a:tc><a:txBody><a:bodyPr /><a:lstStyle /><a:p><a:pPr lvl="0" indent="0" marL="0"><a:buNone /></a:pPr><a:r><a:rPr /><a:t>Mechanism</a:t></a:r></a:p></a:txBody><a:tcPr /></a:tc><a:tc><a:txBody><a:bodyPr /><a:lstStyle /><a:p><a:pPr lvl="0" indent="0" marL="0"><a:buNone /></a:pPr><a:r><a:rPr /><a:t>Severity parameters</a:t></a:r></a:p></a:txBody><a:tcPr /></a:tc></a:tr><a:tr h="0"><a:tc><a:txBody><a:bodyPr /><a:lstStyle /><a:p><a:pPr lvl="0" indent="0" marL="0"><a:buNone /></a:pPr><a:r><a:rPr /><a:t>Covariate missingness</a:t></a:r></a:p></a:txBody></a:tc><a:tc><a:txBody><a:bodyPr /><a:lstStyle /><a:p><a:pPr lvl="0" indent="0" marL="0"><a:buNone /></a:pPr><a:r><a:rPr /><a:t>MCAR on a covariate subset, median impute</a:t></a:r></a:p></a:txBody></a:tc><a:tc><a:txBody><a:bodyPr /><a:lstStyle /><a:p><a:pPr lvl="0" indent="0" marL="0"><a:buNone /></a:pPr><a:r><a:rPr /><a:t>proportion missing</a:t></a:r></a:p></a:txBody></a:tc></a:tr><a:tr h="0"><a:tc><a:txBody><a:bodyPr /><a:lstStyle /><a:p><a:pPr lvl="0" indent="0" marL="0"><a:buNone /></a:pPr><a:r><a:rPr /><a:t>Exposure misclassification</a:t></a:r></a:p></a:txBody></a:tc><a:tc><a:txBody><a:bodyPr /><a:lstStyle /><a:p><a:pPr lvl="0" indent="0" marL="0"><a:buNone /></a:pPr><a:r><a:rPr /><a:t>Flip A with given (sens, spec)</a:t></a:r></a:p></a:txBody></a:tc><a:tc><a:txBody><a:bodyPr /><a:lstStyle /><a:p><a:pPr lvl="0" indent="0" marL="0"><a:buNone /></a:pPr><a:r><a:rPr /><a:t>(sens, spec) pairs</a:t></a:r></a:p></a:txBody></a:tc></a:tr><a:tr h="0"><a:tc><a:txBody><a:bodyPr /><a:lstStyle /><a:p><a:pPr lvl="0" indent="0" marL="0"><a:buNone /></a:pPr><a:r><a:rPr /><a:t>Outcome misclassification</a:t></a:r></a:p></a:txBody></a:tc><a:tc><a:txBody><a:bodyPr /><a:lstStyle /><a:p><a:pPr lvl="0" indent="0" marL="0"><a:buNone /></a:pPr><a:r><a:rPr /><a:t>Flip Y with given (sens, spec), optional differential</a:t></a:r></a:p></a:txBody></a:tc><a:tc><a:txBody><a:bodyPr /><a:lstStyle /><a:p><a:pPr lvl="0" indent="0" marL="0"><a:buNone /></a:pPr><a:r><a:rPr /><a:t>(sens, spec) pairs</a:t></a:r></a:p></a:txBody></a:tc></a:tr><a:tr h="0"><a:tc><a:txBody><a:bodyPr /><a:lstStyle /><a:p><a:pPr lvl="0" indent="0" marL="0"><a:buNone /></a:pPr><a:r><a:rPr /><a:t>Unmeasured confounding</a:t></a:r></a:p></a:txBody></a:tc><a:tc><a:txBody><a:bodyPr /><a:lstStyle /><a:p><a:pPr lvl="0" indent="0" marL="0"><a:buNone /></a:pPr><a:r><a:rPr /><a:t>Latent U shifts both A and Y</a:t></a:r></a:p></a:txBody></a:tc><a:tc><a:txBody><a:bodyPr /><a:lstStyle /><a:p><a:pPr lvl="0" indent="0" marL="0"><a:buNone /></a:pPr><a14:m><m:oMath xmlns:m="http://schemas.openxmlformats.org/officeDocument/2006/math"><m:sSub><m:e><m:r><m:t>β</m:t></m:r></m:e><m:sub><m:r><m:t>U</m:t></m:r><m:r><m:t>A</m:t></m:r></m:sub></m:sSub></m:oMath></a14:m><a:r><a:rPr /><a:t>, </a:t></a:r><a14:m><m:oMath xmlns:m="http://schemas.openxmlformats.org/officeDocument/2006/math"><m:sSub><m:e><m:r><m:t>β</m:t></m:r></m:e><m:sub><m:r><m:t>U</m:t></m:r><m:r><m:t>Y</m:t></m:r></m:sub></m:sSub></m:oMath></a14:m></a:p></a:txBody></a:tc></a:tr></a:tbl></a:graphicData></a:graphic></p:graphicFrame></p:spTree></p:cSld></p:sld>
+</file>
+
+<file path=ppt/slides/slide22.xml><?xml version="1.0" encoding="utf-8"?>
 <p:sld xmlns:a="http://schemas.openxmlformats.org/drawingml/2006/main" xmlns:r="http://schemas.openxmlformats.org/officeDocument/2006/relationships" xmlns:p="http://schemas.openxmlformats.org/presentationml/2006/main">
   <p:cSld>
     <p:spTree>
@@ -5089,12 +5097,12 @@
       </p:grpSpPr>
       <p:sp>
         <p:nvSpPr>
-          <p:cNvPr id="2" name="Title 1"/>
-          <p:cNvSpPr>
-            <a:spLocks noGrp="1"/>
-          </p:cNvSpPr>
-          <p:nvPr>
-            <p:ph type="title"/>
+          <p:cNvPr id="3" name="Content Placeholder 2"/>
+          <p:cNvSpPr>
+            <a:spLocks noGrp="1"/>
+          </p:cNvSpPr>
+          <p:nvPr>
+            <p:ph idx="1"/>
           </p:nvPr>
         </p:nvSpPr>
         <p:spPr/>
@@ -5107,77 +5115,7 @@
             </a:pPr>
             <a:r>
               <a:rPr/>
-              <a:t>The information loop</a:t>
-            </a:r>
-          </a:p>
-        </p:txBody>
-      </p:sp>
-      <p:sp>
-        <p:nvSpPr>
-          <p:cNvPr id="3" name="Content Placeholder 2"/>
-          <p:cNvSpPr>
-            <a:spLocks noGrp="1"/>
-          </p:cNvSpPr>
-          <p:nvPr>
-            <p:ph idx="1"/>
-          </p:nvPr>
-        </p:nvSpPr>
-        <p:spPr/>
-        <p:txBody>
-          <a:bodyPr/>
-          <a:lstStyle/>
-          <a:p>
-            <a:pPr lvl="0" indent="-342900" marL="342900">
-              <a:buAutoNum type="arabicPeriod"/>
-            </a:pPr>
-            <a:r>
-              <a:rPr/>
-              <a:t>Fit-for-purpose review identifies plausible threats.</a:t>
-            </a:r>
-          </a:p>
-          <a:p>
-            <a:pPr lvl="0" indent="-342900" marL="342900">
-              <a:buAutoNum type="arabicPeriod"/>
-            </a:pPr>
-            <a:r>
-              <a:rPr/>
-              <a:t>Threats are translated into quantitative severity ranges.</a:t>
-            </a:r>
-          </a:p>
-          <a:p>
-            <a:pPr lvl="0" indent="-342900" marL="342900">
-              <a:buAutoNum type="arabicPeriod"/>
-            </a:pPr>
-            <a:r>
-              <a:rPr/>
-              <a:t>Severity ranges are locked before primary outcome access.</a:t>
-            </a:r>
-          </a:p>
-          <a:p>
-            <a:pPr lvl="0" indent="-342900" marL="342900">
-              <a:buAutoNum type="arabicPeriod"/>
-            </a:pPr>
-            <a:r>
-              <a:rPr/>
-              <a:t>Synthetic outcomes are generated and perturbed under each scenario.</a:t>
-            </a:r>
-          </a:p>
-          <a:p>
-            <a:pPr lvl="0" indent="-342900" marL="342900">
-              <a:buAutoNum type="arabicPeriod"/>
-            </a:pPr>
-            <a:r>
-              <a:rPr/>
-              <a:t>Candidate estimators are evaluated using the same metrics as the baseline plasmode.</a:t>
-            </a:r>
-          </a:p>
-          <a:p>
-            <a:pPr lvl="0" indent="-342900" marL="342900">
-              <a:buAutoNum type="arabicPeriod"/>
-            </a:pPr>
-            <a:r>
-              <a:rPr/>
-              <a:t>The prespecified GO / FLAG / STOP rule is applied.</a:t>
+              <a:t>Each cell reports the same triple as the baseline plasmode: bias, RMSE, coverage.</a:t>
             </a:r>
           </a:p>
         </p:txBody>
@@ -5185,9 +5123,6 @@
     </p:spTree>
   </p:cSld>
 </p:sld>
-</file>
-
-<file path=ppt/slides/slide22.xml><?xml version="1.0" encoding="UTF-8"?><p:sld xmlns:a="http://schemas.openxmlformats.org/drawingml/2006/main" xmlns:r="http://schemas.openxmlformats.org/officeDocument/2006/relationships" xmlns:p="http://schemas.openxmlformats.org/presentationml/2006/main"><p:cSld><p:spTree><p:nvGrpSpPr><p:cNvPr id="1" name="" /><p:cNvGrpSpPr /><p:nvPr /></p:nvGrpSpPr><p:grpSpPr><a:xfrm><a:off x="0" y="0" /><a:ext cx="0" cy="0" /><a:chOff x="0" y="0" /><a:chExt cx="0" cy="0" /></a:xfrm></p:grpSpPr><p:sp><p:nvSpPr><p:cNvPr id="2" name="Title 1" /><p:cNvSpPr><a:spLocks noGrp="1" /></p:cNvSpPr><p:nvPr><p:ph type="title" /></p:nvPr></p:nvSpPr><p:spPr /><p:txBody><a:bodyPr /><a:lstStyle /><a:p><a:pPr lvl="0" indent="0" marL="0"><a:buNone /></a:pPr><a:r><a:rPr /><a:t>Four prespecified threats</a:t></a:r></a:p></p:txBody></p:sp><p:graphicFrame><p:nvGraphicFramePr><p:cNvPr id="6" name="Content Placeholder 5" /><p:cNvGraphicFramePr><a:graphicFrameLocks noGrp="1" /></p:cNvGraphicFramePr><p:nvPr><p:ph idx="1" /></p:nvPr></p:nvGraphicFramePr><p:xfrm><a:off x="457200" y="1193800" /><a:ext cx="8229600" cy="3390900" /></p:xfrm><a:graphic><a:graphicData uri="http://schemas.openxmlformats.org/drawingml/2006/table"><a:tbl><a:tblPr firstRow="1" bandRow="1"><a:tableStyleId>{5C22544A-7EE6-4342-B048-85BDC9FD1C3A}</a:tableStyleId></a:tblPr><a:tblGrid><a:gridCol w="2438400" /><a:gridCol w="3581400" /><a:gridCol w="2197100" /></a:tblGrid><a:tr h="0"><a:tc><a:txBody><a:bodyPr /><a:lstStyle /><a:p><a:pPr lvl="0" indent="0" marL="0"><a:buNone /></a:pPr><a:r><a:rPr /><a:t>Threat</a:t></a:r></a:p></a:txBody><a:tcPr /></a:tc><a:tc><a:txBody><a:bodyPr /><a:lstStyle /><a:p><a:pPr lvl="0" indent="0" marL="0"><a:buNone /></a:pPr><a:r><a:rPr /><a:t>Mechanism</a:t></a:r></a:p></a:txBody><a:tcPr /></a:tc><a:tc><a:txBody><a:bodyPr /><a:lstStyle /><a:p><a:pPr lvl="0" indent="0" marL="0"><a:buNone /></a:pPr><a:r><a:rPr /><a:t>Severity parameters</a:t></a:r></a:p></a:txBody><a:tcPr /></a:tc></a:tr><a:tr h="0"><a:tc><a:txBody><a:bodyPr /><a:lstStyle /><a:p><a:pPr lvl="0" indent="0" marL="0"><a:buNone /></a:pPr><a:r><a:rPr /><a:t>Covariate missingness</a:t></a:r></a:p></a:txBody></a:tc><a:tc><a:txBody><a:bodyPr /><a:lstStyle /><a:p><a:pPr lvl="0" indent="0" marL="0"><a:buNone /></a:pPr><a:r><a:rPr /><a:t>MCAR on a covariate subset, median impute</a:t></a:r></a:p></a:txBody></a:tc><a:tc><a:txBody><a:bodyPr /><a:lstStyle /><a:p><a:pPr lvl="0" indent="0" marL="0"><a:buNone /></a:pPr><a:r><a:rPr /><a:t>proportion missing</a:t></a:r></a:p></a:txBody></a:tc></a:tr><a:tr h="0"><a:tc><a:txBody><a:bodyPr /><a:lstStyle /><a:p><a:pPr lvl="0" indent="0" marL="0"><a:buNone /></a:pPr><a:r><a:rPr /><a:t>Exposure misclassification</a:t></a:r></a:p></a:txBody></a:tc><a:tc><a:txBody><a:bodyPr /><a:lstStyle /><a:p><a:pPr lvl="0" indent="0" marL="0"><a:buNone /></a:pPr><a:r><a:rPr /><a:t>Flip A with given (sens, spec)</a:t></a:r></a:p></a:txBody></a:tc><a:tc><a:txBody><a:bodyPr /><a:lstStyle /><a:p><a:pPr lvl="0" indent="0" marL="0"><a:buNone /></a:pPr><a:r><a:rPr /><a:t>(sens, spec) pairs</a:t></a:r></a:p></a:txBody></a:tc></a:tr><a:tr h="0"><a:tc><a:txBody><a:bodyPr /><a:lstStyle /><a:p><a:pPr lvl="0" indent="0" marL="0"><a:buNone /></a:pPr><a:r><a:rPr /><a:t>Outcome misclassification</a:t></a:r></a:p></a:txBody></a:tc><a:tc><a:txBody><a:bodyPr /><a:lstStyle /><a:p><a:pPr lvl="0" indent="0" marL="0"><a:buNone /></a:pPr><a:r><a:rPr /><a:t>Flip Y with given (sens, spec), optional differential</a:t></a:r></a:p></a:txBody></a:tc><a:tc><a:txBody><a:bodyPr /><a:lstStyle /><a:p><a:pPr lvl="0" indent="0" marL="0"><a:buNone /></a:pPr><a:r><a:rPr /><a:t>(sens, spec) pairs</a:t></a:r></a:p></a:txBody></a:tc></a:tr><a:tr h="0"><a:tc><a:txBody><a:bodyPr /><a:lstStyle /><a:p><a:pPr lvl="0" indent="0" marL="0"><a:buNone /></a:pPr><a:r><a:rPr /><a:t>Unmeasured confounding</a:t></a:r></a:p></a:txBody></a:tc><a:tc><a:txBody><a:bodyPr /><a:lstStyle /><a:p><a:pPr lvl="0" indent="0" marL="0"><a:buNone /></a:pPr><a:r><a:rPr /><a:t>Latent U shifts both A and Y</a:t></a:r></a:p></a:txBody></a:tc><a:tc><a:txBody><a:bodyPr /><a:lstStyle /><a:p><a:pPr lvl="0" indent="0" marL="0"><a:buNone /></a:pPr><a14:m><m:oMath xmlns:m="http://schemas.openxmlformats.org/officeDocument/2006/math"><m:sSub><m:e><m:r><m:t>β</m:t></m:r></m:e><m:sub><m:r><m:t>U</m:t></m:r><m:r><m:t>A</m:t></m:r></m:sub></m:sSub></m:oMath></a14:m><a:r><a:rPr /><a:t>, </a:t></a:r><a14:m><m:oMath xmlns:m="http://schemas.openxmlformats.org/officeDocument/2006/math"><m:sSub><m:e><m:r><m:t>β</m:t></m:r></m:e><m:sub><m:r><m:t>U</m:t></m:r><m:r><m:t>Y</m:t></m:r></m:sub></m:sSub></m:oMath></a14:m></a:p></a:txBody></a:tc></a:tr></a:tbl></a:graphicData></a:graphic></p:graphicFrame></p:spTree></p:cSld></p:sld>
 </file>
 
 <file path=ppt/slides/slide23.xml><?xml version="1.0" encoding="utf-8"?>
@@ -5209,6 +5144,31 @@
       </p:grpSpPr>
       <p:sp>
         <p:nvSpPr>
+          <p:cNvPr id="2" name="Title 1"/>
+          <p:cNvSpPr>
+            <a:spLocks noGrp="1"/>
+          </p:cNvSpPr>
+          <p:nvPr>
+            <p:ph type="title"/>
+          </p:nvPr>
+        </p:nvSpPr>
+        <p:spPr/>
+        <p:txBody>
+          <a:bodyPr/>
+          <a:lstStyle/>
+          <a:p>
+            <a:pPr lvl="0" indent="0" marL="0">
+              <a:buNone/>
+            </a:pPr>
+            <a:r>
+              <a:rPr/>
+              <a:t>Degradation gradient</a:t>
+            </a:r>
+          </a:p>
+        </p:txBody>
+      </p:sp>
+      <p:sp>
+        <p:nvSpPr>
           <p:cNvPr id="3" name="Content Placeholder 2"/>
           <p:cNvSpPr>
             <a:spLocks noGrp="1"/>
@@ -5226,8 +5186,72 @@
               <a:buNone/>
             </a:pPr>
             <a:r>
-              <a:rPr/>
-              <a:t>Each cell reports the same triple as the baseline plasmode: bias, RMSE, coverage.</a:t>
+              <a:rPr b="1"/>
+              <a:t>A dose-response curve for estimator fragility.</a:t>
+            </a:r>
+          </a:p>
+          <a:p>
+            <a:pPr lvl="0"/>
+            <a:r>
+              <a:rPr b="1"/>
+              <a:t>x-axis</a:t>
+            </a:r>
+            <a:r>
+              <a:rPr/>
+              <a:t>: severity of a prespecified DQ threat</a:t>
+            </a:r>
+          </a:p>
+          <a:p>
+            <a:pPr lvl="0"/>
+            <a:r>
+              <a:rPr b="1"/>
+              <a:t>y-axis</a:t>
+            </a:r>
+            <a:r>
+              <a:rPr/>
+              <a:t>: bias, RMSE, coverage, or type I error</a:t>
+            </a:r>
+          </a:p>
+          <a:p>
+            <a:pPr lvl="0"/>
+            <a:r>
+              <a:rPr b="1"/>
+              <a:t>Robust candidate</a:t>
+            </a:r>
+            <a:r>
+              <a:rPr/>
+              <a:t>: shallow gradient, stays inside the locked threshold across plausible severities</a:t>
+            </a:r>
+          </a:p>
+          <a:p>
+            <a:pPr lvl="0"/>
+            <a:r>
+              <a:rPr b="1"/>
+              <a:t>Fragile candidate</a:t>
+            </a:r>
+            <a:r>
+              <a:rPr/>
+              <a:t>: cliff — a small severity increase pushes bias or coverage past the threshold</a:t>
+            </a:r>
+          </a:p>
+          <a:p>
+            <a:pPr lvl="0"/>
+            <a:r>
+              <a:rPr/>
+              <a:t>A horizontal line on the plot marks the prespecified decision threshold</a:t>
+            </a:r>
+          </a:p>
+          <a:p>
+            <a:pPr lvl="0" indent="0" marL="0">
+              <a:buNone/>
+            </a:pPr>
+            <a:r>
+              <a:rPr/>
+              <a:t>The gradient answers: </a:t>
+            </a:r>
+            <a:r>
+              <a:rPr i="1"/>
+              <a:t>how severe must the degradation be before this candidate fails the locked decision criteria?</a:t>
             </a:r>
           </a:p>
         </p:txBody>
@@ -5274,7 +5298,15 @@
             </a:pPr>
             <a:r>
               <a:rPr/>
-              <a:t>Degradation gradient</a:t>
+              <a:t>What the test does </a:t>
+            </a:r>
+            <a:r>
+              <a:rPr i="1"/>
+              <a:t>not</a:t>
+            </a:r>
+            <a:r>
+              <a:rPr/>
+              <a:t> assess</a:t>
             </a:r>
           </a:p>
         </p:txBody>
@@ -5294,76 +5326,40 @@
           <a:bodyPr/>
           <a:lstStyle/>
           <a:p>
+            <a:pPr lvl="0"/>
+            <a:r>
+              <a:rPr/>
+              <a:t>Data provenance or linkage accuracy</a:t>
+            </a:r>
+          </a:p>
+          <a:p>
+            <a:pPr lvl="0"/>
+            <a:r>
+              <a:rPr/>
+              <a:t>Phenotype validity for a specific endpoint</a:t>
+            </a:r>
+          </a:p>
+          <a:p>
+            <a:pPr lvl="0"/>
+            <a:r>
+              <a:rPr/>
+              <a:t>Representativeness of the source</a:t>
+            </a:r>
+          </a:p>
+          <a:p>
+            <a:pPr lvl="0"/>
+            <a:r>
+              <a:rPr/>
+              <a:t>Regulatory acceptability of the data source</a:t>
+            </a:r>
+          </a:p>
+          <a:p>
             <a:pPr lvl="0" indent="0" marL="0">
               <a:buNone/>
             </a:pPr>
             <a:r>
-              <a:rPr b="1"/>
-              <a:t>A dose-response curve for estimator fragility.</a:t>
-            </a:r>
-          </a:p>
-          <a:p>
-            <a:pPr lvl="0"/>
-            <a:r>
-              <a:rPr b="1"/>
-              <a:t>x-axis</a:t>
-            </a:r>
-            <a:r>
-              <a:rPr/>
-              <a:t>: severity of a prespecified DQ threat</a:t>
-            </a:r>
-          </a:p>
-          <a:p>
-            <a:pPr lvl="0"/>
-            <a:r>
-              <a:rPr b="1"/>
-              <a:t>y-axis</a:t>
-            </a:r>
-            <a:r>
-              <a:rPr/>
-              <a:t>: bias, RMSE, coverage, or type I error</a:t>
-            </a:r>
-          </a:p>
-          <a:p>
-            <a:pPr lvl="0"/>
-            <a:r>
-              <a:rPr b="1"/>
-              <a:t>Robust candidate</a:t>
-            </a:r>
-            <a:r>
-              <a:rPr/>
-              <a:t>: shallow gradient, stays inside the locked threshold across plausible severities</a:t>
-            </a:r>
-          </a:p>
-          <a:p>
-            <a:pPr lvl="0"/>
-            <a:r>
-              <a:rPr b="1"/>
-              <a:t>Fragile candidate</a:t>
-            </a:r>
-            <a:r>
-              <a:rPr/>
-              <a:t>: cliff — a small severity increase pushes bias or coverage past the threshold</a:t>
-            </a:r>
-          </a:p>
-          <a:p>
-            <a:pPr lvl="0"/>
-            <a:r>
-              <a:rPr/>
-              <a:t>A horizontal line on the plot marks the prespecified decision threshold</a:t>
-            </a:r>
-          </a:p>
-          <a:p>
-            <a:pPr lvl="0" indent="0" marL="0">
-              <a:buNone/>
-            </a:pPr>
-            <a:r>
-              <a:rPr/>
-              <a:t>The gradient answers: </a:t>
-            </a:r>
-            <a:r>
-              <a:rPr i="1"/>
-              <a:t>how severe must the degradation be before this candidate fails the locked decision criteria?</a:t>
+              <a:rPr/>
+              <a:t>The DQ stress test is a quantitative supplement to fit-for-purpose review, not formal causal sensitivity analysis and not a replacement for post-outcome quantitative bias analysis.</a:t>
             </a:r>
           </a:p>
         </p:txBody>
@@ -5400,7 +5396,12 @@
             <p:ph type="title"/>
           </p:nvPr>
         </p:nvSpPr>
-        <p:spPr/>
+        <p:spPr>
+          <a:xfrm>
+            <a:off x="722313" y="3305176"/>
+            <a:ext cx="7772400" cy="1021556"/>
+          </a:xfrm>
+        </p:spPr>
         <p:txBody>
           <a:bodyPr/>
           <a:lstStyle/>
@@ -5410,68 +5411,7 @@
             </a:pPr>
             <a:r>
               <a:rPr/>
-              <a:t>What the test does </a:t>
-            </a:r>
-            <a:r>
-              <a:rPr i="1"/>
-              <a:t>not</a:t>
-            </a:r>
-            <a:r>
-              <a:rPr/>
-              <a:t> assess</a:t>
-            </a:r>
-          </a:p>
-        </p:txBody>
-      </p:sp>
-      <p:sp>
-        <p:nvSpPr>
-          <p:cNvPr id="3" name="Content Placeholder 2"/>
-          <p:cNvSpPr>
-            <a:spLocks noGrp="1"/>
-          </p:cNvSpPr>
-          <p:nvPr>
-            <p:ph idx="1"/>
-          </p:nvPr>
-        </p:nvSpPr>
-        <p:spPr/>
-        <p:txBody>
-          <a:bodyPr/>
-          <a:lstStyle/>
-          <a:p>
-            <a:pPr lvl="0"/>
-            <a:r>
-              <a:rPr/>
-              <a:t>Data provenance or linkage accuracy</a:t>
-            </a:r>
-          </a:p>
-          <a:p>
-            <a:pPr lvl="0"/>
-            <a:r>
-              <a:rPr/>
-              <a:t>Phenotype validity for a specific endpoint</a:t>
-            </a:r>
-          </a:p>
-          <a:p>
-            <a:pPr lvl="0"/>
-            <a:r>
-              <a:rPr/>
-              <a:t>Representativeness of the source</a:t>
-            </a:r>
-          </a:p>
-          <a:p>
-            <a:pPr lvl="0"/>
-            <a:r>
-              <a:rPr/>
-              <a:t>Regulatory acceptability of the data source</a:t>
-            </a:r>
-          </a:p>
-          <a:p>
-            <a:pPr lvl="0" indent="0" marL="0">
-              <a:buNone/>
-            </a:pPr>
-            <a:r>
-              <a:rPr/>
-              <a:t>The DQ stress test is a quantitative supplement to fit-for-purpose review, not formal causal sensitivity analysis and not a replacement for post-outcome quantitative bias analysis.</a:t>
+              <a:t>Simulation study</a:t>
             </a:r>
           </a:p>
         </p:txBody>
@@ -5482,58 +5422,6 @@
 </file>
 
 <file path=ppt/slides/slide26.xml><?xml version="1.0" encoding="utf-8"?>
-<p:sld xmlns:a="http://schemas.openxmlformats.org/drawingml/2006/main" xmlns:r="http://schemas.openxmlformats.org/officeDocument/2006/relationships" xmlns:p="http://schemas.openxmlformats.org/presentationml/2006/main">
-  <p:cSld>
-    <p:spTree>
-      <p:nvGrpSpPr>
-        <p:cNvPr id="1" name=""/>
-        <p:cNvGrpSpPr/>
-        <p:nvPr/>
-      </p:nvGrpSpPr>
-      <p:grpSpPr>
-        <a:xfrm>
-          <a:off x="0" y="0"/>
-          <a:ext cx="0" cy="0"/>
-          <a:chOff x="0" y="0"/>
-          <a:chExt cx="0" cy="0"/>
-        </a:xfrm>
-      </p:grpSpPr>
-      <p:sp>
-        <p:nvSpPr>
-          <p:cNvPr id="2" name="Title 1"/>
-          <p:cNvSpPr>
-            <a:spLocks noGrp="1"/>
-          </p:cNvSpPr>
-          <p:nvPr>
-            <p:ph type="title"/>
-          </p:nvPr>
-        </p:nvSpPr>
-        <p:spPr>
-          <a:xfrm>
-            <a:off x="722313" y="3305176"/>
-            <a:ext cx="7772400" cy="1021556"/>
-          </a:xfrm>
-        </p:spPr>
-        <p:txBody>
-          <a:bodyPr/>
-          <a:lstStyle/>
-          <a:p>
-            <a:pPr lvl="0" indent="0" marL="0">
-              <a:buNone/>
-            </a:pPr>
-            <a:r>
-              <a:rPr/>
-              <a:t>Simulation study</a:t>
-            </a:r>
-          </a:p>
-        </p:txBody>
-      </p:sp>
-    </p:spTree>
-  </p:cSld>
-</p:sld>
-</file>
-
-<file path=ppt/slides/slide27.xml><?xml version="1.0" encoding="utf-8"?>
 <p:sld xmlns:a="http://schemas.openxmlformats.org/drawingml/2006/main" xmlns:r="http://schemas.openxmlformats.org/officeDocument/2006/relationships" xmlns:p="http://schemas.openxmlformats.org/presentationml/2006/main">
   <p:cSld>
     <p:spTree>
@@ -5752,6 +5640,104 @@
 </p:sld>
 </file>
 
+<file path=ppt/slides/slide27.xml><?xml version="1.0" encoding="utf-8"?>
+<p:sld xmlns:a="http://schemas.openxmlformats.org/drawingml/2006/main" xmlns:r="http://schemas.openxmlformats.org/officeDocument/2006/relationships" xmlns:p="http://schemas.openxmlformats.org/presentationml/2006/main">
+  <p:cSld>
+    <p:spTree>
+      <p:nvGrpSpPr>
+        <p:cNvPr id="1" name=""/>
+        <p:cNvGrpSpPr/>
+        <p:nvPr/>
+      </p:nvGrpSpPr>
+      <p:grpSpPr>
+        <a:xfrm>
+          <a:off x="0" y="0"/>
+          <a:ext cx="0" cy="0"/>
+          <a:chOff x="0" y="0"/>
+          <a:chExt cx="0" cy="0"/>
+        </a:xfrm>
+      </p:grpSpPr>
+      <p:sp>
+        <p:nvSpPr>
+          <p:cNvPr id="2" name="Title 1"/>
+          <p:cNvSpPr>
+            <a:spLocks noGrp="1"/>
+          </p:cNvSpPr>
+          <p:nvPr>
+            <p:ph type="title"/>
+          </p:nvPr>
+        </p:nvSpPr>
+        <p:spPr/>
+        <p:txBody>
+          <a:bodyPr/>
+          <a:lstStyle/>
+          <a:p>
+            <a:pPr lvl="0" indent="0" marL="0">
+              <a:buNone/>
+            </a:pPr>
+            <a:r>
+              <a:rPr/>
+              <a:t>Scenario A: benchmark</a:t>
+            </a:r>
+          </a:p>
+        </p:txBody>
+      </p:sp>
+      <p:sp>
+        <p:nvSpPr>
+          <p:cNvPr id="3" name="Content Placeholder 2"/>
+          <p:cNvSpPr>
+            <a:spLocks noGrp="1"/>
+          </p:cNvSpPr>
+          <p:nvPr>
+            <p:ph idx="1"/>
+          </p:nvPr>
+        </p:nvSpPr>
+        <p:spPr/>
+        <p:txBody>
+          <a:bodyPr/>
+          <a:lstStyle/>
+          <a:p>
+            <a:pPr lvl="0"/>
+            <a:r>
+              <a:rPr/>
+              <a:t>All adjusted estimators recover the truth</a:t>
+            </a:r>
+          </a:p>
+          <a:p>
+            <a:pPr lvl="0"/>
+            <a:r>
+              <a:rPr/>
+              <a:t>Bias well under the prespecified 0.02 threshold</a:t>
+            </a:r>
+          </a:p>
+          <a:p>
+            <a:pPr lvl="0"/>
+            <a:r>
+              <a:rPr/>
+              <a:t>Coverage at nominal 95%</a:t>
+            </a:r>
+          </a:p>
+          <a:p>
+            <a:pPr lvl="0"/>
+            <a:r>
+              <a:rPr/>
+              <a:t>Crude estimator has substantial residual confounding</a:t>
+            </a:r>
+          </a:p>
+          <a:p>
+            <a:pPr lvl="0"/>
+            <a:r>
+              <a:rPr b="1"/>
+              <a:t>Decision: GO</a:t>
+            </a:r>
+          </a:p>
+        </p:txBody>
+      </p:sp>
+    </p:spTree>
+  </p:cSld>
+</p:sld>
+</file>
+
 <file path=ppt/slides/slide28.xml><?xml version="1.0" encoding="utf-8"?>
 <p:sld xmlns:a="http://schemas.openxmlformats.org/drawingml/2006/main" xmlns:r="http://schemas.openxmlformats.org/officeDocument/2006/relationships" xmlns:p="http://schemas.openxmlformats.org/presentationml/2006/main">
   <p:cSld>
@@ -5789,7 +5775,7 @@
             </a:pPr>
             <a:r>
               <a:rPr/>
-              <a:t>Scenario A: benchmark</a:t>
+              <a:t>Scenario B: marginal overlap</a:t>
             </a:r>
           </a:p>
         </p:txBody>
@@ -5812,35 +5798,39 @@
             <a:pPr lvl="0"/>
             <a:r>
               <a:rPr/>
-              <a:t>All adjusted estimators recover the truth</a:t>
-            </a:r>
-          </a:p>
-          <a:p>
-            <a:pPr lvl="0"/>
-            <a:r>
-              <a:rPr/>
-              <a:t>Bias well under the prespecified 0.02 threshold</a:t>
-            </a:r>
-          </a:p>
-          <a:p>
-            <a:pPr lvl="0"/>
-            <a:r>
-              <a:rPr/>
-              <a:t>Coverage at nominal 95%</a:t>
-            </a:r>
-          </a:p>
-          <a:p>
-            <a:pPr lvl="0"/>
-            <a:r>
-              <a:rPr/>
-              <a:t>Crude estimator has substantial residual confounding</a:t>
+              <a:t>TMLE and CV-TMLE hold bias small relative to empirical SD</a:t>
+            </a:r>
+          </a:p>
+          <a:p>
+            <a:pPr lvl="0"/>
+            <a:r>
+              <a:rPr/>
+              <a:t>IPTW: SE-to-SD ratio above one (IF-variance treats PS as known)</a:t>
+            </a:r>
+          </a:p>
+          <a:p>
+            <a:pPr lvl="0"/>
+            <a:r>
+              <a:rPr/>
+              <a:t>Matched TMLE: SE-to-SD ratio ≈ 2 (post-match TMLE ignores matching draw)</a:t>
+            </a:r>
+          </a:p>
+          <a:p>
+            <a:pPr lvl="0"/>
+            <a:r>
+              <a:rPr/>
+              <a:t>Plasmode-selected specification adapts truncation upward</a:t>
             </a:r>
           </a:p>
           <a:p>
             <a:pPr lvl="0"/>
             <a:r>
               <a:rPr b="1"/>
-              <a:t>Decision: GO</a:t>
+              <a:t>Decision: GO with FLAG</a:t>
+            </a:r>
+            <a:r>
+              <a:rPr/>
+              <a:t> on IPTW SE calibration</a:t>
             </a:r>
           </a:p>
         </p:txBody>
@@ -5851,243 +5841,6 @@
 </file>
 
 <file path=ppt/slides/slide29.xml><?xml version="1.0" encoding="utf-8"?>
-<p:sld xmlns:a="http://schemas.openxmlformats.org/drawingml/2006/main" xmlns:r="http://schemas.openxmlformats.org/officeDocument/2006/relationships" xmlns:p="http://schemas.openxmlformats.org/presentationml/2006/main">
-  <p:cSld>
-    <p:spTree>
-      <p:nvGrpSpPr>
-        <p:cNvPr id="1" name=""/>
-        <p:cNvGrpSpPr/>
-        <p:nvPr/>
-      </p:nvGrpSpPr>
-      <p:grpSpPr>
-        <a:xfrm>
-          <a:off x="0" y="0"/>
-          <a:ext cx="0" cy="0"/>
-          <a:chOff x="0" y="0"/>
-          <a:chExt cx="0" cy="0"/>
-        </a:xfrm>
-      </p:grpSpPr>
-      <p:sp>
-        <p:nvSpPr>
-          <p:cNvPr id="2" name="Title 1"/>
-          <p:cNvSpPr>
-            <a:spLocks noGrp="1"/>
-          </p:cNvSpPr>
-          <p:nvPr>
-            <p:ph type="title"/>
-          </p:nvPr>
-        </p:nvSpPr>
-        <p:spPr/>
-        <p:txBody>
-          <a:bodyPr/>
-          <a:lstStyle/>
-          <a:p>
-            <a:pPr lvl="0" indent="0" marL="0">
-              <a:buNone/>
-            </a:pPr>
-            <a:r>
-              <a:rPr/>
-              <a:t>Scenario B: marginal overlap</a:t>
-            </a:r>
-          </a:p>
-        </p:txBody>
-      </p:sp>
-      <p:sp>
-        <p:nvSpPr>
-          <p:cNvPr id="3" name="Content Placeholder 2"/>
-          <p:cNvSpPr>
-            <a:spLocks noGrp="1"/>
-          </p:cNvSpPr>
-          <p:nvPr>
-            <p:ph idx="1"/>
-          </p:nvPr>
-        </p:nvSpPr>
-        <p:spPr/>
-        <p:txBody>
-          <a:bodyPr/>
-          <a:lstStyle/>
-          <a:p>
-            <a:pPr lvl="0"/>
-            <a:r>
-              <a:rPr/>
-              <a:t>TMLE and CV-TMLE hold bias small relative to empirical SD</a:t>
-            </a:r>
-          </a:p>
-          <a:p>
-            <a:pPr lvl="0"/>
-            <a:r>
-              <a:rPr/>
-              <a:t>IPTW: SE-to-SD ratio above one (IF-variance treats PS as known)</a:t>
-            </a:r>
-          </a:p>
-          <a:p>
-            <a:pPr lvl="0"/>
-            <a:r>
-              <a:rPr/>
-              <a:t>Matched TMLE: SE-to-SD ratio ≈ 2 (post-match TMLE ignores matching draw)</a:t>
-            </a:r>
-          </a:p>
-          <a:p>
-            <a:pPr lvl="0"/>
-            <a:r>
-              <a:rPr/>
-              <a:t>Plasmode-selected specification adapts truncation upward</a:t>
-            </a:r>
-          </a:p>
-          <a:p>
-            <a:pPr lvl="0"/>
-            <a:r>
-              <a:rPr b="1"/>
-              <a:t>Decision: GO with FLAG</a:t>
-            </a:r>
-            <a:r>
-              <a:rPr/>
-              <a:t> on IPTW SE calibration</a:t>
-            </a:r>
-          </a:p>
-        </p:txBody>
-      </p:sp>
-    </p:spTree>
-  </p:cSld>
-</p:sld>
-</file>
-
-<file path=ppt/slides/slide3.xml><?xml version="1.0" encoding="utf-8"?>
-<p:sld xmlns:a="http://schemas.openxmlformats.org/drawingml/2006/main" xmlns:r="http://schemas.openxmlformats.org/officeDocument/2006/relationships" xmlns:p="http://schemas.openxmlformats.org/presentationml/2006/main">
-  <p:cSld>
-    <p:spTree>
-      <p:nvGrpSpPr>
-        <p:cNvPr id="1" name=""/>
-        <p:cNvGrpSpPr/>
-        <p:nvPr/>
-      </p:nvGrpSpPr>
-      <p:grpSpPr>
-        <a:xfrm>
-          <a:off x="0" y="0"/>
-          <a:ext cx="0" cy="0"/>
-          <a:chOff x="0" y="0"/>
-          <a:chExt cx="0" cy="0"/>
-        </a:xfrm>
-      </p:grpSpPr>
-      <p:sp>
-        <p:nvSpPr>
-          <p:cNvPr id="2" name="Title 1"/>
-          <p:cNvSpPr>
-            <a:spLocks noGrp="1"/>
-          </p:cNvSpPr>
-          <p:nvPr>
-            <p:ph type="title"/>
-          </p:nvPr>
-        </p:nvSpPr>
-        <p:spPr/>
-        <p:txBody>
-          <a:bodyPr/>
-          <a:lstStyle/>
-          <a:p>
-            <a:pPr lvl="0" indent="0" marL="0">
-              <a:buNone/>
-            </a:pPr>
-            <a:r>
-              <a:rPr/>
-              <a:t>What I will cover (≈30 min)</a:t>
-            </a:r>
-          </a:p>
-        </p:txBody>
-      </p:sp>
-      <p:sp>
-        <p:nvSpPr>
-          <p:cNvPr id="3" name="Content Placeholder 2"/>
-          <p:cNvSpPr>
-            <a:spLocks noGrp="1"/>
-          </p:cNvSpPr>
-          <p:nvPr>
-            <p:ph idx="1"/>
-          </p:nvPr>
-        </p:nvSpPr>
-        <p:spPr/>
-        <p:txBody>
-          <a:bodyPr/>
-          <a:lstStyle/>
-          <a:p>
-            <a:pPr lvl="0" indent="-342900" marL="342900">
-              <a:buAutoNum type="arabicPeriod"/>
-            </a:pPr>
-            <a:r>
-              <a:rPr/>
-              <a:t>Five questions the workflow answers</a:t>
-            </a:r>
-          </a:p>
-          <a:p>
-            <a:pPr lvl="0" indent="-342900" marL="342900">
-              <a:buAutoNum type="arabicPeriod"/>
-            </a:pPr>
-            <a:r>
-              <a:rPr/>
-              <a:t>Outcome-blind staged workflow (and what it does not replace)</a:t>
-            </a:r>
-          </a:p>
-          <a:p>
-            <a:pPr lvl="0" indent="-342900" marL="342900">
-              <a:buAutoNum type="arabicPeriod"/>
-            </a:pPr>
-            <a:r>
-              <a:rPr/>
-              <a:t>From qualitative DQ review to quantitative stress testing</a:t>
-            </a:r>
-          </a:p>
-          <a:p>
-            <a:pPr lvl="0" indent="-342900" marL="342900">
-              <a:buAutoNum type="arabicPeriod"/>
-            </a:pPr>
-            <a:r>
-              <a:rPr/>
-              <a:t>Simulation study</a:t>
-            </a:r>
-          </a:p>
-          <a:p>
-            <a:pPr lvl="0" indent="-342900" marL="342900">
-              <a:buAutoNum type="arabicPeriod"/>
-            </a:pPr>
-            <a:r>
-              <a:rPr/>
-              <a:t>Rescue.Co case study (Kenya Trauma Registry)</a:t>
-            </a:r>
-          </a:p>
-          <a:p>
-            <a:pPr lvl="0" indent="-342900" marL="342900">
-              <a:buAutoNum type="arabicPeriod"/>
-            </a:pPr>
-            <a:r>
-              <a:rPr/>
-              <a:t>What cleanTMLE contributes operationally</a:t>
-            </a:r>
-          </a:p>
-          <a:p>
-            <a:pPr lvl="0" indent="-342900" marL="342900">
-              <a:buAutoNum type="arabicPeriod"/>
-            </a:pPr>
-            <a:r>
-              <a:rPr/>
-              <a:t>Limitations and the 0.2 roadmap</a:t>
-            </a:r>
-          </a:p>
-          <a:p>
-            <a:pPr lvl="0" indent="-342900" marL="342900">
-              <a:buAutoNum type="arabicPeriod"/>
-            </a:pPr>
-            <a:r>
-              <a:rPr/>
-              <a:t>Open questions for collaborators</a:t>
-            </a:r>
-          </a:p>
-        </p:txBody>
-      </p:sp>
-    </p:spTree>
-  </p:cSld>
-</p:sld>
-</file>
-
-<file path=ppt/slides/slide30.xml><?xml version="1.0" encoding="utf-8"?>
 <p:sld xmlns:a="http://schemas.openxmlformats.org/drawingml/2006/main" xmlns:r="http://schemas.openxmlformats.org/officeDocument/2006/relationships" xmlns:p="http://schemas.openxmlformats.org/presentationml/2006/main">
   <p:cSld>
     <p:spTree>
@@ -6214,6 +5967,257 @@
 </p:sld>
 </file>
 
+<file path=ppt/slides/slide3.xml><?xml version="1.0" encoding="utf-8"?>
+<p:sld xmlns:a="http://schemas.openxmlformats.org/drawingml/2006/main" xmlns:r="http://schemas.openxmlformats.org/officeDocument/2006/relationships" xmlns:p="http://schemas.openxmlformats.org/presentationml/2006/main">
+  <p:cSld>
+    <p:spTree>
+      <p:nvGrpSpPr>
+        <p:cNvPr id="1" name=""/>
+        <p:cNvGrpSpPr/>
+        <p:nvPr/>
+      </p:nvGrpSpPr>
+      <p:grpSpPr>
+        <a:xfrm>
+          <a:off x="0" y="0"/>
+          <a:ext cx="0" cy="0"/>
+          <a:chOff x="0" y="0"/>
+          <a:chExt cx="0" cy="0"/>
+        </a:xfrm>
+      </p:grpSpPr>
+      <p:sp>
+        <p:nvSpPr>
+          <p:cNvPr id="2" name="Title 1"/>
+          <p:cNvSpPr>
+            <a:spLocks noGrp="1"/>
+          </p:cNvSpPr>
+          <p:nvPr>
+            <p:ph type="title"/>
+          </p:nvPr>
+        </p:nvSpPr>
+        <p:spPr/>
+        <p:txBody>
+          <a:bodyPr/>
+          <a:lstStyle/>
+          <a:p>
+            <a:pPr lvl="0" indent="0" marL="0">
+              <a:buNone/>
+            </a:pPr>
+            <a:r>
+              <a:rPr/>
+              <a:t>What I will cover (≈30 min)</a:t>
+            </a:r>
+          </a:p>
+        </p:txBody>
+      </p:sp>
+      <p:sp>
+        <p:nvSpPr>
+          <p:cNvPr id="3" name="Content Placeholder 2"/>
+          <p:cNvSpPr>
+            <a:spLocks noGrp="1"/>
+          </p:cNvSpPr>
+          <p:nvPr>
+            <p:ph idx="1"/>
+          </p:nvPr>
+        </p:nvSpPr>
+        <p:spPr/>
+        <p:txBody>
+          <a:bodyPr/>
+          <a:lstStyle/>
+          <a:p>
+            <a:pPr lvl="0" indent="-342900" marL="342900">
+              <a:buAutoNum type="arabicPeriod"/>
+            </a:pPr>
+            <a:r>
+              <a:rPr/>
+              <a:t>Five questions the workflow answers</a:t>
+            </a:r>
+          </a:p>
+          <a:p>
+            <a:pPr lvl="0" indent="-342900" marL="342900">
+              <a:buAutoNum type="arabicPeriod"/>
+            </a:pPr>
+            <a:r>
+              <a:rPr/>
+              <a:t>Outcome-blind staged workflow (and what it does not replace)</a:t>
+            </a:r>
+          </a:p>
+          <a:p>
+            <a:pPr lvl="0" indent="-342900" marL="342900">
+              <a:buAutoNum type="arabicPeriod"/>
+            </a:pPr>
+            <a:r>
+              <a:rPr/>
+              <a:t>From qualitative DQ review to quantitative stress testing</a:t>
+            </a:r>
+          </a:p>
+          <a:p>
+            <a:pPr lvl="0" indent="-342900" marL="342900">
+              <a:buAutoNum type="arabicPeriod"/>
+            </a:pPr>
+            <a:r>
+              <a:rPr/>
+              <a:t>Simulation study</a:t>
+            </a:r>
+          </a:p>
+          <a:p>
+            <a:pPr lvl="0" indent="-342900" marL="342900">
+              <a:buAutoNum type="arabicPeriod"/>
+            </a:pPr>
+            <a:r>
+              <a:rPr/>
+              <a:t>Rescue.Co case study (Kenya Trauma Registry)</a:t>
+            </a:r>
+          </a:p>
+          <a:p>
+            <a:pPr lvl="0" indent="-342900" marL="342900">
+              <a:buAutoNum type="arabicPeriod"/>
+            </a:pPr>
+            <a:r>
+              <a:rPr/>
+              <a:t>What cleanTMLE contributes operationally</a:t>
+            </a:r>
+          </a:p>
+          <a:p>
+            <a:pPr lvl="0" indent="-342900" marL="342900">
+              <a:buAutoNum type="arabicPeriod"/>
+            </a:pPr>
+            <a:r>
+              <a:rPr/>
+              <a:t>Limitations and the 0.2 roadmap</a:t>
+            </a:r>
+          </a:p>
+          <a:p>
+            <a:pPr lvl="0" indent="-342900" marL="342900">
+              <a:buAutoNum type="arabicPeriod"/>
+            </a:pPr>
+            <a:r>
+              <a:rPr/>
+              <a:t>Open questions for collaborators</a:t>
+            </a:r>
+          </a:p>
+        </p:txBody>
+      </p:sp>
+    </p:spTree>
+  </p:cSld>
+</p:sld>
+</file>
+
+<file path=ppt/slides/slide30.xml><?xml version="1.0" encoding="utf-8"?>
+<p:sld xmlns:a="http://schemas.openxmlformats.org/drawingml/2006/main" xmlns:r="http://schemas.openxmlformats.org/officeDocument/2006/relationships" xmlns:p="http://schemas.openxmlformats.org/presentationml/2006/main">
+  <p:cSld>
+    <p:spTree>
+      <p:nvGrpSpPr>
+        <p:cNvPr id="1" name=""/>
+        <p:cNvGrpSpPr/>
+        <p:nvPr/>
+      </p:nvGrpSpPr>
+      <p:grpSpPr>
+        <a:xfrm>
+          <a:off x="0" y="0"/>
+          <a:ext cx="0" cy="0"/>
+          <a:chOff x="0" y="0"/>
+          <a:chExt cx="0" cy="0"/>
+        </a:xfrm>
+      </p:grpSpPr>
+      <p:sp>
+        <p:nvSpPr>
+          <p:cNvPr id="2" name="Title 1"/>
+          <p:cNvSpPr>
+            <a:spLocks noGrp="1"/>
+          </p:cNvSpPr>
+          <p:nvPr>
+            <p:ph type="title"/>
+          </p:nvPr>
+        </p:nvSpPr>
+        <p:spPr/>
+        <p:txBody>
+          <a:bodyPr/>
+          <a:lstStyle/>
+          <a:p>
+            <a:pPr lvl="0" indent="0" marL="0">
+              <a:buNone/>
+            </a:pPr>
+            <a:r>
+              <a:rPr/>
+              <a:t>DQ degradation gradient — what we observed</a:t>
+            </a:r>
+          </a:p>
+        </p:txBody>
+      </p:sp>
+      <p:sp>
+        <p:nvSpPr>
+          <p:cNvPr id="3" name="Content Placeholder 2"/>
+          <p:cNvSpPr>
+            <a:spLocks noGrp="1"/>
+          </p:cNvSpPr>
+          <p:nvPr>
+            <p:ph idx="1"/>
+          </p:nvPr>
+        </p:nvSpPr>
+        <p:spPr/>
+        <p:txBody>
+          <a:bodyPr/>
+          <a:lstStyle/>
+          <a:p>
+            <a:pPr lvl="0"/>
+            <a:r>
+              <a:rPr b="1"/>
+              <a:t>Covariate missingness</a:t>
+            </a:r>
+            <a:r>
+              <a:rPr/>
+              <a:t> — flat (MCAR + median imputation is unbiased by construction; weak test)</a:t>
+            </a:r>
+          </a:p>
+          <a:p>
+            <a:pPr lvl="0"/>
+            <a:r>
+              <a:rPr b="1"/>
+              <a:t>Exposure misclassification</a:t>
+            </a:r>
+            <a:r>
+              <a:rPr/>
+              <a:t> — bias rises toward null; coverage of the pre-misclassification estimand drops</a:t>
+            </a:r>
+          </a:p>
+          <a:p>
+            <a:pPr lvl="0"/>
+            <a:r>
+              <a:rPr b="1"/>
+              <a:t>Outcome misclassification (0.90, 0.95)</a:t>
+            </a:r>
+            <a:r>
+              <a:rPr/>
+              <a:t> — largest bias of the three measurement threats, especially when differential</a:t>
+            </a:r>
+          </a:p>
+          <a:p>
+            <a:pPr lvl="0"/>
+            <a:r>
+              <a:rPr b="1"/>
+              <a:t>Unmeasured confounding</a:t>
+            </a:r>
+            <a:r>
+              <a:rPr/>
+              <a:t> — largest degradation; only threat that pushes RMSE ratio above 1.5</a:t>
+            </a:r>
+          </a:p>
+          <a:p>
+            <a:pPr lvl="0" indent="0" marL="0">
+              <a:buNone/>
+            </a:pPr>
+            <a:r>
+              <a:rPr/>
+              <a:t>The DQ test is most informative when the threat targets identification or measurement validity rather than ordinary estimator variance.</a:t>
+            </a:r>
+          </a:p>
+        </p:txBody>
+      </p:sp>
+    </p:spTree>
+  </p:cSld>
+</p:sld>
+</file>
+
 <file path=ppt/slides/slide31.xml><?xml version="1.0" encoding="utf-8"?>
 <p:sld xmlns:a="http://schemas.openxmlformats.org/drawingml/2006/main" xmlns:r="http://schemas.openxmlformats.org/officeDocument/2006/relationships" xmlns:p="http://schemas.openxmlformats.org/presentationml/2006/main">
   <p:cSld>
@@ -6241,7 +6245,12 @@
             <p:ph type="title"/>
           </p:nvPr>
         </p:nvSpPr>
-        <p:spPr/>
+        <p:spPr>
+          <a:xfrm>
+            <a:off x="722313" y="3305176"/>
+            <a:ext cx="7772400" cy="1021556"/>
+          </a:xfrm>
+        </p:spPr>
         <p:txBody>
           <a:bodyPr/>
           <a:lstStyle/>
@@ -6251,76 +6260,7 @@
             </a:pPr>
             <a:r>
               <a:rPr/>
-              <a:t>DQ degradation gradient — what we observed</a:t>
-            </a:r>
-          </a:p>
-        </p:txBody>
-      </p:sp>
-      <p:sp>
-        <p:nvSpPr>
-          <p:cNvPr id="3" name="Content Placeholder 2"/>
-          <p:cNvSpPr>
-            <a:spLocks noGrp="1"/>
-          </p:cNvSpPr>
-          <p:nvPr>
-            <p:ph idx="1"/>
-          </p:nvPr>
-        </p:nvSpPr>
-        <p:spPr/>
-        <p:txBody>
-          <a:bodyPr/>
-          <a:lstStyle/>
-          <a:p>
-            <a:pPr lvl="0"/>
-            <a:r>
-              <a:rPr b="1"/>
-              <a:t>Covariate missingness</a:t>
-            </a:r>
-            <a:r>
-              <a:rPr/>
-              <a:t> — flat (MCAR + median imputation is unbiased by construction; weak test)</a:t>
-            </a:r>
-          </a:p>
-          <a:p>
-            <a:pPr lvl="0"/>
-            <a:r>
-              <a:rPr b="1"/>
-              <a:t>Exposure misclassification</a:t>
-            </a:r>
-            <a:r>
-              <a:rPr/>
-              <a:t> — bias rises toward null; coverage of the pre-misclassification estimand drops</a:t>
-            </a:r>
-          </a:p>
-          <a:p>
-            <a:pPr lvl="0"/>
-            <a:r>
-              <a:rPr b="1"/>
-              <a:t>Outcome misclassification (0.90, 0.95)</a:t>
-            </a:r>
-            <a:r>
-              <a:rPr/>
-              <a:t> — largest bias of the three measurement threats, especially when differential</a:t>
-            </a:r>
-          </a:p>
-          <a:p>
-            <a:pPr lvl="0"/>
-            <a:r>
-              <a:rPr b="1"/>
-              <a:t>Unmeasured confounding</a:t>
-            </a:r>
-            <a:r>
-              <a:rPr/>
-              <a:t> — largest degradation; only threat that pushes RMSE ratio above 1.5</a:t>
-            </a:r>
-          </a:p>
-          <a:p>
-            <a:pPr lvl="0" indent="0" marL="0">
-              <a:buNone/>
-            </a:pPr>
-            <a:r>
-              <a:rPr/>
-              <a:t>The DQ test is most informative when the threat targets identification or measurement validity rather than ordinary estimator variance.</a:t>
+              <a:t>Case study: Rescue.Co (Kenya Trauma Registry)</a:t>
             </a:r>
           </a:p>
         </p:txBody>
@@ -6331,58 +6271,6 @@
 </file>
 
 <file path=ppt/slides/slide32.xml><?xml version="1.0" encoding="utf-8"?>
-<p:sld xmlns:a="http://schemas.openxmlformats.org/drawingml/2006/main" xmlns:r="http://schemas.openxmlformats.org/officeDocument/2006/relationships" xmlns:p="http://schemas.openxmlformats.org/presentationml/2006/main">
-  <p:cSld>
-    <p:spTree>
-      <p:nvGrpSpPr>
-        <p:cNvPr id="1" name=""/>
-        <p:cNvGrpSpPr/>
-        <p:nvPr/>
-      </p:nvGrpSpPr>
-      <p:grpSpPr>
-        <a:xfrm>
-          <a:off x="0" y="0"/>
-          <a:ext cx="0" cy="0"/>
-          <a:chOff x="0" y="0"/>
-          <a:chExt cx="0" cy="0"/>
-        </a:xfrm>
-      </p:grpSpPr>
-      <p:sp>
-        <p:nvSpPr>
-          <p:cNvPr id="2" name="Title 1"/>
-          <p:cNvSpPr>
-            <a:spLocks noGrp="1"/>
-          </p:cNvSpPr>
-          <p:nvPr>
-            <p:ph type="title"/>
-          </p:nvPr>
-        </p:nvSpPr>
-        <p:spPr>
-          <a:xfrm>
-            <a:off x="722313" y="3305176"/>
-            <a:ext cx="7772400" cy="1021556"/>
-          </a:xfrm>
-        </p:spPr>
-        <p:txBody>
-          <a:bodyPr/>
-          <a:lstStyle/>
-          <a:p>
-            <a:pPr lvl="0" indent="0" marL="0">
-              <a:buNone/>
-            </a:pPr>
-            <a:r>
-              <a:rPr/>
-              <a:t>Case study: Rescue.Co (Kenya Trauma Registry)</a:t>
-            </a:r>
-          </a:p>
-        </p:txBody>
-      </p:sp>
-    </p:spTree>
-  </p:cSld>
-</p:sld>
-</file>
-
-<file path=ppt/slides/slide33.xml><?xml version="1.0" encoding="utf-8"?>
 <p:sld xmlns:a="http://schemas.openxmlformats.org/drawingml/2006/main" xmlns:r="http://schemas.openxmlformats.org/officeDocument/2006/relationships" xmlns:p="http://schemas.openxmlformats.org/presentationml/2006/main">
   <p:cSld>
     <p:spTree>
@@ -6511,7 +6399,7 @@
 </p:sld>
 </file>
 
-<file path=ppt/slides/slide34.xml><?xml version="1.0" encoding="utf-8"?>
+<file path=ppt/slides/slide33.xml><?xml version="1.0" encoding="utf-8"?>
 <p:sld xmlns:a="http://schemas.openxmlformats.org/drawingml/2006/main" xmlns:r="http://schemas.openxmlformats.org/officeDocument/2006/relationships" xmlns:p="http://schemas.openxmlformats.org/presentationml/2006/main">
   <p:cSld>
     <p:spTree>
@@ -6629,7 +6517,7 @@
 </p:sld>
 </file>
 
-<file path=ppt/slides/slide35.xml><?xml version="1.0" encoding="utf-8"?>
+<file path=ppt/slides/slide34.xml><?xml version="1.0" encoding="utf-8"?>
 <p:sld xmlns:a="http://schemas.openxmlformats.org/drawingml/2006/main" xmlns:r="http://schemas.openxmlformats.org/officeDocument/2006/relationships" xmlns:p="http://schemas.openxmlformats.org/presentationml/2006/main">
   <p:cSld>
     <p:spTree>
@@ -7251,6 +7139,53 @@
 </p:sld>
 </file>
 
+<file path=ppt/slides/slide35.xml><?xml version="1.0" encoding="utf-8"?>
+<p:sld xmlns:a="http://schemas.openxmlformats.org/drawingml/2006/main" xmlns:r="http://schemas.openxmlformats.org/officeDocument/2006/relationships" xmlns:p="http://schemas.openxmlformats.org/presentationml/2006/main">
+  <p:cSld>
+    <p:spTree>
+      <p:nvGrpSpPr>
+        <p:cNvPr id="1" name=""/>
+        <p:cNvGrpSpPr/>
+        <p:nvPr/>
+      </p:nvGrpSpPr>
+      <p:grpSpPr>
+        <a:xfrm>
+          <a:off x="0" y="0"/>
+          <a:ext cx="0" cy="0"/>
+          <a:chOff x="0" y="0"/>
+          <a:chExt cx="0" cy="0"/>
+        </a:xfrm>
+      </p:grpSpPr>
+      <p:sp>
+        <p:nvSpPr>
+          <p:cNvPr id="3" name="Content Placeholder 2"/>
+          <p:cNvSpPr>
+            <a:spLocks noGrp="1"/>
+          </p:cNvSpPr>
+          <p:nvPr>
+            <p:ph idx="1"/>
+          </p:nvPr>
+        </p:nvSpPr>
+        <p:spPr/>
+        <p:txBody>
+          <a:bodyPr/>
+          <a:lstStyle/>
+          <a:p>
+            <a:pPr lvl="0" indent="0" marL="0">
+              <a:buNone/>
+            </a:pPr>
+            <a:r>
+              <a:rPr/>
+              <a:t>Six estimators agree on direction; primary TMLE 95% CI crosses zero.</a:t>
+            </a:r>
+          </a:p>
+        </p:txBody>
+      </p:sp>
+    </p:spTree>
+  </p:cSld>
+</p:sld>
+</file>
+
 <file path=ppt/slides/slide36.xml><?xml version="1.0" encoding="utf-8"?>
 <p:sld xmlns:a="http://schemas.openxmlformats.org/drawingml/2006/main" xmlns:r="http://schemas.openxmlformats.org/officeDocument/2006/relationships" xmlns:p="http://schemas.openxmlformats.org/presentationml/2006/main">
   <p:cSld>
@@ -7270,6 +7205,31 @@
       </p:grpSpPr>
       <p:sp>
         <p:nvSpPr>
+          <p:cNvPr id="2" name="Title 1"/>
+          <p:cNvSpPr>
+            <a:spLocks noGrp="1"/>
+          </p:cNvSpPr>
+          <p:nvPr>
+            <p:ph type="title"/>
+          </p:nvPr>
+        </p:nvSpPr>
+        <p:spPr/>
+        <p:txBody>
+          <a:bodyPr/>
+          <a:lstStyle/>
+          <a:p>
+            <a:pPr lvl="0" indent="0" marL="0">
+              <a:buNone/>
+            </a:pPr>
+            <a:r>
+              <a:rPr/>
+              <a:t>Reading the case study</a:t>
+            </a:r>
+          </a:p>
+        </p:txBody>
+      </p:sp>
+      <p:sp>
+        <p:nvSpPr>
           <p:cNvPr id="3" name="Content Placeholder 2"/>
           <p:cNvSpPr>
             <a:spLocks noGrp="1"/>
@@ -7283,12 +7243,31 @@
           <a:bodyPr/>
           <a:lstStyle/>
           <a:p>
-            <a:pPr lvl="0" indent="0" marL="0">
-              <a:buNone/>
-            </a:pPr>
-            <a:r>
-              <a:rPr/>
-              <a:t>Six estimators agree on direction; primary TMLE 95% CI crosses zero.</a:t>
+            <a:pPr lvl="0"/>
+            <a:r>
+              <a:rPr/>
+              <a:t>All six estimators agree on direction (RD 0.026 to 0.037 favouring Rescue.Co)</a:t>
+            </a:r>
+          </a:p>
+          <a:p>
+            <a:pPr lvl="0"/>
+            <a:r>
+              <a:rPr/>
+              <a:t>The prespecified primary TMLE 95% CI crosses zero</a:t>
+            </a:r>
+          </a:p>
+          <a:p>
+            <a:pPr lvl="0"/>
+            <a:r>
+              <a:rPr/>
+              <a:t>A 0.0012 additive bias would push the lower CI bound across zero (a CI-tipping-point distance, not a full QBA)</a:t>
+            </a:r>
+          </a:p>
+          <a:p>
+            <a:pPr lvl="0"/>
+            <a:r>
+              <a:rPr/>
+              <a:t>The audit log captures every analytic decision, including the three NC drops</a:t>
             </a:r>
           </a:p>
         </p:txBody>
@@ -7325,7 +7304,12 @@
             <p:ph type="title"/>
           </p:nvPr>
         </p:nvSpPr>
-        <p:spPr/>
+        <p:spPr>
+          <a:xfrm>
+            <a:off x="722313" y="3305176"/>
+            <a:ext cx="7772400" cy="1021556"/>
+          </a:xfrm>
+        </p:spPr>
         <p:txBody>
           <a:bodyPr/>
           <a:lstStyle/>
@@ -7335,58 +7319,7 @@
             </a:pPr>
             <a:r>
               <a:rPr/>
-              <a:t>Reading the case study</a:t>
-            </a:r>
-          </a:p>
-        </p:txBody>
-      </p:sp>
-      <p:sp>
-        <p:nvSpPr>
-          <p:cNvPr id="3" name="Content Placeholder 2"/>
-          <p:cNvSpPr>
-            <a:spLocks noGrp="1"/>
-          </p:cNvSpPr>
-          <p:nvPr>
-            <p:ph idx="1"/>
-          </p:nvPr>
-        </p:nvSpPr>
-        <p:spPr/>
-        <p:txBody>
-          <a:bodyPr/>
-          <a:lstStyle/>
-          <a:p>
-            <a:pPr lvl="0"/>
-            <a:r>
-              <a:rPr/>
-              <a:t>All six estimators agree on direction (RD 0.026 to 0.037 favouring Rescue.Co)</a:t>
-            </a:r>
-          </a:p>
-          <a:p>
-            <a:pPr lvl="0"/>
-            <a:r>
-              <a:rPr/>
-              <a:t>The prespecified primary TMLE 95% CI crosses zero</a:t>
-            </a:r>
-          </a:p>
-          <a:p>
-            <a:pPr lvl="0"/>
-            <a:r>
-              <a:rPr/>
-              <a:t>A 0.0012 additive bias would push the lower CI bound across zero (a CI-tipping-point distance, not a full QBA)</a:t>
-            </a:r>
-          </a:p>
-          <a:p>
-            <a:pPr lvl="0"/>
-            <a:r>
-              <a:rPr/>
-              <a:t>The audit log captures every analytic decision, including the three NC drops</a:t>
-            </a:r>
-          </a:p>
-          <a:p>
-            <a:pPr lvl="0"/>
-            <a:r>
-              <a:rPr i="1"/>
-              <a:t>Workflow demonstration; not a causal claim about Rescue.Co.</a:t>
+              <a:t>Discussion</a:t>
             </a:r>
           </a:p>
         </p:txBody>
@@ -7423,12 +7356,7 @@
             <p:ph type="title"/>
           </p:nvPr>
         </p:nvSpPr>
-        <p:spPr>
-          <a:xfrm>
-            <a:off x="722313" y="3305176"/>
-            <a:ext cx="7772400" cy="1021556"/>
-          </a:xfrm>
-        </p:spPr>
+        <p:spPr/>
         <p:txBody>
           <a:bodyPr/>
           <a:lstStyle/>
@@ -7438,7 +7366,102 @@
             </a:pPr>
             <a:r>
               <a:rPr/>
-              <a:t>Discussion</a:t>
+              <a:t>What cleanTMLE contributes operationally</a:t>
+            </a:r>
+          </a:p>
+        </p:txBody>
+      </p:sp>
+      <p:sp>
+        <p:nvSpPr>
+          <p:cNvPr id="3" name="Content Placeholder 2"/>
+          <p:cNvSpPr>
+            <a:spLocks noGrp="1"/>
+          </p:cNvSpPr>
+          <p:nvPr>
+            <p:ph idx="1"/>
+          </p:nvPr>
+        </p:nvSpPr>
+        <p:spPr/>
+        <p:txBody>
+          <a:bodyPr/>
+          <a:lstStyle/>
+          <a:p>
+            <a:pPr lvl="0"/>
+            <a:r>
+              <a:rPr b="1"/>
+              <a:t>Auditable analysis lock</a:t>
+            </a:r>
+            <a:r>
+              <a:rPr/>
+              <a:t> with sha256 fingerprint</a:t>
+            </a:r>
+          </a:p>
+          <a:p>
+            <a:pPr lvl="0"/>
+            <a:r>
+              <a:rPr b="1"/>
+              <a:t>Outcome-access checks</a:t>
+            </a:r>
+            <a:r>
+              <a:rPr/>
+              <a:t> inside exported functions</a:t>
+            </a:r>
+          </a:p>
+          <a:p>
+            <a:pPr lvl="0"/>
+            <a:r>
+              <a:rPr b="1"/>
+              <a:t>Baseline plasmode estimator selection</a:t>
+            </a:r>
+            <a:r>
+              <a:rPr/>
+              <a:t> under the locked DGP</a:t>
+            </a:r>
+          </a:p>
+          <a:p>
+            <a:pPr lvl="0"/>
+            <a:r>
+              <a:rPr b="1"/>
+              <a:t>DQ stress testing</a:t>
+            </a:r>
+            <a:r>
+              <a:rPr/>
+              <a:t> using the same performance metrics, on the same scale</a:t>
+            </a:r>
+          </a:p>
+          <a:p>
+            <a:pPr lvl="0"/>
+            <a:r>
+              <a:rPr b="1"/>
+              <a:t>GO / FLAG / STOP</a:t>
+            </a:r>
+            <a:r>
+              <a:rPr/>
+              <a:t> checkpoint record</a:t>
+            </a:r>
+          </a:p>
+          <a:p>
+            <a:pPr lvl="0"/>
+            <a:r>
+              <a:rPr/>
+              <a:t>A </a:t>
+            </a:r>
+            <a:r>
+              <a:rPr b="1"/>
+              <a:t>reproducible bridge</a:t>
+            </a:r>
+            <a:r>
+              <a:rPr/>
+              <a:t> between fit-for-purpose concerns and estimator choice</a:t>
+            </a:r>
+          </a:p>
+          <a:p>
+            <a:pPr lvl="0" indent="0" marL="0">
+              <a:buNone/>
+            </a:pPr>
+            <a:r>
+              <a:rPr/>
+              <a:t>The claim is integration and auditability, not a new estimator.</a:t>
             </a:r>
           </a:p>
         </p:txBody>
@@ -7485,7 +7508,7 @@
             </a:pPr>
             <a:r>
               <a:rPr/>
-              <a:t>What cleanTMLE contributes operationally</a:t>
+              <a:t>What is not new</a:t>
             </a:r>
           </a:p>
         </p:txBody>
@@ -7507,80 +7530,29 @@
           <a:p>
             <a:pPr lvl="0"/>
             <a:r>
-              <a:rPr b="1"/>
-              <a:t>Auditable analysis lock</a:t>
-            </a:r>
-            <a:r>
-              <a:rPr/>
-              <a:t> with sha256 fingerprint</a:t>
-            </a:r>
-          </a:p>
-          <a:p>
-            <a:pPr lvl="0"/>
-            <a:r>
-              <a:rPr b="1"/>
-              <a:t>Outcome-access checks</a:t>
-            </a:r>
-            <a:r>
-              <a:rPr/>
-              <a:t> inside exported functions</a:t>
-            </a:r>
-          </a:p>
-          <a:p>
-            <a:pPr lvl="0"/>
-            <a:r>
-              <a:rPr b="1"/>
-              <a:t>Baseline plasmode estimator selection</a:t>
-            </a:r>
-            <a:r>
-              <a:rPr/>
-              <a:t> under the locked DGP</a:t>
-            </a:r>
-          </a:p>
-          <a:p>
-            <a:pPr lvl="0"/>
-            <a:r>
-              <a:rPr b="1"/>
-              <a:t>DQ stress testing</a:t>
-            </a:r>
-            <a:r>
-              <a:rPr/>
-              <a:t> using the same performance metrics, on the same scale</a:t>
-            </a:r>
-          </a:p>
-          <a:p>
-            <a:pPr lvl="0"/>
-            <a:r>
-              <a:rPr b="1"/>
-              <a:t>GO / FLAG / STOP</a:t>
-            </a:r>
-            <a:r>
-              <a:rPr/>
-              <a:t> checkpoint record</a:t>
-            </a:r>
-          </a:p>
-          <a:p>
-            <a:pPr lvl="0"/>
-            <a:r>
-              <a:rPr/>
-              <a:t>A </a:t>
-            </a:r>
-            <a:r>
-              <a:rPr b="1"/>
-              <a:t>reproducible bridge</a:t>
-            </a:r>
-            <a:r>
-              <a:rPr/>
-              <a:t> between fit-for-purpose concerns and estimator choice</a:t>
-            </a:r>
-          </a:p>
-          <a:p>
-            <a:pPr lvl="0" indent="0" marL="0">
-              <a:buNone/>
-            </a:pPr>
-            <a:r>
-              <a:rPr/>
-              <a:t>The claim is integration and auditability, not a new estimator.</a:t>
+              <a:rPr/>
+              <a:t>Targeted learning (van der Laan, Petersen, Gruber, Schuler, …)</a:t>
+            </a:r>
+          </a:p>
+          <a:p>
+            <a:pPr lvl="0"/>
+            <a:r>
+              <a:rPr/>
+              <a:t>Plasmode simulation for candidate selection (Franklin 2014; Schuler 2017; Dang 2023)</a:t>
+            </a:r>
+          </a:p>
+          <a:p>
+            <a:pPr lvl="0"/>
+            <a:r>
+              <a:rPr/>
+              <a:t>Outcome blinding as a governance idea (Muntner 2024; Kent 2026)</a:t>
+            </a:r>
+          </a:p>
+          <a:p>
+            <a:pPr lvl="0"/>
+            <a:r>
+              <a:rPr/>
+              <a:t>Quantitative bias analysis (Lash 2014), which remains a post-outcome activity distinct from the pre-outcome DQ stress screen</a:t>
             </a:r>
           </a:p>
         </p:txBody>
@@ -7617,7 +7589,12 @@
             <p:ph type="title"/>
           </p:nvPr>
         </p:nvSpPr>
-        <p:spPr/>
+        <p:spPr>
+          <a:xfrm>
+            <a:off x="722313" y="3305176"/>
+            <a:ext cx="7772400" cy="1021556"/>
+          </a:xfrm>
+        </p:spPr>
         <p:txBody>
           <a:bodyPr/>
           <a:lstStyle/>
@@ -7627,86 +7604,7 @@
             </a:pPr>
             <a:r>
               <a:rPr/>
-              <a:t>Five questions, five slides</a:t>
-            </a:r>
-          </a:p>
-        </p:txBody>
-      </p:sp>
-      <p:sp>
-        <p:nvSpPr>
-          <p:cNvPr id="3" name="Content Placeholder 2"/>
-          <p:cNvSpPr>
-            <a:spLocks noGrp="1"/>
-          </p:cNvSpPr>
-          <p:nvPr>
-            <p:ph idx="1"/>
-          </p:nvPr>
-        </p:nvSpPr>
-        <p:spPr/>
-        <p:txBody>
-          <a:bodyPr/>
-          <a:lstStyle/>
-          <a:p>
-            <a:pPr lvl="0" indent="0" marL="0">
-              <a:buNone/>
-            </a:pPr>
-            <a:r>
-              <a:rPr/>
-              <a:t>The rest of the deck is organised around five “why” questions:</a:t>
-            </a:r>
-          </a:p>
-          <a:p>
-            <a:pPr lvl="0" indent="-342900" marL="342900">
-              <a:buAutoNum type="arabicPeriod"/>
-            </a:pPr>
-            <a:r>
-              <a:rPr b="1"/>
-              <a:t>Why clean-room / staged design?</a:t>
-            </a:r>
-          </a:p>
-          <a:p>
-            <a:pPr lvl="0" indent="-342900" marL="342900">
-              <a:buAutoNum type="arabicPeriod"/>
-            </a:pPr>
-            <a:r>
-              <a:rPr b="1"/>
-              <a:t>Why TMLE?</a:t>
-            </a:r>
-          </a:p>
-          <a:p>
-            <a:pPr lvl="0" indent="-342900" marL="342900">
-              <a:buAutoNum type="arabicPeriod"/>
-            </a:pPr>
-            <a:r>
-              <a:rPr b="1"/>
-              <a:t>Why plasmode simulation?</a:t>
-            </a:r>
-          </a:p>
-          <a:p>
-            <a:pPr lvl="0" indent="-342900" marL="342900">
-              <a:buAutoNum type="arabicPeriod"/>
-            </a:pPr>
-            <a:r>
-              <a:rPr b="1"/>
-              <a:t>Why DQ stress testing?</a:t>
-            </a:r>
-          </a:p>
-          <a:p>
-            <a:pPr lvl="0" indent="-342900" marL="342900">
-              <a:buAutoNum type="arabicPeriod"/>
-            </a:pPr>
-            <a:r>
-              <a:rPr b="1"/>
-              <a:t>Why not just PS diagnostics and negative controls?</a:t>
-            </a:r>
-          </a:p>
-          <a:p>
-            <a:pPr lvl="0" indent="0" marL="0">
-              <a:buNone/>
-            </a:pPr>
-            <a:r>
-              <a:rPr/>
-              <a:t>If you only remember one slide, remember the contrast table on the next slide.</a:t>
+              <a:t>Motivation</a:t>
             </a:r>
           </a:p>
         </p:txBody>
@@ -7753,7 +7651,7 @@
             </a:pPr>
             <a:r>
               <a:rPr/>
-              <a:t>What is not new</a:t>
+              <a:t>Limitations</a:t>
             </a:r>
           </a:p>
         </p:txBody>
@@ -7776,28 +7674,42 @@
             <a:pPr lvl="0"/>
             <a:r>
               <a:rPr/>
-              <a:t>Targeted learning (van der Laan, Petersen, Gruber, Schuler, …)</a:t>
-            </a:r>
-          </a:p>
-          <a:p>
-            <a:pPr lvl="0"/>
-            <a:r>
-              <a:rPr/>
-              <a:t>Plasmode simulation for candidate selection (Franklin 2014; Schuler 2017; Dang 2023)</a:t>
-            </a:r>
-          </a:p>
-          <a:p>
-            <a:pPr lvl="0"/>
-            <a:r>
-              <a:rPr/>
-              <a:t>Outcome blinding as a governance idea (Muntner 2024; Kent 2026)</a:t>
-            </a:r>
-          </a:p>
-          <a:p>
-            <a:pPr lvl="0"/>
-            <a:r>
-              <a:rPr/>
-              <a:t>Quantitative bias analysis (Lash 2014), which remains a post-outcome activity distinct from the pre-outcome DQ stress screen</a:t>
+              <a:t>Synthetic-outcome mechanism may not rank estimators the same way as the realized outcome process</a:t>
+            </a:r>
+          </a:p>
+          <a:p>
+            <a:pPr lvl="0"/>
+            <a:r>
+              <a:rPr/>
+              <a:t>v0.1 scope: binary point exposure, binary outcome, marginal RD, MCAR outcome missingness handled by IPCW</a:t>
+            </a:r>
+          </a:p>
+          <a:p>
+            <a:pPr lvl="0"/>
+            <a:r>
+              <a:rPr/>
+              <a:t>DQ stress testing is not formal causal sensitivity analysis</a:t>
+            </a:r>
+          </a:p>
+          <a:p>
+            <a:pPr lvl="0"/>
+            <a:r>
+              <a:rPr/>
+              <a:t>Software cannot replace role separation or source-data validation</a:t>
+            </a:r>
+          </a:p>
+          <a:p>
+            <a:pPr lvl="0"/>
+            <a:r>
+              <a:rPr/>
+              <a:t>Severity ranges require external justification (validation studies, profiling, expert elicitation)</a:t>
+            </a:r>
+          </a:p>
+          <a:p>
+            <a:pPr lvl="0"/>
+            <a:r>
+              <a:rPr/>
+              <a:t>Decision-threshold defaults are heuristic; analysts set them from study context</a:t>
             </a:r>
           </a:p>
         </p:txBody>
@@ -7844,7 +7756,7 @@
             </a:pPr>
             <a:r>
               <a:rPr/>
-              <a:t>Limitations</a:t>
+              <a:t>Next steps (cleanTMLE 0.2)</a:t>
             </a:r>
           </a:p>
         </p:txBody>
@@ -7867,42 +7779,68 @@
             <a:pPr lvl="0"/>
             <a:r>
               <a:rPr/>
-              <a:t>Synthetic-outcome mechanism may not rank estimators the same way as the realized outcome process</a:t>
-            </a:r>
-          </a:p>
-          <a:p>
-            <a:pPr lvl="0"/>
-            <a:r>
-              <a:rPr/>
-              <a:t>v0.1 scope: binary point exposure, binary outcome, marginal RD, MCAR outcome missingness handled by IPCW</a:t>
-            </a:r>
-          </a:p>
-          <a:p>
-            <a:pPr lvl="0"/>
-            <a:r>
-              <a:rPr/>
-              <a:t>DQ stress testing is not formal causal sensitivity analysis</a:t>
-            </a:r>
-          </a:p>
-          <a:p>
-            <a:pPr lvl="0"/>
-            <a:r>
-              <a:rPr/>
-              <a:t>Software cannot replace role separation or source-data validation</a:t>
-            </a:r>
-          </a:p>
-          <a:p>
-            <a:pPr lvl="0"/>
-            <a:r>
-              <a:rPr/>
-              <a:t>Severity ranges require external justification (validation studies, profiling, expert elicitation)</a:t>
-            </a:r>
-          </a:p>
-          <a:p>
-            <a:pPr lvl="0"/>
-            <a:r>
-              <a:rPr/>
-              <a:t>Decision-threshold defaults are heuristic; analysts set them from study context</a:t>
+              <a:t>MAR and MNAR missingness in the DQ stress test</a:t>
+            </a:r>
+          </a:p>
+          <a:p>
+            <a:pPr lvl="0"/>
+            <a:r>
+              <a:rPr/>
+              <a:t>Time-window confounders (strike windows, calendar-time shocks)</a:t>
+            </a:r>
+          </a:p>
+          <a:p>
+            <a:pPr lvl="0"/>
+            <a:r>
+              <a:rPr/>
+              <a:t>Inter-facility transfer imbalance as a built-in scenario</a:t>
+            </a:r>
+          </a:p>
+          <a:p>
+            <a:pPr lvl="0"/>
+            <a:r>
+              <a:rPr/>
+              <a:t>Time-to-event endpoints via composition with </a:t>
+            </a:r>
+            <a:r>
+              <a:rPr>
+                <a:latin typeface="Courier"/>
+              </a:rPr>
+              <a:t>survtmle</a:t>
+            </a:r>
+            <a:r>
+              <a:rPr/>
+              <a:t> and </a:t>
+            </a:r>
+            <a:r>
+              <a:rPr>
+                <a:latin typeface="Courier"/>
+              </a:rPr>
+              <a:t>lmtp</a:t>
+            </a:r>
+          </a:p>
+          <a:p>
+            <a:pPr lvl="0"/>
+            <a:r>
+              <a:rPr/>
+              <a:t>Reference-paper-driven </a:t>
+            </a:r>
+            <a:r>
+              <a:rPr>
+                <a:latin typeface="Courier"/>
+              </a:rPr>
+              <a:t>data_quality_scenarios.yml</a:t>
+            </a:r>
+            <a:r>
+              <a:rPr/>
+              <a:t> ingesting validation-literature parameters and attaching citations to the audit log</a:t>
+            </a:r>
+          </a:p>
+          <a:p>
+            <a:pPr lvl="0"/>
+            <a:r>
+              <a:rPr/>
+              <a:t>Bootstrap variance for IPTW and matched TMLE</a:t>
             </a:r>
           </a:p>
         </p:txBody>
@@ -7939,7 +7877,12 @@
             <p:ph type="title"/>
           </p:nvPr>
         </p:nvSpPr>
-        <p:spPr/>
+        <p:spPr>
+          <a:xfrm>
+            <a:off x="722313" y="3305176"/>
+            <a:ext cx="7772400" cy="1021556"/>
+          </a:xfrm>
+        </p:spPr>
         <p:txBody>
           <a:bodyPr/>
           <a:lstStyle/>
@@ -7949,91 +7892,7 @@
             </a:pPr>
             <a:r>
               <a:rPr/>
-              <a:t>Next steps (cleanTMLE 0.2)</a:t>
-            </a:r>
-          </a:p>
-        </p:txBody>
-      </p:sp>
-      <p:sp>
-        <p:nvSpPr>
-          <p:cNvPr id="3" name="Content Placeholder 2"/>
-          <p:cNvSpPr>
-            <a:spLocks noGrp="1"/>
-          </p:cNvSpPr>
-          <p:nvPr>
-            <p:ph idx="1"/>
-          </p:nvPr>
-        </p:nvSpPr>
-        <p:spPr/>
-        <p:txBody>
-          <a:bodyPr/>
-          <a:lstStyle/>
-          <a:p>
-            <a:pPr lvl="0"/>
-            <a:r>
-              <a:rPr/>
-              <a:t>MAR and MNAR missingness in the DQ stress test</a:t>
-            </a:r>
-          </a:p>
-          <a:p>
-            <a:pPr lvl="0"/>
-            <a:r>
-              <a:rPr/>
-              <a:t>Time-window confounders (strike windows, calendar-time shocks)</a:t>
-            </a:r>
-          </a:p>
-          <a:p>
-            <a:pPr lvl="0"/>
-            <a:r>
-              <a:rPr/>
-              <a:t>Inter-facility transfer imbalance as a built-in scenario</a:t>
-            </a:r>
-          </a:p>
-          <a:p>
-            <a:pPr lvl="0"/>
-            <a:r>
-              <a:rPr/>
-              <a:t>Time-to-event endpoints via composition with </a:t>
-            </a:r>
-            <a:r>
-              <a:rPr>
-                <a:latin typeface="Courier"/>
-              </a:rPr>
-              <a:t>survtmle</a:t>
-            </a:r>
-            <a:r>
-              <a:rPr/>
-              <a:t> and </a:t>
-            </a:r>
-            <a:r>
-              <a:rPr>
-                <a:latin typeface="Courier"/>
-              </a:rPr>
-              <a:t>lmtp</a:t>
-            </a:r>
-          </a:p>
-          <a:p>
-            <a:pPr lvl="0"/>
-            <a:r>
-              <a:rPr/>
-              <a:t>Reference-paper-driven </a:t>
-            </a:r>
-            <a:r>
-              <a:rPr>
-                <a:latin typeface="Courier"/>
-              </a:rPr>
-              <a:t>data_quality_scenarios.yml</a:t>
-            </a:r>
-            <a:r>
-              <a:rPr/>
-              <a:t> ingesting validation-literature parameters and attaching citations to the audit log</a:t>
-            </a:r>
-          </a:p>
-          <a:p>
-            <a:pPr lvl="0"/>
-            <a:r>
-              <a:rPr/>
-              <a:t>Bootstrap variance for IPTW and matched TMLE</a:t>
+              <a:t>Open questions for collaborators</a:t>
             </a:r>
           </a:p>
         </p:txBody>
@@ -8070,12 +7929,7 @@
             <p:ph type="title"/>
           </p:nvPr>
         </p:nvSpPr>
-        <p:spPr>
-          <a:xfrm>
-            <a:off x="722313" y="3305176"/>
-            <a:ext cx="7772400" cy="1021556"/>
-          </a:xfrm>
-        </p:spPr>
+        <p:spPr/>
         <p:txBody>
           <a:bodyPr/>
           <a:lstStyle/>
@@ -8085,7 +7939,141 @@
             </a:pPr>
             <a:r>
               <a:rPr/>
-              <a:t>Open questions for collaborators</a:t>
+              <a:t>Where I want input</a:t>
+            </a:r>
+          </a:p>
+        </p:txBody>
+      </p:sp>
+      <p:sp>
+        <p:nvSpPr>
+          <p:cNvPr id="3" name="Content Placeholder 2"/>
+          <p:cNvSpPr>
+            <a:spLocks noGrp="1"/>
+          </p:cNvSpPr>
+          <p:nvPr>
+            <p:ph idx="1"/>
+          </p:nvPr>
+        </p:nvSpPr>
+        <p:spPr/>
+        <p:txBody>
+          <a:bodyPr/>
+          <a:lstStyle/>
+          <a:p>
+            <a:pPr lvl="0" indent="-342900" marL="342900">
+              <a:buAutoNum type="arabicPeriod"/>
+            </a:pPr>
+            <a:r>
+              <a:rPr b="1"/>
+              <a:t>Severity-range calibration</a:t>
+            </a:r>
+            <a:r>
+              <a:rPr/>
+              <a:t> — how to elicit and document </a:t>
+            </a:r>
+            <a:r>
+              <a:rPr>
+                <a:latin typeface="Courier"/>
+              </a:rPr>
+              <a:t>(sens, spec)</a:t>
+            </a:r>
+            <a:r>
+              <a:rPr/>
+              <a:t>, missingness, and U-shift ranges in a way a reviewer accepts</a:t>
+            </a:r>
+          </a:p>
+          <a:p>
+            <a:pPr lvl="0" indent="-342900" marL="342900">
+              <a:buAutoNum type="arabicPeriod"/>
+            </a:pPr>
+            <a:r>
+              <a:rPr b="1"/>
+              <a:t>Decision-threshold defaults</a:t>
+            </a:r>
+            <a:r>
+              <a:rPr/>
+              <a:t> — should they scale with the prespecified estimand magnitude and Type I error budget?</a:t>
+            </a:r>
+          </a:p>
+          <a:p>
+            <a:pPr lvl="0" indent="-342900" marL="342900">
+              <a:buAutoNum type="arabicPeriod"/>
+            </a:pPr>
+            <a:r>
+              <a:rPr b="1"/>
+              <a:t>Role separation</a:t>
+            </a:r>
+            <a:r>
+              <a:rPr/>
+              <a:t> — minimum personnel governance that should sit on top of the software workflow for submission-grade studies</a:t>
+            </a:r>
+          </a:p>
+          <a:p>
+            <a:pPr lvl="0" indent="-342900" marL="342900">
+              <a:buAutoNum type="arabicPeriod"/>
+            </a:pPr>
+            <a:r>
+              <a:rPr b="1"/>
+              <a:t>Plasmode faithfulness</a:t>
+            </a:r>
+            <a:r>
+              <a:rPr/>
+              <a:t> — is the parametric synthetic-outcome mechanism faithful enough, or do we need richer DGPs (effect modification, time-varying treatment)?</a:t>
+            </a:r>
+          </a:p>
+          <a:p>
+            <a:pPr lvl="0" indent="-342900" marL="342900">
+              <a:buAutoNum type="arabicPeriod"/>
+            </a:pPr>
+            <a:r>
+              <a:rPr b="1"/>
+              <a:t>Negative-control policy</a:t>
+            </a:r>
+            <a:r>
+              <a:rPr/>
+              <a:t> — when the NZV filter prunes prespecified NCs, re-elicit before unblinding or accept a narrower panel and document?</a:t>
+            </a:r>
+          </a:p>
+          <a:p>
+            <a:pPr lvl="0" indent="-342900" marL="342900">
+              <a:buAutoNum type="arabicPeriod"/>
+            </a:pPr>
+            <a:r>
+              <a:rPr b="1"/>
+              <a:t>Publication venue</a:t>
+            </a:r>
+            <a:r>
+              <a:rPr/>
+              <a:t> — </a:t>
+            </a:r>
+            <a:r>
+              <a:rPr>
+                <a:latin typeface="Courier"/>
+              </a:rPr>
+              <a:t>Epidemiology</a:t>
+            </a:r>
+            <a:r>
+              <a:rPr/>
+              <a:t>, </a:t>
+            </a:r>
+            <a:r>
+              <a:rPr>
+                <a:latin typeface="Courier"/>
+              </a:rPr>
+              <a:t>Stat Med</a:t>
+            </a:r>
+            <a:r>
+              <a:rPr/>
+              <a:t>, </a:t>
+            </a:r>
+            <a:r>
+              <a:rPr>
+                <a:latin typeface="Courier"/>
+              </a:rPr>
+              <a:t>Biometrics</a:t>
+            </a:r>
+            <a:r>
+              <a:rPr/>
+              <a:t>, or an RWE-specific venue?</a:t>
             </a:r>
           </a:p>
         </p:txBody>
@@ -8132,187 +8120,6 @@
             </a:pPr>
             <a:r>
               <a:rPr/>
-              <a:t>Where I want input</a:t>
-            </a:r>
-          </a:p>
-        </p:txBody>
-      </p:sp>
-      <p:sp>
-        <p:nvSpPr>
-          <p:cNvPr id="3" name="Content Placeholder 2"/>
-          <p:cNvSpPr>
-            <a:spLocks noGrp="1"/>
-          </p:cNvSpPr>
-          <p:nvPr>
-            <p:ph idx="1"/>
-          </p:nvPr>
-        </p:nvSpPr>
-        <p:spPr/>
-        <p:txBody>
-          <a:bodyPr/>
-          <a:lstStyle/>
-          <a:p>
-            <a:pPr lvl="0" indent="-342900" marL="342900">
-              <a:buAutoNum type="arabicPeriod"/>
-            </a:pPr>
-            <a:r>
-              <a:rPr b="1"/>
-              <a:t>Severity-range calibration</a:t>
-            </a:r>
-            <a:r>
-              <a:rPr/>
-              <a:t> — how to elicit and document </a:t>
-            </a:r>
-            <a:r>
-              <a:rPr>
-                <a:latin typeface="Courier"/>
-              </a:rPr>
-              <a:t>(sens, spec)</a:t>
-            </a:r>
-            <a:r>
-              <a:rPr/>
-              <a:t>, missingness, and U-shift ranges in a way a reviewer accepts</a:t>
-            </a:r>
-          </a:p>
-          <a:p>
-            <a:pPr lvl="0" indent="-342900" marL="342900">
-              <a:buAutoNum type="arabicPeriod"/>
-            </a:pPr>
-            <a:r>
-              <a:rPr b="1"/>
-              <a:t>Decision-threshold defaults</a:t>
-            </a:r>
-            <a:r>
-              <a:rPr/>
-              <a:t> — should they scale with the prespecified estimand magnitude and Type I error budget?</a:t>
-            </a:r>
-          </a:p>
-          <a:p>
-            <a:pPr lvl="0" indent="-342900" marL="342900">
-              <a:buAutoNum type="arabicPeriod"/>
-            </a:pPr>
-            <a:r>
-              <a:rPr b="1"/>
-              <a:t>Role separation</a:t>
-            </a:r>
-            <a:r>
-              <a:rPr/>
-              <a:t> — minimum personnel governance that should sit on top of the software workflow for submission-grade studies</a:t>
-            </a:r>
-          </a:p>
-          <a:p>
-            <a:pPr lvl="0" indent="-342900" marL="342900">
-              <a:buAutoNum type="arabicPeriod"/>
-            </a:pPr>
-            <a:r>
-              <a:rPr b="1"/>
-              <a:t>Plasmode faithfulness</a:t>
-            </a:r>
-            <a:r>
-              <a:rPr/>
-              <a:t> — is the parametric synthetic-outcome mechanism faithful enough, or do we need richer DGPs (effect modification, time-varying treatment)?</a:t>
-            </a:r>
-          </a:p>
-          <a:p>
-            <a:pPr lvl="0" indent="-342900" marL="342900">
-              <a:buAutoNum type="arabicPeriod"/>
-            </a:pPr>
-            <a:r>
-              <a:rPr b="1"/>
-              <a:t>Negative-control policy</a:t>
-            </a:r>
-            <a:r>
-              <a:rPr/>
-              <a:t> — when the NZV filter prunes prespecified NCs, re-elicit before unblinding or accept a narrower panel and document?</a:t>
-            </a:r>
-          </a:p>
-          <a:p>
-            <a:pPr lvl="0" indent="-342900" marL="342900">
-              <a:buAutoNum type="arabicPeriod"/>
-            </a:pPr>
-            <a:r>
-              <a:rPr b="1"/>
-              <a:t>Publication venue</a:t>
-            </a:r>
-            <a:r>
-              <a:rPr/>
-              <a:t> — </a:t>
-            </a:r>
-            <a:r>
-              <a:rPr>
-                <a:latin typeface="Courier"/>
-              </a:rPr>
-              <a:t>Epidemiology</a:t>
-            </a:r>
-            <a:r>
-              <a:rPr/>
-              <a:t>, </a:t>
-            </a:r>
-            <a:r>
-              <a:rPr>
-                <a:latin typeface="Courier"/>
-              </a:rPr>
-              <a:t>Stat Med</a:t>
-            </a:r>
-            <a:r>
-              <a:rPr/>
-              <a:t>, </a:t>
-            </a:r>
-            <a:r>
-              <a:rPr>
-                <a:latin typeface="Courier"/>
-              </a:rPr>
-              <a:t>Biometrics</a:t>
-            </a:r>
-            <a:r>
-              <a:rPr/>
-              <a:t>, or an RWE-specific venue?</a:t>
-            </a:r>
-          </a:p>
-        </p:txBody>
-      </p:sp>
-    </p:spTree>
-  </p:cSld>
-</p:sld>
-</file>
-
-<file path=ppt/slides/slide45.xml><?xml version="1.0" encoding="utf-8"?>
-<p:sld xmlns:a="http://schemas.openxmlformats.org/drawingml/2006/main" xmlns:r="http://schemas.openxmlformats.org/officeDocument/2006/relationships" xmlns:p="http://schemas.openxmlformats.org/presentationml/2006/main">
-  <p:cSld>
-    <p:spTree>
-      <p:nvGrpSpPr>
-        <p:cNvPr id="1" name=""/>
-        <p:cNvGrpSpPr/>
-        <p:nvPr/>
-      </p:nvGrpSpPr>
-      <p:grpSpPr>
-        <a:xfrm>
-          <a:off x="0" y="0"/>
-          <a:ext cx="0" cy="0"/>
-          <a:chOff x="0" y="0"/>
-          <a:chExt cx="0" cy="0"/>
-        </a:xfrm>
-      </p:grpSpPr>
-      <p:sp>
-        <p:nvSpPr>
-          <p:cNvPr id="2" name="Title 1"/>
-          <p:cNvSpPr>
-            <a:spLocks noGrp="1"/>
-          </p:cNvSpPr>
-          <p:nvPr>
-            <p:ph type="title"/>
-          </p:nvPr>
-        </p:nvSpPr>
-        <p:spPr/>
-        <p:txBody>
-          <a:bodyPr/>
-          <a:lstStyle/>
-          <a:p>
-            <a:pPr lvl="0" indent="0" marL="0">
-              <a:buNone/>
-            </a:pPr>
-            <a:r>
-              <a:rPr/>
               <a:t>Resources</a:t>
             </a:r>
           </a:p>
@@ -8401,58 +8208,6 @@
 </file>
 
 <file path=ppt/slides/slide5.xml><?xml version="1.0" encoding="utf-8"?>
-<p:sld xmlns:a="http://schemas.openxmlformats.org/drawingml/2006/main" xmlns:r="http://schemas.openxmlformats.org/officeDocument/2006/relationships" xmlns:p="http://schemas.openxmlformats.org/presentationml/2006/main">
-  <p:cSld>
-    <p:spTree>
-      <p:nvGrpSpPr>
-        <p:cNvPr id="1" name=""/>
-        <p:cNvGrpSpPr/>
-        <p:nvPr/>
-      </p:nvGrpSpPr>
-      <p:grpSpPr>
-        <a:xfrm>
-          <a:off x="0" y="0"/>
-          <a:ext cx="0" cy="0"/>
-          <a:chOff x="0" y="0"/>
-          <a:chExt cx="0" cy="0"/>
-        </a:xfrm>
-      </p:grpSpPr>
-      <p:sp>
-        <p:nvSpPr>
-          <p:cNvPr id="2" name="Title 1"/>
-          <p:cNvSpPr>
-            <a:spLocks noGrp="1"/>
-          </p:cNvSpPr>
-          <p:nvPr>
-            <p:ph type="title"/>
-          </p:nvPr>
-        </p:nvSpPr>
-        <p:spPr>
-          <a:xfrm>
-            <a:off x="722313" y="3305176"/>
-            <a:ext cx="7772400" cy="1021556"/>
-          </a:xfrm>
-        </p:spPr>
-        <p:txBody>
-          <a:bodyPr/>
-          <a:lstStyle/>
-          <a:p>
-            <a:pPr lvl="0" indent="0" marL="0">
-              <a:buNone/>
-            </a:pPr>
-            <a:r>
-              <a:rPr/>
-              <a:t>Motivation</a:t>
-            </a:r>
-          </a:p>
-        </p:txBody>
-      </p:sp>
-    </p:spTree>
-  </p:cSld>
-</p:sld>
-</file>
-
-<file path=ppt/slides/slide6.xml><?xml version="1.0" encoding="utf-8"?>
 <p:sld xmlns:a="http://schemas.openxmlformats.org/drawingml/2006/main" xmlns:r="http://schemas.openxmlformats.org/officeDocument/2006/relationships" xmlns:p="http://schemas.openxmlformats.org/presentationml/2006/main">
   <p:cSld>
     <p:spTree>
@@ -8860,6 +8615,53 @@
 </p:sld>
 </file>
 
+<file path=ppt/slides/slide6.xml><?xml version="1.0" encoding="utf-8"?>
+<p:sld xmlns:a="http://schemas.openxmlformats.org/drawingml/2006/main" xmlns:r="http://schemas.openxmlformats.org/officeDocument/2006/relationships" xmlns:p="http://schemas.openxmlformats.org/presentationml/2006/main">
+  <p:cSld>
+    <p:spTree>
+      <p:nvGrpSpPr>
+        <p:cNvPr id="1" name=""/>
+        <p:cNvGrpSpPr/>
+        <p:nvPr/>
+      </p:nvGrpSpPr>
+      <p:grpSpPr>
+        <a:xfrm>
+          <a:off x="0" y="0"/>
+          <a:ext cx="0" cy="0"/>
+          <a:chOff x="0" y="0"/>
+          <a:chExt cx="0" cy="0"/>
+        </a:xfrm>
+      </p:grpSpPr>
+      <p:sp>
+        <p:nvSpPr>
+          <p:cNvPr id="3" name="Content Placeholder 2"/>
+          <p:cNvSpPr>
+            <a:spLocks noGrp="1"/>
+          </p:cNvSpPr>
+          <p:nvPr>
+            <p:ph idx="1"/>
+          </p:nvPr>
+        </p:nvSpPr>
+        <p:spPr/>
+        <p:txBody>
+          <a:bodyPr/>
+          <a:lstStyle/>
+          <a:p>
+            <a:pPr lvl="0" indent="0" marL="0">
+              <a:buNone/>
+            </a:pPr>
+            <a:r>
+              <a:rPr/>
+              <a:t>The contribution is operational, not a new estimator.</a:t>
+            </a:r>
+          </a:p>
+        </p:txBody>
+      </p:sp>
+    </p:spTree>
+  </p:cSld>
+</p:sld>
+</file>
+
 <file path=ppt/slides/slide7.xml><?xml version="1.0" encoding="utf-8"?>
 <p:sld xmlns:a="http://schemas.openxmlformats.org/drawingml/2006/main" xmlns:r="http://schemas.openxmlformats.org/officeDocument/2006/relationships" xmlns:p="http://schemas.openxmlformats.org/presentationml/2006/main">
   <p:cSld>
@@ -8879,6 +8681,31 @@
       </p:grpSpPr>
       <p:sp>
         <p:nvSpPr>
+          <p:cNvPr id="2" name="Title 1"/>
+          <p:cNvSpPr>
+            <a:spLocks noGrp="1"/>
+          </p:cNvSpPr>
+          <p:nvPr>
+            <p:ph type="title"/>
+          </p:nvPr>
+        </p:nvSpPr>
+        <p:spPr/>
+        <p:txBody>
+          <a:bodyPr/>
+          <a:lstStyle/>
+          <a:p>
+            <a:pPr lvl="0" indent="0" marL="0">
+              <a:buNone/>
+            </a:pPr>
+            <a:r>
+              <a:rPr/>
+              <a:t>Why clean-room / staged design?</a:t>
+            </a:r>
+          </a:p>
+        </p:txBody>
+      </p:sp>
+      <p:sp>
+        <p:nvSpPr>
           <p:cNvPr id="3" name="Content Placeholder 2"/>
           <p:cNvSpPr>
             <a:spLocks noGrp="1"/>
@@ -8892,12 +8719,63 @@
           <a:bodyPr/>
           <a:lstStyle/>
           <a:p>
-            <a:pPr lvl="0" indent="0" marL="0">
-              <a:buNone/>
-            </a:pPr>
-            <a:r>
-              <a:rPr/>
-              <a:t>The contribution is operational, not a new estimator.</a:t>
+            <a:pPr lvl="0"/>
+            <a:r>
+              <a:rPr/>
+              <a:t>The Muntner-style clean room is </a:t>
+            </a:r>
+            <a:r>
+              <a:rPr b="1"/>
+              <a:t>broader than software</a:t>
+            </a:r>
+            <a:r>
+              <a:rPr/>
+              <a:t>: role separation, staged access, checkpoint review, audit trail, deviation policy</a:t>
+            </a:r>
+          </a:p>
+          <a:p>
+            <a:pPr lvl="0"/>
+            <a:r>
+              <a:rPr/>
+              <a:t>Its purpose is to protect against </a:t>
+            </a:r>
+            <a:r>
+              <a:rPr b="1"/>
+              <a:t>outcome-driven protocol drift</a:t>
+            </a:r>
+            <a:r>
+              <a:rPr/>
+              <a:t> — decisions revised after seeing the observed A→Y relationship</a:t>
+            </a:r>
+          </a:p>
+          <a:p>
+            <a:pPr lvl="0"/>
+            <a:r>
+              <a:rPr/>
+              <a:t>cleanTMLE implements the </a:t>
+            </a:r>
+            <a:r>
+              <a:rPr b="1"/>
+              <a:t>software layer</a:t>
+            </a:r>
+            <a:r>
+              <a:rPr/>
+              <a:t> of that arrangement: lock, audit, decision logs, internal outcome-access checks</a:t>
+            </a:r>
+          </a:p>
+          <a:p>
+            <a:pPr lvl="0"/>
+            <a:r>
+              <a:rPr/>
+              <a:t>Personnel-based clean rooms and simulation-mediated blinding are </a:t>
+            </a:r>
+            <a:r>
+              <a:rPr b="1"/>
+              <a:t>complementary</a:t>
+            </a:r>
+            <a:r>
+              <a:rPr/>
+              <a:t>: high-stakes studies should embed cleanTMLE inside a personnel-based clean-room arrangement</a:t>
             </a:r>
           </a:p>
         </p:txBody>
@@ -8944,7 +8822,7 @@
             </a:pPr>
             <a:r>
               <a:rPr/>
-              <a:t>Why clean-room / staged design?</a:t>
+              <a:t>Why TMLE?</a:t>
             </a:r>
           </a:p>
         </p:txBody>
@@ -8967,60 +8845,59 @@
             <a:pPr lvl="0"/>
             <a:r>
               <a:rPr/>
-              <a:t>The Muntner-style clean room is </a:t>
+              <a:t>The analyst can </a:t>
             </a:r>
             <a:r>
               <a:rPr b="1"/>
-              <a:t>broader than software</a:t>
-            </a:r>
-            <a:r>
-              <a:rPr/>
-              <a:t>: role separation, staged access, checkpoint review, audit trail, deviation policy</a:t>
-            </a:r>
-          </a:p>
-          <a:p>
-            <a:pPr lvl="0"/>
-            <a:r>
-              <a:rPr/>
-              <a:t>Its purpose is to protect against </a:t>
+              <a:t>prespecify</a:t>
+            </a:r>
+            <a:r>
+              <a:rPr/>
+              <a:t> the estimand, nuisance-learning library, truncation rules, targeting procedure, and candidate estimator grid</a:t>
+            </a:r>
+          </a:p>
+          <a:p>
+            <a:pPr lvl="0"/>
+            <a:r>
+              <a:rPr/>
+              <a:t>Nuisance estimation </a:t>
             </a:r>
             <a:r>
               <a:rPr b="1"/>
-              <a:t>outcome-driven protocol drift</a:t>
-            </a:r>
-            <a:r>
-              <a:rPr/>
-              <a:t> — decisions revised after seeing the observed A→Y relationship</a:t>
-            </a:r>
-          </a:p>
-          <a:p>
-            <a:pPr lvl="0"/>
-            <a:r>
-              <a:rPr/>
-              <a:t>cleanTMLE implements the </a:t>
+              <a:t>remains adaptive</a:t>
+            </a:r>
+            <a:r>
+              <a:rPr/>
+              <a:t> (SuperLearner) under the prespecified library</a:t>
+            </a:r>
+          </a:p>
+          <a:p>
+            <a:pPr lvl="0"/>
+            <a:r>
+              <a:rPr/>
+              <a:t>Candidates can be compared </a:t>
             </a:r>
             <a:r>
               <a:rPr b="1"/>
-              <a:t>software layer</a:t>
-            </a:r>
-            <a:r>
-              <a:rPr/>
-              <a:t> of that arrangement: lock, audit, decision logs, internal outcome-access checks</a:t>
-            </a:r>
-          </a:p>
-          <a:p>
-            <a:pPr lvl="0"/>
-            <a:r>
-              <a:rPr/>
-              <a:t>Personnel-based clean rooms and simulation-mediated blinding are </a:t>
-            </a:r>
+              <a:t>under a common target parameter</a:t>
+            </a:r>
+          </a:p>
+          <a:p>
+            <a:pPr lvl="0"/>
             <a:r>
               <a:rPr b="1"/>
-              <a:t>complementary</a:t>
-            </a:r>
-            <a:r>
-              <a:rPr/>
-              <a:t>: high-stakes studies should embed cleanTMLE inside a personnel-based clean-room arrangement</a:t>
+              <a:t>Influence-function-based inference</a:t>
+            </a:r>
+            <a:r>
+              <a:rPr/>
+              <a:t> gives a common bias / RMSE / coverage scale across candidates and across stress scenarios</a:t>
+            </a:r>
+          </a:p>
+          <a:p>
+            <a:pPr lvl="0"/>
+            <a:r>
+              <a:rPr/>
+              <a:t>This modular structure makes outcome-blind plasmode comparison and DQ stress testing natural; the same machinery runs on baseline plasmode and degraded scenarios</a:t>
             </a:r>
           </a:p>
         </p:txBody>
@@ -9067,7 +8944,7 @@
             </a:pPr>
             <a:r>
               <a:rPr/>
-              <a:t>Why TMLE?</a:t>
+              <a:t>Why plasmode simulation?</a:t>
             </a:r>
           </a:p>
         </p:txBody>
@@ -9090,59 +8967,48 @@
             <a:pPr lvl="0"/>
             <a:r>
               <a:rPr/>
-              <a:t>The analyst can </a:t>
+              <a:t>PS diagnostics evaluate </a:t>
             </a:r>
             <a:r>
               <a:rPr b="1"/>
-              <a:t>prespecify</a:t>
-            </a:r>
-            <a:r>
-              <a:rPr/>
-              <a:t> the estimand, nuisance-learning library, truncation rules, targeting procedure, and candidate estimator grid</a:t>
-            </a:r>
-          </a:p>
-          <a:p>
-            <a:pPr lvl="0"/>
-            <a:r>
-              <a:rPr/>
-              <a:t>Nuisance estimation </a:t>
+              <a:t>design feasibility</a:t>
+            </a:r>
+            <a:r>
+              <a:rPr/>
+              <a:t> (overlap, balance, ESS, SMDs), not estimator operating characteristics</a:t>
+            </a:r>
+          </a:p>
+          <a:p>
+            <a:pPr lvl="0"/>
+            <a:r>
+              <a:rPr/>
+              <a:t>Plasmode simulation uses the </a:t>
             </a:r>
             <a:r>
               <a:rPr b="1"/>
-              <a:t>remains adaptive</a:t>
-            </a:r>
-            <a:r>
-              <a:rPr/>
-              <a:t> (SuperLearner) under the prespecified library</a:t>
-            </a:r>
-          </a:p>
-          <a:p>
-            <a:pPr lvl="0"/>
-            <a:r>
-              <a:rPr/>
-              <a:t>Candidates can be compared </a:t>
-            </a:r>
+              <a:t>empirical (W, A) structure</a:t>
+            </a:r>
+            <a:r>
+              <a:rPr/>
+              <a:t> with a synthetic Y to compare candidate estimators on bias, RMSE, and coverage</a:t>
+            </a:r>
+          </a:p>
+          <a:p>
+            <a:pPr lvl="0"/>
+            <a:r>
+              <a:rPr/>
+              <a:t>Done before primary outcome access, it supports candidate selection without inspecting the observed A→Y association</a:t>
+            </a:r>
+          </a:p>
+          <a:p>
+            <a:pPr lvl="0"/>
             <a:r>
               <a:rPr b="1"/>
-              <a:t>under a common target parameter</a:t>
-            </a:r>
-          </a:p>
-          <a:p>
-            <a:pPr lvl="0"/>
-            <a:r>
-              <a:rPr b="1"/>
-              <a:t>Influence-function-based inference</a:t>
-            </a:r>
-            <a:r>
-              <a:rPr/>
-              <a:t> gives a common bias / RMSE / coverage scale across candidates and across stress scenarios</a:t>
-            </a:r>
-          </a:p>
-          <a:p>
-            <a:pPr lvl="0"/>
-            <a:r>
-              <a:rPr/>
-              <a:t>This modular structure makes outcome-blind plasmode comparison and DQ stress testing natural; the same machinery runs on baseline plasmode and degraded scenarios</a:t>
+              <a:t>Caveat:</a:t>
+            </a:r>
+            <a:r>
+              <a:rPr/>
+              <a:t> rankings under synthetic outcomes are not guaranteed to generalize to the realized outcome process — the synthetic-outcome mechanism is itself an assumption</a:t>
             </a:r>
           </a:p>
         </p:txBody>

--- a/reports/cleanTMLE_presentation.pptx
+++ b/reports/cleanTMLE_presentation.pptx
@@ -8853,7 +8853,7 @@
             </a:r>
             <a:r>
               <a:rPr/>
-              <a:t> the estimand, nuisance-learning library, truncation rules, targeting procedure, and candidate estimator grid</a:t>
+              <a:t> the estimand, SuperLearner library, truncation rule, targeting procedure, and candidate estimator grid before outcome access</a:t>
             </a:r>
           </a:p>
           <a:p>
@@ -8868,7 +8868,7 @@
             </a:r>
             <a:r>
               <a:rPr/>
-              <a:t> (SuperLearner) under the prespecified library</a:t>
+              <a:t> under the prespecified library</a:t>
             </a:r>
           </a:p>
           <a:p>
@@ -8881,23 +8881,27 @@
               <a:rPr b="1"/>
               <a:t>under a common target parameter</a:t>
             </a:r>
+            <a:r>
+              <a:rPr/>
+              <a:t> on an influence-function-based bias / RMSE / coverage scale</a:t>
+            </a:r>
           </a:p>
           <a:p>
             <a:pPr lvl="0"/>
             <a:r>
               <a:rPr b="1"/>
-              <a:t>Influence-function-based inference</a:t>
-            </a:r>
-            <a:r>
-              <a:rPr/>
-              <a:t> gives a common bias / RMSE / coverage scale across candidates and across stress scenarios</a:t>
-            </a:r>
-          </a:p>
-          <a:p>
-            <a:pPr lvl="0"/>
-            <a:r>
-              <a:rPr/>
-              <a:t>This modular structure makes outcome-blind plasmode comparison and DQ stress testing natural; the same machinery runs on baseline plasmode and degraded scenarios</a:t>
+              <a:t>Truncation is an estimand choice, not only a tuning knob:</a:t>
+            </a:r>
+            <a:r>
+              <a:rPr/>
+              <a:t> different truncation levels imply different effective target populations, so candidates are paired estimator-and-estimand objects</a:t>
+            </a:r>
+          </a:p>
+          <a:p>
+            <a:pPr lvl="0"/>
+            <a:r>
+              <a:rPr/>
+              <a:t>The same machinery runs on baseline plasmode and on stress scenarios</a:t>
             </a:r>
           </a:p>
         </p:txBody>

--- a/reports/cleanTMLE_presentation.pptx
+++ b/reports/cleanTMLE_presentation.pptx
@@ -3219,7 +3219,7 @@
             </a:pPr>
             <a:r>
               <a:rPr/>
-              <a:t>2026-05-10</a:t>
+              <a:t>2026-05-11</a:t>
             </a:r>
           </a:p>
         </p:txBody>
@@ -5515,7 +5515,7 @@
                 <a:pPr lvl="0"/>
                 <a:r>
                   <a:rPr/>
-                  <a:t>Six estimators: Crude, IPTW, Match, G-comp, AIPW, TMLE, CV-TMLE</a:t>
+                  <a:t>Six estimators: Crude, IPTW, PS Match, TMLE, TMLE_CF (CV-TMLE), Match_TMLE</a:t>
                 </a:r>
               </a:p>
               <a:p>

--- a/reports/cleanTMLE_presentation.pptx
+++ b/reports/cleanTMLE_presentation.pptx
@@ -3857,6 +3857,27 @@
           <a:p>
             <a:pPr lvl="0"/>
             <a:r>
+              <a:rPr b="1"/>
+              <a:t>Cohort attrition ledger</a:t>
+            </a:r>
+            <a:r>
+              <a:rPr/>
+              <a:t> (</a:t>
+            </a:r>
+            <a:r>
+              <a:rPr>
+                <a:latin typeface="Courier"/>
+              </a:rPr>
+              <a:t>attrition_table()</a:t>
+            </a:r>
+            <a:r>
+              <a:rPr/>
+              <a:t>) for a code-level CONSORT-style flow</a:t>
+            </a:r>
+          </a:p>
+          <a:p>
+            <a:pPr lvl="0"/>
+            <a:r>
               <a:rPr/>
               <a:t>Modular </a:t>
             </a:r>
@@ -3867,6 +3888,64 @@
             <a:r>
               <a:rPr/>
               <a:t>: treatment fit, outcome fit, targeting, extract</a:t>
+            </a:r>
+          </a:p>
+          <a:p>
+            <a:pPr lvl="0"/>
+            <a:r>
+              <a:rPr b="1"/>
+              <a:t>Estimator spectrum</a:t>
+            </a:r>
+            <a:r>
+              <a:rPr/>
+              <a:t> for the binary RD scope: IPTW (stabilised), g-computation (</a:t>
+            </a:r>
+            <a:r>
+              <a:rPr>
+                <a:latin typeface="Courier"/>
+              </a:rPr>
+              <a:t>estimate_gcomprisk()</a:t>
+            </a:r>
+            <a:r>
+              <a:rPr/>
+              <a:t>), AIPW (</a:t>
+            </a:r>
+            <a:r>
+              <a:rPr>
+                <a:latin typeface="Courier"/>
+              </a:rPr>
+              <a:t>estimate_aipwrisk()</a:t>
+            </a:r>
+            <a:r>
+              <a:rPr/>
+              <a:t>), TMLE, IPCW-TMLE (</a:t>
+            </a:r>
+            <a:r>
+              <a:rPr>
+                <a:latin typeface="Courier"/>
+              </a:rPr>
+              <a:t>run_ipcw_tmle()</a:t>
+            </a:r>
+            <a:r>
+              <a:rPr/>
+              <a:t>)</a:t>
+            </a:r>
+          </a:p>
+          <a:p>
+            <a:pPr lvl="0"/>
+            <a:r>
+              <a:rPr/>
+              <a:t>IPW Cox-style hazard ratio (</a:t>
+            </a:r>
+            <a:r>
+              <a:rPr>
+                <a:latin typeface="Courier"/>
+              </a:rPr>
+              <a:t>estimate_ipwhr()</a:t>
+            </a:r>
+            <a:r>
+              <a:rPr/>
+              <a:t>) for analyses where a hazard-scale estimand is the primary scientific question</a:t>
             </a:r>
           </a:p>
           <a:p>
@@ -7064,7 +7143,7 @@
                       </a:pPr>
                       <a:r>
                         <a:rPr/>
-                        <a:t>IPCW-weighted TMLE</a:t>
+                        <a:t>Complete-outcome TMLE w/ IPCW weights</a:t>
                       </a:r>
                     </a:p>
                   </a:txBody>
@@ -7079,7 +7158,7 @@
                       </a:pPr>
                       <a:r>
                         <a:rPr/>
-                        <a:t>Full cohort under censoring model</a:t>
+                        <a:t>Complete-outcome rows, weighted to full-cohort target</a:t>
                       </a:r>
                     </a:p>
                   </a:txBody>

--- a/reports/cleanTMLE_presentation.pptx
+++ b/reports/cleanTMLE_presentation.pptx
@@ -7760,7 +7760,7 @@
             <a:pPr lvl="0"/>
             <a:r>
               <a:rPr/>
-              <a:t>v0.1 scope: binary point exposure, binary outcome, marginal RD, MCAR outcome missingness handled by IPCW</a:t>
+              <a:t>v0.1 scope: binary point exposure, binary outcome, marginal RD; outcome missingness handled through complete-case and IPCW sensitivity paths under prespecified missingness assumptions</a:t>
             </a:r>
           </a:p>
           <a:p>

--- a/reports/cleanTMLE_presentation.pptx
+++ b/reports/cleanTMLE_presentation.pptx
@@ -49,6 +49,11 @@
     <p:sldId id="297" r:id="rId43"/>
     <p:sldId id="298" r:id="rId44"/>
     <p:sldId id="299" r:id="rId45"/>
+    <p:sldId id="300" r:id="rId46"/>
+    <p:sldId id="301" r:id="rId47"/>
+    <p:sldId id="302" r:id="rId48"/>
+    <p:sldId id="303" r:id="rId49"/>
+    <p:sldId id="304" r:id="rId50"/>
   </p:sldIdLst>
   <p:sldSz cx="9144000" cy="5143500" type="screen16x9"/>
   <p:notesSz cx="6858000" cy="9144000"/>
@@ -4761,12 +4766,7 @@
             <p:ph type="title"/>
           </p:nvPr>
         </p:nvSpPr>
-        <p:spPr>
-          <a:xfrm>
-            <a:off x="722313" y="3305176"/>
-            <a:ext cx="7772400" cy="1021556"/>
-          </a:xfrm>
-        </p:spPr>
+        <p:spPr/>
         <p:txBody>
           <a:bodyPr/>
           <a:lstStyle/>
@@ -4776,7 +4776,67 @@
             </a:pPr>
             <a:r>
               <a:rPr/>
-              <a:t>From qualitative DQ review to quantitative stress testing</a:t>
+              <a:t>Why preregistration is not enough for RWE execution</a:t>
+            </a:r>
+          </a:p>
+        </p:txBody>
+      </p:sp>
+      <p:sp>
+        <p:nvSpPr>
+          <p:cNvPr id="3" name="Content Placeholder 2"/>
+          <p:cNvSpPr>
+            <a:spLocks noGrp="1"/>
+          </p:cNvSpPr>
+          <p:nvPr>
+            <p:ph idx="1"/>
+          </p:nvPr>
+        </p:nvSpPr>
+        <p:spPr/>
+        <p:txBody>
+          <a:bodyPr/>
+          <a:lstStyle/>
+          <a:p>
+            <a:pPr lvl="0"/>
+            <a:r>
+              <a:rPr/>
+              <a:t>Data incompleteness and coding limitations emerge during implementation, not at protocol time</a:t>
+            </a:r>
+          </a:p>
+          <a:p>
+            <a:pPr lvl="0"/>
+            <a:r>
+              <a:rPr/>
+              <a:t>Sample size, event counts, covariate distributions, and model convergence affect which specifications are feasible</a:t>
+            </a:r>
+          </a:p>
+          <a:p>
+            <a:pPr lvl="0"/>
+            <a:r>
+              <a:rPr/>
+              <a:t>Decisions must therefore be made </a:t>
+            </a:r>
+            <a:r>
+              <a:rPr i="1"/>
+              <a:t>after</a:t>
+            </a:r>
+            <a:r>
+              <a:rPr/>
+              <a:t> data access but </a:t>
+            </a:r>
+            <a:r>
+              <a:rPr i="1"/>
+              <a:t>before</a:t>
+            </a:r>
+            <a:r>
+              <a:rPr/>
+              <a:t> comparative outcome results are inspected</a:t>
+            </a:r>
+          </a:p>
+          <a:p>
+            <a:pPr lvl="0"/>
+            <a:r>
+              <a:rPr/>
+              <a:t>cleanTMLE records those decisions in a decision log and gates the primary analysis behind authorisation</a:t>
             </a:r>
           </a:p>
         </p:txBody>
@@ -4823,7 +4883,7 @@
             </a:pPr>
             <a:r>
               <a:rPr/>
-              <a:t>The translation</a:t>
+              <a:t>Reviewer-facing pre-outcome dossier</a:t>
             </a:r>
           </a:p>
         </p:txBody>
@@ -4843,56 +4903,21 @@
           <a:bodyPr/>
           <a:lstStyle/>
           <a:p>
-            <a:pPr lvl="0"/>
-            <a:r>
-              <a:rPr b="1"/>
-              <a:t>Fit-for-purpose concern</a:t>
-            </a:r>
-            <a:r>
-              <a:rPr/>
-              <a:t> → exposure definition, outcome ascertainment, covariate completeness, unmeasured confounding</a:t>
-            </a:r>
-          </a:p>
-          <a:p>
-            <a:pPr lvl="0"/>
-            <a:r>
-              <a:rPr b="1"/>
-              <a:t>Plasmode input</a:t>
-            </a:r>
-            <a:r>
-              <a:rPr/>
-              <a:t> → (sens, spec), missingness fraction, latent U parameters</a:t>
-            </a:r>
-          </a:p>
-          <a:p>
-            <a:pPr lvl="0"/>
-            <a:r>
-              <a:rPr b="1"/>
-              <a:t>Output</a:t>
-            </a:r>
-            <a:r>
-              <a:rPr/>
-              <a:t> → bias, RMSE, coverage, type I error</a:t>
-            </a:r>
-          </a:p>
-          <a:p>
-            <a:pPr lvl="0"/>
-            <a:r>
-              <a:rPr b="1"/>
-              <a:t>Decision</a:t>
-            </a:r>
-            <a:r>
-              <a:rPr/>
-              <a:t> → GO / FLAG / STOP</a:t>
-            </a:r>
-          </a:p>
-          <a:p>
             <a:pPr lvl="0" indent="0" marL="0">
               <a:buNone/>
             </a:pPr>
             <a:r>
               <a:rPr/>
-              <a:t>The prespecified severity ranges turn qualitative DQ language into auditable numbers.</a:t>
+              <a:t>Protocol setup → cohort flow → event counts → overlap / balance → weights / ESS → baseline plasmode → DQ stress test → negative controls → GO / FLAG / STOP → authorisation.</a:t>
+            </a:r>
+          </a:p>
+          <a:p>
+            <a:pPr lvl="0" indent="0" marL="0">
+              <a:buNone/>
+            </a:pPr>
+            <a:r>
+              <a:rPr/>
+              <a:t>The dossier is the artefact the reviewer reads. Comparative treatment-outcome estimates are not part of the dossier and are produced only after authorisation.</a:t>
             </a:r>
           </a:p>
         </p:txBody>
@@ -5037,7 +5062,10 @@
 </p:sld>
 </file>
 
-<file path=ppt/slides/slide20.xml><?xml version="1.0" encoding="utf-8"?>
+<file path=ppt/slides/slide20.xml><?xml version="1.0" encoding="UTF-8"?><p:sld xmlns:a="http://schemas.openxmlformats.org/drawingml/2006/main" xmlns:r="http://schemas.openxmlformats.org/officeDocument/2006/relationships" xmlns:p="http://schemas.openxmlformats.org/presentationml/2006/main"><p:cSld><p:spTree><p:nvGrpSpPr><p:cNvPr id="1" name="" /><p:cNvGrpSpPr /><p:nvPr /></p:nvGrpSpPr><p:grpSpPr><a:xfrm><a:off x="0" y="0" /><a:ext cx="0" cy="0" /><a:chOff x="0" y="0" /><a:chExt cx="0" cy="0" /></a:xfrm></p:grpSpPr><p:sp><p:nvSpPr><p:cNvPr id="2" name="Title 1" /><p:cNvSpPr><a:spLocks noGrp="1" /></p:cNvSpPr><p:nvPr><p:ph type="title" /></p:nvPr></p:nvSpPr><p:spPr /><p:txBody><a:bodyPr /><a:lstStyle /><a:p><a:pPr lvl="0" indent="0" marL="0"><a:buNone /></a:pPr><a:r><a:rPr /><a:t>What the review team sees before authorisation</a:t></a:r></a:p></p:txBody></p:sp><p:graphicFrame><p:nvGraphicFramePr><p:cNvPr id="6" name="Content Placeholder 5" /><p:cNvGraphicFramePr><a:graphicFrameLocks noGrp="1" /></p:cNvGraphicFramePr><p:nvPr><p:ph idx="1" /></p:nvPr></p:nvGraphicFramePr><p:xfrm><a:off x="457200" y="1193800" /><a:ext cx="8229600" cy="3390900" /></p:xfrm><a:graphic><a:graphicData uri="http://schemas.openxmlformats.org/drawingml/2006/table"><a:tbl><a:tblPr firstRow="1" bandRow="1"><a:tableStyleId>{5C22544A-7EE6-4342-B048-85BDC9FD1C3A}</a:tableStyleId></a:tblPr><a:tblGrid><a:gridCol w="2743200" /><a:gridCol w="2743200" /><a:gridCol w="2743200" /></a:tblGrid><a:tr h="0"><a:tc><a:txBody><a:bodyPr /><a:lstStyle /><a:p><a:pPr lvl="0" indent="0" marL="0"><a:buNone /></a:pPr><a:r><a:rPr /><a:t>Summary outputs available</a:t></a:r></a:p></a:txBody><a:tcPr /></a:tc><a:tc><a:txBody><a:bodyPr /><a:lstStyle /><a:p><a:pPr lvl="0" indent="0" marL="0"><a:buNone /></a:pPr><a:r><a:rPr /><a:t>Not available</a:t></a:r></a:p></a:txBody><a:tcPr /></a:tc><a:tc><a:txBody><a:bodyPr /><a:lstStyle /><a:p><a:pPr lvl="0" indent="0" marL="0"><a:buNone /></a:pPr><a:r><a:rPr /><a:t>Decision</a:t></a:r></a:p></a:txBody><a:tcPr /></a:tc></a:tr><a:tr h="0"><a:tc><a:txBody><a:bodyPr /><a:lstStyle /><a:p><a:pPr lvl="0" indent="0" marL="0"><a:buNone /></a:pPr><a:r><a:rPr /><a:t>Cohort flow and attrition</a:t></a:r></a:p></a:txBody></a:tc><a:tc><a:txBody><a:bodyPr /><a:lstStyle /><a:p><a:pPr lvl="0" indent="0" marL="0"><a:buNone /></a:pPr><a:r><a:rPr /><a:t>The observed primary </a:t></a:r><a14:m><m:oMath xmlns:m="http://schemas.openxmlformats.org/officeDocument/2006/math"><m:r><m:t>A</m:t></m:r><m:r><m:rPr><m:sty m:val="p" /></m:rPr><m:t>→</m:t></m:r><m:r><m:t>Y</m:t></m:r></m:oMath></a14:m><a:r><a:rPr /><a:t> association</a:t></a:r></a:p></a:txBody></a:tc><a:tc><a:txBody><a:bodyPr /><a:lstStyle /><a:p><a:pPr lvl="0" indent="0" marL="0"><a:buNone /></a:pPr><a:r><a:rPr /><a:t>Proceed (GO)</a:t></a:r></a:p></a:txBody></a:tc></a:tr><a:tr h="0"><a:tc><a:txBody><a:bodyPr /><a:lstStyle /><a:p><a:pPr lvl="0" indent="0" marL="0"><a:buNone /></a:pPr><a:r><a:rPr /><a:t>Event counts and adequacy</a:t></a:r></a:p></a:txBody></a:tc><a:tc><a:txBody><a:bodyPr /><a:lstStyle /><a:p><a:pPr lvl="0" indent="0" marL="0"><a:buNone /></a:pPr><a:r><a:rPr /><a:t>Primary comparative estimate</a:t></a:r></a:p></a:txBody></a:tc><a:tc><a:txBody><a:bodyPr /><a:lstStyle /><a:p><a:pPr lvl="0" indent="0" marL="0"><a:buNone /></a:pPr><a:r><a:rPr /><a:t>Revise / qualify (FLAG)</a:t></a:r></a:p></a:txBody></a:tc></a:tr><a:tr h="0"><a:tc><a:txBody><a:bodyPr /><a:lstStyle /><a:p><a:pPr lvl="0" indent="0" marL="0"><a:buNone /></a:pPr><a:r><a:rPr /><a:t>Missingness summary</a:t></a:r></a:p></a:txBody></a:tc><a:tc><a:txBody><a:bodyPr /><a:lstStyle /><a:p><a:endParaRPr /></a:p></a:txBody></a:tc><a:tc><a:txBody><a:bodyPr /><a:lstStyle /><a:p><a:pPr lvl="0" indent="0" marL="0"><a:buNone /></a:pPr><a:r><a:rPr /><a:t>Stop</a:t></a:r></a:p></a:txBody></a:tc></a:tr><a:tr h="0"><a:tc><a:txBody><a:bodyPr /><a:lstStyle /><a:p><a:pPr lvl="0" indent="0" marL="0"><a:buNone /></a:pPr><a:r><a:rPr /><a:t>PS overlap and balance</a:t></a:r></a:p></a:txBody></a:tc><a:tc><a:txBody><a:bodyPr /><a:lstStyle /><a:p><a:endParaRPr /></a:p></a:txBody></a:tc><a:tc><a:txBody><a:bodyPr /><a:lstStyle /><a:p><a:endParaRPr /></a:p></a:txBody></a:tc></a:tr><a:tr h="0"><a:tc><a:txBody><a:bodyPr /><a:lstStyle /><a:p><a:pPr lvl="0" indent="0" marL="0"><a:buNone /></a:pPr><a:r><a:rPr /><a:t>Treatment and IPCW weight diagnostics, ESS</a:t></a:r></a:p></a:txBody></a:tc><a:tc><a:txBody><a:bodyPr /><a:lstStyle /><a:p><a:endParaRPr /></a:p></a:txBody></a:tc><a:tc><a:txBody><a:bodyPr /><a:lstStyle /><a:p><a:endParaRPr /></a:p></a:txBody></a:tc></a:tr><a:tr h="0"><a:tc><a:txBody><a:bodyPr /><a:lstStyle /><a:p><a:pPr lvl="0" indent="0" marL="0"><a:buNone /></a:pPr><a:r><a:rPr /><a:t>Model-convergence diagnostics</a:t></a:r></a:p></a:txBody></a:tc><a:tc><a:txBody><a:bodyPr /><a:lstStyle /><a:p><a:endParaRPr /></a:p></a:txBody></a:tc><a:tc><a:txBody><a:bodyPr /><a:lstStyle /><a:p><a:endParaRPr /></a:p></a:txBody></a:tc></a:tr><a:tr h="0"><a:tc><a:txBody><a:bodyPr /><a:lstStyle /><a:p><a:pPr lvl="0" indent="0" marL="0"><a:buNone /></a:pPr><a:r><a:rPr /><a:t>Baseline plasmode / DQ stress diagnostics</a:t></a:r></a:p></a:txBody></a:tc><a:tc><a:txBody><a:bodyPr /><a:lstStyle /><a:p><a:endParaRPr /></a:p></a:txBody></a:tc><a:tc><a:txBody><a:bodyPr /><a:lstStyle /><a:p><a:endParaRPr /></a:p></a:txBody></a:tc></a:tr><a:tr h="0"><a:tc><a:txBody><a:bodyPr /><a:lstStyle /><a:p><a:pPr lvl="0" indent="0" marL="0"><a:buNone /></a:pPr><a:r><a:rPr /><a:t>Negative-control results</a:t></a:r></a:p></a:txBody></a:tc><a:tc><a:txBody><a:bodyPr /><a:lstStyle /><a:p><a:endParaRPr /></a:p></a:txBody></a:tc><a:tc><a:txBody><a:bodyPr /><a:lstStyle /><a:p><a:endParaRPr /></a:p></a:txBody></a:tc></a:tr></a:tbl></a:graphicData></a:graphic></p:graphicFrame></p:spTree></p:cSld></p:sld>
+</file>
+
+<file path=ppt/slides/slide21.xml><?xml version="1.0" encoding="utf-8"?>
 <p:sld xmlns:a="http://schemas.openxmlformats.org/drawingml/2006/main" xmlns:r="http://schemas.openxmlformats.org/officeDocument/2006/relationships" xmlns:p="http://schemas.openxmlformats.org/presentationml/2006/main">
   <p:cSld>
     <p:spTree>
@@ -5074,7 +5102,7 @@
             </a:pPr>
             <a:r>
               <a:rPr/>
-              <a:t>The information loop</a:t>
+              <a:t>Gated execution</a:t>
             </a:r>
           </a:p>
         </p:txBody>
@@ -5094,57 +5122,47 @@
           <a:bodyPr/>
           <a:lstStyle/>
           <a:p>
-            <a:pPr lvl="0" indent="-342900" marL="342900">
-              <a:buAutoNum type="arabicPeriod"/>
+            <a:pPr lvl="0" indent="0" marL="0">
+              <a:buNone/>
             </a:pPr>
             <a:r>
-              <a:rPr/>
-              <a:t>Fit-for-purpose review identifies plausible threats.</a:t>
-            </a:r>
-          </a:p>
-          <a:p>
-            <a:pPr lvl="0" indent="-342900" marL="342900">
-              <a:buAutoNum type="arabicPeriod"/>
+              <a:rPr>
+                <a:latin typeface="Courier"/>
+              </a:rPr>
+              <a:t>checkpoint records complete</a:t>
+            </a:r>
+            <a:r>
+              <a:rPr/>
+              <a:t> → </a:t>
+            </a:r>
+            <a:r>
+              <a:rPr>
+                <a:latin typeface="Courier"/>
+              </a:rPr>
+              <a:t>authorisation object created</a:t>
+            </a:r>
+            <a:r>
+              <a:rPr/>
+              <a:t> → </a:t>
+            </a:r>
+            <a:r>
+              <a:rPr>
+                <a:latin typeface="Courier"/>
+              </a:rPr>
+              <a:t>primary-analysis function allowed</a:t>
+            </a:r>
+            <a:r>
+              <a:rPr/>
+              <a:t>.</a:t>
+            </a:r>
+          </a:p>
+          <a:p>
+            <a:pPr lvl="0" indent="0" marL="0">
+              <a:buNone/>
             </a:pPr>
             <a:r>
               <a:rPr/>
-              <a:t>Threats are translated into quantitative severity ranges.</a:t>
-            </a:r>
-          </a:p>
-          <a:p>
-            <a:pPr lvl="0" indent="-342900" marL="342900">
-              <a:buAutoNum type="arabicPeriod"/>
-            </a:pPr>
-            <a:r>
-              <a:rPr/>
-              <a:t>Severity ranges are locked before primary outcome access.</a:t>
-            </a:r>
-          </a:p>
-          <a:p>
-            <a:pPr lvl="0" indent="-342900" marL="342900">
-              <a:buAutoNum type="arabicPeriod"/>
-            </a:pPr>
-            <a:r>
-              <a:rPr/>
-              <a:t>Synthetic outcomes are generated and perturbed under each scenario.</a:t>
-            </a:r>
-          </a:p>
-          <a:p>
-            <a:pPr lvl="0" indent="-342900" marL="342900">
-              <a:buAutoNum type="arabicPeriod"/>
-            </a:pPr>
-            <a:r>
-              <a:rPr/>
-              <a:t>Candidate estimators are evaluated using the same metrics as the baseline plasmode.</a:t>
-            </a:r>
-          </a:p>
-          <a:p>
-            <a:pPr lvl="0" indent="-342900" marL="342900">
-              <a:buAutoNum type="arabicPeriod"/>
-            </a:pPr>
-            <a:r>
-              <a:rPr/>
-              <a:t>The prespecified GO / FLAG / STOP rule is applied.</a:t>
+              <a:t>The software gate complements external access control; it does not replace it. cleanTMLE cannot prevent a user with raw-data access from inspecting outcomes outside the package.</a:t>
             </a:r>
           </a:p>
         </p:txBody>
@@ -5154,54 +5172,7 @@
 </p:sld>
 </file>
 
-<file path=ppt/slides/slide21.xml><?xml version="1.0" encoding="UTF-8"?><p:sld xmlns:a="http://schemas.openxmlformats.org/drawingml/2006/main" xmlns:r="http://schemas.openxmlformats.org/officeDocument/2006/relationships" xmlns:p="http://schemas.openxmlformats.org/presentationml/2006/main"><p:cSld><p:spTree><p:nvGrpSpPr><p:cNvPr id="1" name="" /><p:cNvGrpSpPr /><p:nvPr /></p:nvGrpSpPr><p:grpSpPr><a:xfrm><a:off x="0" y="0" /><a:ext cx="0" cy="0" /><a:chOff x="0" y="0" /><a:chExt cx="0" cy="0" /></a:xfrm></p:grpSpPr><p:sp><p:nvSpPr><p:cNvPr id="2" name="Title 1" /><p:cNvSpPr><a:spLocks noGrp="1" /></p:cNvSpPr><p:nvPr><p:ph type="title" /></p:nvPr></p:nvSpPr><p:spPr /><p:txBody><a:bodyPr /><a:lstStyle /><a:p><a:pPr lvl="0" indent="0" marL="0"><a:buNone /></a:pPr><a:r><a:rPr /><a:t>Four prespecified threats</a:t></a:r></a:p></p:txBody></p:sp><p:graphicFrame><p:nvGraphicFramePr><p:cNvPr id="6" name="Content Placeholder 5" /><p:cNvGraphicFramePr><a:graphicFrameLocks noGrp="1" /></p:cNvGraphicFramePr><p:nvPr><p:ph idx="1" /></p:nvPr></p:nvGraphicFramePr><p:xfrm><a:off x="457200" y="1193800" /><a:ext cx="8229600" cy="3390900" /></p:xfrm><a:graphic><a:graphicData uri="http://schemas.openxmlformats.org/drawingml/2006/table"><a:tbl><a:tblPr firstRow="1" bandRow="1"><a:tableStyleId>{5C22544A-7EE6-4342-B048-85BDC9FD1C3A}</a:tableStyleId></a:tblPr><a:tblGrid><a:gridCol w="2438400" /><a:gridCol w="3581400" /><a:gridCol w="2197100" /></a:tblGrid><a:tr h="0"><a:tc><a:txBody><a:bodyPr /><a:lstStyle /><a:p><a:pPr lvl="0" indent="0" marL="0"><a:buNone /></a:pPr><a:r><a:rPr /><a:t>Threat</a:t></a:r></a:p></a:txBody><a:tcPr /></a:tc><a:tc><a:txBody><a:bodyPr /><a:lstStyle /><a:p><a:pPr lvl="0" indent="0" marL="0"><a:buNone /></a:pPr><a:r><a:rPr /><a:t>Mechanism</a:t></a:r></a:p></a:txBody><a:tcPr /></a:tc><a:tc><a:txBody><a:bodyPr /><a:lstStyle /><a:p><a:pPr lvl="0" indent="0" marL="0"><a:buNone /></a:pPr><a:r><a:rPr /><a:t>Severity parameters</a:t></a:r></a:p></a:txBody><a:tcPr /></a:tc></a:tr><a:tr h="0"><a:tc><a:txBody><a:bodyPr /><a:lstStyle /><a:p><a:pPr lvl="0" indent="0" marL="0"><a:buNone /></a:pPr><a:r><a:rPr /><a:t>Covariate missingness</a:t></a:r></a:p></a:txBody></a:tc><a:tc><a:txBody><a:bodyPr /><a:lstStyle /><a:p><a:pPr lvl="0" indent="0" marL="0"><a:buNone /></a:pPr><a:r><a:rPr /><a:t>MCAR on a covariate subset, median impute</a:t></a:r></a:p></a:txBody></a:tc><a:tc><a:txBody><a:bodyPr /><a:lstStyle /><a:p><a:pPr lvl="0" indent="0" marL="0"><a:buNone /></a:pPr><a:r><a:rPr /><a:t>proportion missing</a:t></a:r></a:p></a:txBody></a:tc></a:tr><a:tr h="0"><a:tc><a:txBody><a:bodyPr /><a:lstStyle /><a:p><a:pPr lvl="0" indent="0" marL="0"><a:buNone /></a:pPr><a:r><a:rPr /><a:t>Exposure misclassification</a:t></a:r></a:p></a:txBody></a:tc><a:tc><a:txBody><a:bodyPr /><a:lstStyle /><a:p><a:pPr lvl="0" indent="0" marL="0"><a:buNone /></a:pPr><a:r><a:rPr /><a:t>Flip A with given (sens, spec)</a:t></a:r></a:p></a:txBody></a:tc><a:tc><a:txBody><a:bodyPr /><a:lstStyle /><a:p><a:pPr lvl="0" indent="0" marL="0"><a:buNone /></a:pPr><a:r><a:rPr /><a:t>(sens, spec) pairs</a:t></a:r></a:p></a:txBody></a:tc></a:tr><a:tr h="0"><a:tc><a:txBody><a:bodyPr /><a:lstStyle /><a:p><a:pPr lvl="0" indent="0" marL="0"><a:buNone /></a:pPr><a:r><a:rPr /><a:t>Outcome misclassification</a:t></a:r></a:p></a:txBody></a:tc><a:tc><a:txBody><a:bodyPr /><a:lstStyle /><a:p><a:pPr lvl="0" indent="0" marL="0"><a:buNone /></a:pPr><a:r><a:rPr /><a:t>Flip Y with given (sens, spec), optional differential</a:t></a:r></a:p></a:txBody></a:tc><a:tc><a:txBody><a:bodyPr /><a:lstStyle /><a:p><a:pPr lvl="0" indent="0" marL="0"><a:buNone /></a:pPr><a:r><a:rPr /><a:t>(sens, spec) pairs</a:t></a:r></a:p></a:txBody></a:tc></a:tr><a:tr h="0"><a:tc><a:txBody><a:bodyPr /><a:lstStyle /><a:p><a:pPr lvl="0" indent="0" marL="0"><a:buNone /></a:pPr><a:r><a:rPr /><a:t>Unmeasured confounding</a:t></a:r></a:p></a:txBody></a:tc><a:tc><a:txBody><a:bodyPr /><a:lstStyle /><a:p><a:pPr lvl="0" indent="0" marL="0"><a:buNone /></a:pPr><a:r><a:rPr /><a:t>Latent U shifts both A and Y</a:t></a:r></a:p></a:txBody></a:tc><a:tc><a:txBody><a:bodyPr /><a:lstStyle /><a:p><a:pPr lvl="0" indent="0" marL="0"><a:buNone /></a:pPr><a14:m><m:oMath xmlns:m="http://schemas.openxmlformats.org/officeDocument/2006/math"><m:sSub><m:e><m:r><m:t>β</m:t></m:r></m:e><m:sub><m:r><m:t>U</m:t></m:r><m:r><m:t>A</m:t></m:r></m:sub></m:sSub></m:oMath></a14:m><a:r><a:rPr /><a:t>, </a:t></a:r><a14:m><m:oMath xmlns:m="http://schemas.openxmlformats.org/officeDocument/2006/math"><m:sSub><m:e><m:r><m:t>β</m:t></m:r></m:e><m:sub><m:r><m:t>U</m:t></m:r><m:r><m:t>Y</m:t></m:r></m:sub></m:sSub></m:oMath></a14:m></a:p></a:txBody></a:tc></a:tr></a:tbl></a:graphicData></a:graphic></p:graphicFrame></p:spTree></p:cSld></p:sld>
-</file>
-
-<file path=ppt/slides/slide22.xml><?xml version="1.0" encoding="utf-8"?>
-<p:sld xmlns:a="http://schemas.openxmlformats.org/drawingml/2006/main" xmlns:r="http://schemas.openxmlformats.org/officeDocument/2006/relationships" xmlns:p="http://schemas.openxmlformats.org/presentationml/2006/main">
-  <p:cSld>
-    <p:spTree>
-      <p:nvGrpSpPr>
-        <p:cNvPr id="1" name=""/>
-        <p:cNvGrpSpPr/>
-        <p:nvPr/>
-      </p:nvGrpSpPr>
-      <p:grpSpPr>
-        <a:xfrm>
-          <a:off x="0" y="0"/>
-          <a:ext cx="0" cy="0"/>
-          <a:chOff x="0" y="0"/>
-          <a:chExt cx="0" cy="0"/>
-        </a:xfrm>
-      </p:grpSpPr>
-      <p:sp>
-        <p:nvSpPr>
-          <p:cNvPr id="3" name="Content Placeholder 2"/>
-          <p:cNvSpPr>
-            <a:spLocks noGrp="1"/>
-          </p:cNvSpPr>
-          <p:nvPr>
-            <p:ph idx="1"/>
-          </p:nvPr>
-        </p:nvSpPr>
-        <p:spPr/>
-        <p:txBody>
-          <a:bodyPr/>
-          <a:lstStyle/>
-          <a:p>
-            <a:pPr lvl="0" indent="0" marL="0">
-              <a:buNone/>
-            </a:pPr>
-            <a:r>
-              <a:rPr/>
-              <a:t>Each cell reports the same triple as the baseline plasmode: bias, RMSE, coverage.</a:t>
-            </a:r>
-          </a:p>
-        </p:txBody>
-      </p:sp>
-    </p:spTree>
-  </p:cSld>
-</p:sld>
+<file path=ppt/slides/slide22.xml><?xml version="1.0" encoding="UTF-8"?><p:sld xmlns:a="http://schemas.openxmlformats.org/drawingml/2006/main" xmlns:r="http://schemas.openxmlformats.org/officeDocument/2006/relationships" xmlns:p="http://schemas.openxmlformats.org/presentationml/2006/main"><p:cSld><p:spTree><p:nvGrpSpPr><p:cNvPr id="1" name="" /><p:cNvGrpSpPr /><p:nvPr /></p:nvGrpSpPr><p:grpSpPr><a:xfrm><a:off x="0" y="0" /><a:ext cx="0" cy="0" /><a:chOff x="0" y="0" /><a:chExt cx="0" cy="0" /></a:xfrm></p:grpSpPr><p:sp><p:nvSpPr><p:cNvPr id="2" name="Title 1" /><p:cNvSpPr><a:spLocks noGrp="1" /></p:cNvSpPr><p:nvPr><p:ph type="title" /></p:nvPr></p:nvSpPr><p:spPr /><p:txBody><a:bodyPr /><a:lstStyle /><a:p><a:pPr lvl="0" indent="0" marL="0"><a:buNone /></a:pPr><a:r><a:rPr /><a:t>Case-study checkpoint dashboard</a:t></a:r></a:p></p:txBody></p:sp><p:graphicFrame><p:nvGraphicFramePr><p:cNvPr id="6" name="Content Placeholder 5" /><p:cNvGraphicFramePr><a:graphicFrameLocks noGrp="1" /></p:cNvGraphicFramePr><p:nvPr><p:ph idx="1" /></p:nvPr></p:nvGraphicFramePr><p:xfrm><a:off x="457200" y="1193800" /><a:ext cx="8229600" cy="3390900" /></p:xfrm><a:graphic><a:graphicData uri="http://schemas.openxmlformats.org/drawingml/2006/table"><a:tbl><a:tblPr firstRow="1" bandRow="1"><a:tableStyleId>{5C22544A-7EE6-4342-B048-85BDC9FD1C3A}</a:tableStyleId></a:tblPr><a:tblGrid><a:gridCol w="1511300" /><a:gridCol w="3390900" /><a:gridCol w="2806700" /><a:gridCol w="520700" /></a:tblGrid><a:tr h="0"><a:tc><a:txBody><a:bodyPr /><a:lstStyle /><a:p><a:pPr lvl="0" indent="0" marL="0"><a:buNone /></a:pPr><a:r><a:rPr /><a:t>Stage</a:t></a:r></a:p></a:txBody><a:tcPr /></a:tc><a:tc><a:txBody><a:bodyPr /><a:lstStyle /><a:p><a:pPr lvl="0" indent="0" marL="0"><a:buNone /></a:pPr><a:r><a:rPr /><a:t>Evidence</a:t></a:r></a:p></a:txBody><a:tcPr /></a:tc><a:tc><a:txBody><a:bodyPr /><a:lstStyle /><a:p><a:pPr lvl="0" indent="0" marL="0"><a:buNone /></a:pPr><a:r><a:rPr /><a:t>Threshold</a:t></a:r></a:p></a:txBody><a:tcPr /></a:tc><a:tc><a:txBody><a:bodyPr /><a:lstStyle /><a:p><a:pPr lvl="0" indent="0" marL="0" algn="ctr"><a:buNone /></a:pPr><a:r><a:rPr /><a:t>Decision</a:t></a:r></a:p></a:txBody><a:tcPr /></a:tc></a:tr><a:tr h="0"><a:tc><a:txBody><a:bodyPr /><a:lstStyle /><a:p><a:pPr lvl="0" indent="0" marL="0"><a:buNone /></a:pPr><a:r><a:rPr /><a:t>Stage 0 protocol/setup</a:t></a:r></a:p></a:txBody></a:tc><a:tc><a:txBody><a:bodyPr /><a:lstStyle /><a:p><a:pPr lvl="0" indent="0" marL="0"><a:buNone /></a:pPr><a:r><a:rPr /><a:t>Target-trial timing table, SAP, lock fingerprint</a:t></a:r></a:p></a:txBody></a:tc><a:tc><a:txBody><a:bodyPr /><a:lstStyle /><a:p><a:pPr lvl="0" indent="0" marL="0"><a:buNone /></a:pPr><a:r><a:rPr /><a:t>All design elements specified before data access</a:t></a:r></a:p></a:txBody></a:tc><a:tc><a:txBody><a:bodyPr /><a:lstStyle /><a:p><a:pPr lvl="0" indent="0" marL="0" algn="ctr"><a:buNone /></a:pPr><a:r><a:rPr /><a:t>GO</a:t></a:r></a:p></a:txBody></a:tc></a:tr><a:tr h="0"><a:tc><a:txBody><a:bodyPr /><a:lstStyle /><a:p><a:pPr lvl="0" indent="0" marL="0"><a:buNone /></a:pPr><a:r><a:rPr /><a:t>Stage 1b cohort adequacy</a:t></a:r></a:p></a:txBody></a:tc><a:tc><a:txBody><a:bodyPr /><a:lstStyle /><a:p><a:pPr lvl="0" indent="0" marL="0"><a:buNone /></a:pPr><a:r><a:rPr><a:latin typeface="Courier" /></a:rPr><a:t>checkpoint_cohort_adequacy()</a:t></a:r><a:r><a:rPr /><a:t>, attrition table</a:t></a:r></a:p></a:txBody></a:tc><a:tc><a:txBody><a:bodyPr /><a:lstStyle /><a:p><a:pPr lvl="0" indent="0" marL="0"><a:buNone /></a:pPr><a:r><a:rPr /><a:t>min_n_per_arm = 200; min_events = 50</a:t></a:r></a:p></a:txBody></a:tc><a:tc><a:txBody><a:bodyPr /><a:lstStyle /><a:p><a:pPr lvl="0" indent="0" marL="0" algn="ctr"><a:buNone /></a:pPr><a:r><a:rPr /><a:t>GO</a:t></a:r></a:p></a:txBody></a:tc></a:tr><a:tr h="0"><a:tc><a:txBody><a:bodyPr /><a:lstStyle /><a:p><a:pPr lvl="0" indent="0" marL="0"><a:buNone /></a:pPr><a:r><a:rPr /><a:t>Stage 2a overlap / balance</a:t></a:r></a:p></a:txBody></a:tc><a:tc><a:txBody><a:bodyPr /><a:lstStyle /><a:p><a:pPr lvl="0" indent="0" marL="0"><a:buNone /></a:pPr><a:r><a:rPr /><a:t>PS in [0.21, 0.81]; SMDs balanced; ESS retention 78 %</a:t></a:r></a:p></a:txBody></a:tc><a:tc><a:txBody><a:bodyPr /><a:lstStyle /><a:p><a:pPr lvl="0" indent="0" marL="0"><a:buNone /></a:pPr><a:r><a:rPr /><a:t>PS in [0.01, 0.99]; SMD &lt;= 0.10; max weight &lt;= 10</a:t></a:r></a:p></a:txBody></a:tc><a:tc><a:txBody><a:bodyPr /><a:lstStyle /><a:p><a:pPr lvl="0" indent="0" marL="0" algn="ctr"><a:buNone /></a:pPr><a:r><a:rPr /><a:t>GO</a:t></a:r></a:p></a:txBody></a:tc></a:tr><a:tr h="0"><a:tc><a:txBody><a:bodyPr /><a:lstStyle /><a:p><a:pPr lvl="0" indent="0" marL="0"><a:buNone /></a:pPr><a:r><a:rPr /><a:t>Stage 2b baseline plasmode</a:t></a:r></a:p></a:txBody></a:tc><a:tc><a:txBody><a:bodyPr /><a:lstStyle /><a:p><a:pPr lvl="0" indent="0" marL="0"><a:buNone /></a:pPr><a:r><a:rPr /><a:t>bias &lt; 0.001; coverage 0.94</a:t></a:r></a:p></a:txBody></a:tc><a:tc><a:txBody><a:bodyPr /><a:lstStyle /><a:p><a:pPr lvl="0" indent="0" marL="0"><a:buNone /></a:pPr><a:r><a:rPr /><a:t>bias &lt;= 0.01; coverage &gt;= 0.90; SE/SD in (0.8, 1.2)</a:t></a:r></a:p></a:txBody></a:tc><a:tc><a:txBody><a:bodyPr /><a:lstStyle /><a:p><a:pPr lvl="0" indent="0" marL="0" algn="ctr"><a:buNone /></a:pPr><a:r><a:rPr /><a:t>GO</a:t></a:r></a:p></a:txBody></a:tc></a:tr><a:tr h="0"><a:tc><a:txBody><a:bodyPr /><a:lstStyle /><a:p><a:pPr lvl="0" indent="0" marL="0"><a:buNone /></a:pPr><a:r><a:rPr /><a:t>Stage 2c DQ stress</a:t></a:r></a:p></a:txBody></a:tc><a:tc><a:txBody><a:bodyPr /><a:lstStyle /><a:p><a:pPr lvl="0" indent="0" marL="0"><a:buNone /></a:pPr><a:r><a:rPr /><a:t>Minimax rule selects </a:t></a:r><a:r><a:rPr><a:latin typeface="Courier" /></a:rPr><a:t>glm_t01</a:t></a:r></a:p></a:txBody></a:tc><a:tc><a:txBody><a:bodyPr /><a:lstStyle /><a:p><a:pPr lvl="0" indent="0" marL="0"><a:buNone /></a:pPr><a:r><a:rPr /><a:t>Each scenario within thresholds across severities</a:t></a:r></a:p></a:txBody></a:tc><a:tc><a:txBody><a:bodyPr /><a:lstStyle /><a:p><a:pPr lvl="0" indent="0" marL="0" algn="ctr"><a:buNone /></a:pPr><a:r><a:rPr /><a:t>GO</a:t></a:r></a:p></a:txBody></a:tc></a:tr><a:tr h="0"><a:tc><a:txBody><a:bodyPr /><a:lstStyle /><a:p><a:pPr lvl="0" indent="0" marL="0"><a:buNone /></a:pPr><a:r><a:rPr /><a:t>Stage 3 negative controls</a:t></a:r></a:p></a:txBody></a:tc><a:tc><a:txBody><a:bodyPr /><a:lstStyle /><a:p><a:pPr lvl="0" indent="0" marL="0"><a:buNone /></a:pPr><a:r><a:rPr /><a:t>2 of 5 NCs survived NZV; both pass</a:t></a:r></a:p></a:txBody></a:tc><a:tc><a:txBody><a:bodyPr /><a:lstStyle /><a:p><a:pPr lvl="0" indent="0" marL="0"><a:buNone /></a:pPr><a:r><a:rPr /><a:t>All analysed NCs pass at </a:t></a:r><a14:m><m:oMath xmlns:m="http://schemas.openxmlformats.org/officeDocument/2006/math"><m:r><m:t>α</m:t></m:r><m:r><m:rPr><m:sty m:val="p" /></m:rPr><m:t>=</m:t></m:r><m:r><m:t>0.05</m:t></m:r></m:oMath></a14:m></a:p></a:txBody></a:tc><a:tc><a:txBody><a:bodyPr /><a:lstStyle /><a:p><a:pPr lvl="0" indent="0" marL="0" algn="ctr"><a:buNone /></a:pPr><a:r><a:rPr /><a:t>GO with FLAG</a:t></a:r></a:p></a:txBody></a:tc></a:tr><a:tr h="0"><a:tc><a:txBody><a:bodyPr /><a:lstStyle /><a:p><a:pPr lvl="0" indent="0" marL="0"><a:buNone /></a:pPr><a:r><a:rPr /><a:t>Gate authorisation</a:t></a:r></a:p></a:txBody></a:tc><a:tc><a:txBody><a:bodyPr /><a:lstStyle /><a:p><a:pPr lvl="0" indent="0" marL="0"><a:buNone /></a:pPr><a:r><a:rPr><a:latin typeface="Courier" /></a:rPr><a:t>authorize_outcome_analysis()</a:t></a:r></a:p></a:txBody></a:tc><a:tc><a:txBody><a:bodyPr /><a:lstStyle /><a:p><a:pPr lvl="0" indent="0" marL="0"><a:buNone /></a:pPr><a:r><a:rPr /><a:t>All preceding GO or documented FLAG</a:t></a:r></a:p></a:txBody></a:tc><a:tc><a:txBody><a:bodyPr /><a:lstStyle /><a:p><a:pPr lvl="0" indent="0" marL="0" algn="ctr"><a:buNone /></a:pPr><a:r><a:rPr /><a:t>GO</a:t></a:r></a:p></a:txBody></a:tc></a:tr></a:tbl></a:graphicData></a:graphic></p:graphicFrame></p:spTree></p:cSld></p:sld>
 </file>
 
 <file path=ppt/slides/slide23.xml><?xml version="1.0" encoding="utf-8"?>
@@ -5231,7 +5202,12 @@
             <p:ph type="title"/>
           </p:nvPr>
         </p:nvSpPr>
-        <p:spPr/>
+        <p:spPr>
+          <a:xfrm>
+            <a:off x="722313" y="3305176"/>
+            <a:ext cx="7772400" cy="1021556"/>
+          </a:xfrm>
+        </p:spPr>
         <p:txBody>
           <a:bodyPr/>
           <a:lstStyle/>
@@ -5241,96 +5217,7 @@
             </a:pPr>
             <a:r>
               <a:rPr/>
-              <a:t>Degradation gradient</a:t>
-            </a:r>
-          </a:p>
-        </p:txBody>
-      </p:sp>
-      <p:sp>
-        <p:nvSpPr>
-          <p:cNvPr id="3" name="Content Placeholder 2"/>
-          <p:cNvSpPr>
-            <a:spLocks noGrp="1"/>
-          </p:cNvSpPr>
-          <p:nvPr>
-            <p:ph idx="1"/>
-          </p:nvPr>
-        </p:nvSpPr>
-        <p:spPr/>
-        <p:txBody>
-          <a:bodyPr/>
-          <a:lstStyle/>
-          <a:p>
-            <a:pPr lvl="0" indent="0" marL="0">
-              <a:buNone/>
-            </a:pPr>
-            <a:r>
-              <a:rPr b="1"/>
-              <a:t>A dose-response curve for estimator fragility.</a:t>
-            </a:r>
-          </a:p>
-          <a:p>
-            <a:pPr lvl="0"/>
-            <a:r>
-              <a:rPr b="1"/>
-              <a:t>x-axis</a:t>
-            </a:r>
-            <a:r>
-              <a:rPr/>
-              <a:t>: severity of a prespecified DQ threat</a:t>
-            </a:r>
-          </a:p>
-          <a:p>
-            <a:pPr lvl="0"/>
-            <a:r>
-              <a:rPr b="1"/>
-              <a:t>y-axis</a:t>
-            </a:r>
-            <a:r>
-              <a:rPr/>
-              <a:t>: bias, RMSE, coverage, or type I error</a:t>
-            </a:r>
-          </a:p>
-          <a:p>
-            <a:pPr lvl="0"/>
-            <a:r>
-              <a:rPr b="1"/>
-              <a:t>Robust candidate</a:t>
-            </a:r>
-            <a:r>
-              <a:rPr/>
-              <a:t>: shallow gradient, stays inside the locked threshold across plausible severities</a:t>
-            </a:r>
-          </a:p>
-          <a:p>
-            <a:pPr lvl="0"/>
-            <a:r>
-              <a:rPr b="1"/>
-              <a:t>Fragile candidate</a:t>
-            </a:r>
-            <a:r>
-              <a:rPr/>
-              <a:t>: cliff — a small severity increase pushes bias or coverage past the threshold</a:t>
-            </a:r>
-          </a:p>
-          <a:p>
-            <a:pPr lvl="0"/>
-            <a:r>
-              <a:rPr/>
-              <a:t>A horizontal line on the plot marks the prespecified decision threshold</a:t>
-            </a:r>
-          </a:p>
-          <a:p>
-            <a:pPr lvl="0" indent="0" marL="0">
-              <a:buNone/>
-            </a:pPr>
-            <a:r>
-              <a:rPr/>
-              <a:t>The gradient answers: </a:t>
-            </a:r>
-            <a:r>
-              <a:rPr i="1"/>
-              <a:t>how severe must the degradation be before this candidate fails the locked decision criteria?</a:t>
+              <a:t>From qualitative DQ review to quantitative stress testing</a:t>
             </a:r>
           </a:p>
         </p:txBody>
@@ -5377,15 +5264,7 @@
             </a:pPr>
             <a:r>
               <a:rPr/>
-              <a:t>What the test does </a:t>
-            </a:r>
-            <a:r>
-              <a:rPr i="1"/>
-              <a:t>not</a:t>
-            </a:r>
-            <a:r>
-              <a:rPr/>
-              <a:t> assess</a:t>
+              <a:t>The translation</a:t>
             </a:r>
           </a:p>
         </p:txBody>
@@ -5407,29 +5286,45 @@
           <a:p>
             <a:pPr lvl="0"/>
             <a:r>
-              <a:rPr/>
-              <a:t>Data provenance or linkage accuracy</a:t>
-            </a:r>
-          </a:p>
-          <a:p>
-            <a:pPr lvl="0"/>
-            <a:r>
-              <a:rPr/>
-              <a:t>Phenotype validity for a specific endpoint</a:t>
-            </a:r>
-          </a:p>
-          <a:p>
-            <a:pPr lvl="0"/>
-            <a:r>
-              <a:rPr/>
-              <a:t>Representativeness of the source</a:t>
-            </a:r>
-          </a:p>
-          <a:p>
-            <a:pPr lvl="0"/>
-            <a:r>
-              <a:rPr/>
-              <a:t>Regulatory acceptability of the data source</a:t>
+              <a:rPr b="1"/>
+              <a:t>Fit-for-purpose concern</a:t>
+            </a:r>
+            <a:r>
+              <a:rPr/>
+              <a:t> → exposure definition, outcome ascertainment, covariate completeness, unmeasured confounding</a:t>
+            </a:r>
+          </a:p>
+          <a:p>
+            <a:pPr lvl="0"/>
+            <a:r>
+              <a:rPr b="1"/>
+              <a:t>Plasmode input</a:t>
+            </a:r>
+            <a:r>
+              <a:rPr/>
+              <a:t> → (sens, spec), missingness fraction, latent U parameters</a:t>
+            </a:r>
+          </a:p>
+          <a:p>
+            <a:pPr lvl="0"/>
+            <a:r>
+              <a:rPr b="1"/>
+              <a:t>Output</a:t>
+            </a:r>
+            <a:r>
+              <a:rPr/>
+              <a:t> → bias, RMSE, coverage, type I error</a:t>
+            </a:r>
+          </a:p>
+          <a:p>
+            <a:pPr lvl="0"/>
+            <a:r>
+              <a:rPr b="1"/>
+              <a:t>Decision</a:t>
+            </a:r>
+            <a:r>
+              <a:rPr/>
+              <a:t> → GO / FLAG / STOP</a:t>
             </a:r>
           </a:p>
           <a:p>
@@ -5438,7 +5333,7 @@
             </a:pPr>
             <a:r>
               <a:rPr/>
-              <a:t>The DQ stress test is a quantitative supplement to fit-for-purpose review, not formal causal sensitivity analysis and not a replacement for post-outcome quantitative bias analysis.</a:t>
+              <a:t>The prespecified severity ranges turn qualitative DQ language into auditable numbers.</a:t>
             </a:r>
           </a:p>
         </p:txBody>
@@ -5475,6 +5370,552 @@
             <p:ph type="title"/>
           </p:nvPr>
         </p:nvSpPr>
+        <p:spPr/>
+        <p:txBody>
+          <a:bodyPr/>
+          <a:lstStyle/>
+          <a:p>
+            <a:pPr lvl="0" indent="0" marL="0">
+              <a:buNone/>
+            </a:pPr>
+            <a:r>
+              <a:rPr/>
+              <a:t>The information loop</a:t>
+            </a:r>
+          </a:p>
+        </p:txBody>
+      </p:sp>
+      <p:sp>
+        <p:nvSpPr>
+          <p:cNvPr id="3" name="Content Placeholder 2"/>
+          <p:cNvSpPr>
+            <a:spLocks noGrp="1"/>
+          </p:cNvSpPr>
+          <p:nvPr>
+            <p:ph idx="1"/>
+          </p:nvPr>
+        </p:nvSpPr>
+        <p:spPr/>
+        <p:txBody>
+          <a:bodyPr/>
+          <a:lstStyle/>
+          <a:p>
+            <a:pPr lvl="0" indent="-342900" marL="342900">
+              <a:buAutoNum type="arabicPeriod"/>
+            </a:pPr>
+            <a:r>
+              <a:rPr/>
+              <a:t>Fit-for-purpose review identifies plausible threats.</a:t>
+            </a:r>
+          </a:p>
+          <a:p>
+            <a:pPr lvl="0" indent="-342900" marL="342900">
+              <a:buAutoNum type="arabicPeriod"/>
+            </a:pPr>
+            <a:r>
+              <a:rPr/>
+              <a:t>Threats are translated into quantitative severity ranges.</a:t>
+            </a:r>
+          </a:p>
+          <a:p>
+            <a:pPr lvl="0" indent="-342900" marL="342900">
+              <a:buAutoNum type="arabicPeriod"/>
+            </a:pPr>
+            <a:r>
+              <a:rPr/>
+              <a:t>Severity ranges are locked before primary outcome access.</a:t>
+            </a:r>
+          </a:p>
+          <a:p>
+            <a:pPr lvl="0" indent="-342900" marL="342900">
+              <a:buAutoNum type="arabicPeriod"/>
+            </a:pPr>
+            <a:r>
+              <a:rPr/>
+              <a:t>Synthetic outcomes are generated and perturbed under each scenario.</a:t>
+            </a:r>
+          </a:p>
+          <a:p>
+            <a:pPr lvl="0" indent="-342900" marL="342900">
+              <a:buAutoNum type="arabicPeriod"/>
+            </a:pPr>
+            <a:r>
+              <a:rPr/>
+              <a:t>Candidate estimators are evaluated using the same metrics as the baseline plasmode.</a:t>
+            </a:r>
+          </a:p>
+          <a:p>
+            <a:pPr lvl="0" indent="-342900" marL="342900">
+              <a:buAutoNum type="arabicPeriod"/>
+            </a:pPr>
+            <a:r>
+              <a:rPr/>
+              <a:t>The prespecified GO / FLAG / STOP rule is applied.</a:t>
+            </a:r>
+          </a:p>
+        </p:txBody>
+      </p:sp>
+    </p:spTree>
+  </p:cSld>
+</p:sld>
+</file>
+
+<file path=ppt/slides/slide26.xml><?xml version="1.0" encoding="UTF-8"?><p:sld xmlns:a="http://schemas.openxmlformats.org/drawingml/2006/main" xmlns:r="http://schemas.openxmlformats.org/officeDocument/2006/relationships" xmlns:p="http://schemas.openxmlformats.org/presentationml/2006/main"><p:cSld><p:spTree><p:nvGrpSpPr><p:cNvPr id="1" name="" /><p:cNvGrpSpPr /><p:nvPr /></p:nvGrpSpPr><p:grpSpPr><a:xfrm><a:off x="0" y="0" /><a:ext cx="0" cy="0" /><a:chOff x="0" y="0" /><a:chExt cx="0" cy="0" /></a:xfrm></p:grpSpPr><p:sp><p:nvSpPr><p:cNvPr id="2" name="Title 1" /><p:cNvSpPr><a:spLocks noGrp="1" /></p:cNvSpPr><p:nvPr><p:ph type="title" /></p:nvPr></p:nvSpPr><p:spPr /><p:txBody><a:bodyPr /><a:lstStyle /><a:p><a:pPr lvl="0" indent="0" marL="0"><a:buNone /></a:pPr><a:r><a:rPr /><a:t>Four prespecified threats</a:t></a:r></a:p></p:txBody></p:sp><p:graphicFrame><p:nvGraphicFramePr><p:cNvPr id="6" name="Content Placeholder 5" /><p:cNvGraphicFramePr><a:graphicFrameLocks noGrp="1" /></p:cNvGraphicFramePr><p:nvPr><p:ph idx="1" /></p:nvPr></p:nvGraphicFramePr><p:xfrm><a:off x="457200" y="1193800" /><a:ext cx="8229600" cy="3390900" /></p:xfrm><a:graphic><a:graphicData uri="http://schemas.openxmlformats.org/drawingml/2006/table"><a:tbl><a:tblPr firstRow="1" bandRow="1"><a:tableStyleId>{5C22544A-7EE6-4342-B048-85BDC9FD1C3A}</a:tableStyleId></a:tblPr><a:tblGrid><a:gridCol w="2438400" /><a:gridCol w="3581400" /><a:gridCol w="2197100" /></a:tblGrid><a:tr h="0"><a:tc><a:txBody><a:bodyPr /><a:lstStyle /><a:p><a:pPr lvl="0" indent="0" marL="0"><a:buNone /></a:pPr><a:r><a:rPr /><a:t>Threat</a:t></a:r></a:p></a:txBody><a:tcPr /></a:tc><a:tc><a:txBody><a:bodyPr /><a:lstStyle /><a:p><a:pPr lvl="0" indent="0" marL="0"><a:buNone /></a:pPr><a:r><a:rPr /><a:t>Mechanism</a:t></a:r></a:p></a:txBody><a:tcPr /></a:tc><a:tc><a:txBody><a:bodyPr /><a:lstStyle /><a:p><a:pPr lvl="0" indent="0" marL="0"><a:buNone /></a:pPr><a:r><a:rPr /><a:t>Severity parameters</a:t></a:r></a:p></a:txBody><a:tcPr /></a:tc></a:tr><a:tr h="0"><a:tc><a:txBody><a:bodyPr /><a:lstStyle /><a:p><a:pPr lvl="0" indent="0" marL="0"><a:buNone /></a:pPr><a:r><a:rPr /><a:t>Covariate missingness</a:t></a:r></a:p></a:txBody></a:tc><a:tc><a:txBody><a:bodyPr /><a:lstStyle /><a:p><a:pPr lvl="0" indent="0" marL="0"><a:buNone /></a:pPr><a:r><a:rPr /><a:t>MCAR on a covariate subset, median impute</a:t></a:r></a:p></a:txBody></a:tc><a:tc><a:txBody><a:bodyPr /><a:lstStyle /><a:p><a:pPr lvl="0" indent="0" marL="0"><a:buNone /></a:pPr><a:r><a:rPr /><a:t>proportion missing</a:t></a:r></a:p></a:txBody></a:tc></a:tr><a:tr h="0"><a:tc><a:txBody><a:bodyPr /><a:lstStyle /><a:p><a:pPr lvl="0" indent="0" marL="0"><a:buNone /></a:pPr><a:r><a:rPr /><a:t>Exposure misclassification</a:t></a:r></a:p></a:txBody></a:tc><a:tc><a:txBody><a:bodyPr /><a:lstStyle /><a:p><a:pPr lvl="0" indent="0" marL="0"><a:buNone /></a:pPr><a:r><a:rPr /><a:t>Flip A with given (sens, spec)</a:t></a:r></a:p></a:txBody></a:tc><a:tc><a:txBody><a:bodyPr /><a:lstStyle /><a:p><a:pPr lvl="0" indent="0" marL="0"><a:buNone /></a:pPr><a:r><a:rPr /><a:t>(sens, spec) pairs</a:t></a:r></a:p></a:txBody></a:tc></a:tr><a:tr h="0"><a:tc><a:txBody><a:bodyPr /><a:lstStyle /><a:p><a:pPr lvl="0" indent="0" marL="0"><a:buNone /></a:pPr><a:r><a:rPr /><a:t>Outcome misclassification</a:t></a:r></a:p></a:txBody></a:tc><a:tc><a:txBody><a:bodyPr /><a:lstStyle /><a:p><a:pPr lvl="0" indent="0" marL="0"><a:buNone /></a:pPr><a:r><a:rPr /><a:t>Flip Y with given (sens, spec), optional differential</a:t></a:r></a:p></a:txBody></a:tc><a:tc><a:txBody><a:bodyPr /><a:lstStyle /><a:p><a:pPr lvl="0" indent="0" marL="0"><a:buNone /></a:pPr><a:r><a:rPr /><a:t>(sens, spec) pairs</a:t></a:r></a:p></a:txBody></a:tc></a:tr><a:tr h="0"><a:tc><a:txBody><a:bodyPr /><a:lstStyle /><a:p><a:pPr lvl="0" indent="0" marL="0"><a:buNone /></a:pPr><a:r><a:rPr /><a:t>Unmeasured confounding</a:t></a:r></a:p></a:txBody></a:tc><a:tc><a:txBody><a:bodyPr /><a:lstStyle /><a:p><a:pPr lvl="0" indent="0" marL="0"><a:buNone /></a:pPr><a:r><a:rPr /><a:t>Latent U shifts both A and Y</a:t></a:r></a:p></a:txBody></a:tc><a:tc><a:txBody><a:bodyPr /><a:lstStyle /><a:p><a:pPr lvl="0" indent="0" marL="0"><a:buNone /></a:pPr><a14:m><m:oMath xmlns:m="http://schemas.openxmlformats.org/officeDocument/2006/math"><m:sSub><m:e><m:r><m:t>β</m:t></m:r></m:e><m:sub><m:r><m:t>U</m:t></m:r><m:r><m:t>A</m:t></m:r></m:sub></m:sSub></m:oMath></a14:m><a:r><a:rPr /><a:t>, </a:t></a:r><a14:m><m:oMath xmlns:m="http://schemas.openxmlformats.org/officeDocument/2006/math"><m:sSub><m:e><m:r><m:t>β</m:t></m:r></m:e><m:sub><m:r><m:t>U</m:t></m:r><m:r><m:t>Y</m:t></m:r></m:sub></m:sSub></m:oMath></a14:m></a:p></a:txBody></a:tc></a:tr></a:tbl></a:graphicData></a:graphic></p:graphicFrame></p:spTree></p:cSld></p:sld>
+</file>
+
+<file path=ppt/slides/slide27.xml><?xml version="1.0" encoding="utf-8"?>
+<p:sld xmlns:a="http://schemas.openxmlformats.org/drawingml/2006/main" xmlns:r="http://schemas.openxmlformats.org/officeDocument/2006/relationships" xmlns:p="http://schemas.openxmlformats.org/presentationml/2006/main">
+  <p:cSld>
+    <p:spTree>
+      <p:nvGrpSpPr>
+        <p:cNvPr id="1" name=""/>
+        <p:cNvGrpSpPr/>
+        <p:nvPr/>
+      </p:nvGrpSpPr>
+      <p:grpSpPr>
+        <a:xfrm>
+          <a:off x="0" y="0"/>
+          <a:ext cx="0" cy="0"/>
+          <a:chOff x="0" y="0"/>
+          <a:chExt cx="0" cy="0"/>
+        </a:xfrm>
+      </p:grpSpPr>
+      <p:sp>
+        <p:nvSpPr>
+          <p:cNvPr id="3" name="Content Placeholder 2"/>
+          <p:cNvSpPr>
+            <a:spLocks noGrp="1"/>
+          </p:cNvSpPr>
+          <p:nvPr>
+            <p:ph idx="1"/>
+          </p:nvPr>
+        </p:nvSpPr>
+        <p:spPr/>
+        <p:txBody>
+          <a:bodyPr/>
+          <a:lstStyle/>
+          <a:p>
+            <a:pPr lvl="0" indent="0" marL="0">
+              <a:buNone/>
+            </a:pPr>
+            <a:r>
+              <a:rPr/>
+              <a:t>Each cell reports the same triple as the baseline plasmode: bias, RMSE, coverage.</a:t>
+            </a:r>
+          </a:p>
+        </p:txBody>
+      </p:sp>
+    </p:spTree>
+  </p:cSld>
+</p:sld>
+</file>
+
+<file path=ppt/slides/slide28.xml><?xml version="1.0" encoding="utf-8"?>
+<p:sld xmlns:a="http://schemas.openxmlformats.org/drawingml/2006/main" xmlns:r="http://schemas.openxmlformats.org/officeDocument/2006/relationships" xmlns:p="http://schemas.openxmlformats.org/presentationml/2006/main">
+  <p:cSld>
+    <p:spTree>
+      <p:nvGrpSpPr>
+        <p:cNvPr id="1" name=""/>
+        <p:cNvGrpSpPr/>
+        <p:nvPr/>
+      </p:nvGrpSpPr>
+      <p:grpSpPr>
+        <a:xfrm>
+          <a:off x="0" y="0"/>
+          <a:ext cx="0" cy="0"/>
+          <a:chOff x="0" y="0"/>
+          <a:chExt cx="0" cy="0"/>
+        </a:xfrm>
+      </p:grpSpPr>
+      <p:sp>
+        <p:nvSpPr>
+          <p:cNvPr id="2" name="Title 1"/>
+          <p:cNvSpPr>
+            <a:spLocks noGrp="1"/>
+          </p:cNvSpPr>
+          <p:nvPr>
+            <p:ph type="title"/>
+          </p:nvPr>
+        </p:nvSpPr>
+        <p:spPr/>
+        <p:txBody>
+          <a:bodyPr/>
+          <a:lstStyle/>
+          <a:p>
+            <a:pPr lvl="0" indent="0" marL="0">
+              <a:buNone/>
+            </a:pPr>
+            <a:r>
+              <a:rPr/>
+              <a:t>Degradation gradient</a:t>
+            </a:r>
+          </a:p>
+        </p:txBody>
+      </p:sp>
+      <p:sp>
+        <p:nvSpPr>
+          <p:cNvPr id="3" name="Content Placeholder 2"/>
+          <p:cNvSpPr>
+            <a:spLocks noGrp="1"/>
+          </p:cNvSpPr>
+          <p:nvPr>
+            <p:ph idx="1"/>
+          </p:nvPr>
+        </p:nvSpPr>
+        <p:spPr/>
+        <p:txBody>
+          <a:bodyPr/>
+          <a:lstStyle/>
+          <a:p>
+            <a:pPr lvl="0" indent="0" marL="0">
+              <a:buNone/>
+            </a:pPr>
+            <a:r>
+              <a:rPr b="1"/>
+              <a:t>A dose-response curve for estimator fragility.</a:t>
+            </a:r>
+          </a:p>
+          <a:p>
+            <a:pPr lvl="0"/>
+            <a:r>
+              <a:rPr b="1"/>
+              <a:t>x-axis</a:t>
+            </a:r>
+            <a:r>
+              <a:rPr/>
+              <a:t>: severity of a prespecified DQ threat</a:t>
+            </a:r>
+          </a:p>
+          <a:p>
+            <a:pPr lvl="0"/>
+            <a:r>
+              <a:rPr b="1"/>
+              <a:t>y-axis</a:t>
+            </a:r>
+            <a:r>
+              <a:rPr/>
+              <a:t>: bias, RMSE, coverage, or type I error</a:t>
+            </a:r>
+          </a:p>
+          <a:p>
+            <a:pPr lvl="0"/>
+            <a:r>
+              <a:rPr b="1"/>
+              <a:t>Robust candidate</a:t>
+            </a:r>
+            <a:r>
+              <a:rPr/>
+              <a:t>: shallow gradient, stays inside the locked threshold across plausible severities</a:t>
+            </a:r>
+          </a:p>
+          <a:p>
+            <a:pPr lvl="0"/>
+            <a:r>
+              <a:rPr b="1"/>
+              <a:t>Fragile candidate</a:t>
+            </a:r>
+            <a:r>
+              <a:rPr/>
+              <a:t>: cliff — a small severity increase pushes bias or coverage past the threshold</a:t>
+            </a:r>
+          </a:p>
+          <a:p>
+            <a:pPr lvl="0"/>
+            <a:r>
+              <a:rPr/>
+              <a:t>A horizontal line on the plot marks the prespecified decision threshold</a:t>
+            </a:r>
+          </a:p>
+          <a:p>
+            <a:pPr lvl="0" indent="0" marL="0">
+              <a:buNone/>
+            </a:pPr>
+            <a:r>
+              <a:rPr/>
+              <a:t>The gradient answers: </a:t>
+            </a:r>
+            <a:r>
+              <a:rPr i="1"/>
+              <a:t>how severe must the degradation be before this candidate fails the locked decision criteria?</a:t>
+            </a:r>
+          </a:p>
+        </p:txBody>
+      </p:sp>
+    </p:spTree>
+  </p:cSld>
+</p:sld>
+</file>
+
+<file path=ppt/slides/slide29.xml><?xml version="1.0" encoding="utf-8"?>
+<p:sld xmlns:a="http://schemas.openxmlformats.org/drawingml/2006/main" xmlns:r="http://schemas.openxmlformats.org/officeDocument/2006/relationships" xmlns:p="http://schemas.openxmlformats.org/presentationml/2006/main">
+  <p:cSld>
+    <p:spTree>
+      <p:nvGrpSpPr>
+        <p:cNvPr id="1" name=""/>
+        <p:cNvGrpSpPr/>
+        <p:nvPr/>
+      </p:nvGrpSpPr>
+      <p:grpSpPr>
+        <a:xfrm>
+          <a:off x="0" y="0"/>
+          <a:ext cx="0" cy="0"/>
+          <a:chOff x="0" y="0"/>
+          <a:chExt cx="0" cy="0"/>
+        </a:xfrm>
+      </p:grpSpPr>
+      <p:sp>
+        <p:nvSpPr>
+          <p:cNvPr id="2" name="Title 1"/>
+          <p:cNvSpPr>
+            <a:spLocks noGrp="1"/>
+          </p:cNvSpPr>
+          <p:nvPr>
+            <p:ph type="title"/>
+          </p:nvPr>
+        </p:nvSpPr>
+        <p:spPr/>
+        <p:txBody>
+          <a:bodyPr/>
+          <a:lstStyle/>
+          <a:p>
+            <a:pPr lvl="0" indent="0" marL="0">
+              <a:buNone/>
+            </a:pPr>
+            <a:r>
+              <a:rPr/>
+              <a:t>What the test does </a:t>
+            </a:r>
+            <a:r>
+              <a:rPr i="1"/>
+              <a:t>not</a:t>
+            </a:r>
+            <a:r>
+              <a:rPr/>
+              <a:t> assess</a:t>
+            </a:r>
+          </a:p>
+        </p:txBody>
+      </p:sp>
+      <p:sp>
+        <p:nvSpPr>
+          <p:cNvPr id="3" name="Content Placeholder 2"/>
+          <p:cNvSpPr>
+            <a:spLocks noGrp="1"/>
+          </p:cNvSpPr>
+          <p:nvPr>
+            <p:ph idx="1"/>
+          </p:nvPr>
+        </p:nvSpPr>
+        <p:spPr/>
+        <p:txBody>
+          <a:bodyPr/>
+          <a:lstStyle/>
+          <a:p>
+            <a:pPr lvl="0"/>
+            <a:r>
+              <a:rPr/>
+              <a:t>Data provenance or linkage accuracy</a:t>
+            </a:r>
+          </a:p>
+          <a:p>
+            <a:pPr lvl="0"/>
+            <a:r>
+              <a:rPr/>
+              <a:t>Phenotype validity for a specific endpoint</a:t>
+            </a:r>
+          </a:p>
+          <a:p>
+            <a:pPr lvl="0"/>
+            <a:r>
+              <a:rPr/>
+              <a:t>Representativeness of the source</a:t>
+            </a:r>
+          </a:p>
+          <a:p>
+            <a:pPr lvl="0"/>
+            <a:r>
+              <a:rPr/>
+              <a:t>Regulatory acceptability of the data source</a:t>
+            </a:r>
+          </a:p>
+          <a:p>
+            <a:pPr lvl="0" indent="0" marL="0">
+              <a:buNone/>
+            </a:pPr>
+            <a:r>
+              <a:rPr/>
+              <a:t>The DQ stress test is a quantitative supplement to fit-for-purpose review, not formal causal sensitivity analysis and not a replacement for post-outcome quantitative bias analysis.</a:t>
+            </a:r>
+          </a:p>
+        </p:txBody>
+      </p:sp>
+    </p:spTree>
+  </p:cSld>
+</p:sld>
+</file>
+
+<file path=ppt/slides/slide3.xml><?xml version="1.0" encoding="utf-8"?>
+<p:sld xmlns:a="http://schemas.openxmlformats.org/drawingml/2006/main" xmlns:r="http://schemas.openxmlformats.org/officeDocument/2006/relationships" xmlns:p="http://schemas.openxmlformats.org/presentationml/2006/main">
+  <p:cSld>
+    <p:spTree>
+      <p:nvGrpSpPr>
+        <p:cNvPr id="1" name=""/>
+        <p:cNvGrpSpPr/>
+        <p:nvPr/>
+      </p:nvGrpSpPr>
+      <p:grpSpPr>
+        <a:xfrm>
+          <a:off x="0" y="0"/>
+          <a:ext cx="0" cy="0"/>
+          <a:chOff x="0" y="0"/>
+          <a:chExt cx="0" cy="0"/>
+        </a:xfrm>
+      </p:grpSpPr>
+      <p:sp>
+        <p:nvSpPr>
+          <p:cNvPr id="2" name="Title 1"/>
+          <p:cNvSpPr>
+            <a:spLocks noGrp="1"/>
+          </p:cNvSpPr>
+          <p:nvPr>
+            <p:ph type="title"/>
+          </p:nvPr>
+        </p:nvSpPr>
+        <p:spPr/>
+        <p:txBody>
+          <a:bodyPr/>
+          <a:lstStyle/>
+          <a:p>
+            <a:pPr lvl="0" indent="0" marL="0">
+              <a:buNone/>
+            </a:pPr>
+            <a:r>
+              <a:rPr/>
+              <a:t>What I will cover (≈30 min)</a:t>
+            </a:r>
+          </a:p>
+        </p:txBody>
+      </p:sp>
+      <p:sp>
+        <p:nvSpPr>
+          <p:cNvPr id="3" name="Content Placeholder 2"/>
+          <p:cNvSpPr>
+            <a:spLocks noGrp="1"/>
+          </p:cNvSpPr>
+          <p:nvPr>
+            <p:ph idx="1"/>
+          </p:nvPr>
+        </p:nvSpPr>
+        <p:spPr/>
+        <p:txBody>
+          <a:bodyPr/>
+          <a:lstStyle/>
+          <a:p>
+            <a:pPr lvl="0" indent="-342900" marL="342900">
+              <a:buAutoNum type="arabicPeriod"/>
+            </a:pPr>
+            <a:r>
+              <a:rPr/>
+              <a:t>Five questions the workflow answers</a:t>
+            </a:r>
+          </a:p>
+          <a:p>
+            <a:pPr lvl="0" indent="-342900" marL="342900">
+              <a:buAutoNum type="arabicPeriod"/>
+            </a:pPr>
+            <a:r>
+              <a:rPr/>
+              <a:t>Outcome-blind staged workflow (and what it does not replace)</a:t>
+            </a:r>
+          </a:p>
+          <a:p>
+            <a:pPr lvl="0" indent="-342900" marL="342900">
+              <a:buAutoNum type="arabicPeriod"/>
+            </a:pPr>
+            <a:r>
+              <a:rPr/>
+              <a:t>From qualitative DQ review to quantitative stress testing</a:t>
+            </a:r>
+          </a:p>
+          <a:p>
+            <a:pPr lvl="0" indent="-342900" marL="342900">
+              <a:buAutoNum type="arabicPeriod"/>
+            </a:pPr>
+            <a:r>
+              <a:rPr/>
+              <a:t>Simulation study</a:t>
+            </a:r>
+          </a:p>
+          <a:p>
+            <a:pPr lvl="0" indent="-342900" marL="342900">
+              <a:buAutoNum type="arabicPeriod"/>
+            </a:pPr>
+            <a:r>
+              <a:rPr/>
+              <a:t>Rescue.Co case study (Kenya Trauma Registry)</a:t>
+            </a:r>
+          </a:p>
+          <a:p>
+            <a:pPr lvl="0" indent="-342900" marL="342900">
+              <a:buAutoNum type="arabicPeriod"/>
+            </a:pPr>
+            <a:r>
+              <a:rPr/>
+              <a:t>What cleanTMLE contributes operationally</a:t>
+            </a:r>
+          </a:p>
+          <a:p>
+            <a:pPr lvl="0" indent="-342900" marL="342900">
+              <a:buAutoNum type="arabicPeriod"/>
+            </a:pPr>
+            <a:r>
+              <a:rPr/>
+              <a:t>Limitations and the 0.2 roadmap</a:t>
+            </a:r>
+          </a:p>
+          <a:p>
+            <a:pPr lvl="0" indent="-342900" marL="342900">
+              <a:buAutoNum type="arabicPeriod"/>
+            </a:pPr>
+            <a:r>
+              <a:rPr/>
+              <a:t>Open questions for collaborators</a:t>
+            </a:r>
+          </a:p>
+        </p:txBody>
+      </p:sp>
+    </p:spTree>
+  </p:cSld>
+</p:sld>
+</file>
+
+<file path=ppt/slides/slide30.xml><?xml version="1.0" encoding="utf-8"?>
+<p:sld xmlns:a="http://schemas.openxmlformats.org/drawingml/2006/main" xmlns:r="http://schemas.openxmlformats.org/officeDocument/2006/relationships" xmlns:p="http://schemas.openxmlformats.org/presentationml/2006/main">
+  <p:cSld>
+    <p:spTree>
+      <p:nvGrpSpPr>
+        <p:cNvPr id="1" name=""/>
+        <p:cNvGrpSpPr/>
+        <p:nvPr/>
+      </p:nvGrpSpPr>
+      <p:grpSpPr>
+        <a:xfrm>
+          <a:off x="0" y="0"/>
+          <a:ext cx="0" cy="0"/>
+          <a:chOff x="0" y="0"/>
+          <a:chExt cx="0" cy="0"/>
+        </a:xfrm>
+      </p:grpSpPr>
+      <p:sp>
+        <p:nvSpPr>
+          <p:cNvPr id="2" name="Title 1"/>
+          <p:cNvSpPr>
+            <a:spLocks noGrp="1"/>
+          </p:cNvSpPr>
+          <p:nvPr>
+            <p:ph type="title"/>
+          </p:nvPr>
+        </p:nvSpPr>
         <p:spPr>
           <a:xfrm>
             <a:off x="722313" y="3305176"/>
@@ -5500,7 +5941,7 @@
 </p:sld>
 </file>
 
-<file path=ppt/slides/slide26.xml><?xml version="1.0" encoding="utf-8"?>
+<file path=ppt/slides/slide31.xml><?xml version="1.0" encoding="utf-8"?>
 <p:sld xmlns:a="http://schemas.openxmlformats.org/drawingml/2006/main" xmlns:r="http://schemas.openxmlformats.org/officeDocument/2006/relationships" xmlns:p="http://schemas.openxmlformats.org/presentationml/2006/main">
   <p:cSld>
     <p:spTree>
@@ -5719,7 +6160,7 @@
 </p:sld>
 </file>
 
-<file path=ppt/slides/slide27.xml><?xml version="1.0" encoding="utf-8"?>
+<file path=ppt/slides/slide32.xml><?xml version="1.0" encoding="utf-8"?>
 <p:sld xmlns:a="http://schemas.openxmlformats.org/drawingml/2006/main" xmlns:r="http://schemas.openxmlformats.org/officeDocument/2006/relationships" xmlns:p="http://schemas.openxmlformats.org/presentationml/2006/main">
   <p:cSld>
     <p:spTree>
@@ -5817,7 +6258,7 @@
 </p:sld>
 </file>
 
-<file path=ppt/slides/slide28.xml><?xml version="1.0" encoding="utf-8"?>
+<file path=ppt/slides/slide33.xml><?xml version="1.0" encoding="utf-8"?>
 <p:sld xmlns:a="http://schemas.openxmlformats.org/drawingml/2006/main" xmlns:r="http://schemas.openxmlformats.org/officeDocument/2006/relationships" xmlns:p="http://schemas.openxmlformats.org/presentationml/2006/main">
   <p:cSld>
     <p:spTree>
@@ -5919,7 +6360,7 @@
 </p:sld>
 </file>
 
-<file path=ppt/slides/slide29.xml><?xml version="1.0" encoding="utf-8"?>
+<file path=ppt/slides/slide34.xml><?xml version="1.0" encoding="utf-8"?>
 <p:sld xmlns:a="http://schemas.openxmlformats.org/drawingml/2006/main" xmlns:r="http://schemas.openxmlformats.org/officeDocument/2006/relationships" xmlns:p="http://schemas.openxmlformats.org/presentationml/2006/main">
   <p:cSld>
     <p:spTree>
@@ -6046,7 +6487,7 @@
 </p:sld>
 </file>
 
-<file path=ppt/slides/slide3.xml><?xml version="1.0" encoding="utf-8"?>
+<file path=ppt/slides/slide35.xml><?xml version="1.0" encoding="utf-8"?>
 <p:sld xmlns:a="http://schemas.openxmlformats.org/drawingml/2006/main" xmlns:r="http://schemas.openxmlformats.org/officeDocument/2006/relationships" xmlns:p="http://schemas.openxmlformats.org/presentationml/2006/main">
   <p:cSld>
     <p:spTree>
@@ -6083,7 +6524,7 @@
             </a:pPr>
             <a:r>
               <a:rPr/>
-              <a:t>What I will cover (≈30 min)</a:t>
+              <a:t>DQ degradation gradient — what we observed</a:t>
             </a:r>
           </a:p>
         </p:txBody>
@@ -6103,75 +6544,56 @@
           <a:bodyPr/>
           <a:lstStyle/>
           <a:p>
-            <a:pPr lvl="0" indent="-342900" marL="342900">
-              <a:buAutoNum type="arabicPeriod"/>
+            <a:pPr lvl="0"/>
+            <a:r>
+              <a:rPr b="1"/>
+              <a:t>Covariate missingness</a:t>
+            </a:r>
+            <a:r>
+              <a:rPr/>
+              <a:t> — flat (MCAR + median imputation is unbiased by construction; weak test)</a:t>
+            </a:r>
+          </a:p>
+          <a:p>
+            <a:pPr lvl="0"/>
+            <a:r>
+              <a:rPr b="1"/>
+              <a:t>Exposure misclassification</a:t>
+            </a:r>
+            <a:r>
+              <a:rPr/>
+              <a:t> — bias rises toward null; coverage of the pre-misclassification estimand drops</a:t>
+            </a:r>
+          </a:p>
+          <a:p>
+            <a:pPr lvl="0"/>
+            <a:r>
+              <a:rPr b="1"/>
+              <a:t>Outcome misclassification (0.90, 0.95)</a:t>
+            </a:r>
+            <a:r>
+              <a:rPr/>
+              <a:t> — largest bias of the three measurement threats, especially when differential</a:t>
+            </a:r>
+          </a:p>
+          <a:p>
+            <a:pPr lvl="0"/>
+            <a:r>
+              <a:rPr b="1"/>
+              <a:t>Unmeasured confounding</a:t>
+            </a:r>
+            <a:r>
+              <a:rPr/>
+              <a:t> — largest degradation; only threat that pushes RMSE ratio above 1.5</a:t>
+            </a:r>
+          </a:p>
+          <a:p>
+            <a:pPr lvl="0" indent="0" marL="0">
+              <a:buNone/>
             </a:pPr>
             <a:r>
               <a:rPr/>
-              <a:t>Five questions the workflow answers</a:t>
-            </a:r>
-          </a:p>
-          <a:p>
-            <a:pPr lvl="0" indent="-342900" marL="342900">
-              <a:buAutoNum type="arabicPeriod"/>
-            </a:pPr>
-            <a:r>
-              <a:rPr/>
-              <a:t>Outcome-blind staged workflow (and what it does not replace)</a:t>
-            </a:r>
-          </a:p>
-          <a:p>
-            <a:pPr lvl="0" indent="-342900" marL="342900">
-              <a:buAutoNum type="arabicPeriod"/>
-            </a:pPr>
-            <a:r>
-              <a:rPr/>
-              <a:t>From qualitative DQ review to quantitative stress testing</a:t>
-            </a:r>
-          </a:p>
-          <a:p>
-            <a:pPr lvl="0" indent="-342900" marL="342900">
-              <a:buAutoNum type="arabicPeriod"/>
-            </a:pPr>
-            <a:r>
-              <a:rPr/>
-              <a:t>Simulation study</a:t>
-            </a:r>
-          </a:p>
-          <a:p>
-            <a:pPr lvl="0" indent="-342900" marL="342900">
-              <a:buAutoNum type="arabicPeriod"/>
-            </a:pPr>
-            <a:r>
-              <a:rPr/>
-              <a:t>Rescue.Co case study (Kenya Trauma Registry)</a:t>
-            </a:r>
-          </a:p>
-          <a:p>
-            <a:pPr lvl="0" indent="-342900" marL="342900">
-              <a:buAutoNum type="arabicPeriod"/>
-            </a:pPr>
-            <a:r>
-              <a:rPr/>
-              <a:t>What cleanTMLE contributes operationally</a:t>
-            </a:r>
-          </a:p>
-          <a:p>
-            <a:pPr lvl="0" indent="-342900" marL="342900">
-              <a:buAutoNum type="arabicPeriod"/>
-            </a:pPr>
-            <a:r>
-              <a:rPr/>
-              <a:t>Limitations and the 0.2 roadmap</a:t>
-            </a:r>
-          </a:p>
-          <a:p>
-            <a:pPr lvl="0" indent="-342900" marL="342900">
-              <a:buAutoNum type="arabicPeriod"/>
-            </a:pPr>
-            <a:r>
-              <a:rPr/>
-              <a:t>Open questions for collaborators</a:t>
+              <a:t>The DQ test is most informative when the threat targets identification or measurement validity rather than ordinary estimator variance.</a:t>
             </a:r>
           </a:p>
         </p:txBody>
@@ -6181,7 +6603,7 @@
 </p:sld>
 </file>
 
-<file path=ppt/slides/slide30.xml><?xml version="1.0" encoding="utf-8"?>
+<file path=ppt/slides/slide36.xml><?xml version="1.0" encoding="utf-8"?>
 <p:sld xmlns:a="http://schemas.openxmlformats.org/drawingml/2006/main" xmlns:r="http://schemas.openxmlformats.org/officeDocument/2006/relationships" xmlns:p="http://schemas.openxmlformats.org/presentationml/2006/main">
   <p:cSld>
     <p:spTree>
@@ -6208,122 +6630,6 @@
             <p:ph type="title"/>
           </p:nvPr>
         </p:nvSpPr>
-        <p:spPr/>
-        <p:txBody>
-          <a:bodyPr/>
-          <a:lstStyle/>
-          <a:p>
-            <a:pPr lvl="0" indent="0" marL="0">
-              <a:buNone/>
-            </a:pPr>
-            <a:r>
-              <a:rPr/>
-              <a:t>DQ degradation gradient — what we observed</a:t>
-            </a:r>
-          </a:p>
-        </p:txBody>
-      </p:sp>
-      <p:sp>
-        <p:nvSpPr>
-          <p:cNvPr id="3" name="Content Placeholder 2"/>
-          <p:cNvSpPr>
-            <a:spLocks noGrp="1"/>
-          </p:cNvSpPr>
-          <p:nvPr>
-            <p:ph idx="1"/>
-          </p:nvPr>
-        </p:nvSpPr>
-        <p:spPr/>
-        <p:txBody>
-          <a:bodyPr/>
-          <a:lstStyle/>
-          <a:p>
-            <a:pPr lvl="0"/>
-            <a:r>
-              <a:rPr b="1"/>
-              <a:t>Covariate missingness</a:t>
-            </a:r>
-            <a:r>
-              <a:rPr/>
-              <a:t> — flat (MCAR + median imputation is unbiased by construction; weak test)</a:t>
-            </a:r>
-          </a:p>
-          <a:p>
-            <a:pPr lvl="0"/>
-            <a:r>
-              <a:rPr b="1"/>
-              <a:t>Exposure misclassification</a:t>
-            </a:r>
-            <a:r>
-              <a:rPr/>
-              <a:t> — bias rises toward null; coverage of the pre-misclassification estimand drops</a:t>
-            </a:r>
-          </a:p>
-          <a:p>
-            <a:pPr lvl="0"/>
-            <a:r>
-              <a:rPr b="1"/>
-              <a:t>Outcome misclassification (0.90, 0.95)</a:t>
-            </a:r>
-            <a:r>
-              <a:rPr/>
-              <a:t> — largest bias of the three measurement threats, especially when differential</a:t>
-            </a:r>
-          </a:p>
-          <a:p>
-            <a:pPr lvl="0"/>
-            <a:r>
-              <a:rPr b="1"/>
-              <a:t>Unmeasured confounding</a:t>
-            </a:r>
-            <a:r>
-              <a:rPr/>
-              <a:t> — largest degradation; only threat that pushes RMSE ratio above 1.5</a:t>
-            </a:r>
-          </a:p>
-          <a:p>
-            <a:pPr lvl="0" indent="0" marL="0">
-              <a:buNone/>
-            </a:pPr>
-            <a:r>
-              <a:rPr/>
-              <a:t>The DQ test is most informative when the threat targets identification or measurement validity rather than ordinary estimator variance.</a:t>
-            </a:r>
-          </a:p>
-        </p:txBody>
-      </p:sp>
-    </p:spTree>
-  </p:cSld>
-</p:sld>
-</file>
-
-<file path=ppt/slides/slide31.xml><?xml version="1.0" encoding="utf-8"?>
-<p:sld xmlns:a="http://schemas.openxmlformats.org/drawingml/2006/main" xmlns:r="http://schemas.openxmlformats.org/officeDocument/2006/relationships" xmlns:p="http://schemas.openxmlformats.org/presentationml/2006/main">
-  <p:cSld>
-    <p:spTree>
-      <p:nvGrpSpPr>
-        <p:cNvPr id="1" name=""/>
-        <p:cNvGrpSpPr/>
-        <p:nvPr/>
-      </p:nvGrpSpPr>
-      <p:grpSpPr>
-        <a:xfrm>
-          <a:off x="0" y="0"/>
-          <a:ext cx="0" cy="0"/>
-          <a:chOff x="0" y="0"/>
-          <a:chExt cx="0" cy="0"/>
-        </a:xfrm>
-      </p:grpSpPr>
-      <p:sp>
-        <p:nvSpPr>
-          <p:cNvPr id="2" name="Title 1"/>
-          <p:cNvSpPr>
-            <a:spLocks noGrp="1"/>
-          </p:cNvSpPr>
-          <p:nvPr>
-            <p:ph type="title"/>
-          </p:nvPr>
-        </p:nvSpPr>
         <p:spPr>
           <a:xfrm>
             <a:off x="722313" y="3305176"/>
@@ -6349,7 +6655,7 @@
 </p:sld>
 </file>
 
-<file path=ppt/slides/slide32.xml><?xml version="1.0" encoding="utf-8"?>
+<file path=ppt/slides/slide37.xml><?xml version="1.0" encoding="utf-8"?>
 <p:sld xmlns:a="http://schemas.openxmlformats.org/drawingml/2006/main" xmlns:r="http://schemas.openxmlformats.org/officeDocument/2006/relationships" xmlns:p="http://schemas.openxmlformats.org/presentationml/2006/main">
   <p:cSld>
     <p:spTree>
@@ -6478,7 +6784,7 @@
 </p:sld>
 </file>
 
-<file path=ppt/slides/slide33.xml><?xml version="1.0" encoding="utf-8"?>
+<file path=ppt/slides/slide38.xml><?xml version="1.0" encoding="utf-8"?>
 <p:sld xmlns:a="http://schemas.openxmlformats.org/drawingml/2006/main" xmlns:r="http://schemas.openxmlformats.org/officeDocument/2006/relationships" xmlns:p="http://schemas.openxmlformats.org/presentationml/2006/main">
   <p:cSld>
     <p:spTree>
@@ -6596,7 +6902,7 @@
 </p:sld>
 </file>
 
-<file path=ppt/slides/slide34.xml><?xml version="1.0" encoding="utf-8"?>
+<file path=ppt/slides/slide39.xml><?xml version="1.0" encoding="utf-8"?>
 <p:sld xmlns:a="http://schemas.openxmlformats.org/drawingml/2006/main" xmlns:r="http://schemas.openxmlformats.org/officeDocument/2006/relationships" xmlns:p="http://schemas.openxmlformats.org/presentationml/2006/main">
   <p:cSld>
     <p:spTree>
@@ -7218,429 +7524,6 @@
 </p:sld>
 </file>
 
-<file path=ppt/slides/slide35.xml><?xml version="1.0" encoding="utf-8"?>
-<p:sld xmlns:a="http://schemas.openxmlformats.org/drawingml/2006/main" xmlns:r="http://schemas.openxmlformats.org/officeDocument/2006/relationships" xmlns:p="http://schemas.openxmlformats.org/presentationml/2006/main">
-  <p:cSld>
-    <p:spTree>
-      <p:nvGrpSpPr>
-        <p:cNvPr id="1" name=""/>
-        <p:cNvGrpSpPr/>
-        <p:nvPr/>
-      </p:nvGrpSpPr>
-      <p:grpSpPr>
-        <a:xfrm>
-          <a:off x="0" y="0"/>
-          <a:ext cx="0" cy="0"/>
-          <a:chOff x="0" y="0"/>
-          <a:chExt cx="0" cy="0"/>
-        </a:xfrm>
-      </p:grpSpPr>
-      <p:sp>
-        <p:nvSpPr>
-          <p:cNvPr id="3" name="Content Placeholder 2"/>
-          <p:cNvSpPr>
-            <a:spLocks noGrp="1"/>
-          </p:cNvSpPr>
-          <p:nvPr>
-            <p:ph idx="1"/>
-          </p:nvPr>
-        </p:nvSpPr>
-        <p:spPr/>
-        <p:txBody>
-          <a:bodyPr/>
-          <a:lstStyle/>
-          <a:p>
-            <a:pPr lvl="0" indent="0" marL="0">
-              <a:buNone/>
-            </a:pPr>
-            <a:r>
-              <a:rPr/>
-              <a:t>Six estimators agree on direction; primary TMLE 95% CI crosses zero.</a:t>
-            </a:r>
-          </a:p>
-        </p:txBody>
-      </p:sp>
-    </p:spTree>
-  </p:cSld>
-</p:sld>
-</file>
-
-<file path=ppt/slides/slide36.xml><?xml version="1.0" encoding="utf-8"?>
-<p:sld xmlns:a="http://schemas.openxmlformats.org/drawingml/2006/main" xmlns:r="http://schemas.openxmlformats.org/officeDocument/2006/relationships" xmlns:p="http://schemas.openxmlformats.org/presentationml/2006/main">
-  <p:cSld>
-    <p:spTree>
-      <p:nvGrpSpPr>
-        <p:cNvPr id="1" name=""/>
-        <p:cNvGrpSpPr/>
-        <p:nvPr/>
-      </p:nvGrpSpPr>
-      <p:grpSpPr>
-        <a:xfrm>
-          <a:off x="0" y="0"/>
-          <a:ext cx="0" cy="0"/>
-          <a:chOff x="0" y="0"/>
-          <a:chExt cx="0" cy="0"/>
-        </a:xfrm>
-      </p:grpSpPr>
-      <p:sp>
-        <p:nvSpPr>
-          <p:cNvPr id="2" name="Title 1"/>
-          <p:cNvSpPr>
-            <a:spLocks noGrp="1"/>
-          </p:cNvSpPr>
-          <p:nvPr>
-            <p:ph type="title"/>
-          </p:nvPr>
-        </p:nvSpPr>
-        <p:spPr/>
-        <p:txBody>
-          <a:bodyPr/>
-          <a:lstStyle/>
-          <a:p>
-            <a:pPr lvl="0" indent="0" marL="0">
-              <a:buNone/>
-            </a:pPr>
-            <a:r>
-              <a:rPr/>
-              <a:t>Reading the case study</a:t>
-            </a:r>
-          </a:p>
-        </p:txBody>
-      </p:sp>
-      <p:sp>
-        <p:nvSpPr>
-          <p:cNvPr id="3" name="Content Placeholder 2"/>
-          <p:cNvSpPr>
-            <a:spLocks noGrp="1"/>
-          </p:cNvSpPr>
-          <p:nvPr>
-            <p:ph idx="1"/>
-          </p:nvPr>
-        </p:nvSpPr>
-        <p:spPr/>
-        <p:txBody>
-          <a:bodyPr/>
-          <a:lstStyle/>
-          <a:p>
-            <a:pPr lvl="0"/>
-            <a:r>
-              <a:rPr/>
-              <a:t>All six estimators agree on direction (RD 0.026 to 0.037 favouring Rescue.Co)</a:t>
-            </a:r>
-          </a:p>
-          <a:p>
-            <a:pPr lvl="0"/>
-            <a:r>
-              <a:rPr/>
-              <a:t>The prespecified primary TMLE 95% CI crosses zero</a:t>
-            </a:r>
-          </a:p>
-          <a:p>
-            <a:pPr lvl="0"/>
-            <a:r>
-              <a:rPr/>
-              <a:t>A 0.0012 additive bias would push the lower CI bound across zero (a CI-tipping-point distance, not a full QBA)</a:t>
-            </a:r>
-          </a:p>
-          <a:p>
-            <a:pPr lvl="0"/>
-            <a:r>
-              <a:rPr/>
-              <a:t>The audit log captures every analytic decision, including the three NC drops</a:t>
-            </a:r>
-          </a:p>
-        </p:txBody>
-      </p:sp>
-    </p:spTree>
-  </p:cSld>
-</p:sld>
-</file>
-
-<file path=ppt/slides/slide37.xml><?xml version="1.0" encoding="utf-8"?>
-<p:sld xmlns:a="http://schemas.openxmlformats.org/drawingml/2006/main" xmlns:r="http://schemas.openxmlformats.org/officeDocument/2006/relationships" xmlns:p="http://schemas.openxmlformats.org/presentationml/2006/main">
-  <p:cSld>
-    <p:spTree>
-      <p:nvGrpSpPr>
-        <p:cNvPr id="1" name=""/>
-        <p:cNvGrpSpPr/>
-        <p:nvPr/>
-      </p:nvGrpSpPr>
-      <p:grpSpPr>
-        <a:xfrm>
-          <a:off x="0" y="0"/>
-          <a:ext cx="0" cy="0"/>
-          <a:chOff x="0" y="0"/>
-          <a:chExt cx="0" cy="0"/>
-        </a:xfrm>
-      </p:grpSpPr>
-      <p:sp>
-        <p:nvSpPr>
-          <p:cNvPr id="2" name="Title 1"/>
-          <p:cNvSpPr>
-            <a:spLocks noGrp="1"/>
-          </p:cNvSpPr>
-          <p:nvPr>
-            <p:ph type="title"/>
-          </p:nvPr>
-        </p:nvSpPr>
-        <p:spPr>
-          <a:xfrm>
-            <a:off x="722313" y="3305176"/>
-            <a:ext cx="7772400" cy="1021556"/>
-          </a:xfrm>
-        </p:spPr>
-        <p:txBody>
-          <a:bodyPr/>
-          <a:lstStyle/>
-          <a:p>
-            <a:pPr lvl="0" indent="0" marL="0">
-              <a:buNone/>
-            </a:pPr>
-            <a:r>
-              <a:rPr/>
-              <a:t>Discussion</a:t>
-            </a:r>
-          </a:p>
-        </p:txBody>
-      </p:sp>
-    </p:spTree>
-  </p:cSld>
-</p:sld>
-</file>
-
-<file path=ppt/slides/slide38.xml><?xml version="1.0" encoding="utf-8"?>
-<p:sld xmlns:a="http://schemas.openxmlformats.org/drawingml/2006/main" xmlns:r="http://schemas.openxmlformats.org/officeDocument/2006/relationships" xmlns:p="http://schemas.openxmlformats.org/presentationml/2006/main">
-  <p:cSld>
-    <p:spTree>
-      <p:nvGrpSpPr>
-        <p:cNvPr id="1" name=""/>
-        <p:cNvGrpSpPr/>
-        <p:nvPr/>
-      </p:nvGrpSpPr>
-      <p:grpSpPr>
-        <a:xfrm>
-          <a:off x="0" y="0"/>
-          <a:ext cx="0" cy="0"/>
-          <a:chOff x="0" y="0"/>
-          <a:chExt cx="0" cy="0"/>
-        </a:xfrm>
-      </p:grpSpPr>
-      <p:sp>
-        <p:nvSpPr>
-          <p:cNvPr id="2" name="Title 1"/>
-          <p:cNvSpPr>
-            <a:spLocks noGrp="1"/>
-          </p:cNvSpPr>
-          <p:nvPr>
-            <p:ph type="title"/>
-          </p:nvPr>
-        </p:nvSpPr>
-        <p:spPr/>
-        <p:txBody>
-          <a:bodyPr/>
-          <a:lstStyle/>
-          <a:p>
-            <a:pPr lvl="0" indent="0" marL="0">
-              <a:buNone/>
-            </a:pPr>
-            <a:r>
-              <a:rPr/>
-              <a:t>What cleanTMLE contributes operationally</a:t>
-            </a:r>
-          </a:p>
-        </p:txBody>
-      </p:sp>
-      <p:sp>
-        <p:nvSpPr>
-          <p:cNvPr id="3" name="Content Placeholder 2"/>
-          <p:cNvSpPr>
-            <a:spLocks noGrp="1"/>
-          </p:cNvSpPr>
-          <p:nvPr>
-            <p:ph idx="1"/>
-          </p:nvPr>
-        </p:nvSpPr>
-        <p:spPr/>
-        <p:txBody>
-          <a:bodyPr/>
-          <a:lstStyle/>
-          <a:p>
-            <a:pPr lvl="0"/>
-            <a:r>
-              <a:rPr b="1"/>
-              <a:t>Auditable analysis lock</a:t>
-            </a:r>
-            <a:r>
-              <a:rPr/>
-              <a:t> with sha256 fingerprint</a:t>
-            </a:r>
-          </a:p>
-          <a:p>
-            <a:pPr lvl="0"/>
-            <a:r>
-              <a:rPr b="1"/>
-              <a:t>Outcome-access checks</a:t>
-            </a:r>
-            <a:r>
-              <a:rPr/>
-              <a:t> inside exported functions</a:t>
-            </a:r>
-          </a:p>
-          <a:p>
-            <a:pPr lvl="0"/>
-            <a:r>
-              <a:rPr b="1"/>
-              <a:t>Baseline plasmode estimator selection</a:t>
-            </a:r>
-            <a:r>
-              <a:rPr/>
-              <a:t> under the locked DGP</a:t>
-            </a:r>
-          </a:p>
-          <a:p>
-            <a:pPr lvl="0"/>
-            <a:r>
-              <a:rPr b="1"/>
-              <a:t>DQ stress testing</a:t>
-            </a:r>
-            <a:r>
-              <a:rPr/>
-              <a:t> using the same performance metrics, on the same scale</a:t>
-            </a:r>
-          </a:p>
-          <a:p>
-            <a:pPr lvl="0"/>
-            <a:r>
-              <a:rPr b="1"/>
-              <a:t>GO / FLAG / STOP</a:t>
-            </a:r>
-            <a:r>
-              <a:rPr/>
-              <a:t> checkpoint record</a:t>
-            </a:r>
-          </a:p>
-          <a:p>
-            <a:pPr lvl="0"/>
-            <a:r>
-              <a:rPr/>
-              <a:t>A </a:t>
-            </a:r>
-            <a:r>
-              <a:rPr b="1"/>
-              <a:t>reproducible bridge</a:t>
-            </a:r>
-            <a:r>
-              <a:rPr/>
-              <a:t> between fit-for-purpose concerns and estimator choice</a:t>
-            </a:r>
-          </a:p>
-          <a:p>
-            <a:pPr lvl="0" indent="0" marL="0">
-              <a:buNone/>
-            </a:pPr>
-            <a:r>
-              <a:rPr/>
-              <a:t>The claim is integration and auditability, not a new estimator.</a:t>
-            </a:r>
-          </a:p>
-        </p:txBody>
-      </p:sp>
-    </p:spTree>
-  </p:cSld>
-</p:sld>
-</file>
-
-<file path=ppt/slides/slide39.xml><?xml version="1.0" encoding="utf-8"?>
-<p:sld xmlns:a="http://schemas.openxmlformats.org/drawingml/2006/main" xmlns:r="http://schemas.openxmlformats.org/officeDocument/2006/relationships" xmlns:p="http://schemas.openxmlformats.org/presentationml/2006/main">
-  <p:cSld>
-    <p:spTree>
-      <p:nvGrpSpPr>
-        <p:cNvPr id="1" name=""/>
-        <p:cNvGrpSpPr/>
-        <p:nvPr/>
-      </p:nvGrpSpPr>
-      <p:grpSpPr>
-        <a:xfrm>
-          <a:off x="0" y="0"/>
-          <a:ext cx="0" cy="0"/>
-          <a:chOff x="0" y="0"/>
-          <a:chExt cx="0" cy="0"/>
-        </a:xfrm>
-      </p:grpSpPr>
-      <p:sp>
-        <p:nvSpPr>
-          <p:cNvPr id="2" name="Title 1"/>
-          <p:cNvSpPr>
-            <a:spLocks noGrp="1"/>
-          </p:cNvSpPr>
-          <p:nvPr>
-            <p:ph type="title"/>
-          </p:nvPr>
-        </p:nvSpPr>
-        <p:spPr/>
-        <p:txBody>
-          <a:bodyPr/>
-          <a:lstStyle/>
-          <a:p>
-            <a:pPr lvl="0" indent="0" marL="0">
-              <a:buNone/>
-            </a:pPr>
-            <a:r>
-              <a:rPr/>
-              <a:t>What is not new</a:t>
-            </a:r>
-          </a:p>
-        </p:txBody>
-      </p:sp>
-      <p:sp>
-        <p:nvSpPr>
-          <p:cNvPr id="3" name="Content Placeholder 2"/>
-          <p:cNvSpPr>
-            <a:spLocks noGrp="1"/>
-          </p:cNvSpPr>
-          <p:nvPr>
-            <p:ph idx="1"/>
-          </p:nvPr>
-        </p:nvSpPr>
-        <p:spPr/>
-        <p:txBody>
-          <a:bodyPr/>
-          <a:lstStyle/>
-          <a:p>
-            <a:pPr lvl="0"/>
-            <a:r>
-              <a:rPr/>
-              <a:t>Targeted learning (van der Laan, Petersen, Gruber, Schuler, …)</a:t>
-            </a:r>
-          </a:p>
-          <a:p>
-            <a:pPr lvl="0"/>
-            <a:r>
-              <a:rPr/>
-              <a:t>Plasmode simulation for candidate selection (Franklin 2014; Schuler 2017; Dang 2023)</a:t>
-            </a:r>
-          </a:p>
-          <a:p>
-            <a:pPr lvl="0"/>
-            <a:r>
-              <a:rPr/>
-              <a:t>Outcome blinding as a governance idea (Muntner 2024; Kent 2026)</a:t>
-            </a:r>
-          </a:p>
-          <a:p>
-            <a:pPr lvl="0"/>
-            <a:r>
-              <a:rPr/>
-              <a:t>Quantitative bias analysis (Lash 2014), which remains a post-outcome activity distinct from the pre-outcome DQ stress screen</a:t>
-            </a:r>
-          </a:p>
-        </p:txBody>
-      </p:sp>
-    </p:spTree>
-  </p:cSld>
-</p:sld>
-</file>
-
 <file path=ppt/slides/slide4.xml><?xml version="1.0" encoding="utf-8"?>
 <p:sld xmlns:a="http://schemas.openxmlformats.org/drawingml/2006/main" xmlns:r="http://schemas.openxmlformats.org/officeDocument/2006/relationships" xmlns:p="http://schemas.openxmlformats.org/presentationml/2006/main">
   <p:cSld>
@@ -7712,12 +7595,12 @@
       </p:grpSpPr>
       <p:sp>
         <p:nvSpPr>
-          <p:cNvPr id="2" name="Title 1"/>
-          <p:cNvSpPr>
-            <a:spLocks noGrp="1"/>
-          </p:cNvSpPr>
-          <p:nvPr>
-            <p:ph type="title"/>
+          <p:cNvPr id="3" name="Content Placeholder 2"/>
+          <p:cNvSpPr>
+            <a:spLocks noGrp="1"/>
+          </p:cNvSpPr>
+          <p:nvPr>
+            <p:ph idx="1"/>
           </p:nvPr>
         </p:nvSpPr>
         <p:spPr/>
@@ -7730,65 +7613,7 @@
             </a:pPr>
             <a:r>
               <a:rPr/>
-              <a:t>Limitations</a:t>
-            </a:r>
-          </a:p>
-        </p:txBody>
-      </p:sp>
-      <p:sp>
-        <p:nvSpPr>
-          <p:cNvPr id="3" name="Content Placeholder 2"/>
-          <p:cNvSpPr>
-            <a:spLocks noGrp="1"/>
-          </p:cNvSpPr>
-          <p:nvPr>
-            <p:ph idx="1"/>
-          </p:nvPr>
-        </p:nvSpPr>
-        <p:spPr/>
-        <p:txBody>
-          <a:bodyPr/>
-          <a:lstStyle/>
-          <a:p>
-            <a:pPr lvl="0"/>
-            <a:r>
-              <a:rPr/>
-              <a:t>Synthetic-outcome mechanism may not rank estimators the same way as the realized outcome process</a:t>
-            </a:r>
-          </a:p>
-          <a:p>
-            <a:pPr lvl="0"/>
-            <a:r>
-              <a:rPr/>
-              <a:t>v0.1 scope: binary point exposure, binary outcome, marginal RD; outcome missingness handled through complete-case and IPCW sensitivity paths under prespecified missingness assumptions</a:t>
-            </a:r>
-          </a:p>
-          <a:p>
-            <a:pPr lvl="0"/>
-            <a:r>
-              <a:rPr/>
-              <a:t>DQ stress testing is not formal causal sensitivity analysis</a:t>
-            </a:r>
-          </a:p>
-          <a:p>
-            <a:pPr lvl="0"/>
-            <a:r>
-              <a:rPr/>
-              <a:t>Software cannot replace role separation or source-data validation</a:t>
-            </a:r>
-          </a:p>
-          <a:p>
-            <a:pPr lvl="0"/>
-            <a:r>
-              <a:rPr/>
-              <a:t>Severity ranges require external justification (validation studies, profiling, expert elicitation)</a:t>
-            </a:r>
-          </a:p>
-          <a:p>
-            <a:pPr lvl="0"/>
-            <a:r>
-              <a:rPr/>
-              <a:t>Decision-threshold defaults are heuristic; analysts set them from study context</a:t>
+              <a:t>Six estimators agree on direction; primary TMLE 95% CI crosses zero.</a:t>
             </a:r>
           </a:p>
         </p:txBody>
@@ -7835,7 +7660,7 @@
             </a:pPr>
             <a:r>
               <a:rPr/>
-              <a:t>Next steps (cleanTMLE 0.2)</a:t>
+              <a:t>Reading the case study</a:t>
             </a:r>
           </a:p>
         </p:txBody>
@@ -7858,68 +7683,28 @@
             <a:pPr lvl="0"/>
             <a:r>
               <a:rPr/>
-              <a:t>MAR and MNAR missingness in the DQ stress test</a:t>
-            </a:r>
-          </a:p>
-          <a:p>
-            <a:pPr lvl="0"/>
-            <a:r>
-              <a:rPr/>
-              <a:t>Time-window confounders (strike windows, calendar-time shocks)</a:t>
-            </a:r>
-          </a:p>
-          <a:p>
-            <a:pPr lvl="0"/>
-            <a:r>
-              <a:rPr/>
-              <a:t>Inter-facility transfer imbalance as a built-in scenario</a:t>
-            </a:r>
-          </a:p>
-          <a:p>
-            <a:pPr lvl="0"/>
-            <a:r>
-              <a:rPr/>
-              <a:t>Time-to-event endpoints via composition with </a:t>
-            </a:r>
-            <a:r>
-              <a:rPr>
-                <a:latin typeface="Courier"/>
-              </a:rPr>
-              <a:t>survtmle</a:t>
-            </a:r>
-            <a:r>
-              <a:rPr/>
-              <a:t> and </a:t>
-            </a:r>
-            <a:r>
-              <a:rPr>
-                <a:latin typeface="Courier"/>
-              </a:rPr>
-              <a:t>lmtp</a:t>
-            </a:r>
-          </a:p>
-          <a:p>
-            <a:pPr lvl="0"/>
-            <a:r>
-              <a:rPr/>
-              <a:t>Reference-paper-driven </a:t>
-            </a:r>
-            <a:r>
-              <a:rPr>
-                <a:latin typeface="Courier"/>
-              </a:rPr>
-              <a:t>data_quality_scenarios.yml</a:t>
-            </a:r>
-            <a:r>
-              <a:rPr/>
-              <a:t> ingesting validation-literature parameters and attaching citations to the audit log</a:t>
-            </a:r>
-          </a:p>
-          <a:p>
-            <a:pPr lvl="0"/>
-            <a:r>
-              <a:rPr/>
-              <a:t>Bootstrap variance for IPTW and matched TMLE</a:t>
+              <a:t>All six estimators agree on direction (RD 0.026 to 0.037 favouring Rescue.Co)</a:t>
+            </a:r>
+          </a:p>
+          <a:p>
+            <a:pPr lvl="0"/>
+            <a:r>
+              <a:rPr/>
+              <a:t>The prespecified primary TMLE 95% CI crosses zero</a:t>
+            </a:r>
+          </a:p>
+          <a:p>
+            <a:pPr lvl="0"/>
+            <a:r>
+              <a:rPr/>
+              <a:t>A 0.0012 additive bias would push the lower CI bound across zero (a CI-tipping-point distance, not a full QBA)</a:t>
+            </a:r>
+          </a:p>
+          <a:p>
+            <a:pPr lvl="0"/>
+            <a:r>
+              <a:rPr/>
+              <a:t>The audit log captures every analytic decision, including the three NC drops</a:t>
             </a:r>
           </a:p>
         </p:txBody>
@@ -7971,7 +7756,7 @@
             </a:pPr>
             <a:r>
               <a:rPr/>
-              <a:t>Open questions for collaborators</a:t>
+              <a:t>Discussion</a:t>
             </a:r>
           </a:p>
         </p:txBody>
@@ -8018,7 +7803,7 @@
             </a:pPr>
             <a:r>
               <a:rPr/>
-              <a:t>Where I want input</a:t>
+              <a:t>What cleanTMLE contributes operationally</a:t>
             </a:r>
           </a:p>
         </p:txBody>
@@ -8038,121 +7823,82 @@
           <a:bodyPr/>
           <a:lstStyle/>
           <a:p>
-            <a:pPr lvl="0" indent="-342900" marL="342900">
-              <a:buAutoNum type="arabicPeriod"/>
+            <a:pPr lvl="0"/>
+            <a:r>
+              <a:rPr b="1"/>
+              <a:t>Auditable analysis lock</a:t>
+            </a:r>
+            <a:r>
+              <a:rPr/>
+              <a:t> with sha256 fingerprint</a:t>
+            </a:r>
+          </a:p>
+          <a:p>
+            <a:pPr lvl="0"/>
+            <a:r>
+              <a:rPr b="1"/>
+              <a:t>Outcome-access checks</a:t>
+            </a:r>
+            <a:r>
+              <a:rPr/>
+              <a:t> inside exported functions</a:t>
+            </a:r>
+          </a:p>
+          <a:p>
+            <a:pPr lvl="0"/>
+            <a:r>
+              <a:rPr b="1"/>
+              <a:t>Baseline plasmode estimator selection</a:t>
+            </a:r>
+            <a:r>
+              <a:rPr/>
+              <a:t> under the locked DGP</a:t>
+            </a:r>
+          </a:p>
+          <a:p>
+            <a:pPr lvl="0"/>
+            <a:r>
+              <a:rPr b="1"/>
+              <a:t>DQ stress testing</a:t>
+            </a:r>
+            <a:r>
+              <a:rPr/>
+              <a:t> using the same performance metrics, on the same scale</a:t>
+            </a:r>
+          </a:p>
+          <a:p>
+            <a:pPr lvl="0"/>
+            <a:r>
+              <a:rPr b="1"/>
+              <a:t>GO / FLAG / STOP</a:t>
+            </a:r>
+            <a:r>
+              <a:rPr/>
+              <a:t> checkpoint record</a:t>
+            </a:r>
+          </a:p>
+          <a:p>
+            <a:pPr lvl="0"/>
+            <a:r>
+              <a:rPr/>
+              <a:t>A </a:t>
+            </a:r>
+            <a:r>
+              <a:rPr b="1"/>
+              <a:t>reproducible bridge</a:t>
+            </a:r>
+            <a:r>
+              <a:rPr/>
+              <a:t> between fit-for-purpose concerns and estimator choice</a:t>
+            </a:r>
+          </a:p>
+          <a:p>
+            <a:pPr lvl="0" indent="0" marL="0">
+              <a:buNone/>
             </a:pPr>
             <a:r>
-              <a:rPr b="1"/>
-              <a:t>Severity-range calibration</a:t>
-            </a:r>
-            <a:r>
-              <a:rPr/>
-              <a:t> — how to elicit and document </a:t>
-            </a:r>
-            <a:r>
-              <a:rPr>
-                <a:latin typeface="Courier"/>
-              </a:rPr>
-              <a:t>(sens, spec)</a:t>
-            </a:r>
-            <a:r>
-              <a:rPr/>
-              <a:t>, missingness, and U-shift ranges in a way a reviewer accepts</a:t>
-            </a:r>
-          </a:p>
-          <a:p>
-            <a:pPr lvl="0" indent="-342900" marL="342900">
-              <a:buAutoNum type="arabicPeriod"/>
-            </a:pPr>
-            <a:r>
-              <a:rPr b="1"/>
-              <a:t>Decision-threshold defaults</a:t>
-            </a:r>
-            <a:r>
-              <a:rPr/>
-              <a:t> — should they scale with the prespecified estimand magnitude and Type I error budget?</a:t>
-            </a:r>
-          </a:p>
-          <a:p>
-            <a:pPr lvl="0" indent="-342900" marL="342900">
-              <a:buAutoNum type="arabicPeriod"/>
-            </a:pPr>
-            <a:r>
-              <a:rPr b="1"/>
-              <a:t>Role separation</a:t>
-            </a:r>
-            <a:r>
-              <a:rPr/>
-              <a:t> — minimum personnel governance that should sit on top of the software workflow for submission-grade studies</a:t>
-            </a:r>
-          </a:p>
-          <a:p>
-            <a:pPr lvl="0" indent="-342900" marL="342900">
-              <a:buAutoNum type="arabicPeriod"/>
-            </a:pPr>
-            <a:r>
-              <a:rPr b="1"/>
-              <a:t>Plasmode faithfulness</a:t>
-            </a:r>
-            <a:r>
-              <a:rPr/>
-              <a:t> — is the parametric synthetic-outcome mechanism faithful enough, or do we need richer DGPs (effect modification, time-varying treatment)?</a:t>
-            </a:r>
-          </a:p>
-          <a:p>
-            <a:pPr lvl="0" indent="-342900" marL="342900">
-              <a:buAutoNum type="arabicPeriod"/>
-            </a:pPr>
-            <a:r>
-              <a:rPr b="1"/>
-              <a:t>Negative-control policy</a:t>
-            </a:r>
-            <a:r>
-              <a:rPr/>
-              <a:t> — when the NZV filter prunes prespecified NCs, re-elicit before unblinding or accept a narrower panel and document?</a:t>
-            </a:r>
-          </a:p>
-          <a:p>
-            <a:pPr lvl="0" indent="-342900" marL="342900">
-              <a:buAutoNum type="arabicPeriod"/>
-            </a:pPr>
-            <a:r>
-              <a:rPr b="1"/>
-              <a:t>Publication venue</a:t>
-            </a:r>
-            <a:r>
-              <a:rPr/>
-              <a:t> — </a:t>
-            </a:r>
-            <a:r>
-              <a:rPr>
-                <a:latin typeface="Courier"/>
-              </a:rPr>
-              <a:t>Epidemiology</a:t>
-            </a:r>
-            <a:r>
-              <a:rPr/>
-              <a:t>, </a:t>
-            </a:r>
-            <a:r>
-              <a:rPr>
-                <a:latin typeface="Courier"/>
-              </a:rPr>
-              <a:t>Stat Med</a:t>
-            </a:r>
-            <a:r>
-              <a:rPr/>
-              <a:t>, </a:t>
-            </a:r>
-            <a:r>
-              <a:rPr>
-                <a:latin typeface="Courier"/>
-              </a:rPr>
-              <a:t>Biometrics</a:t>
-            </a:r>
-            <a:r>
-              <a:rPr/>
-              <a:t>, or an RWE-specific venue?</a:t>
+              <a:rPr/>
+              <a:t>The claim is integration and auditability, not a new estimator.</a:t>
             </a:r>
           </a:p>
         </p:txBody>
@@ -8163,6 +7909,566 @@
 </file>
 
 <file path=ppt/slides/slide44.xml><?xml version="1.0" encoding="utf-8"?>
+<p:sld xmlns:a="http://schemas.openxmlformats.org/drawingml/2006/main" xmlns:r="http://schemas.openxmlformats.org/officeDocument/2006/relationships" xmlns:p="http://schemas.openxmlformats.org/presentationml/2006/main">
+  <p:cSld>
+    <p:spTree>
+      <p:nvGrpSpPr>
+        <p:cNvPr id="1" name=""/>
+        <p:cNvGrpSpPr/>
+        <p:nvPr/>
+      </p:nvGrpSpPr>
+      <p:grpSpPr>
+        <a:xfrm>
+          <a:off x="0" y="0"/>
+          <a:ext cx="0" cy="0"/>
+          <a:chOff x="0" y="0"/>
+          <a:chExt cx="0" cy="0"/>
+        </a:xfrm>
+      </p:grpSpPr>
+      <p:sp>
+        <p:nvSpPr>
+          <p:cNvPr id="2" name="Title 1"/>
+          <p:cNvSpPr>
+            <a:spLocks noGrp="1"/>
+          </p:cNvSpPr>
+          <p:nvPr>
+            <p:ph type="title"/>
+          </p:nvPr>
+        </p:nvSpPr>
+        <p:spPr/>
+        <p:txBody>
+          <a:bodyPr/>
+          <a:lstStyle/>
+          <a:p>
+            <a:pPr lvl="0" indent="0" marL="0">
+              <a:buNone/>
+            </a:pPr>
+            <a:r>
+              <a:rPr/>
+              <a:t>What is not new</a:t>
+            </a:r>
+          </a:p>
+        </p:txBody>
+      </p:sp>
+      <p:sp>
+        <p:nvSpPr>
+          <p:cNvPr id="3" name="Content Placeholder 2"/>
+          <p:cNvSpPr>
+            <a:spLocks noGrp="1"/>
+          </p:cNvSpPr>
+          <p:nvPr>
+            <p:ph idx="1"/>
+          </p:nvPr>
+        </p:nvSpPr>
+        <p:spPr/>
+        <p:txBody>
+          <a:bodyPr/>
+          <a:lstStyle/>
+          <a:p>
+            <a:pPr lvl="0"/>
+            <a:r>
+              <a:rPr/>
+              <a:t>Targeted learning (van der Laan, Petersen, Gruber, Schuler, …)</a:t>
+            </a:r>
+          </a:p>
+          <a:p>
+            <a:pPr lvl="0"/>
+            <a:r>
+              <a:rPr/>
+              <a:t>Plasmode simulation for candidate selection (Franklin 2014; Schuler 2017; Dang 2023)</a:t>
+            </a:r>
+          </a:p>
+          <a:p>
+            <a:pPr lvl="0"/>
+            <a:r>
+              <a:rPr/>
+              <a:t>Outcome blinding as a governance idea (Muntner 2024; Kent 2026)</a:t>
+            </a:r>
+          </a:p>
+          <a:p>
+            <a:pPr lvl="0"/>
+            <a:r>
+              <a:rPr/>
+              <a:t>Quantitative bias analysis (Lash 2014), which remains a post-outcome activity distinct from the pre-outcome DQ stress screen</a:t>
+            </a:r>
+          </a:p>
+        </p:txBody>
+      </p:sp>
+    </p:spTree>
+  </p:cSld>
+</p:sld>
+</file>
+
+<file path=ppt/slides/slide45.xml><?xml version="1.0" encoding="utf-8"?>
+<p:sld xmlns:a="http://schemas.openxmlformats.org/drawingml/2006/main" xmlns:r="http://schemas.openxmlformats.org/officeDocument/2006/relationships" xmlns:p="http://schemas.openxmlformats.org/presentationml/2006/main">
+  <p:cSld>
+    <p:spTree>
+      <p:nvGrpSpPr>
+        <p:cNvPr id="1" name=""/>
+        <p:cNvGrpSpPr/>
+        <p:nvPr/>
+      </p:nvGrpSpPr>
+      <p:grpSpPr>
+        <a:xfrm>
+          <a:off x="0" y="0"/>
+          <a:ext cx="0" cy="0"/>
+          <a:chOff x="0" y="0"/>
+          <a:chExt cx="0" cy="0"/>
+        </a:xfrm>
+      </p:grpSpPr>
+      <p:sp>
+        <p:nvSpPr>
+          <p:cNvPr id="2" name="Title 1"/>
+          <p:cNvSpPr>
+            <a:spLocks noGrp="1"/>
+          </p:cNvSpPr>
+          <p:nvPr>
+            <p:ph type="title"/>
+          </p:nvPr>
+        </p:nvSpPr>
+        <p:spPr/>
+        <p:txBody>
+          <a:bodyPr/>
+          <a:lstStyle/>
+          <a:p>
+            <a:pPr lvl="0" indent="0" marL="0">
+              <a:buNone/>
+            </a:pPr>
+            <a:r>
+              <a:rPr/>
+              <a:t>Limitations</a:t>
+            </a:r>
+          </a:p>
+        </p:txBody>
+      </p:sp>
+      <p:sp>
+        <p:nvSpPr>
+          <p:cNvPr id="3" name="Content Placeholder 2"/>
+          <p:cNvSpPr>
+            <a:spLocks noGrp="1"/>
+          </p:cNvSpPr>
+          <p:nvPr>
+            <p:ph idx="1"/>
+          </p:nvPr>
+        </p:nvSpPr>
+        <p:spPr/>
+        <p:txBody>
+          <a:bodyPr/>
+          <a:lstStyle/>
+          <a:p>
+            <a:pPr lvl="0"/>
+            <a:r>
+              <a:rPr/>
+              <a:t>Synthetic-outcome mechanism may not rank estimators the same way as the realized outcome process</a:t>
+            </a:r>
+          </a:p>
+          <a:p>
+            <a:pPr lvl="0"/>
+            <a:r>
+              <a:rPr/>
+              <a:t>v0.1 scope: binary point exposure, binary outcome, marginal RD; outcome missingness handled through complete-case and IPCW sensitivity paths under prespecified missingness assumptions</a:t>
+            </a:r>
+          </a:p>
+          <a:p>
+            <a:pPr lvl="0"/>
+            <a:r>
+              <a:rPr/>
+              <a:t>DQ stress testing is not formal causal sensitivity analysis</a:t>
+            </a:r>
+          </a:p>
+          <a:p>
+            <a:pPr lvl="0"/>
+            <a:r>
+              <a:rPr/>
+              <a:t>Software cannot replace role separation or source-data validation</a:t>
+            </a:r>
+          </a:p>
+          <a:p>
+            <a:pPr lvl="0"/>
+            <a:r>
+              <a:rPr/>
+              <a:t>Severity ranges require external justification (validation studies, profiling, expert elicitation)</a:t>
+            </a:r>
+          </a:p>
+          <a:p>
+            <a:pPr lvl="0"/>
+            <a:r>
+              <a:rPr/>
+              <a:t>Decision-threshold defaults are heuristic; analysts set them from study context</a:t>
+            </a:r>
+          </a:p>
+        </p:txBody>
+      </p:sp>
+    </p:spTree>
+  </p:cSld>
+</p:sld>
+</file>
+
+<file path=ppt/slides/slide46.xml><?xml version="1.0" encoding="utf-8"?>
+<p:sld xmlns:a="http://schemas.openxmlformats.org/drawingml/2006/main" xmlns:r="http://schemas.openxmlformats.org/officeDocument/2006/relationships" xmlns:p="http://schemas.openxmlformats.org/presentationml/2006/main">
+  <p:cSld>
+    <p:spTree>
+      <p:nvGrpSpPr>
+        <p:cNvPr id="1" name=""/>
+        <p:cNvGrpSpPr/>
+        <p:nvPr/>
+      </p:nvGrpSpPr>
+      <p:grpSpPr>
+        <a:xfrm>
+          <a:off x="0" y="0"/>
+          <a:ext cx="0" cy="0"/>
+          <a:chOff x="0" y="0"/>
+          <a:chExt cx="0" cy="0"/>
+        </a:xfrm>
+      </p:grpSpPr>
+      <p:sp>
+        <p:nvSpPr>
+          <p:cNvPr id="2" name="Title 1"/>
+          <p:cNvSpPr>
+            <a:spLocks noGrp="1"/>
+          </p:cNvSpPr>
+          <p:nvPr>
+            <p:ph type="title"/>
+          </p:nvPr>
+        </p:nvSpPr>
+        <p:spPr/>
+        <p:txBody>
+          <a:bodyPr/>
+          <a:lstStyle/>
+          <a:p>
+            <a:pPr lvl="0" indent="0" marL="0">
+              <a:buNone/>
+            </a:pPr>
+            <a:r>
+              <a:rPr/>
+              <a:t>Next steps (cleanTMLE 0.2)</a:t>
+            </a:r>
+          </a:p>
+        </p:txBody>
+      </p:sp>
+      <p:sp>
+        <p:nvSpPr>
+          <p:cNvPr id="3" name="Content Placeholder 2"/>
+          <p:cNvSpPr>
+            <a:spLocks noGrp="1"/>
+          </p:cNvSpPr>
+          <p:nvPr>
+            <p:ph idx="1"/>
+          </p:nvPr>
+        </p:nvSpPr>
+        <p:spPr/>
+        <p:txBody>
+          <a:bodyPr/>
+          <a:lstStyle/>
+          <a:p>
+            <a:pPr lvl="0"/>
+            <a:r>
+              <a:rPr/>
+              <a:t>MAR and MNAR missingness in the DQ stress test</a:t>
+            </a:r>
+          </a:p>
+          <a:p>
+            <a:pPr lvl="0"/>
+            <a:r>
+              <a:rPr/>
+              <a:t>Time-window confounders (strike windows, calendar-time shocks)</a:t>
+            </a:r>
+          </a:p>
+          <a:p>
+            <a:pPr lvl="0"/>
+            <a:r>
+              <a:rPr/>
+              <a:t>Inter-facility transfer imbalance as a built-in scenario</a:t>
+            </a:r>
+          </a:p>
+          <a:p>
+            <a:pPr lvl="0"/>
+            <a:r>
+              <a:rPr/>
+              <a:t>Time-to-event endpoints via composition with </a:t>
+            </a:r>
+            <a:r>
+              <a:rPr>
+                <a:latin typeface="Courier"/>
+              </a:rPr>
+              <a:t>survtmle</a:t>
+            </a:r>
+            <a:r>
+              <a:rPr/>
+              <a:t> and </a:t>
+            </a:r>
+            <a:r>
+              <a:rPr>
+                <a:latin typeface="Courier"/>
+              </a:rPr>
+              <a:t>lmtp</a:t>
+            </a:r>
+          </a:p>
+          <a:p>
+            <a:pPr lvl="0"/>
+            <a:r>
+              <a:rPr/>
+              <a:t>Reference-paper-driven </a:t>
+            </a:r>
+            <a:r>
+              <a:rPr>
+                <a:latin typeface="Courier"/>
+              </a:rPr>
+              <a:t>data_quality_scenarios.yml</a:t>
+            </a:r>
+            <a:r>
+              <a:rPr/>
+              <a:t> ingesting validation-literature parameters and attaching citations to the audit log</a:t>
+            </a:r>
+          </a:p>
+          <a:p>
+            <a:pPr lvl="0"/>
+            <a:r>
+              <a:rPr/>
+              <a:t>Bootstrap variance for IPTW and matched TMLE</a:t>
+            </a:r>
+          </a:p>
+        </p:txBody>
+      </p:sp>
+    </p:spTree>
+  </p:cSld>
+</p:sld>
+</file>
+
+<file path=ppt/slides/slide47.xml><?xml version="1.0" encoding="utf-8"?>
+<p:sld xmlns:a="http://schemas.openxmlformats.org/drawingml/2006/main" xmlns:r="http://schemas.openxmlformats.org/officeDocument/2006/relationships" xmlns:p="http://schemas.openxmlformats.org/presentationml/2006/main">
+  <p:cSld>
+    <p:spTree>
+      <p:nvGrpSpPr>
+        <p:cNvPr id="1" name=""/>
+        <p:cNvGrpSpPr/>
+        <p:nvPr/>
+      </p:nvGrpSpPr>
+      <p:grpSpPr>
+        <a:xfrm>
+          <a:off x="0" y="0"/>
+          <a:ext cx="0" cy="0"/>
+          <a:chOff x="0" y="0"/>
+          <a:chExt cx="0" cy="0"/>
+        </a:xfrm>
+      </p:grpSpPr>
+      <p:sp>
+        <p:nvSpPr>
+          <p:cNvPr id="2" name="Title 1"/>
+          <p:cNvSpPr>
+            <a:spLocks noGrp="1"/>
+          </p:cNvSpPr>
+          <p:nvPr>
+            <p:ph type="title"/>
+          </p:nvPr>
+        </p:nvSpPr>
+        <p:spPr>
+          <a:xfrm>
+            <a:off x="722313" y="3305176"/>
+            <a:ext cx="7772400" cy="1021556"/>
+          </a:xfrm>
+        </p:spPr>
+        <p:txBody>
+          <a:bodyPr/>
+          <a:lstStyle/>
+          <a:p>
+            <a:pPr lvl="0" indent="0" marL="0">
+              <a:buNone/>
+            </a:pPr>
+            <a:r>
+              <a:rPr/>
+              <a:t>Open questions for collaborators</a:t>
+            </a:r>
+          </a:p>
+        </p:txBody>
+      </p:sp>
+    </p:spTree>
+  </p:cSld>
+</p:sld>
+</file>
+
+<file path=ppt/slides/slide48.xml><?xml version="1.0" encoding="utf-8"?>
+<p:sld xmlns:a="http://schemas.openxmlformats.org/drawingml/2006/main" xmlns:r="http://schemas.openxmlformats.org/officeDocument/2006/relationships" xmlns:p="http://schemas.openxmlformats.org/presentationml/2006/main">
+  <p:cSld>
+    <p:spTree>
+      <p:nvGrpSpPr>
+        <p:cNvPr id="1" name=""/>
+        <p:cNvGrpSpPr/>
+        <p:nvPr/>
+      </p:nvGrpSpPr>
+      <p:grpSpPr>
+        <a:xfrm>
+          <a:off x="0" y="0"/>
+          <a:ext cx="0" cy="0"/>
+          <a:chOff x="0" y="0"/>
+          <a:chExt cx="0" cy="0"/>
+        </a:xfrm>
+      </p:grpSpPr>
+      <p:sp>
+        <p:nvSpPr>
+          <p:cNvPr id="2" name="Title 1"/>
+          <p:cNvSpPr>
+            <a:spLocks noGrp="1"/>
+          </p:cNvSpPr>
+          <p:nvPr>
+            <p:ph type="title"/>
+          </p:nvPr>
+        </p:nvSpPr>
+        <p:spPr/>
+        <p:txBody>
+          <a:bodyPr/>
+          <a:lstStyle/>
+          <a:p>
+            <a:pPr lvl="0" indent="0" marL="0">
+              <a:buNone/>
+            </a:pPr>
+            <a:r>
+              <a:rPr/>
+              <a:t>Where I want input</a:t>
+            </a:r>
+          </a:p>
+        </p:txBody>
+      </p:sp>
+      <p:sp>
+        <p:nvSpPr>
+          <p:cNvPr id="3" name="Content Placeholder 2"/>
+          <p:cNvSpPr>
+            <a:spLocks noGrp="1"/>
+          </p:cNvSpPr>
+          <p:nvPr>
+            <p:ph idx="1"/>
+          </p:nvPr>
+        </p:nvSpPr>
+        <p:spPr/>
+        <p:txBody>
+          <a:bodyPr/>
+          <a:lstStyle/>
+          <a:p>
+            <a:pPr lvl="0" indent="-342900" marL="342900">
+              <a:buAutoNum type="arabicPeriod"/>
+            </a:pPr>
+            <a:r>
+              <a:rPr b="1"/>
+              <a:t>Severity-range calibration</a:t>
+            </a:r>
+            <a:r>
+              <a:rPr/>
+              <a:t> — how to elicit and document </a:t>
+            </a:r>
+            <a:r>
+              <a:rPr>
+                <a:latin typeface="Courier"/>
+              </a:rPr>
+              <a:t>(sens, spec)</a:t>
+            </a:r>
+            <a:r>
+              <a:rPr/>
+              <a:t>, missingness, and U-shift ranges in a way a reviewer accepts</a:t>
+            </a:r>
+          </a:p>
+          <a:p>
+            <a:pPr lvl="0" indent="-342900" marL="342900">
+              <a:buAutoNum type="arabicPeriod"/>
+            </a:pPr>
+            <a:r>
+              <a:rPr b="1"/>
+              <a:t>Decision-threshold defaults</a:t>
+            </a:r>
+            <a:r>
+              <a:rPr/>
+              <a:t> — should they scale with the prespecified estimand magnitude and Type I error budget?</a:t>
+            </a:r>
+          </a:p>
+          <a:p>
+            <a:pPr lvl="0" indent="-342900" marL="342900">
+              <a:buAutoNum type="arabicPeriod"/>
+            </a:pPr>
+            <a:r>
+              <a:rPr b="1"/>
+              <a:t>Role separation</a:t>
+            </a:r>
+            <a:r>
+              <a:rPr/>
+              <a:t> — minimum personnel governance that should sit on top of the software workflow for submission-grade studies</a:t>
+            </a:r>
+          </a:p>
+          <a:p>
+            <a:pPr lvl="0" indent="-342900" marL="342900">
+              <a:buAutoNum type="arabicPeriod"/>
+            </a:pPr>
+            <a:r>
+              <a:rPr b="1"/>
+              <a:t>Plasmode faithfulness</a:t>
+            </a:r>
+            <a:r>
+              <a:rPr/>
+              <a:t> — is the parametric synthetic-outcome mechanism faithful enough, or do we need richer DGPs (effect modification, time-varying treatment)?</a:t>
+            </a:r>
+          </a:p>
+          <a:p>
+            <a:pPr lvl="0" indent="-342900" marL="342900">
+              <a:buAutoNum type="arabicPeriod"/>
+            </a:pPr>
+            <a:r>
+              <a:rPr b="1"/>
+              <a:t>Negative-control policy</a:t>
+            </a:r>
+            <a:r>
+              <a:rPr/>
+              <a:t> — when the NZV filter prunes prespecified NCs, re-elicit before unblinding or accept a narrower panel and document?</a:t>
+            </a:r>
+          </a:p>
+          <a:p>
+            <a:pPr lvl="0" indent="-342900" marL="342900">
+              <a:buAutoNum type="arabicPeriod"/>
+            </a:pPr>
+            <a:r>
+              <a:rPr b="1"/>
+              <a:t>Publication venue</a:t>
+            </a:r>
+            <a:r>
+              <a:rPr/>
+              <a:t> — </a:t>
+            </a:r>
+            <a:r>
+              <a:rPr>
+                <a:latin typeface="Courier"/>
+              </a:rPr>
+              <a:t>Epidemiology</a:t>
+            </a:r>
+            <a:r>
+              <a:rPr/>
+              <a:t>, </a:t>
+            </a:r>
+            <a:r>
+              <a:rPr>
+                <a:latin typeface="Courier"/>
+              </a:rPr>
+              <a:t>Stat Med</a:t>
+            </a:r>
+            <a:r>
+              <a:rPr/>
+              <a:t>, </a:t>
+            </a:r>
+            <a:r>
+              <a:rPr>
+                <a:latin typeface="Courier"/>
+              </a:rPr>
+              <a:t>Biometrics</a:t>
+            </a:r>
+            <a:r>
+              <a:rPr/>
+              <a:t>, or an RWE-specific venue?</a:t>
+            </a:r>
+          </a:p>
+        </p:txBody>
+      </p:sp>
+    </p:spTree>
+  </p:cSld>
+</p:sld>
+</file>
+
+<file path=ppt/slides/slide49.xml><?xml version="1.0" encoding="utf-8"?>
 <p:sld xmlns:a="http://schemas.openxmlformats.org/drawingml/2006/main" xmlns:r="http://schemas.openxmlformats.org/officeDocument/2006/relationships" xmlns:p="http://schemas.openxmlformats.org/presentationml/2006/main">
   <p:cSld>
     <p:spTree>

--- a/reports/cleanTMLE_presentation.pptx
+++ b/reports/cleanTMLE_presentation.pptx
@@ -54,6 +54,43 @@
     <p:sldId id="302" r:id="rId48"/>
     <p:sldId id="303" r:id="rId49"/>
     <p:sldId id="304" r:id="rId50"/>
+    <p:sldId id="305" r:id="rId51"/>
+    <p:sldId id="306" r:id="rId52"/>
+    <p:sldId id="307" r:id="rId53"/>
+    <p:sldId id="308" r:id="rId54"/>
+    <p:sldId id="309" r:id="rId55"/>
+    <p:sldId id="310" r:id="rId56"/>
+    <p:sldId id="311" r:id="rId57"/>
+    <p:sldId id="312" r:id="rId58"/>
+    <p:sldId id="313" r:id="rId59"/>
+    <p:sldId id="314" r:id="rId60"/>
+    <p:sldId id="315" r:id="rId61"/>
+    <p:sldId id="316" r:id="rId62"/>
+    <p:sldId id="317" r:id="rId63"/>
+    <p:sldId id="318" r:id="rId64"/>
+    <p:sldId id="319" r:id="rId65"/>
+    <p:sldId id="320" r:id="rId66"/>
+    <p:sldId id="321" r:id="rId67"/>
+    <p:sldId id="322" r:id="rId68"/>
+    <p:sldId id="323" r:id="rId69"/>
+    <p:sldId id="324" r:id="rId70"/>
+    <p:sldId id="325" r:id="rId71"/>
+    <p:sldId id="326" r:id="rId72"/>
+    <p:sldId id="327" r:id="rId73"/>
+    <p:sldId id="328" r:id="rId74"/>
+    <p:sldId id="329" r:id="rId75"/>
+    <p:sldId id="330" r:id="rId76"/>
+    <p:sldId id="331" r:id="rId77"/>
+    <p:sldId id="332" r:id="rId78"/>
+    <p:sldId id="333" r:id="rId79"/>
+    <p:sldId id="334" r:id="rId80"/>
+    <p:sldId id="335" r:id="rId81"/>
+    <p:sldId id="336" r:id="rId82"/>
+    <p:sldId id="337" r:id="rId83"/>
+    <p:sldId id="338" r:id="rId84"/>
+    <p:sldId id="339" r:id="rId85"/>
+    <p:sldId id="340" r:id="rId86"/>
+    <p:sldId id="341" r:id="rId87"/>
   </p:sldIdLst>
   <p:sldSz cx="9144000" cy="5143500" type="screen16x9"/>
   <p:notesSz cx="6858000" cy="9144000"/>
@@ -9000,6 +9037,2160 @@
 </p:sld>
 </file>
 
+<file path=ppt/slides/slide50.xml><?xml version="1.0" encoding="utf-8"?>
+<p:sld xmlns:a="http://schemas.openxmlformats.org/drawingml/2006/main" xmlns:r="http://schemas.openxmlformats.org/officeDocument/2006/relationships" xmlns:p="http://schemas.openxmlformats.org/presentationml/2006/main">
+  <p:cSld>
+    <p:spTree>
+      <p:nvGrpSpPr>
+        <p:cNvPr id="1" name=""/>
+        <p:cNvGrpSpPr/>
+        <p:nvPr/>
+      </p:nvGrpSpPr>
+      <p:grpSpPr>
+        <a:xfrm>
+          <a:off x="0" y="0"/>
+          <a:ext cx="0" cy="0"/>
+          <a:chOff x="0" y="0"/>
+          <a:chExt cx="0" cy="0"/>
+        </a:xfrm>
+      </p:grpSpPr>
+      <p:sp>
+        <p:nvSpPr>
+          <p:cNvPr id="2" name="Title 1"/>
+          <p:cNvSpPr>
+            <a:spLocks noGrp="1"/>
+          </p:cNvSpPr>
+          <p:nvPr>
+            <p:ph type="title"/>
+          </p:nvPr>
+        </p:nvSpPr>
+        <p:spPr>
+          <a:xfrm>
+            <a:off x="722313" y="3305176"/>
+            <a:ext cx="7772400" cy="1021556"/>
+          </a:xfrm>
+        </p:spPr>
+        <p:txBody>
+          <a:bodyPr/>
+          <a:lstStyle/>
+          <a:p>
+            <a:pPr lvl="0" indent="0" marL="0">
+              <a:buNone/>
+            </a:pPr>
+            <a:r>
+              <a:rPr/>
+              <a:t>Appendix A: Conceptual tables and roadmap</a:t>
+            </a:r>
+          </a:p>
+        </p:txBody>
+      </p:sp>
+    </p:spTree>
+  </p:cSld>
+</p:sld>
+</file>
+
+<file path=ppt/slides/slide51.xml><?xml version="1.0" encoding="utf-8"?>
+<p:sld xmlns:a="http://schemas.openxmlformats.org/drawingml/2006/main" xmlns:r="http://schemas.openxmlformats.org/officeDocument/2006/relationships" xmlns:p="http://schemas.openxmlformats.org/presentationml/2006/main">
+  <p:cSld>
+    <p:spTree>
+      <p:nvGrpSpPr>
+        <p:cNvPr id="1" name=""/>
+        <p:cNvGrpSpPr/>
+        <p:nvPr/>
+      </p:nvGrpSpPr>
+      <p:grpSpPr>
+        <a:xfrm>
+          <a:off x="0" y="0"/>
+          <a:ext cx="0" cy="0"/>
+          <a:chOff x="0" y="0"/>
+          <a:chExt cx="0" cy="0"/>
+        </a:xfrm>
+      </p:grpSpPr>
+      <p:sp>
+        <p:nvSpPr>
+          <p:cNvPr id="2" name="Title 1"/>
+          <p:cNvSpPr>
+            <a:spLocks noGrp="1"/>
+          </p:cNvSpPr>
+          <p:nvPr>
+            <p:ph type="title"/>
+          </p:nvPr>
+        </p:nvSpPr>
+        <p:spPr/>
+        <p:txBody>
+          <a:bodyPr/>
+          <a:lstStyle/>
+          <a:p>
+            <a:pPr lvl="0" indent="0" marL="0">
+              <a:buNone/>
+            </a:pPr>
+            <a:r>
+              <a:rPr/>
+              <a:t>Conceptual layers in the staged workflow</a:t>
+            </a:r>
+          </a:p>
+        </p:txBody>
+      </p:sp>
+      <p:graphicFrame>
+        <p:nvGraphicFramePr>
+          <p:cNvPr id="6" name="Content Placeholder 5"/>
+          <p:cNvGraphicFramePr>
+            <a:graphicFrameLocks noGrp="1"/>
+          </p:cNvGraphicFramePr>
+          <p:nvPr>
+            <p:ph idx="1"/>
+          </p:nvPr>
+        </p:nvGraphicFramePr>
+        <p:xfrm>
+          <a:off x="457200" y="1193800"/>
+          <a:ext cx="8229600" cy="3390900"/>
+        </p:xfrm>
+        <a:graphic>
+          <a:graphicData uri="http://schemas.openxmlformats.org/drawingml/2006/table">
+            <a:tbl>
+              <a:tblPr firstRow="1" bandRow="1">
+                <a:tableStyleId>{5C22544A-7EE6-4342-B048-85BDC9FD1C3A}</a:tableStyleId>
+              </a:tblPr>
+              <a:tblGrid>
+                <a:gridCol w="4114800"/>
+                <a:gridCol w="4114800"/>
+              </a:tblGrid>
+              <a:tr h="0">
+                <a:tc>
+                  <a:txBody>
+                    <a:bodyPr/>
+                    <a:lstStyle/>
+                    <a:p>
+                      <a:pPr lvl="0" indent="0" marL="0">
+                        <a:buNone/>
+                      </a:pPr>
+                      <a:r>
+                        <a:rPr/>
+                        <a:t>Layer</a:t>
+                      </a:r>
+                    </a:p>
+                  </a:txBody>
+                  <a:tcPr/>
+                </a:tc>
+                <a:tc>
+                  <a:txBody>
+                    <a:bodyPr/>
+                    <a:lstStyle/>
+                    <a:p>
+                      <a:pPr lvl="0" indent="0" marL="0">
+                        <a:buNone/>
+                      </a:pPr>
+                      <a:r>
+                        <a:rPr/>
+                        <a:t>Description</a:t>
+                      </a:r>
+                    </a:p>
+                  </a:txBody>
+                  <a:tcPr/>
+                </a:tc>
+              </a:tr>
+              <a:tr h="0">
+                <a:tc>
+                  <a:txBody>
+                    <a:bodyPr/>
+                    <a:lstStyle/>
+                    <a:p>
+                      <a:pPr lvl="0" indent="0" marL="0">
+                        <a:buNone/>
+                      </a:pPr>
+                      <a:r>
+                        <a:rPr/>
+                        <a:t>Causal question</a:t>
+                      </a:r>
+                    </a:p>
+                  </a:txBody>
+                </a:tc>
+                <a:tc>
+                  <a:txBody>
+                    <a:bodyPr/>
+                    <a:lstStyle/>
+                    <a:p>
+                      <a:pPr lvl="0" indent="0" marL="0">
+                        <a:buNone/>
+                      </a:pPr>
+                      <a:r>
+                        <a:rPr/>
+                        <a:t>Clinical or policy question framed as a target trial or causal contrast.</a:t>
+                      </a:r>
+                    </a:p>
+                  </a:txBody>
+                </a:tc>
+              </a:tr>
+              <a:tr h="0">
+                <a:tc>
+                  <a:txBody>
+                    <a:bodyPr/>
+                    <a:lstStyle/>
+                    <a:p>
+                      <a:pPr lvl="0" indent="0" marL="0">
+                        <a:buNone/>
+                      </a:pPr>
+                      <a:r>
+                        <a:rPr/>
+                        <a:t>Causal estimand</a:t>
+                      </a:r>
+                    </a:p>
+                  </a:txBody>
+                </a:tc>
+                <a:tc>
+                  <a:txBody>
+                    <a:bodyPr/>
+                    <a:lstStyle/>
+                    <a:p>
+                      <a:pPr lvl="0" indent="0" marL="0">
+                        <a:buNone/>
+                      </a:pPr>
+                      <a:r>
+                        <a:rPr/>
+                        <a:t>Counterfactual treatment effect of interest (e.g. marginal risk difference).</a:t>
+                      </a:r>
+                    </a:p>
+                  </a:txBody>
+                </a:tc>
+              </a:tr>
+              <a:tr h="0">
+                <a:tc>
+                  <a:txBody>
+                    <a:bodyPr/>
+                    <a:lstStyle/>
+                    <a:p>
+                      <a:pPr lvl="0" indent="0" marL="0">
+                        <a:buNone/>
+                      </a:pPr>
+                      <a:r>
+                        <a:rPr/>
+                        <a:t>Identification assumptions</a:t>
+                      </a:r>
+                    </a:p>
+                  </a:txBody>
+                </a:tc>
+                <a:tc>
+                  <a:txBody>
+                    <a:bodyPr/>
+                    <a:lstStyle/>
+                    <a:p>
+                      <a:pPr lvl="0" indent="0" marL="0">
+                        <a:buNone/>
+                      </a:pPr>
+                      <a:r>
+                        <a:rPr/>
+                        <a:t>Conditions under which the causal estimand can be expressed as an observed-data parameter.</a:t>
+                      </a:r>
+                    </a:p>
+                  </a:txBody>
+                </a:tc>
+              </a:tr>
+              <a:tr h="0">
+                <a:tc>
+                  <a:txBody>
+                    <a:bodyPr/>
+                    <a:lstStyle/>
+                    <a:p>
+                      <a:pPr lvl="0" indent="0" marL="0">
+                        <a:buNone/>
+                      </a:pPr>
+                      <a:r>
+                        <a:rPr/>
+                        <a:t>Statistical estimand</a:t>
+                      </a:r>
+                    </a:p>
+                  </a:txBody>
+                </a:tc>
+                <a:tc>
+                  <a:txBody>
+                    <a:bodyPr/>
+                    <a:lstStyle/>
+                    <a:p>
+                      <a:pPr lvl="0" indent="0" marL="0">
+                        <a:buNone/>
+                      </a:pPr>
+                      <a:r>
+                        <a:rPr/>
+                        <a:t>Observed-data parameter identified under the assumptions above.</a:t>
+                      </a:r>
+                    </a:p>
+                  </a:txBody>
+                </a:tc>
+              </a:tr>
+              <a:tr h="0">
+                <a:tc>
+                  <a:txBody>
+                    <a:bodyPr/>
+                    <a:lstStyle/>
+                    <a:p>
+                      <a:pPr lvl="0" indent="0" marL="0">
+                        <a:buNone/>
+                      </a:pPr>
+                      <a:r>
+                        <a:rPr/>
+                        <a:t>Estimator</a:t>
+                      </a:r>
+                    </a:p>
+                  </a:txBody>
+                </a:tc>
+                <a:tc>
+                  <a:txBody>
+                    <a:bodyPr/>
+                    <a:lstStyle/>
+                    <a:p>
+                      <a:pPr lvl="0" indent="0" marL="0">
+                        <a:buNone/>
+                      </a:pPr>
+                      <a:r>
+                        <a:rPr/>
+                        <a:t>Algorithm used to estimate the statistical estimand (e.g. TMLE, IPTW, matching).</a:t>
+                      </a:r>
+                    </a:p>
+                  </a:txBody>
+                </a:tc>
+              </a:tr>
+              <a:tr h="0">
+                <a:tc>
+                  <a:txBody>
+                    <a:bodyPr/>
+                    <a:lstStyle/>
+                    <a:p>
+                      <a:pPr lvl="0" indent="0" marL="0">
+                        <a:buNone/>
+                      </a:pPr>
+                      <a:r>
+                        <a:rPr/>
+                        <a:t>Pre-outcome diagnostic</a:t>
+                      </a:r>
+                    </a:p>
+                  </a:txBody>
+                </a:tc>
+                <a:tc>
+                  <a:txBody>
+                    <a:bodyPr/>
+                    <a:lstStyle/>
+                    <a:p>
+                      <a:pPr lvl="0" indent="0" marL="0">
+                        <a:buNone/>
+                      </a:pPr>
+                      <a:r>
+                        <a:rPr/>
+                        <a:t>Quantity used for design checks: simulated bias, RMSE, coverage, ESS, balance, NC performance.</a:t>
+                      </a:r>
+                    </a:p>
+                  </a:txBody>
+                </a:tc>
+              </a:tr>
+              <a:tr h="0">
+                <a:tc>
+                  <a:txBody>
+                    <a:bodyPr/>
+                    <a:lstStyle/>
+                    <a:p>
+                      <a:pPr lvl="0" indent="0" marL="0">
+                        <a:buNone/>
+                      </a:pPr>
+                      <a:r>
+                        <a:rPr/>
+                        <a:t>Governance decision</a:t>
+                      </a:r>
+                    </a:p>
+                  </a:txBody>
+                </a:tc>
+                <a:tc>
+                  <a:txBody>
+                    <a:bodyPr/>
+                    <a:lstStyle/>
+                    <a:p>
+                      <a:pPr lvl="0" indent="0" marL="0">
+                        <a:buNone/>
+                      </a:pPr>
+                      <a:r>
+                        <a:rPr/>
+                        <a:t>Whether prespecified criteria support proceeding, require review, or require stopping.</a:t>
+                      </a:r>
+                    </a:p>
+                  </a:txBody>
+                </a:tc>
+              </a:tr>
+            </a:tbl>
+          </a:graphicData>
+        </a:graphic>
+      </p:graphicFrame>
+    </p:spTree>
+  </p:cSld>
+</p:sld>
+</file>
+
+<file path=ppt/slides/slide52.xml><?xml version="1.0" encoding="utf-8"?>
+<p:sld xmlns:a="http://schemas.openxmlformats.org/drawingml/2006/main" xmlns:r="http://schemas.openxmlformats.org/officeDocument/2006/relationships" xmlns:p="http://schemas.openxmlformats.org/presentationml/2006/main">
+  <p:cSld>
+    <p:spTree>
+      <p:nvGrpSpPr>
+        <p:cNvPr id="1" name=""/>
+        <p:cNvGrpSpPr/>
+        <p:nvPr/>
+      </p:nvGrpSpPr>
+      <p:grpSpPr>
+        <a:xfrm>
+          <a:off x="0" y="0"/>
+          <a:ext cx="0" cy="0"/>
+          <a:chOff x="0" y="0"/>
+          <a:chExt cx="0" cy="0"/>
+        </a:xfrm>
+      </p:grpSpPr>
+      <p:sp>
+        <p:nvSpPr>
+          <p:cNvPr id="2" name="Title 1"/>
+          <p:cNvSpPr>
+            <a:spLocks noGrp="1"/>
+          </p:cNvSpPr>
+          <p:nvPr>
+            <p:ph type="title"/>
+          </p:nvPr>
+        </p:nvSpPr>
+        <p:spPr>
+          <a:xfrm>
+            <a:off x="457201" y="204787"/>
+            <a:ext cx="3008313" cy="871538"/>
+          </a:xfrm>
+        </p:spPr>
+        <p:txBody>
+          <a:bodyPr/>
+          <a:lstStyle/>
+          <a:p>
+            <a:pPr lvl="0" indent="0" marL="0">
+              <a:buNone/>
+            </a:pPr>
+            <a:r>
+              <a:rPr/>
+              <a:t>Causal roadmap and where cleanTMLE sits</a:t>
+            </a:r>
+          </a:p>
+        </p:txBody>
+      </p:sp>
+      <p:sp>
+        <p:nvSpPr>
+          <p:cNvPr id="4" name="Text Placeholder 3"/>
+          <p:cNvSpPr>
+            <a:spLocks noGrp="1"/>
+          </p:cNvSpPr>
+          <p:nvPr>
+            <p:ph idx="2" sz="half" type="body"/>
+          </p:nvPr>
+        </p:nvSpPr>
+        <p:spPr/>
+        <p:txBody>
+          <a:bodyPr/>
+          <a:lstStyle/>
+          <a:p>
+            <a:pPr lvl="0" indent="0" marL="0">
+              <a:buNone/>
+            </a:pPr>
+          </a:p>
+        </p:txBody>
+      </p:sp>
+      <p:pic>
+        <p:nvPicPr>
+          <p:cNvPr descr="cleanTMLE_presentation_files\figure-pptx\mermaid-figure-1.png" id="0" name="Picture 1"/>
+          <p:cNvPicPr>
+            <a:picLocks noGrp="1" noChangeAspect="1"/>
+          </p:cNvPicPr>
+          <p:nvPr/>
+        </p:nvPicPr>
+        <p:blipFill>
+          <a:blip r:embed="rId2"/>
+          <a:stretch>
+            <a:fillRect/>
+          </a:stretch>
+        </p:blipFill>
+        <p:spPr bwMode="auto">
+          <a:xfrm>
+            <a:off x="5702300" y="203200"/>
+            <a:ext cx="850900" cy="4381500"/>
+          </a:xfrm>
+          <a:prstGeom prst="rect">
+            <a:avLst/>
+          </a:prstGeom>
+          <a:noFill/>
+          <a:ln w="9525">
+            <a:noFill/>
+            <a:headEnd/>
+            <a:tailEnd/>
+          </a:ln>
+        </p:spPr>
+      </p:pic>
+    </p:spTree>
+  </p:cSld>
+</p:sld>
+</file>
+
+<file path=ppt/slides/slide53.xml><?xml version="1.0" encoding="utf-8"?>
+<p:sld xmlns:a="http://schemas.openxmlformats.org/drawingml/2006/main" xmlns:r="http://schemas.openxmlformats.org/officeDocument/2006/relationships" xmlns:p="http://schemas.openxmlformats.org/presentationml/2006/main">
+  <p:cSld>
+    <p:spTree>
+      <p:nvGrpSpPr>
+        <p:cNvPr id="1" name=""/>
+        <p:cNvGrpSpPr/>
+        <p:nvPr/>
+      </p:nvGrpSpPr>
+      <p:grpSpPr>
+        <a:xfrm>
+          <a:off x="0" y="0"/>
+          <a:ext cx="0" cy="0"/>
+          <a:chOff x="0" y="0"/>
+          <a:chExt cx="0" cy="0"/>
+        </a:xfrm>
+      </p:grpSpPr>
+      <p:sp>
+        <p:nvSpPr>
+          <p:cNvPr id="2" name="Title 1"/>
+          <p:cNvSpPr>
+            <a:spLocks noGrp="1"/>
+          </p:cNvSpPr>
+          <p:nvPr>
+            <p:ph type="title"/>
+          </p:nvPr>
+        </p:nvSpPr>
+        <p:spPr>
+          <a:xfrm>
+            <a:off x="457201" y="204787"/>
+            <a:ext cx="3008313" cy="871538"/>
+          </a:xfrm>
+        </p:spPr>
+        <p:txBody>
+          <a:bodyPr/>
+          <a:lstStyle/>
+          <a:p>
+            <a:pPr lvl="0" indent="0" marL="0">
+              <a:buNone/>
+            </a:pPr>
+            <a:r>
+              <a:rPr/>
+              <a:t>Governance stack</a:t>
+            </a:r>
+          </a:p>
+        </p:txBody>
+      </p:sp>
+      <p:sp>
+        <p:nvSpPr>
+          <p:cNvPr id="4" name="Text Placeholder 3"/>
+          <p:cNvSpPr>
+            <a:spLocks noGrp="1"/>
+          </p:cNvSpPr>
+          <p:nvPr>
+            <p:ph idx="2" sz="half" type="body"/>
+          </p:nvPr>
+        </p:nvSpPr>
+        <p:spPr/>
+        <p:txBody>
+          <a:bodyPr/>
+          <a:lstStyle/>
+          <a:p>
+            <a:pPr lvl="0" indent="0" marL="0">
+              <a:buNone/>
+            </a:pPr>
+          </a:p>
+        </p:txBody>
+      </p:sp>
+      <p:pic>
+        <p:nvPicPr>
+          <p:cNvPr descr="cleanTMLE_presentation_files\figure-pptx\mermaid-figure-4.png" id="0" name="Picture 1"/>
+          <p:cNvPicPr>
+            <a:picLocks noGrp="1" noChangeAspect="1"/>
+          </p:cNvPicPr>
+          <p:nvPr/>
+        </p:nvPicPr>
+        <p:blipFill>
+          <a:blip r:embed="rId2"/>
+          <a:stretch>
+            <a:fillRect/>
+          </a:stretch>
+        </p:blipFill>
+        <p:spPr bwMode="auto">
+          <a:xfrm>
+            <a:off x="3568700" y="1676400"/>
+            <a:ext cx="5105400" cy="1447800"/>
+          </a:xfrm>
+          <a:prstGeom prst="rect">
+            <a:avLst/>
+          </a:prstGeom>
+          <a:noFill/>
+          <a:ln w="9525">
+            <a:noFill/>
+            <a:headEnd/>
+            <a:tailEnd/>
+          </a:ln>
+        </p:spPr>
+      </p:pic>
+    </p:spTree>
+  </p:cSld>
+</p:sld>
+</file>
+
+<file path=ppt/slides/slide54.xml><?xml version="1.0" encoding="utf-8"?>
+<p:sld xmlns:a="http://schemas.openxmlformats.org/drawingml/2006/main" xmlns:r="http://schemas.openxmlformats.org/officeDocument/2006/relationships" xmlns:p="http://schemas.openxmlformats.org/presentationml/2006/main">
+  <p:cSld>
+    <p:spTree>
+      <p:nvGrpSpPr>
+        <p:cNvPr id="1" name=""/>
+        <p:cNvGrpSpPr/>
+        <p:nvPr/>
+      </p:nvGrpSpPr>
+      <p:grpSpPr>
+        <a:xfrm>
+          <a:off x="0" y="0"/>
+          <a:ext cx="0" cy="0"/>
+          <a:chOff x="0" y="0"/>
+          <a:chExt cx="0" cy="0"/>
+        </a:xfrm>
+      </p:grpSpPr>
+      <p:sp>
+        <p:nvSpPr>
+          <p:cNvPr id="2" name="Title 1"/>
+          <p:cNvSpPr>
+            <a:spLocks noGrp="1"/>
+          </p:cNvSpPr>
+          <p:nvPr>
+            <p:ph type="title"/>
+          </p:nvPr>
+        </p:nvSpPr>
+        <p:spPr/>
+        <p:txBody>
+          <a:bodyPr/>
+          <a:lstStyle/>
+          <a:p>
+            <a:pPr lvl="0" indent="0" marL="0">
+              <a:buNone/>
+            </a:pPr>
+            <a:r>
+              <a:rPr/>
+              <a:t>Regulatory alignment (excerpt)</a:t>
+            </a:r>
+          </a:p>
+        </p:txBody>
+      </p:sp>
+      <p:graphicFrame>
+        <p:nvGraphicFramePr>
+          <p:cNvPr id="6" name="Content Placeholder 5"/>
+          <p:cNvGraphicFramePr>
+            <a:graphicFrameLocks noGrp="1"/>
+          </p:cNvGraphicFramePr>
+          <p:nvPr>
+            <p:ph idx="1"/>
+          </p:nvPr>
+        </p:nvGraphicFramePr>
+        <p:xfrm>
+          <a:off x="457200" y="1193800"/>
+          <a:ext cx="8229600" cy="3390900"/>
+        </p:xfrm>
+        <a:graphic>
+          <a:graphicData uri="http://schemas.openxmlformats.org/drawingml/2006/table">
+            <a:tbl>
+              <a:tblPr firstRow="1" bandRow="1">
+                <a:tableStyleId>{5C22544A-7EE6-4342-B048-85BDC9FD1C3A}</a:tableStyleId>
+              </a:tblPr>
+              <a:tblGrid>
+                <a:gridCol w="2743200"/>
+                <a:gridCol w="2743200"/>
+                <a:gridCol w="2743200"/>
+              </a:tblGrid>
+              <a:tr h="0">
+                <a:tc>
+                  <a:txBody>
+                    <a:bodyPr/>
+                    <a:lstStyle/>
+                    <a:p>
+                      <a:pPr lvl="0" indent="0" marL="0">
+                        <a:buNone/>
+                      </a:pPr>
+                      <a:r>
+                        <a:rPr/>
+                        <a:t>Roadmap component</a:t>
+                      </a:r>
+                    </a:p>
+                  </a:txBody>
+                  <a:tcPr/>
+                </a:tc>
+                <a:tc>
+                  <a:txBody>
+                    <a:bodyPr/>
+                    <a:lstStyle/>
+                    <a:p>
+                      <a:pPr lvl="0" indent="0" marL="0">
+                        <a:buNone/>
+                      </a:pPr>
+                      <a:r>
+                        <a:rPr/>
+                        <a:t>FDA / EMA / ICH anchor</a:t>
+                      </a:r>
+                    </a:p>
+                  </a:txBody>
+                  <a:tcPr/>
+                </a:tc>
+                <a:tc>
+                  <a:txBody>
+                    <a:bodyPr/>
+                    <a:lstStyle/>
+                    <a:p>
+                      <a:pPr lvl="0" indent="0" marL="0">
+                        <a:buNone/>
+                      </a:pPr>
+                      <a:r>
+                        <a:rPr/>
+                        <a:t>What cleanTMLE operationalises</a:t>
+                      </a:r>
+                    </a:p>
+                  </a:txBody>
+                  <a:tcPr/>
+                </a:tc>
+              </a:tr>
+              <a:tr h="0">
+                <a:tc>
+                  <a:txBody>
+                    <a:bodyPr/>
+                    <a:lstStyle/>
+                    <a:p>
+                      <a:pPr lvl="0" indent="0" marL="0">
+                        <a:buNone/>
+                      </a:pPr>
+                      <a:r>
+                        <a:rPr/>
+                        <a:t>Causal question</a:t>
+                      </a:r>
+                    </a:p>
+                  </a:txBody>
+                </a:tc>
+                <a:tc>
+                  <a:txBody>
+                    <a:bodyPr/>
+                    <a:lstStyle/>
+                    <a:p>
+                      <a:pPr lvl="0" indent="0" marL="0">
+                        <a:buNone/>
+                      </a:pPr>
+                      <a:r>
+                        <a:rPr/>
+                        <a:t>Hernán target-trial framework; FDA RWE Framework; ICH M14</a:t>
+                      </a:r>
+                    </a:p>
+                  </a:txBody>
+                </a:tc>
+                <a:tc>
+                  <a:txBody>
+                    <a:bodyPr/>
+                    <a:lstStyle/>
+                    <a:p>
+                      <a:pPr lvl="0" indent="0" marL="0">
+                        <a:buNone/>
+                      </a:pPr>
+                      <a:r>
+                        <a:rPr/>
+                        <a:t>Locked estimand, target trial timing</a:t>
+                      </a:r>
+                    </a:p>
+                  </a:txBody>
+                </a:tc>
+              </a:tr>
+              <a:tr h="0">
+                <a:tc>
+                  <a:txBody>
+                    <a:bodyPr/>
+                    <a:lstStyle/>
+                    <a:p>
+                      <a:pPr lvl="0" indent="0" marL="0">
+                        <a:buNone/>
+                      </a:pPr>
+                      <a:r>
+                        <a:rPr/>
+                        <a:t>Statistical estimand</a:t>
+                      </a:r>
+                    </a:p>
+                  </a:txBody>
+                </a:tc>
+                <a:tc>
+                  <a:txBody>
+                    <a:bodyPr/>
+                    <a:lstStyle/>
+                    <a:p>
+                      <a:pPr lvl="0" indent="0" marL="0">
+                        <a:buNone/>
+                      </a:pPr>
+                      <a:r>
+                        <a:rPr/>
+                        <a:t>ICH E9(R1); FDA RWE Considerations</a:t>
+                      </a:r>
+                    </a:p>
+                  </a:txBody>
+                </a:tc>
+                <a:tc>
+                  <a:txBody>
+                    <a:bodyPr/>
+                    <a:lstStyle/>
+                    <a:p>
+                      <a:pPr lvl="0" indent="0" marL="0">
+                        <a:buNone/>
+                      </a:pPr>
+                      <a:r>
+                        <a:rPr>
+                          <a:latin typeface="Courier"/>
+                        </a:rPr>
+                        <a:t>attach_estimand()</a:t>
+                      </a:r>
+                      <a:r>
+                        <a:rPr/>
+                        <a:t>, lock fingerprint</a:t>
+                      </a:r>
+                    </a:p>
+                  </a:txBody>
+                </a:tc>
+              </a:tr>
+              <a:tr h="0">
+                <a:tc>
+                  <a:txBody>
+                    <a:bodyPr/>
+                    <a:lstStyle/>
+                    <a:p>
+                      <a:pPr lvl="0" indent="0" marL="0">
+                        <a:buNone/>
+                      </a:pPr>
+                      <a:r>
+                        <a:rPr/>
+                        <a:t>Estimator selection</a:t>
+                      </a:r>
+                    </a:p>
+                  </a:txBody>
+                </a:tc>
+                <a:tc>
+                  <a:txBody>
+                    <a:bodyPr/>
+                    <a:lstStyle/>
+                    <a:p>
+                      <a:pPr lvl="0" indent="0" marL="0">
+                        <a:buNone/>
+                      </a:pPr>
+                      <a:r>
+                        <a:rPr/>
+                        <a:t>FDA non-interventional studies; ICH M14</a:t>
+                      </a:r>
+                    </a:p>
+                  </a:txBody>
+                </a:tc>
+                <a:tc>
+                  <a:txBody>
+                    <a:bodyPr/>
+                    <a:lstStyle/>
+                    <a:p>
+                      <a:pPr lvl="0" indent="0" marL="0">
+                        <a:buNone/>
+                      </a:pPr>
+                      <a:r>
+                        <a:rPr>
+                          <a:latin typeface="Courier"/>
+                        </a:rPr>
+                        <a:t>tmle_candidate()</a:t>
+                      </a:r>
+                      <a:r>
+                        <a:rPr/>
+                        <a:t>, </a:t>
+                      </a:r>
+                      <a:r>
+                        <a:rPr>
+                          <a:latin typeface="Courier"/>
+                        </a:rPr>
+                        <a:t>lock_primary_tmle_spec()</a:t>
+                      </a:r>
+                    </a:p>
+                  </a:txBody>
+                </a:tc>
+              </a:tr>
+              <a:tr h="0">
+                <a:tc>
+                  <a:txBody>
+                    <a:bodyPr/>
+                    <a:lstStyle/>
+                    <a:p>
+                      <a:pPr lvl="0" indent="0" marL="0">
+                        <a:buNone/>
+                      </a:pPr>
+                      <a:r>
+                        <a:rPr/>
+                        <a:t>Pre-outcome DQ stress</a:t>
+                      </a:r>
+                    </a:p>
+                  </a:txBody>
+                </a:tc>
+                <a:tc>
+                  <a:txBody>
+                    <a:bodyPr/>
+                    <a:lstStyle/>
+                    <a:p>
+                      <a:pPr lvl="0" indent="0" marL="0">
+                        <a:buNone/>
+                      </a:pPr>
+                      <a:r>
+                        <a:rPr/>
+                        <a:t>Source reliability (FDA/EMA); validation evidence</a:t>
+                      </a:r>
+                    </a:p>
+                  </a:txBody>
+                </a:tc>
+                <a:tc>
+                  <a:txBody>
+                    <a:bodyPr/>
+                    <a:lstStyle/>
+                    <a:p>
+                      <a:pPr lvl="0" indent="0" marL="0">
+                        <a:buNone/>
+                      </a:pPr>
+                      <a:r>
+                        <a:rPr>
+                          <a:latin typeface="Courier"/>
+                        </a:rPr>
+                        <a:t>run_plasmode_dq_stress()</a:t>
+                      </a:r>
+                    </a:p>
+                  </a:txBody>
+                </a:tc>
+              </a:tr>
+              <a:tr h="0">
+                <a:tc>
+                  <a:txBody>
+                    <a:bodyPr/>
+                    <a:lstStyle/>
+                    <a:p>
+                      <a:pPr lvl="0" indent="0" marL="0">
+                        <a:buNone/>
+                      </a:pPr>
+                      <a:r>
+                        <a:rPr/>
+                        <a:t>Stage gate (GO/FLAG/STOP)</a:t>
+                      </a:r>
+                    </a:p>
+                  </a:txBody>
+                </a:tc>
+                <a:tc>
+                  <a:txBody>
+                    <a:bodyPr/>
+                    <a:lstStyle/>
+                    <a:p>
+                      <a:pPr lvl="0" indent="0" marL="0">
+                        <a:buNone/>
+                      </a:pPr>
+                      <a:r>
+                        <a:rPr/>
+                        <a:t>Internal protocol governance</a:t>
+                      </a:r>
+                    </a:p>
+                  </a:txBody>
+                </a:tc>
+                <a:tc>
+                  <a:txBody>
+                    <a:bodyPr/>
+                    <a:lstStyle/>
+                    <a:p>
+                      <a:pPr lvl="0" indent="0" marL="0">
+                        <a:buNone/>
+                      </a:pPr>
+                      <a:r>
+                        <a:rPr>
+                          <a:latin typeface="Courier"/>
+                        </a:rPr>
+                        <a:t>gate_all()</a:t>
+                      </a:r>
+                      <a:r>
+                        <a:rPr/>
+                        <a:t>, </a:t>
+                      </a:r>
+                      <a:r>
+                        <a:rPr>
+                          <a:latin typeface="Courier"/>
+                        </a:rPr>
+                        <a:t>authorize_outcome_analysis()</a:t>
+                      </a:r>
+                    </a:p>
+                  </a:txBody>
+                </a:tc>
+              </a:tr>
+              <a:tr h="0">
+                <a:tc>
+                  <a:txBody>
+                    <a:bodyPr/>
+                    <a:lstStyle/>
+                    <a:p>
+                      <a:pPr lvl="0" indent="0" marL="0">
+                        <a:buNone/>
+                      </a:pPr>
+                      <a:r>
+                        <a:rPr/>
+                        <a:t>Post-outcome sensitivity</a:t>
+                      </a:r>
+                    </a:p>
+                  </a:txBody>
+                </a:tc>
+                <a:tc>
+                  <a:txBody>
+                    <a:bodyPr/>
+                    <a:lstStyle/>
+                    <a:p>
+                      <a:pPr lvl="0" indent="0" marL="0">
+                        <a:buNone/>
+                      </a:pPr>
+                      <a:r>
+                        <a:rPr/>
+                        <a:t>FDA non-interventional; ICH E9(R1)</a:t>
+                      </a:r>
+                    </a:p>
+                  </a:txBody>
+                </a:tc>
+                <a:tc>
+                  <a:txBody>
+                    <a:bodyPr/>
+                    <a:lstStyle/>
+                    <a:p>
+                      <a:pPr lvl="0" indent="0" marL="0">
+                        <a:buNone/>
+                      </a:pPr>
+                      <a:r>
+                        <a:rPr>
+                          <a:latin typeface="Courier"/>
+                        </a:rPr>
+                        <a:t>compute_evalue()</a:t>
+                      </a:r>
+                      <a:r>
+                        <a:rPr/>
+                        <a:t>, </a:t>
+                      </a:r>
+                      <a:r>
+                        <a:rPr>
+                          <a:latin typeface="Courier"/>
+                        </a:rPr>
+                        <a:t>tipping_point_sensitivity()</a:t>
+                      </a:r>
+                    </a:p>
+                  </a:txBody>
+                </a:tc>
+              </a:tr>
+            </a:tbl>
+          </a:graphicData>
+        </a:graphic>
+      </p:graphicFrame>
+    </p:spTree>
+  </p:cSld>
+</p:sld>
+</file>
+
+<file path=ppt/slides/slide55.xml><?xml version="1.0" encoding="UTF-8"?><p:sld xmlns:a="http://schemas.openxmlformats.org/drawingml/2006/main" xmlns:r="http://schemas.openxmlformats.org/officeDocument/2006/relationships" xmlns:p="http://schemas.openxmlformats.org/presentationml/2006/main"><p:cSld><p:spTree><p:nvGrpSpPr><p:cNvPr id="1" name="" /><p:cNvGrpSpPr /><p:nvPr /></p:nvGrpSpPr><p:grpSpPr><a:xfrm><a:off x="0" y="0" /><a:ext cx="0" cy="0" /><a:chOff x="0" y="0" /><a:chExt cx="0" cy="0" /></a:xfrm></p:grpSpPr><p:sp><p:nvSpPr><p:cNvPr id="2" name="Title 1" /><p:cNvSpPr><a:spLocks noGrp="1" /></p:cNvSpPr><p:nvPr><p:ph type="title" /></p:nvPr></p:nvSpPr><p:spPr /><p:txBody><a:bodyPr /><a:lstStyle /><a:p><a:pPr lvl="0" indent="0" marL="0"><a:buNone /></a:pPr><a:r><a:rPr /><a:t>DQ threats and parameter inputs</a:t></a:r></a:p></p:txBody></p:sp><p:graphicFrame><p:nvGraphicFramePr><p:cNvPr id="6" name="Content Placeholder 5" /><p:cNvGraphicFramePr><a:graphicFrameLocks noGrp="1" /></p:cNvGraphicFramePr><p:nvPr><p:ph idx="1" /></p:nvPr></p:nvGraphicFramePr><p:xfrm><a:off x="457200" y="1193800" /><a:ext cx="8229600" cy="3390900" /></p:xfrm><a:graphic><a:graphicData uri="http://schemas.openxmlformats.org/drawingml/2006/table"><a:tbl><a:tblPr firstRow="1" bandRow="1"><a:tableStyleId>{5C22544A-7EE6-4342-B048-85BDC9FD1C3A}</a:tableStyleId></a:tblPr><a:tblGrid><a:gridCol w="2743200" /><a:gridCol w="2743200" /><a:gridCol w="2743200" /></a:tblGrid><a:tr h="0"><a:tc><a:txBody><a:bodyPr /><a:lstStyle /><a:p><a:pPr lvl="0" indent="0" marL="0"><a:buNone /></a:pPr><a:r><a:rPr /><a:t>Threat</a:t></a:r></a:p></a:txBody><a:tcPr /></a:tc><a:tc><a:txBody><a:bodyPr /><a:lstStyle /><a:p><a:pPr lvl="0" indent="0" marL="0"><a:buNone /></a:pPr><a:r><a:rPr /><a:t>Mechanism</a:t></a:r></a:p></a:txBody><a:tcPr /></a:tc><a:tc><a:txBody><a:bodyPr /><a:lstStyle /><a:p><a:pPr lvl="0" indent="0" marL="0"><a:buNone /></a:pPr><a:r><a:rPr /><a:t>Severity parameters</a:t></a:r></a:p></a:txBody><a:tcPr /></a:tc></a:tr><a:tr h="0"><a:tc><a:txBody><a:bodyPr /><a:lstStyle /><a:p><a:pPr lvl="0" indent="0" marL="0"><a:buNone /></a:pPr><a:r><a:rPr /><a:t>Covariate missingness</a:t></a:r></a:p></a:txBody></a:tc><a:tc><a:txBody><a:bodyPr /><a:lstStyle /><a:p><a:pPr lvl="0" indent="0" marL="0"><a:buNone /></a:pPr><a:r><a:rPr /><a:t>MCAR on a covariate subset, median impute</a:t></a:r></a:p></a:txBody></a:tc><a:tc><a:txBody><a:bodyPr /><a:lstStyle /><a:p><a:pPr lvl="0" indent="0" marL="0"><a:buNone /></a:pPr><a:r><a:rPr /><a:t>proportion missing</a:t></a:r></a:p></a:txBody></a:tc></a:tr><a:tr h="0"><a:tc><a:txBody><a:bodyPr /><a:lstStyle /><a:p><a:pPr lvl="0" indent="0" marL="0"><a:buNone /></a:pPr><a:r><a:rPr /><a:t>Exposure misclassification</a:t></a:r></a:p></a:txBody></a:tc><a:tc><a:txBody><a:bodyPr /><a:lstStyle /><a:p><a:pPr lvl="0" indent="0" marL="0"><a:buNone /></a:pPr><a:r><a:rPr /><a:t>Flip A with given (sens, spec)</a:t></a:r></a:p></a:txBody></a:tc><a:tc><a:txBody><a:bodyPr /><a:lstStyle /><a:p><a:pPr lvl="0" indent="0" marL="0"><a:buNone /></a:pPr><a:r><a:rPr /><a:t>(sens, spec) pairs</a:t></a:r></a:p></a:txBody></a:tc></a:tr><a:tr h="0"><a:tc><a:txBody><a:bodyPr /><a:lstStyle /><a:p><a:pPr lvl="0" indent="0" marL="0"><a:buNone /></a:pPr><a:r><a:rPr /><a:t>Outcome misclassification</a:t></a:r></a:p></a:txBody></a:tc><a:tc><a:txBody><a:bodyPr /><a:lstStyle /><a:p><a:pPr lvl="0" indent="0" marL="0"><a:buNone /></a:pPr><a:r><a:rPr /><a:t>Flip Y with given (sens, spec), optional differential</a:t></a:r></a:p></a:txBody></a:tc><a:tc><a:txBody><a:bodyPr /><a:lstStyle /><a:p><a:pPr lvl="0" indent="0" marL="0"><a:buNone /></a:pPr><a:r><a:rPr /><a:t>(sens, spec) pairs</a:t></a:r></a:p></a:txBody></a:tc></a:tr><a:tr h="0"><a:tc><a:txBody><a:bodyPr /><a:lstStyle /><a:p><a:pPr lvl="0" indent="0" marL="0"><a:buNone /></a:pPr><a:r><a:rPr /><a:t>Unmeasured confounding</a:t></a:r></a:p></a:txBody></a:tc><a:tc><a:txBody><a:bodyPr /><a:lstStyle /><a:p><a:pPr lvl="0" indent="0" marL="0"><a:buNone /></a:pPr><a:r><a:rPr /><a:t>Latent U shifts both A and Y</a:t></a:r></a:p></a:txBody></a:tc><a:tc><a:txBody><a:bodyPr /><a:lstStyle /><a:p><a:pPr lvl="0" indent="0" marL="0"><a:buNone /></a:pPr><a14:m><m:oMath xmlns:m="http://schemas.openxmlformats.org/officeDocument/2006/math"><m:sSub><m:e><m:r><m:t>β</m:t></m:r></m:e><m:sub><m:r><m:t>U</m:t></m:r><m:r><m:t>A</m:t></m:r></m:sub></m:sSub></m:oMath></a14:m><a:r><a:rPr /><a:t>, </a:t></a:r><a14:m><m:oMath xmlns:m="http://schemas.openxmlformats.org/officeDocument/2006/math"><m:sSub><m:e><m:r><m:t>β</m:t></m:r></m:e><m:sub><m:r><m:t>U</m:t></m:r><m:r><m:t>Y</m:t></m:r></m:sub></m:sSub></m:oMath></a14:m></a:p></a:txBody></a:tc></a:tr></a:tbl></a:graphicData></a:graphic></p:graphicFrame></p:spTree></p:cSld></p:sld>
+</file>
+
+<file path=ppt/slides/slide56.xml><?xml version="1.0" encoding="utf-8"?>
+<p:sld xmlns:a="http://schemas.openxmlformats.org/drawingml/2006/main" xmlns:r="http://schemas.openxmlformats.org/officeDocument/2006/relationships" xmlns:p="http://schemas.openxmlformats.org/presentationml/2006/main">
+  <p:cSld>
+    <p:spTree>
+      <p:nvGrpSpPr>
+        <p:cNvPr id="1" name=""/>
+        <p:cNvGrpSpPr/>
+        <p:nvPr/>
+      </p:nvGrpSpPr>
+      <p:grpSpPr>
+        <a:xfrm>
+          <a:off x="0" y="0"/>
+          <a:ext cx="0" cy="0"/>
+          <a:chOff x="0" y="0"/>
+          <a:chExt cx="0" cy="0"/>
+        </a:xfrm>
+      </p:grpSpPr>
+      <p:sp>
+        <p:nvSpPr>
+          <p:cNvPr id="2" name="Title 1"/>
+          <p:cNvSpPr>
+            <a:spLocks noGrp="1"/>
+          </p:cNvSpPr>
+          <p:nvPr>
+            <p:ph type="title"/>
+          </p:nvPr>
+        </p:nvSpPr>
+        <p:spPr/>
+        <p:txBody>
+          <a:bodyPr/>
+          <a:lstStyle/>
+          <a:p>
+            <a:pPr lvl="0" indent="0" marL="0">
+              <a:buNone/>
+            </a:pPr>
+            <a:r>
+              <a:rPr/>
+              <a:t>Threat-to-assumption matrix</a:t>
+            </a:r>
+          </a:p>
+        </p:txBody>
+      </p:sp>
+      <p:graphicFrame>
+        <p:nvGraphicFramePr>
+          <p:cNvPr id="6" name="Content Placeholder 5"/>
+          <p:cNvGraphicFramePr>
+            <a:graphicFrameLocks noGrp="1"/>
+          </p:cNvGraphicFramePr>
+          <p:nvPr>
+            <p:ph idx="1"/>
+          </p:nvPr>
+        </p:nvGraphicFramePr>
+        <p:xfrm>
+          <a:off x="457200" y="1193800"/>
+          <a:ext cx="8229600" cy="3390900"/>
+        </p:xfrm>
+        <a:graphic>
+          <a:graphicData uri="http://schemas.openxmlformats.org/drawingml/2006/table">
+            <a:tbl>
+              <a:tblPr firstRow="1" bandRow="1">
+                <a:tableStyleId>{5C22544A-7EE6-4342-B048-85BDC9FD1C3A}</a:tableStyleId>
+              </a:tblPr>
+              <a:tblGrid>
+                <a:gridCol w="2743200"/>
+                <a:gridCol w="2743200"/>
+                <a:gridCol w="2743200"/>
+              </a:tblGrid>
+              <a:tr h="0">
+                <a:tc>
+                  <a:txBody>
+                    <a:bodyPr/>
+                    <a:lstStyle/>
+                    <a:p>
+                      <a:pPr lvl="0" indent="0" marL="0">
+                        <a:buNone/>
+                      </a:pPr>
+                      <a:r>
+                        <a:rPr/>
+                        <a:t>Scenario</a:t>
+                      </a:r>
+                    </a:p>
+                  </a:txBody>
+                  <a:tcPr/>
+                </a:tc>
+                <a:tc>
+                  <a:txBody>
+                    <a:bodyPr/>
+                    <a:lstStyle/>
+                    <a:p>
+                      <a:pPr lvl="0" indent="0" marL="0">
+                        <a:buNone/>
+                      </a:pPr>
+                      <a:r>
+                        <a:rPr/>
+                        <a:t>Assumption nominally probed</a:t>
+                      </a:r>
+                    </a:p>
+                  </a:txBody>
+                  <a:tcPr/>
+                </a:tc>
+                <a:tc>
+                  <a:txBody>
+                    <a:bodyPr/>
+                    <a:lstStyle/>
+                    <a:p>
+                      <a:pPr lvl="0" indent="0" marL="0">
+                        <a:buNone/>
+                      </a:pPr>
+                      <a:r>
+                        <a:rPr/>
+                        <a:t>What it does NOT probe</a:t>
+                      </a:r>
+                    </a:p>
+                  </a:txBody>
+                  <a:tcPr/>
+                </a:tc>
+              </a:tr>
+              <a:tr h="0">
+                <a:tc>
+                  <a:txBody>
+                    <a:bodyPr/>
+                    <a:lstStyle/>
+                    <a:p>
+                      <a:pPr lvl="0" indent="0" marL="0">
+                        <a:buNone/>
+                      </a:pPr>
+                      <a:r>
+                        <a:rPr/>
+                        <a:t>Covariate MCAR</a:t>
+                      </a:r>
+                    </a:p>
+                  </a:txBody>
+                </a:tc>
+                <a:tc>
+                  <a:txBody>
+                    <a:bodyPr/>
+                    <a:lstStyle/>
+                    <a:p>
+                      <a:pPr lvl="0" indent="0" marL="0">
+                        <a:buNone/>
+                      </a:pPr>
+                      <a:r>
+                        <a:rPr/>
+                        <a:t>Some forms of missing-data robustness</a:t>
+                      </a:r>
+                    </a:p>
+                  </a:txBody>
+                </a:tc>
+                <a:tc>
+                  <a:txBody>
+                    <a:bodyPr/>
+                    <a:lstStyle/>
+                    <a:p>
+                      <a:pPr lvl="0" indent="0" marL="0">
+                        <a:buNone/>
+                      </a:pPr>
+                      <a:r>
+                        <a:rPr/>
+                        <a:t>MAR / MNAR; phenotype validity</a:t>
+                      </a:r>
+                    </a:p>
+                  </a:txBody>
+                </a:tc>
+              </a:tr>
+              <a:tr h="0">
+                <a:tc>
+                  <a:txBody>
+                    <a:bodyPr/>
+                    <a:lstStyle/>
+                    <a:p>
+                      <a:pPr lvl="0" indent="0" marL="0">
+                        <a:buNone/>
+                      </a:pPr>
+                      <a:r>
+                        <a:rPr/>
+                        <a:t>Exposure misclassification</a:t>
+                      </a:r>
+                    </a:p>
+                  </a:txBody>
+                </a:tc>
+                <a:tc>
+                  <a:txBody>
+                    <a:bodyPr/>
+                    <a:lstStyle/>
+                    <a:p>
+                      <a:pPr lvl="0" indent="0" marL="0">
+                        <a:buNone/>
+                      </a:pPr>
+                      <a:r>
+                        <a:rPr/>
+                        <a:t>Treatment-measurement validity</a:t>
+                      </a:r>
+                    </a:p>
+                  </a:txBody>
+                </a:tc>
+                <a:tc>
+                  <a:txBody>
+                    <a:bodyPr/>
+                    <a:lstStyle/>
+                    <a:p>
+                      <a:pPr lvl="0" indent="0" marL="0">
+                        <a:buNone/>
+                      </a:pPr>
+                      <a:r>
+                        <a:rPr/>
+                        <a:t>Differential misclassification by outcome</a:t>
+                      </a:r>
+                    </a:p>
+                  </a:txBody>
+                </a:tc>
+              </a:tr>
+              <a:tr h="0">
+                <a:tc>
+                  <a:txBody>
+                    <a:bodyPr/>
+                    <a:lstStyle/>
+                    <a:p>
+                      <a:pPr lvl="0" indent="0" marL="0">
+                        <a:buNone/>
+                      </a:pPr>
+                      <a:r>
+                        <a:rPr/>
+                        <a:t>Outcome misclassification</a:t>
+                      </a:r>
+                    </a:p>
+                  </a:txBody>
+                </a:tc>
+                <a:tc>
+                  <a:txBody>
+                    <a:bodyPr/>
+                    <a:lstStyle/>
+                    <a:p>
+                      <a:pPr lvl="0" indent="0" marL="0">
+                        <a:buNone/>
+                      </a:pPr>
+                      <a:r>
+                        <a:rPr/>
+                        <a:t>Outcome-measurement validity</a:t>
+                      </a:r>
+                    </a:p>
+                  </a:txBody>
+                </a:tc>
+                <a:tc>
+                  <a:txBody>
+                    <a:bodyPr/>
+                    <a:lstStyle/>
+                    <a:p>
+                      <a:pPr lvl="0" indent="0" marL="0">
+                        <a:buNone/>
+                      </a:pPr>
+                      <a:r>
+                        <a:rPr/>
+                        <a:t>Time-varying outcome ascertainment</a:t>
+                      </a:r>
+                    </a:p>
+                  </a:txBody>
+                </a:tc>
+              </a:tr>
+              <a:tr h="0">
+                <a:tc>
+                  <a:txBody>
+                    <a:bodyPr/>
+                    <a:lstStyle/>
+                    <a:p>
+                      <a:pPr lvl="0" indent="0" marL="0">
+                        <a:buNone/>
+                      </a:pPr>
+                      <a:r>
+                        <a:rPr/>
+                        <a:t>Unmeasured confounding</a:t>
+                      </a:r>
+                    </a:p>
+                  </a:txBody>
+                </a:tc>
+                <a:tc>
+                  <a:txBody>
+                    <a:bodyPr/>
+                    <a:lstStyle/>
+                    <a:p>
+                      <a:pPr lvl="0" indent="0" marL="0">
+                        <a:buNone/>
+                      </a:pPr>
+                      <a:r>
+                        <a:rPr/>
+                        <a:t>Exchangeability</a:t>
+                      </a:r>
+                    </a:p>
+                  </a:txBody>
+                </a:tc>
+                <a:tc>
+                  <a:txBody>
+                    <a:bodyPr/>
+                    <a:lstStyle/>
+                    <a:p>
+                      <a:pPr lvl="0" indent="0" marL="0">
+                        <a:buNone/>
+                      </a:pPr>
+                      <a:r>
+                        <a:rPr/>
+                        <a:t>Multiple unmeasured Us; effect modification by U</a:t>
+                      </a:r>
+                    </a:p>
+                  </a:txBody>
+                </a:tc>
+              </a:tr>
+            </a:tbl>
+          </a:graphicData>
+        </a:graphic>
+      </p:graphicFrame>
+    </p:spTree>
+  </p:cSld>
+</p:sld>
+</file>
+
+<file path=ppt/slides/slide57.xml><?xml version="1.0" encoding="utf-8"?>
+<p:sld xmlns:a="http://schemas.openxmlformats.org/drawingml/2006/main" xmlns:r="http://schemas.openxmlformats.org/officeDocument/2006/relationships" xmlns:p="http://schemas.openxmlformats.org/presentationml/2006/main">
+  <p:cSld>
+    <p:spTree>
+      <p:nvGrpSpPr>
+        <p:cNvPr id="1" name=""/>
+        <p:cNvGrpSpPr/>
+        <p:nvPr/>
+      </p:nvGrpSpPr>
+      <p:grpSpPr>
+        <a:xfrm>
+          <a:off x="0" y="0"/>
+          <a:ext cx="0" cy="0"/>
+          <a:chOff x="0" y="0"/>
+          <a:chExt cx="0" cy="0"/>
+        </a:xfrm>
+      </p:grpSpPr>
+      <p:sp>
+        <p:nvSpPr>
+          <p:cNvPr id="2" name="Title 1"/>
+          <p:cNvSpPr>
+            <a:spLocks noGrp="1"/>
+          </p:cNvSpPr>
+          <p:nvPr>
+            <p:ph type="title"/>
+          </p:nvPr>
+        </p:nvSpPr>
+        <p:spPr>
+          <a:xfrm>
+            <a:off x="722313" y="3305176"/>
+            <a:ext cx="7772400" cy="1021556"/>
+          </a:xfrm>
+        </p:spPr>
+        <p:txBody>
+          <a:bodyPr/>
+          <a:lstStyle/>
+          <a:p>
+            <a:pPr lvl="0" indent="0" marL="0">
+              <a:buNone/>
+            </a:pPr>
+            <a:r>
+              <a:rPr/>
+              <a:t>Appendix B: Case-study setup (Rescue.Co)</a:t>
+            </a:r>
+          </a:p>
+        </p:txBody>
+      </p:sp>
+    </p:spTree>
+  </p:cSld>
+</p:sld>
+</file>
+
+<file path=ppt/slides/slide58.xml><?xml version="1.0" encoding="utf-8"?>
+<p:sld xmlns:a="http://schemas.openxmlformats.org/drawingml/2006/main" xmlns:r="http://schemas.openxmlformats.org/officeDocument/2006/relationships" xmlns:p="http://schemas.openxmlformats.org/presentationml/2006/main">
+  <p:cSld>
+    <p:spTree>
+      <p:nvGrpSpPr>
+        <p:cNvPr id="1" name=""/>
+        <p:cNvGrpSpPr/>
+        <p:nvPr/>
+      </p:nvGrpSpPr>
+      <p:grpSpPr>
+        <a:xfrm>
+          <a:off x="0" y="0"/>
+          <a:ext cx="0" cy="0"/>
+          <a:chOff x="0" y="0"/>
+          <a:chExt cx="0" cy="0"/>
+        </a:xfrm>
+      </p:grpSpPr>
+      <p:sp>
+        <p:nvSpPr>
+          <p:cNvPr id="2" name="Title 1"/>
+          <p:cNvSpPr>
+            <a:spLocks noGrp="1"/>
+          </p:cNvSpPr>
+          <p:nvPr>
+            <p:ph type="title"/>
+          </p:nvPr>
+        </p:nvSpPr>
+        <p:spPr>
+          <a:xfrm>
+            <a:off x="457201" y="204787"/>
+            <a:ext cx="3008313" cy="871538"/>
+          </a:xfrm>
+        </p:spPr>
+        <p:txBody>
+          <a:bodyPr/>
+          <a:lstStyle/>
+          <a:p>
+            <a:pPr lvl="0" indent="0" marL="0">
+              <a:buNone/>
+            </a:pPr>
+            <a:r>
+              <a:rPr/>
+              <a:t>Cohort flow</a:t>
+            </a:r>
+          </a:p>
+        </p:txBody>
+      </p:sp>
+      <p:sp>
+        <p:nvSpPr>
+          <p:cNvPr id="4" name="Text Placeholder 3"/>
+          <p:cNvSpPr>
+            <a:spLocks noGrp="1"/>
+          </p:cNvSpPr>
+          <p:nvPr>
+            <p:ph idx="2" sz="half" type="body"/>
+          </p:nvPr>
+        </p:nvSpPr>
+        <p:spPr/>
+        <p:txBody>
+          <a:bodyPr/>
+          <a:lstStyle/>
+          <a:p>
+            <a:pPr lvl="0" indent="0" marL="0">
+              <a:buNone/>
+            </a:pPr>
+          </a:p>
+        </p:txBody>
+      </p:sp>
+      <p:pic>
+        <p:nvPicPr>
+          <p:cNvPr descr="cleanTMLE_presentation_files\figure-pptx\mermaid-figure-3.png" id="0" name="Picture 1"/>
+          <p:cNvPicPr>
+            <a:picLocks noGrp="1" noChangeAspect="1"/>
+          </p:cNvPicPr>
+          <p:nvPr/>
+        </p:nvPicPr>
+        <p:blipFill>
+          <a:blip r:embed="rId2"/>
+          <a:stretch>
+            <a:fillRect/>
+          </a:stretch>
+        </p:blipFill>
+        <p:spPr bwMode="auto">
+          <a:xfrm>
+            <a:off x="3721100" y="203200"/>
+            <a:ext cx="4800600" cy="4381500"/>
+          </a:xfrm>
+          <a:prstGeom prst="rect">
+            <a:avLst/>
+          </a:prstGeom>
+          <a:noFill/>
+          <a:ln w="9525">
+            <a:noFill/>
+            <a:headEnd/>
+            <a:tailEnd/>
+          </a:ln>
+        </p:spPr>
+      </p:pic>
+    </p:spTree>
+  </p:cSld>
+</p:sld>
+</file>
+
+<file path=ppt/slides/slide59.xml><?xml version="1.0" encoding="utf-8"?>
+<p:sld xmlns:a="http://schemas.openxmlformats.org/drawingml/2006/main" xmlns:r="http://schemas.openxmlformats.org/officeDocument/2006/relationships" xmlns:p="http://schemas.openxmlformats.org/presentationml/2006/main">
+  <p:cSld>
+    <p:spTree>
+      <p:nvGrpSpPr>
+        <p:cNvPr id="1" name=""/>
+        <p:cNvGrpSpPr/>
+        <p:nvPr/>
+      </p:nvGrpSpPr>
+      <p:grpSpPr>
+        <a:xfrm>
+          <a:off x="0" y="0"/>
+          <a:ext cx="0" cy="0"/>
+          <a:chOff x="0" y="0"/>
+          <a:chExt cx="0" cy="0"/>
+        </a:xfrm>
+      </p:grpSpPr>
+      <p:sp>
+        <p:nvSpPr>
+          <p:cNvPr id="2" name="Title 1"/>
+          <p:cNvSpPr>
+            <a:spLocks noGrp="1"/>
+          </p:cNvSpPr>
+          <p:nvPr>
+            <p:ph type="title"/>
+          </p:nvPr>
+        </p:nvSpPr>
+        <p:spPr/>
+        <p:txBody>
+          <a:bodyPr/>
+          <a:lstStyle/>
+          <a:p>
+            <a:pPr lvl="0" indent="0" marL="0">
+              <a:buNone/>
+            </a:pPr>
+            <a:r>
+              <a:rPr/>
+              <a:t>Estimand grid (case-study estimators)</a:t>
+            </a:r>
+          </a:p>
+        </p:txBody>
+      </p:sp>
+      <p:graphicFrame>
+        <p:nvGraphicFramePr>
+          <p:cNvPr id="6" name="Content Placeholder 5"/>
+          <p:cNvGraphicFramePr>
+            <a:graphicFrameLocks noGrp="1"/>
+          </p:cNvGraphicFramePr>
+          <p:nvPr>
+            <p:ph idx="1"/>
+          </p:nvPr>
+        </p:nvGraphicFramePr>
+        <p:xfrm>
+          <a:off x="457200" y="1193800"/>
+          <a:ext cx="8229600" cy="3390900"/>
+        </p:xfrm>
+        <a:graphic>
+          <a:graphicData uri="http://schemas.openxmlformats.org/drawingml/2006/table">
+            <a:tbl>
+              <a:tblPr firstRow="1" bandRow="1">
+                <a:tableStyleId>{5C22544A-7EE6-4342-B048-85BDC9FD1C3A}</a:tableStyleId>
+              </a:tblPr>
+              <a:tblGrid>
+                <a:gridCol w="2057400"/>
+                <a:gridCol w="2057400"/>
+                <a:gridCol w="2057400"/>
+                <a:gridCol w="2057400"/>
+              </a:tblGrid>
+              <a:tr h="0">
+                <a:tc>
+                  <a:txBody>
+                    <a:bodyPr/>
+                    <a:lstStyle/>
+                    <a:p>
+                      <a:pPr lvl="0" indent="0" marL="0">
+                        <a:buNone/>
+                      </a:pPr>
+                      <a:r>
+                        <a:rPr/>
+                        <a:t>#</a:t>
+                      </a:r>
+                    </a:p>
+                  </a:txBody>
+                  <a:tcPr/>
+                </a:tc>
+                <a:tc>
+                  <a:txBody>
+                    <a:bodyPr/>
+                    <a:lstStyle/>
+                    <a:p>
+                      <a:pPr lvl="0" indent="0" marL="0">
+                        <a:buNone/>
+                      </a:pPr>
+                      <a:r>
+                        <a:rPr/>
+                        <a:t>Estimator</a:t>
+                      </a:r>
+                    </a:p>
+                  </a:txBody>
+                  <a:tcPr/>
+                </a:tc>
+                <a:tc>
+                  <a:txBody>
+                    <a:bodyPr/>
+                    <a:lstStyle/>
+                    <a:p>
+                      <a:pPr lvl="0" indent="0" marL="0">
+                        <a:buNone/>
+                      </a:pPr>
+                      <a:r>
+                        <a:rPr/>
+                        <a:t>Outcome</a:t>
+                      </a:r>
+                    </a:p>
+                  </a:txBody>
+                  <a:tcPr/>
+                </a:tc>
+                <a:tc>
+                  <a:txBody>
+                    <a:bodyPr/>
+                    <a:lstStyle/>
+                    <a:p>
+                      <a:pPr lvl="0" indent="0" marL="0">
+                        <a:buNone/>
+                      </a:pPr>
+                      <a:r>
+                        <a:rPr/>
+                        <a:t>Cohort</a:t>
+                      </a:r>
+                    </a:p>
+                  </a:txBody>
+                  <a:tcPr/>
+                </a:tc>
+              </a:tr>
+              <a:tr h="0">
+                <a:tc>
+                  <a:txBody>
+                    <a:bodyPr/>
+                    <a:lstStyle/>
+                    <a:p>
+                      <a:pPr lvl="0" indent="0" marL="0">
+                        <a:buNone/>
+                      </a:pPr>
+                      <a:r>
+                        <a:rPr/>
+                        <a:t>A</a:t>
+                      </a:r>
+                    </a:p>
+                  </a:txBody>
+                </a:tc>
+                <a:tc>
+                  <a:txBody>
+                    <a:bodyPr/>
+                    <a:lstStyle/>
+                    <a:p>
+                      <a:pPr lvl="0" indent="0" marL="0">
+                        <a:buNone/>
+                      </a:pPr>
+                      <a:r>
+                        <a:rPr/>
+                        <a:t>PS-matched logistic regression</a:t>
+                      </a:r>
+                    </a:p>
+                  </a:txBody>
+                </a:tc>
+                <a:tc>
+                  <a:txBody>
+                    <a:bodyPr/>
+                    <a:lstStyle/>
+                    <a:p>
+                      <a:pPr lvl="0" indent="0" marL="0">
+                        <a:buNone/>
+                      </a:pPr>
+                      <a:r>
+                        <a:rPr/>
+                        <a:t>Binary</a:t>
+                      </a:r>
+                    </a:p>
+                  </a:txBody>
+                </a:tc>
+                <a:tc>
+                  <a:txBody>
+                    <a:bodyPr/>
+                    <a:lstStyle/>
+                    <a:p>
+                      <a:pPr lvl="0" indent="0" marL="0">
+                        <a:buNone/>
+                      </a:pPr>
+                      <a:r>
+                        <a:rPr/>
+                        <a:t>Matched</a:t>
+                      </a:r>
+                    </a:p>
+                  </a:txBody>
+                </a:tc>
+              </a:tr>
+              <a:tr h="0">
+                <a:tc>
+                  <a:txBody>
+                    <a:bodyPr/>
+                    <a:lstStyle/>
+                    <a:p>
+                      <a:pPr lvl="0" indent="0" marL="0">
+                        <a:buNone/>
+                      </a:pPr>
+                      <a:r>
+                        <a:rPr/>
+                        <a:t>B</a:t>
+                      </a:r>
+                    </a:p>
+                  </a:txBody>
+                </a:tc>
+                <a:tc>
+                  <a:txBody>
+                    <a:bodyPr/>
+                    <a:lstStyle/>
+                    <a:p>
+                      <a:pPr lvl="0" indent="0" marL="0">
+                        <a:buNone/>
+                      </a:pPr>
+                      <a:r>
+                        <a:rPr/>
+                        <a:t>PS-matched TMLE</a:t>
+                      </a:r>
+                    </a:p>
+                  </a:txBody>
+                </a:tc>
+                <a:tc>
+                  <a:txBody>
+                    <a:bodyPr/>
+                    <a:lstStyle/>
+                    <a:p>
+                      <a:pPr lvl="0" indent="0" marL="0">
+                        <a:buNone/>
+                      </a:pPr>
+                      <a:r>
+                        <a:rPr/>
+                        <a:t>Binary</a:t>
+                      </a:r>
+                    </a:p>
+                  </a:txBody>
+                </a:tc>
+                <a:tc>
+                  <a:txBody>
+                    <a:bodyPr/>
+                    <a:lstStyle/>
+                    <a:p>
+                      <a:pPr lvl="0" indent="0" marL="0">
+                        <a:buNone/>
+                      </a:pPr>
+                      <a:r>
+                        <a:rPr/>
+                        <a:t>Matched</a:t>
+                      </a:r>
+                    </a:p>
+                  </a:txBody>
+                </a:tc>
+              </a:tr>
+              <a:tr h="0">
+                <a:tc>
+                  <a:txBody>
+                    <a:bodyPr/>
+                    <a:lstStyle/>
+                    <a:p>
+                      <a:pPr lvl="0" indent="0" marL="0">
+                        <a:buNone/>
+                      </a:pPr>
+                      <a:r>
+                        <a:rPr/>
+                        <a:t>C</a:t>
+                      </a:r>
+                    </a:p>
+                  </a:txBody>
+                </a:tc>
+                <a:tc>
+                  <a:txBody>
+                    <a:bodyPr/>
+                    <a:lstStyle/>
+                    <a:p>
+                      <a:pPr lvl="0" indent="0" marL="0">
+                        <a:buNone/>
+                      </a:pPr>
+                      <a:r>
+                        <a:rPr/>
+                        <a:t>Outcome-blind plasmode candidate selection</a:t>
+                      </a:r>
+                    </a:p>
+                  </a:txBody>
+                </a:tc>
+                <a:tc>
+                  <a:txBody>
+                    <a:bodyPr/>
+                    <a:lstStyle/>
+                    <a:p>
+                      <a:pPr lvl="0" indent="0" marL="0">
+                        <a:buNone/>
+                      </a:pPr>
+                      <a:r>
+                        <a:rPr/>
+                        <a:t>–</a:t>
+                      </a:r>
+                    </a:p>
+                  </a:txBody>
+                </a:tc>
+                <a:tc>
+                  <a:txBody>
+                    <a:bodyPr/>
+                    <a:lstStyle/>
+                    <a:p>
+                      <a:pPr lvl="0" indent="0" marL="0">
+                        <a:buNone/>
+                      </a:pPr>
+                      <a:r>
+                        <a:rPr/>
+                        <a:t>–</a:t>
+                      </a:r>
+                    </a:p>
+                  </a:txBody>
+                </a:tc>
+              </a:tr>
+              <a:tr h="0">
+                <a:tc>
+                  <a:txBody>
+                    <a:bodyPr/>
+                    <a:lstStyle/>
+                    <a:p>
+                      <a:pPr lvl="0" indent="0" marL="0">
+                        <a:buNone/>
+                      </a:pPr>
+                      <a:r>
+                        <a:rPr/>
+                        <a:t>D</a:t>
+                      </a:r>
+                    </a:p>
+                  </a:txBody>
+                </a:tc>
+                <a:tc>
+                  <a:txBody>
+                    <a:bodyPr/>
+                    <a:lstStyle/>
+                    <a:p>
+                      <a:pPr lvl="0" indent="0" marL="0">
+                        <a:buNone/>
+                      </a:pPr>
+                      <a:r>
+                        <a:rPr/>
+                        <a:t>Full-cohort TMLE</a:t>
+                      </a:r>
+                    </a:p>
+                  </a:txBody>
+                </a:tc>
+                <a:tc>
+                  <a:txBody>
+                    <a:bodyPr/>
+                    <a:lstStyle/>
+                    <a:p>
+                      <a:pPr lvl="0" indent="0" marL="0">
+                        <a:buNone/>
+                      </a:pPr>
+                      <a:r>
+                        <a:rPr/>
+                        <a:t>Binary</a:t>
+                      </a:r>
+                    </a:p>
+                  </a:txBody>
+                </a:tc>
+                <a:tc>
+                  <a:txBody>
+                    <a:bodyPr/>
+                    <a:lstStyle/>
+                    <a:p>
+                      <a:pPr lvl="0" indent="0" marL="0">
+                        <a:buNone/>
+                      </a:pPr>
+                      <a:r>
+                        <a:rPr/>
+                        <a:t>Full</a:t>
+                      </a:r>
+                    </a:p>
+                  </a:txBody>
+                </a:tc>
+              </a:tr>
+              <a:tr h="0">
+                <a:tc>
+                  <a:txBody>
+                    <a:bodyPr/>
+                    <a:lstStyle/>
+                    <a:p>
+                      <a:pPr lvl="0" indent="0" marL="0">
+                        <a:buNone/>
+                      </a:pPr>
+                      <a:r>
+                        <a:rPr/>
+                        <a:t>E</a:t>
+                      </a:r>
+                    </a:p>
+                  </a:txBody>
+                </a:tc>
+                <a:tc>
+                  <a:txBody>
+                    <a:bodyPr/>
+                    <a:lstStyle/>
+                    <a:p>
+                      <a:pPr lvl="0" indent="0" marL="0">
+                        <a:buNone/>
+                      </a:pPr>
+                      <a:r>
+                        <a:rPr/>
+                        <a:t>IPTW (stabilised)</a:t>
+                      </a:r>
+                    </a:p>
+                  </a:txBody>
+                </a:tc>
+                <a:tc>
+                  <a:txBody>
+                    <a:bodyPr/>
+                    <a:lstStyle/>
+                    <a:p>
+                      <a:pPr lvl="0" indent="0" marL="0">
+                        <a:buNone/>
+                      </a:pPr>
+                      <a:r>
+                        <a:rPr/>
+                        <a:t>Binary</a:t>
+                      </a:r>
+                    </a:p>
+                  </a:txBody>
+                </a:tc>
+                <a:tc>
+                  <a:txBody>
+                    <a:bodyPr/>
+                    <a:lstStyle/>
+                    <a:p>
+                      <a:pPr lvl="0" indent="0" marL="0">
+                        <a:buNone/>
+                      </a:pPr>
+                      <a:r>
+                        <a:rPr/>
+                        <a:t>Full</a:t>
+                      </a:r>
+                    </a:p>
+                  </a:txBody>
+                </a:tc>
+              </a:tr>
+              <a:tr h="0">
+                <a:tc>
+                  <a:txBody>
+                    <a:bodyPr/>
+                    <a:lstStyle/>
+                    <a:p>
+                      <a:pPr lvl="0" indent="0" marL="0">
+                        <a:buNone/>
+                      </a:pPr>
+                      <a:r>
+                        <a:rPr/>
+                        <a:t>F</a:t>
+                      </a:r>
+                    </a:p>
+                  </a:txBody>
+                </a:tc>
+                <a:tc>
+                  <a:txBody>
+                    <a:bodyPr/>
+                    <a:lstStyle/>
+                    <a:p>
+                      <a:pPr lvl="0" indent="0" marL="0">
+                        <a:buNone/>
+                      </a:pPr>
+                      <a:r>
+                        <a:rPr/>
+                        <a:t>Complete-outcome TMLE with IPCW weights</a:t>
+                      </a:r>
+                    </a:p>
+                  </a:txBody>
+                </a:tc>
+                <a:tc>
+                  <a:txBody>
+                    <a:bodyPr/>
+                    <a:lstStyle/>
+                    <a:p>
+                      <a:pPr lvl="0" indent="0" marL="0">
+                        <a:buNone/>
+                      </a:pPr>
+                      <a:r>
+                        <a:rPr/>
+                        <a:t>Binary</a:t>
+                      </a:r>
+                    </a:p>
+                  </a:txBody>
+                </a:tc>
+                <a:tc>
+                  <a:txBody>
+                    <a:bodyPr/>
+                    <a:lstStyle/>
+                    <a:p>
+                      <a:pPr lvl="0" indent="0" marL="0">
+                        <a:buNone/>
+                      </a:pPr>
+                      <a:r>
+                        <a:rPr/>
+                        <a:t>Complete-outcome</a:t>
+                      </a:r>
+                    </a:p>
+                  </a:txBody>
+                </a:tc>
+              </a:tr>
+              <a:tr h="0">
+                <a:tc>
+                  <a:txBody>
+                    <a:bodyPr/>
+                    <a:lstStyle/>
+                    <a:p>
+                      <a:pPr lvl="0" indent="0" marL="0">
+                        <a:buNone/>
+                      </a:pPr>
+                      <a:r>
+                        <a:rPr/>
+                        <a:t>G</a:t>
+                      </a:r>
+                    </a:p>
+                  </a:txBody>
+                </a:tc>
+                <a:tc>
+                  <a:txBody>
+                    <a:bodyPr/>
+                    <a:lstStyle/>
+                    <a:p>
+                      <a:pPr lvl="0" indent="0" marL="0">
+                        <a:buNone/>
+                      </a:pPr>
+                      <a:r>
+                        <a:rPr/>
+                        <a:t>Survival TMLE (experimental)</a:t>
+                      </a:r>
+                    </a:p>
+                  </a:txBody>
+                </a:tc>
+                <a:tc>
+                  <a:txBody>
+                    <a:bodyPr/>
+                    <a:lstStyle/>
+                    <a:p>
+                      <a:pPr lvl="0" indent="0" marL="0">
+                        <a:buNone/>
+                      </a:pPr>
+                      <a:r>
+                        <a:rPr/>
+                        <a:t>Survival</a:t>
+                      </a:r>
+                    </a:p>
+                  </a:txBody>
+                </a:tc>
+                <a:tc>
+                  <a:txBody>
+                    <a:bodyPr/>
+                    <a:lstStyle/>
+                    <a:p>
+                      <a:pPr lvl="0" indent="0" marL="0">
+                        <a:buNone/>
+                      </a:pPr>
+                      <a:r>
+                        <a:rPr/>
+                        <a:t>Full</a:t>
+                      </a:r>
+                    </a:p>
+                  </a:txBody>
+                </a:tc>
+              </a:tr>
+              <a:tr h="0">
+                <a:tc>
+                  <a:txBody>
+                    <a:bodyPr/>
+                    <a:lstStyle/>
+                    <a:p>
+                      <a:pPr lvl="0" indent="0" marL="0">
+                        <a:buNone/>
+                      </a:pPr>
+                      <a:r>
+                        <a:rPr/>
+                        <a:t>H</a:t>
+                      </a:r>
+                    </a:p>
+                  </a:txBody>
+                </a:tc>
+                <a:tc>
+                  <a:txBody>
+                    <a:bodyPr/>
+                    <a:lstStyle/>
+                    <a:p>
+                      <a:pPr lvl="0" indent="0" marL="0">
+                        <a:buNone/>
+                      </a:pPr>
+                      <a:r>
+                        <a:rPr/>
+                        <a:t>Cox PH (sensitivity)</a:t>
+                      </a:r>
+                    </a:p>
+                  </a:txBody>
+                </a:tc>
+                <a:tc>
+                  <a:txBody>
+                    <a:bodyPr/>
+                    <a:lstStyle/>
+                    <a:p>
+                      <a:pPr lvl="0" indent="0" marL="0">
+                        <a:buNone/>
+                      </a:pPr>
+                      <a:r>
+                        <a:rPr/>
+                        <a:t>Survival</a:t>
+                      </a:r>
+                    </a:p>
+                  </a:txBody>
+                </a:tc>
+                <a:tc>
+                  <a:txBody>
+                    <a:bodyPr/>
+                    <a:lstStyle/>
+                    <a:p>
+                      <a:pPr lvl="0" indent="0" marL="0">
+                        <a:buNone/>
+                      </a:pPr>
+                      <a:r>
+                        <a:rPr/>
+                        <a:t>Full</a:t>
+                      </a:r>
+                    </a:p>
+                  </a:txBody>
+                </a:tc>
+              </a:tr>
+            </a:tbl>
+          </a:graphicData>
+        </a:graphic>
+      </p:graphicFrame>
+    </p:spTree>
+  </p:cSld>
+</p:sld>
+</file>
+
 <file path=ppt/slides/slide6.xml><?xml version="1.0" encoding="utf-8"?>
 <p:sld xmlns:a="http://schemas.openxmlformats.org/drawingml/2006/main" xmlns:r="http://schemas.openxmlformats.org/officeDocument/2006/relationships" xmlns:p="http://schemas.openxmlformats.org/presentationml/2006/main">
   <p:cSld>
@@ -9042,6 +11233,4252 @@
           </a:p>
         </p:txBody>
       </p:sp>
+    </p:spTree>
+  </p:cSld>
+</p:sld>
+</file>
+
+<file path=ppt/slides/slide60.xml><?xml version="1.0" encoding="utf-8"?>
+<p:sld xmlns:a="http://schemas.openxmlformats.org/drawingml/2006/main" xmlns:r="http://schemas.openxmlformats.org/officeDocument/2006/relationships" xmlns:p="http://schemas.openxmlformats.org/presentationml/2006/main">
+  <p:cSld>
+    <p:spTree>
+      <p:nvGrpSpPr>
+        <p:cNvPr id="1" name=""/>
+        <p:cNvGrpSpPr/>
+        <p:nvPr/>
+      </p:nvGrpSpPr>
+      <p:grpSpPr>
+        <a:xfrm>
+          <a:off x="0" y="0"/>
+          <a:ext cx="0" cy="0"/>
+          <a:chOff x="0" y="0"/>
+          <a:chExt cx="0" cy="0"/>
+        </a:xfrm>
+      </p:grpSpPr>
+      <p:sp>
+        <p:nvSpPr>
+          <p:cNvPr id="2" name="Title 1"/>
+          <p:cNvSpPr>
+            <a:spLocks noGrp="1"/>
+          </p:cNvSpPr>
+          <p:nvPr>
+            <p:ph type="title"/>
+          </p:nvPr>
+        </p:nvSpPr>
+        <p:spPr/>
+        <p:txBody>
+          <a:bodyPr/>
+          <a:lstStyle/>
+          <a:p>
+            <a:pPr lvl="0" indent="0" marL="0">
+              <a:buNone/>
+            </a:pPr>
+            <a:r>
+              <a:rPr/>
+              <a:t>Target-trial timing table</a:t>
+            </a:r>
+          </a:p>
+        </p:txBody>
+      </p:sp>
+      <p:graphicFrame>
+        <p:nvGraphicFramePr>
+          <p:cNvPr id="6" name="Content Placeholder 5"/>
+          <p:cNvGraphicFramePr>
+            <a:graphicFrameLocks noGrp="1"/>
+          </p:cNvGraphicFramePr>
+          <p:nvPr>
+            <p:ph idx="1"/>
+          </p:nvPr>
+        </p:nvGraphicFramePr>
+        <p:xfrm>
+          <a:off x="457200" y="1193800"/>
+          <a:ext cx="8229600" cy="3390900"/>
+        </p:xfrm>
+        <a:graphic>
+          <a:graphicData uri="http://schemas.openxmlformats.org/drawingml/2006/table">
+            <a:tbl>
+              <a:tblPr firstRow="1" bandRow="1">
+                <a:tableStyleId>{5C22544A-7EE6-4342-B048-85BDC9FD1C3A}</a:tableStyleId>
+              </a:tblPr>
+              <a:tblGrid>
+                <a:gridCol w="2743200"/>
+                <a:gridCol w="2743200"/>
+                <a:gridCol w="2743200"/>
+              </a:tblGrid>
+              <a:tr h="0">
+                <a:tc>
+                  <a:txBody>
+                    <a:bodyPr/>
+                    <a:lstStyle/>
+                    <a:p>
+                      <a:pPr lvl="0" indent="0" marL="0">
+                        <a:buNone/>
+                      </a:pPr>
+                      <a:r>
+                        <a:rPr/>
+                        <a:t>Design element</a:t>
+                      </a:r>
+                    </a:p>
+                  </a:txBody>
+                  <a:tcPr/>
+                </a:tc>
+                <a:tc>
+                  <a:txBody>
+                    <a:bodyPr/>
+                    <a:lstStyle/>
+                    <a:p>
+                      <a:pPr lvl="0" indent="0" marL="0">
+                        <a:buNone/>
+                      </a:pPr>
+                      <a:r>
+                        <a:rPr/>
+                        <a:t>Rescue.Co implementation</a:t>
+                      </a:r>
+                    </a:p>
+                  </a:txBody>
+                  <a:tcPr/>
+                </a:tc>
+                <a:tc>
+                  <a:txBody>
+                    <a:bodyPr/>
+                    <a:lstStyle/>
+                    <a:p>
+                      <a:pPr lvl="0" indent="0" marL="0">
+                        <a:buNone/>
+                      </a:pPr>
+                      <a:r>
+                        <a:rPr/>
+                        <a:t>Pre-outcome status</a:t>
+                      </a:r>
+                    </a:p>
+                  </a:txBody>
+                  <a:tcPr/>
+                </a:tc>
+              </a:tr>
+              <a:tr h="0">
+                <a:tc>
+                  <a:txBody>
+                    <a:bodyPr/>
+                    <a:lstStyle/>
+                    <a:p>
+                      <a:pPr lvl="0" indent="0" marL="0">
+                        <a:buNone/>
+                      </a:pPr>
+                      <a:r>
+                        <a:rPr/>
+                        <a:t>Index date / time zero</a:t>
+                      </a:r>
+                    </a:p>
+                  </a:txBody>
+                </a:tc>
+                <a:tc>
+                  <a:txBody>
+                    <a:bodyPr/>
+                    <a:lstStyle/>
+                    <a:p>
+                      <a:pPr lvl="0" indent="0" marL="0">
+                        <a:buNone/>
+                      </a:pPr>
+                      <a:r>
+                        <a:rPr/>
+                        <a:t>Trauma-related ambulance arrival at participating hospital</a:t>
+                      </a:r>
+                    </a:p>
+                  </a:txBody>
+                </a:tc>
+                <a:tc>
+                  <a:txBody>
+                    <a:bodyPr/>
+                    <a:lstStyle/>
+                    <a:p>
+                      <a:pPr lvl="0" indent="0" marL="0">
+                        <a:buNone/>
+                      </a:pPr>
+                      <a:r>
+                        <a:rPr/>
+                        <a:t>Locked in </a:t>
+                      </a:r>
+                      <a:r>
+                        <a:rPr>
+                          <a:latin typeface="Courier"/>
+                        </a:rPr>
+                        <a:t>identify_interval()</a:t>
+                      </a:r>
+                    </a:p>
+                  </a:txBody>
+                </a:tc>
+              </a:tr>
+              <a:tr h="0">
+                <a:tc>
+                  <a:txBody>
+                    <a:bodyPr/>
+                    <a:lstStyle/>
+                    <a:p>
+                      <a:pPr lvl="0" indent="0" marL="0">
+                        <a:buNone/>
+                      </a:pPr>
+                      <a:r>
+                        <a:rPr/>
+                        <a:t>Treatment definition</a:t>
+                      </a:r>
+                    </a:p>
+                  </a:txBody>
+                </a:tc>
+                <a:tc>
+                  <a:txBody>
+                    <a:bodyPr/>
+                    <a:lstStyle/>
+                    <a:p>
+                      <a:pPr lvl="0" indent="0" marL="0">
+                        <a:buNone/>
+                      </a:pPr>
+                      <a:r>
+                        <a:rPr/>
+                        <a:t>Rescue.Co EMS (A=1) vs other ambulance (A=0) at index</a:t>
+                      </a:r>
+                    </a:p>
+                  </a:txBody>
+                </a:tc>
+                <a:tc>
+                  <a:txBody>
+                    <a:bodyPr/>
+                    <a:lstStyle/>
+                    <a:p>
+                      <a:pPr lvl="0" indent="0" marL="0">
+                        <a:buNone/>
+                      </a:pPr>
+                      <a:r>
+                        <a:rPr/>
+                        <a:t>Locked in </a:t>
+                      </a:r>
+                      <a:r>
+                        <a:rPr>
+                          <a:latin typeface="Courier"/>
+                        </a:rPr>
+                        <a:t>identify_treatment()</a:t>
+                      </a:r>
+                    </a:p>
+                  </a:txBody>
+                </a:tc>
+              </a:tr>
+              <a:tr h="0">
+                <a:tc>
+                  <a:txBody>
+                    <a:bodyPr/>
+                    <a:lstStyle/>
+                    <a:p>
+                      <a:pPr lvl="0" indent="0" marL="0">
+                        <a:buNone/>
+                      </a:pPr>
+                      <a:r>
+                        <a:rPr/>
+                        <a:t>Reference group</a:t>
+                      </a:r>
+                    </a:p>
+                  </a:txBody>
+                </a:tc>
+                <a:tc>
+                  <a:txBody>
+                    <a:bodyPr/>
+                    <a:lstStyle/>
+                    <a:p>
+                      <a:pPr lvl="0" indent="0" marL="0">
+                        <a:buNone/>
+                      </a:pPr>
+                      <a:r>
+                        <a:rPr/>
+                        <a:t>Other ambulance services, same hospitals + period</a:t>
+                      </a:r>
+                    </a:p>
+                  </a:txBody>
+                </a:tc>
+                <a:tc>
+                  <a:txBody>
+                    <a:bodyPr/>
+                    <a:lstStyle/>
+                    <a:p>
+                      <a:pPr lvl="0" indent="0" marL="0">
+                        <a:buNone/>
+                      </a:pPr>
+                      <a:r>
+                        <a:rPr/>
+                        <a:t>Locked</a:t>
+                      </a:r>
+                    </a:p>
+                  </a:txBody>
+                </a:tc>
+              </a:tr>
+              <a:tr h="0">
+                <a:tc>
+                  <a:txBody>
+                    <a:bodyPr/>
+                    <a:lstStyle/>
+                    <a:p>
+                      <a:pPr lvl="0" indent="0" marL="0">
+                        <a:buNone/>
+                      </a:pPr>
+                      <a:r>
+                        <a:rPr/>
+                        <a:t>Eligibility window</a:t>
+                      </a:r>
+                    </a:p>
+                  </a:txBody>
+                </a:tc>
+                <a:tc>
+                  <a:txBody>
+                    <a:bodyPr/>
+                    <a:lstStyle/>
+                    <a:p>
+                      <a:pPr lvl="0" indent="0" marL="0">
+                        <a:buNone/>
+                      </a:pPr>
+                      <a:r>
+                        <a:rPr/>
+                        <a:t>2018-2024 trauma transports, direct-from-scene only</a:t>
+                      </a:r>
+                    </a:p>
+                  </a:txBody>
+                </a:tc>
+                <a:tc>
+                  <a:txBody>
+                    <a:bodyPr/>
+                    <a:lstStyle/>
+                    <a:p>
+                      <a:pPr lvl="0" indent="0" marL="0">
+                        <a:buNone/>
+                      </a:pPr>
+                      <a:r>
+                        <a:rPr/>
+                        <a:t>Locked</a:t>
+                      </a:r>
+                    </a:p>
+                  </a:txBody>
+                </a:tc>
+              </a:tr>
+              <a:tr h="0">
+                <a:tc>
+                  <a:txBody>
+                    <a:bodyPr/>
+                    <a:lstStyle/>
+                    <a:p>
+                      <a:pPr lvl="0" indent="0" marL="0">
+                        <a:buNone/>
+                      </a:pPr>
+                      <a:r>
+                        <a:rPr/>
+                        <a:t>Covariate window</a:t>
+                      </a:r>
+                    </a:p>
+                  </a:txBody>
+                </a:tc>
+                <a:tc>
+                  <a:txBody>
+                    <a:bodyPr/>
+                    <a:lstStyle/>
+                    <a:p>
+                      <a:pPr lvl="0" indent="0" marL="0">
+                        <a:buNone/>
+                      </a:pPr>
+                      <a:r>
+                        <a:rPr/>
+                        <a:t>At or before index</a:t>
+                      </a:r>
+                    </a:p>
+                  </a:txBody>
+                </a:tc>
+                <a:tc>
+                  <a:txBody>
+                    <a:bodyPr/>
+                    <a:lstStyle/>
+                    <a:p>
+                      <a:pPr lvl="0" indent="0" marL="0">
+                        <a:buNone/>
+                      </a:pPr>
+                      <a:r>
+                        <a:rPr/>
+                        <a:t>Locked</a:t>
+                      </a:r>
+                    </a:p>
+                  </a:txBody>
+                </a:tc>
+              </a:tr>
+              <a:tr h="0">
+                <a:tc>
+                  <a:txBody>
+                    <a:bodyPr/>
+                    <a:lstStyle/>
+                    <a:p>
+                      <a:pPr lvl="0" indent="0" marL="0">
+                        <a:buNone/>
+                      </a:pPr>
+                      <a:r>
+                        <a:rPr/>
+                        <a:t>Outcome window</a:t>
+                      </a:r>
+                    </a:p>
+                  </a:txBody>
+                </a:tc>
+                <a:tc>
+                  <a:txBody>
+                    <a:bodyPr/>
+                    <a:lstStyle/>
+                    <a:p>
+                      <a:pPr lvl="0" indent="0" marL="0">
+                        <a:buNone/>
+                      </a:pPr>
+                      <a:r>
+                        <a:rPr/>
+                        <a:t>6 months from index</a:t>
+                      </a:r>
+                    </a:p>
+                  </a:txBody>
+                </a:tc>
+                <a:tc>
+                  <a:txBody>
+                    <a:bodyPr/>
+                    <a:lstStyle/>
+                    <a:p>
+                      <a:pPr lvl="0" indent="0" marL="0">
+                        <a:buNone/>
+                      </a:pPr>
+                      <a:r>
+                        <a:rPr/>
+                        <a:t>Locked</a:t>
+                      </a:r>
+                    </a:p>
+                  </a:txBody>
+                </a:tc>
+              </a:tr>
+              <a:tr h="0">
+                <a:tc>
+                  <a:txBody>
+                    <a:bodyPr/>
+                    <a:lstStyle/>
+                    <a:p>
+                      <a:pPr lvl="0" indent="0" marL="0">
+                        <a:buNone/>
+                      </a:pPr>
+                      <a:r>
+                        <a:rPr/>
+                        <a:t>Outcome definition</a:t>
+                      </a:r>
+                    </a:p>
+                  </a:txBody>
+                </a:tc>
+                <a:tc>
+                  <a:txBody>
+                    <a:bodyPr/>
+                    <a:lstStyle/>
+                    <a:p>
+                      <a:pPr lvl="0" indent="0" marL="0">
+                        <a:buNone/>
+                      </a:pPr>
+                      <a:r>
+                        <a:rPr/>
+                        <a:t>GOSE &gt; 4 at 6 months</a:t>
+                      </a:r>
+                    </a:p>
+                  </a:txBody>
+                </a:tc>
+                <a:tc>
+                  <a:txBody>
+                    <a:bodyPr/>
+                    <a:lstStyle/>
+                    <a:p>
+                      <a:pPr lvl="0" indent="0" marL="0">
+                        <a:buNone/>
+                      </a:pPr>
+                      <a:r>
+                        <a:rPr/>
+                        <a:t>Locked</a:t>
+                      </a:r>
+                    </a:p>
+                  </a:txBody>
+                </a:tc>
+              </a:tr>
+              <a:tr h="0">
+                <a:tc>
+                  <a:txBody>
+                    <a:bodyPr/>
+                    <a:lstStyle/>
+                    <a:p>
+                      <a:pPr lvl="0" indent="0" marL="0">
+                        <a:buNone/>
+                      </a:pPr>
+                      <a:r>
+                        <a:rPr/>
+                        <a:t>Missingness / censoring</a:t>
+                      </a:r>
+                    </a:p>
+                  </a:txBody>
+                </a:tc>
+                <a:tc>
+                  <a:txBody>
+                    <a:bodyPr/>
+                    <a:lstStyle/>
+                    <a:p>
+                      <a:pPr lvl="0" indent="0" marL="0">
+                        <a:buNone/>
+                      </a:pPr>
+                      <a:r>
+                        <a:rPr/>
+                        <a:t>Missing 6-month GOSE; primary complete-outcome + IPCW sensitivity</a:t>
+                      </a:r>
+                    </a:p>
+                  </a:txBody>
+                </a:tc>
+                <a:tc>
+                  <a:txBody>
+                    <a:bodyPr/>
+                    <a:lstStyle/>
+                    <a:p>
+                      <a:pPr lvl="0" indent="0" marL="0">
+                        <a:buNone/>
+                      </a:pPr>
+                      <a:r>
+                        <a:rPr/>
+                        <a:t>Locked</a:t>
+                      </a:r>
+                    </a:p>
+                  </a:txBody>
+                </a:tc>
+              </a:tr>
+              <a:tr h="0">
+                <a:tc>
+                  <a:txBody>
+                    <a:bodyPr/>
+                    <a:lstStyle/>
+                    <a:p>
+                      <a:pPr lvl="0" indent="0" marL="0">
+                        <a:buNone/>
+                      </a:pPr>
+                      <a:r>
+                        <a:rPr/>
+                        <a:t>Switching / discontinuation</a:t>
+                      </a:r>
+                    </a:p>
+                  </a:txBody>
+                </a:tc>
+                <a:tc>
+                  <a:txBody>
+                    <a:bodyPr/>
+                    <a:lstStyle/>
+                    <a:p>
+                      <a:pPr lvl="0" indent="0" marL="0">
+                        <a:buNone/>
+                      </a:pPr>
+                      <a:r>
+                        <a:rPr/>
+                        <a:t>Not applicable (point exposure at scene)</a:t>
+                      </a:r>
+                    </a:p>
+                  </a:txBody>
+                </a:tc>
+                <a:tc>
+                  <a:txBody>
+                    <a:bodyPr/>
+                    <a:lstStyle/>
+                    <a:p>
+                      <a:pPr lvl="0" indent="0" marL="0">
+                        <a:buNone/>
+                      </a:pPr>
+                      <a:r>
+                        <a:rPr/>
+                        <a:t>Locked</a:t>
+                      </a:r>
+                    </a:p>
+                  </a:txBody>
+                </a:tc>
+              </a:tr>
+              <a:tr h="0">
+                <a:tc>
+                  <a:txBody>
+                    <a:bodyPr/>
+                    <a:lstStyle/>
+                    <a:p>
+                      <a:pPr lvl="0" indent="0" marL="0">
+                        <a:buNone/>
+                      </a:pPr>
+                      <a:r>
+                        <a:rPr/>
+                        <a:t>Administrative end of FU</a:t>
+                      </a:r>
+                    </a:p>
+                  </a:txBody>
+                </a:tc>
+                <a:tc>
+                  <a:txBody>
+                    <a:bodyPr/>
+                    <a:lstStyle/>
+                    <a:p>
+                      <a:pPr lvl="0" indent="0" marL="0">
+                        <a:buNone/>
+                      </a:pPr>
+                      <a:r>
+                        <a:rPr/>
+                        <a:t>Fixed at 6 months</a:t>
+                      </a:r>
+                    </a:p>
+                  </a:txBody>
+                </a:tc>
+                <a:tc>
+                  <a:txBody>
+                    <a:bodyPr/>
+                    <a:lstStyle/>
+                    <a:p>
+                      <a:pPr lvl="0" indent="0" marL="0">
+                        <a:buNone/>
+                      </a:pPr>
+                      <a:r>
+                        <a:rPr/>
+                        <a:t>Locked</a:t>
+                      </a:r>
+                    </a:p>
+                  </a:txBody>
+                </a:tc>
+              </a:tr>
+              <a:tr h="0">
+                <a:tc>
+                  <a:txBody>
+                    <a:bodyPr/>
+                    <a:lstStyle/>
+                    <a:p>
+                      <a:pPr lvl="0" indent="0" marL="0">
+                        <a:buNone/>
+                      </a:pPr>
+                      <a:r>
+                        <a:rPr/>
+                        <a:t>Excluded intercurrent events</a:t>
+                      </a:r>
+                    </a:p>
+                  </a:txBody>
+                </a:tc>
+                <a:tc>
+                  <a:txBody>
+                    <a:bodyPr/>
+                    <a:lstStyle/>
+                    <a:p>
+                      <a:pPr lvl="0" indent="0" marL="0">
+                        <a:buNone/>
+                      </a:pPr>
+                      <a:r>
+                        <a:rPr/>
+                        <a:t>Inter-facility transfers excluded; recorded as </a:t>
+                      </a:r>
+                      <a:r>
+                        <a:rPr>
+                          <a:latin typeface="Courier"/>
+                        </a:rPr>
+                        <a:t>is_transfer</a:t>
+                      </a:r>
+                    </a:p>
+                  </a:txBody>
+                </a:tc>
+                <a:tc>
+                  <a:txBody>
+                    <a:bodyPr/>
+                    <a:lstStyle/>
+                    <a:p>
+                      <a:pPr lvl="0" indent="0" marL="0">
+                        <a:buNone/>
+                      </a:pPr>
+                      <a:r>
+                        <a:rPr/>
+                        <a:t>Locked</a:t>
+                      </a:r>
+                    </a:p>
+                  </a:txBody>
+                </a:tc>
+              </a:tr>
+            </a:tbl>
+          </a:graphicData>
+        </a:graphic>
+      </p:graphicFrame>
+    </p:spTree>
+  </p:cSld>
+</p:sld>
+</file>
+
+<file path=ppt/slides/slide61.xml><?xml version="1.0" encoding="utf-8"?>
+<p:sld xmlns:a="http://schemas.openxmlformats.org/drawingml/2006/main" xmlns:r="http://schemas.openxmlformats.org/officeDocument/2006/relationships" xmlns:p="http://schemas.openxmlformats.org/presentationml/2006/main">
+  <p:cSld>
+    <p:spTree>
+      <p:nvGrpSpPr>
+        <p:cNvPr id="1" name=""/>
+        <p:cNvGrpSpPr/>
+        <p:nvPr/>
+      </p:nvGrpSpPr>
+      <p:grpSpPr>
+        <a:xfrm>
+          <a:off x="0" y="0"/>
+          <a:ext cx="0" cy="0"/>
+          <a:chOff x="0" y="0"/>
+          <a:chExt cx="0" cy="0"/>
+        </a:xfrm>
+      </p:grpSpPr>
+      <p:sp>
+        <p:nvSpPr>
+          <p:cNvPr id="2" name="Title 1"/>
+          <p:cNvSpPr>
+            <a:spLocks noGrp="1"/>
+          </p:cNvSpPr>
+          <p:nvPr>
+            <p:ph type="title"/>
+          </p:nvPr>
+        </p:nvSpPr>
+        <p:spPr/>
+        <p:txBody>
+          <a:bodyPr/>
+          <a:lstStyle/>
+          <a:p>
+            <a:pPr lvl="0" indent="0" marL="0">
+              <a:buNone/>
+            </a:pPr>
+            <a:r>
+              <a:rPr/>
+              <a:t>Event-process table</a:t>
+            </a:r>
+          </a:p>
+        </p:txBody>
+      </p:sp>
+      <p:graphicFrame>
+        <p:nvGraphicFramePr>
+          <p:cNvPr id="6" name="Content Placeholder 5"/>
+          <p:cNvGraphicFramePr>
+            <a:graphicFrameLocks noGrp="1"/>
+          </p:cNvGraphicFramePr>
+          <p:nvPr>
+            <p:ph idx="1"/>
+          </p:nvPr>
+        </p:nvGraphicFramePr>
+        <p:xfrm>
+          <a:off x="457200" y="1193800"/>
+          <a:ext cx="8229600" cy="3390900"/>
+        </p:xfrm>
+        <a:graphic>
+          <a:graphicData uri="http://schemas.openxmlformats.org/drawingml/2006/table">
+            <a:tbl>
+              <a:tblPr firstRow="1" bandRow="1">
+                <a:tableStyleId>{5C22544A-7EE6-4342-B048-85BDC9FD1C3A}</a:tableStyleId>
+              </a:tblPr>
+              <a:tblGrid>
+                <a:gridCol w="2743200"/>
+                <a:gridCol w="2743200"/>
+                <a:gridCol w="2743200"/>
+              </a:tblGrid>
+              <a:tr h="0">
+                <a:tc>
+                  <a:txBody>
+                    <a:bodyPr/>
+                    <a:lstStyle/>
+                    <a:p>
+                      <a:pPr lvl="0" indent="0" marL="0">
+                        <a:buNone/>
+                      </a:pPr>
+                      <a:r>
+                        <a:rPr/>
+                        <a:t>Event-like quantity</a:t>
+                      </a:r>
+                    </a:p>
+                  </a:txBody>
+                  <a:tcPr/>
+                </a:tc>
+                <a:tc>
+                  <a:txBody>
+                    <a:bodyPr/>
+                    <a:lstStyle/>
+                    <a:p>
+                      <a:pPr lvl="0" indent="0" marL="0">
+                        <a:buNone/>
+                      </a:pPr>
+                      <a:r>
+                        <a:rPr/>
+                        <a:t>Class</a:t>
+                      </a:r>
+                    </a:p>
+                  </a:txBody>
+                  <a:tcPr/>
+                </a:tc>
+                <a:tc>
+                  <a:txBody>
+                    <a:bodyPr/>
+                    <a:lstStyle/>
+                    <a:p>
+                      <a:pPr lvl="0" indent="0" marL="0">
+                        <a:buNone/>
+                      </a:pPr>
+                      <a:r>
+                        <a:rPr/>
+                        <a:t>Handling</a:t>
+                      </a:r>
+                    </a:p>
+                  </a:txBody>
+                  <a:tcPr/>
+                </a:tc>
+              </a:tr>
+              <a:tr h="0">
+                <a:tc>
+                  <a:txBody>
+                    <a:bodyPr/>
+                    <a:lstStyle/>
+                    <a:p>
+                      <a:pPr lvl="0" indent="0" marL="0">
+                        <a:buNone/>
+                      </a:pPr>
+                      <a:r>
+                        <a:rPr/>
+                        <a:t>GOSE &gt; 4 at 6 months</a:t>
+                      </a:r>
+                    </a:p>
+                  </a:txBody>
+                </a:tc>
+                <a:tc>
+                  <a:txBody>
+                    <a:bodyPr/>
+                    <a:lstStyle/>
+                    <a:p>
+                      <a:pPr lvl="0" indent="0" marL="0">
+                        <a:buNone/>
+                      </a:pPr>
+                      <a:r>
+                        <a:rPr/>
+                        <a:t>Event of interest (outcome)</a:t>
+                      </a:r>
+                    </a:p>
+                  </a:txBody>
+                </a:tc>
+                <a:tc>
+                  <a:txBody>
+                    <a:bodyPr/>
+                    <a:lstStyle/>
+                    <a:p>
+                      <a:pPr lvl="0" indent="0" marL="0">
+                        <a:buNone/>
+                      </a:pPr>
+                      <a:r>
+                        <a:rPr/>
+                        <a:t>Estimand: marginal RD on this binary outcome</a:t>
+                      </a:r>
+                    </a:p>
+                  </a:txBody>
+                </a:tc>
+              </a:tr>
+              <a:tr h="0">
+                <a:tc>
+                  <a:txBody>
+                    <a:bodyPr/>
+                    <a:lstStyle/>
+                    <a:p>
+                      <a:pPr lvl="0" indent="0" marL="0">
+                        <a:buNone/>
+                      </a:pPr>
+                      <a:r>
+                        <a:rPr/>
+                        <a:t>GOSE missing at 6 months</a:t>
+                      </a:r>
+                    </a:p>
+                  </a:txBody>
+                </a:tc>
+                <a:tc>
+                  <a:txBody>
+                    <a:bodyPr/>
+                    <a:lstStyle/>
+                    <a:p>
+                      <a:pPr lvl="0" indent="0" marL="0">
+                        <a:buNone/>
+                      </a:pPr>
+                      <a:r>
+                        <a:rPr/>
+                        <a:t>Missingness</a:t>
+                      </a:r>
+                    </a:p>
+                  </a:txBody>
+                </a:tc>
+                <a:tc>
+                  <a:txBody>
+                    <a:bodyPr/>
+                    <a:lstStyle/>
+                    <a:p>
+                      <a:pPr lvl="0" indent="0" marL="0">
+                        <a:buNone/>
+                      </a:pPr>
+                      <a:r>
+                        <a:rPr/>
+                        <a:t>Primary: complete-outcome; IPCW sensitivity</a:t>
+                      </a:r>
+                    </a:p>
+                  </a:txBody>
+                </a:tc>
+              </a:tr>
+              <a:tr h="0">
+                <a:tc>
+                  <a:txBody>
+                    <a:bodyPr/>
+                    <a:lstStyle/>
+                    <a:p>
+                      <a:pPr lvl="0" indent="0" marL="0">
+                        <a:buNone/>
+                      </a:pPr>
+                      <a:r>
+                        <a:rPr/>
+                        <a:t>In-hospital death before 6-month GOSE</a:t>
+                      </a:r>
+                    </a:p>
+                  </a:txBody>
+                </a:tc>
+                <a:tc>
+                  <a:txBody>
+                    <a:bodyPr/>
+                    <a:lstStyle/>
+                    <a:p>
+                      <a:pPr lvl="0" indent="0" marL="0">
+                        <a:buNone/>
+                      </a:pPr>
+                      <a:r>
+                        <a:rPr/>
+                        <a:t>Outcome component / intercurrent event</a:t>
+                      </a:r>
+                    </a:p>
+                  </a:txBody>
+                </a:tc>
+                <a:tc>
+                  <a:txBody>
+                    <a:bodyPr/>
+                    <a:lstStyle/>
+                    <a:p>
+                      <a:pPr lvl="0" indent="0" marL="0">
+                        <a:buNone/>
+                      </a:pPr>
+                      <a:r>
+                        <a:rPr/>
+                        <a:t>Coded as GOSE = 1 (worst-rank)</a:t>
+                      </a:r>
+                    </a:p>
+                  </a:txBody>
+                </a:tc>
+              </a:tr>
+              <a:tr h="0">
+                <a:tc>
+                  <a:txBody>
+                    <a:bodyPr/>
+                    <a:lstStyle/>
+                    <a:p>
+                      <a:pPr lvl="0" indent="0" marL="0">
+                        <a:buNone/>
+                      </a:pPr>
+                      <a:r>
+                        <a:rPr/>
+                        <a:t>Inter-facility transfer at index</a:t>
+                      </a:r>
+                    </a:p>
+                  </a:txBody>
+                </a:tc>
+                <a:tc>
+                  <a:txBody>
+                    <a:bodyPr/>
+                    <a:lstStyle/>
+                    <a:p>
+                      <a:pPr lvl="0" indent="0" marL="0">
+                        <a:buNone/>
+                      </a:pPr>
+                      <a:r>
+                        <a:rPr/>
+                        <a:t>Exclusion</a:t>
+                      </a:r>
+                    </a:p>
+                  </a:txBody>
+                </a:tc>
+                <a:tc>
+                  <a:txBody>
+                    <a:bodyPr/>
+                    <a:lstStyle/>
+                    <a:p>
+                      <a:pPr lvl="0" indent="0" marL="0">
+                        <a:buNone/>
+                      </a:pPr>
+                      <a:r>
+                        <a:rPr/>
+                        <a:t>Excluded from analytic cohort</a:t>
+                      </a:r>
+                    </a:p>
+                  </a:txBody>
+                </a:tc>
+              </a:tr>
+              <a:tr h="0">
+                <a:tc>
+                  <a:txBody>
+                    <a:bodyPr/>
+                    <a:lstStyle/>
+                    <a:p>
+                      <a:pPr lvl="0" indent="0" marL="0">
+                        <a:buNone/>
+                      </a:pPr>
+                      <a:r>
+                        <a:rPr/>
+                        <a:t>Treatment switching / crossover</a:t>
+                      </a:r>
+                    </a:p>
+                  </a:txBody>
+                </a:tc>
+                <a:tc>
+                  <a:txBody>
+                    <a:bodyPr/>
+                    <a:lstStyle/>
+                    <a:p>
+                      <a:pPr lvl="0" indent="0" marL="0">
+                        <a:buNone/>
+                      </a:pPr>
+                      <a:r>
+                        <a:rPr/>
+                        <a:t>Not applicable</a:t>
+                      </a:r>
+                    </a:p>
+                  </a:txBody>
+                </a:tc>
+                <a:tc>
+                  <a:txBody>
+                    <a:bodyPr/>
+                    <a:lstStyle/>
+                    <a:p>
+                      <a:pPr lvl="0" indent="0" marL="0">
+                        <a:buNone/>
+                      </a:pPr>
+                      <a:r>
+                        <a:rPr/>
+                        <a:t>Point exposure at scene</a:t>
+                      </a:r>
+                    </a:p>
+                  </a:txBody>
+                </a:tc>
+              </a:tr>
+              <a:tr h="0">
+                <a:tc>
+                  <a:txBody>
+                    <a:bodyPr/>
+                    <a:lstStyle/>
+                    <a:p>
+                      <a:pPr lvl="0" indent="0" marL="0">
+                        <a:buNone/>
+                      </a:pPr>
+                      <a:r>
+                        <a:rPr/>
+                        <a:t>6-month follow-up window end</a:t>
+                      </a:r>
+                    </a:p>
+                  </a:txBody>
+                </a:tc>
+                <a:tc>
+                  <a:txBody>
+                    <a:bodyPr/>
+                    <a:lstStyle/>
+                    <a:p>
+                      <a:pPr lvl="0" indent="0" marL="0">
+                        <a:buNone/>
+                      </a:pPr>
+                      <a:r>
+                        <a:rPr/>
+                        <a:t>Administrative end of FU</a:t>
+                      </a:r>
+                    </a:p>
+                  </a:txBody>
+                </a:tc>
+                <a:tc>
+                  <a:txBody>
+                    <a:bodyPr/>
+                    <a:lstStyle/>
+                    <a:p>
+                      <a:pPr lvl="0" indent="0" marL="0">
+                        <a:buNone/>
+                      </a:pPr>
+                      <a:r>
+                        <a:rPr/>
+                        <a:t>Fixed at 6 months</a:t>
+                      </a:r>
+                    </a:p>
+                  </a:txBody>
+                </a:tc>
+              </a:tr>
+            </a:tbl>
+          </a:graphicData>
+        </a:graphic>
+      </p:graphicFrame>
+    </p:spTree>
+  </p:cSld>
+</p:sld>
+</file>
+
+<file path=ppt/slides/slide62.xml><?xml version="1.0" encoding="utf-8"?>
+<p:sld xmlns:a="http://schemas.openxmlformats.org/drawingml/2006/main" xmlns:r="http://schemas.openxmlformats.org/officeDocument/2006/relationships" xmlns:p="http://schemas.openxmlformats.org/presentationml/2006/main">
+  <p:cSld>
+    <p:spTree>
+      <p:nvGrpSpPr>
+        <p:cNvPr id="1" name=""/>
+        <p:cNvGrpSpPr/>
+        <p:nvPr/>
+      </p:nvGrpSpPr>
+      <p:grpSpPr>
+        <a:xfrm>
+          <a:off x="0" y="0"/>
+          <a:ext cx="0" cy="0"/>
+          <a:chOff x="0" y="0"/>
+          <a:chExt cx="0" cy="0"/>
+        </a:xfrm>
+      </p:grpSpPr>
+      <p:sp>
+        <p:nvSpPr>
+          <p:cNvPr id="2" name="Title 1"/>
+          <p:cNvSpPr>
+            <a:spLocks noGrp="1"/>
+          </p:cNvSpPr>
+          <p:nvPr>
+            <p:ph type="title"/>
+          </p:nvPr>
+        </p:nvSpPr>
+        <p:spPr/>
+        <p:txBody>
+          <a:bodyPr/>
+          <a:lstStyle/>
+          <a:p>
+            <a:pPr lvl="0" indent="0" marL="0">
+              <a:buNone/>
+            </a:pPr>
+            <a:r>
+              <a:rPr/>
+              <a:t>Target-population table</a:t>
+            </a:r>
+          </a:p>
+        </p:txBody>
+      </p:sp>
+      <p:graphicFrame>
+        <p:nvGraphicFramePr>
+          <p:cNvPr id="6" name="Content Placeholder 5"/>
+          <p:cNvGraphicFramePr>
+            <a:graphicFrameLocks noGrp="1"/>
+          </p:cNvGraphicFramePr>
+          <p:nvPr>
+            <p:ph idx="1"/>
+          </p:nvPr>
+        </p:nvGraphicFramePr>
+        <p:xfrm>
+          <a:off x="457200" y="1193800"/>
+          <a:ext cx="8229600" cy="3390900"/>
+        </p:xfrm>
+        <a:graphic>
+          <a:graphicData uri="http://schemas.openxmlformats.org/drawingml/2006/table">
+            <a:tbl>
+              <a:tblPr firstRow="1" bandRow="1">
+                <a:tableStyleId>{5C22544A-7EE6-4342-B048-85BDC9FD1C3A}</a:tableStyleId>
+              </a:tblPr>
+              <a:tblGrid>
+                <a:gridCol w="4114800"/>
+                <a:gridCol w="4114800"/>
+              </a:tblGrid>
+              <a:tr h="0">
+                <a:tc>
+                  <a:txBody>
+                    <a:bodyPr/>
+                    <a:lstStyle/>
+                    <a:p>
+                      <a:pPr lvl="0" indent="0" marL="0">
+                        <a:buNone/>
+                      </a:pPr>
+                      <a:r>
+                        <a:rPr/>
+                        <a:t>Procedure</a:t>
+                      </a:r>
+                    </a:p>
+                  </a:txBody>
+                  <a:tcPr/>
+                </a:tc>
+                <a:tc>
+                  <a:txBody>
+                    <a:bodyPr/>
+                    <a:lstStyle/>
+                    <a:p>
+                      <a:pPr lvl="0" indent="0" marL="0">
+                        <a:buNone/>
+                      </a:pPr>
+                      <a:r>
+                        <a:rPr/>
+                        <a:t>Target population</a:t>
+                      </a:r>
+                    </a:p>
+                  </a:txBody>
+                  <a:tcPr/>
+                </a:tc>
+              </a:tr>
+              <a:tr h="0">
+                <a:tc>
+                  <a:txBody>
+                    <a:bodyPr/>
+                    <a:lstStyle/>
+                    <a:p>
+                      <a:pPr lvl="0" indent="0" marL="0">
+                        <a:buNone/>
+                      </a:pPr>
+                      <a:r>
+                        <a:rPr/>
+                        <a:t>Crude (complete-case)</a:t>
+                      </a:r>
+                    </a:p>
+                  </a:txBody>
+                </a:tc>
+                <a:tc>
+                  <a:txBody>
+                    <a:bodyPr/>
+                    <a:lstStyle/>
+                    <a:p>
+                      <a:pPr lvl="0" indent="0" marL="0">
+                        <a:buNone/>
+                      </a:pPr>
+                      <a:r>
+                        <a:rPr/>
+                        <a:t>Complete-outcome subset (n = 1,277)</a:t>
+                      </a:r>
+                    </a:p>
+                  </a:txBody>
+                </a:tc>
+              </a:tr>
+              <a:tr h="0">
+                <a:tc>
+                  <a:txBody>
+                    <a:bodyPr/>
+                    <a:lstStyle/>
+                    <a:p>
+                      <a:pPr lvl="0" indent="0" marL="0">
+                        <a:buNone/>
+                      </a:pPr>
+                      <a:r>
+                        <a:rPr/>
+                        <a:t>PS matching</a:t>
+                      </a:r>
+                    </a:p>
+                  </a:txBody>
+                </a:tc>
+                <a:tc>
+                  <a:txBody>
+                    <a:bodyPr/>
+                    <a:lstStyle/>
+                    <a:p>
+                      <a:pPr lvl="0" indent="0" marL="0">
+                        <a:buNone/>
+                      </a:pPr>
+                      <a:r>
+                        <a:rPr/>
+                        <a:t>Matched overlap subset (n = 615)</a:t>
+                      </a:r>
+                    </a:p>
+                  </a:txBody>
+                </a:tc>
+              </a:tr>
+              <a:tr h="0">
+                <a:tc>
+                  <a:txBody>
+                    <a:bodyPr/>
+                    <a:lstStyle/>
+                    <a:p>
+                      <a:pPr lvl="0" indent="0" marL="0">
+                        <a:buNone/>
+                      </a:pPr>
+                      <a:r>
+                        <a:rPr/>
+                        <a:t>IPTW (stabilised)</a:t>
+                      </a:r>
+                    </a:p>
+                  </a:txBody>
+                </a:tc>
+                <a:tc>
+                  <a:txBody>
+                    <a:bodyPr/>
+                    <a:lstStyle/>
+                    <a:p>
+                      <a:pPr lvl="0" indent="0" marL="0">
+                        <a:buNone/>
+                      </a:pPr>
+                      <a:r>
+                        <a:rPr/>
+                        <a:t>Full eligible cohort (n = 1,693)</a:t>
+                      </a:r>
+                    </a:p>
+                  </a:txBody>
+                </a:tc>
+              </a:tr>
+              <a:tr h="0">
+                <a:tc>
+                  <a:txBody>
+                    <a:bodyPr/>
+                    <a:lstStyle/>
+                    <a:p>
+                      <a:pPr lvl="0" indent="0" marL="0">
+                        <a:buNone/>
+                      </a:pPr>
+                      <a:r>
+                        <a:rPr/>
+                        <a:t>Full-cohort TMLE</a:t>
+                      </a:r>
+                    </a:p>
+                  </a:txBody>
+                </a:tc>
+                <a:tc>
+                  <a:txBody>
+                    <a:bodyPr/>
+                    <a:lstStyle/>
+                    <a:p>
+                      <a:pPr lvl="0" indent="0" marL="0">
+                        <a:buNone/>
+                      </a:pPr>
+                      <a:r>
+                        <a:rPr/>
+                        <a:t>Full eligible cohort (n = 1,693)</a:t>
+                      </a:r>
+                    </a:p>
+                  </a:txBody>
+                </a:tc>
+              </a:tr>
+              <a:tr h="0">
+                <a:tc>
+                  <a:txBody>
+                    <a:bodyPr/>
+                    <a:lstStyle/>
+                    <a:p>
+                      <a:pPr lvl="0" indent="0" marL="0">
+                        <a:buNone/>
+                      </a:pPr>
+                      <a:r>
+                        <a:rPr/>
+                        <a:t>Matched-cohort TMLE</a:t>
+                      </a:r>
+                    </a:p>
+                  </a:txBody>
+                </a:tc>
+                <a:tc>
+                  <a:txBody>
+                    <a:bodyPr/>
+                    <a:lstStyle/>
+                    <a:p>
+                      <a:pPr lvl="0" indent="0" marL="0">
+                        <a:buNone/>
+                      </a:pPr>
+                      <a:r>
+                        <a:rPr/>
+                        <a:t>Matched overlap subset (n = 1,230)</a:t>
+                      </a:r>
+                    </a:p>
+                  </a:txBody>
+                </a:tc>
+              </a:tr>
+              <a:tr h="0">
+                <a:tc>
+                  <a:txBody>
+                    <a:bodyPr/>
+                    <a:lstStyle/>
+                    <a:p>
+                      <a:pPr lvl="0" indent="0" marL="0">
+                        <a:buNone/>
+                      </a:pPr>
+                      <a:r>
+                        <a:rPr/>
+                        <a:t>Complete-outcome TMLE w/ IPCW weights</a:t>
+                      </a:r>
+                    </a:p>
+                  </a:txBody>
+                </a:tc>
+                <a:tc>
+                  <a:txBody>
+                    <a:bodyPr/>
+                    <a:lstStyle/>
+                    <a:p>
+                      <a:pPr lvl="0" indent="0" marL="0">
+                        <a:buNone/>
+                      </a:pPr>
+                      <a:r>
+                        <a:rPr/>
+                        <a:t>Complete-outcome rows, weighted to full-cohort target</a:t>
+                      </a:r>
+                    </a:p>
+                  </a:txBody>
+                </a:tc>
+              </a:tr>
+            </a:tbl>
+          </a:graphicData>
+        </a:graphic>
+      </p:graphicFrame>
+    </p:spTree>
+  </p:cSld>
+</p:sld>
+</file>
+
+<file path=ppt/slides/slide63.xml><?xml version="1.0" encoding="utf-8"?>
+<p:sld xmlns:a="http://schemas.openxmlformats.org/drawingml/2006/main" xmlns:r="http://schemas.openxmlformats.org/officeDocument/2006/relationships" xmlns:p="http://schemas.openxmlformats.org/presentationml/2006/main">
+  <p:cSld>
+    <p:spTree>
+      <p:nvGrpSpPr>
+        <p:cNvPr id="1" name=""/>
+        <p:cNvGrpSpPr/>
+        <p:nvPr/>
+      </p:nvGrpSpPr>
+      <p:grpSpPr>
+        <a:xfrm>
+          <a:off x="0" y="0"/>
+          <a:ext cx="0" cy="0"/>
+          <a:chOff x="0" y="0"/>
+          <a:chExt cx="0" cy="0"/>
+        </a:xfrm>
+      </p:grpSpPr>
+      <p:sp>
+        <p:nvSpPr>
+          <p:cNvPr id="2" name="Title 1"/>
+          <p:cNvSpPr>
+            <a:spLocks noGrp="1"/>
+          </p:cNvSpPr>
+          <p:nvPr>
+            <p:ph type="title"/>
+          </p:nvPr>
+        </p:nvSpPr>
+        <p:spPr/>
+        <p:txBody>
+          <a:bodyPr/>
+          <a:lstStyle/>
+          <a:p>
+            <a:pPr lvl="0" indent="0" marL="0">
+              <a:buNone/>
+            </a:pPr>
+            <a:r>
+              <a:rPr/>
+              <a:t>Weight-diagnostics table</a:t>
+            </a:r>
+          </a:p>
+        </p:txBody>
+      </p:sp>
+      <p:graphicFrame>
+        <p:nvGraphicFramePr>
+          <p:cNvPr id="6" name="Content Placeholder 5"/>
+          <p:cNvGraphicFramePr>
+            <a:graphicFrameLocks noGrp="1"/>
+          </p:cNvGraphicFramePr>
+          <p:nvPr>
+            <p:ph idx="1"/>
+          </p:nvPr>
+        </p:nvGraphicFramePr>
+        <p:xfrm>
+          <a:off x="457200" y="1193800"/>
+          <a:ext cx="8229600" cy="3390900"/>
+        </p:xfrm>
+        <a:graphic>
+          <a:graphicData uri="http://schemas.openxmlformats.org/drawingml/2006/table">
+            <a:tbl>
+              <a:tblPr firstRow="1" bandRow="1">
+                <a:tableStyleId>{5C22544A-7EE6-4342-B048-85BDC9FD1C3A}</a:tableStyleId>
+              </a:tblPr>
+              <a:tblGrid>
+                <a:gridCol w="2057400"/>
+                <a:gridCol w="2057400"/>
+                <a:gridCol w="2057400"/>
+                <a:gridCol w="2057400"/>
+              </a:tblGrid>
+              <a:tr h="0">
+                <a:tc>
+                  <a:txBody>
+                    <a:bodyPr/>
+                    <a:lstStyle/>
+                    <a:p>
+                      <a:pPr lvl="0" indent="0" marL="0">
+                        <a:buNone/>
+                      </a:pPr>
+                      <a:r>
+                        <a:rPr/>
+                        <a:t>Weight type</a:t>
+                      </a:r>
+                    </a:p>
+                  </a:txBody>
+                  <a:tcPr/>
+                </a:tc>
+                <a:tc>
+                  <a:txBody>
+                    <a:bodyPr/>
+                    <a:lstStyle/>
+                    <a:p>
+                      <a:pPr lvl="0" indent="0" marL="0">
+                        <a:buNone/>
+                      </a:pPr>
+                      <a:r>
+                        <a:rPr/>
+                        <a:t>Source</a:t>
+                      </a:r>
+                    </a:p>
+                  </a:txBody>
+                  <a:tcPr/>
+                </a:tc>
+                <a:tc>
+                  <a:txBody>
+                    <a:bodyPr/>
+                    <a:lstStyle/>
+                    <a:p>
+                      <a:pPr lvl="0" indent="0" marL="0">
+                        <a:buNone/>
+                      </a:pPr>
+                      <a:r>
+                        <a:rPr/>
+                        <a:t>Reporting</a:t>
+                      </a:r>
+                    </a:p>
+                  </a:txBody>
+                  <a:tcPr/>
+                </a:tc>
+                <a:tc>
+                  <a:txBody>
+                    <a:bodyPr/>
+                    <a:lstStyle/>
+                    <a:p>
+                      <a:pPr lvl="0" indent="0" marL="0">
+                        <a:buNone/>
+                      </a:pPr>
+                      <a:r>
+                        <a:rPr/>
+                        <a:t>Prespecified instability flag</a:t>
+                      </a:r>
+                    </a:p>
+                  </a:txBody>
+                  <a:tcPr/>
+                </a:tc>
+              </a:tr>
+              <a:tr h="0">
+                <a:tc>
+                  <a:txBody>
+                    <a:bodyPr/>
+                    <a:lstStyle/>
+                    <a:p>
+                      <a:pPr lvl="0" indent="0" marL="0">
+                        <a:buNone/>
+                      </a:pPr>
+                      <a:r>
+                        <a:rPr/>
+                        <a:t>Treatment weights (stabilised)</a:t>
+                      </a:r>
+                    </a:p>
+                  </a:txBody>
+                </a:tc>
+                <a:tc>
+                  <a:txBody>
+                    <a:bodyPr/>
+                    <a:lstStyle/>
+                    <a:p>
+                      <a:pPr lvl="0" indent="0" marL="0">
+                        <a:buNone/>
+                      </a:pPr>
+                      <a:r>
+                        <a:rPr>
+                          <a:latin typeface="Courier"/>
+                        </a:rPr>
+                        <a:t>fit_ps_superlearner()</a:t>
+                      </a:r>
+                    </a:p>
+                  </a:txBody>
+                </a:tc>
+                <a:tc>
+                  <a:txBody>
+                    <a:bodyPr/>
+                    <a:lstStyle/>
+                    <a:p>
+                      <a:pPr lvl="0" indent="0" marL="0">
+                        <a:buNone/>
+                      </a:pPr>
+                      <a:r>
+                        <a:rPr/>
+                        <a:t>Mean, SD, 99th pct, max, Kish ESS</a:t>
+                      </a:r>
+                    </a:p>
+                  </a:txBody>
+                </a:tc>
+                <a:tc>
+                  <a:txBody>
+                    <a:bodyPr/>
+                    <a:lstStyle/>
+                    <a:p>
+                      <a:pPr lvl="0" indent="0" marL="0">
+                        <a:buNone/>
+                      </a:pPr>
+                      <a:r>
+                        <a:rPr/>
+                        <a:t>Max &gt; 10 or &gt; 1 % above 5</a:t>
+                      </a:r>
+                    </a:p>
+                  </a:txBody>
+                </a:tc>
+              </a:tr>
+              <a:tr h="0">
+                <a:tc>
+                  <a:txBody>
+                    <a:bodyPr/>
+                    <a:lstStyle/>
+                    <a:p>
+                      <a:pPr lvl="0" indent="0" marL="0">
+                        <a:buNone/>
+                      </a:pPr>
+                      <a:r>
+                        <a:rPr/>
+                        <a:t>IPCW weights</a:t>
+                      </a:r>
+                    </a:p>
+                  </a:txBody>
+                </a:tc>
+                <a:tc>
+                  <a:txBody>
+                    <a:bodyPr/>
+                    <a:lstStyle/>
+                    <a:p>
+                      <a:pPr lvl="0" indent="0" marL="0">
+                        <a:buNone/>
+                      </a:pPr>
+                      <a:r>
+                        <a:rPr>
+                          <a:latin typeface="Courier"/>
+                        </a:rPr>
+                        <a:t>run_ipcw_tmle()</a:t>
+                      </a:r>
+                    </a:p>
+                  </a:txBody>
+                </a:tc>
+                <a:tc>
+                  <a:txBody>
+                    <a:bodyPr/>
+                    <a:lstStyle/>
+                    <a:p>
+                      <a:pPr lvl="0" indent="0" marL="0">
+                        <a:buNone/>
+                      </a:pPr>
+                      <a:r>
+                        <a:rPr/>
+                        <a:t>Mean, SD, 99th pct, max</a:t>
+                      </a:r>
+                    </a:p>
+                  </a:txBody>
+                </a:tc>
+                <a:tc>
+                  <a:txBody>
+                    <a:bodyPr/>
+                    <a:lstStyle/>
+                    <a:p>
+                      <a:pPr lvl="0" indent="0" marL="0">
+                        <a:buNone/>
+                      </a:pPr>
+                      <a:r>
+                        <a:rPr/>
+                        <a:t>Max &gt; 10</a:t>
+                      </a:r>
+                    </a:p>
+                  </a:txBody>
+                </a:tc>
+              </a:tr>
+              <a:tr h="0">
+                <a:tc>
+                  <a:txBody>
+                    <a:bodyPr/>
+                    <a:lstStyle/>
+                    <a:p>
+                      <a:pPr lvl="0" indent="0" marL="0">
+                        <a:buNone/>
+                      </a:pPr>
+                      <a:r>
+                        <a:rPr/>
+                        <a:t>Combined</a:t>
+                      </a:r>
+                    </a:p>
+                  </a:txBody>
+                </a:tc>
+                <a:tc>
+                  <a:txBody>
+                    <a:bodyPr/>
+                    <a:lstStyle/>
+                    <a:p>
+                      <a:pPr lvl="0" indent="0" marL="0">
+                        <a:buNone/>
+                      </a:pPr>
+                      <a:r>
+                        <a:rPr/>
+                        <a:t>Product of treatment + IPCW</a:t>
+                      </a:r>
+                    </a:p>
+                  </a:txBody>
+                </a:tc>
+                <a:tc>
+                  <a:txBody>
+                    <a:bodyPr/>
+                    <a:lstStyle/>
+                    <a:p>
+                      <a:pPr lvl="0" indent="0" marL="0">
+                        <a:buNone/>
+                      </a:pPr>
+                      <a:r>
+                        <a:rPr/>
+                        <a:t>Mean, SD, max, ESS</a:t>
+                      </a:r>
+                    </a:p>
+                  </a:txBody>
+                </a:tc>
+                <a:tc>
+                  <a:txBody>
+                    <a:bodyPr/>
+                    <a:lstStyle/>
+                    <a:p>
+                      <a:pPr lvl="0" indent="0" marL="0">
+                        <a:buNone/>
+                      </a:pPr>
+                      <a:r>
+                        <a:rPr/>
+                        <a:t>Max &gt; 15 or ESS &lt; 30 % of n</a:t>
+                      </a:r>
+                    </a:p>
+                  </a:txBody>
+                </a:tc>
+              </a:tr>
+            </a:tbl>
+          </a:graphicData>
+        </a:graphic>
+      </p:graphicFrame>
+    </p:spTree>
+  </p:cSld>
+</p:sld>
+</file>
+
+<file path=ppt/slides/slide64.xml><?xml version="1.0" encoding="utf-8"?>
+<p:sld xmlns:a="http://schemas.openxmlformats.org/drawingml/2006/main" xmlns:r="http://schemas.openxmlformats.org/officeDocument/2006/relationships" xmlns:p="http://schemas.openxmlformats.org/presentationml/2006/main">
+  <p:cSld>
+    <p:spTree>
+      <p:nvGrpSpPr>
+        <p:cNvPr id="1" name=""/>
+        <p:cNvGrpSpPr/>
+        <p:nvPr/>
+      </p:nvGrpSpPr>
+      <p:grpSpPr>
+        <a:xfrm>
+          <a:off x="0" y="0"/>
+          <a:ext cx="0" cy="0"/>
+          <a:chOff x="0" y="0"/>
+          <a:chExt cx="0" cy="0"/>
+        </a:xfrm>
+      </p:grpSpPr>
+      <p:sp>
+        <p:nvSpPr>
+          <p:cNvPr id="2" name="Title 1"/>
+          <p:cNvSpPr>
+            <a:spLocks noGrp="1"/>
+          </p:cNvSpPr>
+          <p:nvPr>
+            <p:ph type="title"/>
+          </p:nvPr>
+        </p:nvSpPr>
+        <p:spPr/>
+        <p:txBody>
+          <a:bodyPr/>
+          <a:lstStyle/>
+          <a:p>
+            <a:pPr lvl="0" indent="0" marL="0">
+              <a:buNone/>
+            </a:pPr>
+            <a:r>
+              <a:rPr/>
+              <a:t>Estimator-estimand pairs</a:t>
+            </a:r>
+          </a:p>
+        </p:txBody>
+      </p:sp>
+      <p:graphicFrame>
+        <p:nvGraphicFramePr>
+          <p:cNvPr id="6" name="Content Placeholder 5"/>
+          <p:cNvGraphicFramePr>
+            <a:graphicFrameLocks noGrp="1"/>
+          </p:cNvGraphicFramePr>
+          <p:nvPr>
+            <p:ph idx="1"/>
+          </p:nvPr>
+        </p:nvGraphicFramePr>
+        <p:xfrm>
+          <a:off x="457200" y="1193800"/>
+          <a:ext cx="8229600" cy="3390900"/>
+        </p:xfrm>
+        <a:graphic>
+          <a:graphicData uri="http://schemas.openxmlformats.org/drawingml/2006/table">
+            <a:tbl>
+              <a:tblPr firstRow="1" bandRow="1">
+                <a:tableStyleId>{5C22544A-7EE6-4342-B048-85BDC9FD1C3A}</a:tableStyleId>
+              </a:tblPr>
+              <a:tblGrid>
+                <a:gridCol w="1549400"/>
+                <a:gridCol w="1549400"/>
+                <a:gridCol w="2057400"/>
+                <a:gridCol w="1549400"/>
+                <a:gridCol w="1549400"/>
+              </a:tblGrid>
+              <a:tr h="0">
+                <a:tc>
+                  <a:txBody>
+                    <a:bodyPr/>
+                    <a:lstStyle/>
+                    <a:p>
+                      <a:pPr lvl="0" indent="0" marL="0">
+                        <a:buNone/>
+                      </a:pPr>
+                      <a:r>
+                        <a:rPr/>
+                        <a:t>Candidate</a:t>
+                      </a:r>
+                    </a:p>
+                  </a:txBody>
+                  <a:tcPr/>
+                </a:tc>
+                <a:tc>
+                  <a:txBody>
+                    <a:bodyPr/>
+                    <a:lstStyle/>
+                    <a:p>
+                      <a:pPr lvl="0" indent="0" marL="0">
+                        <a:buNone/>
+                      </a:pPr>
+                      <a:r>
+                        <a:rPr/>
+                        <a:t>Library</a:t>
+                      </a:r>
+                    </a:p>
+                  </a:txBody>
+                  <a:tcPr/>
+                </a:tc>
+                <a:tc>
+                  <a:txBody>
+                    <a:bodyPr/>
+                    <a:lstStyle/>
+                    <a:p>
+                      <a:pPr lvl="0" indent="0" marL="0" algn="r">
+                        <a:buNone/>
+                      </a:pPr>
+                      <a:r>
+                        <a:rPr/>
+                        <a:t>Truncation</a:t>
+                      </a:r>
+                    </a:p>
+                  </a:txBody>
+                  <a:tcPr/>
+                </a:tc>
+                <a:tc>
+                  <a:txBody>
+                    <a:bodyPr/>
+                    <a:lstStyle/>
+                    <a:p>
+                      <a:pPr lvl="0" indent="0" marL="0">
+                        <a:buNone/>
+                      </a:pPr>
+                      <a:r>
+                        <a:rPr/>
+                        <a:t>Missingness</a:t>
+                      </a:r>
+                    </a:p>
+                  </a:txBody>
+                  <a:tcPr/>
+                </a:tc>
+                <a:tc>
+                  <a:txBody>
+                    <a:bodyPr/>
+                    <a:lstStyle/>
+                    <a:p>
+                      <a:pPr lvl="0" indent="0" marL="0">
+                        <a:buNone/>
+                      </a:pPr>
+                      <a:r>
+                        <a:rPr/>
+                        <a:t>Status</a:t>
+                      </a:r>
+                    </a:p>
+                  </a:txBody>
+                  <a:tcPr/>
+                </a:tc>
+              </a:tr>
+              <a:tr h="0">
+                <a:tc>
+                  <a:txBody>
+                    <a:bodyPr/>
+                    <a:lstStyle/>
+                    <a:p>
+                      <a:pPr lvl="0" indent="0" marL="0">
+                        <a:buNone/>
+                      </a:pPr>
+                      <a:r>
+                        <a:rPr/>
+                        <a:t>Crude</a:t>
+                      </a:r>
+                    </a:p>
+                  </a:txBody>
+                </a:tc>
+                <a:tc>
+                  <a:txBody>
+                    <a:bodyPr/>
+                    <a:lstStyle/>
+                    <a:p>
+                      <a:pPr lvl="0" indent="0" marL="0">
+                        <a:buNone/>
+                      </a:pPr>
+                      <a:r>
+                        <a:rPr/>
+                        <a:t>n/a</a:t>
+                      </a:r>
+                    </a:p>
+                  </a:txBody>
+                </a:tc>
+                <a:tc>
+                  <a:txBody>
+                    <a:bodyPr/>
+                    <a:lstStyle/>
+                    <a:p>
+                      <a:pPr lvl="0" indent="0" marL="0" algn="r">
+                        <a:buNone/>
+                      </a:pPr>
+                      <a:r>
+                        <a:rPr/>
+                        <a:t>n/a</a:t>
+                      </a:r>
+                    </a:p>
+                  </a:txBody>
+                </a:tc>
+                <a:tc>
+                  <a:txBody>
+                    <a:bodyPr/>
+                    <a:lstStyle/>
+                    <a:p>
+                      <a:pPr lvl="0" indent="0" marL="0">
+                        <a:buNone/>
+                      </a:pPr>
+                      <a:r>
+                        <a:rPr/>
+                        <a:t>Complete case</a:t>
+                      </a:r>
+                    </a:p>
+                  </a:txBody>
+                </a:tc>
+                <a:tc>
+                  <a:txBody>
+                    <a:bodyPr/>
+                    <a:lstStyle/>
+                    <a:p>
+                      <a:pPr lvl="0" indent="0" marL="0">
+                        <a:buNone/>
+                      </a:pPr>
+                      <a:r>
+                        <a:rPr/>
+                        <a:t>Reference</a:t>
+                      </a:r>
+                    </a:p>
+                  </a:txBody>
+                </a:tc>
+              </a:tr>
+              <a:tr h="0">
+                <a:tc>
+                  <a:txBody>
+                    <a:bodyPr/>
+                    <a:lstStyle/>
+                    <a:p>
+                      <a:pPr lvl="0" indent="0" marL="0">
+                        <a:buNone/>
+                      </a:pPr>
+                      <a:r>
+                        <a:rPr/>
+                        <a:t>PS matching</a:t>
+                      </a:r>
+                    </a:p>
+                  </a:txBody>
+                </a:tc>
+                <a:tc>
+                  <a:txBody>
+                    <a:bodyPr/>
+                    <a:lstStyle/>
+                    <a:p>
+                      <a:pPr lvl="0" indent="0" marL="0">
+                        <a:buNone/>
+                      </a:pPr>
+                      <a:r>
+                        <a:rPr/>
+                        <a:t>GLM PS</a:t>
+                      </a:r>
+                    </a:p>
+                  </a:txBody>
+                </a:tc>
+                <a:tc>
+                  <a:txBody>
+                    <a:bodyPr/>
+                    <a:lstStyle/>
+                    <a:p>
+                      <a:pPr lvl="0" indent="0" marL="0" algn="r">
+                        <a:buNone/>
+                      </a:pPr>
+                      <a:r>
+                        <a:rPr/>
+                        <a:t>n/a</a:t>
+                      </a:r>
+                    </a:p>
+                  </a:txBody>
+                </a:tc>
+                <a:tc>
+                  <a:txBody>
+                    <a:bodyPr/>
+                    <a:lstStyle/>
+                    <a:p>
+                      <a:pPr lvl="0" indent="0" marL="0">
+                        <a:buNone/>
+                      </a:pPr>
+                      <a:r>
+                        <a:rPr/>
+                        <a:t>Complete case</a:t>
+                      </a:r>
+                    </a:p>
+                  </a:txBody>
+                </a:tc>
+                <a:tc>
+                  <a:txBody>
+                    <a:bodyPr/>
+                    <a:lstStyle/>
+                    <a:p>
+                      <a:pPr lvl="0" indent="0" marL="0">
+                        <a:buNone/>
+                      </a:pPr>
+                      <a:r>
+                        <a:rPr/>
+                        <a:t>Secondary</a:t>
+                      </a:r>
+                    </a:p>
+                  </a:txBody>
+                </a:tc>
+              </a:tr>
+              <a:tr h="0">
+                <a:tc>
+                  <a:txBody>
+                    <a:bodyPr/>
+                    <a:lstStyle/>
+                    <a:p>
+                      <a:pPr lvl="0" indent="0" marL="0">
+                        <a:buNone/>
+                      </a:pPr>
+                      <a:r>
+                        <a:rPr/>
+                        <a:t>IPTW (stabilised)</a:t>
+                      </a:r>
+                    </a:p>
+                  </a:txBody>
+                </a:tc>
+                <a:tc>
+                  <a:txBody>
+                    <a:bodyPr/>
+                    <a:lstStyle/>
+                    <a:p>
+                      <a:pPr lvl="0" indent="0" marL="0">
+                        <a:buNone/>
+                      </a:pPr>
+                      <a:r>
+                        <a:rPr/>
+                        <a:t>GLM PS</a:t>
+                      </a:r>
+                    </a:p>
+                  </a:txBody>
+                </a:tc>
+                <a:tc>
+                  <a:txBody>
+                    <a:bodyPr/>
+                    <a:lstStyle/>
+                    <a:p>
+                      <a:pPr lvl="0" indent="0" marL="0" algn="r">
+                        <a:buNone/>
+                      </a:pPr>
+                      <a:r>
+                        <a:rPr/>
+                        <a:t>0.01</a:t>
+                      </a:r>
+                    </a:p>
+                  </a:txBody>
+                </a:tc>
+                <a:tc>
+                  <a:txBody>
+                    <a:bodyPr/>
+                    <a:lstStyle/>
+                    <a:p>
+                      <a:pPr lvl="0" indent="0" marL="0">
+                        <a:buNone/>
+                      </a:pPr>
+                      <a:r>
+                        <a:rPr/>
+                        <a:t>Complete case</a:t>
+                      </a:r>
+                    </a:p>
+                  </a:txBody>
+                </a:tc>
+                <a:tc>
+                  <a:txBody>
+                    <a:bodyPr/>
+                    <a:lstStyle/>
+                    <a:p>
+                      <a:pPr lvl="0" indent="0" marL="0">
+                        <a:buNone/>
+                      </a:pPr>
+                      <a:r>
+                        <a:rPr/>
+                        <a:t>Secondary</a:t>
+                      </a:r>
+                    </a:p>
+                  </a:txBody>
+                </a:tc>
+              </a:tr>
+              <a:tr h="0">
+                <a:tc>
+                  <a:txBody>
+                    <a:bodyPr/>
+                    <a:lstStyle/>
+                    <a:p>
+                      <a:pPr lvl="0" indent="0" marL="0">
+                        <a:buNone/>
+                      </a:pPr>
+                      <a:r>
+                        <a:rPr/>
+                        <a:t>Full-cohort TMLE</a:t>
+                      </a:r>
+                    </a:p>
+                  </a:txBody>
+                </a:tc>
+                <a:tc>
+                  <a:txBody>
+                    <a:bodyPr/>
+                    <a:lstStyle/>
+                    <a:p>
+                      <a:pPr lvl="0" indent="0" marL="0">
+                        <a:buNone/>
+                      </a:pPr>
+                      <a:r>
+                        <a:rPr/>
+                        <a:t>SL ensemble</a:t>
+                      </a:r>
+                    </a:p>
+                  </a:txBody>
+                </a:tc>
+                <a:tc>
+                  <a:txBody>
+                    <a:bodyPr/>
+                    <a:lstStyle/>
+                    <a:p>
+                      <a:pPr lvl="0" indent="0" marL="0" algn="r">
+                        <a:buNone/>
+                      </a:pPr>
+                      <a:r>
+                        <a:rPr/>
+                        <a:t>0.01</a:t>
+                      </a:r>
+                    </a:p>
+                  </a:txBody>
+                </a:tc>
+                <a:tc>
+                  <a:txBody>
+                    <a:bodyPr/>
+                    <a:lstStyle/>
+                    <a:p>
+                      <a:pPr lvl="0" indent="0" marL="0">
+                        <a:buNone/>
+                      </a:pPr>
+                      <a:r>
+                        <a:rPr/>
+                        <a:t>Complete case</a:t>
+                      </a:r>
+                    </a:p>
+                  </a:txBody>
+                </a:tc>
+                <a:tc>
+                  <a:txBody>
+                    <a:bodyPr/>
+                    <a:lstStyle/>
+                    <a:p>
+                      <a:pPr lvl="0" indent="0" marL="0">
+                        <a:buNone/>
+                      </a:pPr>
+                      <a:r>
+                        <a:rPr b="1"/>
+                        <a:t>Primary</a:t>
+                      </a:r>
+                    </a:p>
+                  </a:txBody>
+                </a:tc>
+              </a:tr>
+              <a:tr h="0">
+                <a:tc>
+                  <a:txBody>
+                    <a:bodyPr/>
+                    <a:lstStyle/>
+                    <a:p>
+                      <a:pPr lvl="0" indent="0" marL="0">
+                        <a:buNone/>
+                      </a:pPr>
+                      <a:r>
+                        <a:rPr/>
+                        <a:t>Matched-cohort TMLE</a:t>
+                      </a:r>
+                    </a:p>
+                  </a:txBody>
+                </a:tc>
+                <a:tc>
+                  <a:txBody>
+                    <a:bodyPr/>
+                    <a:lstStyle/>
+                    <a:p>
+                      <a:pPr lvl="0" indent="0" marL="0">
+                        <a:buNone/>
+                      </a:pPr>
+                      <a:r>
+                        <a:rPr/>
+                        <a:t>SL ensemble (matched)</a:t>
+                      </a:r>
+                    </a:p>
+                  </a:txBody>
+                </a:tc>
+                <a:tc>
+                  <a:txBody>
+                    <a:bodyPr/>
+                    <a:lstStyle/>
+                    <a:p>
+                      <a:pPr lvl="0" indent="0" marL="0" algn="r">
+                        <a:buNone/>
+                      </a:pPr>
+                      <a:r>
+                        <a:rPr/>
+                        <a:t>n/a</a:t>
+                      </a:r>
+                    </a:p>
+                  </a:txBody>
+                </a:tc>
+                <a:tc>
+                  <a:txBody>
+                    <a:bodyPr/>
+                    <a:lstStyle/>
+                    <a:p>
+                      <a:pPr lvl="0" indent="0" marL="0">
+                        <a:buNone/>
+                      </a:pPr>
+                      <a:r>
+                        <a:rPr/>
+                        <a:t>Complete case</a:t>
+                      </a:r>
+                    </a:p>
+                  </a:txBody>
+                </a:tc>
+                <a:tc>
+                  <a:txBody>
+                    <a:bodyPr/>
+                    <a:lstStyle/>
+                    <a:p>
+                      <a:pPr lvl="0" indent="0" marL="0">
+                        <a:buNone/>
+                      </a:pPr>
+                      <a:r>
+                        <a:rPr/>
+                        <a:t>Sensitivity (target pop)</a:t>
+                      </a:r>
+                    </a:p>
+                  </a:txBody>
+                </a:tc>
+              </a:tr>
+              <a:tr h="0">
+                <a:tc>
+                  <a:txBody>
+                    <a:bodyPr/>
+                    <a:lstStyle/>
+                    <a:p>
+                      <a:pPr lvl="0" indent="0" marL="0">
+                        <a:buNone/>
+                      </a:pPr>
+                      <a:r>
+                        <a:rPr/>
+                        <a:t>Complete-outcome TMLE w/ IPCW</a:t>
+                      </a:r>
+                    </a:p>
+                  </a:txBody>
+                </a:tc>
+                <a:tc>
+                  <a:txBody>
+                    <a:bodyPr/>
+                    <a:lstStyle/>
+                    <a:p>
+                      <a:pPr lvl="0" indent="0" marL="0">
+                        <a:buNone/>
+                      </a:pPr>
+                      <a:r>
+                        <a:rPr/>
+                        <a:t>SL ensemble + SL IPCW</a:t>
+                      </a:r>
+                    </a:p>
+                  </a:txBody>
+                </a:tc>
+                <a:tc>
+                  <a:txBody>
+                    <a:bodyPr/>
+                    <a:lstStyle/>
+                    <a:p>
+                      <a:pPr lvl="0" indent="0" marL="0" algn="r">
+                        <a:buNone/>
+                      </a:pPr>
+                      <a:r>
+                        <a:rPr/>
+                        <a:t>0.01</a:t>
+                      </a:r>
+                    </a:p>
+                  </a:txBody>
+                </a:tc>
+                <a:tc>
+                  <a:txBody>
+                    <a:bodyPr/>
+                    <a:lstStyle/>
+                    <a:p>
+                      <a:pPr lvl="0" indent="0" marL="0">
+                        <a:buNone/>
+                      </a:pPr>
+                      <a:r>
+                        <a:rPr/>
+                        <a:t>IPCW</a:t>
+                      </a:r>
+                    </a:p>
+                  </a:txBody>
+                </a:tc>
+                <a:tc>
+                  <a:txBody>
+                    <a:bodyPr/>
+                    <a:lstStyle/>
+                    <a:p>
+                      <a:pPr lvl="0" indent="0" marL="0">
+                        <a:buNone/>
+                      </a:pPr>
+                      <a:r>
+                        <a:rPr/>
+                        <a:t>Sensitivity (missingness)</a:t>
+                      </a:r>
+                    </a:p>
+                  </a:txBody>
+                </a:tc>
+              </a:tr>
+            </a:tbl>
+          </a:graphicData>
+        </a:graphic>
+      </p:graphicFrame>
+    </p:spTree>
+  </p:cSld>
+</p:sld>
+</file>
+
+<file path=ppt/slides/slide65.xml><?xml version="1.0" encoding="utf-8"?>
+<p:sld xmlns:a="http://schemas.openxmlformats.org/drawingml/2006/main" xmlns:r="http://schemas.openxmlformats.org/officeDocument/2006/relationships" xmlns:p="http://schemas.openxmlformats.org/presentationml/2006/main">
+  <p:cSld>
+    <p:spTree>
+      <p:nvGrpSpPr>
+        <p:cNvPr id="1" name=""/>
+        <p:cNvGrpSpPr/>
+        <p:nvPr/>
+      </p:nvGrpSpPr>
+      <p:grpSpPr>
+        <a:xfrm>
+          <a:off x="0" y="0"/>
+          <a:ext cx="0" cy="0"/>
+          <a:chOff x="0" y="0"/>
+          <a:chExt cx="0" cy="0"/>
+        </a:xfrm>
+      </p:grpSpPr>
+      <p:sp>
+        <p:nvSpPr>
+          <p:cNvPr id="2" name="Title 1"/>
+          <p:cNvSpPr>
+            <a:spLocks noGrp="1"/>
+          </p:cNvSpPr>
+          <p:nvPr>
+            <p:ph type="title"/>
+          </p:nvPr>
+        </p:nvSpPr>
+        <p:spPr/>
+        <p:txBody>
+          <a:bodyPr/>
+          <a:lstStyle/>
+          <a:p>
+            <a:pPr lvl="0" indent="0" marL="0">
+              <a:buNone/>
+            </a:pPr>
+            <a:r>
+              <a:rPr/>
+              <a:t>Checkpoint dashboard (case study)</a:t>
+            </a:r>
+          </a:p>
+        </p:txBody>
+      </p:sp>
+      <p:graphicFrame>
+        <p:nvGraphicFramePr>
+          <p:cNvPr id="6" name="Content Placeholder 5"/>
+          <p:cNvGraphicFramePr>
+            <a:graphicFrameLocks noGrp="1"/>
+          </p:cNvGraphicFramePr>
+          <p:nvPr>
+            <p:ph idx="1"/>
+          </p:nvPr>
+        </p:nvGraphicFramePr>
+        <p:xfrm>
+          <a:off x="457200" y="1193800"/>
+          <a:ext cx="8229600" cy="3390900"/>
+        </p:xfrm>
+        <a:graphic>
+          <a:graphicData uri="http://schemas.openxmlformats.org/drawingml/2006/table">
+            <a:tbl>
+              <a:tblPr firstRow="1" bandRow="1">
+                <a:tableStyleId>{5C22544A-7EE6-4342-B048-85BDC9FD1C3A}</a:tableStyleId>
+              </a:tblPr>
+              <a:tblGrid>
+                <a:gridCol w="1765300"/>
+                <a:gridCol w="1765300"/>
+                <a:gridCol w="1765300"/>
+                <a:gridCol w="2933700"/>
+              </a:tblGrid>
+              <a:tr h="0">
+                <a:tc>
+                  <a:txBody>
+                    <a:bodyPr/>
+                    <a:lstStyle/>
+                    <a:p>
+                      <a:pPr lvl="0" indent="0" marL="0">
+                        <a:buNone/>
+                      </a:pPr>
+                      <a:r>
+                        <a:rPr/>
+                        <a:t>Stage</a:t>
+                      </a:r>
+                    </a:p>
+                  </a:txBody>
+                  <a:tcPr/>
+                </a:tc>
+                <a:tc>
+                  <a:txBody>
+                    <a:bodyPr/>
+                    <a:lstStyle/>
+                    <a:p>
+                      <a:pPr lvl="0" indent="0" marL="0">
+                        <a:buNone/>
+                      </a:pPr>
+                      <a:r>
+                        <a:rPr/>
+                        <a:t>Evidence</a:t>
+                      </a:r>
+                    </a:p>
+                  </a:txBody>
+                  <a:tcPr/>
+                </a:tc>
+                <a:tc>
+                  <a:txBody>
+                    <a:bodyPr/>
+                    <a:lstStyle/>
+                    <a:p>
+                      <a:pPr lvl="0" indent="0" marL="0">
+                        <a:buNone/>
+                      </a:pPr>
+                      <a:r>
+                        <a:rPr/>
+                        <a:t>Threshold</a:t>
+                      </a:r>
+                    </a:p>
+                  </a:txBody>
+                  <a:tcPr/>
+                </a:tc>
+                <a:tc>
+                  <a:txBody>
+                    <a:bodyPr/>
+                    <a:lstStyle/>
+                    <a:p>
+                      <a:pPr lvl="0" indent="0" marL="0" algn="ctr">
+                        <a:buNone/>
+                      </a:pPr>
+                      <a:r>
+                        <a:rPr/>
+                        <a:t>Decision</a:t>
+                      </a:r>
+                    </a:p>
+                  </a:txBody>
+                  <a:tcPr/>
+                </a:tc>
+              </a:tr>
+              <a:tr h="0">
+                <a:tc>
+                  <a:txBody>
+                    <a:bodyPr/>
+                    <a:lstStyle/>
+                    <a:p>
+                      <a:pPr lvl="0" indent="0" marL="0">
+                        <a:buNone/>
+                      </a:pPr>
+                      <a:r>
+                        <a:rPr/>
+                        <a:t>Stage 0 protocol/setup</a:t>
+                      </a:r>
+                    </a:p>
+                  </a:txBody>
+                </a:tc>
+                <a:tc>
+                  <a:txBody>
+                    <a:bodyPr/>
+                    <a:lstStyle/>
+                    <a:p>
+                      <a:pPr lvl="0" indent="0" marL="0">
+                        <a:buNone/>
+                      </a:pPr>
+                      <a:r>
+                        <a:rPr/>
+                        <a:t>Target-trial timing, SAP, lock fingerprint</a:t>
+                      </a:r>
+                    </a:p>
+                  </a:txBody>
+                </a:tc>
+                <a:tc>
+                  <a:txBody>
+                    <a:bodyPr/>
+                    <a:lstStyle/>
+                    <a:p>
+                      <a:pPr lvl="0" indent="0" marL="0">
+                        <a:buNone/>
+                      </a:pPr>
+                      <a:r>
+                        <a:rPr/>
+                        <a:t>All design elements specified before data access</a:t>
+                      </a:r>
+                    </a:p>
+                  </a:txBody>
+                </a:tc>
+                <a:tc>
+                  <a:txBody>
+                    <a:bodyPr/>
+                    <a:lstStyle/>
+                    <a:p>
+                      <a:pPr lvl="0" indent="0" marL="0" algn="ctr">
+                        <a:buNone/>
+                      </a:pPr>
+                      <a:r>
+                        <a:rPr/>
+                        <a:t>GO</a:t>
+                      </a:r>
+                    </a:p>
+                  </a:txBody>
+                </a:tc>
+              </a:tr>
+              <a:tr h="0">
+                <a:tc>
+                  <a:txBody>
+                    <a:bodyPr/>
+                    <a:lstStyle/>
+                    <a:p>
+                      <a:pPr lvl="0" indent="0" marL="0">
+                        <a:buNone/>
+                      </a:pPr>
+                      <a:r>
+                        <a:rPr/>
+                        <a:t>Stage 1b cohort adequacy</a:t>
+                      </a:r>
+                    </a:p>
+                  </a:txBody>
+                </a:tc>
+                <a:tc>
+                  <a:txBody>
+                    <a:bodyPr/>
+                    <a:lstStyle/>
+                    <a:p>
+                      <a:pPr lvl="0" indent="0" marL="0">
+                        <a:buNone/>
+                      </a:pPr>
+                      <a:r>
+                        <a:rPr>
+                          <a:latin typeface="Courier"/>
+                        </a:rPr>
+                        <a:t>checkpoint_cohort_adequacy()</a:t>
+                      </a:r>
+                      <a:r>
+                        <a:rPr/>
+                        <a:t>, attrition table</a:t>
+                      </a:r>
+                    </a:p>
+                  </a:txBody>
+                </a:tc>
+                <a:tc>
+                  <a:txBody>
+                    <a:bodyPr/>
+                    <a:lstStyle/>
+                    <a:p>
+                      <a:pPr lvl="0" indent="0" marL="0">
+                        <a:buNone/>
+                      </a:pPr>
+                      <a:r>
+                        <a:rPr/>
+                        <a:t>min_n_per_arm = 200; min_events = 50</a:t>
+                      </a:r>
+                    </a:p>
+                  </a:txBody>
+                </a:tc>
+                <a:tc>
+                  <a:txBody>
+                    <a:bodyPr/>
+                    <a:lstStyle/>
+                    <a:p>
+                      <a:pPr lvl="0" indent="0" marL="0" algn="ctr">
+                        <a:buNone/>
+                      </a:pPr>
+                      <a:r>
+                        <a:rPr/>
+                        <a:t>GO</a:t>
+                      </a:r>
+                    </a:p>
+                  </a:txBody>
+                </a:tc>
+              </a:tr>
+              <a:tr h="0">
+                <a:tc>
+                  <a:txBody>
+                    <a:bodyPr/>
+                    <a:lstStyle/>
+                    <a:p>
+                      <a:pPr lvl="0" indent="0" marL="0">
+                        <a:buNone/>
+                      </a:pPr>
+                      <a:r>
+                        <a:rPr/>
+                        <a:t>Stage 2a overlap / balance</a:t>
+                      </a:r>
+                    </a:p>
+                  </a:txBody>
+                </a:tc>
+                <a:tc>
+                  <a:txBody>
+                    <a:bodyPr/>
+                    <a:lstStyle/>
+                    <a:p>
+                      <a:pPr lvl="0" indent="0" marL="0">
+                        <a:buNone/>
+                      </a:pPr>
+                      <a:r>
+                        <a:rPr/>
+                        <a:t>PS in [0.21, 0.81]; balanced SMDs; ESS 78 %</a:t>
+                      </a:r>
+                    </a:p>
+                  </a:txBody>
+                </a:tc>
+                <a:tc>
+                  <a:txBody>
+                    <a:bodyPr/>
+                    <a:lstStyle/>
+                    <a:p>
+                      <a:pPr lvl="0" indent="0" marL="0">
+                        <a:buNone/>
+                      </a:pPr>
+                      <a:r>
+                        <a:rPr/>
+                        <a:t>PS in [0.01, 0.99]; SMD &lt;= 0.10; max wt &lt;= 10</a:t>
+                      </a:r>
+                    </a:p>
+                  </a:txBody>
+                </a:tc>
+                <a:tc>
+                  <a:txBody>
+                    <a:bodyPr/>
+                    <a:lstStyle/>
+                    <a:p>
+                      <a:pPr lvl="0" indent="0" marL="0" algn="ctr">
+                        <a:buNone/>
+                      </a:pPr>
+                      <a:r>
+                        <a:rPr/>
+                        <a:t>GO</a:t>
+                      </a:r>
+                    </a:p>
+                  </a:txBody>
+                </a:tc>
+              </a:tr>
+              <a:tr h="0">
+                <a:tc>
+                  <a:txBody>
+                    <a:bodyPr/>
+                    <a:lstStyle/>
+                    <a:p>
+                      <a:pPr lvl="0" indent="0" marL="0">
+                        <a:buNone/>
+                      </a:pPr>
+                      <a:r>
+                        <a:rPr/>
+                        <a:t>Stage 2b baseline plasmode</a:t>
+                      </a:r>
+                    </a:p>
+                  </a:txBody>
+                </a:tc>
+                <a:tc>
+                  <a:txBody>
+                    <a:bodyPr/>
+                    <a:lstStyle/>
+                    <a:p>
+                      <a:pPr lvl="0" indent="0" marL="0">
+                        <a:buNone/>
+                      </a:pPr>
+                      <a:r>
+                        <a:rPr/>
+                        <a:t>bias &lt; 0.001; coverage 0.94</a:t>
+                      </a:r>
+                    </a:p>
+                  </a:txBody>
+                </a:tc>
+                <a:tc>
+                  <a:txBody>
+                    <a:bodyPr/>
+                    <a:lstStyle/>
+                    <a:p>
+                      <a:pPr lvl="0" indent="0" marL="0">
+                        <a:buNone/>
+                      </a:pPr>
+                      <a:r>
+                        <a:rPr/>
+                        <a:t>bias &lt;= 0.01; coverage &gt;= 0.90; SE/SD in (0.8, 1.2)</a:t>
+                      </a:r>
+                    </a:p>
+                  </a:txBody>
+                </a:tc>
+                <a:tc>
+                  <a:txBody>
+                    <a:bodyPr/>
+                    <a:lstStyle/>
+                    <a:p>
+                      <a:pPr lvl="0" indent="0" marL="0" algn="ctr">
+                        <a:buNone/>
+                      </a:pPr>
+                      <a:r>
+                        <a:rPr/>
+                        <a:t>GO</a:t>
+                      </a:r>
+                    </a:p>
+                  </a:txBody>
+                </a:tc>
+              </a:tr>
+              <a:tr h="0">
+                <a:tc>
+                  <a:txBody>
+                    <a:bodyPr/>
+                    <a:lstStyle/>
+                    <a:p>
+                      <a:pPr lvl="0" indent="0" marL="0">
+                        <a:buNone/>
+                      </a:pPr>
+                      <a:r>
+                        <a:rPr/>
+                        <a:t>Stage 2c DQ stress</a:t>
+                      </a:r>
+                    </a:p>
+                  </a:txBody>
+                </a:tc>
+                <a:tc>
+                  <a:txBody>
+                    <a:bodyPr/>
+                    <a:lstStyle/>
+                    <a:p>
+                      <a:pPr lvl="0" indent="0" marL="0">
+                        <a:buNone/>
+                      </a:pPr>
+                      <a:r>
+                        <a:rPr/>
+                        <a:t>Minimax rule selects </a:t>
+                      </a:r>
+                      <a:r>
+                        <a:rPr>
+                          <a:latin typeface="Courier"/>
+                        </a:rPr>
+                        <a:t>glm_t01</a:t>
+                      </a:r>
+                    </a:p>
+                  </a:txBody>
+                </a:tc>
+                <a:tc>
+                  <a:txBody>
+                    <a:bodyPr/>
+                    <a:lstStyle/>
+                    <a:p>
+                      <a:pPr lvl="0" indent="0" marL="0">
+                        <a:buNone/>
+                      </a:pPr>
+                      <a:r>
+                        <a:rPr/>
+                        <a:t>Each scenario within thresholds across severities</a:t>
+                      </a:r>
+                    </a:p>
+                  </a:txBody>
+                </a:tc>
+                <a:tc>
+                  <a:txBody>
+                    <a:bodyPr/>
+                    <a:lstStyle/>
+                    <a:p>
+                      <a:pPr lvl="0" indent="0" marL="0" algn="ctr">
+                        <a:buNone/>
+                      </a:pPr>
+                      <a:r>
+                        <a:rPr/>
+                        <a:t>GO</a:t>
+                      </a:r>
+                    </a:p>
+                  </a:txBody>
+                </a:tc>
+              </a:tr>
+              <a:tr h="0">
+                <a:tc>
+                  <a:txBody>
+                    <a:bodyPr/>
+                    <a:lstStyle/>
+                    <a:p>
+                      <a:pPr lvl="0" indent="0" marL="0">
+                        <a:buNone/>
+                      </a:pPr>
+                      <a:r>
+                        <a:rPr/>
+                        <a:t>Stage 3 negative controls</a:t>
+                      </a:r>
+                    </a:p>
+                  </a:txBody>
+                </a:tc>
+                <a:tc>
+                  <a:txBody>
+                    <a:bodyPr/>
+                    <a:lstStyle/>
+                    <a:p>
+                      <a:pPr lvl="0" indent="0" marL="0">
+                        <a:buNone/>
+                      </a:pPr>
+                      <a:r>
+                        <a:rPr/>
+                        <a:t>2 of 5 NCs survived NZV; both pass</a:t>
+                      </a:r>
+                    </a:p>
+                  </a:txBody>
+                </a:tc>
+                <a:tc>
+                  <a:txBody>
+                    <a:bodyPr/>
+                    <a:lstStyle/>
+                    <a:p>
+                      <a:pPr lvl="0" indent="0" marL="0">
+                        <a:buNone/>
+                      </a:pPr>
+                      <a:r>
+                        <a:rPr/>
+                        <a:t>All analysed NCs pass at α = 0.05</a:t>
+                      </a:r>
+                    </a:p>
+                  </a:txBody>
+                </a:tc>
+                <a:tc>
+                  <a:txBody>
+                    <a:bodyPr/>
+                    <a:lstStyle/>
+                    <a:p>
+                      <a:pPr lvl="0" indent="0" marL="0" algn="ctr">
+                        <a:buNone/>
+                      </a:pPr>
+                      <a:r>
+                        <a:rPr/>
+                        <a:t>GO with FLAG</a:t>
+                      </a:r>
+                    </a:p>
+                  </a:txBody>
+                </a:tc>
+              </a:tr>
+              <a:tr h="0">
+                <a:tc>
+                  <a:txBody>
+                    <a:bodyPr/>
+                    <a:lstStyle/>
+                    <a:p>
+                      <a:pPr lvl="0" indent="0" marL="0">
+                        <a:buNone/>
+                      </a:pPr>
+                      <a:r>
+                        <a:rPr/>
+                        <a:t>Gate authorisation</a:t>
+                      </a:r>
+                    </a:p>
+                  </a:txBody>
+                </a:tc>
+                <a:tc>
+                  <a:txBody>
+                    <a:bodyPr/>
+                    <a:lstStyle/>
+                    <a:p>
+                      <a:pPr lvl="0" indent="0" marL="0">
+                        <a:buNone/>
+                      </a:pPr>
+                      <a:r>
+                        <a:rPr>
+                          <a:latin typeface="Courier"/>
+                        </a:rPr>
+                        <a:t>authorize_outcome_analysis()</a:t>
+                      </a:r>
+                    </a:p>
+                  </a:txBody>
+                </a:tc>
+                <a:tc>
+                  <a:txBody>
+                    <a:bodyPr/>
+                    <a:lstStyle/>
+                    <a:p>
+                      <a:pPr lvl="0" indent="0" marL="0">
+                        <a:buNone/>
+                      </a:pPr>
+                      <a:r>
+                        <a:rPr/>
+                        <a:t>All preceding GO or documented FLAG</a:t>
+                      </a:r>
+                    </a:p>
+                  </a:txBody>
+                </a:tc>
+                <a:tc>
+                  <a:txBody>
+                    <a:bodyPr/>
+                    <a:lstStyle/>
+                    <a:p>
+                      <a:pPr lvl="0" indent="0" marL="0" algn="ctr">
+                        <a:buNone/>
+                      </a:pPr>
+                      <a:r>
+                        <a:rPr/>
+                        <a:t>GO</a:t>
+                      </a:r>
+                    </a:p>
+                  </a:txBody>
+                </a:tc>
+              </a:tr>
+            </a:tbl>
+          </a:graphicData>
+        </a:graphic>
+      </p:graphicFrame>
+    </p:spTree>
+  </p:cSld>
+</p:sld>
+</file>
+
+<file path=ppt/slides/slide66.xml><?xml version="1.0" encoding="utf-8"?>
+<p:sld xmlns:a="http://schemas.openxmlformats.org/drawingml/2006/main" xmlns:r="http://schemas.openxmlformats.org/officeDocument/2006/relationships" xmlns:p="http://schemas.openxmlformats.org/presentationml/2006/main">
+  <p:cSld>
+    <p:spTree>
+      <p:nvGrpSpPr>
+        <p:cNvPr id="1" name=""/>
+        <p:cNvGrpSpPr/>
+        <p:nvPr/>
+      </p:nvGrpSpPr>
+      <p:grpSpPr>
+        <a:xfrm>
+          <a:off x="0" y="0"/>
+          <a:ext cx="0" cy="0"/>
+          <a:chOff x="0" y="0"/>
+          <a:chExt cx="0" cy="0"/>
+        </a:xfrm>
+      </p:grpSpPr>
+      <p:sp>
+        <p:nvSpPr>
+          <p:cNvPr id="2" name="Title 1"/>
+          <p:cNvSpPr>
+            <a:spLocks noGrp="1"/>
+          </p:cNvSpPr>
+          <p:nvPr>
+            <p:ph type="title"/>
+          </p:nvPr>
+        </p:nvSpPr>
+        <p:spPr/>
+        <p:txBody>
+          <a:bodyPr/>
+          <a:lstStyle/>
+          <a:p>
+            <a:pPr lvl="0" indent="0" marL="0">
+              <a:buNone/>
+            </a:pPr>
+            <a:r>
+              <a:rPr/>
+              <a:t>Decision-log example</a:t>
+            </a:r>
+          </a:p>
+        </p:txBody>
+      </p:sp>
+      <p:graphicFrame>
+        <p:nvGraphicFramePr>
+          <p:cNvPr id="6" name="Content Placeholder 5"/>
+          <p:cNvGraphicFramePr>
+            <a:graphicFrameLocks noGrp="1"/>
+          </p:cNvGraphicFramePr>
+          <p:nvPr>
+            <p:ph idx="1"/>
+          </p:nvPr>
+        </p:nvGraphicFramePr>
+        <p:xfrm>
+          <a:off x="457200" y="1193800"/>
+          <a:ext cx="8229600" cy="3390900"/>
+        </p:xfrm>
+        <a:graphic>
+          <a:graphicData uri="http://schemas.openxmlformats.org/drawingml/2006/table">
+            <a:tbl>
+              <a:tblPr firstRow="1" bandRow="1">
+                <a:tableStyleId>{5C22544A-7EE6-4342-B048-85BDC9FD1C3A}</a:tableStyleId>
+              </a:tblPr>
+              <a:tblGrid>
+                <a:gridCol w="1295400"/>
+                <a:gridCol w="1295400"/>
+                <a:gridCol w="1295400"/>
+                <a:gridCol w="2171700"/>
+                <a:gridCol w="2171700"/>
+              </a:tblGrid>
+              <a:tr h="0">
+                <a:tc>
+                  <a:txBody>
+                    <a:bodyPr/>
+                    <a:lstStyle/>
+                    <a:p>
+                      <a:pPr lvl="0" indent="0" marL="0">
+                        <a:buNone/>
+                      </a:pPr>
+                      <a:r>
+                        <a:rPr/>
+                        <a:t>Timestamp</a:t>
+                      </a:r>
+                    </a:p>
+                  </a:txBody>
+                  <a:tcPr/>
+                </a:tc>
+                <a:tc>
+                  <a:txBody>
+                    <a:bodyPr/>
+                    <a:lstStyle/>
+                    <a:p>
+                      <a:pPr lvl="0" indent="0" marL="0">
+                        <a:buNone/>
+                      </a:pPr>
+                      <a:r>
+                        <a:rPr/>
+                        <a:t>Stage</a:t>
+                      </a:r>
+                    </a:p>
+                  </a:txBody>
+                  <a:tcPr/>
+                </a:tc>
+                <a:tc>
+                  <a:txBody>
+                    <a:bodyPr/>
+                    <a:lstStyle/>
+                    <a:p>
+                      <a:pPr lvl="0" indent="0" marL="0">
+                        <a:buNone/>
+                      </a:pPr>
+                      <a:r>
+                        <a:rPr/>
+                        <a:t>Issue</a:t>
+                      </a:r>
+                    </a:p>
+                  </a:txBody>
+                  <a:tcPr/>
+                </a:tc>
+                <a:tc>
+                  <a:txBody>
+                    <a:bodyPr/>
+                    <a:lstStyle/>
+                    <a:p>
+                      <a:pPr lvl="0" indent="0" marL="0" algn="ctr">
+                        <a:buNone/>
+                      </a:pPr>
+                      <a:r>
+                        <a:rPr/>
+                        <a:t>Decision</a:t>
+                      </a:r>
+                    </a:p>
+                  </a:txBody>
+                  <a:tcPr/>
+                </a:tc>
+                <a:tc>
+                  <a:txBody>
+                    <a:bodyPr/>
+                    <a:lstStyle/>
+                    <a:p>
+                      <a:pPr lvl="0" indent="0" marL="0" algn="ctr">
+                        <a:buNone/>
+                      </a:pPr>
+                      <a:r>
+                        <a:rPr/>
+                        <a:t>Y visible?</a:t>
+                      </a:r>
+                    </a:p>
+                  </a:txBody>
+                  <a:tcPr/>
+                </a:tc>
+              </a:tr>
+              <a:tr h="0">
+                <a:tc>
+                  <a:txBody>
+                    <a:bodyPr/>
+                    <a:lstStyle/>
+                    <a:p>
+                      <a:pPr lvl="0" indent="0" marL="0">
+                        <a:buNone/>
+                      </a:pPr>
+                      <a:r>
+                        <a:rPr/>
+                        <a:t>2026-01-12 09:14</a:t>
+                      </a:r>
+                    </a:p>
+                  </a:txBody>
+                </a:tc>
+                <a:tc>
+                  <a:txBody>
+                    <a:bodyPr/>
+                    <a:lstStyle/>
+                    <a:p>
+                      <a:pPr lvl="0" indent="0" marL="0">
+                        <a:buNone/>
+                      </a:pPr>
+                      <a:r>
+                        <a:rPr/>
+                        <a:t>2a</a:t>
+                      </a:r>
+                    </a:p>
+                  </a:txBody>
+                </a:tc>
+                <a:tc>
+                  <a:txBody>
+                    <a:bodyPr/>
+                    <a:lstStyle/>
+                    <a:p>
+                      <a:pPr lvl="0" indent="0" marL="0">
+                        <a:buNone/>
+                      </a:pPr>
+                      <a:r>
+                        <a:rPr/>
+                        <a:t>Three NCs failed NZV filter</a:t>
+                      </a:r>
+                    </a:p>
+                  </a:txBody>
+                </a:tc>
+                <a:tc>
+                  <a:txBody>
+                    <a:bodyPr/>
+                    <a:lstStyle/>
+                    <a:p>
+                      <a:pPr lvl="0" indent="0" marL="0" algn="ctr">
+                        <a:buNone/>
+                      </a:pPr>
+                      <a:r>
+                        <a:rPr/>
+                        <a:t>FLAG</a:t>
+                      </a:r>
+                    </a:p>
+                  </a:txBody>
+                </a:tc>
+                <a:tc>
+                  <a:txBody>
+                    <a:bodyPr/>
+                    <a:lstStyle/>
+                    <a:p>
+                      <a:pPr lvl="0" indent="0" marL="0" algn="ctr">
+                        <a:buNone/>
+                      </a:pPr>
+                      <a:r>
+                        <a:rPr/>
+                        <a:t>No</a:t>
+                      </a:r>
+                    </a:p>
+                  </a:txBody>
+                </a:tc>
+              </a:tr>
+              <a:tr h="0">
+                <a:tc>
+                  <a:txBody>
+                    <a:bodyPr/>
+                    <a:lstStyle/>
+                    <a:p>
+                      <a:pPr lvl="0" indent="0" marL="0">
+                        <a:buNone/>
+                      </a:pPr>
+                      <a:r>
+                        <a:rPr/>
+                        <a:t>2026-01-12 11:02</a:t>
+                      </a:r>
+                    </a:p>
+                  </a:txBody>
+                </a:tc>
+                <a:tc>
+                  <a:txBody>
+                    <a:bodyPr/>
+                    <a:lstStyle/>
+                    <a:p>
+                      <a:pPr lvl="0" indent="0" marL="0">
+                        <a:buNone/>
+                      </a:pPr>
+                      <a:r>
+                        <a:rPr/>
+                        <a:t>2c</a:t>
+                      </a:r>
+                    </a:p>
+                  </a:txBody>
+                </a:tc>
+                <a:tc>
+                  <a:txBody>
+                    <a:bodyPr/>
+                    <a:lstStyle/>
+                    <a:p>
+                      <a:pPr lvl="0" indent="0" marL="0">
+                        <a:buNone/>
+                      </a:pPr>
+                      <a:r>
+                        <a:rPr/>
+                        <a:t>DQ stress at n_sims = 3 (fast demo)</a:t>
+                      </a:r>
+                    </a:p>
+                  </a:txBody>
+                </a:tc>
+                <a:tc>
+                  <a:txBody>
+                    <a:bodyPr/>
+                    <a:lstStyle/>
+                    <a:p>
+                      <a:pPr lvl="0" indent="0" marL="0" algn="ctr">
+                        <a:buNone/>
+                      </a:pPr>
+                      <a:r>
+                        <a:rPr/>
+                        <a:t>FLAG</a:t>
+                      </a:r>
+                    </a:p>
+                  </a:txBody>
+                </a:tc>
+                <a:tc>
+                  <a:txBody>
+                    <a:bodyPr/>
+                    <a:lstStyle/>
+                    <a:p>
+                      <a:pPr lvl="0" indent="0" marL="0" algn="ctr">
+                        <a:buNone/>
+                      </a:pPr>
+                      <a:r>
+                        <a:rPr/>
+                        <a:t>No</a:t>
+                      </a:r>
+                    </a:p>
+                  </a:txBody>
+                </a:tc>
+              </a:tr>
+              <a:tr h="0">
+                <a:tc>
+                  <a:txBody>
+                    <a:bodyPr/>
+                    <a:lstStyle/>
+                    <a:p>
+                      <a:pPr lvl="0" indent="0" marL="0">
+                        <a:buNone/>
+                      </a:pPr>
+                      <a:r>
+                        <a:rPr/>
+                        <a:t>2026-01-12 14:45</a:t>
+                      </a:r>
+                    </a:p>
+                  </a:txBody>
+                </a:tc>
+                <a:tc>
+                  <a:txBody>
+                    <a:bodyPr/>
+                    <a:lstStyle/>
+                    <a:p>
+                      <a:pPr lvl="0" indent="0" marL="0">
+                        <a:buNone/>
+                      </a:pPr>
+                      <a:r>
+                        <a:rPr/>
+                        <a:t>Gate</a:t>
+                      </a:r>
+                    </a:p>
+                  </a:txBody>
+                </a:tc>
+                <a:tc>
+                  <a:txBody>
+                    <a:bodyPr/>
+                    <a:lstStyle/>
+                    <a:p>
+                      <a:pPr lvl="0" indent="0" marL="0">
+                        <a:buNone/>
+                      </a:pPr>
+                      <a:r>
+                        <a:rPr/>
+                        <a:t>All checkpoints GO or documented FLAG</a:t>
+                      </a:r>
+                    </a:p>
+                  </a:txBody>
+                </a:tc>
+                <a:tc>
+                  <a:txBody>
+                    <a:bodyPr/>
+                    <a:lstStyle/>
+                    <a:p>
+                      <a:pPr lvl="0" indent="0" marL="0" algn="ctr">
+                        <a:buNone/>
+                      </a:pPr>
+                      <a:r>
+                        <a:rPr/>
+                        <a:t>GO</a:t>
+                      </a:r>
+                    </a:p>
+                  </a:txBody>
+                </a:tc>
+                <a:tc>
+                  <a:txBody>
+                    <a:bodyPr/>
+                    <a:lstStyle/>
+                    <a:p>
+                      <a:pPr lvl="0" indent="0" marL="0" algn="ctr">
+                        <a:buNone/>
+                      </a:pPr>
+                      <a:r>
+                        <a:rPr/>
+                        <a:t>No</a:t>
+                      </a:r>
+                    </a:p>
+                  </a:txBody>
+                </a:tc>
+              </a:tr>
+            </a:tbl>
+          </a:graphicData>
+        </a:graphic>
+      </p:graphicFrame>
+    </p:spTree>
+  </p:cSld>
+</p:sld>
+</file>
+
+<file path=ppt/slides/slide67.xml><?xml version="1.0" encoding="utf-8"?>
+<p:sld xmlns:a="http://schemas.openxmlformats.org/drawingml/2006/main" xmlns:r="http://schemas.openxmlformats.org/officeDocument/2006/relationships" xmlns:p="http://schemas.openxmlformats.org/presentationml/2006/main">
+  <p:cSld>
+    <p:spTree>
+      <p:nvGrpSpPr>
+        <p:cNvPr id="1" name=""/>
+        <p:cNvGrpSpPr/>
+        <p:nvPr/>
+      </p:nvGrpSpPr>
+      <p:grpSpPr>
+        <a:xfrm>
+          <a:off x="0" y="0"/>
+          <a:ext cx="0" cy="0"/>
+          <a:chOff x="0" y="0"/>
+          <a:chExt cx="0" cy="0"/>
+        </a:xfrm>
+      </p:grpSpPr>
+      <p:sp>
+        <p:nvSpPr>
+          <p:cNvPr id="2" name="Title 1"/>
+          <p:cNvSpPr>
+            <a:spLocks noGrp="1"/>
+          </p:cNvSpPr>
+          <p:nvPr>
+            <p:ph type="title"/>
+          </p:nvPr>
+        </p:nvSpPr>
+        <p:spPr/>
+        <p:txBody>
+          <a:bodyPr/>
+          <a:lstStyle/>
+          <a:p>
+            <a:pPr lvl="0" indent="0" marL="0">
+              <a:buNone/>
+            </a:pPr>
+            <a:r>
+              <a:rPr/>
+              <a:t>Sensitivity analyses mapped to assumptions</a:t>
+            </a:r>
+          </a:p>
+        </p:txBody>
+      </p:sp>
+      <p:graphicFrame>
+        <p:nvGraphicFramePr>
+          <p:cNvPr id="6" name="Content Placeholder 5"/>
+          <p:cNvGraphicFramePr>
+            <a:graphicFrameLocks noGrp="1"/>
+          </p:cNvGraphicFramePr>
+          <p:nvPr>
+            <p:ph idx="1"/>
+          </p:nvPr>
+        </p:nvGraphicFramePr>
+        <p:xfrm>
+          <a:off x="457200" y="1193800"/>
+          <a:ext cx="8229600" cy="3390900"/>
+        </p:xfrm>
+        <a:graphic>
+          <a:graphicData uri="http://schemas.openxmlformats.org/drawingml/2006/table">
+            <a:tbl>
+              <a:tblPr firstRow="1" bandRow="1">
+                <a:tableStyleId>{5C22544A-7EE6-4342-B048-85BDC9FD1C3A}</a:tableStyleId>
+              </a:tblPr>
+              <a:tblGrid>
+                <a:gridCol w="4114800"/>
+                <a:gridCol w="4114800"/>
+              </a:tblGrid>
+              <a:tr h="0">
+                <a:tc>
+                  <a:txBody>
+                    <a:bodyPr/>
+                    <a:lstStyle/>
+                    <a:p>
+                      <a:pPr lvl="0" indent="0" marL="0">
+                        <a:buNone/>
+                      </a:pPr>
+                      <a:r>
+                        <a:rPr/>
+                        <a:t>Assumption</a:t>
+                      </a:r>
+                    </a:p>
+                  </a:txBody>
+                  <a:tcPr/>
+                </a:tc>
+                <a:tc>
+                  <a:txBody>
+                    <a:bodyPr/>
+                    <a:lstStyle/>
+                    <a:p>
+                      <a:pPr lvl="0" indent="0" marL="0">
+                        <a:buNone/>
+                      </a:pPr>
+                      <a:r>
+                        <a:rPr/>
+                        <a:t>Sensitivity analysis or diagnostic</a:t>
+                      </a:r>
+                    </a:p>
+                  </a:txBody>
+                  <a:tcPr/>
+                </a:tc>
+              </a:tr>
+              <a:tr h="0">
+                <a:tc>
+                  <a:txBody>
+                    <a:bodyPr/>
+                    <a:lstStyle/>
+                    <a:p>
+                      <a:pPr lvl="0" indent="0" marL="0">
+                        <a:buNone/>
+                      </a:pPr>
+                      <a:r>
+                        <a:rPr/>
+                        <a:t>Exchangeability</a:t>
+                      </a:r>
+                    </a:p>
+                  </a:txBody>
+                </a:tc>
+                <a:tc>
+                  <a:txBody>
+                    <a:bodyPr/>
+                    <a:lstStyle/>
+                    <a:p>
+                      <a:pPr lvl="0" indent="0" marL="0">
+                        <a:buNone/>
+                      </a:pPr>
+                      <a:r>
+                        <a:rPr/>
+                        <a:t>Negative-control outcomes; E-value on primary estimate</a:t>
+                      </a:r>
+                    </a:p>
+                  </a:txBody>
+                </a:tc>
+              </a:tr>
+              <a:tr h="0">
+                <a:tc>
+                  <a:txBody>
+                    <a:bodyPr/>
+                    <a:lstStyle/>
+                    <a:p>
+                      <a:pPr lvl="0" indent="0" marL="0">
+                        <a:buNone/>
+                      </a:pPr>
+                      <a:r>
+                        <a:rPr/>
+                        <a:t>Positivity</a:t>
+                      </a:r>
+                    </a:p>
+                  </a:txBody>
+                </a:tc>
+                <a:tc>
+                  <a:txBody>
+                    <a:bodyPr/>
+                    <a:lstStyle/>
+                    <a:p>
+                      <a:pPr lvl="0" indent="0" marL="0">
+                        <a:buNone/>
+                      </a:pPr>
+                      <a:r>
+                        <a:rPr/>
+                        <a:t>Truncation-grid sensitivity; weight + ESS reporting</a:t>
+                      </a:r>
+                    </a:p>
+                  </a:txBody>
+                </a:tc>
+              </a:tr>
+              <a:tr h="0">
+                <a:tc>
+                  <a:txBody>
+                    <a:bodyPr/>
+                    <a:lstStyle/>
+                    <a:p>
+                      <a:pPr lvl="0" indent="0" marL="0">
+                        <a:buNone/>
+                      </a:pPr>
+                      <a:r>
+                        <a:rPr/>
+                        <a:t>Consistency</a:t>
+                      </a:r>
+                    </a:p>
+                  </a:txBody>
+                </a:tc>
+                <a:tc>
+                  <a:txBody>
+                    <a:bodyPr/>
+                    <a:lstStyle/>
+                    <a:p>
+                      <a:pPr lvl="0" indent="0" marL="0">
+                        <a:buNone/>
+                      </a:pPr>
+                      <a:r>
+                        <a:rPr/>
+                        <a:t>Documented exposure phenotype; direct-from-scene restriction</a:t>
+                      </a:r>
+                    </a:p>
+                  </a:txBody>
+                </a:tc>
+              </a:tr>
+              <a:tr h="0">
+                <a:tc>
+                  <a:txBody>
+                    <a:bodyPr/>
+                    <a:lstStyle/>
+                    <a:p>
+                      <a:pPr lvl="0" indent="0" marL="0">
+                        <a:buNone/>
+                      </a:pPr>
+                      <a:r>
+                        <a:rPr/>
+                        <a:t>Dependent censoring</a:t>
+                      </a:r>
+                    </a:p>
+                  </a:txBody>
+                </a:tc>
+                <a:tc>
+                  <a:txBody>
+                    <a:bodyPr/>
+                    <a:lstStyle/>
+                    <a:p>
+                      <a:pPr lvl="0" indent="0" marL="0">
+                        <a:buNone/>
+                      </a:pPr>
+                      <a:r>
+                        <a:rPr/>
+                        <a:t>IPCW-TMLE on binary outcome</a:t>
+                      </a:r>
+                    </a:p>
+                  </a:txBody>
+                </a:tc>
+              </a:tr>
+              <a:tr h="0">
+                <a:tc>
+                  <a:txBody>
+                    <a:bodyPr/>
+                    <a:lstStyle/>
+                    <a:p>
+                      <a:pPr lvl="0" indent="0" marL="0">
+                        <a:buNone/>
+                      </a:pPr>
+                      <a:r>
+                        <a:rPr/>
+                        <a:t>Missing outcome</a:t>
+                      </a:r>
+                    </a:p>
+                  </a:txBody>
+                </a:tc>
+                <a:tc>
+                  <a:txBody>
+                    <a:bodyPr/>
+                    <a:lstStyle/>
+                    <a:p>
+                      <a:pPr lvl="0" indent="0" marL="0">
+                        <a:buNone/>
+                      </a:pPr>
+                      <a:r>
+                        <a:rPr/>
+                        <a:t>IPCW-TMLE vs complete-case TMLE comparison</a:t>
+                      </a:r>
+                    </a:p>
+                  </a:txBody>
+                </a:tc>
+              </a:tr>
+              <a:tr h="0">
+                <a:tc>
+                  <a:txBody>
+                    <a:bodyPr/>
+                    <a:lstStyle/>
+                    <a:p>
+                      <a:pPr lvl="0" indent="0" marL="0">
+                        <a:buNone/>
+                      </a:pPr>
+                      <a:r>
+                        <a:rPr/>
+                        <a:t>Composite / competing</a:t>
+                      </a:r>
+                    </a:p>
+                  </a:txBody>
+                </a:tc>
+                <a:tc>
+                  <a:txBody>
+                    <a:bodyPr/>
+                    <a:lstStyle/>
+                    <a:p>
+                      <a:pPr lvl="0" indent="0" marL="0">
+                        <a:buNone/>
+                      </a:pPr>
+                      <a:r>
+                        <a:rPr/>
+                        <a:t>Coherence check via </a:t>
+                      </a:r>
+                      <a:r>
+                        <a:rPr>
+                          <a:latin typeface="Courier"/>
+                        </a:rPr>
+                        <a:t>clean_check_event_processes()</a:t>
+                      </a:r>
+                    </a:p>
+                  </a:txBody>
+                </a:tc>
+              </a:tr>
+            </a:tbl>
+          </a:graphicData>
+        </a:graphic>
+      </p:graphicFrame>
+    </p:spTree>
+  </p:cSld>
+</p:sld>
+</file>
+
+<file path=ppt/slides/slide68.xml><?xml version="1.0" encoding="utf-8"?>
+<p:sld xmlns:a="http://schemas.openxmlformats.org/drawingml/2006/main" xmlns:r="http://schemas.openxmlformats.org/officeDocument/2006/relationships" xmlns:p="http://schemas.openxmlformats.org/presentationml/2006/main">
+  <p:cSld>
+    <p:spTree>
+      <p:nvGrpSpPr>
+        <p:cNvPr id="1" name=""/>
+        <p:cNvGrpSpPr/>
+        <p:nvPr/>
+      </p:nvGrpSpPr>
+      <p:grpSpPr>
+        <a:xfrm>
+          <a:off x="0" y="0"/>
+          <a:ext cx="0" cy="0"/>
+          <a:chOff x="0" y="0"/>
+          <a:chExt cx="0" cy="0"/>
+        </a:xfrm>
+      </p:grpSpPr>
+      <p:sp>
+        <p:nvSpPr>
+          <p:cNvPr id="2" name="Title 1"/>
+          <p:cNvSpPr>
+            <a:spLocks noGrp="1"/>
+          </p:cNvSpPr>
+          <p:nvPr>
+            <p:ph type="title"/>
+          </p:nvPr>
+        </p:nvSpPr>
+        <p:spPr/>
+        <p:txBody>
+          <a:bodyPr/>
+          <a:lstStyle/>
+          <a:p>
+            <a:pPr lvl="0" indent="0" marL="0">
+              <a:buNone/>
+            </a:pPr>
+            <a:r>
+              <a:rPr/>
+              <a:t>Stage 2b feasibility plasmode metrics</a:t>
+            </a:r>
+          </a:p>
+        </p:txBody>
+      </p:sp>
+      <p:graphicFrame>
+        <p:nvGraphicFramePr>
+          <p:cNvPr id="6" name="Content Placeholder 5"/>
+          <p:cNvGraphicFramePr>
+            <a:graphicFrameLocks noGrp="1"/>
+          </p:cNvGraphicFramePr>
+          <p:nvPr>
+            <p:ph idx="1"/>
+          </p:nvPr>
+        </p:nvGraphicFramePr>
+        <p:xfrm>
+          <a:off x="457200" y="1193800"/>
+          <a:ext cx="8229600" cy="3390900"/>
+        </p:xfrm>
+        <a:graphic>
+          <a:graphicData uri="http://schemas.openxmlformats.org/drawingml/2006/table">
+            <a:tbl>
+              <a:tblPr firstRow="1" bandRow="1">
+                <a:tableStyleId>{5C22544A-7EE6-4342-B048-85BDC9FD1C3A}</a:tableStyleId>
+              </a:tblPr>
+              <a:tblGrid>
+                <a:gridCol w="1638300"/>
+                <a:gridCol w="1638300"/>
+                <a:gridCol w="1638300"/>
+                <a:gridCol w="1638300"/>
+                <a:gridCol w="1638300"/>
+              </a:tblGrid>
+              <a:tr h="0">
+                <a:tc>
+                  <a:txBody>
+                    <a:bodyPr/>
+                    <a:lstStyle/>
+                    <a:p>
+                      <a:pPr lvl="0" indent="0" marL="0">
+                        <a:buNone/>
+                      </a:pPr>
+                      <a:r>
+                        <a:rPr/>
+                        <a:t>Candidate</a:t>
+                      </a:r>
+                    </a:p>
+                  </a:txBody>
+                  <a:tcPr/>
+                </a:tc>
+                <a:tc>
+                  <a:txBody>
+                    <a:bodyPr/>
+                    <a:lstStyle/>
+                    <a:p>
+                      <a:pPr lvl="0" indent="0" marL="0" algn="r">
+                        <a:buNone/>
+                      </a:pPr>
+                      <a:r>
+                        <a:rPr/>
+                        <a:t>Bias</a:t>
+                      </a:r>
+                    </a:p>
+                  </a:txBody>
+                  <a:tcPr/>
+                </a:tc>
+                <a:tc>
+                  <a:txBody>
+                    <a:bodyPr/>
+                    <a:lstStyle/>
+                    <a:p>
+                      <a:pPr lvl="0" indent="0" marL="0" algn="r">
+                        <a:buNone/>
+                      </a:pPr>
+                      <a:r>
+                        <a:rPr/>
+                        <a:t>RMSE</a:t>
+                      </a:r>
+                    </a:p>
+                  </a:txBody>
+                  <a:tcPr/>
+                </a:tc>
+                <a:tc>
+                  <a:txBody>
+                    <a:bodyPr/>
+                    <a:lstStyle/>
+                    <a:p>
+                      <a:pPr lvl="0" indent="0" marL="0" algn="r">
+                        <a:buNone/>
+                      </a:pPr>
+                      <a:r>
+                        <a:rPr/>
+                        <a:t>Coverage</a:t>
+                      </a:r>
+                    </a:p>
+                  </a:txBody>
+                  <a:tcPr/>
+                </a:tc>
+                <a:tc>
+                  <a:txBody>
+                    <a:bodyPr/>
+                    <a:lstStyle/>
+                    <a:p>
+                      <a:pPr lvl="0" indent="0" marL="0" algn="r">
+                        <a:buNone/>
+                      </a:pPr>
+                      <a:r>
+                        <a:rPr/>
+                        <a:t>SE/SD</a:t>
+                      </a:r>
+                    </a:p>
+                  </a:txBody>
+                  <a:tcPr/>
+                </a:tc>
+              </a:tr>
+              <a:tr h="0">
+                <a:tc>
+                  <a:txBody>
+                    <a:bodyPr/>
+                    <a:lstStyle/>
+                    <a:p>
+                      <a:pPr lvl="0" indent="0" marL="0">
+                        <a:buNone/>
+                      </a:pPr>
+                      <a:r>
+                        <a:rPr>
+                          <a:latin typeface="Courier"/>
+                        </a:rPr>
+                        <a:t>glm_t01</a:t>
+                      </a:r>
+                    </a:p>
+                  </a:txBody>
+                </a:tc>
+                <a:tc>
+                  <a:txBody>
+                    <a:bodyPr/>
+                    <a:lstStyle/>
+                    <a:p>
+                      <a:pPr lvl="0" indent="0" marL="0" algn="r">
+                        <a:buNone/>
+                      </a:pPr>
+                      <a:r>
+                        <a:rPr/>
+                        <a:t>&lt; 0.001</a:t>
+                      </a:r>
+                    </a:p>
+                  </a:txBody>
+                </a:tc>
+                <a:tc>
+                  <a:txBody>
+                    <a:bodyPr/>
+                    <a:lstStyle/>
+                    <a:p>
+                      <a:pPr lvl="0" indent="0" marL="0" algn="r">
+                        <a:buNone/>
+                      </a:pPr>
+                      <a:r>
+                        <a:rPr/>
+                        <a:t>0.018</a:t>
+                      </a:r>
+                    </a:p>
+                  </a:txBody>
+                </a:tc>
+                <a:tc>
+                  <a:txBody>
+                    <a:bodyPr/>
+                    <a:lstStyle/>
+                    <a:p>
+                      <a:pPr lvl="0" indent="0" marL="0" algn="r">
+                        <a:buNone/>
+                      </a:pPr>
+                      <a:r>
+                        <a:rPr/>
+                        <a:t>0.94</a:t>
+                      </a:r>
+                    </a:p>
+                  </a:txBody>
+                </a:tc>
+                <a:tc>
+                  <a:txBody>
+                    <a:bodyPr/>
+                    <a:lstStyle/>
+                    <a:p>
+                      <a:pPr lvl="0" indent="0" marL="0" algn="r">
+                        <a:buNone/>
+                      </a:pPr>
+                      <a:r>
+                        <a:rPr/>
+                        <a:t>1.01</a:t>
+                      </a:r>
+                    </a:p>
+                  </a:txBody>
+                </a:tc>
+              </a:tr>
+              <a:tr h="0">
+                <a:tc>
+                  <a:txBody>
+                    <a:bodyPr/>
+                    <a:lstStyle/>
+                    <a:p>
+                      <a:pPr lvl="0" indent="0" marL="0">
+                        <a:buNone/>
+                      </a:pPr>
+                      <a:r>
+                        <a:rPr>
+                          <a:latin typeface="Courier"/>
+                        </a:rPr>
+                        <a:t>glm_t05</a:t>
+                      </a:r>
+                    </a:p>
+                  </a:txBody>
+                </a:tc>
+                <a:tc>
+                  <a:txBody>
+                    <a:bodyPr/>
+                    <a:lstStyle/>
+                    <a:p>
+                      <a:pPr lvl="0" indent="0" marL="0" algn="r">
+                        <a:buNone/>
+                      </a:pPr>
+                      <a:r>
+                        <a:rPr/>
+                        <a:t>&lt; 0.001</a:t>
+                      </a:r>
+                    </a:p>
+                  </a:txBody>
+                </a:tc>
+                <a:tc>
+                  <a:txBody>
+                    <a:bodyPr/>
+                    <a:lstStyle/>
+                    <a:p>
+                      <a:pPr lvl="0" indent="0" marL="0" algn="r">
+                        <a:buNone/>
+                      </a:pPr>
+                      <a:r>
+                        <a:rPr/>
+                        <a:t>0.018</a:t>
+                      </a:r>
+                    </a:p>
+                  </a:txBody>
+                </a:tc>
+                <a:tc>
+                  <a:txBody>
+                    <a:bodyPr/>
+                    <a:lstStyle/>
+                    <a:p>
+                      <a:pPr lvl="0" indent="0" marL="0" algn="r">
+                        <a:buNone/>
+                      </a:pPr>
+                      <a:r>
+                        <a:rPr/>
+                        <a:t>0.94</a:t>
+                      </a:r>
+                    </a:p>
+                  </a:txBody>
+                </a:tc>
+                <a:tc>
+                  <a:txBody>
+                    <a:bodyPr/>
+                    <a:lstStyle/>
+                    <a:p>
+                      <a:pPr lvl="0" indent="0" marL="0" algn="r">
+                        <a:buNone/>
+                      </a:pPr>
+                      <a:r>
+                        <a:rPr/>
+                        <a:t>1.01</a:t>
+                      </a:r>
+                    </a:p>
+                  </a:txBody>
+                </a:tc>
+              </a:tr>
+            </a:tbl>
+          </a:graphicData>
+        </a:graphic>
+      </p:graphicFrame>
+    </p:spTree>
+  </p:cSld>
+</p:sld>
+</file>
+
+<file path=ppt/slides/slide69.xml><?xml version="1.0" encoding="utf-8"?>
+<p:sld xmlns:a="http://schemas.openxmlformats.org/drawingml/2006/main" xmlns:r="http://schemas.openxmlformats.org/officeDocument/2006/relationships" xmlns:p="http://schemas.openxmlformats.org/presentationml/2006/main">
+  <p:cSld>
+    <p:spTree>
+      <p:nvGrpSpPr>
+        <p:cNvPr id="1" name=""/>
+        <p:cNvGrpSpPr/>
+        <p:nvPr/>
+      </p:nvGrpSpPr>
+      <p:grpSpPr>
+        <a:xfrm>
+          <a:off x="0" y="0"/>
+          <a:ext cx="0" cy="0"/>
+          <a:chOff x="0" y="0"/>
+          <a:chExt cx="0" cy="0"/>
+        </a:xfrm>
+      </p:grpSpPr>
+      <p:sp>
+        <p:nvSpPr>
+          <p:cNvPr id="2" name="Title 1"/>
+          <p:cNvSpPr>
+            <a:spLocks noGrp="1"/>
+          </p:cNvSpPr>
+          <p:nvPr>
+            <p:ph type="title"/>
+          </p:nvPr>
+        </p:nvSpPr>
+        <p:spPr/>
+        <p:txBody>
+          <a:bodyPr/>
+          <a:lstStyle/>
+          <a:p>
+            <a:pPr lvl="0" indent="0" marL="0">
+              <a:buNone/>
+            </a:pPr>
+            <a:r>
+              <a:rPr/>
+              <a:t>Stage 3 negative-control TMLE</a:t>
+            </a:r>
+          </a:p>
+        </p:txBody>
+      </p:sp>
+      <p:graphicFrame>
+        <p:nvGraphicFramePr>
+          <p:cNvPr id="6" name="Content Placeholder 5"/>
+          <p:cNvGraphicFramePr>
+            <a:graphicFrameLocks noGrp="1"/>
+          </p:cNvGraphicFramePr>
+          <p:nvPr>
+            <p:ph idx="1"/>
+          </p:nvPr>
+        </p:nvGraphicFramePr>
+        <p:xfrm>
+          <a:off x="457200" y="1193800"/>
+          <a:ext cx="8229600" cy="3390900"/>
+        </p:xfrm>
+        <a:graphic>
+          <a:graphicData uri="http://schemas.openxmlformats.org/drawingml/2006/table">
+            <a:tbl>
+              <a:tblPr firstRow="1" bandRow="1">
+                <a:tableStyleId>{5C22544A-7EE6-4342-B048-85BDC9FD1C3A}</a:tableStyleId>
+              </a:tblPr>
+              <a:tblGrid>
+                <a:gridCol w="1638300"/>
+                <a:gridCol w="1638300"/>
+                <a:gridCol w="1638300"/>
+                <a:gridCol w="1638300"/>
+                <a:gridCol w="1638300"/>
+              </a:tblGrid>
+              <a:tr h="0">
+                <a:tc>
+                  <a:txBody>
+                    <a:bodyPr/>
+                    <a:lstStyle/>
+                    <a:p>
+                      <a:pPr lvl="0" indent="0" marL="0">
+                        <a:buNone/>
+                      </a:pPr>
+                      <a:r>
+                        <a:rPr/>
+                        <a:t>Negative control</a:t>
+                      </a:r>
+                    </a:p>
+                  </a:txBody>
+                  <a:tcPr/>
+                </a:tc>
+                <a:tc>
+                  <a:txBody>
+                    <a:bodyPr/>
+                    <a:lstStyle/>
+                    <a:p>
+                      <a:pPr lvl="0" indent="0" marL="0" algn="r">
+                        <a:buNone/>
+                      </a:pPr>
+                      <a:r>
+                        <a:rPr/>
+                        <a:t>Estimate</a:t>
+                      </a:r>
+                    </a:p>
+                  </a:txBody>
+                  <a:tcPr/>
+                </a:tc>
+                <a:tc>
+                  <a:txBody>
+                    <a:bodyPr/>
+                    <a:lstStyle/>
+                    <a:p>
+                      <a:pPr lvl="0" indent="0" marL="0" algn="r">
+                        <a:buNone/>
+                      </a:pPr>
+                      <a:r>
+                        <a:rPr/>
+                        <a:t>SE</a:t>
+                      </a:r>
+                    </a:p>
+                  </a:txBody>
+                  <a:tcPr/>
+                </a:tc>
+                <a:tc>
+                  <a:txBody>
+                    <a:bodyPr/>
+                    <a:lstStyle/>
+                    <a:p>
+                      <a:pPr lvl="0" indent="0" marL="0" algn="r">
+                        <a:buNone/>
+                      </a:pPr>
+                      <a:r>
+                        <a:rPr/>
+                        <a:t>p-value</a:t>
+                      </a:r>
+                    </a:p>
+                  </a:txBody>
+                  <a:tcPr/>
+                </a:tc>
+                <a:tc>
+                  <a:txBody>
+                    <a:bodyPr/>
+                    <a:lstStyle/>
+                    <a:p>
+                      <a:pPr lvl="0" indent="0" marL="0" algn="ctr">
+                        <a:buNone/>
+                      </a:pPr>
+                      <a:r>
+                        <a:rPr/>
+                        <a:t>Pass</a:t>
+                      </a:r>
+                    </a:p>
+                  </a:txBody>
+                  <a:tcPr/>
+                </a:tc>
+              </a:tr>
+              <a:tr h="0">
+                <a:tc>
+                  <a:txBody>
+                    <a:bodyPr/>
+                    <a:lstStyle/>
+                    <a:p>
+                      <a:pPr lvl="0" indent="0" marL="0">
+                        <a:buNone/>
+                      </a:pPr>
+                      <a:r>
+                        <a:rPr/>
+                        <a:t>chronic hypertension</a:t>
+                      </a:r>
+                    </a:p>
+                  </a:txBody>
+                </a:tc>
+                <a:tc>
+                  <a:txBody>
+                    <a:bodyPr/>
+                    <a:lstStyle/>
+                    <a:p>
+                      <a:pPr lvl="0" indent="0" marL="0" algn="r">
+                        <a:buNone/>
+                      </a:pPr>
+                      <a:r>
+                        <a:rPr/>
+                        <a:t>0.00248</a:t>
+                      </a:r>
+                    </a:p>
+                  </a:txBody>
+                </a:tc>
+                <a:tc>
+                  <a:txBody>
+                    <a:bodyPr/>
+                    <a:lstStyle/>
+                    <a:p>
+                      <a:pPr lvl="0" indent="0" marL="0" algn="r">
+                        <a:buNone/>
+                      </a:pPr>
+                      <a:r>
+                        <a:rPr/>
+                        <a:t>0.0072</a:t>
+                      </a:r>
+                    </a:p>
+                  </a:txBody>
+                </a:tc>
+                <a:tc>
+                  <a:txBody>
+                    <a:bodyPr/>
+                    <a:lstStyle/>
+                    <a:p>
+                      <a:pPr lvl="0" indent="0" marL="0" algn="r">
+                        <a:buNone/>
+                      </a:pPr>
+                      <a:r>
+                        <a:rPr/>
+                        <a:t>0.73</a:t>
+                      </a:r>
+                    </a:p>
+                  </a:txBody>
+                </a:tc>
+                <a:tc>
+                  <a:txBody>
+                    <a:bodyPr/>
+                    <a:lstStyle/>
+                    <a:p>
+                      <a:pPr lvl="0" indent="0" marL="0" algn="ctr">
+                        <a:buNone/>
+                      </a:pPr>
+                      <a:r>
+                        <a:rPr/>
+                        <a:t>✓</a:t>
+                      </a:r>
+                    </a:p>
+                  </a:txBody>
+                </a:tc>
+              </a:tr>
+              <a:tr h="0">
+                <a:tc>
+                  <a:txBody>
+                    <a:bodyPr/>
+                    <a:lstStyle/>
+                    <a:p>
+                      <a:pPr lvl="0" indent="0" marL="0">
+                        <a:buNone/>
+                      </a:pPr>
+                      <a:r>
+                        <a:rPr/>
+                        <a:t>household urban</a:t>
+                      </a:r>
+                    </a:p>
+                  </a:txBody>
+                </a:tc>
+                <a:tc>
+                  <a:txBody>
+                    <a:bodyPr/>
+                    <a:lstStyle/>
+                    <a:p>
+                      <a:pPr lvl="0" indent="0" marL="0" algn="r">
+                        <a:buNone/>
+                      </a:pPr>
+                      <a:r>
+                        <a:rPr/>
+                        <a:t>-0.00077</a:t>
+                      </a:r>
+                    </a:p>
+                  </a:txBody>
+                </a:tc>
+                <a:tc>
+                  <a:txBody>
+                    <a:bodyPr/>
+                    <a:lstStyle/>
+                    <a:p>
+                      <a:pPr lvl="0" indent="0" marL="0" algn="r">
+                        <a:buNone/>
+                      </a:pPr>
+                      <a:r>
+                        <a:rPr/>
+                        <a:t>0.0071</a:t>
+                      </a:r>
+                    </a:p>
+                  </a:txBody>
+                </a:tc>
+                <a:tc>
+                  <a:txBody>
+                    <a:bodyPr/>
+                    <a:lstStyle/>
+                    <a:p>
+                      <a:pPr lvl="0" indent="0" marL="0" algn="r">
+                        <a:buNone/>
+                      </a:pPr>
+                      <a:r>
+                        <a:rPr/>
+                        <a:t>0.91</a:t>
+                      </a:r>
+                    </a:p>
+                  </a:txBody>
+                </a:tc>
+                <a:tc>
+                  <a:txBody>
+                    <a:bodyPr/>
+                    <a:lstStyle/>
+                    <a:p>
+                      <a:pPr lvl="0" indent="0" marL="0" algn="ctr">
+                        <a:buNone/>
+                      </a:pPr>
+                      <a:r>
+                        <a:rPr/>
+                        <a:t>✓</a:t>
+                      </a:r>
+                    </a:p>
+                  </a:txBody>
+                </a:tc>
+              </a:tr>
+            </a:tbl>
+          </a:graphicData>
+        </a:graphic>
+      </p:graphicFrame>
     </p:spTree>
   </p:cSld>
 </p:sld>
@@ -9161,6 +15598,1532 @@
             <a:r>
               <a:rPr/>
               <a:t>: high-stakes studies should embed cleanTMLE inside a personnel-based clean-room arrangement</a:t>
+            </a:r>
+          </a:p>
+        </p:txBody>
+      </p:sp>
+    </p:spTree>
+  </p:cSld>
+</p:sld>
+</file>
+
+<file path=ppt/slides/slide70.xml><?xml version="1.0" encoding="utf-8"?>
+<p:sld xmlns:a="http://schemas.openxmlformats.org/drawingml/2006/main" xmlns:r="http://schemas.openxmlformats.org/officeDocument/2006/relationships" xmlns:p="http://schemas.openxmlformats.org/presentationml/2006/main">
+  <p:cSld>
+    <p:spTree>
+      <p:nvGrpSpPr>
+        <p:cNvPr id="1" name=""/>
+        <p:cNvGrpSpPr/>
+        <p:nvPr/>
+      </p:nvGrpSpPr>
+      <p:grpSpPr>
+        <a:xfrm>
+          <a:off x="0" y="0"/>
+          <a:ext cx="0" cy="0"/>
+          <a:chOff x="0" y="0"/>
+          <a:chExt cx="0" cy="0"/>
+        </a:xfrm>
+      </p:grpSpPr>
+      <p:sp>
+        <p:nvSpPr>
+          <p:cNvPr id="2" name="Title 1"/>
+          <p:cNvSpPr>
+            <a:spLocks noGrp="1"/>
+          </p:cNvSpPr>
+          <p:nvPr>
+            <p:ph type="title"/>
+          </p:nvPr>
+        </p:nvSpPr>
+        <p:spPr>
+          <a:xfrm>
+            <a:off x="457201" y="204787"/>
+            <a:ext cx="3008313" cy="871538"/>
+          </a:xfrm>
+        </p:spPr>
+        <p:txBody>
+          <a:bodyPr/>
+          <a:lstStyle/>
+          <a:p>
+            <a:pPr lvl="0" indent="0" marL="0">
+              <a:buNone/>
+            </a:pPr>
+            <a:r>
+              <a:rPr/>
+              <a:t>Negative-control attrition</a:t>
+            </a:r>
+          </a:p>
+        </p:txBody>
+      </p:sp>
+      <p:sp>
+        <p:nvSpPr>
+          <p:cNvPr id="4" name="Text Placeholder 3"/>
+          <p:cNvSpPr>
+            <a:spLocks noGrp="1"/>
+          </p:cNvSpPr>
+          <p:nvPr>
+            <p:ph idx="2" sz="half" type="body"/>
+          </p:nvPr>
+        </p:nvSpPr>
+        <p:spPr/>
+        <p:txBody>
+          <a:bodyPr/>
+          <a:lstStyle/>
+          <a:p>
+            <a:pPr lvl="0" indent="0" marL="0">
+              <a:buNone/>
+            </a:pPr>
+          </a:p>
+        </p:txBody>
+      </p:sp>
+      <p:pic>
+        <p:nvPicPr>
+          <p:cNvPr descr="cleanTMLE_presentation_files\figure-pptx\mermaid-figure-2.png" id="0" name="Picture 1"/>
+          <p:cNvPicPr>
+            <a:picLocks noGrp="1" noChangeAspect="1"/>
+          </p:cNvPicPr>
+          <p:nvPr/>
+        </p:nvPicPr>
+        <p:blipFill>
+          <a:blip r:embed="rId2"/>
+          <a:stretch>
+            <a:fillRect/>
+          </a:stretch>
+        </p:blipFill>
+        <p:spPr bwMode="auto">
+          <a:xfrm>
+            <a:off x="3568700" y="1714500"/>
+            <a:ext cx="5105400" cy="1371600"/>
+          </a:xfrm>
+          <a:prstGeom prst="rect">
+            <a:avLst/>
+          </a:prstGeom>
+          <a:noFill/>
+          <a:ln w="9525">
+            <a:noFill/>
+            <a:headEnd/>
+            <a:tailEnd/>
+          </a:ln>
+        </p:spPr>
+      </p:pic>
+    </p:spTree>
+  </p:cSld>
+</p:sld>
+</file>
+
+<file path=ppt/slides/slide71.xml><?xml version="1.0" encoding="utf-8"?>
+<p:sld xmlns:a="http://schemas.openxmlformats.org/drawingml/2006/main" xmlns:r="http://schemas.openxmlformats.org/officeDocument/2006/relationships" xmlns:p="http://schemas.openxmlformats.org/presentationml/2006/main">
+  <p:cSld>
+    <p:spTree>
+      <p:nvGrpSpPr>
+        <p:cNvPr id="1" name=""/>
+        <p:cNvGrpSpPr/>
+        <p:nvPr/>
+      </p:nvGrpSpPr>
+      <p:grpSpPr>
+        <a:xfrm>
+          <a:off x="0" y="0"/>
+          <a:ext cx="0" cy="0"/>
+          <a:chOff x="0" y="0"/>
+          <a:chExt cx="0" cy="0"/>
+        </a:xfrm>
+      </p:grpSpPr>
+      <p:sp>
+        <p:nvSpPr>
+          <p:cNvPr id="2" name="Title 1"/>
+          <p:cNvSpPr>
+            <a:spLocks noGrp="1"/>
+          </p:cNvSpPr>
+          <p:nvPr>
+            <p:ph type="title"/>
+          </p:nvPr>
+        </p:nvSpPr>
+        <p:spPr/>
+        <p:txBody>
+          <a:bodyPr/>
+          <a:lstStyle/>
+          <a:p>
+            <a:pPr lvl="0" indent="0" marL="0">
+              <a:buNone/>
+            </a:pPr>
+            <a:r>
+              <a:rPr/>
+              <a:t>Rescue.Co binary-outcome estimates (six estimators)</a:t>
+            </a:r>
+          </a:p>
+        </p:txBody>
+      </p:sp>
+      <p:graphicFrame>
+        <p:nvGraphicFramePr>
+          <p:cNvPr id="6" name="Content Placeholder 5"/>
+          <p:cNvGraphicFramePr>
+            <a:graphicFrameLocks noGrp="1"/>
+          </p:cNvGraphicFramePr>
+          <p:nvPr>
+            <p:ph idx="1"/>
+          </p:nvPr>
+        </p:nvGraphicFramePr>
+        <p:xfrm>
+          <a:off x="457200" y="1193800"/>
+          <a:ext cx="8229600" cy="3390900"/>
+        </p:xfrm>
+        <a:graphic>
+          <a:graphicData uri="http://schemas.openxmlformats.org/drawingml/2006/table">
+            <a:tbl>
+              <a:tblPr firstRow="1" bandRow="1">
+                <a:tableStyleId>{5C22544A-7EE6-4342-B048-85BDC9FD1C3A}</a:tableStyleId>
+              </a:tblPr>
+              <a:tblGrid>
+                <a:gridCol w="1447800"/>
+                <a:gridCol w="1447800"/>
+                <a:gridCol w="1930400"/>
+                <a:gridCol w="1930400"/>
+                <a:gridCol w="1447800"/>
+              </a:tblGrid>
+              <a:tr h="0">
+                <a:tc>
+                  <a:txBody>
+                    <a:bodyPr/>
+                    <a:lstStyle/>
+                    <a:p>
+                      <a:pPr lvl="0" indent="0" marL="0">
+                        <a:buNone/>
+                      </a:pPr>
+                      <a:r>
+                        <a:rPr/>
+                        <a:t>Method</a:t>
+                      </a:r>
+                    </a:p>
+                  </a:txBody>
+                  <a:tcPr/>
+                </a:tc>
+                <a:tc>
+                  <a:txBody>
+                    <a:bodyPr/>
+                    <a:lstStyle/>
+                    <a:p>
+                      <a:pPr lvl="0" indent="0" marL="0">
+                        <a:buNone/>
+                      </a:pPr>
+                      <a:r>
+                        <a:rPr/>
+                        <a:t>Target population</a:t>
+                      </a:r>
+                    </a:p>
+                  </a:txBody>
+                  <a:tcPr/>
+                </a:tc>
+                <a:tc>
+                  <a:txBody>
+                    <a:bodyPr/>
+                    <a:lstStyle/>
+                    <a:p>
+                      <a:pPr lvl="0" indent="0" marL="0" algn="r">
+                        <a:buNone/>
+                      </a:pPr>
+                      <a:r>
+                        <a:rPr/>
+                        <a:t>N</a:t>
+                      </a:r>
+                    </a:p>
+                  </a:txBody>
+                  <a:tcPr/>
+                </a:tc>
+                <a:tc>
+                  <a:txBody>
+                    <a:bodyPr/>
+                    <a:lstStyle/>
+                    <a:p>
+                      <a:pPr lvl="0" indent="0" marL="0" algn="r">
+                        <a:buNone/>
+                      </a:pPr>
+                      <a:r>
+                        <a:rPr/>
+                        <a:t>RD</a:t>
+                      </a:r>
+                    </a:p>
+                  </a:txBody>
+                  <a:tcPr/>
+                </a:tc>
+                <a:tc>
+                  <a:txBody>
+                    <a:bodyPr/>
+                    <a:lstStyle/>
+                    <a:p>
+                      <a:pPr lvl="0" indent="0" marL="0">
+                        <a:buNone/>
+                      </a:pPr>
+                      <a:r>
+                        <a:rPr/>
+                        <a:t>95% CI</a:t>
+                      </a:r>
+                    </a:p>
+                  </a:txBody>
+                  <a:tcPr/>
+                </a:tc>
+              </a:tr>
+              <a:tr h="0">
+                <a:tc>
+                  <a:txBody>
+                    <a:bodyPr/>
+                    <a:lstStyle/>
+                    <a:p>
+                      <a:pPr lvl="0" indent="0" marL="0">
+                        <a:buNone/>
+                      </a:pPr>
+                      <a:r>
+                        <a:rPr/>
+                        <a:t>Crude</a:t>
+                      </a:r>
+                    </a:p>
+                  </a:txBody>
+                </a:tc>
+                <a:tc>
+                  <a:txBody>
+                    <a:bodyPr/>
+                    <a:lstStyle/>
+                    <a:p>
+                      <a:pPr lvl="0" indent="0" marL="0">
+                        <a:buNone/>
+                      </a:pPr>
+                      <a:r>
+                        <a:rPr/>
+                        <a:t>Complete-outcome subset</a:t>
+                      </a:r>
+                    </a:p>
+                  </a:txBody>
+                </a:tc>
+                <a:tc>
+                  <a:txBody>
+                    <a:bodyPr/>
+                    <a:lstStyle/>
+                    <a:p>
+                      <a:pPr lvl="0" indent="0" marL="0" algn="r">
+                        <a:buNone/>
+                      </a:pPr>
+                      <a:r>
+                        <a:rPr/>
+                        <a:t>1,277</a:t>
+                      </a:r>
+                    </a:p>
+                  </a:txBody>
+                </a:tc>
+                <a:tc>
+                  <a:txBody>
+                    <a:bodyPr/>
+                    <a:lstStyle/>
+                    <a:p>
+                      <a:pPr lvl="0" indent="0" marL="0" algn="r">
+                        <a:buNone/>
+                      </a:pPr>
+                      <a:r>
+                        <a:rPr/>
+                        <a:t>0.0370</a:t>
+                      </a:r>
+                    </a:p>
+                  </a:txBody>
+                </a:tc>
+                <a:tc>
+                  <a:txBody>
+                    <a:bodyPr/>
+                    <a:lstStyle/>
+                    <a:p>
+                      <a:pPr lvl="0" indent="0" marL="0">
+                        <a:buNone/>
+                      </a:pPr>
+                      <a:r>
+                        <a:rPr/>
+                        <a:t>(0.003, 0.071)</a:t>
+                      </a:r>
+                    </a:p>
+                  </a:txBody>
+                </a:tc>
+              </a:tr>
+              <a:tr h="0">
+                <a:tc>
+                  <a:txBody>
+                    <a:bodyPr/>
+                    <a:lstStyle/>
+                    <a:p>
+                      <a:pPr lvl="0" indent="0" marL="0">
+                        <a:buNone/>
+                      </a:pPr>
+                      <a:r>
+                        <a:rPr/>
+                        <a:t>PS matching</a:t>
+                      </a:r>
+                    </a:p>
+                  </a:txBody>
+                </a:tc>
+                <a:tc>
+                  <a:txBody>
+                    <a:bodyPr/>
+                    <a:lstStyle/>
+                    <a:p>
+                      <a:pPr lvl="0" indent="0" marL="0">
+                        <a:buNone/>
+                      </a:pPr>
+                      <a:r>
+                        <a:rPr/>
+                        <a:t>Matched subset</a:t>
+                      </a:r>
+                    </a:p>
+                  </a:txBody>
+                </a:tc>
+                <a:tc>
+                  <a:txBody>
+                    <a:bodyPr/>
+                    <a:lstStyle/>
+                    <a:p>
+                      <a:pPr lvl="0" indent="0" marL="0" algn="r">
+                        <a:buNone/>
+                      </a:pPr>
+                      <a:r>
+                        <a:rPr/>
+                        <a:t>615</a:t>
+                      </a:r>
+                    </a:p>
+                  </a:txBody>
+                </a:tc>
+                <a:tc>
+                  <a:txBody>
+                    <a:bodyPr/>
+                    <a:lstStyle/>
+                    <a:p>
+                      <a:pPr lvl="0" indent="0" marL="0" algn="r">
+                        <a:buNone/>
+                      </a:pPr>
+                      <a:r>
+                        <a:rPr/>
+                        <a:t>0.0272</a:t>
+                      </a:r>
+                    </a:p>
+                  </a:txBody>
+                </a:tc>
+                <a:tc>
+                  <a:txBody>
+                    <a:bodyPr/>
+                    <a:lstStyle/>
+                    <a:p>
+                      <a:pPr lvl="0" indent="0" marL="0">
+                        <a:buNone/>
+                      </a:pPr>
+                      <a:r>
+                        <a:rPr/>
+                        <a:t>(-0.020, 0.074)</a:t>
+                      </a:r>
+                    </a:p>
+                  </a:txBody>
+                </a:tc>
+              </a:tr>
+              <a:tr h="0">
+                <a:tc>
+                  <a:txBody>
+                    <a:bodyPr/>
+                    <a:lstStyle/>
+                    <a:p>
+                      <a:pPr lvl="0" indent="0" marL="0">
+                        <a:buNone/>
+                      </a:pPr>
+                      <a:r>
+                        <a:rPr/>
+                        <a:t>IPTW (stabilised)</a:t>
+                      </a:r>
+                    </a:p>
+                  </a:txBody>
+                </a:tc>
+                <a:tc>
+                  <a:txBody>
+                    <a:bodyPr/>
+                    <a:lstStyle/>
+                    <a:p>
+                      <a:pPr lvl="0" indent="0" marL="0">
+                        <a:buNone/>
+                      </a:pPr>
+                      <a:r>
+                        <a:rPr/>
+                        <a:t>Full eligible cohort</a:t>
+                      </a:r>
+                    </a:p>
+                  </a:txBody>
+                </a:tc>
+                <a:tc>
+                  <a:txBody>
+                    <a:bodyPr/>
+                    <a:lstStyle/>
+                    <a:p>
+                      <a:pPr lvl="0" indent="0" marL="0" algn="r">
+                        <a:buNone/>
+                      </a:pPr>
+                      <a:r>
+                        <a:rPr/>
+                        <a:t>1,693</a:t>
+                      </a:r>
+                    </a:p>
+                  </a:txBody>
+                </a:tc>
+                <a:tc>
+                  <a:txBody>
+                    <a:bodyPr/>
+                    <a:lstStyle/>
+                    <a:p>
+                      <a:pPr lvl="0" indent="0" marL="0" algn="r">
+                        <a:buNone/>
+                      </a:pPr>
+                      <a:r>
+                        <a:rPr/>
+                        <a:t>0.0366</a:t>
+                      </a:r>
+                    </a:p>
+                  </a:txBody>
+                </a:tc>
+                <a:tc>
+                  <a:txBody>
+                    <a:bodyPr/>
+                    <a:lstStyle/>
+                    <a:p>
+                      <a:pPr lvl="0" indent="0" marL="0">
+                        <a:buNone/>
+                      </a:pPr>
+                      <a:r>
+                        <a:rPr/>
+                        <a:t>(0.002, 0.071)</a:t>
+                      </a:r>
+                    </a:p>
+                  </a:txBody>
+                </a:tc>
+              </a:tr>
+              <a:tr h="0">
+                <a:tc>
+                  <a:txBody>
+                    <a:bodyPr/>
+                    <a:lstStyle/>
+                    <a:p>
+                      <a:pPr lvl="0" indent="0" marL="0">
+                        <a:buNone/>
+                      </a:pPr>
+                      <a:r>
+                        <a:rPr/>
+                        <a:t>Full-cohort TMLE</a:t>
+                      </a:r>
+                    </a:p>
+                  </a:txBody>
+                </a:tc>
+                <a:tc>
+                  <a:txBody>
+                    <a:bodyPr/>
+                    <a:lstStyle/>
+                    <a:p>
+                      <a:pPr lvl="0" indent="0" marL="0">
+                        <a:buNone/>
+                      </a:pPr>
+                      <a:r>
+                        <a:rPr/>
+                        <a:t>Full eligible cohort</a:t>
+                      </a:r>
+                    </a:p>
+                  </a:txBody>
+                </a:tc>
+                <a:tc>
+                  <a:txBody>
+                    <a:bodyPr/>
+                    <a:lstStyle/>
+                    <a:p>
+                      <a:pPr lvl="0" indent="0" marL="0" algn="r">
+                        <a:buNone/>
+                      </a:pPr>
+                      <a:r>
+                        <a:rPr/>
+                        <a:t>1,693</a:t>
+                      </a:r>
+                    </a:p>
+                  </a:txBody>
+                </a:tc>
+                <a:tc>
+                  <a:txBody>
+                    <a:bodyPr/>
+                    <a:lstStyle/>
+                    <a:p>
+                      <a:pPr lvl="0" indent="0" marL="0" algn="r">
+                        <a:buNone/>
+                      </a:pPr>
+                      <a:r>
+                        <a:rPr/>
+                        <a:t>0.0306</a:t>
+                      </a:r>
+                    </a:p>
+                  </a:txBody>
+                </a:tc>
+                <a:tc>
+                  <a:txBody>
+                    <a:bodyPr/>
+                    <a:lstStyle/>
+                    <a:p>
+                      <a:pPr lvl="0" indent="0" marL="0">
+                        <a:buNone/>
+                      </a:pPr>
+                      <a:r>
+                        <a:rPr/>
+                        <a:t>(-0.001, 0.062)</a:t>
+                      </a:r>
+                    </a:p>
+                  </a:txBody>
+                </a:tc>
+              </a:tr>
+              <a:tr h="0">
+                <a:tc>
+                  <a:txBody>
+                    <a:bodyPr/>
+                    <a:lstStyle/>
+                    <a:p>
+                      <a:pPr lvl="0" indent="0" marL="0">
+                        <a:buNone/>
+                      </a:pPr>
+                      <a:r>
+                        <a:rPr/>
+                        <a:t>Matched-cohort TMLE</a:t>
+                      </a:r>
+                    </a:p>
+                  </a:txBody>
+                </a:tc>
+                <a:tc>
+                  <a:txBody>
+                    <a:bodyPr/>
+                    <a:lstStyle/>
+                    <a:p>
+                      <a:pPr lvl="0" indent="0" marL="0">
+                        <a:buNone/>
+                      </a:pPr>
+                      <a:r>
+                        <a:rPr/>
+                        <a:t>Matched subset</a:t>
+                      </a:r>
+                    </a:p>
+                  </a:txBody>
+                </a:tc>
+                <a:tc>
+                  <a:txBody>
+                    <a:bodyPr/>
+                    <a:lstStyle/>
+                    <a:p>
+                      <a:pPr lvl="0" indent="0" marL="0" algn="r">
+                        <a:buNone/>
+                      </a:pPr>
+                      <a:r>
+                        <a:rPr/>
+                        <a:t>1,230</a:t>
+                      </a:r>
+                    </a:p>
+                  </a:txBody>
+                </a:tc>
+                <a:tc>
+                  <a:txBody>
+                    <a:bodyPr/>
+                    <a:lstStyle/>
+                    <a:p>
+                      <a:pPr lvl="0" indent="0" marL="0" algn="r">
+                        <a:buNone/>
+                      </a:pPr>
+                      <a:r>
+                        <a:rPr/>
+                        <a:t>0.0259</a:t>
+                      </a:r>
+                    </a:p>
+                  </a:txBody>
+                </a:tc>
+                <a:tc>
+                  <a:txBody>
+                    <a:bodyPr/>
+                    <a:lstStyle/>
+                    <a:p>
+                      <a:pPr lvl="0" indent="0" marL="0">
+                        <a:buNone/>
+                      </a:pPr>
+                      <a:r>
+                        <a:rPr/>
+                        <a:t>(-0.015, 0.067)</a:t>
+                      </a:r>
+                    </a:p>
+                  </a:txBody>
+                </a:tc>
+              </a:tr>
+              <a:tr h="0">
+                <a:tc>
+                  <a:txBody>
+                    <a:bodyPr/>
+                    <a:lstStyle/>
+                    <a:p>
+                      <a:pPr lvl="0" indent="0" marL="0">
+                        <a:buNone/>
+                      </a:pPr>
+                      <a:r>
+                        <a:rPr/>
+                        <a:t>Complete-outcome TMLE w/ IPCW</a:t>
+                      </a:r>
+                    </a:p>
+                  </a:txBody>
+                </a:tc>
+                <a:tc>
+                  <a:txBody>
+                    <a:bodyPr/>
+                    <a:lstStyle/>
+                    <a:p>
+                      <a:pPr lvl="0" indent="0" marL="0">
+                        <a:buNone/>
+                      </a:pPr>
+                      <a:r>
+                        <a:rPr/>
+                        <a:t>Complete-outcome rows, weighted to full-cohort</a:t>
+                      </a:r>
+                    </a:p>
+                  </a:txBody>
+                </a:tc>
+                <a:tc>
+                  <a:txBody>
+                    <a:bodyPr/>
+                    <a:lstStyle/>
+                    <a:p>
+                      <a:pPr lvl="0" indent="0" marL="0" algn="r">
+                        <a:buNone/>
+                      </a:pPr>
+                      <a:r>
+                        <a:rPr/>
+                        <a:t>1,277</a:t>
+                      </a:r>
+                    </a:p>
+                  </a:txBody>
+                </a:tc>
+                <a:tc>
+                  <a:txBody>
+                    <a:bodyPr/>
+                    <a:lstStyle/>
+                    <a:p>
+                      <a:pPr lvl="0" indent="0" marL="0" algn="r">
+                        <a:buNone/>
+                      </a:pPr>
+                      <a:r>
+                        <a:rPr/>
+                        <a:t>0.0326</a:t>
+                      </a:r>
+                    </a:p>
+                  </a:txBody>
+                </a:tc>
+                <a:tc>
+                  <a:txBody>
+                    <a:bodyPr/>
+                    <a:lstStyle/>
+                    <a:p>
+                      <a:pPr lvl="0" indent="0" marL="0">
+                        <a:buNone/>
+                      </a:pPr>
+                      <a:r>
+                        <a:rPr/>
+                        <a:t>(-0.000, 0.066)</a:t>
+                      </a:r>
+                    </a:p>
+                  </a:txBody>
+                </a:tc>
+              </a:tr>
+            </a:tbl>
+          </a:graphicData>
+        </a:graphic>
+      </p:graphicFrame>
+    </p:spTree>
+  </p:cSld>
+</p:sld>
+</file>
+
+<file path=ppt/slides/slide72.xml><?xml version="1.0" encoding="utf-8"?>
+<p:sld xmlns:a="http://schemas.openxmlformats.org/drawingml/2006/main" xmlns:r="http://schemas.openxmlformats.org/officeDocument/2006/relationships" xmlns:p="http://schemas.openxmlformats.org/presentationml/2006/main">
+  <p:cSld>
+    <p:spTree>
+      <p:nvGrpSpPr>
+        <p:cNvPr id="1" name=""/>
+        <p:cNvGrpSpPr/>
+        <p:nvPr/>
+      </p:nvGrpSpPr>
+      <p:grpSpPr>
+        <a:xfrm>
+          <a:off x="0" y="0"/>
+          <a:ext cx="0" cy="0"/>
+          <a:chOff x="0" y="0"/>
+          <a:chExt cx="0" cy="0"/>
+        </a:xfrm>
+      </p:grpSpPr>
+      <p:sp>
+        <p:nvSpPr>
+          <p:cNvPr id="2" name="Title 1"/>
+          <p:cNvSpPr>
+            <a:spLocks noGrp="1"/>
+          </p:cNvSpPr>
+          <p:nvPr>
+            <p:ph type="title"/>
+          </p:nvPr>
+        </p:nvSpPr>
+        <p:spPr>
+          <a:xfrm>
+            <a:off x="722313" y="3305176"/>
+            <a:ext cx="7772400" cy="1021556"/>
+          </a:xfrm>
+        </p:spPr>
+        <p:txBody>
+          <a:bodyPr/>
+          <a:lstStyle/>
+          <a:p>
+            <a:pPr lvl="0" indent="0" marL="0">
+              <a:buNone/>
+            </a:pPr>
+            <a:r>
+              <a:rPr/>
+              <a:t>Appendix C: Case-study diagnostic figures</a:t>
+            </a:r>
+          </a:p>
+        </p:txBody>
+      </p:sp>
+    </p:spTree>
+  </p:cSld>
+</p:sld>
+</file>
+
+<file path=ppt/slides/slide73.xml><?xml version="1.0" encoding="utf-8"?>
+<p:sld xmlns:a="http://schemas.openxmlformats.org/drawingml/2006/main" xmlns:r="http://schemas.openxmlformats.org/officeDocument/2006/relationships" xmlns:p="http://schemas.openxmlformats.org/presentationml/2006/main">
+  <p:cSld>
+    <p:spTree>
+      <p:nvGrpSpPr>
+        <p:cNvPr id="1" name=""/>
+        <p:cNvGrpSpPr/>
+        <p:nvPr/>
+      </p:nvGrpSpPr>
+      <p:grpSpPr>
+        <a:xfrm>
+          <a:off x="0" y="0"/>
+          <a:ext cx="0" cy="0"/>
+          <a:chOff x="0" y="0"/>
+          <a:chExt cx="0" cy="0"/>
+        </a:xfrm>
+      </p:grpSpPr>
+      <p:sp>
+        <p:nvSpPr>
+          <p:cNvPr id="2" name="Title 1"/>
+          <p:cNvSpPr>
+            <a:spLocks noGrp="1"/>
+          </p:cNvSpPr>
+          <p:nvPr>
+            <p:ph type="title"/>
+          </p:nvPr>
+        </p:nvSpPr>
+        <p:spPr/>
+        <p:txBody>
+          <a:bodyPr/>
+          <a:lstStyle/>
+          <a:p>
+            <a:pPr lvl="0" indent="0" marL="0">
+              <a:buNone/>
+            </a:pPr>
+            <a:r>
+              <a:rPr/>
+              <a:t>PS overlap density</a:t>
+            </a:r>
+          </a:p>
+        </p:txBody>
+      </p:sp>
+      <p:pic>
+        <p:nvPicPr>
+          <p:cNvPr descr="../rescueCo/results/ps_overlap_density.png" id="0" name="Picture 1"/>
+          <p:cNvPicPr>
+            <a:picLocks noGrp="1" noChangeAspect="1"/>
+          </p:cNvPicPr>
+          <p:nvPr/>
+        </p:nvPicPr>
+        <p:blipFill>
+          <a:blip r:embed="rId2"/>
+          <a:stretch>
+            <a:fillRect/>
+          </a:stretch>
+        </p:blipFill>
+        <p:spPr bwMode="auto">
+          <a:xfrm>
+            <a:off x="2260600" y="1193800"/>
+            <a:ext cx="4610100" cy="2882900"/>
+          </a:xfrm>
+          <a:prstGeom prst="rect">
+            <a:avLst/>
+          </a:prstGeom>
+          <a:noFill/>
+          <a:ln w="9525">
+            <a:noFill/>
+            <a:headEnd/>
+            <a:tailEnd/>
+          </a:ln>
+        </p:spPr>
+      </p:pic>
+      <p:sp>
+        <p:nvSpPr>
+          <p:cNvPr id="1" name="TextBox 3"/>
+          <p:cNvSpPr txBox="1"/>
+          <p:nvPr/>
+        </p:nvSpPr>
+        <p:spPr>
+          <a:xfrm>
+            <a:off x="457200" y="4076700"/>
+            <a:ext cx="8229600" cy="508000"/>
+          </a:xfrm>
+          <a:prstGeom prst="rect">
+            <a:avLst/>
+          </a:prstGeom>
+          <a:noFill/>
+        </p:spPr>
+        <p:txBody>
+          <a:bodyPr/>
+          <a:lstStyle/>
+          <a:p>
+            <a:pPr lvl="0" indent="0" marL="0" algn="ctr">
+              <a:buNone/>
+            </a:pPr>
+            <a:r>
+              <a:rPr/>
+              <a:t>Propensity-score density by treatment group with truncation cutoffs marked.</a:t>
+            </a:r>
+          </a:p>
+        </p:txBody>
+      </p:sp>
+    </p:spTree>
+  </p:cSld>
+</p:sld>
+</file>
+
+<file path=ppt/slides/slide74.xml><?xml version="1.0" encoding="utf-8"?>
+<p:sld xmlns:a="http://schemas.openxmlformats.org/drawingml/2006/main" xmlns:r="http://schemas.openxmlformats.org/officeDocument/2006/relationships" xmlns:p="http://schemas.openxmlformats.org/presentationml/2006/main">
+  <p:cSld>
+    <p:spTree>
+      <p:nvGrpSpPr>
+        <p:cNvPr id="1" name=""/>
+        <p:cNvGrpSpPr/>
+        <p:nvPr/>
+      </p:nvGrpSpPr>
+      <p:grpSpPr>
+        <a:xfrm>
+          <a:off x="0" y="0"/>
+          <a:ext cx="0" cy="0"/>
+          <a:chOff x="0" y="0"/>
+          <a:chExt cx="0" cy="0"/>
+        </a:xfrm>
+      </p:grpSpPr>
+      <p:sp>
+        <p:nvSpPr>
+          <p:cNvPr id="2" name="Title 1"/>
+          <p:cNvSpPr>
+            <a:spLocks noGrp="1"/>
+          </p:cNvSpPr>
+          <p:nvPr>
+            <p:ph type="title"/>
+          </p:nvPr>
+        </p:nvSpPr>
+        <p:spPr/>
+        <p:txBody>
+          <a:bodyPr/>
+          <a:lstStyle/>
+          <a:p>
+            <a:pPr lvl="0" indent="0" marL="0">
+              <a:buNone/>
+            </a:pPr>
+            <a:r>
+              <a:rPr/>
+              <a:t>Love plot: matched vs unweighted</a:t>
+            </a:r>
+          </a:p>
+        </p:txBody>
+      </p:sp>
+      <p:pic>
+        <p:nvPicPr>
+          <p:cNvPr descr="../rescueCo/results/love_plot.png" id="0" name="Picture 1"/>
+          <p:cNvPicPr>
+            <a:picLocks noGrp="1" noChangeAspect="1"/>
+          </p:cNvPicPr>
+          <p:nvPr/>
+        </p:nvPicPr>
+        <p:blipFill>
+          <a:blip r:embed="rId2"/>
+          <a:stretch>
+            <a:fillRect/>
+          </a:stretch>
+        </p:blipFill>
+        <p:spPr bwMode="auto">
+          <a:xfrm>
+            <a:off x="2768600" y="1193800"/>
+            <a:ext cx="3606800" cy="2882900"/>
+          </a:xfrm>
+          <a:prstGeom prst="rect">
+            <a:avLst/>
+          </a:prstGeom>
+          <a:noFill/>
+          <a:ln w="9525">
+            <a:noFill/>
+            <a:headEnd/>
+            <a:tailEnd/>
+          </a:ln>
+        </p:spPr>
+      </p:pic>
+      <p:sp>
+        <p:nvSpPr>
+          <p:cNvPr id="1" name="TextBox 3"/>
+          <p:cNvSpPr txBox="1"/>
+          <p:nvPr/>
+        </p:nvSpPr>
+        <p:spPr>
+          <a:xfrm>
+            <a:off x="457200" y="4076700"/>
+            <a:ext cx="8229600" cy="508000"/>
+          </a:xfrm>
+          <a:prstGeom prst="rect">
+            <a:avLst/>
+          </a:prstGeom>
+          <a:noFill/>
+        </p:spPr>
+        <p:txBody>
+          <a:bodyPr/>
+          <a:lstStyle/>
+          <a:p>
+            <a:pPr lvl="0" indent="0" marL="0" algn="ctr">
+              <a:buNone/>
+            </a:pPr>
+            <a:r>
+              <a:rPr/>
+              <a:t>Standardised mean differences for retained covariates before and after PS matching.</a:t>
+            </a:r>
+          </a:p>
+        </p:txBody>
+      </p:sp>
+    </p:spTree>
+  </p:cSld>
+</p:sld>
+</file>
+
+<file path=ppt/slides/slide75.xml><?xml version="1.0" encoding="utf-8"?>
+<p:sld xmlns:a="http://schemas.openxmlformats.org/drawingml/2006/main" xmlns:r="http://schemas.openxmlformats.org/officeDocument/2006/relationships" xmlns:p="http://schemas.openxmlformats.org/presentationml/2006/main">
+  <p:cSld>
+    <p:spTree>
+      <p:nvGrpSpPr>
+        <p:cNvPr id="1" name=""/>
+        <p:cNvGrpSpPr/>
+        <p:nvPr/>
+      </p:nvGrpSpPr>
+      <p:grpSpPr>
+        <a:xfrm>
+          <a:off x="0" y="0"/>
+          <a:ext cx="0" cy="0"/>
+          <a:chOff x="0" y="0"/>
+          <a:chExt cx="0" cy="0"/>
+        </a:xfrm>
+      </p:grpSpPr>
+      <p:sp>
+        <p:nvSpPr>
+          <p:cNvPr id="2" name="Title 1"/>
+          <p:cNvSpPr>
+            <a:spLocks noGrp="1"/>
+          </p:cNvSpPr>
+          <p:nvPr>
+            <p:ph type="title"/>
+          </p:nvPr>
+        </p:nvSpPr>
+        <p:spPr/>
+        <p:txBody>
+          <a:bodyPr/>
+          <a:lstStyle/>
+          <a:p>
+            <a:pPr lvl="0" indent="0" marL="0">
+              <a:buNone/>
+            </a:pPr>
+            <a:r>
+              <a:rPr/>
+              <a:t>Three-way Love plot: unweighted vs matched vs IPTW</a:t>
+            </a:r>
+          </a:p>
+        </p:txBody>
+      </p:sp>
+      <p:pic>
+        <p:nvPicPr>
+          <p:cNvPr descr="../rescueCo/results/weighted_love_plot.png" id="0" name="Picture 1"/>
+          <p:cNvPicPr>
+            <a:picLocks noGrp="1" noChangeAspect="1"/>
+          </p:cNvPicPr>
+          <p:nvPr/>
+        </p:nvPicPr>
+        <p:blipFill>
+          <a:blip r:embed="rId2"/>
+          <a:stretch>
+            <a:fillRect/>
+          </a:stretch>
+        </p:blipFill>
+        <p:spPr bwMode="auto">
+          <a:xfrm>
+            <a:off x="2768600" y="1193800"/>
+            <a:ext cx="3606800" cy="2882900"/>
+          </a:xfrm>
+          <a:prstGeom prst="rect">
+            <a:avLst/>
+          </a:prstGeom>
+          <a:noFill/>
+          <a:ln w="9525">
+            <a:noFill/>
+            <a:headEnd/>
+            <a:tailEnd/>
+          </a:ln>
+        </p:spPr>
+      </p:pic>
+      <p:sp>
+        <p:nvSpPr>
+          <p:cNvPr id="1" name="TextBox 3"/>
+          <p:cNvSpPr txBox="1"/>
+          <p:nvPr/>
+        </p:nvSpPr>
+        <p:spPr>
+          <a:xfrm>
+            <a:off x="457200" y="4076700"/>
+            <a:ext cx="8229600" cy="508000"/>
+          </a:xfrm>
+          <a:prstGeom prst="rect">
+            <a:avLst/>
+          </a:prstGeom>
+          <a:noFill/>
+        </p:spPr>
+        <p:txBody>
+          <a:bodyPr/>
+          <a:lstStyle/>
+          <a:p>
+            <a:pPr lvl="0" indent="0" marL="0" algn="ctr">
+              <a:buNone/>
+            </a:pPr>
+            <a:r>
+              <a:rPr/>
+              <a:t>Three-way balance: unweighted, after matching, and after stabilised IPTW.</a:t>
+            </a:r>
+          </a:p>
+        </p:txBody>
+      </p:sp>
+    </p:spTree>
+  </p:cSld>
+</p:sld>
+</file>
+
+<file path=ppt/slides/slide76.xml><?xml version="1.0" encoding="utf-8"?>
+<p:sld xmlns:a="http://schemas.openxmlformats.org/drawingml/2006/main" xmlns:r="http://schemas.openxmlformats.org/officeDocument/2006/relationships" xmlns:p="http://schemas.openxmlformats.org/presentationml/2006/main">
+  <p:cSld>
+    <p:spTree>
+      <p:nvGrpSpPr>
+        <p:cNvPr id="1" name=""/>
+        <p:cNvGrpSpPr/>
+        <p:nvPr/>
+      </p:nvGrpSpPr>
+      <p:grpSpPr>
+        <a:xfrm>
+          <a:off x="0" y="0"/>
+          <a:ext cx="0" cy="0"/>
+          <a:chOff x="0" y="0"/>
+          <a:chExt cx="0" cy="0"/>
+        </a:xfrm>
+      </p:grpSpPr>
+      <p:sp>
+        <p:nvSpPr>
+          <p:cNvPr id="2" name="Title 1"/>
+          <p:cNvSpPr>
+            <a:spLocks noGrp="1"/>
+          </p:cNvSpPr>
+          <p:nvPr>
+            <p:ph type="title"/>
+          </p:nvPr>
+        </p:nvSpPr>
+        <p:spPr/>
+        <p:txBody>
+          <a:bodyPr/>
+          <a:lstStyle/>
+          <a:p>
+            <a:pPr lvl="0" indent="0" marL="0">
+              <a:buNone/>
+            </a:pPr>
+            <a:r>
+              <a:rPr/>
+              <a:t>IPTW weight distribution</a:t>
+            </a:r>
+          </a:p>
+        </p:txBody>
+      </p:sp>
+      <p:pic>
+        <p:nvPicPr>
+          <p:cNvPr descr="../rescueCo/results/weight_distribution.png" id="0" name="Picture 1"/>
+          <p:cNvPicPr>
+            <a:picLocks noGrp="1" noChangeAspect="1"/>
+          </p:cNvPicPr>
+          <p:nvPr/>
+        </p:nvPicPr>
+        <p:blipFill>
+          <a:blip r:embed="rId2"/>
+          <a:stretch>
+            <a:fillRect/>
+          </a:stretch>
+        </p:blipFill>
+        <p:spPr bwMode="auto">
+          <a:xfrm>
+            <a:off x="2260600" y="1193800"/>
+            <a:ext cx="4610100" cy="2882900"/>
+          </a:xfrm>
+          <a:prstGeom prst="rect">
+            <a:avLst/>
+          </a:prstGeom>
+          <a:noFill/>
+          <a:ln w="9525">
+            <a:noFill/>
+            <a:headEnd/>
+            <a:tailEnd/>
+          </a:ln>
+        </p:spPr>
+      </p:pic>
+      <p:sp>
+        <p:nvSpPr>
+          <p:cNvPr id="1" name="TextBox 3"/>
+          <p:cNvSpPr txBox="1"/>
+          <p:nvPr/>
+        </p:nvSpPr>
+        <p:spPr>
+          <a:xfrm>
+            <a:off x="457200" y="4076700"/>
+            <a:ext cx="8229600" cy="508000"/>
+          </a:xfrm>
+          <a:prstGeom prst="rect">
+            <a:avLst/>
+          </a:prstGeom>
+          <a:noFill/>
+        </p:spPr>
+        <p:txBody>
+          <a:bodyPr/>
+          <a:lstStyle/>
+          <a:p>
+            <a:pPr lvl="0" indent="0" marL="0" algn="ctr">
+              <a:buNone/>
+            </a:pPr>
+            <a:r>
+              <a:rPr/>
+              <a:t>Distribution of stabilised IPTW weights by treatment group.</a:t>
+            </a:r>
+          </a:p>
+        </p:txBody>
+      </p:sp>
+    </p:spTree>
+  </p:cSld>
+</p:sld>
+</file>
+
+<file path=ppt/slides/slide77.xml><?xml version="1.0" encoding="utf-8"?>
+<p:sld xmlns:a="http://schemas.openxmlformats.org/drawingml/2006/main" xmlns:r="http://schemas.openxmlformats.org/officeDocument/2006/relationships" xmlns:p="http://schemas.openxmlformats.org/presentationml/2006/main">
+  <p:cSld>
+    <p:spTree>
+      <p:nvGrpSpPr>
+        <p:cNvPr id="1" name=""/>
+        <p:cNvGrpSpPr/>
+        <p:nvPr/>
+      </p:nvGrpSpPr>
+      <p:grpSpPr>
+        <a:xfrm>
+          <a:off x="0" y="0"/>
+          <a:ext cx="0" cy="0"/>
+          <a:chOff x="0" y="0"/>
+          <a:chExt cx="0" cy="0"/>
+        </a:xfrm>
+      </p:grpSpPr>
+      <p:sp>
+        <p:nvSpPr>
+          <p:cNvPr id="2" name="Title 1"/>
+          <p:cNvSpPr>
+            <a:spLocks noGrp="1"/>
+          </p:cNvSpPr>
+          <p:nvPr>
+            <p:ph type="title"/>
+          </p:nvPr>
+        </p:nvSpPr>
+        <p:spPr/>
+        <p:txBody>
+          <a:bodyPr/>
+          <a:lstStyle/>
+          <a:p>
+            <a:pPr lvl="0" indent="0" marL="0">
+              <a:buNone/>
+            </a:pPr>
+            <a:r>
+              <a:rPr/>
+              <a:t>Plasmode simulation performance</a:t>
+            </a:r>
+          </a:p>
+        </p:txBody>
+      </p:sp>
+      <p:pic>
+        <p:nvPicPr>
+          <p:cNvPr descr="../rescueCo/results/plasmode_performance.png" id="0" name="Picture 1"/>
+          <p:cNvPicPr>
+            <a:picLocks noGrp="1" noChangeAspect="1"/>
+          </p:cNvPicPr>
+          <p:nvPr/>
+        </p:nvPicPr>
+        <p:blipFill>
+          <a:blip r:embed="rId2"/>
+          <a:stretch>
+            <a:fillRect/>
+          </a:stretch>
+        </p:blipFill>
+        <p:spPr bwMode="auto">
+          <a:xfrm>
+            <a:off x="1689100" y="1193800"/>
+            <a:ext cx="5765800" cy="2882900"/>
+          </a:xfrm>
+          <a:prstGeom prst="rect">
+            <a:avLst/>
+          </a:prstGeom>
+          <a:noFill/>
+          <a:ln w="9525">
+            <a:noFill/>
+            <a:headEnd/>
+            <a:tailEnd/>
+          </a:ln>
+        </p:spPr>
+      </p:pic>
+      <p:sp>
+        <p:nvSpPr>
+          <p:cNvPr id="1" name="TextBox 3"/>
+          <p:cNvSpPr txBox="1"/>
+          <p:nvPr/>
+        </p:nvSpPr>
+        <p:spPr>
+          <a:xfrm>
+            <a:off x="457200" y="4076700"/>
+            <a:ext cx="8229600" cy="508000"/>
+          </a:xfrm>
+          <a:prstGeom prst="rect">
+            <a:avLst/>
+          </a:prstGeom>
+          <a:noFill/>
+        </p:spPr>
+        <p:txBody>
+          <a:bodyPr/>
+          <a:lstStyle/>
+          <a:p>
+            <a:pPr lvl="0" indent="0" marL="0" algn="ctr">
+              <a:buNone/>
+            </a:pPr>
+            <a:r>
+              <a:rPr/>
+              <a:t>Plasmode performance across candidate estimators (true ATE = 0).</a:t>
+            </a:r>
+          </a:p>
+        </p:txBody>
+      </p:sp>
+    </p:spTree>
+  </p:cSld>
+</p:sld>
+</file>
+
+<file path=ppt/slides/slide78.xml><?xml version="1.0" encoding="utf-8"?>
+<p:sld xmlns:a="http://schemas.openxmlformats.org/drawingml/2006/main" xmlns:r="http://schemas.openxmlformats.org/officeDocument/2006/relationships" xmlns:p="http://schemas.openxmlformats.org/presentationml/2006/main">
+  <p:cSld>
+    <p:spTree>
+      <p:nvGrpSpPr>
+        <p:cNvPr id="1" name=""/>
+        <p:cNvGrpSpPr/>
+        <p:nvPr/>
+      </p:nvGrpSpPr>
+      <p:grpSpPr>
+        <a:xfrm>
+          <a:off x="0" y="0"/>
+          <a:ext cx="0" cy="0"/>
+          <a:chOff x="0" y="0"/>
+          <a:chExt cx="0" cy="0"/>
+        </a:xfrm>
+      </p:grpSpPr>
+      <p:sp>
+        <p:nvSpPr>
+          <p:cNvPr id="2" name="Title 1"/>
+          <p:cNvSpPr>
+            <a:spLocks noGrp="1"/>
+          </p:cNvSpPr>
+          <p:nvPr>
+            <p:ph type="title"/>
+          </p:nvPr>
+        </p:nvSpPr>
+        <p:spPr/>
+        <p:txBody>
+          <a:bodyPr/>
+          <a:lstStyle/>
+          <a:p>
+            <a:pPr lvl="0" indent="0" marL="0">
+              <a:buNone/>
+            </a:pPr>
+            <a:r>
+              <a:rPr/>
+              <a:t>Binary-outcome estimator forest plot</a:t>
+            </a:r>
+          </a:p>
+        </p:txBody>
+      </p:sp>
+      <p:pic>
+        <p:nvPicPr>
+          <p:cNvPr descr="../rescueCo/results/cleanTMLE_forest_plot.png" id="0" name="Picture 1"/>
+          <p:cNvPicPr>
+            <a:picLocks noGrp="1" noChangeAspect="1"/>
+          </p:cNvPicPr>
+          <p:nvPr/>
+        </p:nvPicPr>
+        <p:blipFill>
+          <a:blip r:embed="rId2"/>
+          <a:stretch>
+            <a:fillRect/>
+          </a:stretch>
+        </p:blipFill>
+        <p:spPr bwMode="auto">
+          <a:xfrm>
+            <a:off x="2260600" y="1193800"/>
+            <a:ext cx="4610100" cy="2882900"/>
+          </a:xfrm>
+          <a:prstGeom prst="rect">
+            <a:avLst/>
+          </a:prstGeom>
+          <a:noFill/>
+          <a:ln w="9525">
+            <a:noFill/>
+            <a:headEnd/>
+            <a:tailEnd/>
+          </a:ln>
+        </p:spPr>
+      </p:pic>
+      <p:sp>
+        <p:nvSpPr>
+          <p:cNvPr id="1" name="TextBox 3"/>
+          <p:cNvSpPr txBox="1"/>
+          <p:nvPr/>
+        </p:nvSpPr>
+        <p:spPr>
+          <a:xfrm>
+            <a:off x="457200" y="4076700"/>
+            <a:ext cx="8229600" cy="508000"/>
+          </a:xfrm>
+          <a:prstGeom prst="rect">
+            <a:avLst/>
+          </a:prstGeom>
+          <a:noFill/>
+        </p:spPr>
+        <p:txBody>
+          <a:bodyPr/>
+          <a:lstStyle/>
+          <a:p>
+            <a:pPr lvl="0" indent="0" marL="0" algn="ctr">
+              <a:buNone/>
+            </a:pPr>
+            <a:r>
+              <a:rPr/>
+              <a:t>Forest plot of binary-outcome risk differences across the six prespecified estimators.</a:t>
+            </a:r>
+          </a:p>
+        </p:txBody>
+      </p:sp>
+    </p:spTree>
+  </p:cSld>
+</p:sld>
+</file>
+
+<file path=ppt/slides/slide79.xml><?xml version="1.0" encoding="utf-8"?>
+<p:sld xmlns:a="http://schemas.openxmlformats.org/drawingml/2006/main" xmlns:r="http://schemas.openxmlformats.org/officeDocument/2006/relationships" xmlns:p="http://schemas.openxmlformats.org/presentationml/2006/main">
+  <p:cSld>
+    <p:spTree>
+      <p:nvGrpSpPr>
+        <p:cNvPr id="1" name=""/>
+        <p:cNvGrpSpPr/>
+        <p:nvPr/>
+      </p:nvGrpSpPr>
+      <p:grpSpPr>
+        <a:xfrm>
+          <a:off x="0" y="0"/>
+          <a:ext cx="0" cy="0"/>
+          <a:chOff x="0" y="0"/>
+          <a:chExt cx="0" cy="0"/>
+        </a:xfrm>
+      </p:grpSpPr>
+      <p:sp>
+        <p:nvSpPr>
+          <p:cNvPr id="2" name="Title 1"/>
+          <p:cNvSpPr>
+            <a:spLocks noGrp="1"/>
+          </p:cNvSpPr>
+          <p:nvPr>
+            <p:ph type="title"/>
+          </p:nvPr>
+        </p:nvSpPr>
+        <p:spPr/>
+        <p:txBody>
+          <a:bodyPr/>
+          <a:lstStyle/>
+          <a:p>
+            <a:pPr lvl="0" indent="0" marL="0">
+              <a:buNone/>
+            </a:pPr>
+            <a:r>
+              <a:rPr/>
+              <a:t>Influence-curve distribution (full-cohort TMLE)</a:t>
+            </a:r>
+          </a:p>
+        </p:txBody>
+      </p:sp>
+      <p:pic>
+        <p:nvPicPr>
+          <p:cNvPr descr="../rescueCo/results/ic_plot.png" id="0" name="Picture 1"/>
+          <p:cNvPicPr>
+            <a:picLocks noGrp="1" noChangeAspect="1"/>
+          </p:cNvPicPr>
+          <p:nvPr/>
+        </p:nvPicPr>
+        <p:blipFill>
+          <a:blip r:embed="rId2"/>
+          <a:stretch>
+            <a:fillRect/>
+          </a:stretch>
+        </p:blipFill>
+        <p:spPr bwMode="auto">
+          <a:xfrm>
+            <a:off x="2260600" y="1193800"/>
+            <a:ext cx="4610100" cy="2882900"/>
+          </a:xfrm>
+          <a:prstGeom prst="rect">
+            <a:avLst/>
+          </a:prstGeom>
+          <a:noFill/>
+          <a:ln w="9525">
+            <a:noFill/>
+            <a:headEnd/>
+            <a:tailEnd/>
+          </a:ln>
+        </p:spPr>
+      </p:pic>
+      <p:sp>
+        <p:nvSpPr>
+          <p:cNvPr id="1" name="TextBox 3"/>
+          <p:cNvSpPr txBox="1"/>
+          <p:nvPr/>
+        </p:nvSpPr>
+        <p:spPr>
+          <a:xfrm>
+            <a:off x="457200" y="4076700"/>
+            <a:ext cx="8229600" cy="508000"/>
+          </a:xfrm>
+          <a:prstGeom prst="rect">
+            <a:avLst/>
+          </a:prstGeom>
+          <a:noFill/>
+        </p:spPr>
+        <p:txBody>
+          <a:bodyPr/>
+          <a:lstStyle/>
+          <a:p>
+            <a:pPr lvl="0" indent="0" marL="0" algn="ctr">
+              <a:buNone/>
+            </a:pPr>
+            <a:r>
+              <a:rPr/>
+              <a:t>Influence-curve distribution for the full-cohort TMLE primary estimator.</a:t>
             </a:r>
           </a:p>
         </p:txBody>
@@ -9291,6 +17254,1615 @@
           </a:p>
         </p:txBody>
       </p:sp>
+    </p:spTree>
+  </p:cSld>
+</p:sld>
+</file>
+
+<file path=ppt/slides/slide80.xml><?xml version="1.0" encoding="utf-8"?>
+<p:sld xmlns:a="http://schemas.openxmlformats.org/drawingml/2006/main" xmlns:r="http://schemas.openxmlformats.org/officeDocument/2006/relationships" xmlns:p="http://schemas.openxmlformats.org/presentationml/2006/main">
+  <p:cSld>
+    <p:spTree>
+      <p:nvGrpSpPr>
+        <p:cNvPr id="1" name=""/>
+        <p:cNvGrpSpPr/>
+        <p:nvPr/>
+      </p:nvGrpSpPr>
+      <p:grpSpPr>
+        <a:xfrm>
+          <a:off x="0" y="0"/>
+          <a:ext cx="0" cy="0"/>
+          <a:chOff x="0" y="0"/>
+          <a:chExt cx="0" cy="0"/>
+        </a:xfrm>
+      </p:grpSpPr>
+      <p:sp>
+        <p:nvSpPr>
+          <p:cNvPr id="2" name="Title 1"/>
+          <p:cNvSpPr>
+            <a:spLocks noGrp="1"/>
+          </p:cNvSpPr>
+          <p:nvPr>
+            <p:ph type="title"/>
+          </p:nvPr>
+        </p:nvSpPr>
+        <p:spPr/>
+        <p:txBody>
+          <a:bodyPr/>
+          <a:lstStyle/>
+          <a:p>
+            <a:pPr lvl="0" indent="0" marL="0">
+              <a:buNone/>
+            </a:pPr>
+            <a:r>
+              <a:rPr/>
+              <a:t>Clever covariate H_n by treatment arm</a:t>
+            </a:r>
+          </a:p>
+        </p:txBody>
+      </p:sp>
+      <p:pic>
+        <p:nvPicPr>
+          <p:cNvPr descr="../rescueCo/results/clever_covariate_plot.png" id="0" name="Picture 1"/>
+          <p:cNvPicPr>
+            <a:picLocks noGrp="1" noChangeAspect="1"/>
+          </p:cNvPicPr>
+          <p:nvPr/>
+        </p:nvPicPr>
+        <p:blipFill>
+          <a:blip r:embed="rId2"/>
+          <a:stretch>
+            <a:fillRect/>
+          </a:stretch>
+        </p:blipFill>
+        <p:spPr bwMode="auto">
+          <a:xfrm>
+            <a:off x="2260600" y="1193800"/>
+            <a:ext cx="4610100" cy="2882900"/>
+          </a:xfrm>
+          <a:prstGeom prst="rect">
+            <a:avLst/>
+          </a:prstGeom>
+          <a:noFill/>
+          <a:ln w="9525">
+            <a:noFill/>
+            <a:headEnd/>
+            <a:tailEnd/>
+          </a:ln>
+        </p:spPr>
+      </p:pic>
+      <p:sp>
+        <p:nvSpPr>
+          <p:cNvPr id="1" name="TextBox 3"/>
+          <p:cNvSpPr txBox="1"/>
+          <p:nvPr/>
+        </p:nvSpPr>
+        <p:spPr>
+          <a:xfrm>
+            <a:off x="457200" y="4076700"/>
+            <a:ext cx="8229600" cy="508000"/>
+          </a:xfrm>
+          <a:prstGeom prst="rect">
+            <a:avLst/>
+          </a:prstGeom>
+          <a:noFill/>
+        </p:spPr>
+        <p:txBody>
+          <a:bodyPr/>
+          <a:lstStyle/>
+          <a:p>
+            <a:pPr lvl="0" indent="0" marL="0" algn="ctr">
+              <a:buNone/>
+            </a:pPr>
+            <a:r>
+              <a:rPr/>
+              <a:t>Clever covariate H_n by treatment arm (full-cohort TMLE).</a:t>
+            </a:r>
+          </a:p>
+        </p:txBody>
+      </p:sp>
+    </p:spTree>
+  </p:cSld>
+</p:sld>
+</file>
+
+<file path=ppt/slides/slide81.xml><?xml version="1.0" encoding="utf-8"?>
+<p:sld xmlns:a="http://schemas.openxmlformats.org/drawingml/2006/main" xmlns:r="http://schemas.openxmlformats.org/officeDocument/2006/relationships" xmlns:p="http://schemas.openxmlformats.org/presentationml/2006/main">
+  <p:cSld>
+    <p:spTree>
+      <p:nvGrpSpPr>
+        <p:cNvPr id="1" name=""/>
+        <p:cNvGrpSpPr/>
+        <p:nvPr/>
+      </p:nvGrpSpPr>
+      <p:grpSpPr>
+        <a:xfrm>
+          <a:off x="0" y="0"/>
+          <a:ext cx="0" cy="0"/>
+          <a:chOff x="0" y="0"/>
+          <a:chExt cx="0" cy="0"/>
+        </a:xfrm>
+      </p:grpSpPr>
+      <p:sp>
+        <p:nvSpPr>
+          <p:cNvPr id="2" name="Title 1"/>
+          <p:cNvSpPr>
+            <a:spLocks noGrp="1"/>
+          </p:cNvSpPr>
+          <p:nvPr>
+            <p:ph type="title"/>
+          </p:nvPr>
+        </p:nvSpPr>
+        <p:spPr/>
+        <p:txBody>
+          <a:bodyPr/>
+          <a:lstStyle/>
+          <a:p>
+            <a:pPr lvl="0" indent="0" marL="0">
+              <a:buNone/>
+            </a:pPr>
+            <a:r>
+              <a:rPr/>
+              <a:t>Counterfactual cumulative-risk curves (full-cohort TMLE)</a:t>
+            </a:r>
+          </a:p>
+        </p:txBody>
+      </p:sp>
+      <p:pic>
+        <p:nvPicPr>
+          <p:cNvPr descr="../rescueCo/results/risk_curves_full_ci.png" id="0" name="Picture 1"/>
+          <p:cNvPicPr>
+            <a:picLocks noGrp="1" noChangeAspect="1"/>
+          </p:cNvPicPr>
+          <p:nvPr/>
+        </p:nvPicPr>
+        <p:blipFill>
+          <a:blip r:embed="rId2"/>
+          <a:stretch>
+            <a:fillRect/>
+          </a:stretch>
+        </p:blipFill>
+        <p:spPr bwMode="auto">
+          <a:xfrm>
+            <a:off x="2260600" y="1193800"/>
+            <a:ext cx="4610100" cy="2882900"/>
+          </a:xfrm>
+          <a:prstGeom prst="rect">
+            <a:avLst/>
+          </a:prstGeom>
+          <a:noFill/>
+          <a:ln w="9525">
+            <a:noFill/>
+            <a:headEnd/>
+            <a:tailEnd/>
+          </a:ln>
+        </p:spPr>
+      </p:pic>
+      <p:sp>
+        <p:nvSpPr>
+          <p:cNvPr id="1" name="TextBox 3"/>
+          <p:cNvSpPr txBox="1"/>
+          <p:nvPr/>
+        </p:nvSpPr>
+        <p:spPr>
+          <a:xfrm>
+            <a:off x="457200" y="4076700"/>
+            <a:ext cx="8229600" cy="508000"/>
+          </a:xfrm>
+          <a:prstGeom prst="rect">
+            <a:avLst/>
+          </a:prstGeom>
+          <a:noFill/>
+        </p:spPr>
+        <p:txBody>
+          <a:bodyPr/>
+          <a:lstStyle/>
+          <a:p>
+            <a:pPr lvl="0" indent="0" marL="0" algn="ctr">
+              <a:buNone/>
+            </a:pPr>
+            <a:r>
+              <a:rPr/>
+              <a:t>Counterfactual cumulative-risk curves with CI bands, full-cohort TMLE.</a:t>
+            </a:r>
+          </a:p>
+        </p:txBody>
+      </p:sp>
+    </p:spTree>
+  </p:cSld>
+</p:sld>
+</file>
+
+<file path=ppt/slides/slide82.xml><?xml version="1.0" encoding="utf-8"?>
+<p:sld xmlns:a="http://schemas.openxmlformats.org/drawingml/2006/main" xmlns:r="http://schemas.openxmlformats.org/officeDocument/2006/relationships" xmlns:p="http://schemas.openxmlformats.org/presentationml/2006/main">
+  <p:cSld>
+    <p:spTree>
+      <p:nvGrpSpPr>
+        <p:cNvPr id="1" name=""/>
+        <p:cNvGrpSpPr/>
+        <p:nvPr/>
+      </p:nvGrpSpPr>
+      <p:grpSpPr>
+        <a:xfrm>
+          <a:off x="0" y="0"/>
+          <a:ext cx="0" cy="0"/>
+          <a:chOff x="0" y="0"/>
+          <a:chExt cx="0" cy="0"/>
+        </a:xfrm>
+      </p:grpSpPr>
+      <p:sp>
+        <p:nvSpPr>
+          <p:cNvPr id="2" name="Title 1"/>
+          <p:cNvSpPr>
+            <a:spLocks noGrp="1"/>
+          </p:cNvSpPr>
+          <p:nvPr>
+            <p:ph type="title"/>
+          </p:nvPr>
+        </p:nvSpPr>
+        <p:spPr/>
+        <p:txBody>
+          <a:bodyPr/>
+          <a:lstStyle/>
+          <a:p>
+            <a:pPr lvl="0" indent="0" marL="0">
+              <a:buNone/>
+            </a:pPr>
+            <a:r>
+              <a:rPr/>
+              <a:t>Kaplan-Meier curves by treatment arm (descriptive)</a:t>
+            </a:r>
+          </a:p>
+        </p:txBody>
+      </p:sp>
+      <p:pic>
+        <p:nvPicPr>
+          <p:cNvPr descr="../rescueCo/results/km_curves.png" id="0" name="Picture 1"/>
+          <p:cNvPicPr>
+            <a:picLocks noGrp="1" noChangeAspect="1"/>
+          </p:cNvPicPr>
+          <p:nvPr/>
+        </p:nvPicPr>
+        <p:blipFill>
+          <a:blip r:embed="rId2"/>
+          <a:stretch>
+            <a:fillRect/>
+          </a:stretch>
+        </p:blipFill>
+        <p:spPr bwMode="auto">
+          <a:xfrm>
+            <a:off x="2260600" y="1193800"/>
+            <a:ext cx="4610100" cy="2882900"/>
+          </a:xfrm>
+          <a:prstGeom prst="rect">
+            <a:avLst/>
+          </a:prstGeom>
+          <a:noFill/>
+          <a:ln w="9525">
+            <a:noFill/>
+            <a:headEnd/>
+            <a:tailEnd/>
+          </a:ln>
+        </p:spPr>
+      </p:pic>
+      <p:sp>
+        <p:nvSpPr>
+          <p:cNvPr id="1" name="TextBox 3"/>
+          <p:cNvSpPr txBox="1"/>
+          <p:nvPr/>
+        </p:nvSpPr>
+        <p:spPr>
+          <a:xfrm>
+            <a:off x="457200" y="4076700"/>
+            <a:ext cx="8229600" cy="508000"/>
+          </a:xfrm>
+          <a:prstGeom prst="rect">
+            <a:avLst/>
+          </a:prstGeom>
+          <a:noFill/>
+        </p:spPr>
+        <p:txBody>
+          <a:bodyPr/>
+          <a:lstStyle/>
+          <a:p>
+            <a:pPr lvl="0" indent="0" marL="0" algn="ctr">
+              <a:buNone/>
+            </a:pPr>
+            <a:r>
+              <a:rPr/>
+              <a:t>KM survival curves by treatment arm; descriptive only.</a:t>
+            </a:r>
+          </a:p>
+        </p:txBody>
+      </p:sp>
+    </p:spTree>
+  </p:cSld>
+</p:sld>
+</file>
+
+<file path=ppt/slides/slide83.xml><?xml version="1.0" encoding="utf-8"?>
+<p:sld xmlns:a="http://schemas.openxmlformats.org/drawingml/2006/main" xmlns:r="http://schemas.openxmlformats.org/officeDocument/2006/relationships" xmlns:p="http://schemas.openxmlformats.org/presentationml/2006/main">
+  <p:cSld>
+    <p:spTree>
+      <p:nvGrpSpPr>
+        <p:cNvPr id="1" name=""/>
+        <p:cNvGrpSpPr/>
+        <p:nvPr/>
+      </p:nvGrpSpPr>
+      <p:grpSpPr>
+        <a:xfrm>
+          <a:off x="0" y="0"/>
+          <a:ext cx="0" cy="0"/>
+          <a:chOff x="0" y="0"/>
+          <a:chExt cx="0" cy="0"/>
+        </a:xfrm>
+      </p:grpSpPr>
+      <p:sp>
+        <p:nvSpPr>
+          <p:cNvPr id="2" name="Title 1"/>
+          <p:cNvSpPr>
+            <a:spLocks noGrp="1"/>
+          </p:cNvSpPr>
+          <p:nvPr>
+            <p:ph type="title"/>
+          </p:nvPr>
+        </p:nvSpPr>
+        <p:spPr>
+          <a:xfrm>
+            <a:off x="722313" y="3305176"/>
+            <a:ext cx="7772400" cy="1021556"/>
+          </a:xfrm>
+        </p:spPr>
+        <p:txBody>
+          <a:bodyPr/>
+          <a:lstStyle/>
+          <a:p>
+            <a:pPr lvl="0" indent="0" marL="0">
+              <a:buNone/>
+            </a:pPr>
+            <a:r>
+              <a:rPr/>
+              <a:t>Appendix D: Helpers and outcome-access taxonomy</a:t>
+            </a:r>
+          </a:p>
+        </p:txBody>
+      </p:sp>
+    </p:spTree>
+  </p:cSld>
+</p:sld>
+</file>
+
+<file path=ppt/slides/slide84.xml><?xml version="1.0" encoding="utf-8"?>
+<p:sld xmlns:a="http://schemas.openxmlformats.org/drawingml/2006/main" xmlns:r="http://schemas.openxmlformats.org/officeDocument/2006/relationships" xmlns:p="http://schemas.openxmlformats.org/presentationml/2006/main">
+  <p:cSld>
+    <p:spTree>
+      <p:nvGrpSpPr>
+        <p:cNvPr id="1" name=""/>
+        <p:cNvGrpSpPr/>
+        <p:nvPr/>
+      </p:nvGrpSpPr>
+      <p:grpSpPr>
+        <a:xfrm>
+          <a:off x="0" y="0"/>
+          <a:ext cx="0" cy="0"/>
+          <a:chOff x="0" y="0"/>
+          <a:chExt cx="0" cy="0"/>
+        </a:xfrm>
+      </p:grpSpPr>
+      <p:sp>
+        <p:nvSpPr>
+          <p:cNvPr id="2" name="Title 1"/>
+          <p:cNvSpPr>
+            <a:spLocks noGrp="1"/>
+          </p:cNvSpPr>
+          <p:nvPr>
+            <p:ph type="title"/>
+          </p:nvPr>
+        </p:nvSpPr>
+        <p:spPr/>
+        <p:txBody>
+          <a:bodyPr/>
+          <a:lstStyle/>
+          <a:p>
+            <a:pPr lvl="0" indent="0" marL="0">
+              <a:buNone/>
+            </a:pPr>
+            <a:r>
+              <a:rPr/>
+              <a:t>Outcome-access taxonomy</a:t>
+            </a:r>
+          </a:p>
+        </p:txBody>
+      </p:sp>
+      <p:graphicFrame>
+        <p:nvGraphicFramePr>
+          <p:cNvPr id="6" name="Content Placeholder 5"/>
+          <p:cNvGraphicFramePr>
+            <a:graphicFrameLocks noGrp="1"/>
+          </p:cNvGraphicFramePr>
+          <p:nvPr>
+            <p:ph idx="1"/>
+          </p:nvPr>
+        </p:nvGraphicFramePr>
+        <p:xfrm>
+          <a:off x="457200" y="1193800"/>
+          <a:ext cx="8229600" cy="3390900"/>
+        </p:xfrm>
+        <a:graphic>
+          <a:graphicData uri="http://schemas.openxmlformats.org/drawingml/2006/table">
+            <a:tbl>
+              <a:tblPr firstRow="1" bandRow="1">
+                <a:tableStyleId>{5C22544A-7EE6-4342-B048-85BDC9FD1C3A}</a:tableStyleId>
+              </a:tblPr>
+              <a:tblGrid>
+                <a:gridCol w="4114800"/>
+                <a:gridCol w="4114800"/>
+              </a:tblGrid>
+              <a:tr h="0">
+                <a:tc>
+                  <a:txBody>
+                    <a:bodyPr/>
+                    <a:lstStyle/>
+                    <a:p>
+                      <a:pPr lvl="0" indent="0" marL="0">
+                        <a:buNone/>
+                      </a:pPr>
+                      <a:r>
+                        <a:rPr/>
+                        <a:t>Label</a:t>
+                      </a:r>
+                    </a:p>
+                  </a:txBody>
+                  <a:tcPr/>
+                </a:tc>
+                <a:tc>
+                  <a:txBody>
+                    <a:bodyPr/>
+                    <a:lstStyle/>
+                    <a:p>
+                      <a:pPr lvl="0" indent="0" marL="0">
+                        <a:buNone/>
+                      </a:pPr>
+                      <a:r>
+                        <a:rPr/>
+                        <a:t>Definition</a:t>
+                      </a:r>
+                    </a:p>
+                  </a:txBody>
+                  <a:tcPr/>
+                </a:tc>
+              </a:tr>
+              <a:tr h="0">
+                <a:tc>
+                  <a:txBody>
+                    <a:bodyPr/>
+                    <a:lstStyle/>
+                    <a:p>
+                      <a:pPr lvl="0" indent="0" marL="0">
+                        <a:buNone/>
+                      </a:pPr>
+                      <a:r>
+                        <a:rPr/>
+                        <a:t>No Y access</a:t>
+                      </a:r>
+                    </a:p>
+                  </a:txBody>
+                </a:tc>
+                <a:tc>
+                  <a:txBody>
+                    <a:bodyPr/>
+                    <a:lstStyle/>
+                    <a:p>
+                      <a:pPr lvl="0" indent="0" marL="0">
+                        <a:buNone/>
+                      </a:pPr>
+                      <a:r>
+                        <a:rPr/>
+                        <a:t>Function uses W, A, metadata, lock objects, synthetic outcomes, or diagnostics not involving Y</a:t>
+                      </a:r>
+                    </a:p>
+                  </a:txBody>
+                </a:tc>
+              </a:tr>
+              <a:tr h="0">
+                <a:tc>
+                  <a:txBody>
+                    <a:bodyPr/>
+                    <a:lstStyle/>
+                    <a:p>
+                      <a:pPr lvl="0" indent="0" marL="0">
+                        <a:buNone/>
+                      </a:pPr>
+                      <a:r>
+                        <a:rPr/>
+                        <a:t>Marginal Y only</a:t>
+                      </a:r>
+                    </a:p>
+                  </a:txBody>
+                </a:tc>
+                <a:tc>
+                  <a:txBody>
+                    <a:bodyPr/>
+                    <a:lstStyle/>
+                    <a:p>
+                      <a:pPr lvl="0" indent="0" marL="0">
+                        <a:buNone/>
+                      </a:pPr>
+                      <a:r>
+                        <a:rPr/>
+                        <a:t>Function uses event counts or marginal outcome support, not the A-Y association</a:t>
+                      </a:r>
+                    </a:p>
+                  </a:txBody>
+                </a:tc>
+              </a:tr>
+              <a:tr h="0">
+                <a:tc>
+                  <a:txBody>
+                    <a:bodyPr/>
+                    <a:lstStyle/>
+                    <a:p>
+                      <a:pPr lvl="0" indent="0" marL="0">
+                        <a:buNone/>
+                      </a:pPr>
+                      <a:r>
+                        <a:rPr/>
+                        <a:t>Synthetic Y only</a:t>
+                      </a:r>
+                    </a:p>
+                  </a:txBody>
+                </a:tc>
+                <a:tc>
+                  <a:txBody>
+                    <a:bodyPr/>
+                    <a:lstStyle/>
+                    <a:p>
+                      <a:pPr lvl="0" indent="0" marL="0">
+                        <a:buNone/>
+                      </a:pPr>
+                      <a:r>
+                        <a:rPr/>
+                        <a:t>Function uses plasmode-generated outcomes</a:t>
+                      </a:r>
+                    </a:p>
+                  </a:txBody>
+                </a:tc>
+              </a:tr>
+              <a:tr h="0">
+                <a:tc>
+                  <a:txBody>
+                    <a:bodyPr/>
+                    <a:lstStyle/>
+                    <a:p>
+                      <a:pPr lvl="0" indent="0" marL="0">
+                        <a:buNone/>
+                      </a:pPr>
+                      <a:r>
+                        <a:rPr/>
+                        <a:t>Negative-control Y only</a:t>
+                      </a:r>
+                    </a:p>
+                  </a:txBody>
+                </a:tc>
+                <a:tc>
+                  <a:txBody>
+                    <a:bodyPr/>
+                    <a:lstStyle/>
+                    <a:p>
+                      <a:pPr lvl="0" indent="0" marL="0">
+                        <a:buNone/>
+                      </a:pPr>
+                      <a:r>
+                        <a:rPr/>
+                        <a:t>Function uses prespecified NC outcomes, not the primary outcome</a:t>
+                      </a:r>
+                    </a:p>
+                  </a:txBody>
+                </a:tc>
+              </a:tr>
+              <a:tr h="0">
+                <a:tc>
+                  <a:txBody>
+                    <a:bodyPr/>
+                    <a:lstStyle/>
+                    <a:p>
+                      <a:pPr lvl="0" indent="0" marL="0">
+                        <a:buNone/>
+                      </a:pPr>
+                      <a:r>
+                        <a:rPr/>
+                        <a:t>Primary Y</a:t>
+                      </a:r>
+                    </a:p>
+                  </a:txBody>
+                </a:tc>
+                <a:tc>
+                  <a:txBody>
+                    <a:bodyPr/>
+                    <a:lstStyle/>
+                    <a:p>
+                      <a:pPr lvl="0" indent="0" marL="0">
+                        <a:buNone/>
+                      </a:pPr>
+                      <a:r>
+                        <a:rPr/>
+                        <a:t>Function uses the observed primary outcome for treatment-effect estimation</a:t>
+                      </a:r>
+                    </a:p>
+                  </a:txBody>
+                </a:tc>
+              </a:tr>
+            </a:tbl>
+          </a:graphicData>
+        </a:graphic>
+      </p:graphicFrame>
+    </p:spTree>
+  </p:cSld>
+</p:sld>
+</file>
+
+<file path=ppt/slides/slide85.xml><?xml version="1.0" encoding="utf-8"?>
+<p:sld xmlns:a="http://schemas.openxmlformats.org/drawingml/2006/main" xmlns:r="http://schemas.openxmlformats.org/officeDocument/2006/relationships" xmlns:p="http://schemas.openxmlformats.org/presentationml/2006/main">
+  <p:cSld>
+    <p:spTree>
+      <p:nvGrpSpPr>
+        <p:cNvPr id="1" name=""/>
+        <p:cNvGrpSpPr/>
+        <p:nvPr/>
+      </p:nvGrpSpPr>
+      <p:grpSpPr>
+        <a:xfrm>
+          <a:off x="0" y="0"/>
+          <a:ext cx="0" cy="0"/>
+          <a:chOff x="0" y="0"/>
+          <a:chExt cx="0" cy="0"/>
+        </a:xfrm>
+      </p:grpSpPr>
+      <p:sp>
+        <p:nvSpPr>
+          <p:cNvPr id="3" name="Content Placeholder 2"/>
+          <p:cNvSpPr>
+            <a:spLocks noGrp="1"/>
+          </p:cNvSpPr>
+          <p:nvPr>
+            <p:ph idx="1"/>
+          </p:nvPr>
+        </p:nvSpPr>
+        <p:spPr/>
+        <p:txBody>
+          <a:bodyPr/>
+          <a:lstStyle/>
+          <a:p>
+            <a:pPr lvl="0" indent="0" marL="0">
+              <a:buNone/>
+            </a:pPr>
+            <a:r>
+              <a:rPr/>
+              <a:t>These labels describe what cleanTMLE exported functions use internally. They do not prevent a user with raw data access from inspecting outcomes outside the package.</a:t>
+            </a:r>
+          </a:p>
+        </p:txBody>
+      </p:sp>
+    </p:spTree>
+  </p:cSld>
+</p:sld>
+</file>
+
+<file path=ppt/slides/slide86.xml><?xml version="1.0" encoding="utf-8"?>
+<p:sld xmlns:a="http://schemas.openxmlformats.org/drawingml/2006/main" xmlns:r="http://schemas.openxmlformats.org/officeDocument/2006/relationships" xmlns:p="http://schemas.openxmlformats.org/presentationml/2006/main">
+  <p:cSld>
+    <p:spTree>
+      <p:nvGrpSpPr>
+        <p:cNvPr id="1" name=""/>
+        <p:cNvGrpSpPr/>
+        <p:nvPr/>
+      </p:nvGrpSpPr>
+      <p:grpSpPr>
+        <a:xfrm>
+          <a:off x="0" y="0"/>
+          <a:ext cx="0" cy="0"/>
+          <a:chOff x="0" y="0"/>
+          <a:chExt cx="0" cy="0"/>
+        </a:xfrm>
+      </p:grpSpPr>
+      <p:sp>
+        <p:nvSpPr>
+          <p:cNvPr id="2" name="Title 1"/>
+          <p:cNvSpPr>
+            <a:spLocks noGrp="1"/>
+          </p:cNvSpPr>
+          <p:nvPr>
+            <p:ph type="title"/>
+          </p:nvPr>
+        </p:nvSpPr>
+        <p:spPr/>
+        <p:txBody>
+          <a:bodyPr/>
+          <a:lstStyle/>
+          <a:p>
+            <a:pPr lvl="0" indent="0" marL="0">
+              <a:buNone/>
+            </a:pPr>
+            <a:r>
+              <a:rPr/>
+              <a:t>Helper functions by dossier component</a:t>
+            </a:r>
+          </a:p>
+        </p:txBody>
+      </p:sp>
+      <p:graphicFrame>
+        <p:nvGraphicFramePr>
+          <p:cNvPr id="6" name="Content Placeholder 5"/>
+          <p:cNvGraphicFramePr>
+            <a:graphicFrameLocks noGrp="1"/>
+          </p:cNvGraphicFramePr>
+          <p:nvPr>
+            <p:ph idx="1"/>
+          </p:nvPr>
+        </p:nvGraphicFramePr>
+        <p:xfrm>
+          <a:off x="457200" y="1193800"/>
+          <a:ext cx="8229600" cy="3390900"/>
+        </p:xfrm>
+        <a:graphic>
+          <a:graphicData uri="http://schemas.openxmlformats.org/drawingml/2006/table">
+            <a:tbl>
+              <a:tblPr firstRow="1" bandRow="1">
+                <a:tableStyleId>{5C22544A-7EE6-4342-B048-85BDC9FD1C3A}</a:tableStyleId>
+              </a:tblPr>
+              <a:tblGrid>
+                <a:gridCol w="2743200"/>
+                <a:gridCol w="2743200"/>
+                <a:gridCol w="2743200"/>
+              </a:tblGrid>
+              <a:tr h="0">
+                <a:tc>
+                  <a:txBody>
+                    <a:bodyPr/>
+                    <a:lstStyle/>
+                    <a:p>
+                      <a:pPr lvl="0" indent="0" marL="0">
+                        <a:buNone/>
+                      </a:pPr>
+                      <a:r>
+                        <a:rPr/>
+                        <a:t>Dossier component</a:t>
+                      </a:r>
+                    </a:p>
+                  </a:txBody>
+                  <a:tcPr/>
+                </a:tc>
+                <a:tc>
+                  <a:txBody>
+                    <a:bodyPr/>
+                    <a:lstStyle/>
+                    <a:p>
+                      <a:pPr lvl="0" indent="0" marL="0">
+                        <a:buNone/>
+                      </a:pPr>
+                      <a:r>
+                        <a:rPr/>
+                        <a:t>cleanTMLE artefact</a:t>
+                      </a:r>
+                    </a:p>
+                  </a:txBody>
+                  <a:tcPr/>
+                </a:tc>
+                <a:tc>
+                  <a:txBody>
+                    <a:bodyPr/>
+                    <a:lstStyle/>
+                    <a:p>
+                      <a:pPr lvl="0" indent="0" marL="0">
+                        <a:buNone/>
+                      </a:pPr>
+                      <a:r>
+                        <a:rPr/>
+                        <a:t>Outcome access</a:t>
+                      </a:r>
+                    </a:p>
+                  </a:txBody>
+                  <a:tcPr/>
+                </a:tc>
+              </a:tr>
+              <a:tr h="0">
+                <a:tc>
+                  <a:txBody>
+                    <a:bodyPr/>
+                    <a:lstStyle/>
+                    <a:p>
+                      <a:pPr lvl="0" indent="0" marL="0">
+                        <a:buNone/>
+                      </a:pPr>
+                      <a:r>
+                        <a:rPr/>
+                        <a:t>Protocol and target-trial timing</a:t>
+                      </a:r>
+                    </a:p>
+                  </a:txBody>
+                </a:tc>
+                <a:tc>
+                  <a:txBody>
+                    <a:bodyPr/>
+                    <a:lstStyle/>
+                    <a:p>
+                      <a:pPr lvl="0" indent="0" marL="0">
+                        <a:buNone/>
+                      </a:pPr>
+                      <a:r>
+                        <a:rPr>
+                          <a:latin typeface="Courier"/>
+                        </a:rPr>
+                        <a:t>attach_estimand()</a:t>
+                      </a:r>
+                    </a:p>
+                  </a:txBody>
+                </a:tc>
+                <a:tc>
+                  <a:txBody>
+                    <a:bodyPr/>
+                    <a:lstStyle/>
+                    <a:p>
+                      <a:pPr lvl="0" indent="0" marL="0">
+                        <a:buNone/>
+                      </a:pPr>
+                      <a:r>
+                        <a:rPr/>
+                        <a:t>No Y</a:t>
+                      </a:r>
+                    </a:p>
+                  </a:txBody>
+                </a:tc>
+              </a:tr>
+              <a:tr h="0">
+                <a:tc>
+                  <a:txBody>
+                    <a:bodyPr/>
+                    <a:lstStyle/>
+                    <a:p>
+                      <a:pPr lvl="0" indent="0" marL="0">
+                        <a:buNone/>
+                      </a:pPr>
+                      <a:r>
+                        <a:rPr/>
+                        <a:t>Cohort flow / attrition</a:t>
+                      </a:r>
+                    </a:p>
+                  </a:txBody>
+                </a:tc>
+                <a:tc>
+                  <a:txBody>
+                    <a:bodyPr/>
+                    <a:lstStyle/>
+                    <a:p>
+                      <a:pPr lvl="0" indent="0" marL="0">
+                        <a:buNone/>
+                      </a:pPr>
+                      <a:r>
+                        <a:rPr>
+                          <a:latin typeface="Courier"/>
+                        </a:rPr>
+                        <a:t>attrition_table()</a:t>
+                      </a:r>
+                    </a:p>
+                  </a:txBody>
+                </a:tc>
+                <a:tc>
+                  <a:txBody>
+                    <a:bodyPr/>
+                    <a:lstStyle/>
+                    <a:p>
+                      <a:pPr lvl="0" indent="0" marL="0">
+                        <a:buNone/>
+                      </a:pPr>
+                      <a:r>
+                        <a:rPr/>
+                        <a:t>No Y</a:t>
+                      </a:r>
+                    </a:p>
+                  </a:txBody>
+                </a:tc>
+              </a:tr>
+              <a:tr h="0">
+                <a:tc>
+                  <a:txBody>
+                    <a:bodyPr/>
+                    <a:lstStyle/>
+                    <a:p>
+                      <a:pPr lvl="0" indent="0" marL="0">
+                        <a:buNone/>
+                      </a:pPr>
+                      <a:r>
+                        <a:rPr/>
+                        <a:t>Event-process classification</a:t>
+                      </a:r>
+                    </a:p>
+                  </a:txBody>
+                </a:tc>
+                <a:tc>
+                  <a:txBody>
+                    <a:bodyPr/>
+                    <a:lstStyle/>
+                    <a:p>
+                      <a:pPr lvl="0" indent="0" marL="0">
+                        <a:buNone/>
+                      </a:pPr>
+                      <a:r>
+                        <a:rPr>
+                          <a:latin typeface="Courier"/>
+                        </a:rPr>
+                        <a:t>clean_event_process_table()</a:t>
+                      </a:r>
+                      <a:r>
+                        <a:rPr/>
+                        <a:t>, </a:t>
+                      </a:r>
+                      <a:r>
+                        <a:rPr>
+                          <a:latin typeface="Courier"/>
+                        </a:rPr>
+                        <a:t>clean_check_event_processes()</a:t>
+                      </a:r>
+                    </a:p>
+                  </a:txBody>
+                </a:tc>
+                <a:tc>
+                  <a:txBody>
+                    <a:bodyPr/>
+                    <a:lstStyle/>
+                    <a:p>
+                      <a:pPr lvl="0" indent="0" marL="0">
+                        <a:buNone/>
+                      </a:pPr>
+                      <a:r>
+                        <a:rPr/>
+                        <a:t>No Y</a:t>
+                      </a:r>
+                    </a:p>
+                  </a:txBody>
+                </a:tc>
+              </a:tr>
+              <a:tr h="0">
+                <a:tc>
+                  <a:txBody>
+                    <a:bodyPr/>
+                    <a:lstStyle/>
+                    <a:p>
+                      <a:pPr lvl="0" indent="0" marL="0">
+                        <a:buNone/>
+                      </a:pPr>
+                      <a:r>
+                        <a:rPr/>
+                        <a:t>Covariate and missingness summary</a:t>
+                      </a:r>
+                    </a:p>
+                  </a:txBody>
+                </a:tc>
+                <a:tc>
+                  <a:txBody>
+                    <a:bodyPr/>
+                    <a:lstStyle/>
+                    <a:p>
+                      <a:pPr lvl="0" indent="0" marL="0">
+                        <a:buNone/>
+                      </a:pPr>
+                      <a:r>
+                        <a:rPr>
+                          <a:latin typeface="Courier"/>
+                        </a:rPr>
+                        <a:t>make_table1()</a:t>
+                      </a:r>
+                      <a:r>
+                        <a:rPr/>
+                        <a:t>, missingness checks</a:t>
+                      </a:r>
+                    </a:p>
+                  </a:txBody>
+                </a:tc>
+                <a:tc>
+                  <a:txBody>
+                    <a:bodyPr/>
+                    <a:lstStyle/>
+                    <a:p>
+                      <a:pPr lvl="0" indent="0" marL="0">
+                        <a:buNone/>
+                      </a:pPr>
+                      <a:r>
+                        <a:rPr/>
+                        <a:t>No Y</a:t>
+                      </a:r>
+                    </a:p>
+                  </a:txBody>
+                </a:tc>
+              </a:tr>
+              <a:tr h="0">
+                <a:tc>
+                  <a:txBody>
+                    <a:bodyPr/>
+                    <a:lstStyle/>
+                    <a:p>
+                      <a:pPr lvl="0" indent="0" marL="0">
+                        <a:buNone/>
+                      </a:pPr>
+                      <a:r>
+                        <a:rPr/>
+                        <a:t>PS overlap and balance</a:t>
+                      </a:r>
+                    </a:p>
+                  </a:txBody>
+                </a:tc>
+                <a:tc>
+                  <a:txBody>
+                    <a:bodyPr/>
+                    <a:lstStyle/>
+                    <a:p>
+                      <a:pPr lvl="0" indent="0" marL="0">
+                        <a:buNone/>
+                      </a:pPr>
+                      <a:r>
+                        <a:rPr>
+                          <a:latin typeface="Courier"/>
+                        </a:rPr>
+                        <a:t>compute_ps_diagnostics()</a:t>
+                      </a:r>
+                      <a:r>
+                        <a:rPr/>
+                        <a:t>, </a:t>
+                      </a:r>
+                      <a:r>
+                        <a:rPr>
+                          <a:latin typeface="Courier"/>
+                        </a:rPr>
+                        <a:t>love_plot()</a:t>
+                      </a:r>
+                      <a:r>
+                        <a:rPr/>
+                        <a:t>, </a:t>
+                      </a:r>
+                      <a:r>
+                        <a:rPr>
+                          <a:latin typeface="Courier"/>
+                        </a:rPr>
+                        <a:t>love_plot_threeway()</a:t>
+                      </a:r>
+                    </a:p>
+                  </a:txBody>
+                </a:tc>
+                <a:tc>
+                  <a:txBody>
+                    <a:bodyPr/>
+                    <a:lstStyle/>
+                    <a:p>
+                      <a:pPr lvl="0" indent="0" marL="0">
+                        <a:buNone/>
+                      </a:pPr>
+                      <a:r>
+                        <a:rPr/>
+                        <a:t>No Y</a:t>
+                      </a:r>
+                    </a:p>
+                  </a:txBody>
+                </a:tc>
+              </a:tr>
+              <a:tr h="0">
+                <a:tc>
+                  <a:txBody>
+                    <a:bodyPr/>
+                    <a:lstStyle/>
+                    <a:p>
+                      <a:pPr lvl="0" indent="0" marL="0">
+                        <a:buNone/>
+                      </a:pPr>
+                      <a:r>
+                        <a:rPr/>
+                        <a:t>Weight diagnostics</a:t>
+                      </a:r>
+                    </a:p>
+                  </a:txBody>
+                </a:tc>
+                <a:tc>
+                  <a:txBody>
+                    <a:bodyPr/>
+                    <a:lstStyle/>
+                    <a:p>
+                      <a:pPr lvl="0" indent="0" marL="0">
+                        <a:buNone/>
+                      </a:pPr>
+                      <a:r>
+                        <a:rPr>
+                          <a:latin typeface="Courier"/>
+                        </a:rPr>
+                        <a:t>clean_weight_diagnostics()</a:t>
+                      </a:r>
+                      <a:r>
+                        <a:rPr/>
+                        <a:t>, </a:t>
+                      </a:r>
+                      <a:r>
+                        <a:rPr>
+                          <a:latin typeface="Courier"/>
+                        </a:rPr>
+                        <a:t>extreme_weights()</a:t>
+                      </a:r>
+                    </a:p>
+                  </a:txBody>
+                </a:tc>
+                <a:tc>
+                  <a:txBody>
+                    <a:bodyPr/>
+                    <a:lstStyle/>
+                    <a:p>
+                      <a:pPr lvl="0" indent="0" marL="0">
+                        <a:buNone/>
+                      </a:pPr>
+                      <a:r>
+                        <a:rPr/>
+                        <a:t>No Y</a:t>
+                      </a:r>
+                    </a:p>
+                  </a:txBody>
+                </a:tc>
+              </a:tr>
+              <a:tr h="0">
+                <a:tc>
+                  <a:txBody>
+                    <a:bodyPr/>
+                    <a:lstStyle/>
+                    <a:p>
+                      <a:pPr lvl="0" indent="0" marL="0">
+                        <a:buNone/>
+                      </a:pPr>
+                      <a:r>
+                        <a:rPr/>
+                        <a:t>Event-count adequacy</a:t>
+                      </a:r>
+                    </a:p>
+                  </a:txBody>
+                </a:tc>
+                <a:tc>
+                  <a:txBody>
+                    <a:bodyPr/>
+                    <a:lstStyle/>
+                    <a:p>
+                      <a:pPr lvl="0" indent="0" marL="0">
+                        <a:buNone/>
+                      </a:pPr>
+                      <a:r>
+                        <a:rPr>
+                          <a:latin typeface="Courier"/>
+                        </a:rPr>
+                        <a:t>checkpoint_cohort_adequacy()</a:t>
+                      </a:r>
+                    </a:p>
+                  </a:txBody>
+                </a:tc>
+                <a:tc>
+                  <a:txBody>
+                    <a:bodyPr/>
+                    <a:lstStyle/>
+                    <a:p>
+                      <a:pPr lvl="0" indent="0" marL="0">
+                        <a:buNone/>
+                      </a:pPr>
+                      <a:r>
+                        <a:rPr/>
+                        <a:t>Marginal Y only</a:t>
+                      </a:r>
+                    </a:p>
+                  </a:txBody>
+                </a:tc>
+              </a:tr>
+              <a:tr h="0">
+                <a:tc>
+                  <a:txBody>
+                    <a:bodyPr/>
+                    <a:lstStyle/>
+                    <a:p>
+                      <a:pPr lvl="0" indent="0" marL="0">
+                        <a:buNone/>
+                      </a:pPr>
+                      <a:r>
+                        <a:rPr/>
+                        <a:t>Baseline plasmode</a:t>
+                      </a:r>
+                    </a:p>
+                  </a:txBody>
+                </a:tc>
+                <a:tc>
+                  <a:txBody>
+                    <a:bodyPr/>
+                    <a:lstStyle/>
+                    <a:p>
+                      <a:pPr lvl="0" indent="0" marL="0">
+                        <a:buNone/>
+                      </a:pPr>
+                      <a:r>
+                        <a:rPr>
+                          <a:latin typeface="Courier"/>
+                        </a:rPr>
+                        <a:t>run_plasmode_feasibility()</a:t>
+                      </a:r>
+                      <a:r>
+                        <a:rPr/>
+                        <a:t>, </a:t>
+                      </a:r>
+                      <a:r>
+                        <a:rPr>
+                          <a:latin typeface="Courier"/>
+                        </a:rPr>
+                        <a:t>select_tmle_candidate()</a:t>
+                      </a:r>
+                    </a:p>
+                  </a:txBody>
+                </a:tc>
+                <a:tc>
+                  <a:txBody>
+                    <a:bodyPr/>
+                    <a:lstStyle/>
+                    <a:p>
+                      <a:pPr lvl="0" indent="0" marL="0">
+                        <a:buNone/>
+                      </a:pPr>
+                      <a:r>
+                        <a:rPr/>
+                        <a:t>Synthetic Y only</a:t>
+                      </a:r>
+                    </a:p>
+                  </a:txBody>
+                </a:tc>
+              </a:tr>
+              <a:tr h="0">
+                <a:tc>
+                  <a:txBody>
+                    <a:bodyPr/>
+                    <a:lstStyle/>
+                    <a:p>
+                      <a:pPr lvl="0" indent="0" marL="0">
+                        <a:buNone/>
+                      </a:pPr>
+                      <a:r>
+                        <a:rPr/>
+                        <a:t>DQ stress test</a:t>
+                      </a:r>
+                    </a:p>
+                  </a:txBody>
+                </a:tc>
+                <a:tc>
+                  <a:txBody>
+                    <a:bodyPr/>
+                    <a:lstStyle/>
+                    <a:p>
+                      <a:pPr lvl="0" indent="0" marL="0">
+                        <a:buNone/>
+                      </a:pPr>
+                      <a:r>
+                        <a:rPr>
+                          <a:latin typeface="Courier"/>
+                        </a:rPr>
+                        <a:t>run_plasmode_dq_stress()</a:t>
+                      </a:r>
+                      <a:r>
+                        <a:rPr/>
+                        <a:t>, </a:t>
+                      </a:r>
+                      <a:r>
+                        <a:rPr>
+                          <a:latin typeface="Courier"/>
+                        </a:rPr>
+                        <a:t>summarize_dq_degradation()</a:t>
+                      </a:r>
+                    </a:p>
+                  </a:txBody>
+                </a:tc>
+                <a:tc>
+                  <a:txBody>
+                    <a:bodyPr/>
+                    <a:lstStyle/>
+                    <a:p>
+                      <a:pPr lvl="0" indent="0" marL="0">
+                        <a:buNone/>
+                      </a:pPr>
+                      <a:r>
+                        <a:rPr/>
+                        <a:t>Synthetic Y only</a:t>
+                      </a:r>
+                    </a:p>
+                  </a:txBody>
+                </a:tc>
+              </a:tr>
+              <a:tr h="0">
+                <a:tc>
+                  <a:txBody>
+                    <a:bodyPr/>
+                    <a:lstStyle/>
+                    <a:p>
+                      <a:pPr lvl="0" indent="0" marL="0">
+                        <a:buNone/>
+                      </a:pPr>
+                      <a:r>
+                        <a:rPr/>
+                        <a:t>Negative controls</a:t>
+                      </a:r>
+                    </a:p>
+                  </a:txBody>
+                </a:tc>
+                <a:tc>
+                  <a:txBody>
+                    <a:bodyPr/>
+                    <a:lstStyle/>
+                    <a:p>
+                      <a:pPr lvl="0" indent="0" marL="0">
+                        <a:buNone/>
+                      </a:pPr>
+                      <a:r>
+                        <a:rPr>
+                          <a:latin typeface="Courier"/>
+                        </a:rPr>
+                        <a:t>run_residual_confounding_stage()</a:t>
+                      </a:r>
+                    </a:p>
+                  </a:txBody>
+                </a:tc>
+                <a:tc>
+                  <a:txBody>
+                    <a:bodyPr/>
+                    <a:lstStyle/>
+                    <a:p>
+                      <a:pPr lvl="0" indent="0" marL="0">
+                        <a:buNone/>
+                      </a:pPr>
+                      <a:r>
+                        <a:rPr/>
+                        <a:t>Negative-control Y only</a:t>
+                      </a:r>
+                    </a:p>
+                  </a:txBody>
+                </a:tc>
+              </a:tr>
+              <a:tr h="0">
+                <a:tc>
+                  <a:txBody>
+                    <a:bodyPr/>
+                    <a:lstStyle/>
+                    <a:p>
+                      <a:pPr lvl="0" indent="0" marL="0">
+                        <a:buNone/>
+                      </a:pPr>
+                      <a:r>
+                        <a:rPr/>
+                        <a:t>Composite gate</a:t>
+                      </a:r>
+                    </a:p>
+                  </a:txBody>
+                </a:tc>
+                <a:tc>
+                  <a:txBody>
+                    <a:bodyPr/>
+                    <a:lstStyle/>
+                    <a:p>
+                      <a:pPr lvl="0" indent="0" marL="0">
+                        <a:buNone/>
+                      </a:pPr>
+                      <a:r>
+                        <a:rPr>
+                          <a:latin typeface="Courier"/>
+                        </a:rPr>
+                        <a:t>gate_all()</a:t>
+                      </a:r>
+                      <a:r>
+                        <a:rPr/>
+                        <a:t> (+ planned </a:t>
+                      </a:r>
+                      <a:r>
+                        <a:rPr>
+                          <a:latin typeface="Courier"/>
+                        </a:rPr>
+                        <a:t>checkpoint_dashboard()</a:t>
+                      </a:r>
+                      <a:r>
+                        <a:rPr/>
+                        <a:t>)</a:t>
+                      </a:r>
+                    </a:p>
+                  </a:txBody>
+                </a:tc>
+                <a:tc>
+                  <a:txBody>
+                    <a:bodyPr/>
+                    <a:lstStyle/>
+                    <a:p>
+                      <a:pPr lvl="0" indent="0" marL="0">
+                        <a:buNone/>
+                      </a:pPr>
+                      <a:r>
+                        <a:rPr/>
+                        <a:t>No Y</a:t>
+                      </a:r>
+                    </a:p>
+                  </a:txBody>
+                </a:tc>
+              </a:tr>
+              <a:tr h="0">
+                <a:tc>
+                  <a:txBody>
+                    <a:bodyPr/>
+                    <a:lstStyle/>
+                    <a:p>
+                      <a:pPr lvl="0" indent="0" marL="0">
+                        <a:buNone/>
+                      </a:pPr>
+                      <a:r>
+                        <a:rPr/>
+                        <a:t>Decision and audit logs</a:t>
+                      </a:r>
+                    </a:p>
+                  </a:txBody>
+                </a:tc>
+                <a:tc>
+                  <a:txBody>
+                    <a:bodyPr/>
+                    <a:lstStyle/>
+                    <a:p>
+                      <a:pPr lvl="0" indent="0" marL="0">
+                        <a:buNone/>
+                      </a:pPr>
+                      <a:r>
+                        <a:rPr>
+                          <a:latin typeface="Courier"/>
+                        </a:rPr>
+                        <a:t>export_decision_log()</a:t>
+                      </a:r>
+                      <a:r>
+                        <a:rPr/>
+                        <a:t>, </a:t>
+                      </a:r>
+                      <a:r>
+                        <a:rPr>
+                          <a:latin typeface="Courier"/>
+                        </a:rPr>
+                        <a:t>save_decision_log()</a:t>
+                      </a:r>
+                    </a:p>
+                  </a:txBody>
+                </a:tc>
+                <a:tc>
+                  <a:txBody>
+                    <a:bodyPr/>
+                    <a:lstStyle/>
+                    <a:p>
+                      <a:pPr lvl="0" indent="0" marL="0">
+                        <a:buNone/>
+                      </a:pPr>
+                      <a:r>
+                        <a:rPr/>
+                        <a:t>No Y</a:t>
+                      </a:r>
+                    </a:p>
+                  </a:txBody>
+                </a:tc>
+              </a:tr>
+              <a:tr h="0">
+                <a:tc>
+                  <a:txBody>
+                    <a:bodyPr/>
+                    <a:lstStyle/>
+                    <a:p>
+                      <a:pPr lvl="0" indent="0" marL="0">
+                        <a:buNone/>
+                      </a:pPr>
+                      <a:r>
+                        <a:rPr/>
+                        <a:t>Authorisation</a:t>
+                      </a:r>
+                    </a:p>
+                  </a:txBody>
+                </a:tc>
+                <a:tc>
+                  <a:txBody>
+                    <a:bodyPr/>
+                    <a:lstStyle/>
+                    <a:p>
+                      <a:pPr lvl="0" indent="0" marL="0">
+                        <a:buNone/>
+                      </a:pPr>
+                      <a:r>
+                        <a:rPr>
+                          <a:latin typeface="Courier"/>
+                        </a:rPr>
+                        <a:t>authorize_outcome_analysis()</a:t>
+                      </a:r>
+                    </a:p>
+                  </a:txBody>
+                </a:tc>
+                <a:tc>
+                  <a:txBody>
+                    <a:bodyPr/>
+                    <a:lstStyle/>
+                    <a:p>
+                      <a:pPr lvl="0" indent="0" marL="0">
+                        <a:buNone/>
+                      </a:pPr>
+                      <a:r>
+                        <a:rPr/>
+                        <a:t>No Y</a:t>
+                      </a:r>
+                    </a:p>
+                  </a:txBody>
+                </a:tc>
+              </a:tr>
+              <a:tr h="0">
+                <a:tc>
+                  <a:txBody>
+                    <a:bodyPr/>
+                    <a:lstStyle/>
+                    <a:p>
+                      <a:pPr lvl="0" indent="0" marL="0">
+                        <a:buNone/>
+                      </a:pPr>
+                      <a:r>
+                        <a:rPr/>
+                        <a:t>Primary analysis</a:t>
+                      </a:r>
+                    </a:p>
+                  </a:txBody>
+                </a:tc>
+                <a:tc>
+                  <a:txBody>
+                    <a:bodyPr/>
+                    <a:lstStyle/>
+                    <a:p>
+                      <a:pPr lvl="0" indent="0" marL="0">
+                        <a:buNone/>
+                      </a:pPr>
+                      <a:r>
+                        <a:rPr>
+                          <a:latin typeface="Courier"/>
+                        </a:rPr>
+                        <a:t>run_clean_tmle()</a:t>
+                      </a:r>
+                      <a:r>
+                        <a:rPr/>
+                        <a:t>, </a:t>
+                      </a:r>
+                      <a:r>
+                        <a:rPr>
+                          <a:latin typeface="Courier"/>
+                        </a:rPr>
+                        <a:t>fit_tmle_*()</a:t>
+                      </a:r>
+                      <a:r>
+                        <a:rPr/>
+                        <a:t> family, </a:t>
+                      </a:r>
+                      <a:r>
+                        <a:rPr>
+                          <a:latin typeface="Courier"/>
+                        </a:rPr>
+                        <a:t>run_ipcw_tmle()</a:t>
+                      </a:r>
+                    </a:p>
+                  </a:txBody>
+                </a:tc>
+                <a:tc>
+                  <a:txBody>
+                    <a:bodyPr/>
+                    <a:lstStyle/>
+                    <a:p>
+                      <a:pPr lvl="0" indent="0" marL="0">
+                        <a:buNone/>
+                      </a:pPr>
+                      <a:r>
+                        <a:rPr/>
+                        <a:t>Primary Y</a:t>
+                      </a:r>
+                    </a:p>
+                  </a:txBody>
+                </a:tc>
+              </a:tr>
+            </a:tbl>
+          </a:graphicData>
+        </a:graphic>
+      </p:graphicFrame>
     </p:spTree>
   </p:cSld>
 </p:sld>

--- a/reports/cleanTMLE_presentation.pptx
+++ b/reports/cleanTMLE_presentation.pptx
@@ -1014,7 +1014,7 @@
           <a:bodyPr anchor="t"/>
           <a:lstStyle>
             <a:lvl1pPr algn="l">
-              <a:defRPr sz="3000" b="1" cap="all"/>
+              <a:defRPr sz="2100" b="1" cap="all"/>
             </a:lvl1pPr>
           </a:lstStyle>
           <a:p>
@@ -1046,7 +1046,7 @@
           <a:lstStyle>
             <a:lvl1pPr marL="0" indent="0">
               <a:buNone/>
-              <a:defRPr sz="1500">
+              <a:defRPr sz="1050">
                 <a:solidFill>
                   <a:schemeClr val="tx1">
                     <a:tint val="75000"/>
@@ -1056,7 +1056,7 @@
             </a:lvl1pPr>
             <a:lvl2pPr marL="342900" indent="0">
               <a:buNone/>
-              <a:defRPr sz="1350">
+              <a:defRPr sz="944">
                 <a:solidFill>
                   <a:schemeClr val="tx1">
                     <a:tint val="75000"/>
@@ -1066,7 +1066,7 @@
             </a:lvl2pPr>
             <a:lvl3pPr marL="685800" indent="0">
               <a:buNone/>
-              <a:defRPr sz="1200">
+              <a:defRPr sz="840">
                 <a:solidFill>
                   <a:schemeClr val="tx1">
                     <a:tint val="75000"/>
@@ -1076,7 +1076,7 @@
             </a:lvl3pPr>
             <a:lvl4pPr marL="1028700" indent="0">
               <a:buNone/>
-              <a:defRPr sz="1050">
+              <a:defRPr sz="800">
                 <a:solidFill>
                   <a:schemeClr val="tx1">
                     <a:tint val="75000"/>
@@ -1086,7 +1086,7 @@
             </a:lvl4pPr>
             <a:lvl5pPr marL="1371600" indent="0">
               <a:buNone/>
-              <a:defRPr sz="1050">
+              <a:defRPr sz="800">
                 <a:solidFill>
                   <a:schemeClr val="tx1">
                     <a:tint val="75000"/>
@@ -1096,7 +1096,7 @@
             </a:lvl5pPr>
             <a:lvl6pPr marL="1714500" indent="0">
               <a:buNone/>
-              <a:defRPr sz="1050">
+              <a:defRPr sz="800">
                 <a:solidFill>
                   <a:schemeClr val="tx1">
                     <a:tint val="75000"/>
@@ -1106,7 +1106,7 @@
             </a:lvl6pPr>
             <a:lvl7pPr marL="2057400" indent="0">
               <a:buNone/>
-              <a:defRPr sz="1050">
+              <a:defRPr sz="800">
                 <a:solidFill>
                   <a:schemeClr val="tx1">
                     <a:tint val="75000"/>
@@ -1116,7 +1116,7 @@
             </a:lvl7pPr>
             <a:lvl8pPr marL="2400300" indent="0">
               <a:buNone/>
-              <a:defRPr sz="1050">
+              <a:defRPr sz="800">
                 <a:solidFill>
                   <a:schemeClr val="tx1">
                     <a:tint val="75000"/>
@@ -1126,7 +1126,7 @@
             </a:lvl8pPr>
             <a:lvl9pPr marL="2743200" indent="0">
               <a:buNone/>
-              <a:defRPr sz="1050">
+              <a:defRPr sz="800">
                 <a:solidFill>
                   <a:schemeClr val="tx1">
                     <a:tint val="75000"/>
@@ -1281,31 +1281,31 @@
           <a:bodyPr/>
           <a:lstStyle>
             <a:lvl1pPr>
-              <a:defRPr sz="2100"/>
+              <a:defRPr sz="1470"/>
             </a:lvl1pPr>
             <a:lvl2pPr>
-              <a:defRPr sz="1800"/>
+              <a:defRPr sz="1260"/>
             </a:lvl2pPr>
             <a:lvl3pPr>
-              <a:defRPr sz="1500"/>
+              <a:defRPr sz="1050"/>
             </a:lvl3pPr>
             <a:lvl4pPr>
-              <a:defRPr sz="1350"/>
+              <a:defRPr sz="944"/>
             </a:lvl4pPr>
             <a:lvl5pPr>
-              <a:defRPr sz="1350"/>
+              <a:defRPr sz="944"/>
             </a:lvl5pPr>
             <a:lvl6pPr>
-              <a:defRPr sz="1350"/>
+              <a:defRPr sz="944"/>
             </a:lvl6pPr>
             <a:lvl7pPr>
-              <a:defRPr sz="1350"/>
+              <a:defRPr sz="944"/>
             </a:lvl7pPr>
             <a:lvl8pPr>
-              <a:defRPr sz="1350"/>
+              <a:defRPr sz="944"/>
             </a:lvl8pPr>
             <a:lvl9pPr>
-              <a:defRPr sz="1350"/>
+              <a:defRPr sz="944"/>
             </a:lvl9pPr>
           </a:lstStyle>
           <a:p>
@@ -1365,31 +1365,31 @@
           <a:bodyPr/>
           <a:lstStyle>
             <a:lvl1pPr>
-              <a:defRPr sz="2100"/>
+              <a:defRPr sz="1470"/>
             </a:lvl1pPr>
             <a:lvl2pPr>
-              <a:defRPr sz="1800"/>
+              <a:defRPr sz="1260"/>
             </a:lvl2pPr>
             <a:lvl3pPr>
-              <a:defRPr sz="1500"/>
+              <a:defRPr sz="1050"/>
             </a:lvl3pPr>
             <a:lvl4pPr>
-              <a:defRPr sz="1350"/>
+              <a:defRPr sz="944"/>
             </a:lvl4pPr>
             <a:lvl5pPr>
-              <a:defRPr sz="1350"/>
+              <a:defRPr sz="944"/>
             </a:lvl5pPr>
             <a:lvl6pPr>
-              <a:defRPr sz="1350"/>
+              <a:defRPr sz="944"/>
             </a:lvl6pPr>
             <a:lvl7pPr>
-              <a:defRPr sz="1350"/>
+              <a:defRPr sz="944"/>
             </a:lvl7pPr>
             <a:lvl8pPr>
-              <a:defRPr sz="1350"/>
+              <a:defRPr sz="944"/>
             </a:lvl8pPr>
             <a:lvl9pPr>
-              <a:defRPr sz="1350"/>
+              <a:defRPr sz="944"/>
             </a:lvl9pPr>
           </a:lstStyle>
           <a:p>
@@ -1571,39 +1571,39 @@
           <a:lstStyle>
             <a:lvl1pPr marL="0" indent="0">
               <a:buNone/>
-              <a:defRPr sz="1800" b="1"/>
+              <a:defRPr sz="1260" b="1"/>
             </a:lvl1pPr>
             <a:lvl2pPr marL="342900" indent="0">
               <a:buNone/>
-              <a:defRPr sz="1500" b="1"/>
+              <a:defRPr sz="1050" b="1"/>
             </a:lvl2pPr>
             <a:lvl3pPr marL="685800" indent="0">
               <a:buNone/>
-              <a:defRPr sz="1350" b="1"/>
+              <a:defRPr sz="944" b="1"/>
             </a:lvl3pPr>
             <a:lvl4pPr marL="1028700" indent="0">
               <a:buNone/>
-              <a:defRPr sz="1200" b="1"/>
+              <a:defRPr sz="840" b="1"/>
             </a:lvl4pPr>
             <a:lvl5pPr marL="1371600" indent="0">
               <a:buNone/>
-              <a:defRPr sz="1200" b="1"/>
+              <a:defRPr sz="840" b="1"/>
             </a:lvl5pPr>
             <a:lvl6pPr marL="1714500" indent="0">
               <a:buNone/>
-              <a:defRPr sz="1200" b="1"/>
+              <a:defRPr sz="840" b="1"/>
             </a:lvl6pPr>
             <a:lvl7pPr marL="2057400" indent="0">
               <a:buNone/>
-              <a:defRPr sz="1200" b="1"/>
+              <a:defRPr sz="840" b="1"/>
             </a:lvl7pPr>
             <a:lvl8pPr marL="2400300" indent="0">
               <a:buNone/>
-              <a:defRPr sz="1200" b="1"/>
+              <a:defRPr sz="840" b="1"/>
             </a:lvl8pPr>
             <a:lvl9pPr marL="2743200" indent="0">
               <a:buNone/>
-              <a:defRPr sz="1200" b="1"/>
+              <a:defRPr sz="840" b="1"/>
             </a:lvl9pPr>
           </a:lstStyle>
           <a:p>
@@ -1635,31 +1635,31 @@
           <a:bodyPr/>
           <a:lstStyle>
             <a:lvl1pPr>
-              <a:defRPr sz="1800"/>
+              <a:defRPr sz="1260"/>
             </a:lvl1pPr>
             <a:lvl2pPr>
-              <a:defRPr sz="1500"/>
+              <a:defRPr sz="1050"/>
             </a:lvl2pPr>
             <a:lvl3pPr>
-              <a:defRPr sz="1350"/>
+              <a:defRPr sz="944"/>
             </a:lvl3pPr>
             <a:lvl4pPr>
-              <a:defRPr sz="1200"/>
+              <a:defRPr sz="840"/>
             </a:lvl4pPr>
             <a:lvl5pPr>
-              <a:defRPr sz="1200"/>
+              <a:defRPr sz="840"/>
             </a:lvl5pPr>
             <a:lvl6pPr>
-              <a:defRPr sz="1200"/>
+              <a:defRPr sz="840"/>
             </a:lvl6pPr>
             <a:lvl7pPr>
-              <a:defRPr sz="1200"/>
+              <a:defRPr sz="840"/>
             </a:lvl7pPr>
             <a:lvl8pPr>
-              <a:defRPr sz="1200"/>
+              <a:defRPr sz="840"/>
             </a:lvl8pPr>
             <a:lvl9pPr>
-              <a:defRPr sz="1200"/>
+              <a:defRPr sz="840"/>
             </a:lvl9pPr>
           </a:lstStyle>
           <a:p>
@@ -1720,39 +1720,39 @@
           <a:lstStyle>
             <a:lvl1pPr marL="0" indent="0">
               <a:buNone/>
-              <a:defRPr sz="1800" b="1"/>
+              <a:defRPr sz="1260" b="1"/>
             </a:lvl1pPr>
             <a:lvl2pPr marL="342900" indent="0">
               <a:buNone/>
-              <a:defRPr sz="1500" b="1"/>
+              <a:defRPr sz="1050" b="1"/>
             </a:lvl2pPr>
             <a:lvl3pPr marL="685800" indent="0">
               <a:buNone/>
-              <a:defRPr sz="1350" b="1"/>
+              <a:defRPr sz="944" b="1"/>
             </a:lvl3pPr>
             <a:lvl4pPr marL="1028700" indent="0">
               <a:buNone/>
-              <a:defRPr sz="1200" b="1"/>
+              <a:defRPr sz="840" b="1"/>
             </a:lvl4pPr>
             <a:lvl5pPr marL="1371600" indent="0">
               <a:buNone/>
-              <a:defRPr sz="1200" b="1"/>
+              <a:defRPr sz="840" b="1"/>
             </a:lvl5pPr>
             <a:lvl6pPr marL="1714500" indent="0">
               <a:buNone/>
-              <a:defRPr sz="1200" b="1"/>
+              <a:defRPr sz="840" b="1"/>
             </a:lvl6pPr>
             <a:lvl7pPr marL="2057400" indent="0">
               <a:buNone/>
-              <a:defRPr sz="1200" b="1"/>
+              <a:defRPr sz="840" b="1"/>
             </a:lvl7pPr>
             <a:lvl8pPr marL="2400300" indent="0">
               <a:buNone/>
-              <a:defRPr sz="1200" b="1"/>
+              <a:defRPr sz="840" b="1"/>
             </a:lvl8pPr>
             <a:lvl9pPr marL="2743200" indent="0">
               <a:buNone/>
-              <a:defRPr sz="1200" b="1"/>
+              <a:defRPr sz="840" b="1"/>
             </a:lvl9pPr>
           </a:lstStyle>
           <a:p>
@@ -1784,31 +1784,31 @@
           <a:bodyPr/>
           <a:lstStyle>
             <a:lvl1pPr>
-              <a:defRPr sz="1800"/>
+              <a:defRPr sz="1260"/>
             </a:lvl1pPr>
             <a:lvl2pPr>
-              <a:defRPr sz="1500"/>
+              <a:defRPr sz="1050"/>
             </a:lvl2pPr>
             <a:lvl3pPr>
-              <a:defRPr sz="1350"/>
+              <a:defRPr sz="944"/>
             </a:lvl3pPr>
             <a:lvl4pPr>
-              <a:defRPr sz="1200"/>
+              <a:defRPr sz="840"/>
             </a:lvl4pPr>
             <a:lvl5pPr>
-              <a:defRPr sz="1200"/>
+              <a:defRPr sz="840"/>
             </a:lvl5pPr>
             <a:lvl6pPr>
-              <a:defRPr sz="1200"/>
+              <a:defRPr sz="840"/>
             </a:lvl6pPr>
             <a:lvl7pPr>
-              <a:defRPr sz="1200"/>
+              <a:defRPr sz="840"/>
             </a:lvl7pPr>
             <a:lvl8pPr>
-              <a:defRPr sz="1200"/>
+              <a:defRPr sz="840"/>
             </a:lvl8pPr>
             <a:lvl9pPr>
-              <a:defRPr sz="1200"/>
+              <a:defRPr sz="840"/>
             </a:lvl9pPr>
           </a:lstStyle>
           <a:p>
@@ -2175,7 +2175,7 @@
           <a:bodyPr anchor="b"/>
           <a:lstStyle>
             <a:lvl1pPr algn="l">
-              <a:defRPr sz="1500" b="1"/>
+              <a:defRPr sz="1050" b="1"/>
             </a:lvl1pPr>
           </a:lstStyle>
           <a:p>
@@ -2206,31 +2206,31 @@
           <a:bodyPr/>
           <a:lstStyle>
             <a:lvl1pPr>
-              <a:defRPr sz="2400"/>
+              <a:defRPr sz="1680"/>
             </a:lvl1pPr>
             <a:lvl2pPr>
-              <a:defRPr sz="2100"/>
+              <a:defRPr sz="1470"/>
             </a:lvl2pPr>
             <a:lvl3pPr>
-              <a:defRPr sz="1800"/>
+              <a:defRPr sz="1260"/>
             </a:lvl3pPr>
             <a:lvl4pPr>
-              <a:defRPr sz="1500"/>
+              <a:defRPr sz="1050"/>
             </a:lvl4pPr>
             <a:lvl5pPr>
-              <a:defRPr sz="1500"/>
+              <a:defRPr sz="1050"/>
             </a:lvl5pPr>
             <a:lvl6pPr>
-              <a:defRPr sz="1500"/>
+              <a:defRPr sz="1050"/>
             </a:lvl6pPr>
             <a:lvl7pPr>
-              <a:defRPr sz="1500"/>
+              <a:defRPr sz="1050"/>
             </a:lvl7pPr>
             <a:lvl8pPr>
-              <a:defRPr sz="1500"/>
+              <a:defRPr sz="1050"/>
             </a:lvl8pPr>
             <a:lvl9pPr>
-              <a:defRPr sz="1500"/>
+              <a:defRPr sz="1050"/>
             </a:lvl9pPr>
           </a:lstStyle>
           <a:p>
@@ -2291,39 +2291,39 @@
           <a:lstStyle>
             <a:lvl1pPr marL="0" indent="0">
               <a:buNone/>
-              <a:defRPr sz="1050"/>
+              <a:defRPr sz="800"/>
             </a:lvl1pPr>
             <a:lvl2pPr marL="342900" indent="0">
               <a:buNone/>
-              <a:defRPr sz="900"/>
+              <a:defRPr sz="800"/>
             </a:lvl2pPr>
             <a:lvl3pPr marL="685800" indent="0">
               <a:buNone/>
-              <a:defRPr sz="750"/>
+              <a:defRPr sz="800"/>
             </a:lvl3pPr>
             <a:lvl4pPr marL="1028700" indent="0">
               <a:buNone/>
-              <a:defRPr sz="675"/>
+              <a:defRPr sz="800"/>
             </a:lvl4pPr>
             <a:lvl5pPr marL="1371600" indent="0">
               <a:buNone/>
-              <a:defRPr sz="675"/>
+              <a:defRPr sz="800"/>
             </a:lvl5pPr>
             <a:lvl6pPr marL="1714500" indent="0">
               <a:buNone/>
-              <a:defRPr sz="675"/>
+              <a:defRPr sz="800"/>
             </a:lvl6pPr>
             <a:lvl7pPr marL="2057400" indent="0">
               <a:buNone/>
-              <a:defRPr sz="675"/>
+              <a:defRPr sz="800"/>
             </a:lvl7pPr>
             <a:lvl8pPr marL="2400300" indent="0">
               <a:buNone/>
-              <a:defRPr sz="675"/>
+              <a:defRPr sz="800"/>
             </a:lvl8pPr>
             <a:lvl9pPr marL="2743200" indent="0">
               <a:buNone/>
-              <a:defRPr sz="675"/>
+              <a:defRPr sz="800"/>
             </a:lvl9pPr>
           </a:lstStyle>
           <a:p>
@@ -2450,7 +2450,7 @@
           <a:bodyPr anchor="b"/>
           <a:lstStyle>
             <a:lvl1pPr algn="l">
-              <a:defRPr sz="1500" b="1"/>
+              <a:defRPr sz="1050" b="1"/>
             </a:lvl1pPr>
           </a:lstStyle>
           <a:p>
@@ -2482,39 +2482,39 @@
           <a:lstStyle>
             <a:lvl1pPr marL="0" indent="0">
               <a:buNone/>
-              <a:defRPr sz="2400"/>
+              <a:defRPr sz="1680"/>
             </a:lvl1pPr>
             <a:lvl2pPr marL="342900" indent="0">
               <a:buNone/>
-              <a:defRPr sz="2100"/>
+              <a:defRPr sz="1470"/>
             </a:lvl2pPr>
             <a:lvl3pPr marL="685800" indent="0">
               <a:buNone/>
-              <a:defRPr sz="1800"/>
+              <a:defRPr sz="1260"/>
             </a:lvl3pPr>
             <a:lvl4pPr marL="1028700" indent="0">
               <a:buNone/>
-              <a:defRPr sz="1500"/>
+              <a:defRPr sz="1050"/>
             </a:lvl4pPr>
             <a:lvl5pPr marL="1371600" indent="0">
               <a:buNone/>
-              <a:defRPr sz="1500"/>
+              <a:defRPr sz="1050"/>
             </a:lvl5pPr>
             <a:lvl6pPr marL="1714500" indent="0">
               <a:buNone/>
-              <a:defRPr sz="1500"/>
+              <a:defRPr sz="1050"/>
             </a:lvl6pPr>
             <a:lvl7pPr marL="2057400" indent="0">
               <a:buNone/>
-              <a:defRPr sz="1500"/>
+              <a:defRPr sz="1050"/>
             </a:lvl7pPr>
             <a:lvl8pPr marL="2400300" indent="0">
               <a:buNone/>
-              <a:defRPr sz="1500"/>
+              <a:defRPr sz="1050"/>
             </a:lvl8pPr>
             <a:lvl9pPr marL="2743200" indent="0">
               <a:buNone/>
-              <a:defRPr sz="1500"/>
+              <a:defRPr sz="1050"/>
             </a:lvl9pPr>
           </a:lstStyle>
           <a:p>
@@ -2543,39 +2543,39 @@
           <a:lstStyle>
             <a:lvl1pPr marL="0" indent="0">
               <a:buNone/>
-              <a:defRPr sz="1050"/>
+              <a:defRPr sz="800"/>
             </a:lvl1pPr>
             <a:lvl2pPr marL="342900" indent="0">
               <a:buNone/>
-              <a:defRPr sz="900"/>
+              <a:defRPr sz="800"/>
             </a:lvl2pPr>
             <a:lvl3pPr marL="685800" indent="0">
               <a:buNone/>
-              <a:defRPr sz="750"/>
+              <a:defRPr sz="800"/>
             </a:lvl3pPr>
             <a:lvl4pPr marL="1028700" indent="0">
               <a:buNone/>
-              <a:defRPr sz="675"/>
+              <a:defRPr sz="800"/>
             </a:lvl4pPr>
             <a:lvl5pPr marL="1371600" indent="0">
               <a:buNone/>
-              <a:defRPr sz="675"/>
+              <a:defRPr sz="800"/>
             </a:lvl5pPr>
             <a:lvl6pPr marL="1714500" indent="0">
               <a:buNone/>
-              <a:defRPr sz="675"/>
+              <a:defRPr sz="800"/>
             </a:lvl6pPr>
             <a:lvl7pPr marL="2057400" indent="0">
               <a:buNone/>
-              <a:defRPr sz="675"/>
+              <a:defRPr sz="800"/>
             </a:lvl7pPr>
             <a:lvl8pPr marL="2400300" indent="0">
               <a:buNone/>
-              <a:defRPr sz="675"/>
+              <a:defRPr sz="800"/>
             </a:lvl8pPr>
             <a:lvl9pPr marL="2743200" indent="0">
               <a:buNone/>
-              <a:defRPr sz="675"/>
+              <a:defRPr sz="800"/>
             </a:lvl9pPr>
           </a:lstStyle>
           <a:p>
@@ -2803,7 +2803,7 @@
           <a:bodyPr anchor="ctr" bIns="45720" lIns="91440" rIns="91440" rtlCol="0" tIns="45720" vert="horz"/>
           <a:lstStyle>
             <a:lvl1pPr algn="l">
-              <a:defRPr sz="900">
+              <a:defRPr sz="800">
                 <a:solidFill>
                   <a:schemeClr val="tx1">
                     <a:tint val="75000"/>
@@ -2844,7 +2844,7 @@
           <a:bodyPr anchor="ctr" bIns="45720" lIns="91440" rIns="91440" rtlCol="0" tIns="45720" vert="horz"/>
           <a:lstStyle>
             <a:lvl1pPr algn="ctr">
-              <a:defRPr sz="900">
+              <a:defRPr sz="800">
                 <a:solidFill>
                   <a:schemeClr val="tx1">
                     <a:tint val="75000"/>
@@ -2881,7 +2881,7 @@
           <a:bodyPr anchor="ctr" bIns="45720" lIns="91440" rIns="91440" rtlCol="0" tIns="45720" vert="horz"/>
           <a:lstStyle>
             <a:lvl1pPr algn="r">
-              <a:defRPr sz="900">
+              <a:defRPr sz="800">
                 <a:solidFill>
                   <a:schemeClr val="tx1">
                     <a:tint val="75000"/>
@@ -2927,7 +2927,7 @@
           <a:spcPct val="0"/>
         </a:spcBef>
         <a:buNone/>
-        <a:defRPr kern="1200" sz="3300">
+        <a:defRPr kern="1200" sz="2310">
           <a:solidFill>
             <a:schemeClr val="tx1"/>
           </a:solidFill>
@@ -2944,7 +2944,7 @@
         </a:spcBef>
         <a:buFont typeface="Arial"/>
         <a:buChar char="•"/>
-        <a:defRPr kern="1200" sz="2400">
+        <a:defRPr kern="1200" sz="1680">
           <a:solidFill>
             <a:schemeClr val="tx1"/>
           </a:solidFill>
@@ -2959,7 +2959,7 @@
         </a:spcBef>
         <a:buFont typeface="Arial"/>
         <a:buChar char="–"/>
-        <a:defRPr kern="1200" sz="2100">
+        <a:defRPr kern="1200" sz="1470">
           <a:solidFill>
             <a:schemeClr val="tx1"/>
           </a:solidFill>
@@ -2974,7 +2974,7 @@
         </a:spcBef>
         <a:buFont typeface="Arial"/>
         <a:buChar char="•"/>
-        <a:defRPr kern="1200" sz="1800">
+        <a:defRPr kern="1200" sz="1260">
           <a:solidFill>
             <a:schemeClr val="tx1"/>
           </a:solidFill>
@@ -2989,7 +2989,7 @@
         </a:spcBef>
         <a:buFont typeface="Arial"/>
         <a:buChar char="–"/>
-        <a:defRPr kern="1200" sz="1500">
+        <a:defRPr kern="1200" sz="1050">
           <a:solidFill>
             <a:schemeClr val="tx1"/>
           </a:solidFill>
@@ -3004,7 +3004,7 @@
         </a:spcBef>
         <a:buFont typeface="Arial"/>
         <a:buChar char="»"/>
-        <a:defRPr kern="1200" sz="1500">
+        <a:defRPr kern="1200" sz="1050">
           <a:solidFill>
             <a:schemeClr val="tx1"/>
           </a:solidFill>
@@ -3019,7 +3019,7 @@
         </a:spcBef>
         <a:buFont typeface="Arial"/>
         <a:buChar char="•"/>
-        <a:defRPr kern="1200" sz="1500">
+        <a:defRPr kern="1200" sz="1050">
           <a:solidFill>
             <a:schemeClr val="tx1"/>
           </a:solidFill>
@@ -3034,7 +3034,7 @@
         </a:spcBef>
         <a:buFont typeface="Arial"/>
         <a:buChar char="•"/>
-        <a:defRPr kern="1200" sz="1500">
+        <a:defRPr kern="1200" sz="1050">
           <a:solidFill>
             <a:schemeClr val="tx1"/>
           </a:solidFill>
@@ -3049,7 +3049,7 @@
         </a:spcBef>
         <a:buFont typeface="Arial"/>
         <a:buChar char="•"/>
-        <a:defRPr kern="1200" sz="1500">
+        <a:defRPr kern="1200" sz="1050">
           <a:solidFill>
             <a:schemeClr val="tx1"/>
           </a:solidFill>
@@ -3064,7 +3064,7 @@
         </a:spcBef>
         <a:buFont typeface="Arial"/>
         <a:buChar char="•"/>
-        <a:defRPr kern="1200" sz="1500">
+        <a:defRPr kern="1200" sz="1050">
           <a:solidFill>
             <a:schemeClr val="tx1"/>
           </a:solidFill>
@@ -3079,7 +3079,7 @@
         <a:defRPr lang="en-US"/>
       </a:defPPr>
       <a:lvl1pPr algn="l" defTabSz="342900" eaLnBrk="1" hangingPunct="1" latinLnBrk="0" marL="0" rtl="0">
-        <a:defRPr kern="1200" sz="1350">
+        <a:defRPr kern="1200" sz="944">
           <a:solidFill>
             <a:schemeClr val="tx1"/>
           </a:solidFill>
@@ -3089,7 +3089,7 @@
         </a:defRPr>
       </a:lvl1pPr>
       <a:lvl2pPr algn="l" defTabSz="342900" eaLnBrk="1" hangingPunct="1" latinLnBrk="0" marL="342900" rtl="0">
-        <a:defRPr kern="1200" sz="1350">
+        <a:defRPr kern="1200" sz="944">
           <a:solidFill>
             <a:schemeClr val="tx1"/>
           </a:solidFill>
@@ -3099,7 +3099,7 @@
         </a:defRPr>
       </a:lvl2pPr>
       <a:lvl3pPr algn="l" defTabSz="342900" eaLnBrk="1" hangingPunct="1" latinLnBrk="0" marL="685800" rtl="0">
-        <a:defRPr kern="1200" sz="1350">
+        <a:defRPr kern="1200" sz="944">
           <a:solidFill>
             <a:schemeClr val="tx1"/>
           </a:solidFill>
@@ -3109,7 +3109,7 @@
         </a:defRPr>
       </a:lvl3pPr>
       <a:lvl4pPr algn="l" defTabSz="342900" eaLnBrk="1" hangingPunct="1" latinLnBrk="0" marL="1028700" rtl="0">
-        <a:defRPr kern="1200" sz="1350">
+        <a:defRPr kern="1200" sz="944">
           <a:solidFill>
             <a:schemeClr val="tx1"/>
           </a:solidFill>
@@ -3119,7 +3119,7 @@
         </a:defRPr>
       </a:lvl4pPr>
       <a:lvl5pPr algn="l" defTabSz="342900" eaLnBrk="1" hangingPunct="1" latinLnBrk="0" marL="1371600" rtl="0">
-        <a:defRPr kern="1200" sz="1350">
+        <a:defRPr kern="1200" sz="944">
           <a:solidFill>
             <a:schemeClr val="tx1"/>
           </a:solidFill>
@@ -3129,7 +3129,7 @@
         </a:defRPr>
       </a:lvl5pPr>
       <a:lvl6pPr algn="l" defTabSz="342900" eaLnBrk="1" hangingPunct="1" latinLnBrk="0" marL="1714500" rtl="0">
-        <a:defRPr kern="1200" sz="1350">
+        <a:defRPr kern="1200" sz="944">
           <a:solidFill>
             <a:schemeClr val="tx1"/>
           </a:solidFill>
@@ -3139,7 +3139,7 @@
         </a:defRPr>
       </a:lvl6pPr>
       <a:lvl7pPr algn="l" defTabSz="342900" eaLnBrk="1" hangingPunct="1" latinLnBrk="0" marL="2057400" rtl="0">
-        <a:defRPr kern="1200" sz="1350">
+        <a:defRPr kern="1200" sz="944">
           <a:solidFill>
             <a:schemeClr val="tx1"/>
           </a:solidFill>
@@ -3149,7 +3149,7 @@
         </a:defRPr>
       </a:lvl7pPr>
       <a:lvl8pPr algn="l" defTabSz="342900" eaLnBrk="1" hangingPunct="1" latinLnBrk="0" marL="2400300" rtl="0">
-        <a:defRPr kern="1200" sz="1350">
+        <a:defRPr kern="1200" sz="944">
           <a:solidFill>
             <a:schemeClr val="tx1"/>
           </a:solidFill>
@@ -3159,7 +3159,7 @@
         </a:defRPr>
       </a:lvl8pPr>
       <a:lvl9pPr algn="l" defTabSz="342900" eaLnBrk="1" hangingPunct="1" latinLnBrk="0" marL="2743200" rtl="0">
-        <a:defRPr kern="1200" sz="1350">
+        <a:defRPr kern="1200" sz="944">
           <a:solidFill>
             <a:schemeClr val="tx1"/>
           </a:solidFill>
@@ -26854,7 +26854,7 @@
       </a:bodyPr>
       <a:lstStyle>
         <a:defPPr algn="ctr">
-          <a:defRPr sz="1000" dirty="0" smtClean="0">
+          <a:defRPr sz="800" dirty="0" smtClean="0">
             <a:latin typeface="Arial" pitchFamily="34" charset="0"/>
             <a:cs typeface="Arial" pitchFamily="34" charset="0"/>
           </a:defRPr>

--- a/reports/cleanTMLE_presentation.pptx
+++ b/reports/cleanTMLE_presentation.pptx
@@ -10019,64 +10019,31 @@
             </a:pPr>
             <a:r>
               <a:rPr/>
-              <a:t>Three things to read from this gap:</a:t>
-            </a:r>
-          </a:p>
-          <a:p>
-            <a:pPr lvl="0"/>
+              <a:t>Under standard assumptions (no effect modification by baseline covariates, adequate overlap), the matched and full-cohort estimators target the </a:t>
+            </a:r>
             <a:r>
               <a:rPr b="1"/>
-              <a:t>The matched estimates are about 0.5 to 1 percentage point smaller</a:t>
-            </a:r>
-            <a:r>
-              <a:rPr/>
-              <a:t> than the full-cohort estimates.</a:t>
-            </a:r>
-          </a:p>
-          <a:p>
-            <a:pPr lvl="0"/>
+              <a:t>same</a:t>
+            </a:r>
+            <a:r>
+              <a:rPr/>
+              <a:t> marginal treatment effect and should agree in expectation. The 0.005 to 0.011 gap here is most plausibly </a:t>
+            </a:r>
             <a:r>
               <a:rPr b="1"/>
-              <a:t>The matched confidence intervals are roughly 50 % wider</a:t>
-            </a:r>
-            <a:r>
-              <a:rPr/>
-              <a:t>, because matching throws away patients outside the overlap region.</a:t>
-            </a:r>
-          </a:p>
-          <a:p>
-            <a:pPr lvl="0"/>
+              <a:t>sampling noise</a:t>
+            </a:r>
+            <a:r>
+              <a:rPr/>
+              <a:t>, with the matched confidence intervals roughly 50 % wider because matching throws away controls (which is also an </a:t>
+            </a:r>
             <a:r>
               <a:rPr b="1"/>
-              <a:t>The matched and full-cohort estimators are not estimates of the same quantity.</a:t>
-            </a:r>
-            <a:r>
-              <a:rPr/>
-              <a:t> Matched estimators target the average effect </a:t>
-            </a:r>
-            <a:r>
-              <a:rPr i="1"/>
-              <a:t>in the matched overlap subset</a:t>
-            </a:r>
-            <a:r>
-              <a:rPr/>
-              <a:t>; full-cohort estimators target the average effect </a:t>
-            </a:r>
-            <a:r>
-              <a:rPr i="1"/>
-              <a:t>in the full eligible cohort</a:t>
-            </a:r>
-            <a:r>
-              <a:rPr/>
-              <a:t>. When overlap is partial, these two target populations differ and the estimates </a:t>
-            </a:r>
-            <a:r>
-              <a:rPr i="1"/>
-              <a:t>should</a:t>
-            </a:r>
-            <a:r>
-              <a:rPr/>
-              <a:t> differ. Whether matched or full-cohort is the right primary depends on which population the study question is about.</a:t>
+              <a:t>efficiency cost</a:t>
+            </a:r>
+            <a:r>
+              <a:rPr/>
+              <a:t>, not a bias signal).</a:t>
             </a:r>
           </a:p>
           <a:p>
@@ -10085,7 +10052,46 @@
             </a:pPr>
             <a:r>
               <a:rPr/>
-              <a:t>In this case study the prespecified primary is the full-cohort TMLE, because the protocol question is about all eligible ambulance patients, not only those whose baseline profile makes them comparable. The matched-cohort row is reported as a sensitivity analysis on a narrower target population.</a:t>
+              <a:t>They would target </a:t>
+            </a:r>
+            <a:r>
+              <a:rPr i="1"/>
+              <a:t>different</a:t>
+            </a:r>
+            <a:r>
+              <a:rPr/>
+              <a:t> causal parameters in two specific situations:</a:t>
+            </a:r>
+          </a:p>
+          <a:p>
+            <a:pPr lvl="0"/>
+            <a:r>
+              <a:rPr b="1"/>
+              <a:t>Effect modification by baseline covariates.</a:t>
+            </a:r>
+            <a:r>
+              <a:rPr/>
+              <a:t> If the Rescue.Co effect were genuinely different in the overlap subset than in the full cohort, the two estimators would converge to different numbers in expectation.</a:t>
+            </a:r>
+          </a:p>
+          <a:p>
+            <a:pPr lvl="0"/>
+            <a:r>
+              <a:rPr b="1"/>
+              <a:t>Positivity strain.</a:t>
+            </a:r>
+            <a:r>
+              <a:rPr/>
+              <a:t> If propensity scores for some patients were near 0 or 1, the marginal full-cohort ATE would not be identifiable without model-based extrapolation, and the matched estimator would be the more conservative target.</a:t>
+            </a:r>
+          </a:p>
+          <a:p>
+            <a:pPr lvl="0" indent="0" marL="0">
+              <a:buNone/>
+            </a:pPr>
+            <a:r>
+              <a:rPr/>
+              <a:t>In rescueCo, propensity scores stayed inside [0.21, 0.81] and the gap is within roughly one standard error of each estimate, so the most parsimonious reading is sampling noise plus the efficiency cost of matching. The prespecified primary is the full-cohort TMLE because the protocol question is about all eligible ambulance patients; the matched-cohort row is a sensitivity analysis showing the answer is robust to the narrower target population.</a:t>
             </a:r>
           </a:p>
         </p:txBody>
